--- a/slides/internet-business-101.pptx
+++ b/slides/internet-business-101.pptx
@@ -28,9 +28,16 @@
     <p:sldId id="276" r:id="rId22"/>
     <p:sldId id="277" r:id="rId23"/>
     <p:sldId id="278" r:id="rId24"/>
+    <p:sldId id="279" r:id="rId25"/>
+    <p:sldId id="280" r:id="rId26"/>
+    <p:sldId id="281" r:id="rId27"/>
+    <p:sldId id="282" r:id="rId28"/>
+    <p:sldId id="283" r:id="rId29"/>
+    <p:sldId id="284" r:id="rId30"/>
+    <p:sldId id="285" r:id="rId31"/>
   </p:sldIdLst>
   <p:notesMasterIdLst>
-    <p:notesMasterId r:id="rId25"/>
+    <p:notesMasterId r:id="rId32"/>
   </p:notesMasterIdLst>
   <p:sldSz cx="9144000" cy="5143500"/>
   <p:notesSz cx="5143500" cy="9144000"/>
@@ -129,13 +136,13 @@
   <p:extLst>
     <p:ext uri="{521415D9-36F7-43E2-AB2F-B90AF26B5E84}">
       <p14:sectionLst xmlns:p14="http://schemas.microsoft.com/office/powerpoint/2010/main">
-        <p14:section name="시작" id="{ba469fb5-c01d-9712-1418-f5ce22a07055}">
+        <p14:section name="시작" id="{993be9e3-f1eb-c74b-f90c-648158245bd9}">
           <p14:sldIdLst>
             <p14:sldId id="256"/>
             <p14:sldId id="257"/>
           </p14:sldIdLst>
         </p14:section>
-        <p14:section name="큰 그림" id="{739f7a62-465a-bf6e-1366-97462fd1b906}">
+        <p14:section name="큰 그림" id="{3b2796d0-1d60-e3ae-b2a1-8f0bed7188ea}">
           <p14:sldIdLst>
             <p14:sldId id="258"/>
             <p14:sldId id="259"/>
@@ -144,13 +151,13 @@
             <p14:sldId id="262"/>
           </p14:sldIdLst>
         </p14:section>
-        <p14:section name="만들기" id="{0f81e159-f2c8-7530-1af1-0d7b8cb0c9e1}">
+        <p14:section name="만들기" id="{e3221399-a844-e0e1-e7fc-6766a838d3df}">
           <p14:sldIdLst>
             <p14:sldId id="263"/>
             <p14:sldId id="264"/>
           </p14:sldIdLst>
         </p14:section>
-        <p14:section name="운영하기" id="{472555bc-3b03-f45b-beb8-1f834ed3ea85}">
+        <p14:section name="운영하기" id="{361b6f21-d1fd-abf4-55ba-dabb88201665}">
           <p14:sldIdLst>
             <p14:sldId id="265"/>
             <p14:sldId id="266"/>
@@ -164,16 +171,27 @@
             <p14:sldId id="274"/>
           </p14:sldIdLst>
         </p14:section>
-        <p14:section name="키우기" id="{53c0864b-eafe-6036-1833-e110e5e882dc}">
+        <p14:section name="키우기" id="{152c18dd-6f3f-757d-3988-9141e2c5503b}">
           <p14:sldIdLst>
             <p14:sldId id="275"/>
             <p14:sldId id="276"/>
           </p14:sldIdLst>
         </p14:section>
-        <p14:section name="실전" id="{5a8d6310-1522-de7b-d56e-853616473cba}">
+        <p14:section name="실전" id="{e65bb268-4382-fd84-8c78-f1fd68ab2e99}">
           <p14:sldIdLst>
             <p14:sldId id="277"/>
+          </p14:sldIdLst>
+        </p14:section>
+        <p14:section name="여러 가지 사이트 사업" id="{ab389907-d15c-6da8-c312-9f40bb87336d}">
+          <p14:sldIdLst>
             <p14:sldId id="278"/>
+            <p14:sldId id="279"/>
+            <p14:sldId id="280"/>
+            <p14:sldId id="281"/>
+            <p14:sldId id="282"/>
+            <p14:sldId id="283"/>
+            <p14:sldId id="284"/>
+            <p14:sldId id="285"/>
           </p14:sldIdLst>
         </p14:section>
       </p14:sectionLst>
@@ -2594,6 +2612,534 @@
 </p:notes>
 </file>
 
+<file path=ppt/notesSlides/notesSlide24.xml><?xml version="1.0" encoding="utf-8"?>
+<p:notes xmlns:a="http://schemas.openxmlformats.org/drawingml/2006/main" xmlns:r="http://schemas.openxmlformats.org/officeDocument/2006/relationships" xmlns:p="http://schemas.openxmlformats.org/presentationml/2006/main">
+  <p:cSld>
+    <p:spTree>
+      <p:nvGrpSpPr>
+        <p:cNvPr id="1" name=""/>
+        <p:cNvGrpSpPr/>
+        <p:nvPr/>
+      </p:nvGrpSpPr>
+      <p:grpSpPr>
+        <a:xfrm>
+          <a:off x="0" y="0"/>
+          <a:ext cx="0" cy="0"/>
+          <a:chOff x="0" y="0"/>
+          <a:chExt cx="0" cy="0"/>
+        </a:xfrm>
+      </p:grpSpPr>
+      <p:sp>
+        <p:nvSpPr>
+          <p:cNvPr id="2" name="Slide Image Placeholder 1"/>
+          <p:cNvSpPr>
+            <a:spLocks noGrp="1" noRot="1" noChangeAspect="1"/>
+          </p:cNvSpPr>
+          <p:nvPr>
+            <p:ph type="sldImg"/>
+          </p:nvPr>
+        </p:nvSpPr>
+        <p:spPr/>
+      </p:sp>
+      <p:sp>
+        <p:nvSpPr>
+          <p:cNvPr id="3" name="Notes Placeholder 2"/>
+          <p:cNvSpPr>
+            <a:spLocks noGrp="1"/>
+          </p:cNvSpPr>
+          <p:nvPr>
+            <p:ph type="body" idx="1"/>
+          </p:nvPr>
+        </p:nvSpPr>
+        <p:spPr/>
+        <p:txBody>
+          <a:bodyPr/>
+          <a:lstStyle/>
+          <a:p>
+            <a:r>
+              <a:rPr lang="en-US" dirty="0"/>
+              <a:t/>
+            </a:r>
+            <a:endParaRPr lang="en-US" dirty="0"/>
+          </a:p>
+        </p:txBody>
+      </p:sp>
+      <p:sp>
+        <p:nvSpPr>
+          <p:cNvPr id="4" name="Slide Number Placeholder 3"/>
+          <p:cNvSpPr>
+            <a:spLocks noGrp="1"/>
+          </p:cNvSpPr>
+          <p:nvPr>
+            <p:ph type="sldNum" sz="quarter" idx="10"/>
+          </p:nvPr>
+        </p:nvSpPr>
+        <p:spPr/>
+        <p:txBody>
+          <a:bodyPr/>
+          <a:lstStyle/>
+          <a:p>
+            <a:fld id="{F7021451-1387-4CA6-816F-3879F97B5CBC}" type="slidenum">
+              <a:rPr lang="en-US"/>
+              <a:t>24</a:t>
+            </a:fld>
+            <a:endParaRPr lang="en-US"/>
+          </a:p>
+        </p:txBody>
+      </p:sp>
+    </p:spTree>
+    <p:extLst>
+      <p:ext uri="{BB962C8B-B14F-4D97-AF65-F5344CB8AC3E}">
+        <p14:creationId xmlns:p14="http://schemas.microsoft.com/office/powerpoint/2010/main" val="1024086991"/>
+      </p:ext>
+    </p:extLst>
+  </p:cSld>
+  <p:clrMapOvr>
+    <a:masterClrMapping/>
+  </p:clrMapOvr>
+</p:notes>
+</file>
+
+<file path=ppt/notesSlides/notesSlide25.xml><?xml version="1.0" encoding="utf-8"?>
+<p:notes xmlns:a="http://schemas.openxmlformats.org/drawingml/2006/main" xmlns:r="http://schemas.openxmlformats.org/officeDocument/2006/relationships" xmlns:p="http://schemas.openxmlformats.org/presentationml/2006/main">
+  <p:cSld>
+    <p:spTree>
+      <p:nvGrpSpPr>
+        <p:cNvPr id="1" name=""/>
+        <p:cNvGrpSpPr/>
+        <p:nvPr/>
+      </p:nvGrpSpPr>
+      <p:grpSpPr>
+        <a:xfrm>
+          <a:off x="0" y="0"/>
+          <a:ext cx="0" cy="0"/>
+          <a:chOff x="0" y="0"/>
+          <a:chExt cx="0" cy="0"/>
+        </a:xfrm>
+      </p:grpSpPr>
+      <p:sp>
+        <p:nvSpPr>
+          <p:cNvPr id="2" name="Slide Image Placeholder 1"/>
+          <p:cNvSpPr>
+            <a:spLocks noGrp="1" noRot="1" noChangeAspect="1"/>
+          </p:cNvSpPr>
+          <p:nvPr>
+            <p:ph type="sldImg"/>
+          </p:nvPr>
+        </p:nvSpPr>
+        <p:spPr/>
+      </p:sp>
+      <p:sp>
+        <p:nvSpPr>
+          <p:cNvPr id="3" name="Notes Placeholder 2"/>
+          <p:cNvSpPr>
+            <a:spLocks noGrp="1"/>
+          </p:cNvSpPr>
+          <p:nvPr>
+            <p:ph type="body" idx="1"/>
+          </p:nvPr>
+        </p:nvSpPr>
+        <p:spPr/>
+        <p:txBody>
+          <a:bodyPr/>
+          <a:lstStyle/>
+          <a:p>
+            <a:r>
+              <a:rPr lang="en-US" dirty="0"/>
+              <a:t/>
+            </a:r>
+            <a:endParaRPr lang="en-US" dirty="0"/>
+          </a:p>
+        </p:txBody>
+      </p:sp>
+      <p:sp>
+        <p:nvSpPr>
+          <p:cNvPr id="4" name="Slide Number Placeholder 3"/>
+          <p:cNvSpPr>
+            <a:spLocks noGrp="1"/>
+          </p:cNvSpPr>
+          <p:nvPr>
+            <p:ph type="sldNum" sz="quarter" idx="10"/>
+          </p:nvPr>
+        </p:nvSpPr>
+        <p:spPr/>
+        <p:txBody>
+          <a:bodyPr/>
+          <a:lstStyle/>
+          <a:p>
+            <a:fld id="{F7021451-1387-4CA6-816F-3879F97B5CBC}" type="slidenum">
+              <a:rPr lang="en-US"/>
+              <a:t>25</a:t>
+            </a:fld>
+            <a:endParaRPr lang="en-US"/>
+          </a:p>
+        </p:txBody>
+      </p:sp>
+    </p:spTree>
+    <p:extLst>
+      <p:ext uri="{BB962C8B-B14F-4D97-AF65-F5344CB8AC3E}">
+        <p14:creationId xmlns:p14="http://schemas.microsoft.com/office/powerpoint/2010/main" val="1024086991"/>
+      </p:ext>
+    </p:extLst>
+  </p:cSld>
+  <p:clrMapOvr>
+    <a:masterClrMapping/>
+  </p:clrMapOvr>
+</p:notes>
+</file>
+
+<file path=ppt/notesSlides/notesSlide26.xml><?xml version="1.0" encoding="utf-8"?>
+<p:notes xmlns:a="http://schemas.openxmlformats.org/drawingml/2006/main" xmlns:r="http://schemas.openxmlformats.org/officeDocument/2006/relationships" xmlns:p="http://schemas.openxmlformats.org/presentationml/2006/main">
+  <p:cSld>
+    <p:spTree>
+      <p:nvGrpSpPr>
+        <p:cNvPr id="1" name=""/>
+        <p:cNvGrpSpPr/>
+        <p:nvPr/>
+      </p:nvGrpSpPr>
+      <p:grpSpPr>
+        <a:xfrm>
+          <a:off x="0" y="0"/>
+          <a:ext cx="0" cy="0"/>
+          <a:chOff x="0" y="0"/>
+          <a:chExt cx="0" cy="0"/>
+        </a:xfrm>
+      </p:grpSpPr>
+      <p:sp>
+        <p:nvSpPr>
+          <p:cNvPr id="2" name="Slide Image Placeholder 1"/>
+          <p:cNvSpPr>
+            <a:spLocks noGrp="1" noRot="1" noChangeAspect="1"/>
+          </p:cNvSpPr>
+          <p:nvPr>
+            <p:ph type="sldImg"/>
+          </p:nvPr>
+        </p:nvSpPr>
+        <p:spPr/>
+      </p:sp>
+      <p:sp>
+        <p:nvSpPr>
+          <p:cNvPr id="3" name="Notes Placeholder 2"/>
+          <p:cNvSpPr>
+            <a:spLocks noGrp="1"/>
+          </p:cNvSpPr>
+          <p:nvPr>
+            <p:ph type="body" idx="1"/>
+          </p:nvPr>
+        </p:nvSpPr>
+        <p:spPr/>
+        <p:txBody>
+          <a:bodyPr/>
+          <a:lstStyle/>
+          <a:p>
+            <a:r>
+              <a:rPr lang="en-US" dirty="0"/>
+              <a:t/>
+            </a:r>
+            <a:endParaRPr lang="en-US" dirty="0"/>
+          </a:p>
+        </p:txBody>
+      </p:sp>
+      <p:sp>
+        <p:nvSpPr>
+          <p:cNvPr id="4" name="Slide Number Placeholder 3"/>
+          <p:cNvSpPr>
+            <a:spLocks noGrp="1"/>
+          </p:cNvSpPr>
+          <p:nvPr>
+            <p:ph type="sldNum" sz="quarter" idx="10"/>
+          </p:nvPr>
+        </p:nvSpPr>
+        <p:spPr/>
+        <p:txBody>
+          <a:bodyPr/>
+          <a:lstStyle/>
+          <a:p>
+            <a:fld id="{F7021451-1387-4CA6-816F-3879F97B5CBC}" type="slidenum">
+              <a:rPr lang="en-US"/>
+              <a:t>26</a:t>
+            </a:fld>
+            <a:endParaRPr lang="en-US"/>
+          </a:p>
+        </p:txBody>
+      </p:sp>
+    </p:spTree>
+    <p:extLst>
+      <p:ext uri="{BB962C8B-B14F-4D97-AF65-F5344CB8AC3E}">
+        <p14:creationId xmlns:p14="http://schemas.microsoft.com/office/powerpoint/2010/main" val="1024086991"/>
+      </p:ext>
+    </p:extLst>
+  </p:cSld>
+  <p:clrMapOvr>
+    <a:masterClrMapping/>
+  </p:clrMapOvr>
+</p:notes>
+</file>
+
+<file path=ppt/notesSlides/notesSlide27.xml><?xml version="1.0" encoding="utf-8"?>
+<p:notes xmlns:a="http://schemas.openxmlformats.org/drawingml/2006/main" xmlns:r="http://schemas.openxmlformats.org/officeDocument/2006/relationships" xmlns:p="http://schemas.openxmlformats.org/presentationml/2006/main">
+  <p:cSld>
+    <p:spTree>
+      <p:nvGrpSpPr>
+        <p:cNvPr id="1" name=""/>
+        <p:cNvGrpSpPr/>
+        <p:nvPr/>
+      </p:nvGrpSpPr>
+      <p:grpSpPr>
+        <a:xfrm>
+          <a:off x="0" y="0"/>
+          <a:ext cx="0" cy="0"/>
+          <a:chOff x="0" y="0"/>
+          <a:chExt cx="0" cy="0"/>
+        </a:xfrm>
+      </p:grpSpPr>
+      <p:sp>
+        <p:nvSpPr>
+          <p:cNvPr id="2" name="Slide Image Placeholder 1"/>
+          <p:cNvSpPr>
+            <a:spLocks noGrp="1" noRot="1" noChangeAspect="1"/>
+          </p:cNvSpPr>
+          <p:nvPr>
+            <p:ph type="sldImg"/>
+          </p:nvPr>
+        </p:nvSpPr>
+        <p:spPr/>
+      </p:sp>
+      <p:sp>
+        <p:nvSpPr>
+          <p:cNvPr id="3" name="Notes Placeholder 2"/>
+          <p:cNvSpPr>
+            <a:spLocks noGrp="1"/>
+          </p:cNvSpPr>
+          <p:nvPr>
+            <p:ph type="body" idx="1"/>
+          </p:nvPr>
+        </p:nvSpPr>
+        <p:spPr/>
+        <p:txBody>
+          <a:bodyPr/>
+          <a:lstStyle/>
+          <a:p>
+            <a:r>
+              <a:rPr lang="en-US" dirty="0"/>
+              <a:t/>
+            </a:r>
+            <a:endParaRPr lang="en-US" dirty="0"/>
+          </a:p>
+        </p:txBody>
+      </p:sp>
+      <p:sp>
+        <p:nvSpPr>
+          <p:cNvPr id="4" name="Slide Number Placeholder 3"/>
+          <p:cNvSpPr>
+            <a:spLocks noGrp="1"/>
+          </p:cNvSpPr>
+          <p:nvPr>
+            <p:ph type="sldNum" sz="quarter" idx="10"/>
+          </p:nvPr>
+        </p:nvSpPr>
+        <p:spPr/>
+        <p:txBody>
+          <a:bodyPr/>
+          <a:lstStyle/>
+          <a:p>
+            <a:fld id="{F7021451-1387-4CA6-816F-3879F97B5CBC}" type="slidenum">
+              <a:rPr lang="en-US"/>
+              <a:t>27</a:t>
+            </a:fld>
+            <a:endParaRPr lang="en-US"/>
+          </a:p>
+        </p:txBody>
+      </p:sp>
+    </p:spTree>
+    <p:extLst>
+      <p:ext uri="{BB962C8B-B14F-4D97-AF65-F5344CB8AC3E}">
+        <p14:creationId xmlns:p14="http://schemas.microsoft.com/office/powerpoint/2010/main" val="1024086991"/>
+      </p:ext>
+    </p:extLst>
+  </p:cSld>
+  <p:clrMapOvr>
+    <a:masterClrMapping/>
+  </p:clrMapOvr>
+</p:notes>
+</file>
+
+<file path=ppt/notesSlides/notesSlide28.xml><?xml version="1.0" encoding="utf-8"?>
+<p:notes xmlns:a="http://schemas.openxmlformats.org/drawingml/2006/main" xmlns:r="http://schemas.openxmlformats.org/officeDocument/2006/relationships" xmlns:p="http://schemas.openxmlformats.org/presentationml/2006/main">
+  <p:cSld>
+    <p:spTree>
+      <p:nvGrpSpPr>
+        <p:cNvPr id="1" name=""/>
+        <p:cNvGrpSpPr/>
+        <p:nvPr/>
+      </p:nvGrpSpPr>
+      <p:grpSpPr>
+        <a:xfrm>
+          <a:off x="0" y="0"/>
+          <a:ext cx="0" cy="0"/>
+          <a:chOff x="0" y="0"/>
+          <a:chExt cx="0" cy="0"/>
+        </a:xfrm>
+      </p:grpSpPr>
+      <p:sp>
+        <p:nvSpPr>
+          <p:cNvPr id="2" name="Slide Image Placeholder 1"/>
+          <p:cNvSpPr>
+            <a:spLocks noGrp="1" noRot="1" noChangeAspect="1"/>
+          </p:cNvSpPr>
+          <p:nvPr>
+            <p:ph type="sldImg"/>
+          </p:nvPr>
+        </p:nvSpPr>
+        <p:spPr/>
+      </p:sp>
+      <p:sp>
+        <p:nvSpPr>
+          <p:cNvPr id="3" name="Notes Placeholder 2"/>
+          <p:cNvSpPr>
+            <a:spLocks noGrp="1"/>
+          </p:cNvSpPr>
+          <p:nvPr>
+            <p:ph type="body" idx="1"/>
+          </p:nvPr>
+        </p:nvSpPr>
+        <p:spPr/>
+        <p:txBody>
+          <a:bodyPr/>
+          <a:lstStyle/>
+          <a:p>
+            <a:r>
+              <a:rPr lang="en-US" dirty="0"/>
+              <a:t/>
+            </a:r>
+            <a:endParaRPr lang="en-US" dirty="0"/>
+          </a:p>
+        </p:txBody>
+      </p:sp>
+      <p:sp>
+        <p:nvSpPr>
+          <p:cNvPr id="4" name="Slide Number Placeholder 3"/>
+          <p:cNvSpPr>
+            <a:spLocks noGrp="1"/>
+          </p:cNvSpPr>
+          <p:nvPr>
+            <p:ph type="sldNum" sz="quarter" idx="10"/>
+          </p:nvPr>
+        </p:nvSpPr>
+        <p:spPr/>
+        <p:txBody>
+          <a:bodyPr/>
+          <a:lstStyle/>
+          <a:p>
+            <a:fld id="{F7021451-1387-4CA6-816F-3879F97B5CBC}" type="slidenum">
+              <a:rPr lang="en-US"/>
+              <a:t>28</a:t>
+            </a:fld>
+            <a:endParaRPr lang="en-US"/>
+          </a:p>
+        </p:txBody>
+      </p:sp>
+    </p:spTree>
+    <p:extLst>
+      <p:ext uri="{BB962C8B-B14F-4D97-AF65-F5344CB8AC3E}">
+        <p14:creationId xmlns:p14="http://schemas.microsoft.com/office/powerpoint/2010/main" val="1024086991"/>
+      </p:ext>
+    </p:extLst>
+  </p:cSld>
+  <p:clrMapOvr>
+    <a:masterClrMapping/>
+  </p:clrMapOvr>
+</p:notes>
+</file>
+
+<file path=ppt/notesSlides/notesSlide29.xml><?xml version="1.0" encoding="utf-8"?>
+<p:notes xmlns:a="http://schemas.openxmlformats.org/drawingml/2006/main" xmlns:r="http://schemas.openxmlformats.org/officeDocument/2006/relationships" xmlns:p="http://schemas.openxmlformats.org/presentationml/2006/main">
+  <p:cSld>
+    <p:spTree>
+      <p:nvGrpSpPr>
+        <p:cNvPr id="1" name=""/>
+        <p:cNvGrpSpPr/>
+        <p:nvPr/>
+      </p:nvGrpSpPr>
+      <p:grpSpPr>
+        <a:xfrm>
+          <a:off x="0" y="0"/>
+          <a:ext cx="0" cy="0"/>
+          <a:chOff x="0" y="0"/>
+          <a:chExt cx="0" cy="0"/>
+        </a:xfrm>
+      </p:grpSpPr>
+      <p:sp>
+        <p:nvSpPr>
+          <p:cNvPr id="2" name="Slide Image Placeholder 1"/>
+          <p:cNvSpPr>
+            <a:spLocks noGrp="1" noRot="1" noChangeAspect="1"/>
+          </p:cNvSpPr>
+          <p:nvPr>
+            <p:ph type="sldImg"/>
+          </p:nvPr>
+        </p:nvSpPr>
+        <p:spPr/>
+      </p:sp>
+      <p:sp>
+        <p:nvSpPr>
+          <p:cNvPr id="3" name="Notes Placeholder 2"/>
+          <p:cNvSpPr>
+            <a:spLocks noGrp="1"/>
+          </p:cNvSpPr>
+          <p:nvPr>
+            <p:ph type="body" idx="1"/>
+          </p:nvPr>
+        </p:nvSpPr>
+        <p:spPr/>
+        <p:txBody>
+          <a:bodyPr/>
+          <a:lstStyle/>
+          <a:p>
+            <a:r>
+              <a:rPr lang="en-US" dirty="0"/>
+              <a:t/>
+            </a:r>
+            <a:endParaRPr lang="en-US" dirty="0"/>
+          </a:p>
+        </p:txBody>
+      </p:sp>
+      <p:sp>
+        <p:nvSpPr>
+          <p:cNvPr id="4" name="Slide Number Placeholder 3"/>
+          <p:cNvSpPr>
+            <a:spLocks noGrp="1"/>
+          </p:cNvSpPr>
+          <p:nvPr>
+            <p:ph type="sldNum" sz="quarter" idx="10"/>
+          </p:nvPr>
+        </p:nvSpPr>
+        <p:spPr/>
+        <p:txBody>
+          <a:bodyPr/>
+          <a:lstStyle/>
+          <a:p>
+            <a:fld id="{F7021451-1387-4CA6-816F-3879F97B5CBC}" type="slidenum">
+              <a:rPr lang="en-US"/>
+              <a:t>29</a:t>
+            </a:fld>
+            <a:endParaRPr lang="en-US"/>
+          </a:p>
+        </p:txBody>
+      </p:sp>
+    </p:spTree>
+    <p:extLst>
+      <p:ext uri="{BB962C8B-B14F-4D97-AF65-F5344CB8AC3E}">
+        <p14:creationId xmlns:p14="http://schemas.microsoft.com/office/powerpoint/2010/main" val="1024086991"/>
+      </p:ext>
+    </p:extLst>
+  </p:cSld>
+  <p:clrMapOvr>
+    <a:masterClrMapping/>
+  </p:clrMapOvr>
+</p:notes>
+</file>
+
 <file path=ppt/notesSlides/notesSlide3.xml><?xml version="1.0" encoding="utf-8"?>
 <p:notes xmlns:a="http://schemas.openxmlformats.org/drawingml/2006/main" xmlns:r="http://schemas.openxmlformats.org/officeDocument/2006/relationships" xmlns:p="http://schemas.openxmlformats.org/presentationml/2006/main">
   <p:cSld>
@@ -2664,6 +3210,94 @@
             <a:fld id="{F7021451-1387-4CA6-816F-3879F97B5CBC}" type="slidenum">
               <a:rPr lang="en-US"/>
               <a:t>3</a:t>
+            </a:fld>
+            <a:endParaRPr lang="en-US"/>
+          </a:p>
+        </p:txBody>
+      </p:sp>
+    </p:spTree>
+    <p:extLst>
+      <p:ext uri="{BB962C8B-B14F-4D97-AF65-F5344CB8AC3E}">
+        <p14:creationId xmlns:p14="http://schemas.microsoft.com/office/powerpoint/2010/main" val="1024086991"/>
+      </p:ext>
+    </p:extLst>
+  </p:cSld>
+  <p:clrMapOvr>
+    <a:masterClrMapping/>
+  </p:clrMapOvr>
+</p:notes>
+</file>
+
+<file path=ppt/notesSlides/notesSlide30.xml><?xml version="1.0" encoding="utf-8"?>
+<p:notes xmlns:a="http://schemas.openxmlformats.org/drawingml/2006/main" xmlns:r="http://schemas.openxmlformats.org/officeDocument/2006/relationships" xmlns:p="http://schemas.openxmlformats.org/presentationml/2006/main">
+  <p:cSld>
+    <p:spTree>
+      <p:nvGrpSpPr>
+        <p:cNvPr id="1" name=""/>
+        <p:cNvGrpSpPr/>
+        <p:nvPr/>
+      </p:nvGrpSpPr>
+      <p:grpSpPr>
+        <a:xfrm>
+          <a:off x="0" y="0"/>
+          <a:ext cx="0" cy="0"/>
+          <a:chOff x="0" y="0"/>
+          <a:chExt cx="0" cy="0"/>
+        </a:xfrm>
+      </p:grpSpPr>
+      <p:sp>
+        <p:nvSpPr>
+          <p:cNvPr id="2" name="Slide Image Placeholder 1"/>
+          <p:cNvSpPr>
+            <a:spLocks noGrp="1" noRot="1" noChangeAspect="1"/>
+          </p:cNvSpPr>
+          <p:nvPr>
+            <p:ph type="sldImg"/>
+          </p:nvPr>
+        </p:nvSpPr>
+        <p:spPr/>
+      </p:sp>
+      <p:sp>
+        <p:nvSpPr>
+          <p:cNvPr id="3" name="Notes Placeholder 2"/>
+          <p:cNvSpPr>
+            <a:spLocks noGrp="1"/>
+          </p:cNvSpPr>
+          <p:nvPr>
+            <p:ph type="body" idx="1"/>
+          </p:nvPr>
+        </p:nvSpPr>
+        <p:spPr/>
+        <p:txBody>
+          <a:bodyPr/>
+          <a:lstStyle/>
+          <a:p>
+            <a:r>
+              <a:rPr lang="en-US" dirty="0"/>
+              <a:t/>
+            </a:r>
+            <a:endParaRPr lang="en-US" dirty="0"/>
+          </a:p>
+        </p:txBody>
+      </p:sp>
+      <p:sp>
+        <p:nvSpPr>
+          <p:cNvPr id="4" name="Slide Number Placeholder 3"/>
+          <p:cNvSpPr>
+            <a:spLocks noGrp="1"/>
+          </p:cNvSpPr>
+          <p:nvPr>
+            <p:ph type="sldNum" sz="quarter" idx="10"/>
+          </p:nvPr>
+        </p:nvSpPr>
+        <p:spPr/>
+        <p:txBody>
+          <a:bodyPr/>
+          <a:lstStyle/>
+          <a:p>
+            <a:fld id="{F7021451-1387-4CA6-816F-3879F97B5CBC}" type="slidenum">
+              <a:rPr lang="en-US"/>
+              <a:t>30</a:t>
             </a:fld>
             <a:endParaRPr lang="en-US"/>
           </a:p>
@@ -15907,7 +16541,7 @@
                   <a:schemeClr val="bg1"/>
                 </a:solidFill>
               </a:rPr>
-              <a:t>안전하게, 자주 반복하기</a:t>
+              <a:t>여러 가지 사이트 사업</a:t>
             </a:r>
             <a:endParaRPr lang="en-US" sz="4000" dirty="0"/>
           </a:p>
@@ -15945,23 +16579,5554 @@
                   <a:schemeClr val="bg2"/>
                 </a:solidFill>
               </a:rPr>
-              <a:t>기획 → 백업 → 연습용 사이트에서 수정 → 확인 → 배포 → 감시 → 숫자 보기 → 다시 기획</a:t>
+              <a:t>커뮤니티 · 정보 사이트 · 트래픽 수익 · 로또 사이트 · 게임(오목) · 아이템 비교 — 16–21장</a:t>
             </a:r>
             <a:endParaRPr lang="en-US" sz="1800" dirty="0"/>
           </a:p>
-          <a:p>
-            <a:pPr algn="l" indent="0" marL="0">
-              <a:buNone/>
-            </a:pPr>
-            <a:r>
-              <a:rPr lang="en-US" sz="1800" dirty="0">
-                <a:solidFill>
-                  <a:schemeClr val="bg2"/>
-                </a:solidFill>
-              </a:rPr>
-              <a:t>다음 할 일: docs/13-practice-scenario.md 를 읽고 15장 퀴즈 풀기</a:t>
-            </a:r>
-            <a:endParaRPr lang="en-US" sz="1800" dirty="0"/>
+        </p:txBody>
+      </p:sp>
+    </p:spTree>
+  </p:cSld>
+  <p:clrMapOvr>
+    <a:masterClrMapping/>
+  </p:clrMapOvr>
+</p:sld>
+</file>
+
+<file path=ppt/slides/slide24.xml><?xml version="1.0" encoding="utf-8"?>
+<p:sld xmlns:a="http://schemas.openxmlformats.org/drawingml/2006/main" xmlns:r="http://schemas.openxmlformats.org/officeDocument/2006/relationships" xmlns:p="http://schemas.openxmlformats.org/presentationml/2006/main">
+  <p:cSld name="Slide 24">
+    <p:spTree>
+      <p:nvGrpSpPr>
+        <p:cNvPr id="1" name=""/>
+        <p:cNvGrpSpPr/>
+        <p:nvPr/>
+      </p:nvGrpSpPr>
+      <p:grpSpPr>
+        <a:xfrm>
+          <a:off x="0" y="0"/>
+          <a:ext cx="0" cy="0"/>
+          <a:chOff x="0" y="0"/>
+          <a:chExt cx="0" cy="0"/>
+        </a:xfrm>
+      </p:grpSpPr>
+      <p:sp>
+        <p:nvSpPr>
+          <p:cNvPr id="2" name="Text 0"/>
+          <p:cNvSpPr/>
+          <p:nvPr>
+            <p:ph idx="100" type="title" hasCustomPrompt="1"/>
+          </p:nvPr>
+        </p:nvSpPr>
+        <p:spPr>
+          <a:xfrm>
+            <a:off x="457200" y="274320"/>
+            <a:ext cx="8229600" cy="685800"/>
+          </a:xfrm>
+          <a:prstGeom prst="rect">
+            <a:avLst/>
+          </a:prstGeom>
+          <a:noFill/>
+          <a:ln/>
+        </p:spPr>
+        <p:txBody>
+          <a:bodyPr wrap="square" lIns="0" tIns="0" rIns="0" bIns="0" rtlCol="0" anchor="ctr"/>
+          <a:lstStyle/>
+          <a:p>
+            <a:pPr indent="0" marL="0">
+              <a:buNone/>
+            </a:pPr>
+            <a:r>
+              <a:rPr lang="en-US" sz="2800" b="1" dirty="0">
+                <a:solidFill>
+                  <a:schemeClr val="tx2"/>
+                </a:solidFill>
+              </a:rPr>
+              <a:t>커뮤니티: 회원이 콘텐츠를 만든다</a:t>
+            </a:r>
+            <a:endParaRPr lang="en-US" sz="2800" dirty="0"/>
+          </a:p>
+        </p:txBody>
+      </p:sp>
+      <p:sp>
+        <p:nvSpPr>
+          <p:cNvPr id="3" name="card"/>
+          <p:cNvSpPr/>
+          <p:nvPr/>
+        </p:nvSpPr>
+        <p:spPr>
+          <a:xfrm>
+            <a:off x="457200" y="1188720"/>
+            <a:ext cx="3291840" cy="914400"/>
+          </a:xfrm>
+          <a:prstGeom prst="roundRect">
+            <a:avLst>
+              <a:gd name="adj" fmla="val 8000"/>
+            </a:avLst>
+          </a:prstGeom>
+          <a:solidFill>
+            <a:schemeClr val="bg2"/>
+          </a:solidFill>
+          <a:ln/>
+        </p:spPr>
+      </p:sp>
+      <p:sp>
+        <p:nvSpPr>
+          <p:cNvPr id="4" name="Text 2"/>
+          <p:cNvSpPr txBox="1"/>
+          <p:nvPr/>
+        </p:nvSpPr>
+        <p:spPr>
+          <a:xfrm>
+            <a:off x="640080" y="1188720"/>
+            <a:ext cx="1188720" cy="914400"/>
+          </a:xfrm>
+          <a:prstGeom prst="rect">
+            <a:avLst/>
+          </a:prstGeom>
+          <a:noFill/>
+          <a:ln/>
+        </p:spPr>
+        <p:txBody>
+          <a:bodyPr wrap="square" lIns="0" tIns="0" rIns="0" bIns="0" rtlCol="0" anchor="ctr"/>
+          <a:lstStyle/>
+          <a:p>
+            <a:pPr indent="0" marL="0">
+              <a:buNone/>
+            </a:pPr>
+            <a:r>
+              <a:rPr lang="en-US" sz="3200" b="1" dirty="0">
+                <a:solidFill>
+                  <a:schemeClr val="accent2"/>
+                </a:solidFill>
+              </a:rPr>
+              <a:t>1%</a:t>
+            </a:r>
+            <a:endParaRPr lang="en-US" sz="3200" dirty="0"/>
+          </a:p>
+        </p:txBody>
+      </p:sp>
+      <p:sp>
+        <p:nvSpPr>
+          <p:cNvPr id="5" name="Text 3"/>
+          <p:cNvSpPr txBox="1"/>
+          <p:nvPr/>
+        </p:nvSpPr>
+        <p:spPr>
+          <a:xfrm>
+            <a:off x="1828800" y="1188720"/>
+            <a:ext cx="1828800" cy="914400"/>
+          </a:xfrm>
+          <a:prstGeom prst="rect">
+            <a:avLst/>
+          </a:prstGeom>
+          <a:noFill/>
+          <a:ln/>
+        </p:spPr>
+        <p:txBody>
+          <a:bodyPr wrap="square" lIns="0" tIns="0" rIns="0" bIns="0" rtlCol="0" anchor="ctr"/>
+          <a:lstStyle/>
+          <a:p>
+            <a:pPr indent="0" marL="0">
+              <a:buNone/>
+            </a:pPr>
+            <a:r>
+              <a:rPr lang="en-US" sz="1500" dirty="0">
+                <a:solidFill>
+                  <a:schemeClr val="tx1"/>
+                </a:solidFill>
+              </a:rPr>
+              <a:t>글을 열심히 쓴다</a:t>
+            </a:r>
+            <a:endParaRPr lang="en-US" sz="1500" dirty="0"/>
+          </a:p>
+        </p:txBody>
+      </p:sp>
+      <p:sp>
+        <p:nvSpPr>
+          <p:cNvPr id="6" name="card"/>
+          <p:cNvSpPr/>
+          <p:nvPr/>
+        </p:nvSpPr>
+        <p:spPr>
+          <a:xfrm>
+            <a:off x="457200" y="2240280"/>
+            <a:ext cx="3291840" cy="914400"/>
+          </a:xfrm>
+          <a:prstGeom prst="roundRect">
+            <a:avLst>
+              <a:gd name="adj" fmla="val 8000"/>
+            </a:avLst>
+          </a:prstGeom>
+          <a:solidFill>
+            <a:schemeClr val="bg2"/>
+          </a:solidFill>
+          <a:ln/>
+        </p:spPr>
+      </p:sp>
+      <p:sp>
+        <p:nvSpPr>
+          <p:cNvPr id="7" name="Text 5"/>
+          <p:cNvSpPr txBox="1"/>
+          <p:nvPr/>
+        </p:nvSpPr>
+        <p:spPr>
+          <a:xfrm>
+            <a:off x="640080" y="2240280"/>
+            <a:ext cx="1188720" cy="914400"/>
+          </a:xfrm>
+          <a:prstGeom prst="rect">
+            <a:avLst/>
+          </a:prstGeom>
+          <a:noFill/>
+          <a:ln/>
+        </p:spPr>
+        <p:txBody>
+          <a:bodyPr wrap="square" lIns="0" tIns="0" rIns="0" bIns="0" rtlCol="0" anchor="ctr"/>
+          <a:lstStyle/>
+          <a:p>
+            <a:pPr indent="0" marL="0">
+              <a:buNone/>
+            </a:pPr>
+            <a:r>
+              <a:rPr lang="en-US" sz="3200" b="1" dirty="0">
+                <a:solidFill>
+                  <a:schemeClr val="tx2"/>
+                </a:solidFill>
+              </a:rPr>
+              <a:t>9%</a:t>
+            </a:r>
+            <a:endParaRPr lang="en-US" sz="3200" dirty="0"/>
+          </a:p>
+        </p:txBody>
+      </p:sp>
+      <p:sp>
+        <p:nvSpPr>
+          <p:cNvPr id="8" name="Text 6"/>
+          <p:cNvSpPr txBox="1"/>
+          <p:nvPr/>
+        </p:nvSpPr>
+        <p:spPr>
+          <a:xfrm>
+            <a:off x="1828800" y="2240280"/>
+            <a:ext cx="1828800" cy="914400"/>
+          </a:xfrm>
+          <a:prstGeom prst="rect">
+            <a:avLst/>
+          </a:prstGeom>
+          <a:noFill/>
+          <a:ln/>
+        </p:spPr>
+        <p:txBody>
+          <a:bodyPr wrap="square" lIns="0" tIns="0" rIns="0" bIns="0" rtlCol="0" anchor="ctr"/>
+          <a:lstStyle/>
+          <a:p>
+            <a:pPr indent="0" marL="0">
+              <a:buNone/>
+            </a:pPr>
+            <a:r>
+              <a:rPr lang="en-US" sz="1500" dirty="0">
+                <a:solidFill>
+                  <a:schemeClr val="tx1"/>
+                </a:solidFill>
+              </a:rPr>
+              <a:t>가끔 댓글을 단다</a:t>
+            </a:r>
+            <a:endParaRPr lang="en-US" sz="1500" dirty="0"/>
+          </a:p>
+        </p:txBody>
+      </p:sp>
+      <p:sp>
+        <p:nvSpPr>
+          <p:cNvPr id="9" name="card"/>
+          <p:cNvSpPr/>
+          <p:nvPr/>
+        </p:nvSpPr>
+        <p:spPr>
+          <a:xfrm>
+            <a:off x="457200" y="3291840"/>
+            <a:ext cx="3291840" cy="914400"/>
+          </a:xfrm>
+          <a:prstGeom prst="roundRect">
+            <a:avLst>
+              <a:gd name="adj" fmla="val 8000"/>
+            </a:avLst>
+          </a:prstGeom>
+          <a:solidFill>
+            <a:schemeClr val="bg2"/>
+          </a:solidFill>
+          <a:ln/>
+        </p:spPr>
+      </p:sp>
+      <p:sp>
+        <p:nvSpPr>
+          <p:cNvPr id="10" name="Text 8"/>
+          <p:cNvSpPr txBox="1"/>
+          <p:nvPr/>
+        </p:nvSpPr>
+        <p:spPr>
+          <a:xfrm>
+            <a:off x="640080" y="3291840"/>
+            <a:ext cx="1188720" cy="914400"/>
+          </a:xfrm>
+          <a:prstGeom prst="rect">
+            <a:avLst/>
+          </a:prstGeom>
+          <a:noFill/>
+          <a:ln/>
+        </p:spPr>
+        <p:txBody>
+          <a:bodyPr wrap="square" lIns="0" tIns="0" rIns="0" bIns="0" rtlCol="0" anchor="ctr"/>
+          <a:lstStyle/>
+          <a:p>
+            <a:pPr indent="0" marL="0">
+              <a:buNone/>
+            </a:pPr>
+            <a:r>
+              <a:rPr lang="en-US" sz="3200" b="1" dirty="0">
+                <a:solidFill>
+                  <a:schemeClr val="accent4"/>
+                </a:solidFill>
+              </a:rPr>
+              <a:t>90%</a:t>
+            </a:r>
+            <a:endParaRPr lang="en-US" sz="3200" dirty="0"/>
+          </a:p>
+        </p:txBody>
+      </p:sp>
+      <p:sp>
+        <p:nvSpPr>
+          <p:cNvPr id="11" name="Text 9"/>
+          <p:cNvSpPr txBox="1"/>
+          <p:nvPr/>
+        </p:nvSpPr>
+        <p:spPr>
+          <a:xfrm>
+            <a:off x="1828800" y="3291840"/>
+            <a:ext cx="1828800" cy="914400"/>
+          </a:xfrm>
+          <a:prstGeom prst="rect">
+            <a:avLst/>
+          </a:prstGeom>
+          <a:noFill/>
+          <a:ln/>
+        </p:spPr>
+        <p:txBody>
+          <a:bodyPr wrap="square" lIns="0" tIns="0" rIns="0" bIns="0" rtlCol="0" anchor="ctr"/>
+          <a:lstStyle/>
+          <a:p>
+            <a:pPr indent="0" marL="0">
+              <a:buNone/>
+            </a:pPr>
+            <a:r>
+              <a:rPr lang="en-US" sz="1500" dirty="0">
+                <a:solidFill>
+                  <a:schemeClr val="tx1"/>
+                </a:solidFill>
+              </a:rPr>
+              <a:t>읽기만 한다</a:t>
+            </a:r>
+            <a:endParaRPr lang="en-US" sz="1500" dirty="0"/>
+          </a:p>
+        </p:txBody>
+      </p:sp>
+      <p:sp>
+        <p:nvSpPr>
+          <p:cNvPr id="12" name="Text 10"/>
+          <p:cNvSpPr txBox="1"/>
+          <p:nvPr/>
+        </p:nvSpPr>
+        <p:spPr>
+          <a:xfrm>
+            <a:off x="4114800" y="1188720"/>
+            <a:ext cx="4572000" cy="365760"/>
+          </a:xfrm>
+          <a:prstGeom prst="rect">
+            <a:avLst/>
+          </a:prstGeom>
+          <a:noFill/>
+          <a:ln/>
+        </p:spPr>
+        <p:txBody>
+          <a:bodyPr wrap="square" lIns="0" tIns="0" rIns="0" bIns="0" rtlCol="0" anchor="t"/>
+          <a:lstStyle/>
+          <a:p>
+            <a:pPr indent="0" marL="0">
+              <a:buNone/>
+            </a:pPr>
+            <a:r>
+              <a:rPr lang="en-US" sz="1600" b="1" dirty="0">
+                <a:solidFill>
+                  <a:schemeClr val="accent2"/>
+                </a:solidFill>
+              </a:rPr>
+              <a:t>운영의 핵심</a:t>
+            </a:r>
+            <a:endParaRPr lang="en-US" sz="1600" dirty="0"/>
+          </a:p>
+        </p:txBody>
+      </p:sp>
+      <p:sp>
+        <p:nvSpPr>
+          <p:cNvPr id="13" name="Text 11"/>
+          <p:cNvSpPr txBox="1"/>
+          <p:nvPr/>
+        </p:nvSpPr>
+        <p:spPr>
+          <a:xfrm>
+            <a:off x="4114800" y="1691640"/>
+            <a:ext cx="4572000" cy="2651760"/>
+          </a:xfrm>
+          <a:prstGeom prst="rect">
+            <a:avLst/>
+          </a:prstGeom>
+          <a:noFill/>
+          <a:ln/>
+        </p:spPr>
+        <p:txBody>
+          <a:bodyPr wrap="square" lIns="0" tIns="0" rIns="0" bIns="0" rtlCol="0" anchor="t"/>
+          <a:lstStyle/>
+          <a:p>
+            <a:pPr marL="342900" indent="-342900">
+              <a:spcAft>
+                <a:spcPts val="1000"/>
+              </a:spcAft>
+              <a:buSzPct val="100000"/>
+              <a:buChar char="•"/>
+            </a:pPr>
+            <a:r>
+              <a:rPr lang="en-US" sz="1400" dirty="0">
+                <a:solidFill>
+                  <a:schemeClr val="tx1"/>
+                </a:solidFill>
+              </a:rPr>
+              <a:t>주제를 좁게, 처음엔 운영자가 직접 글 쓰기</a:t>
+            </a:r>
+            <a:endParaRPr lang="en-US" sz="1400" dirty="0"/>
+          </a:p>
+          <a:p>
+            <a:pPr marL="342900" indent="-342900">
+              <a:spcAft>
+                <a:spcPts val="1000"/>
+              </a:spcAft>
+              <a:buSzPct val="100000"/>
+              <a:buChar char="•"/>
+            </a:pPr>
+            <a:r>
+              <a:rPr lang="en-US" sz="1400" dirty="0">
+                <a:solidFill>
+                  <a:schemeClr val="tx1"/>
+                </a:solidFill>
+              </a:rPr>
+              <a:t>짧고 구체적인 규칙 + 처벌 수준 명시</a:t>
+            </a:r>
+            <a:endParaRPr lang="en-US" sz="1400" dirty="0"/>
+          </a:p>
+          <a:p>
+            <a:pPr marL="342900" indent="-342900">
+              <a:spcAft>
+                <a:spcPts val="1000"/>
+              </a:spcAft>
+              <a:buSzPct val="100000"/>
+              <a:buChar char="•"/>
+            </a:pPr>
+            <a:r>
+              <a:rPr lang="en-US" sz="1400" dirty="0">
+                <a:solidFill>
+                  <a:schemeClr val="tx1"/>
+                </a:solidFill>
+              </a:rPr>
+              <a:t>모든 제재를 기록, 관리자 권한은 최소한만</a:t>
+            </a:r>
+            <a:endParaRPr lang="en-US" sz="1400" dirty="0"/>
+          </a:p>
+          <a:p>
+            <a:pPr marL="342900" indent="-342900">
+              <a:spcAft>
+                <a:spcPts val="1000"/>
+              </a:spcAft>
+              <a:buSzPct val="100000"/>
+              <a:buChar char="•"/>
+            </a:pPr>
+            <a:r>
+              <a:rPr lang="en-US" sz="1400" dirty="0">
+                <a:solidFill>
+                  <a:schemeClr val="tx1"/>
+                </a:solidFill>
+              </a:rPr>
+              <a:t>삭제 요청엔 삭제 또는 임시조치(최대 30일)</a:t>
+            </a:r>
+            <a:endParaRPr lang="en-US" sz="1400" dirty="0"/>
+          </a:p>
+          <a:p>
+            <a:pPr marL="342900" indent="-342900">
+              <a:spcAft>
+                <a:spcPts val="1000"/>
+              </a:spcAft>
+              <a:buSzPct val="100000"/>
+              <a:buChar char="•"/>
+            </a:pPr>
+            <a:r>
+              <a:rPr lang="en-US" sz="1400" dirty="0">
+                <a:solidFill>
+                  <a:schemeClr val="tx1"/>
+                </a:solidFill>
+              </a:rPr>
+              <a:t>수익화는 회원 신뢰를 해치지 않게</a:t>
+            </a:r>
+            <a:endParaRPr lang="en-US" sz="1400" dirty="0"/>
+          </a:p>
+        </p:txBody>
+      </p:sp>
+      <p:sp>
+        <p:nvSpPr>
+          <p:cNvPr id="25" name="Slide Number Placeholder 0"/>
+          <p:cNvSpPr>
+            <a:spLocks noGrp="1"/>
+          </p:cNvSpPr>
+          <p:nvPr>
+            <p:ph type="sldNum" sz="quarter" idx="4294967295"/>
+          </p:nvPr>
+        </p:nvSpPr>
+        <p:spPr>
+          <a:xfrm>
+            <a:off x="8321040" y="4754880"/>
+            <a:ext cx="457200" cy="274320"/>
+          </a:xfrm>
+          <a:prstGeom prst="rect">
+            <a:avLst/>
+          </a:prstGeom>
+          <a:extLst>
+            <a:ext uri="{C572A759-6A51-4108-AA02-DFA0A04FC94B}">
+              <ma14:wrappingTextBoxFlag xmlns:ma14="http://schemas.microsoft.com/office/mac/drawingml/2011/main" val="0"/>
+            </a:ext>
+          </a:extLst>
+        </p:spPr>
+        <p:txBody>
+          <a:bodyPr/>
+          <a:lstStyle>
+            <a:lvl1pPr>
+              <a:defRPr sz="1000">
+                <a:solidFill>
+                  <a:schemeClr val="accent4"/>
+                </a:solidFill>
+              </a:defRPr>
+            </a:lvl1pPr>
+          </a:lstStyle>
+          <a:p>
+            <a:pPr algn="r"/>
+            <a:fld id="{F7021451-1387-4CA6-816F-3879F97B5CBC}" type="slidenum">
+              <a:rPr b="0" lang="en-US"/>
+              <a:t>24</a:t>
+            </a:fld>
+            <a:endParaRPr lang="en-US"/>
+          </a:p>
+        </p:txBody>
+      </p:sp>
+    </p:spTree>
+  </p:cSld>
+  <p:clrMapOvr>
+    <a:masterClrMapping/>
+  </p:clrMapOvr>
+</p:sld>
+</file>
+
+<file path=ppt/slides/slide25.xml><?xml version="1.0" encoding="utf-8"?>
+<p:sld xmlns:a="http://schemas.openxmlformats.org/drawingml/2006/main" xmlns:r="http://schemas.openxmlformats.org/officeDocument/2006/relationships" xmlns:p="http://schemas.openxmlformats.org/presentationml/2006/main">
+  <p:cSld name="Slide 25">
+    <p:spTree>
+      <p:nvGrpSpPr>
+        <p:cNvPr id="1" name=""/>
+        <p:cNvGrpSpPr/>
+        <p:nvPr/>
+      </p:nvGrpSpPr>
+      <p:grpSpPr>
+        <a:xfrm>
+          <a:off x="0" y="0"/>
+          <a:ext cx="0" cy="0"/>
+          <a:chOff x="0" y="0"/>
+          <a:chExt cx="0" cy="0"/>
+        </a:xfrm>
+      </p:grpSpPr>
+      <p:sp>
+        <p:nvSpPr>
+          <p:cNvPr id="2" name="Text 0"/>
+          <p:cNvSpPr/>
+          <p:nvPr>
+            <p:ph idx="100" type="title" hasCustomPrompt="1"/>
+          </p:nvPr>
+        </p:nvSpPr>
+        <p:spPr>
+          <a:xfrm>
+            <a:off x="457200" y="274320"/>
+            <a:ext cx="8229600" cy="685800"/>
+          </a:xfrm>
+          <a:prstGeom prst="rect">
+            <a:avLst/>
+          </a:prstGeom>
+          <a:noFill/>
+          <a:ln/>
+        </p:spPr>
+        <p:txBody>
+          <a:bodyPr wrap="square" lIns="0" tIns="0" rIns="0" bIns="0" rtlCol="0" anchor="ctr"/>
+          <a:lstStyle/>
+          <a:p>
+            <a:pPr indent="0" marL="0">
+              <a:buNone/>
+            </a:pPr>
+            <a:r>
+              <a:rPr lang="en-US" sz="2800" b="1" dirty="0">
+                <a:solidFill>
+                  <a:schemeClr val="tx2"/>
+                </a:solidFill>
+              </a:rPr>
+              <a:t>정보 사이트: 검색 → 답 → 광고·제휴</a:t>
+            </a:r>
+            <a:endParaRPr lang="en-US" sz="2800" dirty="0"/>
+          </a:p>
+        </p:txBody>
+      </p:sp>
+      <p:sp>
+        <p:nvSpPr>
+          <p:cNvPr id="3" name="badge1"/>
+          <p:cNvSpPr/>
+          <p:nvPr/>
+        </p:nvSpPr>
+        <p:spPr>
+          <a:xfrm>
+            <a:off x="1005840" y="1234440"/>
+            <a:ext cx="420624" cy="420624"/>
+          </a:xfrm>
+          <a:prstGeom prst="ellipse">
+            <a:avLst/>
+          </a:prstGeom>
+          <a:solidFill>
+            <a:schemeClr val="tx2"/>
+          </a:solidFill>
+          <a:ln/>
+        </p:spPr>
+      </p:sp>
+      <p:sp>
+        <p:nvSpPr>
+          <p:cNvPr id="4" name="Text 2"/>
+          <p:cNvSpPr txBox="1"/>
+          <p:nvPr/>
+        </p:nvSpPr>
+        <p:spPr>
+          <a:xfrm>
+            <a:off x="1005840" y="1234440"/>
+            <a:ext cx="420624" cy="420624"/>
+          </a:xfrm>
+          <a:prstGeom prst="rect">
+            <a:avLst/>
+          </a:prstGeom>
+          <a:noFill/>
+          <a:ln/>
+        </p:spPr>
+        <p:txBody>
+          <a:bodyPr wrap="square" lIns="0" tIns="0" rIns="0" bIns="0" rtlCol="0" anchor="ctr"/>
+          <a:lstStyle/>
+          <a:p>
+            <a:pPr algn="ctr" indent="0" marL="0">
+              <a:buNone/>
+            </a:pPr>
+            <a:r>
+              <a:rPr lang="en-US" sz="1400" b="1" dirty="0">
+                <a:solidFill>
+                  <a:schemeClr val="bg1"/>
+                </a:solidFill>
+              </a:rPr>
+              <a:t>1</a:t>
+            </a:r>
+            <a:endParaRPr lang="en-US" sz="1400" dirty="0"/>
+          </a:p>
+        </p:txBody>
+      </p:sp>
+      <p:sp>
+        <p:nvSpPr>
+          <p:cNvPr id="5" name="Text 3"/>
+          <p:cNvSpPr txBox="1"/>
+          <p:nvPr/>
+        </p:nvSpPr>
+        <p:spPr>
+          <a:xfrm>
+            <a:off x="457200" y="1737360"/>
+            <a:ext cx="1517904" cy="365760"/>
+          </a:xfrm>
+          <a:prstGeom prst="rect">
+            <a:avLst/>
+          </a:prstGeom>
+          <a:noFill/>
+          <a:ln/>
+        </p:spPr>
+        <p:txBody>
+          <a:bodyPr wrap="square" lIns="0" tIns="0" rIns="0" bIns="0" rtlCol="0" anchor="t"/>
+          <a:lstStyle/>
+          <a:p>
+            <a:pPr algn="ctr" indent="0" marL="0">
+              <a:buNone/>
+            </a:pPr>
+            <a:r>
+              <a:rPr lang="en-US" sz="1300" b="1" dirty="0">
+                <a:solidFill>
+                  <a:schemeClr val="tx1"/>
+                </a:solidFill>
+              </a:rPr>
+              <a:t>검색</a:t>
+            </a:r>
+            <a:endParaRPr lang="en-US" sz="1300" dirty="0"/>
+          </a:p>
+        </p:txBody>
+      </p:sp>
+      <p:sp>
+        <p:nvSpPr>
+          <p:cNvPr id="6" name="flow0"/>
+          <p:cNvSpPr/>
+          <p:nvPr/>
+        </p:nvSpPr>
+        <p:spPr>
+          <a:xfrm>
+            <a:off x="1517904" y="1444752"/>
+            <a:ext cx="1179576" cy="0"/>
+          </a:xfrm>
+          <a:prstGeom prst="line">
+            <a:avLst/>
+          </a:prstGeom>
+          <a:noFill/>
+          <a:ln w="19050">
+            <a:solidFill>
+              <a:schemeClr val="accent4"/>
+            </a:solidFill>
+            <a:prstDash val="solid"/>
+          </a:ln>
+        </p:spPr>
+      </p:sp>
+      <p:sp>
+        <p:nvSpPr>
+          <p:cNvPr id="7" name="badge2"/>
+          <p:cNvSpPr/>
+          <p:nvPr/>
+        </p:nvSpPr>
+        <p:spPr>
+          <a:xfrm>
+            <a:off x="2697480" y="1234440"/>
+            <a:ext cx="420624" cy="420624"/>
+          </a:xfrm>
+          <a:prstGeom prst="ellipse">
+            <a:avLst/>
+          </a:prstGeom>
+          <a:solidFill>
+            <a:schemeClr val="tx2"/>
+          </a:solidFill>
+          <a:ln/>
+        </p:spPr>
+      </p:sp>
+      <p:sp>
+        <p:nvSpPr>
+          <p:cNvPr id="8" name="Text 6"/>
+          <p:cNvSpPr txBox="1"/>
+          <p:nvPr/>
+        </p:nvSpPr>
+        <p:spPr>
+          <a:xfrm>
+            <a:off x="2697480" y="1234440"/>
+            <a:ext cx="420624" cy="420624"/>
+          </a:xfrm>
+          <a:prstGeom prst="rect">
+            <a:avLst/>
+          </a:prstGeom>
+          <a:noFill/>
+          <a:ln/>
+        </p:spPr>
+        <p:txBody>
+          <a:bodyPr wrap="square" lIns="0" tIns="0" rIns="0" bIns="0" rtlCol="0" anchor="ctr"/>
+          <a:lstStyle/>
+          <a:p>
+            <a:pPr algn="ctr" indent="0" marL="0">
+              <a:buNone/>
+            </a:pPr>
+            <a:r>
+              <a:rPr lang="en-US" sz="1400" b="1" dirty="0">
+                <a:solidFill>
+                  <a:schemeClr val="bg1"/>
+                </a:solidFill>
+              </a:rPr>
+              <a:t>2</a:t>
+            </a:r>
+            <a:endParaRPr lang="en-US" sz="1400" dirty="0"/>
+          </a:p>
+        </p:txBody>
+      </p:sp>
+      <p:sp>
+        <p:nvSpPr>
+          <p:cNvPr id="9" name="Text 7"/>
+          <p:cNvSpPr txBox="1"/>
+          <p:nvPr/>
+        </p:nvSpPr>
+        <p:spPr>
+          <a:xfrm>
+            <a:off x="2148840" y="1737360"/>
+            <a:ext cx="1517904" cy="365760"/>
+          </a:xfrm>
+          <a:prstGeom prst="rect">
+            <a:avLst/>
+          </a:prstGeom>
+          <a:noFill/>
+          <a:ln/>
+        </p:spPr>
+        <p:txBody>
+          <a:bodyPr wrap="square" lIns="0" tIns="0" rIns="0" bIns="0" rtlCol="0" anchor="t"/>
+          <a:lstStyle/>
+          <a:p>
+            <a:pPr algn="ctr" indent="0" marL="0">
+              <a:buNone/>
+            </a:pPr>
+            <a:r>
+              <a:rPr lang="en-US" sz="1300" b="1" dirty="0">
+                <a:solidFill>
+                  <a:schemeClr val="tx1"/>
+                </a:solidFill>
+              </a:rPr>
+              <a:t>내 페이지 노출</a:t>
+            </a:r>
+            <a:endParaRPr lang="en-US" sz="1300" dirty="0"/>
+          </a:p>
+        </p:txBody>
+      </p:sp>
+      <p:sp>
+        <p:nvSpPr>
+          <p:cNvPr id="10" name="flow1"/>
+          <p:cNvSpPr/>
+          <p:nvPr/>
+        </p:nvSpPr>
+        <p:spPr>
+          <a:xfrm>
+            <a:off x="3209544" y="1444752"/>
+            <a:ext cx="1179576" cy="0"/>
+          </a:xfrm>
+          <a:prstGeom prst="line">
+            <a:avLst/>
+          </a:prstGeom>
+          <a:noFill/>
+          <a:ln w="19050">
+            <a:solidFill>
+              <a:schemeClr val="accent4"/>
+            </a:solidFill>
+            <a:prstDash val="solid"/>
+          </a:ln>
+        </p:spPr>
+      </p:sp>
+      <p:sp>
+        <p:nvSpPr>
+          <p:cNvPr id="11" name="badge3"/>
+          <p:cNvSpPr/>
+          <p:nvPr/>
+        </p:nvSpPr>
+        <p:spPr>
+          <a:xfrm>
+            <a:off x="4389120" y="1234440"/>
+            <a:ext cx="420624" cy="420624"/>
+          </a:xfrm>
+          <a:prstGeom prst="ellipse">
+            <a:avLst/>
+          </a:prstGeom>
+          <a:solidFill>
+            <a:schemeClr val="tx2"/>
+          </a:solidFill>
+          <a:ln/>
+        </p:spPr>
+      </p:sp>
+      <p:sp>
+        <p:nvSpPr>
+          <p:cNvPr id="12" name="Text 10"/>
+          <p:cNvSpPr txBox="1"/>
+          <p:nvPr/>
+        </p:nvSpPr>
+        <p:spPr>
+          <a:xfrm>
+            <a:off x="4389120" y="1234440"/>
+            <a:ext cx="420624" cy="420624"/>
+          </a:xfrm>
+          <a:prstGeom prst="rect">
+            <a:avLst/>
+          </a:prstGeom>
+          <a:noFill/>
+          <a:ln/>
+        </p:spPr>
+        <p:txBody>
+          <a:bodyPr wrap="square" lIns="0" tIns="0" rIns="0" bIns="0" rtlCol="0" anchor="ctr"/>
+          <a:lstStyle/>
+          <a:p>
+            <a:pPr algn="ctr" indent="0" marL="0">
+              <a:buNone/>
+            </a:pPr>
+            <a:r>
+              <a:rPr lang="en-US" sz="1400" b="1" dirty="0">
+                <a:solidFill>
+                  <a:schemeClr val="bg1"/>
+                </a:solidFill>
+              </a:rPr>
+              <a:t>3</a:t>
+            </a:r>
+            <a:endParaRPr lang="en-US" sz="1400" dirty="0"/>
+          </a:p>
+        </p:txBody>
+      </p:sp>
+      <p:sp>
+        <p:nvSpPr>
+          <p:cNvPr id="13" name="Text 11"/>
+          <p:cNvSpPr txBox="1"/>
+          <p:nvPr/>
+        </p:nvSpPr>
+        <p:spPr>
+          <a:xfrm>
+            <a:off x="3840480" y="1737360"/>
+            <a:ext cx="1517904" cy="365760"/>
+          </a:xfrm>
+          <a:prstGeom prst="rect">
+            <a:avLst/>
+          </a:prstGeom>
+          <a:noFill/>
+          <a:ln/>
+        </p:spPr>
+        <p:txBody>
+          <a:bodyPr wrap="square" lIns="0" tIns="0" rIns="0" bIns="0" rtlCol="0" anchor="t"/>
+          <a:lstStyle/>
+          <a:p>
+            <a:pPr algn="ctr" indent="0" marL="0">
+              <a:buNone/>
+            </a:pPr>
+            <a:r>
+              <a:rPr lang="en-US" sz="1300" b="1" dirty="0">
+                <a:solidFill>
+                  <a:schemeClr val="tx1"/>
+                </a:solidFill>
+              </a:rPr>
+              <a:t>클릭(트래픽)</a:t>
+            </a:r>
+            <a:endParaRPr lang="en-US" sz="1300" dirty="0"/>
+          </a:p>
+        </p:txBody>
+      </p:sp>
+      <p:sp>
+        <p:nvSpPr>
+          <p:cNvPr id="14" name="flow2"/>
+          <p:cNvSpPr/>
+          <p:nvPr/>
+        </p:nvSpPr>
+        <p:spPr>
+          <a:xfrm>
+            <a:off x="4901184" y="1444752"/>
+            <a:ext cx="1179576" cy="0"/>
+          </a:xfrm>
+          <a:prstGeom prst="line">
+            <a:avLst/>
+          </a:prstGeom>
+          <a:noFill/>
+          <a:ln w="19050">
+            <a:solidFill>
+              <a:schemeClr val="accent4"/>
+            </a:solidFill>
+            <a:prstDash val="solid"/>
+          </a:ln>
+        </p:spPr>
+      </p:sp>
+      <p:sp>
+        <p:nvSpPr>
+          <p:cNvPr id="15" name="badge4"/>
+          <p:cNvSpPr/>
+          <p:nvPr/>
+        </p:nvSpPr>
+        <p:spPr>
+          <a:xfrm>
+            <a:off x="6080760" y="1234440"/>
+            <a:ext cx="420624" cy="420624"/>
+          </a:xfrm>
+          <a:prstGeom prst="ellipse">
+            <a:avLst/>
+          </a:prstGeom>
+          <a:solidFill>
+            <a:schemeClr val="accent2"/>
+          </a:solidFill>
+          <a:ln/>
+        </p:spPr>
+      </p:sp>
+      <p:sp>
+        <p:nvSpPr>
+          <p:cNvPr id="16" name="Text 14"/>
+          <p:cNvSpPr txBox="1"/>
+          <p:nvPr/>
+        </p:nvSpPr>
+        <p:spPr>
+          <a:xfrm>
+            <a:off x="6080760" y="1234440"/>
+            <a:ext cx="420624" cy="420624"/>
+          </a:xfrm>
+          <a:prstGeom prst="rect">
+            <a:avLst/>
+          </a:prstGeom>
+          <a:noFill/>
+          <a:ln/>
+        </p:spPr>
+        <p:txBody>
+          <a:bodyPr wrap="square" lIns="0" tIns="0" rIns="0" bIns="0" rtlCol="0" anchor="ctr"/>
+          <a:lstStyle/>
+          <a:p>
+            <a:pPr algn="ctr" indent="0" marL="0">
+              <a:buNone/>
+            </a:pPr>
+            <a:r>
+              <a:rPr lang="en-US" sz="1400" b="1" dirty="0">
+                <a:solidFill>
+                  <a:schemeClr val="bg1"/>
+                </a:solidFill>
+              </a:rPr>
+              <a:t>4</a:t>
+            </a:r>
+            <a:endParaRPr lang="en-US" sz="1400" dirty="0"/>
+          </a:p>
+        </p:txBody>
+      </p:sp>
+      <p:sp>
+        <p:nvSpPr>
+          <p:cNvPr id="17" name="Text 15"/>
+          <p:cNvSpPr txBox="1"/>
+          <p:nvPr/>
+        </p:nvSpPr>
+        <p:spPr>
+          <a:xfrm>
+            <a:off x="5532120" y="1737360"/>
+            <a:ext cx="1517904" cy="365760"/>
+          </a:xfrm>
+          <a:prstGeom prst="rect">
+            <a:avLst/>
+          </a:prstGeom>
+          <a:noFill/>
+          <a:ln/>
+        </p:spPr>
+        <p:txBody>
+          <a:bodyPr wrap="square" lIns="0" tIns="0" rIns="0" bIns="0" rtlCol="0" anchor="t"/>
+          <a:lstStyle/>
+          <a:p>
+            <a:pPr algn="ctr" indent="0" marL="0">
+              <a:buNone/>
+            </a:pPr>
+            <a:r>
+              <a:rPr lang="en-US" sz="1300" b="1" dirty="0">
+                <a:solidFill>
+                  <a:schemeClr val="tx1"/>
+                </a:solidFill>
+              </a:rPr>
+              <a:t>답 + 광고</a:t>
+            </a:r>
+            <a:endParaRPr lang="en-US" sz="1300" dirty="0"/>
+          </a:p>
+        </p:txBody>
+      </p:sp>
+      <p:sp>
+        <p:nvSpPr>
+          <p:cNvPr id="18" name="flow3"/>
+          <p:cNvSpPr/>
+          <p:nvPr/>
+        </p:nvSpPr>
+        <p:spPr>
+          <a:xfrm>
+            <a:off x="6592824" y="1444752"/>
+            <a:ext cx="1179576" cy="0"/>
+          </a:xfrm>
+          <a:prstGeom prst="line">
+            <a:avLst/>
+          </a:prstGeom>
+          <a:noFill/>
+          <a:ln w="19050">
+            <a:solidFill>
+              <a:schemeClr val="accent4"/>
+            </a:solidFill>
+            <a:prstDash val="solid"/>
+          </a:ln>
+        </p:spPr>
+      </p:sp>
+      <p:sp>
+        <p:nvSpPr>
+          <p:cNvPr id="19" name="badge5"/>
+          <p:cNvSpPr/>
+          <p:nvPr/>
+        </p:nvSpPr>
+        <p:spPr>
+          <a:xfrm>
+            <a:off x="7772400" y="1234440"/>
+            <a:ext cx="420624" cy="420624"/>
+          </a:xfrm>
+          <a:prstGeom prst="ellipse">
+            <a:avLst/>
+          </a:prstGeom>
+          <a:solidFill>
+            <a:schemeClr val="tx2"/>
+          </a:solidFill>
+          <a:ln/>
+        </p:spPr>
+      </p:sp>
+      <p:sp>
+        <p:nvSpPr>
+          <p:cNvPr id="20" name="Text 18"/>
+          <p:cNvSpPr txBox="1"/>
+          <p:nvPr/>
+        </p:nvSpPr>
+        <p:spPr>
+          <a:xfrm>
+            <a:off x="7772400" y="1234440"/>
+            <a:ext cx="420624" cy="420624"/>
+          </a:xfrm>
+          <a:prstGeom prst="rect">
+            <a:avLst/>
+          </a:prstGeom>
+          <a:noFill/>
+          <a:ln/>
+        </p:spPr>
+        <p:txBody>
+          <a:bodyPr wrap="square" lIns="0" tIns="0" rIns="0" bIns="0" rtlCol="0" anchor="ctr"/>
+          <a:lstStyle/>
+          <a:p>
+            <a:pPr algn="ctr" indent="0" marL="0">
+              <a:buNone/>
+            </a:pPr>
+            <a:r>
+              <a:rPr lang="en-US" sz="1400" b="1" dirty="0">
+                <a:solidFill>
+                  <a:schemeClr val="bg1"/>
+                </a:solidFill>
+              </a:rPr>
+              <a:t>5</a:t>
+            </a:r>
+            <a:endParaRPr lang="en-US" sz="1400" dirty="0"/>
+          </a:p>
+        </p:txBody>
+      </p:sp>
+      <p:sp>
+        <p:nvSpPr>
+          <p:cNvPr id="21" name="Text 19"/>
+          <p:cNvSpPr txBox="1"/>
+          <p:nvPr/>
+        </p:nvSpPr>
+        <p:spPr>
+          <a:xfrm>
+            <a:off x="7223760" y="1737360"/>
+            <a:ext cx="1517904" cy="365760"/>
+          </a:xfrm>
+          <a:prstGeom prst="rect">
+            <a:avLst/>
+          </a:prstGeom>
+          <a:noFill/>
+          <a:ln/>
+        </p:spPr>
+        <p:txBody>
+          <a:bodyPr wrap="square" lIns="0" tIns="0" rIns="0" bIns="0" rtlCol="0" anchor="t"/>
+          <a:lstStyle/>
+          <a:p>
+            <a:pPr algn="ctr" indent="0" marL="0">
+              <a:buNone/>
+            </a:pPr>
+            <a:r>
+              <a:rPr lang="en-US" sz="1300" b="1" dirty="0">
+                <a:solidFill>
+                  <a:schemeClr val="tx1"/>
+                </a:solidFill>
+              </a:rPr>
+              <a:t>재방문</a:t>
+            </a:r>
+            <a:endParaRPr lang="en-US" sz="1300" dirty="0"/>
+          </a:p>
+        </p:txBody>
+      </p:sp>
+      <p:sp>
+        <p:nvSpPr>
+          <p:cNvPr id="22" name="card"/>
+          <p:cNvSpPr/>
+          <p:nvPr/>
+        </p:nvSpPr>
+        <p:spPr>
+          <a:xfrm>
+            <a:off x="457200" y="2377440"/>
+            <a:ext cx="4023360" cy="2011680"/>
+          </a:xfrm>
+          <a:prstGeom prst="roundRect">
+            <a:avLst>
+              <a:gd name="adj" fmla="val 3636"/>
+            </a:avLst>
+          </a:prstGeom>
+          <a:solidFill>
+            <a:schemeClr val="bg2"/>
+          </a:solidFill>
+          <a:ln/>
+        </p:spPr>
+      </p:sp>
+      <p:sp>
+        <p:nvSpPr>
+          <p:cNvPr id="23" name="Text 21"/>
+          <p:cNvSpPr txBox="1"/>
+          <p:nvPr/>
+        </p:nvSpPr>
+        <p:spPr>
+          <a:xfrm>
+            <a:off x="685800" y="2514600"/>
+            <a:ext cx="3566160" cy="365760"/>
+          </a:xfrm>
+          <a:prstGeom prst="rect">
+            <a:avLst/>
+          </a:prstGeom>
+          <a:noFill/>
+          <a:ln/>
+        </p:spPr>
+        <p:txBody>
+          <a:bodyPr wrap="square" lIns="0" tIns="0" rIns="0" bIns="0" rtlCol="0" anchor="t"/>
+          <a:lstStyle/>
+          <a:p>
+            <a:pPr indent="0" marL="0">
+              <a:buNone/>
+            </a:pPr>
+            <a:r>
+              <a:rPr lang="en-US" sz="1600" b="1" dirty="0">
+                <a:solidFill>
+                  <a:schemeClr val="accent5"/>
+                </a:solidFill>
+              </a:rPr>
+              <a:t>약해진 것</a:t>
+            </a:r>
+            <a:endParaRPr lang="en-US" sz="1600" dirty="0"/>
+          </a:p>
+        </p:txBody>
+      </p:sp>
+      <p:sp>
+        <p:nvSpPr>
+          <p:cNvPr id="24" name="Text 22"/>
+          <p:cNvSpPr txBox="1"/>
+          <p:nvPr/>
+        </p:nvSpPr>
+        <p:spPr>
+          <a:xfrm>
+            <a:off x="685800" y="2971800"/>
+            <a:ext cx="3566160" cy="1280160"/>
+          </a:xfrm>
+          <a:prstGeom prst="rect">
+            <a:avLst/>
+          </a:prstGeom>
+          <a:noFill/>
+          <a:ln/>
+        </p:spPr>
+        <p:txBody>
+          <a:bodyPr wrap="square" lIns="0" tIns="0" rIns="0" bIns="0" rtlCol="0" anchor="t"/>
+          <a:lstStyle/>
+          <a:p>
+            <a:pPr marL="342900" indent="-342900">
+              <a:spcAft>
+                <a:spcPts val="600"/>
+              </a:spcAft>
+              <a:buSzPct val="100000"/>
+              <a:buChar char="•"/>
+            </a:pPr>
+            <a:r>
+              <a:rPr lang="en-US" sz="1400" dirty="0">
+                <a:solidFill>
+                  <a:schemeClr val="tx1"/>
+                </a:solidFill>
+              </a:rPr>
+              <a:t>'OO란?' 같은 단순 정의 글</a:t>
+            </a:r>
+            <a:endParaRPr lang="en-US" sz="1400" dirty="0"/>
+          </a:p>
+          <a:p>
+            <a:pPr marL="342900" indent="-342900">
+              <a:spcAft>
+                <a:spcPts val="600"/>
+              </a:spcAft>
+              <a:buSzPct val="100000"/>
+              <a:buChar char="•"/>
+            </a:pPr>
+            <a:r>
+              <a:rPr lang="en-US" sz="1400" dirty="0">
+                <a:solidFill>
+                  <a:schemeClr val="tx1"/>
+                </a:solidFill>
+              </a:rPr>
+              <a:t>검색에만 의존</a:t>
+            </a:r>
+            <a:endParaRPr lang="en-US" sz="1400" dirty="0"/>
+          </a:p>
+          <a:p>
+            <a:pPr marL="342900" indent="-342900">
+              <a:spcAft>
+                <a:spcPts val="600"/>
+              </a:spcAft>
+              <a:buSzPct val="100000"/>
+              <a:buChar char="•"/>
+            </a:pPr>
+            <a:r>
+              <a:rPr lang="en-US" sz="1400" dirty="0">
+                <a:solidFill>
+                  <a:schemeClr val="tx1"/>
+                </a:solidFill>
+              </a:rPr>
+              <a:t>글 대량으로 찍어내기 (스팸)</a:t>
+            </a:r>
+            <a:endParaRPr lang="en-US" sz="1400" dirty="0"/>
+          </a:p>
+        </p:txBody>
+      </p:sp>
+      <p:sp>
+        <p:nvSpPr>
+          <p:cNvPr id="25" name="card"/>
+          <p:cNvSpPr/>
+          <p:nvPr/>
+        </p:nvSpPr>
+        <p:spPr>
+          <a:xfrm>
+            <a:off x="4663440" y="2377440"/>
+            <a:ext cx="4023360" cy="2011680"/>
+          </a:xfrm>
+          <a:prstGeom prst="roundRect">
+            <a:avLst>
+              <a:gd name="adj" fmla="val 3636"/>
+            </a:avLst>
+          </a:prstGeom>
+          <a:solidFill>
+            <a:schemeClr val="tx2"/>
+          </a:solidFill>
+          <a:ln/>
+        </p:spPr>
+      </p:sp>
+      <p:sp>
+        <p:nvSpPr>
+          <p:cNvPr id="26" name="Text 24"/>
+          <p:cNvSpPr txBox="1"/>
+          <p:nvPr/>
+        </p:nvSpPr>
+        <p:spPr>
+          <a:xfrm>
+            <a:off x="4892040" y="2514600"/>
+            <a:ext cx="3566160" cy="365760"/>
+          </a:xfrm>
+          <a:prstGeom prst="rect">
+            <a:avLst/>
+          </a:prstGeom>
+          <a:noFill/>
+          <a:ln/>
+        </p:spPr>
+        <p:txBody>
+          <a:bodyPr wrap="square" lIns="0" tIns="0" rIns="0" bIns="0" rtlCol="0" anchor="t"/>
+          <a:lstStyle/>
+          <a:p>
+            <a:pPr indent="0" marL="0">
+              <a:buNone/>
+            </a:pPr>
+            <a:r>
+              <a:rPr lang="en-US" sz="1600" b="1" dirty="0">
+                <a:solidFill>
+                  <a:schemeClr val="accent6"/>
+                </a:solidFill>
+              </a:rPr>
+              <a:t>강해진 것</a:t>
+            </a:r>
+            <a:endParaRPr lang="en-US" sz="1600" dirty="0"/>
+          </a:p>
+        </p:txBody>
+      </p:sp>
+      <p:sp>
+        <p:nvSpPr>
+          <p:cNvPr id="27" name="Text 25"/>
+          <p:cNvSpPr txBox="1"/>
+          <p:nvPr/>
+        </p:nvSpPr>
+        <p:spPr>
+          <a:xfrm>
+            <a:off x="4892040" y="2971800"/>
+            <a:ext cx="3566160" cy="1280160"/>
+          </a:xfrm>
+          <a:prstGeom prst="rect">
+            <a:avLst/>
+          </a:prstGeom>
+          <a:noFill/>
+          <a:ln/>
+        </p:spPr>
+        <p:txBody>
+          <a:bodyPr wrap="square" lIns="0" tIns="0" rIns="0" bIns="0" rtlCol="0" anchor="t"/>
+          <a:lstStyle/>
+          <a:p>
+            <a:pPr marL="342900" indent="-342900">
+              <a:spcAft>
+                <a:spcPts val="600"/>
+              </a:spcAft>
+              <a:buSzPct val="100000"/>
+              <a:buChar char="•"/>
+            </a:pPr>
+            <a:r>
+              <a:rPr lang="en-US" sz="1400" dirty="0">
+                <a:solidFill>
+                  <a:schemeClr val="bg1"/>
+                </a:solidFill>
+              </a:rPr>
+              <a:t>직접 해 본 후기, 나만의 데이터</a:t>
+            </a:r>
+            <a:endParaRPr lang="en-US" sz="1400" dirty="0"/>
+          </a:p>
+          <a:p>
+            <a:pPr marL="342900" indent="-342900">
+              <a:spcAft>
+                <a:spcPts val="600"/>
+              </a:spcAft>
+              <a:buSzPct val="100000"/>
+              <a:buChar char="•"/>
+            </a:pPr>
+            <a:r>
+              <a:rPr lang="en-US" sz="1400" dirty="0">
+                <a:solidFill>
+                  <a:schemeClr val="bg1"/>
+                </a:solidFill>
+              </a:rPr>
+              <a:t>계산기 같은 도구</a:t>
+            </a:r>
+            <a:endParaRPr lang="en-US" sz="1400" dirty="0"/>
+          </a:p>
+          <a:p>
+            <a:pPr marL="342900" indent="-342900">
+              <a:spcAft>
+                <a:spcPts val="600"/>
+              </a:spcAft>
+              <a:buSzPct val="100000"/>
+              <a:buChar char="•"/>
+            </a:pPr>
+            <a:r>
+              <a:rPr lang="en-US" sz="1400" dirty="0">
+                <a:solidFill>
+                  <a:schemeClr val="bg1"/>
+                </a:solidFill>
+              </a:rPr>
+              <a:t>뉴스레터·커뮤니티 구독자</a:t>
+            </a:r>
+            <a:endParaRPr lang="en-US" sz="1400" dirty="0"/>
+          </a:p>
+        </p:txBody>
+      </p:sp>
+      <p:sp>
+        <p:nvSpPr>
+          <p:cNvPr id="28" name="Text 26"/>
+          <p:cNvSpPr txBox="1"/>
+          <p:nvPr/>
+        </p:nvSpPr>
+        <p:spPr>
+          <a:xfrm>
+            <a:off x="457200" y="4645152"/>
+            <a:ext cx="7680960" cy="274320"/>
+          </a:xfrm>
+          <a:prstGeom prst="rect">
+            <a:avLst/>
+          </a:prstGeom>
+          <a:noFill/>
+          <a:ln/>
+        </p:spPr>
+        <p:txBody>
+          <a:bodyPr wrap="square" lIns="0" tIns="0" rIns="0" bIns="0" rtlCol="0" anchor="t"/>
+          <a:lstStyle/>
+          <a:p>
+            <a:pPr indent="0" marL="0">
+              <a:buNone/>
+            </a:pPr>
+            <a:r>
+              <a:rPr lang="en-US" sz="1000" dirty="0">
+                <a:solidFill>
+                  <a:schemeClr val="accent4"/>
+                </a:solidFill>
+              </a:rPr>
+              <a:t>AI 요약이 뜨면 사람들이 링크를 덜 누른다 — AI 검색 시대의 변화 (17장)</a:t>
+            </a:r>
+            <a:endParaRPr lang="en-US" sz="1000" dirty="0"/>
+          </a:p>
+        </p:txBody>
+      </p:sp>
+      <p:sp>
+        <p:nvSpPr>
+          <p:cNvPr id="25" name="Slide Number Placeholder 0"/>
+          <p:cNvSpPr>
+            <a:spLocks noGrp="1"/>
+          </p:cNvSpPr>
+          <p:nvPr>
+            <p:ph type="sldNum" sz="quarter" idx="4294967295"/>
+          </p:nvPr>
+        </p:nvSpPr>
+        <p:spPr>
+          <a:xfrm>
+            <a:off x="8321040" y="4754880"/>
+            <a:ext cx="457200" cy="274320"/>
+          </a:xfrm>
+          <a:prstGeom prst="rect">
+            <a:avLst/>
+          </a:prstGeom>
+          <a:extLst>
+            <a:ext uri="{C572A759-6A51-4108-AA02-DFA0A04FC94B}">
+              <ma14:wrappingTextBoxFlag xmlns:ma14="http://schemas.microsoft.com/office/mac/drawingml/2011/main" val="0"/>
+            </a:ext>
+          </a:extLst>
+        </p:spPr>
+        <p:txBody>
+          <a:bodyPr/>
+          <a:lstStyle>
+            <a:lvl1pPr>
+              <a:defRPr sz="1000">
+                <a:solidFill>
+                  <a:schemeClr val="accent4"/>
+                </a:solidFill>
+              </a:defRPr>
+            </a:lvl1pPr>
+          </a:lstStyle>
+          <a:p>
+            <a:pPr algn="r"/>
+            <a:fld id="{F7021451-1387-4CA6-816F-3879F97B5CBC}" type="slidenum">
+              <a:rPr b="0" lang="en-US"/>
+              <a:t>25</a:t>
+            </a:fld>
+            <a:endParaRPr lang="en-US"/>
+          </a:p>
+        </p:txBody>
+      </p:sp>
+    </p:spTree>
+  </p:cSld>
+  <p:clrMapOvr>
+    <a:masterClrMapping/>
+  </p:clrMapOvr>
+</p:sld>
+</file>
+
+<file path=ppt/slides/slide26.xml><?xml version="1.0" encoding="utf-8"?>
+<p:sld xmlns:a="http://schemas.openxmlformats.org/drawingml/2006/main" xmlns:r="http://schemas.openxmlformats.org/officeDocument/2006/relationships" xmlns:p="http://schemas.openxmlformats.org/presentationml/2006/main">
+  <p:cSld name="Slide 26">
+    <p:spTree>
+      <p:nvGrpSpPr>
+        <p:cNvPr id="1" name=""/>
+        <p:cNvGrpSpPr/>
+        <p:nvPr/>
+      </p:nvGrpSpPr>
+      <p:grpSpPr>
+        <a:xfrm>
+          <a:off x="0" y="0"/>
+          <a:ext cx="0" cy="0"/>
+          <a:chOff x="0" y="0"/>
+          <a:chExt cx="0" cy="0"/>
+        </a:xfrm>
+      </p:grpSpPr>
+      <p:sp>
+        <p:nvSpPr>
+          <p:cNvPr id="2" name="Text 0"/>
+          <p:cNvSpPr/>
+          <p:nvPr>
+            <p:ph idx="100" type="title" hasCustomPrompt="1"/>
+          </p:nvPr>
+        </p:nvSpPr>
+        <p:spPr>
+          <a:xfrm>
+            <a:off x="457200" y="274320"/>
+            <a:ext cx="8229600" cy="685800"/>
+          </a:xfrm>
+          <a:prstGeom prst="rect">
+            <a:avLst/>
+          </a:prstGeom>
+          <a:noFill/>
+          <a:ln/>
+        </p:spPr>
+        <p:txBody>
+          <a:bodyPr wrap="square" lIns="0" tIns="0" rIns="0" bIns="0" rtlCol="0" anchor="ctr"/>
+          <a:lstStyle/>
+          <a:p>
+            <a:pPr indent="0" marL="0">
+              <a:buNone/>
+            </a:pPr>
+            <a:r>
+              <a:rPr lang="en-US" sz="2800" b="1" dirty="0">
+                <a:solidFill>
+                  <a:schemeClr val="tx2"/>
+                </a:solidFill>
+              </a:rPr>
+              <a:t>트래픽 수익 = 페이지뷰 ÷ 1,000 × RPM</a:t>
+            </a:r>
+            <a:endParaRPr lang="en-US" sz="2800" dirty="0"/>
+          </a:p>
+        </p:txBody>
+      </p:sp>
+      <p:sp>
+        <p:nvSpPr>
+          <p:cNvPr id="3" name="card"/>
+          <p:cNvSpPr/>
+          <p:nvPr/>
+        </p:nvSpPr>
+        <p:spPr>
+          <a:xfrm>
+            <a:off x="457200" y="1188720"/>
+            <a:ext cx="2606040" cy="1554480"/>
+          </a:xfrm>
+          <a:prstGeom prst="roundRect">
+            <a:avLst>
+              <a:gd name="adj" fmla="val 4706"/>
+            </a:avLst>
+          </a:prstGeom>
+          <a:solidFill>
+            <a:schemeClr val="bg2"/>
+          </a:solidFill>
+          <a:ln/>
+        </p:spPr>
+      </p:sp>
+      <p:sp>
+        <p:nvSpPr>
+          <p:cNvPr id="4" name="Text 2"/>
+          <p:cNvSpPr txBox="1"/>
+          <p:nvPr/>
+        </p:nvSpPr>
+        <p:spPr>
+          <a:xfrm>
+            <a:off x="640080" y="1325880"/>
+            <a:ext cx="2240280" cy="822960"/>
+          </a:xfrm>
+          <a:prstGeom prst="rect">
+            <a:avLst/>
+          </a:prstGeom>
+          <a:noFill/>
+          <a:ln/>
+        </p:spPr>
+        <p:txBody>
+          <a:bodyPr wrap="square" lIns="0" tIns="0" rIns="0" bIns="0" rtlCol="0" anchor="t"/>
+          <a:lstStyle/>
+          <a:p>
+            <a:pPr indent="0" marL="0">
+              <a:buNone/>
+            </a:pPr>
+            <a:r>
+              <a:rPr lang="en-US" sz="3400" b="1" dirty="0">
+                <a:solidFill>
+                  <a:schemeClr val="tx2"/>
+                </a:solidFill>
+              </a:rPr>
+              <a:t>10만</a:t>
+            </a:r>
+            <a:endParaRPr lang="en-US" sz="3400" dirty="0"/>
+          </a:p>
+        </p:txBody>
+      </p:sp>
+      <p:sp>
+        <p:nvSpPr>
+          <p:cNvPr id="5" name="Text 3"/>
+          <p:cNvSpPr txBox="1"/>
+          <p:nvPr/>
+        </p:nvSpPr>
+        <p:spPr>
+          <a:xfrm>
+            <a:off x="640080" y="2194560"/>
+            <a:ext cx="2240280" cy="365760"/>
+          </a:xfrm>
+          <a:prstGeom prst="rect">
+            <a:avLst/>
+          </a:prstGeom>
+          <a:noFill/>
+          <a:ln/>
+        </p:spPr>
+        <p:txBody>
+          <a:bodyPr wrap="square" lIns="0" tIns="0" rIns="0" bIns="0" rtlCol="0" anchor="t"/>
+          <a:lstStyle/>
+          <a:p>
+            <a:pPr indent="0" marL="0">
+              <a:buNone/>
+            </a:pPr>
+            <a:r>
+              <a:rPr lang="en-US" sz="1300" dirty="0">
+                <a:solidFill>
+                  <a:schemeClr val="accent4"/>
+                </a:solidFill>
+              </a:rPr>
+              <a:t>월 페이지뷰</a:t>
+            </a:r>
+            <a:endParaRPr lang="en-US" sz="1300" dirty="0"/>
+          </a:p>
+        </p:txBody>
+      </p:sp>
+      <p:sp>
+        <p:nvSpPr>
+          <p:cNvPr id="6" name="card"/>
+          <p:cNvSpPr/>
+          <p:nvPr/>
+        </p:nvSpPr>
+        <p:spPr>
+          <a:xfrm>
+            <a:off x="3246120" y="1188720"/>
+            <a:ext cx="2606040" cy="1554480"/>
+          </a:xfrm>
+          <a:prstGeom prst="roundRect">
+            <a:avLst>
+              <a:gd name="adj" fmla="val 4706"/>
+            </a:avLst>
+          </a:prstGeom>
+          <a:solidFill>
+            <a:schemeClr val="bg2"/>
+          </a:solidFill>
+          <a:ln/>
+        </p:spPr>
+      </p:sp>
+      <p:sp>
+        <p:nvSpPr>
+          <p:cNvPr id="7" name="Text 5"/>
+          <p:cNvSpPr txBox="1"/>
+          <p:nvPr/>
+        </p:nvSpPr>
+        <p:spPr>
+          <a:xfrm>
+            <a:off x="3429000" y="1325880"/>
+            <a:ext cx="2240280" cy="822960"/>
+          </a:xfrm>
+          <a:prstGeom prst="rect">
+            <a:avLst/>
+          </a:prstGeom>
+          <a:noFill/>
+          <a:ln/>
+        </p:spPr>
+        <p:txBody>
+          <a:bodyPr wrap="square" lIns="0" tIns="0" rIns="0" bIns="0" rtlCol="0" anchor="t"/>
+          <a:lstStyle/>
+          <a:p>
+            <a:pPr indent="0" marL="0">
+              <a:buNone/>
+            </a:pPr>
+            <a:r>
+              <a:rPr lang="en-US" sz="3400" b="1" dirty="0">
+                <a:solidFill>
+                  <a:schemeClr val="tx2"/>
+                </a:solidFill>
+              </a:rPr>
+              <a:t>× 2,000원</a:t>
+            </a:r>
+            <a:endParaRPr lang="en-US" sz="3400" dirty="0"/>
+          </a:p>
+        </p:txBody>
+      </p:sp>
+      <p:sp>
+        <p:nvSpPr>
+          <p:cNvPr id="8" name="Text 6"/>
+          <p:cNvSpPr txBox="1"/>
+          <p:nvPr/>
+        </p:nvSpPr>
+        <p:spPr>
+          <a:xfrm>
+            <a:off x="3429000" y="2194560"/>
+            <a:ext cx="2240280" cy="365760"/>
+          </a:xfrm>
+          <a:prstGeom prst="rect">
+            <a:avLst/>
+          </a:prstGeom>
+          <a:noFill/>
+          <a:ln/>
+        </p:spPr>
+        <p:txBody>
+          <a:bodyPr wrap="square" lIns="0" tIns="0" rIns="0" bIns="0" rtlCol="0" anchor="t"/>
+          <a:lstStyle/>
+          <a:p>
+            <a:pPr indent="0" marL="0">
+              <a:buNone/>
+            </a:pPr>
+            <a:r>
+              <a:rPr lang="en-US" sz="1300" dirty="0">
+                <a:solidFill>
+                  <a:schemeClr val="accent4"/>
+                </a:solidFill>
+              </a:rPr>
+              <a:t>RPM (예시)</a:t>
+            </a:r>
+            <a:endParaRPr lang="en-US" sz="1300" dirty="0"/>
+          </a:p>
+        </p:txBody>
+      </p:sp>
+      <p:sp>
+        <p:nvSpPr>
+          <p:cNvPr id="9" name="card"/>
+          <p:cNvSpPr/>
+          <p:nvPr/>
+        </p:nvSpPr>
+        <p:spPr>
+          <a:xfrm>
+            <a:off x="6035040" y="1188720"/>
+            <a:ext cx="2606040" cy="1554480"/>
+          </a:xfrm>
+          <a:prstGeom prst="roundRect">
+            <a:avLst>
+              <a:gd name="adj" fmla="val 4706"/>
+            </a:avLst>
+          </a:prstGeom>
+          <a:solidFill>
+            <a:schemeClr val="bg2"/>
+          </a:solidFill>
+          <a:ln/>
+        </p:spPr>
+      </p:sp>
+      <p:sp>
+        <p:nvSpPr>
+          <p:cNvPr id="10" name="Text 8"/>
+          <p:cNvSpPr txBox="1"/>
+          <p:nvPr/>
+        </p:nvSpPr>
+        <p:spPr>
+          <a:xfrm>
+            <a:off x="6217920" y="1325880"/>
+            <a:ext cx="2240280" cy="822960"/>
+          </a:xfrm>
+          <a:prstGeom prst="rect">
+            <a:avLst/>
+          </a:prstGeom>
+          <a:noFill/>
+          <a:ln/>
+        </p:spPr>
+        <p:txBody>
+          <a:bodyPr wrap="square" lIns="0" tIns="0" rIns="0" bIns="0" rtlCol="0" anchor="t"/>
+          <a:lstStyle/>
+          <a:p>
+            <a:pPr indent="0" marL="0">
+              <a:buNone/>
+            </a:pPr>
+            <a:r>
+              <a:rPr lang="en-US" sz="3400" b="1" dirty="0">
+                <a:solidFill>
+                  <a:schemeClr val="accent2"/>
+                </a:solidFill>
+              </a:rPr>
+              <a:t>= 20만 원</a:t>
+            </a:r>
+            <a:endParaRPr lang="en-US" sz="3400" dirty="0"/>
+          </a:p>
+        </p:txBody>
+      </p:sp>
+      <p:sp>
+        <p:nvSpPr>
+          <p:cNvPr id="11" name="Text 9"/>
+          <p:cNvSpPr txBox="1"/>
+          <p:nvPr/>
+        </p:nvSpPr>
+        <p:spPr>
+          <a:xfrm>
+            <a:off x="6217920" y="2194560"/>
+            <a:ext cx="2240280" cy="365760"/>
+          </a:xfrm>
+          <a:prstGeom prst="rect">
+            <a:avLst/>
+          </a:prstGeom>
+          <a:noFill/>
+          <a:ln/>
+        </p:spPr>
+        <p:txBody>
+          <a:bodyPr wrap="square" lIns="0" tIns="0" rIns="0" bIns="0" rtlCol="0" anchor="t"/>
+          <a:lstStyle/>
+          <a:p>
+            <a:pPr indent="0" marL="0">
+              <a:buNone/>
+            </a:pPr>
+            <a:r>
+              <a:rPr lang="en-US" sz="1300" dirty="0">
+                <a:solidFill>
+                  <a:schemeClr val="accent4"/>
+                </a:solidFill>
+              </a:rPr>
+              <a:t>월 광고 수익</a:t>
+            </a:r>
+            <a:endParaRPr lang="en-US" sz="1300" dirty="0"/>
+          </a:p>
+        </p:txBody>
+      </p:sp>
+      <p:sp>
+        <p:nvSpPr>
+          <p:cNvPr id="12" name="card"/>
+          <p:cNvSpPr/>
+          <p:nvPr/>
+        </p:nvSpPr>
+        <p:spPr>
+          <a:xfrm>
+            <a:off x="457200" y="2971800"/>
+            <a:ext cx="8229600" cy="1417320"/>
+          </a:xfrm>
+          <a:prstGeom prst="roundRect">
+            <a:avLst>
+              <a:gd name="adj" fmla="val 5161"/>
+            </a:avLst>
+          </a:prstGeom>
+          <a:solidFill>
+            <a:schemeClr val="tx2"/>
+          </a:solidFill>
+          <a:ln/>
+        </p:spPr>
+      </p:sp>
+      <p:sp>
+        <p:nvSpPr>
+          <p:cNvPr id="13" name="Text 11"/>
+          <p:cNvSpPr txBox="1"/>
+          <p:nvPr/>
+        </p:nvSpPr>
+        <p:spPr>
+          <a:xfrm>
+            <a:off x="731520" y="3108960"/>
+            <a:ext cx="7680960" cy="365760"/>
+          </a:xfrm>
+          <a:prstGeom prst="rect">
+            <a:avLst/>
+          </a:prstGeom>
+          <a:noFill/>
+          <a:ln/>
+        </p:spPr>
+        <p:txBody>
+          <a:bodyPr wrap="square" lIns="0" tIns="0" rIns="0" bIns="0" rtlCol="0" anchor="t"/>
+          <a:lstStyle/>
+          <a:p>
+            <a:pPr indent="0" marL="0">
+              <a:buNone/>
+            </a:pPr>
+            <a:r>
+              <a:rPr lang="en-US" sz="1600" b="1" dirty="0">
+                <a:solidFill>
+                  <a:schemeClr val="accent6"/>
+                </a:solidFill>
+              </a:rPr>
+              <a:t>계정 정지되는 행동</a:t>
+            </a:r>
+            <a:endParaRPr lang="en-US" sz="1600" dirty="0"/>
+          </a:p>
+        </p:txBody>
+      </p:sp>
+      <p:sp>
+        <p:nvSpPr>
+          <p:cNvPr id="14" name="Text 12"/>
+          <p:cNvSpPr txBox="1"/>
+          <p:nvPr/>
+        </p:nvSpPr>
+        <p:spPr>
+          <a:xfrm>
+            <a:off x="731520" y="3520440"/>
+            <a:ext cx="7680960" cy="777240"/>
+          </a:xfrm>
+          <a:prstGeom prst="rect">
+            <a:avLst/>
+          </a:prstGeom>
+          <a:noFill/>
+          <a:ln/>
+        </p:spPr>
+        <p:txBody>
+          <a:bodyPr wrap="square" lIns="0" tIns="0" rIns="0" bIns="0" rtlCol="0" anchor="t"/>
+          <a:lstStyle/>
+          <a:p>
+            <a:pPr indent="0" marL="0">
+              <a:buNone/>
+            </a:pPr>
+            <a:r>
+              <a:rPr lang="en-US" sz="1300" dirty="0">
+                <a:solidFill>
+                  <a:schemeClr val="bg1"/>
+                </a:solidFill>
+              </a:rPr>
+              <a:t>내 광고 내가 클릭 · '광고 눌러 주세요' · 트래픽 구매·봇 · 금지 콘텐츠 · 위장 광고</a:t>
+            </a:r>
+            <a:endParaRPr lang="en-US" sz="1300" dirty="0"/>
+          </a:p>
+          <a:p>
+            <a:pPr indent="0" marL="0">
+              <a:buNone/>
+            </a:pPr>
+            <a:r>
+              <a:rPr lang="en-US" sz="1300" dirty="0">
+                <a:solidFill>
+                  <a:schemeClr val="bg1"/>
+                </a:solidFill>
+              </a:rPr>
+              <a:t>제휴 링크엔 '수수료를 받는다'는 광고 표시 필수</a:t>
+            </a:r>
+            <a:endParaRPr lang="en-US" sz="1300" dirty="0"/>
+          </a:p>
+        </p:txBody>
+      </p:sp>
+      <p:sp>
+        <p:nvSpPr>
+          <p:cNvPr id="15" name="Text 13"/>
+          <p:cNvSpPr txBox="1"/>
+          <p:nvPr/>
+        </p:nvSpPr>
+        <p:spPr>
+          <a:xfrm>
+            <a:off x="457200" y="4645152"/>
+            <a:ext cx="7680960" cy="274320"/>
+          </a:xfrm>
+          <a:prstGeom prst="rect">
+            <a:avLst/>
+          </a:prstGeom>
+          <a:noFill/>
+          <a:ln/>
+        </p:spPr>
+        <p:txBody>
+          <a:bodyPr wrap="square" lIns="0" tIns="0" rIns="0" bIns="0" rtlCol="0" anchor="t"/>
+          <a:lstStyle/>
+          <a:p>
+            <a:pPr indent="0" marL="0">
+              <a:buNone/>
+            </a:pPr>
+            <a:r>
+              <a:rPr lang="en-US" sz="1000" dirty="0">
+                <a:solidFill>
+                  <a:schemeClr val="accent4"/>
+                </a:solidFill>
+              </a:rPr>
+              <a:t>RPM은 주제·방문자에 따라 수십 배 차이 — 위 숫자는 계산 연습용 예시</a:t>
+            </a:r>
+            <a:endParaRPr lang="en-US" sz="1000" dirty="0"/>
+          </a:p>
+        </p:txBody>
+      </p:sp>
+      <p:sp>
+        <p:nvSpPr>
+          <p:cNvPr id="25" name="Slide Number Placeholder 0"/>
+          <p:cNvSpPr>
+            <a:spLocks noGrp="1"/>
+          </p:cNvSpPr>
+          <p:nvPr>
+            <p:ph type="sldNum" sz="quarter" idx="4294967295"/>
+          </p:nvPr>
+        </p:nvSpPr>
+        <p:spPr>
+          <a:xfrm>
+            <a:off x="8321040" y="4754880"/>
+            <a:ext cx="457200" cy="274320"/>
+          </a:xfrm>
+          <a:prstGeom prst="rect">
+            <a:avLst/>
+          </a:prstGeom>
+          <a:extLst>
+            <a:ext uri="{C572A759-6A51-4108-AA02-DFA0A04FC94B}">
+              <ma14:wrappingTextBoxFlag xmlns:ma14="http://schemas.microsoft.com/office/mac/drawingml/2011/main" val="0"/>
+            </a:ext>
+          </a:extLst>
+        </p:spPr>
+        <p:txBody>
+          <a:bodyPr/>
+          <a:lstStyle>
+            <a:lvl1pPr>
+              <a:defRPr sz="1000">
+                <a:solidFill>
+                  <a:schemeClr val="accent4"/>
+                </a:solidFill>
+              </a:defRPr>
+            </a:lvl1pPr>
+          </a:lstStyle>
+          <a:p>
+            <a:pPr algn="r"/>
+            <a:fld id="{F7021451-1387-4CA6-816F-3879F97B5CBC}" type="slidenum">
+              <a:rPr b="0" lang="en-US"/>
+              <a:t>26</a:t>
+            </a:fld>
+            <a:endParaRPr lang="en-US"/>
+          </a:p>
+        </p:txBody>
+      </p:sp>
+    </p:spTree>
+  </p:cSld>
+  <p:clrMapOvr>
+    <a:masterClrMapping/>
+  </p:clrMapOvr>
+</p:sld>
+</file>
+
+<file path=ppt/slides/slide27.xml><?xml version="1.0" encoding="utf-8"?>
+<p:sld xmlns:a="http://schemas.openxmlformats.org/drawingml/2006/main" xmlns:r="http://schemas.openxmlformats.org/officeDocument/2006/relationships" xmlns:p="http://schemas.openxmlformats.org/presentationml/2006/main">
+  <p:cSld name="Slide 27">
+    <p:spTree>
+      <p:nvGrpSpPr>
+        <p:cNvPr id="1" name=""/>
+        <p:cNvGrpSpPr/>
+        <p:nvPr/>
+      </p:nvGrpSpPr>
+      <p:grpSpPr>
+        <a:xfrm>
+          <a:off x="0" y="0"/>
+          <a:ext cx="0" cy="0"/>
+          <a:chOff x="0" y="0"/>
+          <a:chExt cx="0" cy="0"/>
+        </a:xfrm>
+      </p:grpSpPr>
+      <p:sp>
+        <p:nvSpPr>
+          <p:cNvPr id="2" name="Text 0"/>
+          <p:cNvSpPr/>
+          <p:nvPr>
+            <p:ph idx="100" type="title" hasCustomPrompt="1"/>
+          </p:nvPr>
+        </p:nvSpPr>
+        <p:spPr>
+          <a:xfrm>
+            <a:off x="457200" y="274320"/>
+            <a:ext cx="8229600" cy="685800"/>
+          </a:xfrm>
+          <a:prstGeom prst="rect">
+            <a:avLst/>
+          </a:prstGeom>
+          <a:noFill/>
+          <a:ln/>
+        </p:spPr>
+        <p:txBody>
+          <a:bodyPr wrap="square" lIns="0" tIns="0" rIns="0" bIns="0" rtlCol="0" anchor="ctr"/>
+          <a:lstStyle/>
+          <a:p>
+            <a:pPr indent="0" marL="0">
+              <a:buNone/>
+            </a:pPr>
+            <a:r>
+              <a:rPr lang="en-US" sz="2800" b="1" dirty="0">
+                <a:solidFill>
+                  <a:schemeClr val="tx2"/>
+                </a:solidFill>
+              </a:rPr>
+              <a:t>로또 사이트: 어디까지 괜찮나</a:t>
+            </a:r>
+            <a:endParaRPr lang="en-US" sz="2800" dirty="0"/>
+          </a:p>
+        </p:txBody>
+      </p:sp>
+      <p:sp>
+        <p:nvSpPr>
+          <p:cNvPr id="3" name="card"/>
+          <p:cNvSpPr/>
+          <p:nvPr/>
+        </p:nvSpPr>
+        <p:spPr>
+          <a:xfrm>
+            <a:off x="457200" y="1188720"/>
+            <a:ext cx="2606040" cy="2651760"/>
+          </a:xfrm>
+          <a:prstGeom prst="roundRect">
+            <a:avLst>
+              <a:gd name="adj" fmla="val 2807"/>
+            </a:avLst>
+          </a:prstGeom>
+          <a:solidFill>
+            <a:schemeClr val="bg2"/>
+          </a:solidFill>
+          <a:ln/>
+        </p:spPr>
+      </p:sp>
+      <p:sp>
+        <p:nvSpPr>
+          <p:cNvPr id="4" name="light0"/>
+          <p:cNvSpPr/>
+          <p:nvPr/>
+        </p:nvSpPr>
+        <p:spPr>
+          <a:xfrm>
+            <a:off x="640080" y="1353312"/>
+            <a:ext cx="365760" cy="365760"/>
+          </a:xfrm>
+          <a:prstGeom prst="ellipse">
+            <a:avLst/>
+          </a:prstGeom>
+          <a:solidFill>
+            <a:srgbClr val="3E9B6B"/>
+          </a:solidFill>
+          <a:ln/>
+        </p:spPr>
+      </p:sp>
+      <p:sp>
+        <p:nvSpPr>
+          <p:cNvPr id="5" name="Text 3"/>
+          <p:cNvSpPr txBox="1"/>
+          <p:nvPr/>
+        </p:nvSpPr>
+        <p:spPr>
+          <a:xfrm>
+            <a:off x="1143000" y="1325880"/>
+            <a:ext cx="1828800" cy="420624"/>
+          </a:xfrm>
+          <a:prstGeom prst="rect">
+            <a:avLst/>
+          </a:prstGeom>
+          <a:noFill/>
+          <a:ln/>
+        </p:spPr>
+        <p:txBody>
+          <a:bodyPr wrap="square" lIns="0" tIns="0" rIns="0" bIns="0" rtlCol="0" anchor="ctr"/>
+          <a:lstStyle/>
+          <a:p>
+            <a:pPr indent="0" marL="0">
+              <a:buNone/>
+            </a:pPr>
+            <a:r>
+              <a:rPr lang="en-US" sz="1700" b="1" dirty="0">
+                <a:solidFill>
+                  <a:schemeClr val="tx1"/>
+                </a:solidFill>
+              </a:rPr>
+              <a:t>괜찮음</a:t>
+            </a:r>
+            <a:endParaRPr lang="en-US" sz="1700" dirty="0"/>
+          </a:p>
+        </p:txBody>
+      </p:sp>
+      <p:sp>
+        <p:nvSpPr>
+          <p:cNvPr id="6" name="Text 4"/>
+          <p:cNvSpPr txBox="1"/>
+          <p:nvPr/>
+        </p:nvSpPr>
+        <p:spPr>
+          <a:xfrm>
+            <a:off x="640080" y="1920240"/>
+            <a:ext cx="2286000" cy="1828800"/>
+          </a:xfrm>
+          <a:prstGeom prst="rect">
+            <a:avLst/>
+          </a:prstGeom>
+          <a:noFill/>
+          <a:ln/>
+        </p:spPr>
+        <p:txBody>
+          <a:bodyPr wrap="square" lIns="0" tIns="0" rIns="0" bIns="0" rtlCol="0" anchor="t"/>
+          <a:lstStyle/>
+          <a:p>
+            <a:pPr marL="342900" indent="-342900">
+              <a:spcAft>
+                <a:spcPts val="600"/>
+              </a:spcAft>
+              <a:buSzPct val="100000"/>
+              <a:buChar char="•"/>
+            </a:pPr>
+            <a:r>
+              <a:rPr lang="en-US" sz="1300" dirty="0">
+                <a:solidFill>
+                  <a:schemeClr val="tx1"/>
+                </a:solidFill>
+              </a:rPr>
+              <a:t>당첨 번호 통계·그래프</a:t>
+            </a:r>
+            <a:endParaRPr lang="en-US" sz="1300" dirty="0"/>
+          </a:p>
+          <a:p>
+            <a:pPr marL="342900" indent="-342900">
+              <a:spcAft>
+                <a:spcPts val="600"/>
+              </a:spcAft>
+              <a:buSzPct val="100000"/>
+              <a:buChar char="•"/>
+            </a:pPr>
+            <a:r>
+              <a:rPr lang="en-US" sz="1300" dirty="0">
+                <a:solidFill>
+                  <a:schemeClr val="tx1"/>
+                </a:solidFill>
+              </a:rPr>
+              <a:t>무료 랜덤 생성기 ('재미용' 표시)</a:t>
+            </a:r>
+            <a:endParaRPr lang="en-US" sz="1300" dirty="0"/>
+          </a:p>
+          <a:p>
+            <a:pPr marL="342900" indent="-342900">
+              <a:spcAft>
+                <a:spcPts val="600"/>
+              </a:spcAft>
+              <a:buSzPct val="100000"/>
+              <a:buChar char="•"/>
+            </a:pPr>
+            <a:r>
+              <a:rPr lang="en-US" sz="1300" dirty="0">
+                <a:solidFill>
+                  <a:schemeClr val="tx1"/>
+                </a:solidFill>
+              </a:rPr>
+              <a:t>당첨금 세금 계산기</a:t>
+            </a:r>
+            <a:endParaRPr lang="en-US" sz="1300" dirty="0"/>
+          </a:p>
+        </p:txBody>
+      </p:sp>
+      <p:sp>
+        <p:nvSpPr>
+          <p:cNvPr id="7" name="card"/>
+          <p:cNvSpPr/>
+          <p:nvPr/>
+        </p:nvSpPr>
+        <p:spPr>
+          <a:xfrm>
+            <a:off x="3246120" y="1188720"/>
+            <a:ext cx="2606040" cy="2651760"/>
+          </a:xfrm>
+          <a:prstGeom prst="roundRect">
+            <a:avLst>
+              <a:gd name="adj" fmla="val 2807"/>
+            </a:avLst>
+          </a:prstGeom>
+          <a:solidFill>
+            <a:schemeClr val="bg2"/>
+          </a:solidFill>
+          <a:ln/>
+        </p:spPr>
+      </p:sp>
+      <p:sp>
+        <p:nvSpPr>
+          <p:cNvPr id="8" name="light1"/>
+          <p:cNvSpPr/>
+          <p:nvPr/>
+        </p:nvSpPr>
+        <p:spPr>
+          <a:xfrm>
+            <a:off x="3429000" y="1353312"/>
+            <a:ext cx="365760" cy="365760"/>
+          </a:xfrm>
+          <a:prstGeom prst="ellipse">
+            <a:avLst/>
+          </a:prstGeom>
+          <a:solidFill>
+            <a:srgbClr val="E0A526"/>
+          </a:solidFill>
+          <a:ln/>
+        </p:spPr>
+      </p:sp>
+      <p:sp>
+        <p:nvSpPr>
+          <p:cNvPr id="9" name="Text 7"/>
+          <p:cNvSpPr txBox="1"/>
+          <p:nvPr/>
+        </p:nvSpPr>
+        <p:spPr>
+          <a:xfrm>
+            <a:off x="3931920" y="1325880"/>
+            <a:ext cx="1828800" cy="420624"/>
+          </a:xfrm>
+          <a:prstGeom prst="rect">
+            <a:avLst/>
+          </a:prstGeom>
+          <a:noFill/>
+          <a:ln/>
+        </p:spPr>
+        <p:txBody>
+          <a:bodyPr wrap="square" lIns="0" tIns="0" rIns="0" bIns="0" rtlCol="0" anchor="ctr"/>
+          <a:lstStyle/>
+          <a:p>
+            <a:pPr indent="0" marL="0">
+              <a:buNone/>
+            </a:pPr>
+            <a:r>
+              <a:rPr lang="en-US" sz="1700" b="1" dirty="0">
+                <a:solidFill>
+                  <a:schemeClr val="tx1"/>
+                </a:solidFill>
+              </a:rPr>
+              <a:t>주의</a:t>
+            </a:r>
+            <a:endParaRPr lang="en-US" sz="1700" dirty="0"/>
+          </a:p>
+        </p:txBody>
+      </p:sp>
+      <p:sp>
+        <p:nvSpPr>
+          <p:cNvPr id="10" name="Text 8"/>
+          <p:cNvSpPr txBox="1"/>
+          <p:nvPr/>
+        </p:nvSpPr>
+        <p:spPr>
+          <a:xfrm>
+            <a:off x="3429000" y="1920240"/>
+            <a:ext cx="2286000" cy="1828800"/>
+          </a:xfrm>
+          <a:prstGeom prst="rect">
+            <a:avLst/>
+          </a:prstGeom>
+          <a:noFill/>
+          <a:ln/>
+        </p:spPr>
+        <p:txBody>
+          <a:bodyPr wrap="square" lIns="0" tIns="0" rIns="0" bIns="0" rtlCol="0" anchor="t"/>
+          <a:lstStyle/>
+          <a:p>
+            <a:pPr marL="342900" indent="-342900">
+              <a:spcAft>
+                <a:spcPts val="600"/>
+              </a:spcAft>
+              <a:buSzPct val="100000"/>
+              <a:buChar char="•"/>
+            </a:pPr>
+            <a:r>
+              <a:rPr lang="en-US" sz="1300" dirty="0">
+                <a:solidFill>
+                  <a:schemeClr val="tx1"/>
+                </a:solidFill>
+              </a:rPr>
+              <a:t>'통계 추천 번호'로 효과 과장</a:t>
+            </a:r>
+            <a:endParaRPr lang="en-US" sz="1300" dirty="0"/>
+          </a:p>
+          <a:p>
+            <a:pPr marL="342900" indent="-342900">
+              <a:spcAft>
+                <a:spcPts val="600"/>
+              </a:spcAft>
+              <a:buSzPct val="100000"/>
+              <a:buChar char="•"/>
+            </a:pPr>
+            <a:r>
+              <a:rPr lang="en-US" sz="1300" dirty="0">
+                <a:solidFill>
+                  <a:schemeClr val="tx1"/>
+                </a:solidFill>
+              </a:rPr>
+              <a:t>무료 번호 미끼로 전화번호 수집</a:t>
+            </a:r>
+            <a:endParaRPr lang="en-US" sz="1300" dirty="0"/>
+          </a:p>
+        </p:txBody>
+      </p:sp>
+      <p:sp>
+        <p:nvSpPr>
+          <p:cNvPr id="11" name="card"/>
+          <p:cNvSpPr/>
+          <p:nvPr/>
+        </p:nvSpPr>
+        <p:spPr>
+          <a:xfrm>
+            <a:off x="6035040" y="1188720"/>
+            <a:ext cx="2606040" cy="2651760"/>
+          </a:xfrm>
+          <a:prstGeom prst="roundRect">
+            <a:avLst>
+              <a:gd name="adj" fmla="val 2807"/>
+            </a:avLst>
+          </a:prstGeom>
+          <a:solidFill>
+            <a:schemeClr val="bg2"/>
+          </a:solidFill>
+          <a:ln/>
+        </p:spPr>
+      </p:sp>
+      <p:sp>
+        <p:nvSpPr>
+          <p:cNvPr id="12" name="light2"/>
+          <p:cNvSpPr/>
+          <p:nvPr/>
+        </p:nvSpPr>
+        <p:spPr>
+          <a:xfrm>
+            <a:off x="6217920" y="1353312"/>
+            <a:ext cx="365760" cy="365760"/>
+          </a:xfrm>
+          <a:prstGeom prst="ellipse">
+            <a:avLst/>
+          </a:prstGeom>
+          <a:solidFill>
+            <a:srgbClr val="D9534F"/>
+          </a:solidFill>
+          <a:ln/>
+        </p:spPr>
+      </p:sp>
+      <p:sp>
+        <p:nvSpPr>
+          <p:cNvPr id="13" name="Text 11"/>
+          <p:cNvSpPr txBox="1"/>
+          <p:nvPr/>
+        </p:nvSpPr>
+        <p:spPr>
+          <a:xfrm>
+            <a:off x="6720840" y="1325880"/>
+            <a:ext cx="1828800" cy="420624"/>
+          </a:xfrm>
+          <a:prstGeom prst="rect">
+            <a:avLst/>
+          </a:prstGeom>
+          <a:noFill/>
+          <a:ln/>
+        </p:spPr>
+        <p:txBody>
+          <a:bodyPr wrap="square" lIns="0" tIns="0" rIns="0" bIns="0" rtlCol="0" anchor="ctr"/>
+          <a:lstStyle/>
+          <a:p>
+            <a:pPr indent="0" marL="0">
+              <a:buNone/>
+            </a:pPr>
+            <a:r>
+              <a:rPr lang="en-US" sz="1700" b="1" dirty="0">
+                <a:solidFill>
+                  <a:schemeClr val="tx1"/>
+                </a:solidFill>
+              </a:rPr>
+              <a:t>위험·불법</a:t>
+            </a:r>
+            <a:endParaRPr lang="en-US" sz="1700" dirty="0"/>
+          </a:p>
+        </p:txBody>
+      </p:sp>
+      <p:sp>
+        <p:nvSpPr>
+          <p:cNvPr id="14" name="Text 12"/>
+          <p:cNvSpPr txBox="1"/>
+          <p:nvPr/>
+        </p:nvSpPr>
+        <p:spPr>
+          <a:xfrm>
+            <a:off x="6217920" y="1920240"/>
+            <a:ext cx="2286000" cy="1828800"/>
+          </a:xfrm>
+          <a:prstGeom prst="rect">
+            <a:avLst/>
+          </a:prstGeom>
+          <a:noFill/>
+          <a:ln/>
+        </p:spPr>
+        <p:txBody>
+          <a:bodyPr wrap="square" lIns="0" tIns="0" rIns="0" bIns="0" rtlCol="0" anchor="t"/>
+          <a:lstStyle/>
+          <a:p>
+            <a:pPr marL="342900" indent="-342900">
+              <a:spcAft>
+                <a:spcPts val="600"/>
+              </a:spcAft>
+              <a:buSzPct val="100000"/>
+              <a:buChar char="•"/>
+            </a:pPr>
+            <a:r>
+              <a:rPr lang="en-US" sz="1300" dirty="0">
+                <a:solidFill>
+                  <a:schemeClr val="tx1"/>
+                </a:solidFill>
+              </a:rPr>
+              <a:t>유료 '당첨 번호 예측'·보장</a:t>
+            </a:r>
+            <a:endParaRPr lang="en-US" sz="1300" dirty="0"/>
+          </a:p>
+          <a:p>
+            <a:pPr marL="342900" indent="-342900">
+              <a:spcAft>
+                <a:spcPts val="600"/>
+              </a:spcAft>
+              <a:buSzPct val="100000"/>
+              <a:buChar char="•"/>
+            </a:pPr>
+            <a:r>
+              <a:rPr lang="en-US" sz="1300" dirty="0">
+                <a:solidFill>
+                  <a:schemeClr val="tx1"/>
+                </a:solidFill>
+              </a:rPr>
+              <a:t>복권 구매 대행</a:t>
+            </a:r>
+            <a:endParaRPr lang="en-US" sz="1300" dirty="0"/>
+          </a:p>
+          <a:p>
+            <a:pPr marL="342900" indent="-342900">
+              <a:spcAft>
+                <a:spcPts val="600"/>
+              </a:spcAft>
+              <a:buSzPct val="100000"/>
+              <a:buChar char="•"/>
+            </a:pPr>
+            <a:r>
+              <a:rPr lang="en-US" sz="1300" dirty="0">
+                <a:solidFill>
+                  <a:schemeClr val="tx1"/>
+                </a:solidFill>
+              </a:rPr>
+              <a:t>로또 번호 사설 베팅</a:t>
+            </a:r>
+            <a:endParaRPr lang="en-US" sz="1300" dirty="0"/>
+          </a:p>
+        </p:txBody>
+      </p:sp>
+      <p:sp>
+        <p:nvSpPr>
+          <p:cNvPr id="15" name="Text 13"/>
+          <p:cNvSpPr txBox="1"/>
+          <p:nvPr/>
+        </p:nvSpPr>
+        <p:spPr>
+          <a:xfrm>
+            <a:off x="457200" y="4023360"/>
+            <a:ext cx="8229600" cy="548640"/>
+          </a:xfrm>
+          <a:prstGeom prst="rect">
+            <a:avLst/>
+          </a:prstGeom>
+          <a:noFill/>
+          <a:ln/>
+        </p:spPr>
+        <p:txBody>
+          <a:bodyPr wrap="square" lIns="0" tIns="0" rIns="0" bIns="0" rtlCol="0" anchor="t"/>
+          <a:lstStyle/>
+          <a:p>
+            <a:pPr indent="0" marL="0">
+              <a:buNone/>
+            </a:pPr>
+            <a:r>
+              <a:rPr lang="en-US" sz="1300" b="1" dirty="0">
+                <a:solidFill>
+                  <a:schemeClr val="tx2"/>
+                </a:solidFill>
+              </a:rPr>
+              <a:t>모든 번호 조합의 1등 확률은 같다: 8,145,060분의 1.  </a:t>
+            </a:r>
+            <a:pPr indent="0" marL="0">
+              <a:buNone/>
+            </a:pPr>
+            <a:r>
+              <a:rPr lang="en-US" sz="1300" dirty="0">
+                <a:solidFill>
+                  <a:schemeClr val="tx1"/>
+                </a:solidFill>
+              </a:rPr>
+              <a:t>돈 받고 당첨을 약속하면 선을 넘은 것</a:t>
+            </a:r>
+            <a:endParaRPr lang="en-US" sz="1300" dirty="0"/>
+          </a:p>
+        </p:txBody>
+      </p:sp>
+      <p:sp>
+        <p:nvSpPr>
+          <p:cNvPr id="25" name="Slide Number Placeholder 0"/>
+          <p:cNvSpPr>
+            <a:spLocks noGrp="1"/>
+          </p:cNvSpPr>
+          <p:nvPr>
+            <p:ph type="sldNum" sz="quarter" idx="4294967295"/>
+          </p:nvPr>
+        </p:nvSpPr>
+        <p:spPr>
+          <a:xfrm>
+            <a:off x="8321040" y="4754880"/>
+            <a:ext cx="457200" cy="274320"/>
+          </a:xfrm>
+          <a:prstGeom prst="rect">
+            <a:avLst/>
+          </a:prstGeom>
+          <a:extLst>
+            <a:ext uri="{C572A759-6A51-4108-AA02-DFA0A04FC94B}">
+              <ma14:wrappingTextBoxFlag xmlns:ma14="http://schemas.microsoft.com/office/mac/drawingml/2011/main" val="0"/>
+            </a:ext>
+          </a:extLst>
+        </p:spPr>
+        <p:txBody>
+          <a:bodyPr/>
+          <a:lstStyle>
+            <a:lvl1pPr>
+              <a:defRPr sz="1000">
+                <a:solidFill>
+                  <a:schemeClr val="accent4"/>
+                </a:solidFill>
+              </a:defRPr>
+            </a:lvl1pPr>
+          </a:lstStyle>
+          <a:p>
+            <a:pPr algn="r"/>
+            <a:fld id="{F7021451-1387-4CA6-816F-3879F97B5CBC}" type="slidenum">
+              <a:rPr b="0" lang="en-US"/>
+              <a:t>27</a:t>
+            </a:fld>
+            <a:endParaRPr lang="en-US"/>
+          </a:p>
+        </p:txBody>
+      </p:sp>
+    </p:spTree>
+  </p:cSld>
+  <p:clrMapOvr>
+    <a:masterClrMapping/>
+  </p:clrMapOvr>
+</p:sld>
+</file>
+
+<file path=ppt/slides/slide28.xml><?xml version="1.0" encoding="utf-8"?>
+<p:sld xmlns:a="http://schemas.openxmlformats.org/drawingml/2006/main" xmlns:r="http://schemas.openxmlformats.org/officeDocument/2006/relationships" xmlns:p="http://schemas.openxmlformats.org/presentationml/2006/main">
+  <p:cSld name="Slide 28">
+    <p:spTree>
+      <p:nvGrpSpPr>
+        <p:cNvPr id="1" name=""/>
+        <p:cNvGrpSpPr/>
+        <p:nvPr/>
+      </p:nvGrpSpPr>
+      <p:grpSpPr>
+        <a:xfrm>
+          <a:off x="0" y="0"/>
+          <a:ext cx="0" cy="0"/>
+          <a:chOff x="0" y="0"/>
+          <a:chExt cx="0" cy="0"/>
+        </a:xfrm>
+      </p:grpSpPr>
+      <p:sp>
+        <p:nvSpPr>
+          <p:cNvPr id="2" name="Text 0"/>
+          <p:cNvSpPr/>
+          <p:nvPr>
+            <p:ph idx="100" type="title" hasCustomPrompt="1"/>
+          </p:nvPr>
+        </p:nvSpPr>
+        <p:spPr>
+          <a:xfrm>
+            <a:off x="457200" y="274320"/>
+            <a:ext cx="8229600" cy="685800"/>
+          </a:xfrm>
+          <a:prstGeom prst="rect">
+            <a:avLst/>
+          </a:prstGeom>
+          <a:noFill/>
+          <a:ln/>
+        </p:spPr>
+        <p:txBody>
+          <a:bodyPr wrap="square" lIns="0" tIns="0" rIns="0" bIns="0" rtlCol="0" anchor="ctr"/>
+          <a:lstStyle/>
+          <a:p>
+            <a:pPr indent="0" marL="0">
+              <a:buNone/>
+            </a:pPr>
+            <a:r>
+              <a:rPr lang="en-US" sz="2800" b="1" dirty="0">
+                <a:solidFill>
+                  <a:schemeClr val="tx2"/>
+                </a:solidFill>
+              </a:rPr>
+              <a:t>게임 사이트: 오목으로 배우기</a:t>
+            </a:r>
+            <a:endParaRPr lang="en-US" sz="2800" dirty="0"/>
+          </a:p>
+        </p:txBody>
+      </p:sp>
+      <p:sp>
+        <p:nvSpPr>
+          <p:cNvPr id="3" name="Text 1"/>
+          <p:cNvSpPr txBox="1"/>
+          <p:nvPr/>
+        </p:nvSpPr>
+        <p:spPr>
+          <a:xfrm>
+            <a:off x="457200" y="1188720"/>
+            <a:ext cx="3840480" cy="365760"/>
+          </a:xfrm>
+          <a:prstGeom prst="rect">
+            <a:avLst/>
+          </a:prstGeom>
+          <a:noFill/>
+          <a:ln/>
+        </p:spPr>
+        <p:txBody>
+          <a:bodyPr wrap="square" lIns="0" tIns="0" rIns="0" bIns="0" rtlCol="0" anchor="t"/>
+          <a:lstStyle/>
+          <a:p>
+            <a:pPr indent="0" marL="0">
+              <a:buNone/>
+            </a:pPr>
+            <a:r>
+              <a:rPr lang="en-US" sz="1600" b="1" dirty="0">
+                <a:solidFill>
+                  <a:schemeClr val="accent2"/>
+                </a:solidFill>
+              </a:rPr>
+              <a:t>설계 핵심</a:t>
+            </a:r>
+            <a:endParaRPr lang="en-US" sz="1600" dirty="0"/>
+          </a:p>
+        </p:txBody>
+      </p:sp>
+      <p:sp>
+        <p:nvSpPr>
+          <p:cNvPr id="4" name="Text 2"/>
+          <p:cNvSpPr txBox="1"/>
+          <p:nvPr/>
+        </p:nvSpPr>
+        <p:spPr>
+          <a:xfrm>
+            <a:off x="457200" y="1645920"/>
+            <a:ext cx="3931920" cy="2651760"/>
+          </a:xfrm>
+          <a:prstGeom prst="rect">
+            <a:avLst/>
+          </a:prstGeom>
+          <a:noFill/>
+          <a:ln/>
+        </p:spPr>
+        <p:txBody>
+          <a:bodyPr wrap="square" lIns="0" tIns="0" rIns="0" bIns="0" rtlCol="0" anchor="t"/>
+          <a:lstStyle/>
+          <a:p>
+            <a:pPr marL="342900" indent="-342900">
+              <a:spcAft>
+                <a:spcPts val="800"/>
+              </a:spcAft>
+              <a:buSzPct val="100000"/>
+              <a:buChar char="•"/>
+            </a:pPr>
+            <a:r>
+              <a:rPr lang="en-US" sz="1400" dirty="0">
+                <a:solidFill>
+                  <a:schemeClr val="tx1"/>
+                </a:solidFill>
+              </a:rPr>
+              <a:t>AI 대전부터 (사람이 적어도 돌아가게)</a:t>
+            </a:r>
+            <a:endParaRPr lang="en-US" sz="1400" dirty="0"/>
+          </a:p>
+          <a:p>
+            <a:pPr marL="342900" indent="-342900">
+              <a:spcAft>
+                <a:spcPts val="800"/>
+              </a:spcAft>
+              <a:buSzPct val="100000"/>
+              <a:buChar char="•"/>
+            </a:pPr>
+            <a:r>
+              <a:rPr lang="en-US" sz="1400" dirty="0">
+                <a:solidFill>
+                  <a:schemeClr val="tx1"/>
+                </a:solidFill>
+              </a:rPr>
+              <a:t>빠른 대전 매칭 + 레이팅(실력 점수)</a:t>
+            </a:r>
+            <a:endParaRPr lang="en-US" sz="1400" dirty="0"/>
+          </a:p>
+          <a:p>
+            <a:pPr marL="342900" indent="-342900">
+              <a:spcAft>
+                <a:spcPts val="800"/>
+              </a:spcAft>
+              <a:buSzPct val="100000"/>
+              <a:buChar char="•"/>
+            </a:pPr>
+            <a:r>
+              <a:rPr lang="en-US" sz="1400" dirty="0">
+                <a:solidFill>
+                  <a:schemeClr val="tx1"/>
+                </a:solidFill>
+              </a:rPr>
+              <a:t>판정은 서버가 (조작 방지)</a:t>
+            </a:r>
+            <a:endParaRPr lang="en-US" sz="1400" dirty="0"/>
+          </a:p>
+          <a:p>
+            <a:pPr marL="342900" indent="-342900">
+              <a:spcAft>
+                <a:spcPts val="800"/>
+              </a:spcAft>
+              <a:buSzPct val="100000"/>
+              <a:buChar char="•"/>
+            </a:pPr>
+            <a:r>
+              <a:rPr lang="en-US" sz="1400" dirty="0">
+                <a:solidFill>
+                  <a:schemeClr val="tx1"/>
+                </a:solidFill>
+              </a:rPr>
+              <a:t>부정행위(AI 따라 두기)·탈주 대응</a:t>
+            </a:r>
+            <a:endParaRPr lang="en-US" sz="1400" dirty="0"/>
+          </a:p>
+          <a:p>
+            <a:pPr marL="342900" indent="-342900">
+              <a:spcAft>
+                <a:spcPts val="800"/>
+              </a:spcAft>
+              <a:buSzPct val="100000"/>
+              <a:buChar char="•"/>
+            </a:pPr>
+            <a:r>
+              <a:rPr lang="en-US" sz="1400" dirty="0">
+                <a:solidFill>
+                  <a:schemeClr val="tx1"/>
+                </a:solidFill>
+              </a:rPr>
+              <a:t>배포는 진행 중인 판이 끝난 뒤</a:t>
+            </a:r>
+            <a:endParaRPr lang="en-US" sz="1400" dirty="0"/>
+          </a:p>
+        </p:txBody>
+      </p:sp>
+      <p:sp>
+        <p:nvSpPr>
+          <p:cNvPr id="5" name="card"/>
+          <p:cNvSpPr/>
+          <p:nvPr/>
+        </p:nvSpPr>
+        <p:spPr>
+          <a:xfrm>
+            <a:off x="4572000" y="1188720"/>
+            <a:ext cx="4114800" cy="3200400"/>
+          </a:xfrm>
+          <a:prstGeom prst="roundRect">
+            <a:avLst>
+              <a:gd name="adj" fmla="val 2286"/>
+            </a:avLst>
+          </a:prstGeom>
+          <a:solidFill>
+            <a:schemeClr val="bg2"/>
+          </a:solidFill>
+          <a:ln/>
+        </p:spPr>
+      </p:sp>
+      <p:sp>
+        <p:nvSpPr>
+          <p:cNvPr id="6" name="Text 4"/>
+          <p:cNvSpPr txBox="1"/>
+          <p:nvPr/>
+        </p:nvSpPr>
+        <p:spPr>
+          <a:xfrm>
+            <a:off x="4800600" y="1325880"/>
+            <a:ext cx="3657600" cy="365760"/>
+          </a:xfrm>
+          <a:prstGeom prst="rect">
+            <a:avLst/>
+          </a:prstGeom>
+          <a:noFill/>
+          <a:ln/>
+        </p:spPr>
+        <p:txBody>
+          <a:bodyPr wrap="square" lIns="0" tIns="0" rIns="0" bIns="0" rtlCol="0" anchor="t"/>
+          <a:lstStyle/>
+          <a:p>
+            <a:pPr indent="0" marL="0">
+              <a:buNone/>
+            </a:pPr>
+            <a:r>
+              <a:rPr lang="en-US" sz="1600" b="1" dirty="0">
+                <a:solidFill>
+                  <a:schemeClr val="tx2"/>
+                </a:solidFill>
+              </a:rPr>
+              <a:t>게임법 3가지</a:t>
+            </a:r>
+            <a:endParaRPr lang="en-US" sz="1600" dirty="0"/>
+          </a:p>
+        </p:txBody>
+      </p:sp>
+      <p:sp>
+        <p:nvSpPr>
+          <p:cNvPr id="7" name="badge1"/>
+          <p:cNvSpPr/>
+          <p:nvPr/>
+        </p:nvSpPr>
+        <p:spPr>
+          <a:xfrm>
+            <a:off x="4800600" y="1828800"/>
+            <a:ext cx="384048" cy="384048"/>
+          </a:xfrm>
+          <a:prstGeom prst="ellipse">
+            <a:avLst/>
+          </a:prstGeom>
+          <a:solidFill>
+            <a:schemeClr val="tx2"/>
+          </a:solidFill>
+          <a:ln/>
+        </p:spPr>
+      </p:sp>
+      <p:sp>
+        <p:nvSpPr>
+          <p:cNvPr id="8" name="Text 6"/>
+          <p:cNvSpPr txBox="1"/>
+          <p:nvPr/>
+        </p:nvSpPr>
+        <p:spPr>
+          <a:xfrm>
+            <a:off x="4800600" y="1828800"/>
+            <a:ext cx="384048" cy="384048"/>
+          </a:xfrm>
+          <a:prstGeom prst="rect">
+            <a:avLst/>
+          </a:prstGeom>
+          <a:noFill/>
+          <a:ln/>
+        </p:spPr>
+        <p:txBody>
+          <a:bodyPr wrap="square" lIns="0" tIns="0" rIns="0" bIns="0" rtlCol="0" anchor="ctr"/>
+          <a:lstStyle/>
+          <a:p>
+            <a:pPr algn="ctr" indent="0" marL="0">
+              <a:buNone/>
+            </a:pPr>
+            <a:r>
+              <a:rPr lang="en-US" sz="1400" b="1" dirty="0">
+                <a:solidFill>
+                  <a:schemeClr val="bg1"/>
+                </a:solidFill>
+              </a:rPr>
+              <a:t>1</a:t>
+            </a:r>
+            <a:endParaRPr lang="en-US" sz="1400" dirty="0"/>
+          </a:p>
+        </p:txBody>
+      </p:sp>
+      <p:sp>
+        <p:nvSpPr>
+          <p:cNvPr id="9" name="Text 7"/>
+          <p:cNvSpPr txBox="1"/>
+          <p:nvPr/>
+        </p:nvSpPr>
+        <p:spPr>
+          <a:xfrm>
+            <a:off x="5303520" y="1783080"/>
+            <a:ext cx="3246120" cy="731520"/>
+          </a:xfrm>
+          <a:prstGeom prst="rect">
+            <a:avLst/>
+          </a:prstGeom>
+          <a:noFill/>
+          <a:ln/>
+        </p:spPr>
+        <p:txBody>
+          <a:bodyPr wrap="square" lIns="0" tIns="0" rIns="0" bIns="0" rtlCol="0" anchor="t"/>
+          <a:lstStyle/>
+          <a:p>
+            <a:pPr indent="0" marL="0">
+              <a:buNone/>
+            </a:pPr>
+            <a:r>
+              <a:rPr lang="en-US" sz="1500" b="1" dirty="0">
+                <a:solidFill>
+                  <a:schemeClr val="tx1"/>
+                </a:solidFill>
+              </a:rPr>
+              <a:t>등급분류</a:t>
+            </a:r>
+            <a:endParaRPr lang="en-US" sz="1500" dirty="0"/>
+          </a:p>
+          <a:p>
+            <a:pPr indent="0" marL="0">
+              <a:buNone/>
+            </a:pPr>
+            <a:r>
+              <a:rPr lang="en-US" sz="1200" dirty="0">
+                <a:solidFill>
+                  <a:schemeClr val="accent4"/>
+                </a:solidFill>
+              </a:rPr>
+              <a:t>앱 마켓은 자체 등급, 내 사이트는 직접 확인</a:t>
+            </a:r>
+            <a:endParaRPr lang="en-US" sz="1500" dirty="0"/>
+          </a:p>
+        </p:txBody>
+      </p:sp>
+      <p:sp>
+        <p:nvSpPr>
+          <p:cNvPr id="10" name="badge2"/>
+          <p:cNvSpPr/>
+          <p:nvPr/>
+        </p:nvSpPr>
+        <p:spPr>
+          <a:xfrm>
+            <a:off x="4800600" y="2651760"/>
+            <a:ext cx="384048" cy="384048"/>
+          </a:xfrm>
+          <a:prstGeom prst="ellipse">
+            <a:avLst/>
+          </a:prstGeom>
+          <a:solidFill>
+            <a:schemeClr val="accent5"/>
+          </a:solidFill>
+          <a:ln/>
+        </p:spPr>
+      </p:sp>
+      <p:sp>
+        <p:nvSpPr>
+          <p:cNvPr id="11" name="Text 9"/>
+          <p:cNvSpPr txBox="1"/>
+          <p:nvPr/>
+        </p:nvSpPr>
+        <p:spPr>
+          <a:xfrm>
+            <a:off x="4800600" y="2651760"/>
+            <a:ext cx="384048" cy="384048"/>
+          </a:xfrm>
+          <a:prstGeom prst="rect">
+            <a:avLst/>
+          </a:prstGeom>
+          <a:noFill/>
+          <a:ln/>
+        </p:spPr>
+        <p:txBody>
+          <a:bodyPr wrap="square" lIns="0" tIns="0" rIns="0" bIns="0" rtlCol="0" anchor="ctr"/>
+          <a:lstStyle/>
+          <a:p>
+            <a:pPr algn="ctr" indent="0" marL="0">
+              <a:buNone/>
+            </a:pPr>
+            <a:r>
+              <a:rPr lang="en-US" sz="1400" b="1" dirty="0">
+                <a:solidFill>
+                  <a:schemeClr val="bg1"/>
+                </a:solidFill>
+              </a:rPr>
+              <a:t>2</a:t>
+            </a:r>
+            <a:endParaRPr lang="en-US" sz="1400" dirty="0"/>
+          </a:p>
+        </p:txBody>
+      </p:sp>
+      <p:sp>
+        <p:nvSpPr>
+          <p:cNvPr id="12" name="Text 10"/>
+          <p:cNvSpPr txBox="1"/>
+          <p:nvPr/>
+        </p:nvSpPr>
+        <p:spPr>
+          <a:xfrm>
+            <a:off x="5303520" y="2606040"/>
+            <a:ext cx="3246120" cy="731520"/>
+          </a:xfrm>
+          <a:prstGeom prst="rect">
+            <a:avLst/>
+          </a:prstGeom>
+          <a:noFill/>
+          <a:ln/>
+        </p:spPr>
+        <p:txBody>
+          <a:bodyPr wrap="square" lIns="0" tIns="0" rIns="0" bIns="0" rtlCol="0" anchor="t"/>
+          <a:lstStyle/>
+          <a:p>
+            <a:pPr indent="0" marL="0">
+              <a:buNone/>
+            </a:pPr>
+            <a:r>
+              <a:rPr lang="en-US" sz="1500" b="1" dirty="0">
+                <a:solidFill>
+                  <a:schemeClr val="tx1"/>
+                </a:solidFill>
+              </a:rPr>
+              <a:t>환전 금지</a:t>
+            </a:r>
+            <a:endParaRPr lang="en-US" sz="1500" dirty="0"/>
+          </a:p>
+          <a:p>
+            <a:pPr indent="0" marL="0">
+              <a:buNone/>
+            </a:pPr>
+            <a:r>
+              <a:rPr lang="en-US" sz="1200" dirty="0">
+                <a:solidFill>
+                  <a:schemeClr val="accent4"/>
+                </a:solidFill>
+              </a:rPr>
+              <a:t>이기면 돈을 받는 구조 = 도박</a:t>
+            </a:r>
+            <a:endParaRPr lang="en-US" sz="1500" dirty="0"/>
+          </a:p>
+        </p:txBody>
+      </p:sp>
+      <p:sp>
+        <p:nvSpPr>
+          <p:cNvPr id="13" name="badge3"/>
+          <p:cNvSpPr/>
+          <p:nvPr/>
+        </p:nvSpPr>
+        <p:spPr>
+          <a:xfrm>
+            <a:off x="4800600" y="3474720"/>
+            <a:ext cx="384048" cy="384048"/>
+          </a:xfrm>
+          <a:prstGeom prst="ellipse">
+            <a:avLst/>
+          </a:prstGeom>
+          <a:solidFill>
+            <a:schemeClr val="tx2"/>
+          </a:solidFill>
+          <a:ln/>
+        </p:spPr>
+      </p:sp>
+      <p:sp>
+        <p:nvSpPr>
+          <p:cNvPr id="14" name="Text 12"/>
+          <p:cNvSpPr txBox="1"/>
+          <p:nvPr/>
+        </p:nvSpPr>
+        <p:spPr>
+          <a:xfrm>
+            <a:off x="4800600" y="3474720"/>
+            <a:ext cx="384048" cy="384048"/>
+          </a:xfrm>
+          <a:prstGeom prst="rect">
+            <a:avLst/>
+          </a:prstGeom>
+          <a:noFill/>
+          <a:ln/>
+        </p:spPr>
+        <p:txBody>
+          <a:bodyPr wrap="square" lIns="0" tIns="0" rIns="0" bIns="0" rtlCol="0" anchor="ctr"/>
+          <a:lstStyle/>
+          <a:p>
+            <a:pPr algn="ctr" indent="0" marL="0">
+              <a:buNone/>
+            </a:pPr>
+            <a:r>
+              <a:rPr lang="en-US" sz="1400" b="1" dirty="0">
+                <a:solidFill>
+                  <a:schemeClr val="bg1"/>
+                </a:solidFill>
+              </a:rPr>
+              <a:t>3</a:t>
+            </a:r>
+            <a:endParaRPr lang="en-US" sz="1400" dirty="0"/>
+          </a:p>
+        </p:txBody>
+      </p:sp>
+      <p:sp>
+        <p:nvSpPr>
+          <p:cNvPr id="15" name="Text 13"/>
+          <p:cNvSpPr txBox="1"/>
+          <p:nvPr/>
+        </p:nvSpPr>
+        <p:spPr>
+          <a:xfrm>
+            <a:off x="5303520" y="3429000"/>
+            <a:ext cx="3246120" cy="731520"/>
+          </a:xfrm>
+          <a:prstGeom prst="rect">
+            <a:avLst/>
+          </a:prstGeom>
+          <a:noFill/>
+          <a:ln/>
+        </p:spPr>
+        <p:txBody>
+          <a:bodyPr wrap="square" lIns="0" tIns="0" rIns="0" bIns="0" rtlCol="0" anchor="t"/>
+          <a:lstStyle/>
+          <a:p>
+            <a:pPr indent="0" marL="0">
+              <a:buNone/>
+            </a:pPr>
+            <a:r>
+              <a:rPr lang="en-US" sz="1500" b="1" dirty="0">
+                <a:solidFill>
+                  <a:schemeClr val="tx1"/>
+                </a:solidFill>
+              </a:rPr>
+              <a:t>확률 공개</a:t>
+            </a:r>
+            <a:endParaRPr lang="en-US" sz="1500" dirty="0"/>
+          </a:p>
+          <a:p>
+            <a:pPr indent="0" marL="0">
+              <a:buNone/>
+            </a:pPr>
+            <a:r>
+              <a:rPr lang="en-US" sz="1200" dirty="0">
+                <a:solidFill>
+                  <a:schemeClr val="accent4"/>
+                </a:solidFill>
+              </a:rPr>
+              <a:t>유료 뽑기는 확률을 %로 공개</a:t>
+            </a:r>
+            <a:endParaRPr lang="en-US" sz="1500" dirty="0"/>
+          </a:p>
+        </p:txBody>
+      </p:sp>
+      <p:sp>
+        <p:nvSpPr>
+          <p:cNvPr id="25" name="Slide Number Placeholder 0"/>
+          <p:cNvSpPr>
+            <a:spLocks noGrp="1"/>
+          </p:cNvSpPr>
+          <p:nvPr>
+            <p:ph type="sldNum" sz="quarter" idx="4294967295"/>
+          </p:nvPr>
+        </p:nvSpPr>
+        <p:spPr>
+          <a:xfrm>
+            <a:off x="8321040" y="4754880"/>
+            <a:ext cx="457200" cy="274320"/>
+          </a:xfrm>
+          <a:prstGeom prst="rect">
+            <a:avLst/>
+          </a:prstGeom>
+          <a:extLst>
+            <a:ext uri="{C572A759-6A51-4108-AA02-DFA0A04FC94B}">
+              <ma14:wrappingTextBoxFlag xmlns:ma14="http://schemas.microsoft.com/office/mac/drawingml/2011/main" val="0"/>
+            </a:ext>
+          </a:extLst>
+        </p:spPr>
+        <p:txBody>
+          <a:bodyPr/>
+          <a:lstStyle>
+            <a:lvl1pPr>
+              <a:defRPr sz="1000">
+                <a:solidFill>
+                  <a:schemeClr val="accent4"/>
+                </a:solidFill>
+              </a:defRPr>
+            </a:lvl1pPr>
+          </a:lstStyle>
+          <a:p>
+            <a:pPr algn="r"/>
+            <a:fld id="{F7021451-1387-4CA6-816F-3879F97B5CBC}" type="slidenum">
+              <a:rPr b="0" lang="en-US"/>
+              <a:t>28</a:t>
+            </a:fld>
+            <a:endParaRPr lang="en-US"/>
+          </a:p>
+        </p:txBody>
+      </p:sp>
+    </p:spTree>
+  </p:cSld>
+  <p:clrMapOvr>
+    <a:masterClrMapping/>
+  </p:clrMapOvr>
+</p:sld>
+</file>
+
+<file path=ppt/slides/slide29.xml><?xml version="1.0" encoding="utf-8"?>
+<p:sld xmlns:a="http://schemas.openxmlformats.org/drawingml/2006/main" xmlns:r="http://schemas.openxmlformats.org/officeDocument/2006/relationships" xmlns:p="http://schemas.openxmlformats.org/presentationml/2006/main">
+  <p:cSld name="Slide 29">
+    <p:spTree>
+      <p:nvGrpSpPr>
+        <p:cNvPr id="1" name=""/>
+        <p:cNvGrpSpPr/>
+        <p:nvPr/>
+      </p:nvGrpSpPr>
+      <p:grpSpPr>
+        <a:xfrm>
+          <a:off x="0" y="0"/>
+          <a:ext cx="0" cy="0"/>
+          <a:chOff x="0" y="0"/>
+          <a:chExt cx="0" cy="0"/>
+        </a:xfrm>
+      </p:grpSpPr>
+      <p:sp>
+        <p:nvSpPr>
+          <p:cNvPr id="2" name="Text 0"/>
+          <p:cNvSpPr/>
+          <p:nvPr>
+            <p:ph idx="100" type="title" hasCustomPrompt="1"/>
+          </p:nvPr>
+        </p:nvSpPr>
+        <p:spPr>
+          <a:xfrm>
+            <a:off x="457200" y="274320"/>
+            <a:ext cx="8229600" cy="685800"/>
+          </a:xfrm>
+          <a:prstGeom prst="rect">
+            <a:avLst/>
+          </a:prstGeom>
+          <a:noFill/>
+          <a:ln/>
+        </p:spPr>
+        <p:txBody>
+          <a:bodyPr wrap="square" lIns="0" tIns="0" rIns="0" bIns="0" rtlCol="0" anchor="ctr"/>
+          <a:lstStyle/>
+          <a:p>
+            <a:pPr indent="0" marL="0">
+              <a:buNone/>
+            </a:pPr>
+            <a:r>
+              <a:rPr lang="en-US" sz="2800" b="1" dirty="0">
+                <a:solidFill>
+                  <a:schemeClr val="tx2"/>
+                </a:solidFill>
+              </a:rPr>
+              <a:t>사업 아이템 비교와 키우는 순서</a:t>
+            </a:r>
+            <a:endParaRPr lang="en-US" sz="2800" dirty="0"/>
+          </a:p>
+        </p:txBody>
+      </p:sp>
+      <p:graphicFrame>
+        <p:nvGraphicFramePr>
+          <p:cNvPr id="30" name="Table 0"/>
+          <p:cNvGraphicFramePr>
+            <a:graphicFrameLocks noGrp="1"/>
+          </p:cNvGraphicFramePr>
+          <p:nvPr>
+            <p:extLst>
+              <p:ext uri="{D42A27DB-BD31-4B8C-83A1-F6EECF244321}">
+                <p14:modId xmlns:p14="http://schemas.microsoft.com/office/powerpoint/2010/main" val="1579011935"/>
+              </p:ext>
+            </p:extLst>
+          </p:nvPr>
+        </p:nvGraphicFramePr>
+        <p:xfrm>
+          <a:off x="457200" y="1143000"/>
+          <a:ext cx="5120640" cy="914400"/>
+        </p:xfrm>
+        <a:graphic>
+          <a:graphicData uri="http://schemas.openxmlformats.org/drawingml/2006/table">
+            <a:tbl>
+              <a:tblPr/>
+              <a:tblGrid>
+                <a:gridCol w="1828800"/>
+                <a:gridCol w="822960"/>
+                <a:gridCol w="822960"/>
+                <a:gridCol w="822960"/>
+                <a:gridCol w="822960"/>
+              </a:tblGrid>
+              <a:tr h="411480">
+                <a:tc>
+                  <a:txBody>
+                    <a:bodyPr/>
+                    <a:lstStyle/>
+                    <a:p>
+                      <a:pPr indent="0" marL="0">
+                        <a:buNone/>
+                      </a:pPr>
+                      <a:r>
+                        <a:rPr lang="en-US" sz="1200" b="1" dirty="0">
+                          <a:solidFill>
+                            <a:schemeClr val="bg1"/>
+                          </a:solidFill>
+                        </a:rPr>
+                        <a:t>아이템</a:t>
+                      </a:r>
+                      <a:endParaRPr lang="en-US" sz="1200" dirty="0"/>
+                    </a:p>
+                  </a:txBody>
+                  <a:tcPr marL="91440" marR="91440" marT="45720" marB="45720" anchor="ctr">
+                    <a:lnL w="12700" cap="flat" cmpd="sng" algn="ctr">
+                      <a:solidFill>
+                        <a:srgbClr val="EEF4F3"/>
+                      </a:solidFill>
+                      <a:prstDash val="solid"/>
+                      <a:round/>
+                      <a:headEnd type="none" w="med" len="med"/>
+                      <a:tailEnd type="none" w="med" len="med"/>
+                    </a:lnL>
+                    <a:lnR w="12700" cap="flat" cmpd="sng" algn="ctr">
+                      <a:solidFill>
+                        <a:srgbClr val="EEF4F3"/>
+                      </a:solidFill>
+                      <a:prstDash val="solid"/>
+                      <a:round/>
+                      <a:headEnd type="none" w="med" len="med"/>
+                      <a:tailEnd type="none" w="med" len="med"/>
+                    </a:lnR>
+                    <a:lnT w="12700" cap="flat" cmpd="sng" algn="ctr">
+                      <a:solidFill>
+                        <a:srgbClr val="EEF4F3"/>
+                      </a:solidFill>
+                      <a:prstDash val="solid"/>
+                      <a:round/>
+                      <a:headEnd type="none" w="med" len="med"/>
+                      <a:tailEnd type="none" w="med" len="med"/>
+                    </a:lnT>
+                    <a:lnB w="12700" cap="flat" cmpd="sng" algn="ctr">
+                      <a:solidFill>
+                        <a:srgbClr val="EEF4F3"/>
+                      </a:solidFill>
+                      <a:prstDash val="solid"/>
+                      <a:round/>
+                      <a:headEnd type="none" w="med" len="med"/>
+                      <a:tailEnd type="none" w="med" len="med"/>
+                    </a:lnB>
+                    <a:solidFill>
+                      <a:schemeClr val="tx2"/>
+                    </a:solidFill>
+                  </a:tcPr>
+                </a:tc>
+                <a:tc>
+                  <a:txBody>
+                    <a:bodyPr/>
+                    <a:lstStyle/>
+                    <a:p>
+                      <a:pPr indent="0" marL="0">
+                        <a:buNone/>
+                      </a:pPr>
+                      <a:r>
+                        <a:rPr lang="en-US" sz="1200" b="1" dirty="0">
+                          <a:solidFill>
+                            <a:schemeClr val="bg1"/>
+                          </a:solidFill>
+                        </a:rPr>
+                        <a:t>시작</a:t>
+                      </a:r>
+                      <a:endParaRPr lang="en-US" sz="1200" dirty="0"/>
+                    </a:p>
+                  </a:txBody>
+                  <a:tcPr marL="91440" marR="91440" marT="45720" marB="45720" anchor="ctr">
+                    <a:lnL w="12700" cap="flat" cmpd="sng" algn="ctr">
+                      <a:solidFill>
+                        <a:srgbClr val="EEF4F3"/>
+                      </a:solidFill>
+                      <a:prstDash val="solid"/>
+                      <a:round/>
+                      <a:headEnd type="none" w="med" len="med"/>
+                      <a:tailEnd type="none" w="med" len="med"/>
+                    </a:lnL>
+                    <a:lnR w="12700" cap="flat" cmpd="sng" algn="ctr">
+                      <a:solidFill>
+                        <a:srgbClr val="EEF4F3"/>
+                      </a:solidFill>
+                      <a:prstDash val="solid"/>
+                      <a:round/>
+                      <a:headEnd type="none" w="med" len="med"/>
+                      <a:tailEnd type="none" w="med" len="med"/>
+                    </a:lnR>
+                    <a:lnT w="12700" cap="flat" cmpd="sng" algn="ctr">
+                      <a:solidFill>
+                        <a:srgbClr val="EEF4F3"/>
+                      </a:solidFill>
+                      <a:prstDash val="solid"/>
+                      <a:round/>
+                      <a:headEnd type="none" w="med" len="med"/>
+                      <a:tailEnd type="none" w="med" len="med"/>
+                    </a:lnT>
+                    <a:lnB w="12700" cap="flat" cmpd="sng" algn="ctr">
+                      <a:solidFill>
+                        <a:srgbClr val="EEF4F3"/>
+                      </a:solidFill>
+                      <a:prstDash val="solid"/>
+                      <a:round/>
+                      <a:headEnd type="none" w="med" len="med"/>
+                      <a:tailEnd type="none" w="med" len="med"/>
+                    </a:lnB>
+                    <a:solidFill>
+                      <a:schemeClr val="tx2"/>
+                    </a:solidFill>
+                  </a:tcPr>
+                </a:tc>
+                <a:tc>
+                  <a:txBody>
+                    <a:bodyPr/>
+                    <a:lstStyle/>
+                    <a:p>
+                      <a:pPr indent="0" marL="0">
+                        <a:buNone/>
+                      </a:pPr>
+                      <a:r>
+                        <a:rPr lang="en-US" sz="1200" b="1" dirty="0">
+                          <a:solidFill>
+                            <a:schemeClr val="bg1"/>
+                          </a:solidFill>
+                        </a:rPr>
+                        <a:t>개발</a:t>
+                      </a:r>
+                      <a:endParaRPr lang="en-US" sz="1200" dirty="0"/>
+                    </a:p>
+                  </a:txBody>
+                  <a:tcPr marL="91440" marR="91440" marT="45720" marB="45720" anchor="ctr">
+                    <a:lnL w="12700" cap="flat" cmpd="sng" algn="ctr">
+                      <a:solidFill>
+                        <a:srgbClr val="EEF4F3"/>
+                      </a:solidFill>
+                      <a:prstDash val="solid"/>
+                      <a:round/>
+                      <a:headEnd type="none" w="med" len="med"/>
+                      <a:tailEnd type="none" w="med" len="med"/>
+                    </a:lnL>
+                    <a:lnR w="12700" cap="flat" cmpd="sng" algn="ctr">
+                      <a:solidFill>
+                        <a:srgbClr val="EEF4F3"/>
+                      </a:solidFill>
+                      <a:prstDash val="solid"/>
+                      <a:round/>
+                      <a:headEnd type="none" w="med" len="med"/>
+                      <a:tailEnd type="none" w="med" len="med"/>
+                    </a:lnR>
+                    <a:lnT w="12700" cap="flat" cmpd="sng" algn="ctr">
+                      <a:solidFill>
+                        <a:srgbClr val="EEF4F3"/>
+                      </a:solidFill>
+                      <a:prstDash val="solid"/>
+                      <a:round/>
+                      <a:headEnd type="none" w="med" len="med"/>
+                      <a:tailEnd type="none" w="med" len="med"/>
+                    </a:lnT>
+                    <a:lnB w="12700" cap="flat" cmpd="sng" algn="ctr">
+                      <a:solidFill>
+                        <a:srgbClr val="EEF4F3"/>
+                      </a:solidFill>
+                      <a:prstDash val="solid"/>
+                      <a:round/>
+                      <a:headEnd type="none" w="med" len="med"/>
+                      <a:tailEnd type="none" w="med" len="med"/>
+                    </a:lnB>
+                    <a:solidFill>
+                      <a:schemeClr val="tx2"/>
+                    </a:solidFill>
+                  </a:tcPr>
+                </a:tc>
+                <a:tc>
+                  <a:txBody>
+                    <a:bodyPr/>
+                    <a:lstStyle/>
+                    <a:p>
+                      <a:pPr indent="0" marL="0">
+                        <a:buNone/>
+                      </a:pPr>
+                      <a:r>
+                        <a:rPr lang="en-US" sz="1200" b="1" dirty="0">
+                          <a:solidFill>
+                            <a:schemeClr val="bg1"/>
+                          </a:solidFill>
+                        </a:rPr>
+                        <a:t>운영 부담</a:t>
+                      </a:r>
+                      <a:endParaRPr lang="en-US" sz="1200" dirty="0"/>
+                    </a:p>
+                  </a:txBody>
+                  <a:tcPr marL="91440" marR="91440" marT="45720" marB="45720" anchor="ctr">
+                    <a:lnL w="12700" cap="flat" cmpd="sng" algn="ctr">
+                      <a:solidFill>
+                        <a:srgbClr val="EEF4F3"/>
+                      </a:solidFill>
+                      <a:prstDash val="solid"/>
+                      <a:round/>
+                      <a:headEnd type="none" w="med" len="med"/>
+                      <a:tailEnd type="none" w="med" len="med"/>
+                    </a:lnL>
+                    <a:lnR w="12700" cap="flat" cmpd="sng" algn="ctr">
+                      <a:solidFill>
+                        <a:srgbClr val="EEF4F3"/>
+                      </a:solidFill>
+                      <a:prstDash val="solid"/>
+                      <a:round/>
+                      <a:headEnd type="none" w="med" len="med"/>
+                      <a:tailEnd type="none" w="med" len="med"/>
+                    </a:lnR>
+                    <a:lnT w="12700" cap="flat" cmpd="sng" algn="ctr">
+                      <a:solidFill>
+                        <a:srgbClr val="EEF4F3"/>
+                      </a:solidFill>
+                      <a:prstDash val="solid"/>
+                      <a:round/>
+                      <a:headEnd type="none" w="med" len="med"/>
+                      <a:tailEnd type="none" w="med" len="med"/>
+                    </a:lnT>
+                    <a:lnB w="12700" cap="flat" cmpd="sng" algn="ctr">
+                      <a:solidFill>
+                        <a:srgbClr val="EEF4F3"/>
+                      </a:solidFill>
+                      <a:prstDash val="solid"/>
+                      <a:round/>
+                      <a:headEnd type="none" w="med" len="med"/>
+                      <a:tailEnd type="none" w="med" len="med"/>
+                    </a:lnB>
+                    <a:solidFill>
+                      <a:schemeClr val="tx2"/>
+                    </a:solidFill>
+                  </a:tcPr>
+                </a:tc>
+                <a:tc>
+                  <a:txBody>
+                    <a:bodyPr/>
+                    <a:lstStyle/>
+                    <a:p>
+                      <a:pPr indent="0" marL="0">
+                        <a:buNone/>
+                      </a:pPr>
+                      <a:r>
+                        <a:rPr lang="en-US" sz="1200" b="1" dirty="0">
+                          <a:solidFill>
+                            <a:schemeClr val="bg1"/>
+                          </a:solidFill>
+                        </a:rPr>
+                        <a:t>위험</a:t>
+                      </a:r>
+                      <a:endParaRPr lang="en-US" sz="1200" dirty="0"/>
+                    </a:p>
+                  </a:txBody>
+                  <a:tcPr marL="91440" marR="91440" marT="45720" marB="45720" anchor="ctr">
+                    <a:lnL w="12700" cap="flat" cmpd="sng" algn="ctr">
+                      <a:solidFill>
+                        <a:srgbClr val="EEF4F3"/>
+                      </a:solidFill>
+                      <a:prstDash val="solid"/>
+                      <a:round/>
+                      <a:headEnd type="none" w="med" len="med"/>
+                      <a:tailEnd type="none" w="med" len="med"/>
+                    </a:lnL>
+                    <a:lnR w="12700" cap="flat" cmpd="sng" algn="ctr">
+                      <a:solidFill>
+                        <a:srgbClr val="EEF4F3"/>
+                      </a:solidFill>
+                      <a:prstDash val="solid"/>
+                      <a:round/>
+                      <a:headEnd type="none" w="med" len="med"/>
+                      <a:tailEnd type="none" w="med" len="med"/>
+                    </a:lnR>
+                    <a:lnT w="12700" cap="flat" cmpd="sng" algn="ctr">
+                      <a:solidFill>
+                        <a:srgbClr val="EEF4F3"/>
+                      </a:solidFill>
+                      <a:prstDash val="solid"/>
+                      <a:round/>
+                      <a:headEnd type="none" w="med" len="med"/>
+                      <a:tailEnd type="none" w="med" len="med"/>
+                    </a:lnT>
+                    <a:lnB w="12700" cap="flat" cmpd="sng" algn="ctr">
+                      <a:solidFill>
+                        <a:srgbClr val="EEF4F3"/>
+                      </a:solidFill>
+                      <a:prstDash val="solid"/>
+                      <a:round/>
+                      <a:headEnd type="none" w="med" len="med"/>
+                      <a:tailEnd type="none" w="med" len="med"/>
+                    </a:lnB>
+                    <a:solidFill>
+                      <a:schemeClr val="tx2"/>
+                    </a:solidFill>
+                  </a:tcPr>
+                </a:tc>
+              </a:tr>
+              <a:tr h="411480">
+                <a:tc>
+                  <a:txBody>
+                    <a:bodyPr/>
+                    <a:lstStyle/>
+                    <a:p>
+                      <a:pPr indent="0" marL="0">
+                        <a:buNone/>
+                      </a:pPr>
+                      <a:r>
+                        <a:rPr lang="en-US" sz="1200" dirty="0">
+                          <a:solidFill>
+                            <a:schemeClr val="tx1"/>
+                          </a:solidFill>
+                        </a:rPr>
+                        <a:t>정보 블로그 · 뉴스레터</a:t>
+                      </a:r>
+                      <a:endParaRPr lang="en-US" sz="1200" dirty="0"/>
+                    </a:p>
+                  </a:txBody>
+                  <a:tcPr marL="91440" marR="91440" marT="45720" marB="45720" anchor="ctr">
+                    <a:lnL w="12700" cap="flat" cmpd="sng" algn="ctr">
+                      <a:solidFill>
+                        <a:srgbClr val="EEF4F3"/>
+                      </a:solidFill>
+                      <a:prstDash val="solid"/>
+                      <a:round/>
+                      <a:headEnd type="none" w="med" len="med"/>
+                      <a:tailEnd type="none" w="med" len="med"/>
+                    </a:lnL>
+                    <a:lnR w="12700" cap="flat" cmpd="sng" algn="ctr">
+                      <a:solidFill>
+                        <a:srgbClr val="EEF4F3"/>
+                      </a:solidFill>
+                      <a:prstDash val="solid"/>
+                      <a:round/>
+                      <a:headEnd type="none" w="med" len="med"/>
+                      <a:tailEnd type="none" w="med" len="med"/>
+                    </a:lnR>
+                    <a:lnT w="12700" cap="flat" cmpd="sng" algn="ctr">
+                      <a:solidFill>
+                        <a:srgbClr val="EEF4F3"/>
+                      </a:solidFill>
+                      <a:prstDash val="solid"/>
+                      <a:round/>
+                      <a:headEnd type="none" w="med" len="med"/>
+                      <a:tailEnd type="none" w="med" len="med"/>
+                    </a:lnT>
+                    <a:lnB w="12700" cap="flat" cmpd="sng" algn="ctr">
+                      <a:solidFill>
+                        <a:srgbClr val="EEF4F3"/>
+                      </a:solidFill>
+                      <a:prstDash val="solid"/>
+                      <a:round/>
+                      <a:headEnd type="none" w="med" len="med"/>
+                      <a:tailEnd type="none" w="med" len="med"/>
+                    </a:lnB>
+                  </a:tcPr>
+                </a:tc>
+                <a:tc>
+                  <a:txBody>
+                    <a:bodyPr/>
+                    <a:lstStyle/>
+                    <a:p>
+                      <a:pPr indent="0" marL="0">
+                        <a:buNone/>
+                      </a:pPr>
+                      <a:r>
+                        <a:rPr lang="en-US" sz="1200" dirty="0">
+                          <a:solidFill>
+                            <a:schemeClr val="tx1"/>
+                          </a:solidFill>
+                        </a:rPr>
+                        <a:t>쉬움</a:t>
+                      </a:r>
+                      <a:endParaRPr lang="en-US" sz="1200" dirty="0"/>
+                    </a:p>
+                  </a:txBody>
+                  <a:tcPr marL="91440" marR="91440" marT="45720" marB="45720" anchor="ctr">
+                    <a:lnL w="12700" cap="flat" cmpd="sng" algn="ctr">
+                      <a:solidFill>
+                        <a:srgbClr val="EEF4F3"/>
+                      </a:solidFill>
+                      <a:prstDash val="solid"/>
+                      <a:round/>
+                      <a:headEnd type="none" w="med" len="med"/>
+                      <a:tailEnd type="none" w="med" len="med"/>
+                    </a:lnL>
+                    <a:lnR w="12700" cap="flat" cmpd="sng" algn="ctr">
+                      <a:solidFill>
+                        <a:srgbClr val="EEF4F3"/>
+                      </a:solidFill>
+                      <a:prstDash val="solid"/>
+                      <a:round/>
+                      <a:headEnd type="none" w="med" len="med"/>
+                      <a:tailEnd type="none" w="med" len="med"/>
+                    </a:lnR>
+                    <a:lnT w="12700" cap="flat" cmpd="sng" algn="ctr">
+                      <a:solidFill>
+                        <a:srgbClr val="EEF4F3"/>
+                      </a:solidFill>
+                      <a:prstDash val="solid"/>
+                      <a:round/>
+                      <a:headEnd type="none" w="med" len="med"/>
+                      <a:tailEnd type="none" w="med" len="med"/>
+                    </a:lnT>
+                    <a:lnB w="12700" cap="flat" cmpd="sng" algn="ctr">
+                      <a:solidFill>
+                        <a:srgbClr val="EEF4F3"/>
+                      </a:solidFill>
+                      <a:prstDash val="solid"/>
+                      <a:round/>
+                      <a:headEnd type="none" w="med" len="med"/>
+                      <a:tailEnd type="none" w="med" len="med"/>
+                    </a:lnB>
+                  </a:tcPr>
+                </a:tc>
+                <a:tc>
+                  <a:txBody>
+                    <a:bodyPr/>
+                    <a:lstStyle/>
+                    <a:p>
+                      <a:pPr indent="0" marL="0">
+                        <a:buNone/>
+                      </a:pPr>
+                      <a:r>
+                        <a:rPr lang="en-US" sz="1200" dirty="0">
+                          <a:solidFill>
+                            <a:schemeClr val="tx1"/>
+                          </a:solidFill>
+                        </a:rPr>
+                        <a:t>거의 없음</a:t>
+                      </a:r>
+                      <a:endParaRPr lang="en-US" sz="1200" dirty="0"/>
+                    </a:p>
+                  </a:txBody>
+                  <a:tcPr marL="91440" marR="91440" marT="45720" marB="45720" anchor="ctr">
+                    <a:lnL w="12700" cap="flat" cmpd="sng" algn="ctr">
+                      <a:solidFill>
+                        <a:srgbClr val="EEF4F3"/>
+                      </a:solidFill>
+                      <a:prstDash val="solid"/>
+                      <a:round/>
+                      <a:headEnd type="none" w="med" len="med"/>
+                      <a:tailEnd type="none" w="med" len="med"/>
+                    </a:lnL>
+                    <a:lnR w="12700" cap="flat" cmpd="sng" algn="ctr">
+                      <a:solidFill>
+                        <a:srgbClr val="EEF4F3"/>
+                      </a:solidFill>
+                      <a:prstDash val="solid"/>
+                      <a:round/>
+                      <a:headEnd type="none" w="med" len="med"/>
+                      <a:tailEnd type="none" w="med" len="med"/>
+                    </a:lnR>
+                    <a:lnT w="12700" cap="flat" cmpd="sng" algn="ctr">
+                      <a:solidFill>
+                        <a:srgbClr val="EEF4F3"/>
+                      </a:solidFill>
+                      <a:prstDash val="solid"/>
+                      <a:round/>
+                      <a:headEnd type="none" w="med" len="med"/>
+                      <a:tailEnd type="none" w="med" len="med"/>
+                    </a:lnT>
+                    <a:lnB w="12700" cap="flat" cmpd="sng" algn="ctr">
+                      <a:solidFill>
+                        <a:srgbClr val="EEF4F3"/>
+                      </a:solidFill>
+                      <a:prstDash val="solid"/>
+                      <a:round/>
+                      <a:headEnd type="none" w="med" len="med"/>
+                      <a:tailEnd type="none" w="med" len="med"/>
+                    </a:lnB>
+                  </a:tcPr>
+                </a:tc>
+                <a:tc>
+                  <a:txBody>
+                    <a:bodyPr/>
+                    <a:lstStyle/>
+                    <a:p>
+                      <a:pPr indent="0" marL="0">
+                        <a:buNone/>
+                      </a:pPr>
+                      <a:r>
+                        <a:rPr lang="en-US" sz="1200" dirty="0">
+                          <a:solidFill>
+                            <a:schemeClr val="tx1"/>
+                          </a:solidFill>
+                        </a:rPr>
+                        <a:t>중간</a:t>
+                      </a:r>
+                      <a:endParaRPr lang="en-US" sz="1200" dirty="0"/>
+                    </a:p>
+                  </a:txBody>
+                  <a:tcPr marL="91440" marR="91440" marT="45720" marB="45720" anchor="ctr">
+                    <a:lnL w="12700" cap="flat" cmpd="sng" algn="ctr">
+                      <a:solidFill>
+                        <a:srgbClr val="EEF4F3"/>
+                      </a:solidFill>
+                      <a:prstDash val="solid"/>
+                      <a:round/>
+                      <a:headEnd type="none" w="med" len="med"/>
+                      <a:tailEnd type="none" w="med" len="med"/>
+                    </a:lnL>
+                    <a:lnR w="12700" cap="flat" cmpd="sng" algn="ctr">
+                      <a:solidFill>
+                        <a:srgbClr val="EEF4F3"/>
+                      </a:solidFill>
+                      <a:prstDash val="solid"/>
+                      <a:round/>
+                      <a:headEnd type="none" w="med" len="med"/>
+                      <a:tailEnd type="none" w="med" len="med"/>
+                    </a:lnR>
+                    <a:lnT w="12700" cap="flat" cmpd="sng" algn="ctr">
+                      <a:solidFill>
+                        <a:srgbClr val="EEF4F3"/>
+                      </a:solidFill>
+                      <a:prstDash val="solid"/>
+                      <a:round/>
+                      <a:headEnd type="none" w="med" len="med"/>
+                      <a:tailEnd type="none" w="med" len="med"/>
+                    </a:lnT>
+                    <a:lnB w="12700" cap="flat" cmpd="sng" algn="ctr">
+                      <a:solidFill>
+                        <a:srgbClr val="EEF4F3"/>
+                      </a:solidFill>
+                      <a:prstDash val="solid"/>
+                      <a:round/>
+                      <a:headEnd type="none" w="med" len="med"/>
+                      <a:tailEnd type="none" w="med" len="med"/>
+                    </a:lnB>
+                  </a:tcPr>
+                </a:tc>
+                <a:tc>
+                  <a:txBody>
+                    <a:bodyPr/>
+                    <a:lstStyle/>
+                    <a:p>
+                      <a:pPr indent="0" marL="0">
+                        <a:buNone/>
+                      </a:pPr>
+                      <a:r>
+                        <a:rPr lang="en-US" sz="1200" dirty="0">
+                          <a:solidFill>
+                            <a:schemeClr val="tx1"/>
+                          </a:solidFill>
+                        </a:rPr>
+                        <a:t>낮음</a:t>
+                      </a:r>
+                      <a:endParaRPr lang="en-US" sz="1200" dirty="0"/>
+                    </a:p>
+                  </a:txBody>
+                  <a:tcPr marL="91440" marR="91440" marT="45720" marB="45720" anchor="ctr">
+                    <a:lnL w="12700" cap="flat" cmpd="sng" algn="ctr">
+                      <a:solidFill>
+                        <a:srgbClr val="EEF4F3"/>
+                      </a:solidFill>
+                      <a:prstDash val="solid"/>
+                      <a:round/>
+                      <a:headEnd type="none" w="med" len="med"/>
+                      <a:tailEnd type="none" w="med" len="med"/>
+                    </a:lnL>
+                    <a:lnR w="12700" cap="flat" cmpd="sng" algn="ctr">
+                      <a:solidFill>
+                        <a:srgbClr val="EEF4F3"/>
+                      </a:solidFill>
+                      <a:prstDash val="solid"/>
+                      <a:round/>
+                      <a:headEnd type="none" w="med" len="med"/>
+                      <a:tailEnd type="none" w="med" len="med"/>
+                    </a:lnR>
+                    <a:lnT w="12700" cap="flat" cmpd="sng" algn="ctr">
+                      <a:solidFill>
+                        <a:srgbClr val="EEF4F3"/>
+                      </a:solidFill>
+                      <a:prstDash val="solid"/>
+                      <a:round/>
+                      <a:headEnd type="none" w="med" len="med"/>
+                      <a:tailEnd type="none" w="med" len="med"/>
+                    </a:lnT>
+                    <a:lnB w="12700" cap="flat" cmpd="sng" algn="ctr">
+                      <a:solidFill>
+                        <a:srgbClr val="EEF4F3"/>
+                      </a:solidFill>
+                      <a:prstDash val="solid"/>
+                      <a:round/>
+                      <a:headEnd type="none" w="med" len="med"/>
+                      <a:tailEnd type="none" w="med" len="med"/>
+                    </a:lnB>
+                  </a:tcPr>
+                </a:tc>
+              </a:tr>
+              <a:tr h="411480">
+                <a:tc>
+                  <a:txBody>
+                    <a:bodyPr/>
+                    <a:lstStyle/>
+                    <a:p>
+                      <a:pPr indent="0" marL="0">
+                        <a:buNone/>
+                      </a:pPr>
+                      <a:r>
+                        <a:rPr lang="en-US" sz="1200" dirty="0">
+                          <a:solidFill>
+                            <a:schemeClr val="tx1"/>
+                          </a:solidFill>
+                        </a:rPr>
+                        <a:t>도구(계산기) 사이트</a:t>
+                      </a:r>
+                      <a:endParaRPr lang="en-US" sz="1200" dirty="0"/>
+                    </a:p>
+                  </a:txBody>
+                  <a:tcPr marL="91440" marR="91440" marT="45720" marB="45720" anchor="ctr">
+                    <a:lnL w="12700" cap="flat" cmpd="sng" algn="ctr">
+                      <a:solidFill>
+                        <a:srgbClr val="EEF4F3"/>
+                      </a:solidFill>
+                      <a:prstDash val="solid"/>
+                      <a:round/>
+                      <a:headEnd type="none" w="med" len="med"/>
+                      <a:tailEnd type="none" w="med" len="med"/>
+                    </a:lnL>
+                    <a:lnR w="12700" cap="flat" cmpd="sng" algn="ctr">
+                      <a:solidFill>
+                        <a:srgbClr val="EEF4F3"/>
+                      </a:solidFill>
+                      <a:prstDash val="solid"/>
+                      <a:round/>
+                      <a:headEnd type="none" w="med" len="med"/>
+                      <a:tailEnd type="none" w="med" len="med"/>
+                    </a:lnR>
+                    <a:lnT w="12700" cap="flat" cmpd="sng" algn="ctr">
+                      <a:solidFill>
+                        <a:srgbClr val="EEF4F3"/>
+                      </a:solidFill>
+                      <a:prstDash val="solid"/>
+                      <a:round/>
+                      <a:headEnd type="none" w="med" len="med"/>
+                      <a:tailEnd type="none" w="med" len="med"/>
+                    </a:lnT>
+                    <a:lnB w="12700" cap="flat" cmpd="sng" algn="ctr">
+                      <a:solidFill>
+                        <a:srgbClr val="EEF4F3"/>
+                      </a:solidFill>
+                      <a:prstDash val="solid"/>
+                      <a:round/>
+                      <a:headEnd type="none" w="med" len="med"/>
+                      <a:tailEnd type="none" w="med" len="med"/>
+                    </a:lnB>
+                  </a:tcPr>
+                </a:tc>
+                <a:tc>
+                  <a:txBody>
+                    <a:bodyPr/>
+                    <a:lstStyle/>
+                    <a:p>
+                      <a:pPr indent="0" marL="0">
+                        <a:buNone/>
+                      </a:pPr>
+                      <a:r>
+                        <a:rPr lang="en-US" sz="1200" dirty="0">
+                          <a:solidFill>
+                            <a:schemeClr val="tx1"/>
+                          </a:solidFill>
+                        </a:rPr>
+                        <a:t>쉬움</a:t>
+                      </a:r>
+                      <a:endParaRPr lang="en-US" sz="1200" dirty="0"/>
+                    </a:p>
+                  </a:txBody>
+                  <a:tcPr marL="91440" marR="91440" marT="45720" marB="45720" anchor="ctr">
+                    <a:lnL w="12700" cap="flat" cmpd="sng" algn="ctr">
+                      <a:solidFill>
+                        <a:srgbClr val="EEF4F3"/>
+                      </a:solidFill>
+                      <a:prstDash val="solid"/>
+                      <a:round/>
+                      <a:headEnd type="none" w="med" len="med"/>
+                      <a:tailEnd type="none" w="med" len="med"/>
+                    </a:lnL>
+                    <a:lnR w="12700" cap="flat" cmpd="sng" algn="ctr">
+                      <a:solidFill>
+                        <a:srgbClr val="EEF4F3"/>
+                      </a:solidFill>
+                      <a:prstDash val="solid"/>
+                      <a:round/>
+                      <a:headEnd type="none" w="med" len="med"/>
+                      <a:tailEnd type="none" w="med" len="med"/>
+                    </a:lnR>
+                    <a:lnT w="12700" cap="flat" cmpd="sng" algn="ctr">
+                      <a:solidFill>
+                        <a:srgbClr val="EEF4F3"/>
+                      </a:solidFill>
+                      <a:prstDash val="solid"/>
+                      <a:round/>
+                      <a:headEnd type="none" w="med" len="med"/>
+                      <a:tailEnd type="none" w="med" len="med"/>
+                    </a:lnT>
+                    <a:lnB w="12700" cap="flat" cmpd="sng" algn="ctr">
+                      <a:solidFill>
+                        <a:srgbClr val="EEF4F3"/>
+                      </a:solidFill>
+                      <a:prstDash val="solid"/>
+                      <a:round/>
+                      <a:headEnd type="none" w="med" len="med"/>
+                      <a:tailEnd type="none" w="med" len="med"/>
+                    </a:lnB>
+                  </a:tcPr>
+                </a:tc>
+                <a:tc>
+                  <a:txBody>
+                    <a:bodyPr/>
+                    <a:lstStyle/>
+                    <a:p>
+                      <a:pPr indent="0" marL="0">
+                        <a:buNone/>
+                      </a:pPr>
+                      <a:r>
+                        <a:rPr lang="en-US" sz="1200" dirty="0">
+                          <a:solidFill>
+                            <a:schemeClr val="tx1"/>
+                          </a:solidFill>
+                        </a:rPr>
+                        <a:t>조금</a:t>
+                      </a:r>
+                      <a:endParaRPr lang="en-US" sz="1200" dirty="0"/>
+                    </a:p>
+                  </a:txBody>
+                  <a:tcPr marL="91440" marR="91440" marT="45720" marB="45720" anchor="ctr">
+                    <a:lnL w="12700" cap="flat" cmpd="sng" algn="ctr">
+                      <a:solidFill>
+                        <a:srgbClr val="EEF4F3"/>
+                      </a:solidFill>
+                      <a:prstDash val="solid"/>
+                      <a:round/>
+                      <a:headEnd type="none" w="med" len="med"/>
+                      <a:tailEnd type="none" w="med" len="med"/>
+                    </a:lnL>
+                    <a:lnR w="12700" cap="flat" cmpd="sng" algn="ctr">
+                      <a:solidFill>
+                        <a:srgbClr val="EEF4F3"/>
+                      </a:solidFill>
+                      <a:prstDash val="solid"/>
+                      <a:round/>
+                      <a:headEnd type="none" w="med" len="med"/>
+                      <a:tailEnd type="none" w="med" len="med"/>
+                    </a:lnR>
+                    <a:lnT w="12700" cap="flat" cmpd="sng" algn="ctr">
+                      <a:solidFill>
+                        <a:srgbClr val="EEF4F3"/>
+                      </a:solidFill>
+                      <a:prstDash val="solid"/>
+                      <a:round/>
+                      <a:headEnd type="none" w="med" len="med"/>
+                      <a:tailEnd type="none" w="med" len="med"/>
+                    </a:lnT>
+                    <a:lnB w="12700" cap="flat" cmpd="sng" algn="ctr">
+                      <a:solidFill>
+                        <a:srgbClr val="EEF4F3"/>
+                      </a:solidFill>
+                      <a:prstDash val="solid"/>
+                      <a:round/>
+                      <a:headEnd type="none" w="med" len="med"/>
+                      <a:tailEnd type="none" w="med" len="med"/>
+                    </a:lnB>
+                  </a:tcPr>
+                </a:tc>
+                <a:tc>
+                  <a:txBody>
+                    <a:bodyPr/>
+                    <a:lstStyle/>
+                    <a:p>
+                      <a:pPr indent="0" marL="0">
+                        <a:buNone/>
+                      </a:pPr>
+                      <a:r>
+                        <a:rPr lang="en-US" sz="1200" dirty="0">
+                          <a:solidFill>
+                            <a:schemeClr val="tx1"/>
+                          </a:solidFill>
+                        </a:rPr>
+                        <a:t>낮음</a:t>
+                      </a:r>
+                      <a:endParaRPr lang="en-US" sz="1200" dirty="0"/>
+                    </a:p>
+                  </a:txBody>
+                  <a:tcPr marL="91440" marR="91440" marT="45720" marB="45720" anchor="ctr">
+                    <a:lnL w="12700" cap="flat" cmpd="sng" algn="ctr">
+                      <a:solidFill>
+                        <a:srgbClr val="EEF4F3"/>
+                      </a:solidFill>
+                      <a:prstDash val="solid"/>
+                      <a:round/>
+                      <a:headEnd type="none" w="med" len="med"/>
+                      <a:tailEnd type="none" w="med" len="med"/>
+                    </a:lnL>
+                    <a:lnR w="12700" cap="flat" cmpd="sng" algn="ctr">
+                      <a:solidFill>
+                        <a:srgbClr val="EEF4F3"/>
+                      </a:solidFill>
+                      <a:prstDash val="solid"/>
+                      <a:round/>
+                      <a:headEnd type="none" w="med" len="med"/>
+                      <a:tailEnd type="none" w="med" len="med"/>
+                    </a:lnR>
+                    <a:lnT w="12700" cap="flat" cmpd="sng" algn="ctr">
+                      <a:solidFill>
+                        <a:srgbClr val="EEF4F3"/>
+                      </a:solidFill>
+                      <a:prstDash val="solid"/>
+                      <a:round/>
+                      <a:headEnd type="none" w="med" len="med"/>
+                      <a:tailEnd type="none" w="med" len="med"/>
+                    </a:lnT>
+                    <a:lnB w="12700" cap="flat" cmpd="sng" algn="ctr">
+                      <a:solidFill>
+                        <a:srgbClr val="EEF4F3"/>
+                      </a:solidFill>
+                      <a:prstDash val="solid"/>
+                      <a:round/>
+                      <a:headEnd type="none" w="med" len="med"/>
+                      <a:tailEnd type="none" w="med" len="med"/>
+                    </a:lnB>
+                  </a:tcPr>
+                </a:tc>
+                <a:tc>
+                  <a:txBody>
+                    <a:bodyPr/>
+                    <a:lstStyle/>
+                    <a:p>
+                      <a:pPr indent="0" marL="0">
+                        <a:buNone/>
+                      </a:pPr>
+                      <a:r>
+                        <a:rPr lang="en-US" sz="1200" dirty="0">
+                          <a:solidFill>
+                            <a:schemeClr val="tx1"/>
+                          </a:solidFill>
+                        </a:rPr>
+                        <a:t>낮음</a:t>
+                      </a:r>
+                      <a:endParaRPr lang="en-US" sz="1200" dirty="0"/>
+                    </a:p>
+                  </a:txBody>
+                  <a:tcPr marL="91440" marR="91440" marT="45720" marB="45720" anchor="ctr">
+                    <a:lnL w="12700" cap="flat" cmpd="sng" algn="ctr">
+                      <a:solidFill>
+                        <a:srgbClr val="EEF4F3"/>
+                      </a:solidFill>
+                      <a:prstDash val="solid"/>
+                      <a:round/>
+                      <a:headEnd type="none" w="med" len="med"/>
+                      <a:tailEnd type="none" w="med" len="med"/>
+                    </a:lnL>
+                    <a:lnR w="12700" cap="flat" cmpd="sng" algn="ctr">
+                      <a:solidFill>
+                        <a:srgbClr val="EEF4F3"/>
+                      </a:solidFill>
+                      <a:prstDash val="solid"/>
+                      <a:round/>
+                      <a:headEnd type="none" w="med" len="med"/>
+                      <a:tailEnd type="none" w="med" len="med"/>
+                    </a:lnR>
+                    <a:lnT w="12700" cap="flat" cmpd="sng" algn="ctr">
+                      <a:solidFill>
+                        <a:srgbClr val="EEF4F3"/>
+                      </a:solidFill>
+                      <a:prstDash val="solid"/>
+                      <a:round/>
+                      <a:headEnd type="none" w="med" len="med"/>
+                      <a:tailEnd type="none" w="med" len="med"/>
+                    </a:lnT>
+                    <a:lnB w="12700" cap="flat" cmpd="sng" algn="ctr">
+                      <a:solidFill>
+                        <a:srgbClr val="EEF4F3"/>
+                      </a:solidFill>
+                      <a:prstDash val="solid"/>
+                      <a:round/>
+                      <a:headEnd type="none" w="med" len="med"/>
+                      <a:tailEnd type="none" w="med" len="med"/>
+                    </a:lnB>
+                  </a:tcPr>
+                </a:tc>
+              </a:tr>
+              <a:tr h="411480">
+                <a:tc>
+                  <a:txBody>
+                    <a:bodyPr/>
+                    <a:lstStyle/>
+                    <a:p>
+                      <a:pPr indent="0" marL="0">
+                        <a:buNone/>
+                      </a:pPr>
+                      <a:r>
+                        <a:rPr lang="en-US" sz="1200" dirty="0">
+                          <a:solidFill>
+                            <a:schemeClr val="tx1"/>
+                          </a:solidFill>
+                        </a:rPr>
+                        <a:t>커뮤니티</a:t>
+                      </a:r>
+                      <a:endParaRPr lang="en-US" sz="1200" dirty="0"/>
+                    </a:p>
+                  </a:txBody>
+                  <a:tcPr marL="91440" marR="91440" marT="45720" marB="45720" anchor="ctr">
+                    <a:lnL w="12700" cap="flat" cmpd="sng" algn="ctr">
+                      <a:solidFill>
+                        <a:srgbClr val="EEF4F3"/>
+                      </a:solidFill>
+                      <a:prstDash val="solid"/>
+                      <a:round/>
+                      <a:headEnd type="none" w="med" len="med"/>
+                      <a:tailEnd type="none" w="med" len="med"/>
+                    </a:lnL>
+                    <a:lnR w="12700" cap="flat" cmpd="sng" algn="ctr">
+                      <a:solidFill>
+                        <a:srgbClr val="EEF4F3"/>
+                      </a:solidFill>
+                      <a:prstDash val="solid"/>
+                      <a:round/>
+                      <a:headEnd type="none" w="med" len="med"/>
+                      <a:tailEnd type="none" w="med" len="med"/>
+                    </a:lnR>
+                    <a:lnT w="12700" cap="flat" cmpd="sng" algn="ctr">
+                      <a:solidFill>
+                        <a:srgbClr val="EEF4F3"/>
+                      </a:solidFill>
+                      <a:prstDash val="solid"/>
+                      <a:round/>
+                      <a:headEnd type="none" w="med" len="med"/>
+                      <a:tailEnd type="none" w="med" len="med"/>
+                    </a:lnT>
+                    <a:lnB w="12700" cap="flat" cmpd="sng" algn="ctr">
+                      <a:solidFill>
+                        <a:srgbClr val="EEF4F3"/>
+                      </a:solidFill>
+                      <a:prstDash val="solid"/>
+                      <a:round/>
+                      <a:headEnd type="none" w="med" len="med"/>
+                      <a:tailEnd type="none" w="med" len="med"/>
+                    </a:lnB>
+                  </a:tcPr>
+                </a:tc>
+                <a:tc>
+                  <a:txBody>
+                    <a:bodyPr/>
+                    <a:lstStyle/>
+                    <a:p>
+                      <a:pPr indent="0" marL="0">
+                        <a:buNone/>
+                      </a:pPr>
+                      <a:r>
+                        <a:rPr lang="en-US" sz="1200" dirty="0">
+                          <a:solidFill>
+                            <a:schemeClr val="tx1"/>
+                          </a:solidFill>
+                        </a:rPr>
+                        <a:t>보통</a:t>
+                      </a:r>
+                      <a:endParaRPr lang="en-US" sz="1200" dirty="0"/>
+                    </a:p>
+                  </a:txBody>
+                  <a:tcPr marL="91440" marR="91440" marT="45720" marB="45720" anchor="ctr">
+                    <a:lnL w="12700" cap="flat" cmpd="sng" algn="ctr">
+                      <a:solidFill>
+                        <a:srgbClr val="EEF4F3"/>
+                      </a:solidFill>
+                      <a:prstDash val="solid"/>
+                      <a:round/>
+                      <a:headEnd type="none" w="med" len="med"/>
+                      <a:tailEnd type="none" w="med" len="med"/>
+                    </a:lnL>
+                    <a:lnR w="12700" cap="flat" cmpd="sng" algn="ctr">
+                      <a:solidFill>
+                        <a:srgbClr val="EEF4F3"/>
+                      </a:solidFill>
+                      <a:prstDash val="solid"/>
+                      <a:round/>
+                      <a:headEnd type="none" w="med" len="med"/>
+                      <a:tailEnd type="none" w="med" len="med"/>
+                    </a:lnR>
+                    <a:lnT w="12700" cap="flat" cmpd="sng" algn="ctr">
+                      <a:solidFill>
+                        <a:srgbClr val="EEF4F3"/>
+                      </a:solidFill>
+                      <a:prstDash val="solid"/>
+                      <a:round/>
+                      <a:headEnd type="none" w="med" len="med"/>
+                      <a:tailEnd type="none" w="med" len="med"/>
+                    </a:lnT>
+                    <a:lnB w="12700" cap="flat" cmpd="sng" algn="ctr">
+                      <a:solidFill>
+                        <a:srgbClr val="EEF4F3"/>
+                      </a:solidFill>
+                      <a:prstDash val="solid"/>
+                      <a:round/>
+                      <a:headEnd type="none" w="med" len="med"/>
+                      <a:tailEnd type="none" w="med" len="med"/>
+                    </a:lnB>
+                  </a:tcPr>
+                </a:tc>
+                <a:tc>
+                  <a:txBody>
+                    <a:bodyPr/>
+                    <a:lstStyle/>
+                    <a:p>
+                      <a:pPr indent="0" marL="0">
+                        <a:buNone/>
+                      </a:pPr>
+                      <a:r>
+                        <a:rPr lang="en-US" sz="1200" dirty="0">
+                          <a:solidFill>
+                            <a:schemeClr val="tx1"/>
+                          </a:solidFill>
+                        </a:rPr>
+                        <a:t>조금</a:t>
+                      </a:r>
+                      <a:endParaRPr lang="en-US" sz="1200" dirty="0"/>
+                    </a:p>
+                  </a:txBody>
+                  <a:tcPr marL="91440" marR="91440" marT="45720" marB="45720" anchor="ctr">
+                    <a:lnL w="12700" cap="flat" cmpd="sng" algn="ctr">
+                      <a:solidFill>
+                        <a:srgbClr val="EEF4F3"/>
+                      </a:solidFill>
+                      <a:prstDash val="solid"/>
+                      <a:round/>
+                      <a:headEnd type="none" w="med" len="med"/>
+                      <a:tailEnd type="none" w="med" len="med"/>
+                    </a:lnL>
+                    <a:lnR w="12700" cap="flat" cmpd="sng" algn="ctr">
+                      <a:solidFill>
+                        <a:srgbClr val="EEF4F3"/>
+                      </a:solidFill>
+                      <a:prstDash val="solid"/>
+                      <a:round/>
+                      <a:headEnd type="none" w="med" len="med"/>
+                      <a:tailEnd type="none" w="med" len="med"/>
+                    </a:lnR>
+                    <a:lnT w="12700" cap="flat" cmpd="sng" algn="ctr">
+                      <a:solidFill>
+                        <a:srgbClr val="EEF4F3"/>
+                      </a:solidFill>
+                      <a:prstDash val="solid"/>
+                      <a:round/>
+                      <a:headEnd type="none" w="med" len="med"/>
+                      <a:tailEnd type="none" w="med" len="med"/>
+                    </a:lnT>
+                    <a:lnB w="12700" cap="flat" cmpd="sng" algn="ctr">
+                      <a:solidFill>
+                        <a:srgbClr val="EEF4F3"/>
+                      </a:solidFill>
+                      <a:prstDash val="solid"/>
+                      <a:round/>
+                      <a:headEnd type="none" w="med" len="med"/>
+                      <a:tailEnd type="none" w="med" len="med"/>
+                    </a:lnB>
+                  </a:tcPr>
+                </a:tc>
+                <a:tc>
+                  <a:txBody>
+                    <a:bodyPr/>
+                    <a:lstStyle/>
+                    <a:p>
+                      <a:pPr indent="0" marL="0">
+                        <a:buNone/>
+                      </a:pPr>
+                      <a:r>
+                        <a:rPr lang="en-US" sz="1200" dirty="0">
+                          <a:solidFill>
+                            <a:schemeClr val="tx1"/>
+                          </a:solidFill>
+                        </a:rPr>
+                        <a:t>높음</a:t>
+                      </a:r>
+                      <a:endParaRPr lang="en-US" sz="1200" dirty="0"/>
+                    </a:p>
+                  </a:txBody>
+                  <a:tcPr marL="91440" marR="91440" marT="45720" marB="45720" anchor="ctr">
+                    <a:lnL w="12700" cap="flat" cmpd="sng" algn="ctr">
+                      <a:solidFill>
+                        <a:srgbClr val="EEF4F3"/>
+                      </a:solidFill>
+                      <a:prstDash val="solid"/>
+                      <a:round/>
+                      <a:headEnd type="none" w="med" len="med"/>
+                      <a:tailEnd type="none" w="med" len="med"/>
+                    </a:lnL>
+                    <a:lnR w="12700" cap="flat" cmpd="sng" algn="ctr">
+                      <a:solidFill>
+                        <a:srgbClr val="EEF4F3"/>
+                      </a:solidFill>
+                      <a:prstDash val="solid"/>
+                      <a:round/>
+                      <a:headEnd type="none" w="med" len="med"/>
+                      <a:tailEnd type="none" w="med" len="med"/>
+                    </a:lnR>
+                    <a:lnT w="12700" cap="flat" cmpd="sng" algn="ctr">
+                      <a:solidFill>
+                        <a:srgbClr val="EEF4F3"/>
+                      </a:solidFill>
+                      <a:prstDash val="solid"/>
+                      <a:round/>
+                      <a:headEnd type="none" w="med" len="med"/>
+                      <a:tailEnd type="none" w="med" len="med"/>
+                    </a:lnT>
+                    <a:lnB w="12700" cap="flat" cmpd="sng" algn="ctr">
+                      <a:solidFill>
+                        <a:srgbClr val="EEF4F3"/>
+                      </a:solidFill>
+                      <a:prstDash val="solid"/>
+                      <a:round/>
+                      <a:headEnd type="none" w="med" len="med"/>
+                      <a:tailEnd type="none" w="med" len="med"/>
+                    </a:lnB>
+                  </a:tcPr>
+                </a:tc>
+                <a:tc>
+                  <a:txBody>
+                    <a:bodyPr/>
+                    <a:lstStyle/>
+                    <a:p>
+                      <a:pPr indent="0" marL="0">
+                        <a:buNone/>
+                      </a:pPr>
+                      <a:r>
+                        <a:rPr lang="en-US" sz="1200" dirty="0">
+                          <a:solidFill>
+                            <a:schemeClr val="tx1"/>
+                          </a:solidFill>
+                        </a:rPr>
+                        <a:t>중간</a:t>
+                      </a:r>
+                      <a:endParaRPr lang="en-US" sz="1200" dirty="0"/>
+                    </a:p>
+                  </a:txBody>
+                  <a:tcPr marL="91440" marR="91440" marT="45720" marB="45720" anchor="ctr">
+                    <a:lnL w="12700" cap="flat" cmpd="sng" algn="ctr">
+                      <a:solidFill>
+                        <a:srgbClr val="EEF4F3"/>
+                      </a:solidFill>
+                      <a:prstDash val="solid"/>
+                      <a:round/>
+                      <a:headEnd type="none" w="med" len="med"/>
+                      <a:tailEnd type="none" w="med" len="med"/>
+                    </a:lnL>
+                    <a:lnR w="12700" cap="flat" cmpd="sng" algn="ctr">
+                      <a:solidFill>
+                        <a:srgbClr val="EEF4F3"/>
+                      </a:solidFill>
+                      <a:prstDash val="solid"/>
+                      <a:round/>
+                      <a:headEnd type="none" w="med" len="med"/>
+                      <a:tailEnd type="none" w="med" len="med"/>
+                    </a:lnR>
+                    <a:lnT w="12700" cap="flat" cmpd="sng" algn="ctr">
+                      <a:solidFill>
+                        <a:srgbClr val="EEF4F3"/>
+                      </a:solidFill>
+                      <a:prstDash val="solid"/>
+                      <a:round/>
+                      <a:headEnd type="none" w="med" len="med"/>
+                      <a:tailEnd type="none" w="med" len="med"/>
+                    </a:lnT>
+                    <a:lnB w="12700" cap="flat" cmpd="sng" algn="ctr">
+                      <a:solidFill>
+                        <a:srgbClr val="EEF4F3"/>
+                      </a:solidFill>
+                      <a:prstDash val="solid"/>
+                      <a:round/>
+                      <a:headEnd type="none" w="med" len="med"/>
+                      <a:tailEnd type="none" w="med" len="med"/>
+                    </a:lnB>
+                  </a:tcPr>
+                </a:tc>
+              </a:tr>
+              <a:tr h="411480">
+                <a:tc>
+                  <a:txBody>
+                    <a:bodyPr/>
+                    <a:lstStyle/>
+                    <a:p>
+                      <a:pPr indent="0" marL="0">
+                        <a:buNone/>
+                      </a:pPr>
+                      <a:r>
+                        <a:rPr lang="en-US" sz="1200" dirty="0">
+                          <a:solidFill>
+                            <a:schemeClr val="tx1"/>
+                          </a:solidFill>
+                        </a:rPr>
+                        <a:t>대전 게임(오목)</a:t>
+                      </a:r>
+                      <a:endParaRPr lang="en-US" sz="1200" dirty="0"/>
+                    </a:p>
+                  </a:txBody>
+                  <a:tcPr marL="91440" marR="91440" marT="45720" marB="45720" anchor="ctr">
+                    <a:lnL w="12700" cap="flat" cmpd="sng" algn="ctr">
+                      <a:solidFill>
+                        <a:srgbClr val="EEF4F3"/>
+                      </a:solidFill>
+                      <a:prstDash val="solid"/>
+                      <a:round/>
+                      <a:headEnd type="none" w="med" len="med"/>
+                      <a:tailEnd type="none" w="med" len="med"/>
+                    </a:lnL>
+                    <a:lnR w="12700" cap="flat" cmpd="sng" algn="ctr">
+                      <a:solidFill>
+                        <a:srgbClr val="EEF4F3"/>
+                      </a:solidFill>
+                      <a:prstDash val="solid"/>
+                      <a:round/>
+                      <a:headEnd type="none" w="med" len="med"/>
+                      <a:tailEnd type="none" w="med" len="med"/>
+                    </a:lnR>
+                    <a:lnT w="12700" cap="flat" cmpd="sng" algn="ctr">
+                      <a:solidFill>
+                        <a:srgbClr val="EEF4F3"/>
+                      </a:solidFill>
+                      <a:prstDash val="solid"/>
+                      <a:round/>
+                      <a:headEnd type="none" w="med" len="med"/>
+                      <a:tailEnd type="none" w="med" len="med"/>
+                    </a:lnT>
+                    <a:lnB w="12700" cap="flat" cmpd="sng" algn="ctr">
+                      <a:solidFill>
+                        <a:srgbClr val="EEF4F3"/>
+                      </a:solidFill>
+                      <a:prstDash val="solid"/>
+                      <a:round/>
+                      <a:headEnd type="none" w="med" len="med"/>
+                      <a:tailEnd type="none" w="med" len="med"/>
+                    </a:lnB>
+                  </a:tcPr>
+                </a:tc>
+                <a:tc>
+                  <a:txBody>
+                    <a:bodyPr/>
+                    <a:lstStyle/>
+                    <a:p>
+                      <a:pPr indent="0" marL="0">
+                        <a:buNone/>
+                      </a:pPr>
+                      <a:r>
+                        <a:rPr lang="en-US" sz="1200" dirty="0">
+                          <a:solidFill>
+                            <a:schemeClr val="tx1"/>
+                          </a:solidFill>
+                        </a:rPr>
+                        <a:t>어려움</a:t>
+                      </a:r>
+                      <a:endParaRPr lang="en-US" sz="1200" dirty="0"/>
+                    </a:p>
+                  </a:txBody>
+                  <a:tcPr marL="91440" marR="91440" marT="45720" marB="45720" anchor="ctr">
+                    <a:lnL w="12700" cap="flat" cmpd="sng" algn="ctr">
+                      <a:solidFill>
+                        <a:srgbClr val="EEF4F3"/>
+                      </a:solidFill>
+                      <a:prstDash val="solid"/>
+                      <a:round/>
+                      <a:headEnd type="none" w="med" len="med"/>
+                      <a:tailEnd type="none" w="med" len="med"/>
+                    </a:lnL>
+                    <a:lnR w="12700" cap="flat" cmpd="sng" algn="ctr">
+                      <a:solidFill>
+                        <a:srgbClr val="EEF4F3"/>
+                      </a:solidFill>
+                      <a:prstDash val="solid"/>
+                      <a:round/>
+                      <a:headEnd type="none" w="med" len="med"/>
+                      <a:tailEnd type="none" w="med" len="med"/>
+                    </a:lnR>
+                    <a:lnT w="12700" cap="flat" cmpd="sng" algn="ctr">
+                      <a:solidFill>
+                        <a:srgbClr val="EEF4F3"/>
+                      </a:solidFill>
+                      <a:prstDash val="solid"/>
+                      <a:round/>
+                      <a:headEnd type="none" w="med" len="med"/>
+                      <a:tailEnd type="none" w="med" len="med"/>
+                    </a:lnT>
+                    <a:lnB w="12700" cap="flat" cmpd="sng" algn="ctr">
+                      <a:solidFill>
+                        <a:srgbClr val="EEF4F3"/>
+                      </a:solidFill>
+                      <a:prstDash val="solid"/>
+                      <a:round/>
+                      <a:headEnd type="none" w="med" len="med"/>
+                      <a:tailEnd type="none" w="med" len="med"/>
+                    </a:lnB>
+                  </a:tcPr>
+                </a:tc>
+                <a:tc>
+                  <a:txBody>
+                    <a:bodyPr/>
+                    <a:lstStyle/>
+                    <a:p>
+                      <a:pPr indent="0" marL="0">
+                        <a:buNone/>
+                      </a:pPr>
+                      <a:r>
+                        <a:rPr lang="en-US" sz="1200" dirty="0">
+                          <a:solidFill>
+                            <a:schemeClr val="tx1"/>
+                          </a:solidFill>
+                        </a:rPr>
+                        <a:t>많음</a:t>
+                      </a:r>
+                      <a:endParaRPr lang="en-US" sz="1200" dirty="0"/>
+                    </a:p>
+                  </a:txBody>
+                  <a:tcPr marL="91440" marR="91440" marT="45720" marB="45720" anchor="ctr">
+                    <a:lnL w="12700" cap="flat" cmpd="sng" algn="ctr">
+                      <a:solidFill>
+                        <a:srgbClr val="EEF4F3"/>
+                      </a:solidFill>
+                      <a:prstDash val="solid"/>
+                      <a:round/>
+                      <a:headEnd type="none" w="med" len="med"/>
+                      <a:tailEnd type="none" w="med" len="med"/>
+                    </a:lnL>
+                    <a:lnR w="12700" cap="flat" cmpd="sng" algn="ctr">
+                      <a:solidFill>
+                        <a:srgbClr val="EEF4F3"/>
+                      </a:solidFill>
+                      <a:prstDash val="solid"/>
+                      <a:round/>
+                      <a:headEnd type="none" w="med" len="med"/>
+                      <a:tailEnd type="none" w="med" len="med"/>
+                    </a:lnR>
+                    <a:lnT w="12700" cap="flat" cmpd="sng" algn="ctr">
+                      <a:solidFill>
+                        <a:srgbClr val="EEF4F3"/>
+                      </a:solidFill>
+                      <a:prstDash val="solid"/>
+                      <a:round/>
+                      <a:headEnd type="none" w="med" len="med"/>
+                      <a:tailEnd type="none" w="med" len="med"/>
+                    </a:lnT>
+                    <a:lnB w="12700" cap="flat" cmpd="sng" algn="ctr">
+                      <a:solidFill>
+                        <a:srgbClr val="EEF4F3"/>
+                      </a:solidFill>
+                      <a:prstDash val="solid"/>
+                      <a:round/>
+                      <a:headEnd type="none" w="med" len="med"/>
+                      <a:tailEnd type="none" w="med" len="med"/>
+                    </a:lnB>
+                  </a:tcPr>
+                </a:tc>
+                <a:tc>
+                  <a:txBody>
+                    <a:bodyPr/>
+                    <a:lstStyle/>
+                    <a:p>
+                      <a:pPr indent="0" marL="0">
+                        <a:buNone/>
+                      </a:pPr>
+                      <a:r>
+                        <a:rPr lang="en-US" sz="1200" dirty="0">
+                          <a:solidFill>
+                            <a:schemeClr val="tx1"/>
+                          </a:solidFill>
+                        </a:rPr>
+                        <a:t>높음</a:t>
+                      </a:r>
+                      <a:endParaRPr lang="en-US" sz="1200" dirty="0"/>
+                    </a:p>
+                  </a:txBody>
+                  <a:tcPr marL="91440" marR="91440" marT="45720" marB="45720" anchor="ctr">
+                    <a:lnL w="12700" cap="flat" cmpd="sng" algn="ctr">
+                      <a:solidFill>
+                        <a:srgbClr val="EEF4F3"/>
+                      </a:solidFill>
+                      <a:prstDash val="solid"/>
+                      <a:round/>
+                      <a:headEnd type="none" w="med" len="med"/>
+                      <a:tailEnd type="none" w="med" len="med"/>
+                    </a:lnL>
+                    <a:lnR w="12700" cap="flat" cmpd="sng" algn="ctr">
+                      <a:solidFill>
+                        <a:srgbClr val="EEF4F3"/>
+                      </a:solidFill>
+                      <a:prstDash val="solid"/>
+                      <a:round/>
+                      <a:headEnd type="none" w="med" len="med"/>
+                      <a:tailEnd type="none" w="med" len="med"/>
+                    </a:lnR>
+                    <a:lnT w="12700" cap="flat" cmpd="sng" algn="ctr">
+                      <a:solidFill>
+                        <a:srgbClr val="EEF4F3"/>
+                      </a:solidFill>
+                      <a:prstDash val="solid"/>
+                      <a:round/>
+                      <a:headEnd type="none" w="med" len="med"/>
+                      <a:tailEnd type="none" w="med" len="med"/>
+                    </a:lnT>
+                    <a:lnB w="12700" cap="flat" cmpd="sng" algn="ctr">
+                      <a:solidFill>
+                        <a:srgbClr val="EEF4F3"/>
+                      </a:solidFill>
+                      <a:prstDash val="solid"/>
+                      <a:round/>
+                      <a:headEnd type="none" w="med" len="med"/>
+                      <a:tailEnd type="none" w="med" len="med"/>
+                    </a:lnB>
+                  </a:tcPr>
+                </a:tc>
+                <a:tc>
+                  <a:txBody>
+                    <a:bodyPr/>
+                    <a:lstStyle/>
+                    <a:p>
+                      <a:pPr indent="0" marL="0">
+                        <a:buNone/>
+                      </a:pPr>
+                      <a:r>
+                        <a:rPr lang="en-US" sz="1200" dirty="0">
+                          <a:solidFill>
+                            <a:schemeClr val="tx1"/>
+                          </a:solidFill>
+                        </a:rPr>
+                        <a:t>중간</a:t>
+                      </a:r>
+                      <a:endParaRPr lang="en-US" sz="1200" dirty="0"/>
+                    </a:p>
+                  </a:txBody>
+                  <a:tcPr marL="91440" marR="91440" marT="45720" marB="45720" anchor="ctr">
+                    <a:lnL w="12700" cap="flat" cmpd="sng" algn="ctr">
+                      <a:solidFill>
+                        <a:srgbClr val="EEF4F3"/>
+                      </a:solidFill>
+                      <a:prstDash val="solid"/>
+                      <a:round/>
+                      <a:headEnd type="none" w="med" len="med"/>
+                      <a:tailEnd type="none" w="med" len="med"/>
+                    </a:lnL>
+                    <a:lnR w="12700" cap="flat" cmpd="sng" algn="ctr">
+                      <a:solidFill>
+                        <a:srgbClr val="EEF4F3"/>
+                      </a:solidFill>
+                      <a:prstDash val="solid"/>
+                      <a:round/>
+                      <a:headEnd type="none" w="med" len="med"/>
+                      <a:tailEnd type="none" w="med" len="med"/>
+                    </a:lnR>
+                    <a:lnT w="12700" cap="flat" cmpd="sng" algn="ctr">
+                      <a:solidFill>
+                        <a:srgbClr val="EEF4F3"/>
+                      </a:solidFill>
+                      <a:prstDash val="solid"/>
+                      <a:round/>
+                      <a:headEnd type="none" w="med" len="med"/>
+                      <a:tailEnd type="none" w="med" len="med"/>
+                    </a:lnT>
+                    <a:lnB w="12700" cap="flat" cmpd="sng" algn="ctr">
+                      <a:solidFill>
+                        <a:srgbClr val="EEF4F3"/>
+                      </a:solidFill>
+                      <a:prstDash val="solid"/>
+                      <a:round/>
+                      <a:headEnd type="none" w="med" len="med"/>
+                      <a:tailEnd type="none" w="med" len="med"/>
+                    </a:lnB>
+                  </a:tcPr>
+                </a:tc>
+              </a:tr>
+              <a:tr h="411480">
+                <a:tc>
+                  <a:txBody>
+                    <a:bodyPr/>
+                    <a:lstStyle/>
+                    <a:p>
+                      <a:pPr indent="0" marL="0">
+                        <a:buNone/>
+                      </a:pPr>
+                      <a:r>
+                        <a:rPr lang="en-US" sz="1200" dirty="0">
+                          <a:solidFill>
+                            <a:schemeClr val="tx1"/>
+                          </a:solidFill>
+                        </a:rPr>
+                        <a:t>SaaS · 중개 플랫폼</a:t>
+                      </a:r>
+                      <a:endParaRPr lang="en-US" sz="1200" dirty="0"/>
+                    </a:p>
+                  </a:txBody>
+                  <a:tcPr marL="91440" marR="91440" marT="45720" marB="45720" anchor="ctr">
+                    <a:lnL w="12700" cap="flat" cmpd="sng" algn="ctr">
+                      <a:solidFill>
+                        <a:srgbClr val="EEF4F3"/>
+                      </a:solidFill>
+                      <a:prstDash val="solid"/>
+                      <a:round/>
+                      <a:headEnd type="none" w="med" len="med"/>
+                      <a:tailEnd type="none" w="med" len="med"/>
+                    </a:lnL>
+                    <a:lnR w="12700" cap="flat" cmpd="sng" algn="ctr">
+                      <a:solidFill>
+                        <a:srgbClr val="EEF4F3"/>
+                      </a:solidFill>
+                      <a:prstDash val="solid"/>
+                      <a:round/>
+                      <a:headEnd type="none" w="med" len="med"/>
+                      <a:tailEnd type="none" w="med" len="med"/>
+                    </a:lnR>
+                    <a:lnT w="12700" cap="flat" cmpd="sng" algn="ctr">
+                      <a:solidFill>
+                        <a:srgbClr val="EEF4F3"/>
+                      </a:solidFill>
+                      <a:prstDash val="solid"/>
+                      <a:round/>
+                      <a:headEnd type="none" w="med" len="med"/>
+                      <a:tailEnd type="none" w="med" len="med"/>
+                    </a:lnT>
+                    <a:lnB w="12700" cap="flat" cmpd="sng" algn="ctr">
+                      <a:solidFill>
+                        <a:srgbClr val="EEF4F3"/>
+                      </a:solidFill>
+                      <a:prstDash val="solid"/>
+                      <a:round/>
+                      <a:headEnd type="none" w="med" len="med"/>
+                      <a:tailEnd type="none" w="med" len="med"/>
+                    </a:lnB>
+                  </a:tcPr>
+                </a:tc>
+                <a:tc>
+                  <a:txBody>
+                    <a:bodyPr/>
+                    <a:lstStyle/>
+                    <a:p>
+                      <a:pPr indent="0" marL="0">
+                        <a:buNone/>
+                      </a:pPr>
+                      <a:r>
+                        <a:rPr lang="en-US" sz="1200" dirty="0">
+                          <a:solidFill>
+                            <a:schemeClr val="tx1"/>
+                          </a:solidFill>
+                        </a:rPr>
+                        <a:t>매우 어려움</a:t>
+                      </a:r>
+                      <a:endParaRPr lang="en-US" sz="1200" dirty="0"/>
+                    </a:p>
+                  </a:txBody>
+                  <a:tcPr marL="91440" marR="91440" marT="45720" marB="45720" anchor="ctr">
+                    <a:lnL w="12700" cap="flat" cmpd="sng" algn="ctr">
+                      <a:solidFill>
+                        <a:srgbClr val="EEF4F3"/>
+                      </a:solidFill>
+                      <a:prstDash val="solid"/>
+                      <a:round/>
+                      <a:headEnd type="none" w="med" len="med"/>
+                      <a:tailEnd type="none" w="med" len="med"/>
+                    </a:lnL>
+                    <a:lnR w="12700" cap="flat" cmpd="sng" algn="ctr">
+                      <a:solidFill>
+                        <a:srgbClr val="EEF4F3"/>
+                      </a:solidFill>
+                      <a:prstDash val="solid"/>
+                      <a:round/>
+                      <a:headEnd type="none" w="med" len="med"/>
+                      <a:tailEnd type="none" w="med" len="med"/>
+                    </a:lnR>
+                    <a:lnT w="12700" cap="flat" cmpd="sng" algn="ctr">
+                      <a:solidFill>
+                        <a:srgbClr val="EEF4F3"/>
+                      </a:solidFill>
+                      <a:prstDash val="solid"/>
+                      <a:round/>
+                      <a:headEnd type="none" w="med" len="med"/>
+                      <a:tailEnd type="none" w="med" len="med"/>
+                    </a:lnT>
+                    <a:lnB w="12700" cap="flat" cmpd="sng" algn="ctr">
+                      <a:solidFill>
+                        <a:srgbClr val="EEF4F3"/>
+                      </a:solidFill>
+                      <a:prstDash val="solid"/>
+                      <a:round/>
+                      <a:headEnd type="none" w="med" len="med"/>
+                      <a:tailEnd type="none" w="med" len="med"/>
+                    </a:lnB>
+                  </a:tcPr>
+                </a:tc>
+                <a:tc>
+                  <a:txBody>
+                    <a:bodyPr/>
+                    <a:lstStyle/>
+                    <a:p>
+                      <a:pPr indent="0" marL="0">
+                        <a:buNone/>
+                      </a:pPr>
+                      <a:r>
+                        <a:rPr lang="en-US" sz="1200" dirty="0">
+                          <a:solidFill>
+                            <a:schemeClr val="tx1"/>
+                          </a:solidFill>
+                        </a:rPr>
+                        <a:t>많음</a:t>
+                      </a:r>
+                      <a:endParaRPr lang="en-US" sz="1200" dirty="0"/>
+                    </a:p>
+                  </a:txBody>
+                  <a:tcPr marL="91440" marR="91440" marT="45720" marB="45720" anchor="ctr">
+                    <a:lnL w="12700" cap="flat" cmpd="sng" algn="ctr">
+                      <a:solidFill>
+                        <a:srgbClr val="EEF4F3"/>
+                      </a:solidFill>
+                      <a:prstDash val="solid"/>
+                      <a:round/>
+                      <a:headEnd type="none" w="med" len="med"/>
+                      <a:tailEnd type="none" w="med" len="med"/>
+                    </a:lnL>
+                    <a:lnR w="12700" cap="flat" cmpd="sng" algn="ctr">
+                      <a:solidFill>
+                        <a:srgbClr val="EEF4F3"/>
+                      </a:solidFill>
+                      <a:prstDash val="solid"/>
+                      <a:round/>
+                      <a:headEnd type="none" w="med" len="med"/>
+                      <a:tailEnd type="none" w="med" len="med"/>
+                    </a:lnR>
+                    <a:lnT w="12700" cap="flat" cmpd="sng" algn="ctr">
+                      <a:solidFill>
+                        <a:srgbClr val="EEF4F3"/>
+                      </a:solidFill>
+                      <a:prstDash val="solid"/>
+                      <a:round/>
+                      <a:headEnd type="none" w="med" len="med"/>
+                      <a:tailEnd type="none" w="med" len="med"/>
+                    </a:lnT>
+                    <a:lnB w="12700" cap="flat" cmpd="sng" algn="ctr">
+                      <a:solidFill>
+                        <a:srgbClr val="EEF4F3"/>
+                      </a:solidFill>
+                      <a:prstDash val="solid"/>
+                      <a:round/>
+                      <a:headEnd type="none" w="med" len="med"/>
+                      <a:tailEnd type="none" w="med" len="med"/>
+                    </a:lnB>
+                  </a:tcPr>
+                </a:tc>
+                <a:tc>
+                  <a:txBody>
+                    <a:bodyPr/>
+                    <a:lstStyle/>
+                    <a:p>
+                      <a:pPr indent="0" marL="0">
+                        <a:buNone/>
+                      </a:pPr>
+                      <a:r>
+                        <a:rPr lang="en-US" sz="1200" dirty="0">
+                          <a:solidFill>
+                            <a:schemeClr val="tx1"/>
+                          </a:solidFill>
+                        </a:rPr>
+                        <a:t>매우 높음</a:t>
+                      </a:r>
+                      <a:endParaRPr lang="en-US" sz="1200" dirty="0"/>
+                    </a:p>
+                  </a:txBody>
+                  <a:tcPr marL="91440" marR="91440" marT="45720" marB="45720" anchor="ctr">
+                    <a:lnL w="12700" cap="flat" cmpd="sng" algn="ctr">
+                      <a:solidFill>
+                        <a:srgbClr val="EEF4F3"/>
+                      </a:solidFill>
+                      <a:prstDash val="solid"/>
+                      <a:round/>
+                      <a:headEnd type="none" w="med" len="med"/>
+                      <a:tailEnd type="none" w="med" len="med"/>
+                    </a:lnL>
+                    <a:lnR w="12700" cap="flat" cmpd="sng" algn="ctr">
+                      <a:solidFill>
+                        <a:srgbClr val="EEF4F3"/>
+                      </a:solidFill>
+                      <a:prstDash val="solid"/>
+                      <a:round/>
+                      <a:headEnd type="none" w="med" len="med"/>
+                      <a:tailEnd type="none" w="med" len="med"/>
+                    </a:lnR>
+                    <a:lnT w="12700" cap="flat" cmpd="sng" algn="ctr">
+                      <a:solidFill>
+                        <a:srgbClr val="EEF4F3"/>
+                      </a:solidFill>
+                      <a:prstDash val="solid"/>
+                      <a:round/>
+                      <a:headEnd type="none" w="med" len="med"/>
+                      <a:tailEnd type="none" w="med" len="med"/>
+                    </a:lnT>
+                    <a:lnB w="12700" cap="flat" cmpd="sng" algn="ctr">
+                      <a:solidFill>
+                        <a:srgbClr val="EEF4F3"/>
+                      </a:solidFill>
+                      <a:prstDash val="solid"/>
+                      <a:round/>
+                      <a:headEnd type="none" w="med" len="med"/>
+                      <a:tailEnd type="none" w="med" len="med"/>
+                    </a:lnB>
+                  </a:tcPr>
+                </a:tc>
+                <a:tc>
+                  <a:txBody>
+                    <a:bodyPr/>
+                    <a:lstStyle/>
+                    <a:p>
+                      <a:pPr indent="0" marL="0">
+                        <a:buNone/>
+                      </a:pPr>
+                      <a:r>
+                        <a:rPr lang="en-US" sz="1200" dirty="0">
+                          <a:solidFill>
+                            <a:schemeClr val="tx1"/>
+                          </a:solidFill>
+                        </a:rPr>
+                        <a:t>높음</a:t>
+                      </a:r>
+                      <a:endParaRPr lang="en-US" sz="1200" dirty="0"/>
+                    </a:p>
+                  </a:txBody>
+                  <a:tcPr marL="91440" marR="91440" marT="45720" marB="45720" anchor="ctr">
+                    <a:lnL w="12700" cap="flat" cmpd="sng" algn="ctr">
+                      <a:solidFill>
+                        <a:srgbClr val="EEF4F3"/>
+                      </a:solidFill>
+                      <a:prstDash val="solid"/>
+                      <a:round/>
+                      <a:headEnd type="none" w="med" len="med"/>
+                      <a:tailEnd type="none" w="med" len="med"/>
+                    </a:lnL>
+                    <a:lnR w="12700" cap="flat" cmpd="sng" algn="ctr">
+                      <a:solidFill>
+                        <a:srgbClr val="EEF4F3"/>
+                      </a:solidFill>
+                      <a:prstDash val="solid"/>
+                      <a:round/>
+                      <a:headEnd type="none" w="med" len="med"/>
+                      <a:tailEnd type="none" w="med" len="med"/>
+                    </a:lnR>
+                    <a:lnT w="12700" cap="flat" cmpd="sng" algn="ctr">
+                      <a:solidFill>
+                        <a:srgbClr val="EEF4F3"/>
+                      </a:solidFill>
+                      <a:prstDash val="solid"/>
+                      <a:round/>
+                      <a:headEnd type="none" w="med" len="med"/>
+                      <a:tailEnd type="none" w="med" len="med"/>
+                    </a:lnT>
+                    <a:lnB w="12700" cap="flat" cmpd="sng" algn="ctr">
+                      <a:solidFill>
+                        <a:srgbClr val="EEF4F3"/>
+                      </a:solidFill>
+                      <a:prstDash val="solid"/>
+                      <a:round/>
+                      <a:headEnd type="none" w="med" len="med"/>
+                      <a:tailEnd type="none" w="med" len="med"/>
+                    </a:lnB>
+                  </a:tcPr>
+                </a:tc>
+              </a:tr>
+            </a:tbl>
+          </a:graphicData>
+        </a:graphic>
+      </p:graphicFrame>
+      <p:sp>
+        <p:nvSpPr>
+          <p:cNvPr id="4" name="card"/>
+          <p:cNvSpPr/>
+          <p:nvPr/>
+        </p:nvSpPr>
+        <p:spPr>
+          <a:xfrm>
+            <a:off x="5852160" y="1143000"/>
+            <a:ext cx="2834640" cy="3246120"/>
+          </a:xfrm>
+          <a:prstGeom prst="roundRect">
+            <a:avLst>
+              <a:gd name="adj" fmla="val 2581"/>
+            </a:avLst>
+          </a:prstGeom>
+          <a:solidFill>
+            <a:schemeClr val="bg2"/>
+          </a:solidFill>
+          <a:ln/>
+        </p:spPr>
+      </p:sp>
+      <p:sp>
+        <p:nvSpPr>
+          <p:cNvPr id="5" name="Text 2"/>
+          <p:cNvSpPr txBox="1"/>
+          <p:nvPr/>
+        </p:nvSpPr>
+        <p:spPr>
+          <a:xfrm>
+            <a:off x="6035040" y="1280160"/>
+            <a:ext cx="2468880" cy="365760"/>
+          </a:xfrm>
+          <a:prstGeom prst="rect">
+            <a:avLst/>
+          </a:prstGeom>
+          <a:noFill/>
+          <a:ln/>
+        </p:spPr>
+        <p:txBody>
+          <a:bodyPr wrap="square" lIns="0" tIns="0" rIns="0" bIns="0" rtlCol="0" anchor="t"/>
+          <a:lstStyle/>
+          <a:p>
+            <a:pPr indent="0" marL="0">
+              <a:buNone/>
+            </a:pPr>
+            <a:r>
+              <a:rPr lang="en-US" sz="1500" b="1" dirty="0">
+                <a:solidFill>
+                  <a:schemeClr val="accent2"/>
+                </a:solidFill>
+              </a:rPr>
+              <a:t>한 주제로 키우기</a:t>
+            </a:r>
+            <a:endParaRPr lang="en-US" sz="1500" dirty="0"/>
+          </a:p>
+        </p:txBody>
+      </p:sp>
+      <p:sp>
+        <p:nvSpPr>
+          <p:cNvPr id="6" name="badge1"/>
+          <p:cNvSpPr/>
+          <p:nvPr/>
+        </p:nvSpPr>
+        <p:spPr>
+          <a:xfrm>
+            <a:off x="6035040" y="1783080"/>
+            <a:ext cx="384048" cy="384048"/>
+          </a:xfrm>
+          <a:prstGeom prst="ellipse">
+            <a:avLst/>
+          </a:prstGeom>
+          <a:solidFill>
+            <a:schemeClr val="tx2"/>
+          </a:solidFill>
+          <a:ln/>
+        </p:spPr>
+      </p:sp>
+      <p:sp>
+        <p:nvSpPr>
+          <p:cNvPr id="7" name="Text 4"/>
+          <p:cNvSpPr txBox="1"/>
+          <p:nvPr/>
+        </p:nvSpPr>
+        <p:spPr>
+          <a:xfrm>
+            <a:off x="6035040" y="1783080"/>
+            <a:ext cx="384048" cy="384048"/>
+          </a:xfrm>
+          <a:prstGeom prst="rect">
+            <a:avLst/>
+          </a:prstGeom>
+          <a:noFill/>
+          <a:ln/>
+        </p:spPr>
+        <p:txBody>
+          <a:bodyPr wrap="square" lIns="0" tIns="0" rIns="0" bIns="0" rtlCol="0" anchor="ctr"/>
+          <a:lstStyle/>
+          <a:p>
+            <a:pPr algn="ctr" indent="0" marL="0">
+              <a:buNone/>
+            </a:pPr>
+            <a:r>
+              <a:rPr lang="en-US" sz="1400" b="1" dirty="0">
+                <a:solidFill>
+                  <a:schemeClr val="bg1"/>
+                </a:solidFill>
+              </a:rPr>
+              <a:t>1</a:t>
+            </a:r>
+            <a:endParaRPr lang="en-US" sz="1400" dirty="0"/>
+          </a:p>
+        </p:txBody>
+      </p:sp>
+      <p:sp>
+        <p:nvSpPr>
+          <p:cNvPr id="8" name="Text 5"/>
+          <p:cNvSpPr txBox="1"/>
+          <p:nvPr/>
+        </p:nvSpPr>
+        <p:spPr>
+          <a:xfrm>
+            <a:off x="6537960" y="1783080"/>
+            <a:ext cx="2011680" cy="384048"/>
+          </a:xfrm>
+          <a:prstGeom prst="rect">
+            <a:avLst/>
+          </a:prstGeom>
+          <a:noFill/>
+          <a:ln/>
+        </p:spPr>
+        <p:txBody>
+          <a:bodyPr wrap="square" lIns="0" tIns="0" rIns="0" bIns="0" rtlCol="0" anchor="ctr"/>
+          <a:lstStyle/>
+          <a:p>
+            <a:pPr indent="0" marL="0">
+              <a:buNone/>
+            </a:pPr>
+            <a:r>
+              <a:rPr lang="en-US" sz="1500" b="1" dirty="0">
+                <a:solidFill>
+                  <a:schemeClr val="tx1"/>
+                </a:solidFill>
+              </a:rPr>
+              <a:t>정보·도구</a:t>
+            </a:r>
+            <a:endParaRPr lang="en-US" sz="1500" dirty="0"/>
+          </a:p>
+        </p:txBody>
+      </p:sp>
+      <p:sp>
+        <p:nvSpPr>
+          <p:cNvPr id="9" name="badge2"/>
+          <p:cNvSpPr/>
+          <p:nvPr/>
+        </p:nvSpPr>
+        <p:spPr>
+          <a:xfrm>
+            <a:off x="6035040" y="2606040"/>
+            <a:ext cx="384048" cy="384048"/>
+          </a:xfrm>
+          <a:prstGeom prst="ellipse">
+            <a:avLst/>
+          </a:prstGeom>
+          <a:solidFill>
+            <a:schemeClr val="tx2"/>
+          </a:solidFill>
+          <a:ln/>
+        </p:spPr>
+      </p:sp>
+      <p:sp>
+        <p:nvSpPr>
+          <p:cNvPr id="10" name="Text 7"/>
+          <p:cNvSpPr txBox="1"/>
+          <p:nvPr/>
+        </p:nvSpPr>
+        <p:spPr>
+          <a:xfrm>
+            <a:off x="6035040" y="2606040"/>
+            <a:ext cx="384048" cy="384048"/>
+          </a:xfrm>
+          <a:prstGeom prst="rect">
+            <a:avLst/>
+          </a:prstGeom>
+          <a:noFill/>
+          <a:ln/>
+        </p:spPr>
+        <p:txBody>
+          <a:bodyPr wrap="square" lIns="0" tIns="0" rIns="0" bIns="0" rtlCol="0" anchor="ctr"/>
+          <a:lstStyle/>
+          <a:p>
+            <a:pPr algn="ctr" indent="0" marL="0">
+              <a:buNone/>
+            </a:pPr>
+            <a:r>
+              <a:rPr lang="en-US" sz="1400" b="1" dirty="0">
+                <a:solidFill>
+                  <a:schemeClr val="bg1"/>
+                </a:solidFill>
+              </a:rPr>
+              <a:t>2</a:t>
+            </a:r>
+            <a:endParaRPr lang="en-US" sz="1400" dirty="0"/>
+          </a:p>
+        </p:txBody>
+      </p:sp>
+      <p:sp>
+        <p:nvSpPr>
+          <p:cNvPr id="11" name="Text 8"/>
+          <p:cNvSpPr txBox="1"/>
+          <p:nvPr/>
+        </p:nvSpPr>
+        <p:spPr>
+          <a:xfrm>
+            <a:off x="6537960" y="2606040"/>
+            <a:ext cx="2011680" cy="384048"/>
+          </a:xfrm>
+          <a:prstGeom prst="rect">
+            <a:avLst/>
+          </a:prstGeom>
+          <a:noFill/>
+          <a:ln/>
+        </p:spPr>
+        <p:txBody>
+          <a:bodyPr wrap="square" lIns="0" tIns="0" rIns="0" bIns="0" rtlCol="0" anchor="ctr"/>
+          <a:lstStyle/>
+          <a:p>
+            <a:pPr indent="0" marL="0">
+              <a:buNone/>
+            </a:pPr>
+            <a:r>
+              <a:rPr lang="en-US" sz="1500" b="1" dirty="0">
+                <a:solidFill>
+                  <a:schemeClr val="tx1"/>
+                </a:solidFill>
+              </a:rPr>
+              <a:t>커뮤니티</a:t>
+            </a:r>
+            <a:endParaRPr lang="en-US" sz="1500" dirty="0"/>
+          </a:p>
+        </p:txBody>
+      </p:sp>
+      <p:sp>
+        <p:nvSpPr>
+          <p:cNvPr id="12" name="badge3"/>
+          <p:cNvSpPr/>
+          <p:nvPr/>
+        </p:nvSpPr>
+        <p:spPr>
+          <a:xfrm>
+            <a:off x="6035040" y="3429000"/>
+            <a:ext cx="384048" cy="384048"/>
+          </a:xfrm>
+          <a:prstGeom prst="ellipse">
+            <a:avLst/>
+          </a:prstGeom>
+          <a:solidFill>
+            <a:schemeClr val="tx2"/>
+          </a:solidFill>
+          <a:ln/>
+        </p:spPr>
+      </p:sp>
+      <p:sp>
+        <p:nvSpPr>
+          <p:cNvPr id="13" name="Text 10"/>
+          <p:cNvSpPr txBox="1"/>
+          <p:nvPr/>
+        </p:nvSpPr>
+        <p:spPr>
+          <a:xfrm>
+            <a:off x="6035040" y="3429000"/>
+            <a:ext cx="384048" cy="384048"/>
+          </a:xfrm>
+          <a:prstGeom prst="rect">
+            <a:avLst/>
+          </a:prstGeom>
+          <a:noFill/>
+          <a:ln/>
+        </p:spPr>
+        <p:txBody>
+          <a:bodyPr wrap="square" lIns="0" tIns="0" rIns="0" bIns="0" rtlCol="0" anchor="ctr"/>
+          <a:lstStyle/>
+          <a:p>
+            <a:pPr algn="ctr" indent="0" marL="0">
+              <a:buNone/>
+            </a:pPr>
+            <a:r>
+              <a:rPr lang="en-US" sz="1400" b="1" dirty="0">
+                <a:solidFill>
+                  <a:schemeClr val="bg1"/>
+                </a:solidFill>
+              </a:rPr>
+              <a:t>3</a:t>
+            </a:r>
+            <a:endParaRPr lang="en-US" sz="1400" dirty="0"/>
+          </a:p>
+        </p:txBody>
+      </p:sp>
+      <p:sp>
+        <p:nvSpPr>
+          <p:cNvPr id="14" name="Text 11"/>
+          <p:cNvSpPr txBox="1"/>
+          <p:nvPr/>
+        </p:nvSpPr>
+        <p:spPr>
+          <a:xfrm>
+            <a:off x="6537960" y="3429000"/>
+            <a:ext cx="2011680" cy="384048"/>
+          </a:xfrm>
+          <a:prstGeom prst="rect">
+            <a:avLst/>
+          </a:prstGeom>
+          <a:noFill/>
+          <a:ln/>
+        </p:spPr>
+        <p:txBody>
+          <a:bodyPr wrap="square" lIns="0" tIns="0" rIns="0" bIns="0" rtlCol="0" anchor="ctr"/>
+          <a:lstStyle/>
+          <a:p>
+            <a:pPr indent="0" marL="0">
+              <a:buNone/>
+            </a:pPr>
+            <a:r>
+              <a:rPr lang="en-US" sz="1500" b="1" dirty="0">
+                <a:solidFill>
+                  <a:schemeClr val="tx1"/>
+                </a:solidFill>
+              </a:rPr>
+              <a:t>게임·상품</a:t>
+            </a:r>
+            <a:endParaRPr lang="en-US" sz="1500" dirty="0"/>
+          </a:p>
+        </p:txBody>
+      </p:sp>
+      <p:sp>
+        <p:nvSpPr>
+          <p:cNvPr id="15" name="Text 12"/>
+          <p:cNvSpPr txBox="1"/>
+          <p:nvPr/>
+        </p:nvSpPr>
+        <p:spPr>
+          <a:xfrm>
+            <a:off x="6035040" y="3931920"/>
+            <a:ext cx="2468880" cy="365760"/>
+          </a:xfrm>
+          <a:prstGeom prst="rect">
+            <a:avLst/>
+          </a:prstGeom>
+          <a:noFill/>
+          <a:ln/>
+        </p:spPr>
+        <p:txBody>
+          <a:bodyPr wrap="square" lIns="0" tIns="0" rIns="0" bIns="0" rtlCol="0" anchor="t"/>
+          <a:lstStyle/>
+          <a:p>
+            <a:pPr indent="0" marL="0">
+              <a:buNone/>
+            </a:pPr>
+            <a:r>
+              <a:rPr lang="en-US" sz="1100" dirty="0">
+                <a:solidFill>
+                  <a:schemeClr val="accent4"/>
+                </a:solidFill>
+              </a:rPr>
+              <a:t>앞 단계의 방문자가 다음 단계의 첫 손님</a:t>
+            </a:r>
+            <a:endParaRPr lang="en-US" sz="1100" dirty="0"/>
+          </a:p>
+        </p:txBody>
+      </p:sp>
+      <p:sp>
+        <p:nvSpPr>
+          <p:cNvPr id="25" name="Slide Number Placeholder 0"/>
+          <p:cNvSpPr>
+            <a:spLocks noGrp="1"/>
+          </p:cNvSpPr>
+          <p:nvPr>
+            <p:ph type="sldNum" sz="quarter" idx="4294967295"/>
+          </p:nvPr>
+        </p:nvSpPr>
+        <p:spPr>
+          <a:xfrm>
+            <a:off x="8321040" y="4754880"/>
+            <a:ext cx="457200" cy="274320"/>
+          </a:xfrm>
+          <a:prstGeom prst="rect">
+            <a:avLst/>
+          </a:prstGeom>
+          <a:extLst>
+            <a:ext uri="{C572A759-6A51-4108-AA02-DFA0A04FC94B}">
+              <ma14:wrappingTextBoxFlag xmlns:ma14="http://schemas.microsoft.com/office/mac/drawingml/2011/main" val="0"/>
+            </a:ext>
+          </a:extLst>
+        </p:spPr>
+        <p:txBody>
+          <a:bodyPr/>
+          <a:lstStyle>
+            <a:lvl1pPr>
+              <a:defRPr sz="1000">
+                <a:solidFill>
+                  <a:schemeClr val="accent4"/>
+                </a:solidFill>
+              </a:defRPr>
+            </a:lvl1pPr>
+          </a:lstStyle>
+          <a:p>
+            <a:pPr algn="r"/>
+            <a:fld id="{F7021451-1387-4CA6-816F-3879F97B5CBC}" type="slidenum">
+              <a:rPr b="0" lang="en-US"/>
+              <a:t>29</a:t>
+            </a:fld>
+            <a:endParaRPr lang="en-US"/>
           </a:p>
         </p:txBody>
       </p:sp>
@@ -17204,6 +23369,121 @@
               <a:t>3</a:t>
             </a:fld>
             <a:endParaRPr lang="en-US"/>
+          </a:p>
+        </p:txBody>
+      </p:sp>
+    </p:spTree>
+  </p:cSld>
+  <p:clrMapOvr>
+    <a:masterClrMapping/>
+  </p:clrMapOvr>
+</p:sld>
+</file>
+
+<file path=ppt/slides/slide30.xml><?xml version="1.0" encoding="utf-8"?>
+<p:sld xmlns:a="http://schemas.openxmlformats.org/drawingml/2006/main" xmlns:r="http://schemas.openxmlformats.org/officeDocument/2006/relationships" xmlns:p="http://schemas.openxmlformats.org/presentationml/2006/main">
+  <p:cSld name="Slide 30">
+    <p:spTree>
+      <p:nvGrpSpPr>
+        <p:cNvPr id="1" name=""/>
+        <p:cNvGrpSpPr/>
+        <p:nvPr/>
+      </p:nvGrpSpPr>
+      <p:grpSpPr>
+        <a:xfrm>
+          <a:off x="0" y="0"/>
+          <a:ext cx="0" cy="0"/>
+          <a:chOff x="0" y="0"/>
+          <a:chExt cx="0" cy="0"/>
+        </a:xfrm>
+      </p:grpSpPr>
+      <p:sp>
+        <p:nvSpPr>
+          <p:cNvPr id="2" name="Text 0"/>
+          <p:cNvSpPr/>
+          <p:nvPr>
+            <p:ph idx="100" type="title" hasCustomPrompt="1"/>
+          </p:nvPr>
+        </p:nvSpPr>
+        <p:spPr>
+          <a:xfrm>
+            <a:off x="548640" y="1371600"/>
+            <a:ext cx="8046720" cy="1280160"/>
+          </a:xfrm>
+          <a:prstGeom prst="rect">
+            <a:avLst/>
+          </a:prstGeom>
+          <a:noFill/>
+          <a:ln/>
+        </p:spPr>
+        <p:txBody>
+          <a:bodyPr wrap="square" lIns="0" tIns="0" rIns="0" bIns="0" rtlCol="0" anchor="b"/>
+          <a:lstStyle/>
+          <a:p>
+            <a:pPr algn="l" indent="0" marL="0">
+              <a:buNone/>
+            </a:pPr>
+            <a:r>
+              <a:rPr lang="en-US" sz="4000" b="1" dirty="0">
+                <a:solidFill>
+                  <a:schemeClr val="bg1"/>
+                </a:solidFill>
+              </a:rPr>
+              <a:t>안전하게, 자주 반복하기</a:t>
+            </a:r>
+            <a:endParaRPr lang="en-US" sz="4000" dirty="0"/>
+          </a:p>
+        </p:txBody>
+      </p:sp>
+      <p:sp>
+        <p:nvSpPr>
+          <p:cNvPr id="3" name="Text 0"/>
+          <p:cNvSpPr/>
+          <p:nvPr>
+            <p:ph idx="101" type="body" hasCustomPrompt="1"/>
+          </p:nvPr>
+        </p:nvSpPr>
+        <p:spPr>
+          <a:xfrm>
+            <a:off x="548640" y="2788920"/>
+            <a:ext cx="8046720" cy="1097280"/>
+          </a:xfrm>
+          <a:prstGeom prst="rect">
+            <a:avLst/>
+          </a:prstGeom>
+          <a:noFill/>
+          <a:ln/>
+        </p:spPr>
+        <p:txBody>
+          <a:bodyPr wrap="square" lIns="0" tIns="0" rIns="0" bIns="0" rtlCol="0" anchor="t"/>
+          <a:lstStyle/>
+          <a:p>
+            <a:pPr algn="l" indent="0" marL="0">
+              <a:buNone/>
+            </a:pPr>
+            <a:r>
+              <a:rPr lang="en-US" sz="1800" dirty="0">
+                <a:solidFill>
+                  <a:schemeClr val="bg2"/>
+                </a:solidFill>
+              </a:rPr>
+              <a:t>기획 → 백업 → 연습용 사이트에서 수정 → 확인 → 배포 → 감시 → 숫자 보기 → 다시 기획</a:t>
+            </a:r>
+            <a:endParaRPr lang="en-US" sz="1800" dirty="0"/>
+          </a:p>
+          <a:p>
+            <a:pPr algn="l" indent="0" marL="0">
+              <a:buNone/>
+            </a:pPr>
+            <a:r>
+              <a:rPr lang="en-US" sz="1800" dirty="0">
+                <a:solidFill>
+                  <a:schemeClr val="bg2"/>
+                </a:solidFill>
+              </a:rPr>
+              <a:t>다음 할 일: docs/13-practice-scenario.md 를 읽고 15장 퀴즈 풀기</a:t>
+            </a:r>
+            <a:endParaRPr lang="en-US" sz="1800" dirty="0"/>
           </a:p>
         </p:txBody>
       </p:sp>

--- a/slides/internet-business-101.pptx
+++ b/slides/internet-business-101.pptx
@@ -35,9 +35,16 @@
     <p:sldId id="283" r:id="rId29"/>
     <p:sldId id="284" r:id="rId30"/>
     <p:sldId id="285" r:id="rId31"/>
+    <p:sldId id="286" r:id="rId32"/>
+    <p:sldId id="287" r:id="rId33"/>
+    <p:sldId id="288" r:id="rId34"/>
+    <p:sldId id="289" r:id="rId35"/>
+    <p:sldId id="290" r:id="rId36"/>
+    <p:sldId id="291" r:id="rId37"/>
+    <p:sldId id="292" r:id="rId38"/>
   </p:sldIdLst>
   <p:notesMasterIdLst>
-    <p:notesMasterId r:id="rId32"/>
+    <p:notesMasterId r:id="rId39"/>
   </p:notesMasterIdLst>
   <p:sldSz cx="9144000" cy="5143500"/>
   <p:notesSz cx="5143500" cy="9144000"/>
@@ -136,13 +143,13 @@
   <p:extLst>
     <p:ext uri="{521415D9-36F7-43E2-AB2F-B90AF26B5E84}">
       <p14:sectionLst xmlns:p14="http://schemas.microsoft.com/office/powerpoint/2010/main">
-        <p14:section name="시작" id="{993be9e3-f1eb-c74b-f90c-648158245bd9}">
+        <p14:section name="시작" id="{718abb55-2b60-5903-dabc-f92c232a3ef0}">
           <p14:sldIdLst>
             <p14:sldId id="256"/>
             <p14:sldId id="257"/>
           </p14:sldIdLst>
         </p14:section>
-        <p14:section name="큰 그림" id="{3b2796d0-1d60-e3ae-b2a1-8f0bed7188ea}">
+        <p14:section name="큰 그림" id="{b1918885-5800-00e5-b090-3093ad1b94d9}">
           <p14:sldIdLst>
             <p14:sldId id="258"/>
             <p14:sldId id="259"/>
@@ -151,13 +158,13 @@
             <p14:sldId id="262"/>
           </p14:sldIdLst>
         </p14:section>
-        <p14:section name="만들기" id="{e3221399-a844-e0e1-e7fc-6766a838d3df}">
+        <p14:section name="만들기" id="{838c3b18-ad49-08a3-d5bc-ab5344cb1a1e}">
           <p14:sldIdLst>
             <p14:sldId id="263"/>
             <p14:sldId id="264"/>
           </p14:sldIdLst>
         </p14:section>
-        <p14:section name="운영하기" id="{361b6f21-d1fd-abf4-55ba-dabb88201665}">
+        <p14:section name="운영하기" id="{c0bcc65a-2691-dd52-5d6e-7c47c9412fbb}">
           <p14:sldIdLst>
             <p14:sldId id="265"/>
             <p14:sldId id="266"/>
@@ -171,18 +178,18 @@
             <p14:sldId id="274"/>
           </p14:sldIdLst>
         </p14:section>
-        <p14:section name="키우기" id="{152c18dd-6f3f-757d-3988-9141e2c5503b}">
+        <p14:section name="키우기" id="{890df497-0bd3-61b4-8889-25dd9b6edc47}">
           <p14:sldIdLst>
             <p14:sldId id="275"/>
             <p14:sldId id="276"/>
           </p14:sldIdLst>
         </p14:section>
-        <p14:section name="실전" id="{e65bb268-4382-fd84-8c78-f1fd68ab2e99}">
+        <p14:section name="실전" id="{72f7af09-f111-c1ea-02b8-98601458f034}">
           <p14:sldIdLst>
             <p14:sldId id="277"/>
           </p14:sldIdLst>
         </p14:section>
-        <p14:section name="여러 가지 사이트 사업" id="{ab389907-d15c-6da8-c312-9f40bb87336d}">
+        <p14:section name="여러 가지 사이트 사업" id="{b41d8c00-72d6-b21d-7f92-56a159d3a210}">
           <p14:sldIdLst>
             <p14:sldId id="278"/>
             <p14:sldId id="279"/>
@@ -191,7 +198,18 @@
             <p14:sldId id="282"/>
             <p14:sldId id="283"/>
             <p14:sldId id="284"/>
+          </p14:sldIdLst>
+        </p14:section>
+        <p14:section name="더 넓은 분류" id="{e8f1588e-68d9-f72e-d53d-d652945b55e1}">
+          <p14:sldIdLst>
             <p14:sldId id="285"/>
+            <p14:sldId id="286"/>
+            <p14:sldId id="287"/>
+            <p14:sldId id="288"/>
+            <p14:sldId id="289"/>
+            <p14:sldId id="290"/>
+            <p14:sldId id="291"/>
+            <p14:sldId id="292"/>
           </p14:sldIdLst>
         </p14:section>
       </p14:sectionLst>
@@ -855,6 +873,298 @@
 </c:chartSpace>
 </file>
 
+<file path=ppt/charts/chart3.xml><?xml version="1.0" encoding="utf-8"?>
+<c:chartSpace xmlns:c="http://schemas.openxmlformats.org/drawingml/2006/chart" xmlns:a="http://schemas.openxmlformats.org/drawingml/2006/main" xmlns:r="http://schemas.openxmlformats.org/officeDocument/2006/relationships">
+  <c:date1904 val="0"/>
+  <c:roundedCorners val="1"/>
+  <c:chart>
+    <c:title>
+      <c:tx>
+        <c:rich>
+          <a:bodyPr/>
+          <a:lstStyle/>
+          <a:p>
+            <a:pPr>
+              <a:defRPr sz="1300" b="0" i="0" u="none" strike="noStrike">
+                <a:solidFill>
+                  <a:srgbClr val="1B2B2E"/>
+                </a:solidFill>
+                <a:latin typeface="+mn-lt"/>
+              </a:defRPr>
+            </a:pPr>
+            <a:r>
+              <a:rPr sz="1300" b="0" i="0" u="none" strike="noStrike">
+                <a:solidFill>
+                  <a:srgbClr val="1B2B2E"/>
+                </a:solidFill>
+                <a:latin typeface="+mn-lt"/>
+              </a:rPr>
+              <a:t>월 1만 원 구독 서비스 (예시)</a:t>
+            </a:r>
+          </a:p>
+        </c:rich>
+      </c:tx>
+      <c:layout/>
+      <c:overlay val="0"/>
+    </c:title>
+    <c:autoTitleDeleted val="0"/>
+    <c:plotArea>
+      <c:layout/>
+      <c:barChart>
+        <c:barDir val="bar"/>
+        <c:grouping val="clustered"/>
+        <c:varyColors val="0"/>
+        <c:ser>
+          <c:idx val="0"/>
+          <c:order val="0"/>
+          <c:tx>
+            <c:strRef>
+              <c:f>Sheet1!$B$1</c:f>
+              <c:strCache>
+                <c:ptCount val="1"/>
+                <c:pt idx="0">
+                  <c:v>원</c:v>
+                </c:pt>
+              </c:strCache>
+            </c:strRef>
+          </c:tx>
+          <c:spPr>
+            <a:solidFill>
+              <a:srgbClr val="1F4E4A"/>
+            </a:solidFill>
+            <a:effectLst/>
+          </c:spPr>
+          <c:invertIfNegative val="0"/>
+          <c:dLbls>
+            <c:numFmt formatCode="#,##0" sourceLinked="0"/>
+            <c:txPr>
+              <a:bodyPr/>
+              <a:lstStyle/>
+              <a:p>
+                <a:pPr>
+                  <a:defRPr b="0" i="0" strike="noStrike" sz="1100" u="none">
+                    <a:solidFill>
+                      <a:srgbClr val="1B2B2E"/>
+                    </a:solidFill>
+                    <a:latin typeface="+mn-lt"/>
+                  </a:defRPr>
+                </a:pPr>
+              </a:p>
+            </c:txPr>
+            <c:showLegendKey val="0"/>
+            <c:showVal val="1"/>
+            <c:showCatName val="0"/>
+            <c:showSerName val="0"/>
+            <c:showPercent val="0"/>
+            <c:showBubbleSize val="0"/>
+            <c:showLeaderLines val="0"/>
+          </c:dLbls>
+          <c:dPt>
+            <c:idx val="0"/>
+            <c:invertIfNegative val="0"/>
+            <c:bubble3D val="0"/>
+            <c:spPr>
+              <a:solidFill>
+                <a:srgbClr val="1F4E4A"/>
+              </a:solidFill>
+              <a:effectLst/>
+            </c:spPr>
+          </c:dPt>
+          <c:dPt>
+            <c:idx val="1"/>
+            <c:invertIfNegative val="0"/>
+            <c:bubble3D val="0"/>
+            <c:spPr>
+              <a:solidFill>
+                <a:srgbClr val="2E9C8F"/>
+              </a:solidFill>
+              <a:effectLst/>
+            </c:spPr>
+          </c:dPt>
+          <c:dPt>
+            <c:idx val="2"/>
+            <c:invertIfNegative val="0"/>
+            <c:bubble3D val="0"/>
+            <c:spPr>
+              <a:solidFill>
+                <a:srgbClr val="D9534F"/>
+              </a:solidFill>
+              <a:effectLst/>
+            </c:spPr>
+          </c:dPt>
+          <c:cat>
+            <c:multiLvlStrRef>
+              <c:f>Sheet1!$A$2:$A$4</c:f>
+              <c:multiLvlStrCache>
+                <c:ptCount val="3"/>
+                <c:lvl>
+                  <c:pt idx="0">
+                    <c:v>구독료</c:v>
+                  </c:pt>
+                  <c:pt idx="1">
+                    <c:v>적게 쓰는 손님 AI 비용</c:v>
+                  </c:pt>
+                  <c:pt idx="2">
+                    <c:v>많이 쓰는 손님 AI 비용</c:v>
+                  </c:pt>
+                </c:lvl>
+              </c:multiLvlStrCache>
+            </c:multiLvlStrRef>
+          </c:cat>
+          <c:val>
+            <c:numRef>
+              <c:f>Sheet1!$B$2:$B$4</c:f>
+              <c:numCache>
+                <c:formatCode>General</c:formatCode>
+                <c:ptCount val="3"/>
+                <c:pt idx="0">
+                  <c:v>10000</c:v>
+                </c:pt>
+                <c:pt idx="1">
+                  <c:v>3000</c:v>
+                </c:pt>
+                <c:pt idx="2">
+                  <c:v>15000</c:v>
+                </c:pt>
+              </c:numCache>
+            </c:numRef>
+          </c:val>
+        </c:ser>
+        <c:dLbls>
+          <c:numFmt formatCode="#,##0" sourceLinked="0"/>
+          <c:txPr>
+            <a:bodyPr/>
+            <a:lstStyle/>
+            <a:p>
+              <a:pPr>
+                <a:defRPr b="0" i="0" strike="noStrike" sz="1100" u="none">
+                  <a:solidFill>
+                    <a:srgbClr val="1B2B2E"/>
+                  </a:solidFill>
+                  <a:latin typeface="+mn-lt"/>
+                </a:defRPr>
+              </a:pPr>
+            </a:p>
+          </c:txPr>
+          <c:showLegendKey val="0"/>
+          <c:showVal val="1"/>
+          <c:showCatName val="0"/>
+          <c:showSerName val="0"/>
+          <c:showPercent val="0"/>
+          <c:showBubbleSize val="0"/>
+          <c:showLeaderLines val="0"/>
+        </c:dLbls>
+        <c:gapWidth val="150"/>
+        <c:overlap val="0"/>
+        <c:axId val="2094734554"/>
+        <c:axId val="2094734552"/>
+        <c:axId val="2094734556"/>
+      </c:barChart>
+      <c:catAx>
+        <c:axId val="2094734554"/>
+        <c:scaling>
+          <c:orientation val="maxMin"/>
+        </c:scaling>
+        <c:delete val="0"/>
+        <c:axPos val="l"/>
+        <c:numFmt formatCode="General" sourceLinked="1"/>
+        <c:majorTickMark val="out"/>
+        <c:minorTickMark val="none"/>
+        <c:tickLblPos val="nextTo"/>
+        <c:spPr>
+          <a:ln w="12700" cap="flat">
+            <a:solidFill>
+              <a:srgbClr val="888888"/>
+            </a:solidFill>
+            <a:prstDash val="solid"/>
+            <a:round/>
+          </a:ln>
+        </c:spPr>
+        <c:txPr>
+          <a:bodyPr/>
+          <a:lstStyle/>
+          <a:p>
+            <a:pPr>
+              <a:defRPr sz="1100" b="0" i="0" u="none" strike="noStrike">
+                <a:solidFill>
+                  <a:srgbClr val="1B2B2E"/>
+                </a:solidFill>
+                <a:latin typeface="+mn-lt"/>
+              </a:defRPr>
+            </a:pPr>
+            <a:endParaRPr lang="en-US"/>
+          </a:p>
+        </c:txPr>
+        <c:crossAx val="2094734552"/>
+        <c:crosses val="autoZero"/>
+        <c:auto val="1"/>
+        <c:lblAlgn val="ctr"/>
+        <c:noMultiLvlLbl val="1"/>
+      </c:catAx>
+      <c:valAx>
+        <c:axId val="2094734552"/>
+        <c:scaling>
+          <c:orientation val="minMax"/>
+          <c:max val="19000"/>
+        </c:scaling>
+        <c:delete val="1"/>
+        <c:axPos val="b"/>
+        <c:numFmt formatCode="General" sourceLinked="0"/>
+        <c:majorTickMark val="out"/>
+        <c:minorTickMark val="none"/>
+        <c:tickLblPos val="low"/>
+        <c:spPr>
+          <a:ln w="12700" cap="flat">
+            <a:solidFill>
+              <a:srgbClr val="888888"/>
+            </a:solidFill>
+            <a:prstDash val="solid"/>
+            <a:round/>
+          </a:ln>
+        </c:spPr>
+        <c:txPr>
+          <a:bodyPr/>
+          <a:lstStyle/>
+          <a:p>
+            <a:pPr>
+              <a:defRPr sz="1200" b="0" i="0" u="none" strike="noStrike">
+                <a:solidFill>
+                  <a:srgbClr val="000000"/>
+                </a:solidFill>
+                <a:latin typeface="Arial"/>
+              </a:defRPr>
+            </a:pPr>
+            <a:endParaRPr lang="en-US"/>
+          </a:p>
+        </c:txPr>
+        <c:crossAx val="2094734554"/>
+        <c:crosses val="autoZero"/>
+        <c:crossBetween val="between"/>
+      </c:valAx>
+      <c:spPr>
+        <a:noFill/>
+        <a:ln>
+          <a:noFill/>
+        </a:ln>
+        <a:effectLst/>
+      </c:spPr>
+    </c:plotArea>
+    <c:plotVisOnly val="1"/>
+    <c:dispBlanksAs val="span"/>
+  </c:chart>
+  <c:spPr>
+    <a:noFill/>
+    <a:ln>
+      <a:noFill/>
+    </a:ln>
+    <a:effectLst/>
+  </c:spPr>
+  <c:externalData r:id="rId1">
+    <c:autoUpdate val="0"/>
+  </c:externalData>
+</c:chartSpace>
+</file>
+
 <file path=ppt/notesMasters/notesMaster1.xml><?xml version="1.0" encoding="utf-8"?>
 <p:notesMaster xmlns:a="http://schemas.openxmlformats.org/drawingml/2006/main" xmlns:r="http://schemas.openxmlformats.org/officeDocument/2006/relationships" xmlns:p="http://schemas.openxmlformats.org/presentationml/2006/main">
   <p:cSld>
@@ -3298,6 +3608,622 @@
             <a:fld id="{F7021451-1387-4CA6-816F-3879F97B5CBC}" type="slidenum">
               <a:rPr lang="en-US"/>
               <a:t>30</a:t>
+            </a:fld>
+            <a:endParaRPr lang="en-US"/>
+          </a:p>
+        </p:txBody>
+      </p:sp>
+    </p:spTree>
+    <p:extLst>
+      <p:ext uri="{BB962C8B-B14F-4D97-AF65-F5344CB8AC3E}">
+        <p14:creationId xmlns:p14="http://schemas.microsoft.com/office/powerpoint/2010/main" val="1024086991"/>
+      </p:ext>
+    </p:extLst>
+  </p:cSld>
+  <p:clrMapOvr>
+    <a:masterClrMapping/>
+  </p:clrMapOvr>
+</p:notes>
+</file>
+
+<file path=ppt/notesSlides/notesSlide31.xml><?xml version="1.0" encoding="utf-8"?>
+<p:notes xmlns:a="http://schemas.openxmlformats.org/drawingml/2006/main" xmlns:r="http://schemas.openxmlformats.org/officeDocument/2006/relationships" xmlns:p="http://schemas.openxmlformats.org/presentationml/2006/main">
+  <p:cSld>
+    <p:spTree>
+      <p:nvGrpSpPr>
+        <p:cNvPr id="1" name=""/>
+        <p:cNvGrpSpPr/>
+        <p:nvPr/>
+      </p:nvGrpSpPr>
+      <p:grpSpPr>
+        <a:xfrm>
+          <a:off x="0" y="0"/>
+          <a:ext cx="0" cy="0"/>
+          <a:chOff x="0" y="0"/>
+          <a:chExt cx="0" cy="0"/>
+        </a:xfrm>
+      </p:grpSpPr>
+      <p:sp>
+        <p:nvSpPr>
+          <p:cNvPr id="2" name="Slide Image Placeholder 1"/>
+          <p:cNvSpPr>
+            <a:spLocks noGrp="1" noRot="1" noChangeAspect="1"/>
+          </p:cNvSpPr>
+          <p:nvPr>
+            <p:ph type="sldImg"/>
+          </p:nvPr>
+        </p:nvSpPr>
+        <p:spPr/>
+      </p:sp>
+      <p:sp>
+        <p:nvSpPr>
+          <p:cNvPr id="3" name="Notes Placeholder 2"/>
+          <p:cNvSpPr>
+            <a:spLocks noGrp="1"/>
+          </p:cNvSpPr>
+          <p:nvPr>
+            <p:ph type="body" idx="1"/>
+          </p:nvPr>
+        </p:nvSpPr>
+        <p:spPr/>
+        <p:txBody>
+          <a:bodyPr/>
+          <a:lstStyle/>
+          <a:p>
+            <a:r>
+              <a:rPr lang="en-US" dirty="0"/>
+              <a:t/>
+            </a:r>
+            <a:endParaRPr lang="en-US" dirty="0"/>
+          </a:p>
+        </p:txBody>
+      </p:sp>
+      <p:sp>
+        <p:nvSpPr>
+          <p:cNvPr id="4" name="Slide Number Placeholder 3"/>
+          <p:cNvSpPr>
+            <a:spLocks noGrp="1"/>
+          </p:cNvSpPr>
+          <p:nvPr>
+            <p:ph type="sldNum" sz="quarter" idx="10"/>
+          </p:nvPr>
+        </p:nvSpPr>
+        <p:spPr/>
+        <p:txBody>
+          <a:bodyPr/>
+          <a:lstStyle/>
+          <a:p>
+            <a:fld id="{F7021451-1387-4CA6-816F-3879F97B5CBC}" type="slidenum">
+              <a:rPr lang="en-US"/>
+              <a:t>31</a:t>
+            </a:fld>
+            <a:endParaRPr lang="en-US"/>
+          </a:p>
+        </p:txBody>
+      </p:sp>
+    </p:spTree>
+    <p:extLst>
+      <p:ext uri="{BB962C8B-B14F-4D97-AF65-F5344CB8AC3E}">
+        <p14:creationId xmlns:p14="http://schemas.microsoft.com/office/powerpoint/2010/main" val="1024086991"/>
+      </p:ext>
+    </p:extLst>
+  </p:cSld>
+  <p:clrMapOvr>
+    <a:masterClrMapping/>
+  </p:clrMapOvr>
+</p:notes>
+</file>
+
+<file path=ppt/notesSlides/notesSlide32.xml><?xml version="1.0" encoding="utf-8"?>
+<p:notes xmlns:a="http://schemas.openxmlformats.org/drawingml/2006/main" xmlns:r="http://schemas.openxmlformats.org/officeDocument/2006/relationships" xmlns:p="http://schemas.openxmlformats.org/presentationml/2006/main">
+  <p:cSld>
+    <p:spTree>
+      <p:nvGrpSpPr>
+        <p:cNvPr id="1" name=""/>
+        <p:cNvGrpSpPr/>
+        <p:nvPr/>
+      </p:nvGrpSpPr>
+      <p:grpSpPr>
+        <a:xfrm>
+          <a:off x="0" y="0"/>
+          <a:ext cx="0" cy="0"/>
+          <a:chOff x="0" y="0"/>
+          <a:chExt cx="0" cy="0"/>
+        </a:xfrm>
+      </p:grpSpPr>
+      <p:sp>
+        <p:nvSpPr>
+          <p:cNvPr id="2" name="Slide Image Placeholder 1"/>
+          <p:cNvSpPr>
+            <a:spLocks noGrp="1" noRot="1" noChangeAspect="1"/>
+          </p:cNvSpPr>
+          <p:nvPr>
+            <p:ph type="sldImg"/>
+          </p:nvPr>
+        </p:nvSpPr>
+        <p:spPr/>
+      </p:sp>
+      <p:sp>
+        <p:nvSpPr>
+          <p:cNvPr id="3" name="Notes Placeholder 2"/>
+          <p:cNvSpPr>
+            <a:spLocks noGrp="1"/>
+          </p:cNvSpPr>
+          <p:nvPr>
+            <p:ph type="body" idx="1"/>
+          </p:nvPr>
+        </p:nvSpPr>
+        <p:spPr/>
+        <p:txBody>
+          <a:bodyPr/>
+          <a:lstStyle/>
+          <a:p>
+            <a:r>
+              <a:rPr lang="en-US" dirty="0"/>
+              <a:t/>
+            </a:r>
+            <a:endParaRPr lang="en-US" dirty="0"/>
+          </a:p>
+        </p:txBody>
+      </p:sp>
+      <p:sp>
+        <p:nvSpPr>
+          <p:cNvPr id="4" name="Slide Number Placeholder 3"/>
+          <p:cNvSpPr>
+            <a:spLocks noGrp="1"/>
+          </p:cNvSpPr>
+          <p:nvPr>
+            <p:ph type="sldNum" sz="quarter" idx="10"/>
+          </p:nvPr>
+        </p:nvSpPr>
+        <p:spPr/>
+        <p:txBody>
+          <a:bodyPr/>
+          <a:lstStyle/>
+          <a:p>
+            <a:fld id="{F7021451-1387-4CA6-816F-3879F97B5CBC}" type="slidenum">
+              <a:rPr lang="en-US"/>
+              <a:t>32</a:t>
+            </a:fld>
+            <a:endParaRPr lang="en-US"/>
+          </a:p>
+        </p:txBody>
+      </p:sp>
+    </p:spTree>
+    <p:extLst>
+      <p:ext uri="{BB962C8B-B14F-4D97-AF65-F5344CB8AC3E}">
+        <p14:creationId xmlns:p14="http://schemas.microsoft.com/office/powerpoint/2010/main" val="1024086991"/>
+      </p:ext>
+    </p:extLst>
+  </p:cSld>
+  <p:clrMapOvr>
+    <a:masterClrMapping/>
+  </p:clrMapOvr>
+</p:notes>
+</file>
+
+<file path=ppt/notesSlides/notesSlide33.xml><?xml version="1.0" encoding="utf-8"?>
+<p:notes xmlns:a="http://schemas.openxmlformats.org/drawingml/2006/main" xmlns:r="http://schemas.openxmlformats.org/officeDocument/2006/relationships" xmlns:p="http://schemas.openxmlformats.org/presentationml/2006/main">
+  <p:cSld>
+    <p:spTree>
+      <p:nvGrpSpPr>
+        <p:cNvPr id="1" name=""/>
+        <p:cNvGrpSpPr/>
+        <p:nvPr/>
+      </p:nvGrpSpPr>
+      <p:grpSpPr>
+        <a:xfrm>
+          <a:off x="0" y="0"/>
+          <a:ext cx="0" cy="0"/>
+          <a:chOff x="0" y="0"/>
+          <a:chExt cx="0" cy="0"/>
+        </a:xfrm>
+      </p:grpSpPr>
+      <p:sp>
+        <p:nvSpPr>
+          <p:cNvPr id="2" name="Slide Image Placeholder 1"/>
+          <p:cNvSpPr>
+            <a:spLocks noGrp="1" noRot="1" noChangeAspect="1"/>
+          </p:cNvSpPr>
+          <p:nvPr>
+            <p:ph type="sldImg"/>
+          </p:nvPr>
+        </p:nvSpPr>
+        <p:spPr/>
+      </p:sp>
+      <p:sp>
+        <p:nvSpPr>
+          <p:cNvPr id="3" name="Notes Placeholder 2"/>
+          <p:cNvSpPr>
+            <a:spLocks noGrp="1"/>
+          </p:cNvSpPr>
+          <p:nvPr>
+            <p:ph type="body" idx="1"/>
+          </p:nvPr>
+        </p:nvSpPr>
+        <p:spPr/>
+        <p:txBody>
+          <a:bodyPr/>
+          <a:lstStyle/>
+          <a:p>
+            <a:r>
+              <a:rPr lang="en-US" dirty="0"/>
+              <a:t/>
+            </a:r>
+            <a:endParaRPr lang="en-US" dirty="0"/>
+          </a:p>
+        </p:txBody>
+      </p:sp>
+      <p:sp>
+        <p:nvSpPr>
+          <p:cNvPr id="4" name="Slide Number Placeholder 3"/>
+          <p:cNvSpPr>
+            <a:spLocks noGrp="1"/>
+          </p:cNvSpPr>
+          <p:nvPr>
+            <p:ph type="sldNum" sz="quarter" idx="10"/>
+          </p:nvPr>
+        </p:nvSpPr>
+        <p:spPr/>
+        <p:txBody>
+          <a:bodyPr/>
+          <a:lstStyle/>
+          <a:p>
+            <a:fld id="{F7021451-1387-4CA6-816F-3879F97B5CBC}" type="slidenum">
+              <a:rPr lang="en-US"/>
+              <a:t>33</a:t>
+            </a:fld>
+            <a:endParaRPr lang="en-US"/>
+          </a:p>
+        </p:txBody>
+      </p:sp>
+    </p:spTree>
+    <p:extLst>
+      <p:ext uri="{BB962C8B-B14F-4D97-AF65-F5344CB8AC3E}">
+        <p14:creationId xmlns:p14="http://schemas.microsoft.com/office/powerpoint/2010/main" val="1024086991"/>
+      </p:ext>
+    </p:extLst>
+  </p:cSld>
+  <p:clrMapOvr>
+    <a:masterClrMapping/>
+  </p:clrMapOvr>
+</p:notes>
+</file>
+
+<file path=ppt/notesSlides/notesSlide34.xml><?xml version="1.0" encoding="utf-8"?>
+<p:notes xmlns:a="http://schemas.openxmlformats.org/drawingml/2006/main" xmlns:r="http://schemas.openxmlformats.org/officeDocument/2006/relationships" xmlns:p="http://schemas.openxmlformats.org/presentationml/2006/main">
+  <p:cSld>
+    <p:spTree>
+      <p:nvGrpSpPr>
+        <p:cNvPr id="1" name=""/>
+        <p:cNvGrpSpPr/>
+        <p:nvPr/>
+      </p:nvGrpSpPr>
+      <p:grpSpPr>
+        <a:xfrm>
+          <a:off x="0" y="0"/>
+          <a:ext cx="0" cy="0"/>
+          <a:chOff x="0" y="0"/>
+          <a:chExt cx="0" cy="0"/>
+        </a:xfrm>
+      </p:grpSpPr>
+      <p:sp>
+        <p:nvSpPr>
+          <p:cNvPr id="2" name="Slide Image Placeholder 1"/>
+          <p:cNvSpPr>
+            <a:spLocks noGrp="1" noRot="1" noChangeAspect="1"/>
+          </p:cNvSpPr>
+          <p:nvPr>
+            <p:ph type="sldImg"/>
+          </p:nvPr>
+        </p:nvSpPr>
+        <p:spPr/>
+      </p:sp>
+      <p:sp>
+        <p:nvSpPr>
+          <p:cNvPr id="3" name="Notes Placeholder 2"/>
+          <p:cNvSpPr>
+            <a:spLocks noGrp="1"/>
+          </p:cNvSpPr>
+          <p:nvPr>
+            <p:ph type="body" idx="1"/>
+          </p:nvPr>
+        </p:nvSpPr>
+        <p:spPr/>
+        <p:txBody>
+          <a:bodyPr/>
+          <a:lstStyle/>
+          <a:p>
+            <a:r>
+              <a:rPr lang="en-US" dirty="0"/>
+              <a:t/>
+            </a:r>
+            <a:endParaRPr lang="en-US" dirty="0"/>
+          </a:p>
+        </p:txBody>
+      </p:sp>
+      <p:sp>
+        <p:nvSpPr>
+          <p:cNvPr id="4" name="Slide Number Placeholder 3"/>
+          <p:cNvSpPr>
+            <a:spLocks noGrp="1"/>
+          </p:cNvSpPr>
+          <p:nvPr>
+            <p:ph type="sldNum" sz="quarter" idx="10"/>
+          </p:nvPr>
+        </p:nvSpPr>
+        <p:spPr/>
+        <p:txBody>
+          <a:bodyPr/>
+          <a:lstStyle/>
+          <a:p>
+            <a:fld id="{F7021451-1387-4CA6-816F-3879F97B5CBC}" type="slidenum">
+              <a:rPr lang="en-US"/>
+              <a:t>34</a:t>
+            </a:fld>
+            <a:endParaRPr lang="en-US"/>
+          </a:p>
+        </p:txBody>
+      </p:sp>
+    </p:spTree>
+    <p:extLst>
+      <p:ext uri="{BB962C8B-B14F-4D97-AF65-F5344CB8AC3E}">
+        <p14:creationId xmlns:p14="http://schemas.microsoft.com/office/powerpoint/2010/main" val="1024086991"/>
+      </p:ext>
+    </p:extLst>
+  </p:cSld>
+  <p:clrMapOvr>
+    <a:masterClrMapping/>
+  </p:clrMapOvr>
+</p:notes>
+</file>
+
+<file path=ppt/notesSlides/notesSlide35.xml><?xml version="1.0" encoding="utf-8"?>
+<p:notes xmlns:a="http://schemas.openxmlformats.org/drawingml/2006/main" xmlns:r="http://schemas.openxmlformats.org/officeDocument/2006/relationships" xmlns:p="http://schemas.openxmlformats.org/presentationml/2006/main">
+  <p:cSld>
+    <p:spTree>
+      <p:nvGrpSpPr>
+        <p:cNvPr id="1" name=""/>
+        <p:cNvGrpSpPr/>
+        <p:nvPr/>
+      </p:nvGrpSpPr>
+      <p:grpSpPr>
+        <a:xfrm>
+          <a:off x="0" y="0"/>
+          <a:ext cx="0" cy="0"/>
+          <a:chOff x="0" y="0"/>
+          <a:chExt cx="0" cy="0"/>
+        </a:xfrm>
+      </p:grpSpPr>
+      <p:sp>
+        <p:nvSpPr>
+          <p:cNvPr id="2" name="Slide Image Placeholder 1"/>
+          <p:cNvSpPr>
+            <a:spLocks noGrp="1" noRot="1" noChangeAspect="1"/>
+          </p:cNvSpPr>
+          <p:nvPr>
+            <p:ph type="sldImg"/>
+          </p:nvPr>
+        </p:nvSpPr>
+        <p:spPr/>
+      </p:sp>
+      <p:sp>
+        <p:nvSpPr>
+          <p:cNvPr id="3" name="Notes Placeholder 2"/>
+          <p:cNvSpPr>
+            <a:spLocks noGrp="1"/>
+          </p:cNvSpPr>
+          <p:nvPr>
+            <p:ph type="body" idx="1"/>
+          </p:nvPr>
+        </p:nvSpPr>
+        <p:spPr/>
+        <p:txBody>
+          <a:bodyPr/>
+          <a:lstStyle/>
+          <a:p>
+            <a:r>
+              <a:rPr lang="en-US" dirty="0"/>
+              <a:t/>
+            </a:r>
+            <a:endParaRPr lang="en-US" dirty="0"/>
+          </a:p>
+        </p:txBody>
+      </p:sp>
+      <p:sp>
+        <p:nvSpPr>
+          <p:cNvPr id="4" name="Slide Number Placeholder 3"/>
+          <p:cNvSpPr>
+            <a:spLocks noGrp="1"/>
+          </p:cNvSpPr>
+          <p:nvPr>
+            <p:ph type="sldNum" sz="quarter" idx="10"/>
+          </p:nvPr>
+        </p:nvSpPr>
+        <p:spPr/>
+        <p:txBody>
+          <a:bodyPr/>
+          <a:lstStyle/>
+          <a:p>
+            <a:fld id="{F7021451-1387-4CA6-816F-3879F97B5CBC}" type="slidenum">
+              <a:rPr lang="en-US"/>
+              <a:t>35</a:t>
+            </a:fld>
+            <a:endParaRPr lang="en-US"/>
+          </a:p>
+        </p:txBody>
+      </p:sp>
+    </p:spTree>
+    <p:extLst>
+      <p:ext uri="{BB962C8B-B14F-4D97-AF65-F5344CB8AC3E}">
+        <p14:creationId xmlns:p14="http://schemas.microsoft.com/office/powerpoint/2010/main" val="1024086991"/>
+      </p:ext>
+    </p:extLst>
+  </p:cSld>
+  <p:clrMapOvr>
+    <a:masterClrMapping/>
+  </p:clrMapOvr>
+</p:notes>
+</file>
+
+<file path=ppt/notesSlides/notesSlide36.xml><?xml version="1.0" encoding="utf-8"?>
+<p:notes xmlns:a="http://schemas.openxmlformats.org/drawingml/2006/main" xmlns:r="http://schemas.openxmlformats.org/officeDocument/2006/relationships" xmlns:p="http://schemas.openxmlformats.org/presentationml/2006/main">
+  <p:cSld>
+    <p:spTree>
+      <p:nvGrpSpPr>
+        <p:cNvPr id="1" name=""/>
+        <p:cNvGrpSpPr/>
+        <p:nvPr/>
+      </p:nvGrpSpPr>
+      <p:grpSpPr>
+        <a:xfrm>
+          <a:off x="0" y="0"/>
+          <a:ext cx="0" cy="0"/>
+          <a:chOff x="0" y="0"/>
+          <a:chExt cx="0" cy="0"/>
+        </a:xfrm>
+      </p:grpSpPr>
+      <p:sp>
+        <p:nvSpPr>
+          <p:cNvPr id="2" name="Slide Image Placeholder 1"/>
+          <p:cNvSpPr>
+            <a:spLocks noGrp="1" noRot="1" noChangeAspect="1"/>
+          </p:cNvSpPr>
+          <p:nvPr>
+            <p:ph type="sldImg"/>
+          </p:nvPr>
+        </p:nvSpPr>
+        <p:spPr/>
+      </p:sp>
+      <p:sp>
+        <p:nvSpPr>
+          <p:cNvPr id="3" name="Notes Placeholder 2"/>
+          <p:cNvSpPr>
+            <a:spLocks noGrp="1"/>
+          </p:cNvSpPr>
+          <p:nvPr>
+            <p:ph type="body" idx="1"/>
+          </p:nvPr>
+        </p:nvSpPr>
+        <p:spPr/>
+        <p:txBody>
+          <a:bodyPr/>
+          <a:lstStyle/>
+          <a:p>
+            <a:r>
+              <a:rPr lang="en-US" dirty="0"/>
+              <a:t/>
+            </a:r>
+            <a:endParaRPr lang="en-US" dirty="0"/>
+          </a:p>
+        </p:txBody>
+      </p:sp>
+      <p:sp>
+        <p:nvSpPr>
+          <p:cNvPr id="4" name="Slide Number Placeholder 3"/>
+          <p:cNvSpPr>
+            <a:spLocks noGrp="1"/>
+          </p:cNvSpPr>
+          <p:nvPr>
+            <p:ph type="sldNum" sz="quarter" idx="10"/>
+          </p:nvPr>
+        </p:nvSpPr>
+        <p:spPr/>
+        <p:txBody>
+          <a:bodyPr/>
+          <a:lstStyle/>
+          <a:p>
+            <a:fld id="{F7021451-1387-4CA6-816F-3879F97B5CBC}" type="slidenum">
+              <a:rPr lang="en-US"/>
+              <a:t>36</a:t>
+            </a:fld>
+            <a:endParaRPr lang="en-US"/>
+          </a:p>
+        </p:txBody>
+      </p:sp>
+    </p:spTree>
+    <p:extLst>
+      <p:ext uri="{BB962C8B-B14F-4D97-AF65-F5344CB8AC3E}">
+        <p14:creationId xmlns:p14="http://schemas.microsoft.com/office/powerpoint/2010/main" val="1024086991"/>
+      </p:ext>
+    </p:extLst>
+  </p:cSld>
+  <p:clrMapOvr>
+    <a:masterClrMapping/>
+  </p:clrMapOvr>
+</p:notes>
+</file>
+
+<file path=ppt/notesSlides/notesSlide37.xml><?xml version="1.0" encoding="utf-8"?>
+<p:notes xmlns:a="http://schemas.openxmlformats.org/drawingml/2006/main" xmlns:r="http://schemas.openxmlformats.org/officeDocument/2006/relationships" xmlns:p="http://schemas.openxmlformats.org/presentationml/2006/main">
+  <p:cSld>
+    <p:spTree>
+      <p:nvGrpSpPr>
+        <p:cNvPr id="1" name=""/>
+        <p:cNvGrpSpPr/>
+        <p:nvPr/>
+      </p:nvGrpSpPr>
+      <p:grpSpPr>
+        <a:xfrm>
+          <a:off x="0" y="0"/>
+          <a:ext cx="0" cy="0"/>
+          <a:chOff x="0" y="0"/>
+          <a:chExt cx="0" cy="0"/>
+        </a:xfrm>
+      </p:grpSpPr>
+      <p:sp>
+        <p:nvSpPr>
+          <p:cNvPr id="2" name="Slide Image Placeholder 1"/>
+          <p:cNvSpPr>
+            <a:spLocks noGrp="1" noRot="1" noChangeAspect="1"/>
+          </p:cNvSpPr>
+          <p:nvPr>
+            <p:ph type="sldImg"/>
+          </p:nvPr>
+        </p:nvSpPr>
+        <p:spPr/>
+      </p:sp>
+      <p:sp>
+        <p:nvSpPr>
+          <p:cNvPr id="3" name="Notes Placeholder 2"/>
+          <p:cNvSpPr>
+            <a:spLocks noGrp="1"/>
+          </p:cNvSpPr>
+          <p:nvPr>
+            <p:ph type="body" idx="1"/>
+          </p:nvPr>
+        </p:nvSpPr>
+        <p:spPr/>
+        <p:txBody>
+          <a:bodyPr/>
+          <a:lstStyle/>
+          <a:p>
+            <a:r>
+              <a:rPr lang="en-US" dirty="0"/>
+              <a:t/>
+            </a:r>
+            <a:endParaRPr lang="en-US" dirty="0"/>
+          </a:p>
+        </p:txBody>
+      </p:sp>
+      <p:sp>
+        <p:nvSpPr>
+          <p:cNvPr id="4" name="Slide Number Placeholder 3"/>
+          <p:cNvSpPr>
+            <a:spLocks noGrp="1"/>
+          </p:cNvSpPr>
+          <p:nvPr>
+            <p:ph type="sldNum" sz="quarter" idx="10"/>
+          </p:nvPr>
+        </p:nvSpPr>
+        <p:spPr/>
+        <p:txBody>
+          <a:bodyPr/>
+          <a:lstStyle/>
+          <a:p>
+            <a:fld id="{F7021451-1387-4CA6-816F-3879F97B5CBC}" type="slidenum">
+              <a:rPr lang="en-US"/>
+              <a:t>37</a:t>
             </a:fld>
             <a:endParaRPr lang="en-US"/>
           </a:p>
@@ -23429,6 +24355,3853 @@
                   <a:schemeClr val="bg1"/>
                 </a:solidFill>
               </a:rPr>
+              <a:t>더 넓은 분류</a:t>
+            </a:r>
+            <a:endParaRPr lang="en-US" sz="4000" dirty="0"/>
+          </a:p>
+        </p:txBody>
+      </p:sp>
+      <p:sp>
+        <p:nvSpPr>
+          <p:cNvPr id="3" name="Text 0"/>
+          <p:cNvSpPr/>
+          <p:nvPr>
+            <p:ph idx="101" type="body" hasCustomPrompt="1"/>
+          </p:nvPr>
+        </p:nvSpPr>
+        <p:spPr>
+          <a:xfrm>
+            <a:off x="548640" y="2788920"/>
+            <a:ext cx="8046720" cy="1097280"/>
+          </a:xfrm>
+          <a:prstGeom prst="rect">
+            <a:avLst/>
+          </a:prstGeom>
+          <a:noFill/>
+          <a:ln/>
+        </p:spPr>
+        <p:txBody>
+          <a:bodyPr wrap="square" lIns="0" tIns="0" rIns="0" bIns="0" rtlCol="0" anchor="t"/>
+          <a:lstStyle/>
+          <a:p>
+            <a:pPr algn="l" indent="0" marL="0">
+              <a:buNone/>
+            </a:pPr>
+            <a:r>
+              <a:rPr lang="en-US" sz="1800" dirty="0">
+                <a:solidFill>
+                  <a:schemeClr val="bg2"/>
+                </a:solidFill>
+              </a:rPr>
+              <a:t>분류 지도 · 셀러 · 크리에이터 · 앱 · 지식·외주 · 중개 플랫폼 · AI · 규제 업종 — 22–29장</a:t>
+            </a:r>
+            <a:endParaRPr lang="en-US" sz="1800" dirty="0"/>
+          </a:p>
+        </p:txBody>
+      </p:sp>
+    </p:spTree>
+  </p:cSld>
+  <p:clrMapOvr>
+    <a:masterClrMapping/>
+  </p:clrMapOvr>
+</p:sld>
+</file>
+
+<file path=ppt/slides/slide31.xml><?xml version="1.0" encoding="utf-8"?>
+<p:sld xmlns:a="http://schemas.openxmlformats.org/drawingml/2006/main" xmlns:r="http://schemas.openxmlformats.org/officeDocument/2006/relationships" xmlns:p="http://schemas.openxmlformats.org/presentationml/2006/main">
+  <p:cSld name="Slide 31">
+    <p:spTree>
+      <p:nvGrpSpPr>
+        <p:cNvPr id="1" name=""/>
+        <p:cNvGrpSpPr/>
+        <p:nvPr/>
+      </p:nvGrpSpPr>
+      <p:grpSpPr>
+        <a:xfrm>
+          <a:off x="0" y="0"/>
+          <a:ext cx="0" cy="0"/>
+          <a:chOff x="0" y="0"/>
+          <a:chExt cx="0" cy="0"/>
+        </a:xfrm>
+      </p:grpSpPr>
+      <p:sp>
+        <p:nvSpPr>
+          <p:cNvPr id="2" name="Text 0"/>
+          <p:cNvSpPr/>
+          <p:nvPr>
+            <p:ph idx="100" type="title" hasCustomPrompt="1"/>
+          </p:nvPr>
+        </p:nvSpPr>
+        <p:spPr>
+          <a:xfrm>
+            <a:off x="457200" y="274320"/>
+            <a:ext cx="8229600" cy="685800"/>
+          </a:xfrm>
+          <a:prstGeom prst="rect">
+            <a:avLst/>
+          </a:prstGeom>
+          <a:noFill/>
+          <a:ln/>
+        </p:spPr>
+        <p:txBody>
+          <a:bodyPr wrap="square" lIns="0" tIns="0" rIns="0" bIns="0" rtlCol="0" anchor="ctr"/>
+          <a:lstStyle/>
+          <a:p>
+            <a:pPr indent="0" marL="0">
+              <a:buNone/>
+            </a:pPr>
+            <a:r>
+              <a:rPr lang="en-US" sz="2800" b="1" dirty="0">
+                <a:solidFill>
+                  <a:schemeClr val="tx2"/>
+                </a:solidFill>
+              </a:rPr>
+              <a:t>사업을 나누는 6가지 기준</a:t>
+            </a:r>
+            <a:endParaRPr lang="en-US" sz="2800" dirty="0"/>
+          </a:p>
+        </p:txBody>
+      </p:sp>
+      <p:sp>
+        <p:nvSpPr>
+          <p:cNvPr id="3" name="card"/>
+          <p:cNvSpPr/>
+          <p:nvPr/>
+        </p:nvSpPr>
+        <p:spPr>
+          <a:xfrm>
+            <a:off x="457200" y="1188720"/>
+            <a:ext cx="2606040" cy="1234440"/>
+          </a:xfrm>
+          <a:prstGeom prst="roundRect">
+            <a:avLst>
+              <a:gd name="adj" fmla="val 5926"/>
+            </a:avLst>
+          </a:prstGeom>
+          <a:solidFill>
+            <a:schemeClr val="bg2"/>
+          </a:solidFill>
+          <a:ln/>
+        </p:spPr>
+      </p:sp>
+      <p:sp>
+        <p:nvSpPr>
+          <p:cNvPr id="4" name="badge1"/>
+          <p:cNvSpPr/>
+          <p:nvPr/>
+        </p:nvSpPr>
+        <p:spPr>
+          <a:xfrm>
+            <a:off x="640080" y="1371600"/>
+            <a:ext cx="384048" cy="384048"/>
+          </a:xfrm>
+          <a:prstGeom prst="ellipse">
+            <a:avLst/>
+          </a:prstGeom>
+          <a:solidFill>
+            <a:schemeClr val="tx2"/>
+          </a:solidFill>
+          <a:ln/>
+        </p:spPr>
+      </p:sp>
+      <p:sp>
+        <p:nvSpPr>
+          <p:cNvPr id="5" name="Text 3"/>
+          <p:cNvSpPr txBox="1"/>
+          <p:nvPr/>
+        </p:nvSpPr>
+        <p:spPr>
+          <a:xfrm>
+            <a:off x="640080" y="1371600"/>
+            <a:ext cx="384048" cy="384048"/>
+          </a:xfrm>
+          <a:prstGeom prst="rect">
+            <a:avLst/>
+          </a:prstGeom>
+          <a:noFill/>
+          <a:ln/>
+        </p:spPr>
+        <p:txBody>
+          <a:bodyPr wrap="square" lIns="0" tIns="0" rIns="0" bIns="0" rtlCol="0" anchor="ctr"/>
+          <a:lstStyle/>
+          <a:p>
+            <a:pPr algn="ctr" indent="0" marL="0">
+              <a:buNone/>
+            </a:pPr>
+            <a:r>
+              <a:rPr lang="en-US" sz="1400" b="1" dirty="0">
+                <a:solidFill>
+                  <a:schemeClr val="bg1"/>
+                </a:solidFill>
+              </a:rPr>
+              <a:t>1</a:t>
+            </a:r>
+            <a:endParaRPr lang="en-US" sz="1400" dirty="0"/>
+          </a:p>
+        </p:txBody>
+      </p:sp>
+      <p:sp>
+        <p:nvSpPr>
+          <p:cNvPr id="6" name="Text 4"/>
+          <p:cNvSpPr txBox="1"/>
+          <p:nvPr/>
+        </p:nvSpPr>
+        <p:spPr>
+          <a:xfrm>
+            <a:off x="1143000" y="1371600"/>
+            <a:ext cx="1828800" cy="384048"/>
+          </a:xfrm>
+          <a:prstGeom prst="rect">
+            <a:avLst/>
+          </a:prstGeom>
+          <a:noFill/>
+          <a:ln/>
+        </p:spPr>
+        <p:txBody>
+          <a:bodyPr wrap="square" lIns="0" tIns="0" rIns="0" bIns="0" rtlCol="0" anchor="ctr"/>
+          <a:lstStyle/>
+          <a:p>
+            <a:pPr indent="0" marL="0">
+              <a:buNone/>
+            </a:pPr>
+            <a:r>
+              <a:rPr lang="en-US" sz="1700" b="1" dirty="0">
+                <a:solidFill>
+                  <a:schemeClr val="tx2"/>
+                </a:solidFill>
+              </a:rPr>
+              <a:t>누구에게</a:t>
+            </a:r>
+            <a:endParaRPr lang="en-US" sz="1700" dirty="0"/>
+          </a:p>
+        </p:txBody>
+      </p:sp>
+      <p:sp>
+        <p:nvSpPr>
+          <p:cNvPr id="7" name="Text 5"/>
+          <p:cNvSpPr txBox="1"/>
+          <p:nvPr/>
+        </p:nvSpPr>
+        <p:spPr>
+          <a:xfrm>
+            <a:off x="640080" y="1874520"/>
+            <a:ext cx="2286000" cy="457200"/>
+          </a:xfrm>
+          <a:prstGeom prst="rect">
+            <a:avLst/>
+          </a:prstGeom>
+          <a:noFill/>
+          <a:ln/>
+        </p:spPr>
+        <p:txBody>
+          <a:bodyPr wrap="square" lIns="0" tIns="0" rIns="0" bIns="0" rtlCol="0" anchor="t"/>
+          <a:lstStyle/>
+          <a:p>
+            <a:pPr indent="0" marL="0">
+              <a:buNone/>
+            </a:pPr>
+            <a:r>
+              <a:rPr lang="en-US" sz="1200" dirty="0">
+                <a:solidFill>
+                  <a:schemeClr val="accent4"/>
+                </a:solidFill>
+              </a:rPr>
+              <a:t>B2C · B2B · C2C · B2G</a:t>
+            </a:r>
+            <a:endParaRPr lang="en-US" sz="1200" dirty="0"/>
+          </a:p>
+        </p:txBody>
+      </p:sp>
+      <p:sp>
+        <p:nvSpPr>
+          <p:cNvPr id="8" name="card"/>
+          <p:cNvSpPr/>
+          <p:nvPr/>
+        </p:nvSpPr>
+        <p:spPr>
+          <a:xfrm>
+            <a:off x="3246120" y="1188720"/>
+            <a:ext cx="2606040" cy="1234440"/>
+          </a:xfrm>
+          <a:prstGeom prst="roundRect">
+            <a:avLst>
+              <a:gd name="adj" fmla="val 5926"/>
+            </a:avLst>
+          </a:prstGeom>
+          <a:solidFill>
+            <a:schemeClr val="bg2"/>
+          </a:solidFill>
+          <a:ln/>
+        </p:spPr>
+      </p:sp>
+      <p:sp>
+        <p:nvSpPr>
+          <p:cNvPr id="9" name="badge2"/>
+          <p:cNvSpPr/>
+          <p:nvPr/>
+        </p:nvSpPr>
+        <p:spPr>
+          <a:xfrm>
+            <a:off x="3429000" y="1371600"/>
+            <a:ext cx="384048" cy="384048"/>
+          </a:xfrm>
+          <a:prstGeom prst="ellipse">
+            <a:avLst/>
+          </a:prstGeom>
+          <a:solidFill>
+            <a:schemeClr val="tx2"/>
+          </a:solidFill>
+          <a:ln/>
+        </p:spPr>
+      </p:sp>
+      <p:sp>
+        <p:nvSpPr>
+          <p:cNvPr id="10" name="Text 8"/>
+          <p:cNvSpPr txBox="1"/>
+          <p:nvPr/>
+        </p:nvSpPr>
+        <p:spPr>
+          <a:xfrm>
+            <a:off x="3429000" y="1371600"/>
+            <a:ext cx="384048" cy="384048"/>
+          </a:xfrm>
+          <a:prstGeom prst="rect">
+            <a:avLst/>
+          </a:prstGeom>
+          <a:noFill/>
+          <a:ln/>
+        </p:spPr>
+        <p:txBody>
+          <a:bodyPr wrap="square" lIns="0" tIns="0" rIns="0" bIns="0" rtlCol="0" anchor="ctr"/>
+          <a:lstStyle/>
+          <a:p>
+            <a:pPr algn="ctr" indent="0" marL="0">
+              <a:buNone/>
+            </a:pPr>
+            <a:r>
+              <a:rPr lang="en-US" sz="1400" b="1" dirty="0">
+                <a:solidFill>
+                  <a:schemeClr val="bg1"/>
+                </a:solidFill>
+              </a:rPr>
+              <a:t>2</a:t>
+            </a:r>
+            <a:endParaRPr lang="en-US" sz="1400" dirty="0"/>
+          </a:p>
+        </p:txBody>
+      </p:sp>
+      <p:sp>
+        <p:nvSpPr>
+          <p:cNvPr id="11" name="Text 9"/>
+          <p:cNvSpPr txBox="1"/>
+          <p:nvPr/>
+        </p:nvSpPr>
+        <p:spPr>
+          <a:xfrm>
+            <a:off x="3931920" y="1371600"/>
+            <a:ext cx="1828800" cy="384048"/>
+          </a:xfrm>
+          <a:prstGeom prst="rect">
+            <a:avLst/>
+          </a:prstGeom>
+          <a:noFill/>
+          <a:ln/>
+        </p:spPr>
+        <p:txBody>
+          <a:bodyPr wrap="square" lIns="0" tIns="0" rIns="0" bIns="0" rtlCol="0" anchor="ctr"/>
+          <a:lstStyle/>
+          <a:p>
+            <a:pPr indent="0" marL="0">
+              <a:buNone/>
+            </a:pPr>
+            <a:r>
+              <a:rPr lang="en-US" sz="1700" b="1" dirty="0">
+                <a:solidFill>
+                  <a:schemeClr val="tx2"/>
+                </a:solidFill>
+              </a:rPr>
+              <a:t>무엇을</a:t>
+            </a:r>
+            <a:endParaRPr lang="en-US" sz="1700" dirty="0"/>
+          </a:p>
+        </p:txBody>
+      </p:sp>
+      <p:sp>
+        <p:nvSpPr>
+          <p:cNvPr id="12" name="Text 10"/>
+          <p:cNvSpPr txBox="1"/>
+          <p:nvPr/>
+        </p:nvSpPr>
+        <p:spPr>
+          <a:xfrm>
+            <a:off x="3429000" y="1874520"/>
+            <a:ext cx="2286000" cy="457200"/>
+          </a:xfrm>
+          <a:prstGeom prst="rect">
+            <a:avLst/>
+          </a:prstGeom>
+          <a:noFill/>
+          <a:ln/>
+        </p:spPr>
+        <p:txBody>
+          <a:bodyPr wrap="square" lIns="0" tIns="0" rIns="0" bIns="0" rtlCol="0" anchor="t"/>
+          <a:lstStyle/>
+          <a:p>
+            <a:pPr indent="0" marL="0">
+              <a:buNone/>
+            </a:pPr>
+            <a:r>
+              <a:rPr lang="en-US" sz="1200" dirty="0">
+                <a:solidFill>
+                  <a:schemeClr val="accent4"/>
+                </a:solidFill>
+              </a:rPr>
+              <a:t>실물 · 디지털 · 서비스 · 소프트웨어 · 콘텐츠</a:t>
+            </a:r>
+            <a:endParaRPr lang="en-US" sz="1200" dirty="0"/>
+          </a:p>
+        </p:txBody>
+      </p:sp>
+      <p:sp>
+        <p:nvSpPr>
+          <p:cNvPr id="13" name="card"/>
+          <p:cNvSpPr/>
+          <p:nvPr/>
+        </p:nvSpPr>
+        <p:spPr>
+          <a:xfrm>
+            <a:off x="6035040" y="1188720"/>
+            <a:ext cx="2606040" cy="1234440"/>
+          </a:xfrm>
+          <a:prstGeom prst="roundRect">
+            <a:avLst>
+              <a:gd name="adj" fmla="val 5926"/>
+            </a:avLst>
+          </a:prstGeom>
+          <a:solidFill>
+            <a:schemeClr val="bg2"/>
+          </a:solidFill>
+          <a:ln/>
+        </p:spPr>
+      </p:sp>
+      <p:sp>
+        <p:nvSpPr>
+          <p:cNvPr id="14" name="badge3"/>
+          <p:cNvSpPr/>
+          <p:nvPr/>
+        </p:nvSpPr>
+        <p:spPr>
+          <a:xfrm>
+            <a:off x="6217920" y="1371600"/>
+            <a:ext cx="384048" cy="384048"/>
+          </a:xfrm>
+          <a:prstGeom prst="ellipse">
+            <a:avLst/>
+          </a:prstGeom>
+          <a:solidFill>
+            <a:schemeClr val="tx2"/>
+          </a:solidFill>
+          <a:ln/>
+        </p:spPr>
+      </p:sp>
+      <p:sp>
+        <p:nvSpPr>
+          <p:cNvPr id="15" name="Text 13"/>
+          <p:cNvSpPr txBox="1"/>
+          <p:nvPr/>
+        </p:nvSpPr>
+        <p:spPr>
+          <a:xfrm>
+            <a:off x="6217920" y="1371600"/>
+            <a:ext cx="384048" cy="384048"/>
+          </a:xfrm>
+          <a:prstGeom prst="rect">
+            <a:avLst/>
+          </a:prstGeom>
+          <a:noFill/>
+          <a:ln/>
+        </p:spPr>
+        <p:txBody>
+          <a:bodyPr wrap="square" lIns="0" tIns="0" rIns="0" bIns="0" rtlCol="0" anchor="ctr"/>
+          <a:lstStyle/>
+          <a:p>
+            <a:pPr algn="ctr" indent="0" marL="0">
+              <a:buNone/>
+            </a:pPr>
+            <a:r>
+              <a:rPr lang="en-US" sz="1400" b="1" dirty="0">
+                <a:solidFill>
+                  <a:schemeClr val="bg1"/>
+                </a:solidFill>
+              </a:rPr>
+              <a:t>3</a:t>
+            </a:r>
+            <a:endParaRPr lang="en-US" sz="1400" dirty="0"/>
+          </a:p>
+        </p:txBody>
+      </p:sp>
+      <p:sp>
+        <p:nvSpPr>
+          <p:cNvPr id="16" name="Text 14"/>
+          <p:cNvSpPr txBox="1"/>
+          <p:nvPr/>
+        </p:nvSpPr>
+        <p:spPr>
+          <a:xfrm>
+            <a:off x="6720840" y="1371600"/>
+            <a:ext cx="1828800" cy="384048"/>
+          </a:xfrm>
+          <a:prstGeom prst="rect">
+            <a:avLst/>
+          </a:prstGeom>
+          <a:noFill/>
+          <a:ln/>
+        </p:spPr>
+        <p:txBody>
+          <a:bodyPr wrap="square" lIns="0" tIns="0" rIns="0" bIns="0" rtlCol="0" anchor="ctr"/>
+          <a:lstStyle/>
+          <a:p>
+            <a:pPr indent="0" marL="0">
+              <a:buNone/>
+            </a:pPr>
+            <a:r>
+              <a:rPr lang="en-US" sz="1700" b="1" dirty="0">
+                <a:solidFill>
+                  <a:schemeClr val="tx2"/>
+                </a:solidFill>
+              </a:rPr>
+              <a:t>어떻게 버나</a:t>
+            </a:r>
+            <a:endParaRPr lang="en-US" sz="1700" dirty="0"/>
+          </a:p>
+        </p:txBody>
+      </p:sp>
+      <p:sp>
+        <p:nvSpPr>
+          <p:cNvPr id="17" name="Text 15"/>
+          <p:cNvSpPr txBox="1"/>
+          <p:nvPr/>
+        </p:nvSpPr>
+        <p:spPr>
+          <a:xfrm>
+            <a:off x="6217920" y="1874520"/>
+            <a:ext cx="2286000" cy="457200"/>
+          </a:xfrm>
+          <a:prstGeom prst="rect">
+            <a:avLst/>
+          </a:prstGeom>
+          <a:noFill/>
+          <a:ln/>
+        </p:spPr>
+        <p:txBody>
+          <a:bodyPr wrap="square" lIns="0" tIns="0" rIns="0" bIns="0" rtlCol="0" anchor="t"/>
+          <a:lstStyle/>
+          <a:p>
+            <a:pPr indent="0" marL="0">
+              <a:buNone/>
+            </a:pPr>
+            <a:r>
+              <a:rPr lang="en-US" sz="1200" dirty="0">
+                <a:solidFill>
+                  <a:schemeClr val="accent4"/>
+                </a:solidFill>
+              </a:rPr>
+              <a:t>판매 · 구독 · 수수료 · 광고 · 후원</a:t>
+            </a:r>
+            <a:endParaRPr lang="en-US" sz="1200" dirty="0"/>
+          </a:p>
+        </p:txBody>
+      </p:sp>
+      <p:sp>
+        <p:nvSpPr>
+          <p:cNvPr id="18" name="card"/>
+          <p:cNvSpPr/>
+          <p:nvPr/>
+        </p:nvSpPr>
+        <p:spPr>
+          <a:xfrm>
+            <a:off x="457200" y="2606040"/>
+            <a:ext cx="2606040" cy="1234440"/>
+          </a:xfrm>
+          <a:prstGeom prst="roundRect">
+            <a:avLst>
+              <a:gd name="adj" fmla="val 5926"/>
+            </a:avLst>
+          </a:prstGeom>
+          <a:solidFill>
+            <a:schemeClr val="bg2"/>
+          </a:solidFill>
+          <a:ln/>
+        </p:spPr>
+      </p:sp>
+      <p:sp>
+        <p:nvSpPr>
+          <p:cNvPr id="19" name="badge4"/>
+          <p:cNvSpPr/>
+          <p:nvPr/>
+        </p:nvSpPr>
+        <p:spPr>
+          <a:xfrm>
+            <a:off x="640080" y="2788920"/>
+            <a:ext cx="384048" cy="384048"/>
+          </a:xfrm>
+          <a:prstGeom prst="ellipse">
+            <a:avLst/>
+          </a:prstGeom>
+          <a:solidFill>
+            <a:schemeClr val="tx2"/>
+          </a:solidFill>
+          <a:ln/>
+        </p:spPr>
+      </p:sp>
+      <p:sp>
+        <p:nvSpPr>
+          <p:cNvPr id="20" name="Text 18"/>
+          <p:cNvSpPr txBox="1"/>
+          <p:nvPr/>
+        </p:nvSpPr>
+        <p:spPr>
+          <a:xfrm>
+            <a:off x="640080" y="2788920"/>
+            <a:ext cx="384048" cy="384048"/>
+          </a:xfrm>
+          <a:prstGeom prst="rect">
+            <a:avLst/>
+          </a:prstGeom>
+          <a:noFill/>
+          <a:ln/>
+        </p:spPr>
+        <p:txBody>
+          <a:bodyPr wrap="square" lIns="0" tIns="0" rIns="0" bIns="0" rtlCol="0" anchor="ctr"/>
+          <a:lstStyle/>
+          <a:p>
+            <a:pPr algn="ctr" indent="0" marL="0">
+              <a:buNone/>
+            </a:pPr>
+            <a:r>
+              <a:rPr lang="en-US" sz="1400" b="1" dirty="0">
+                <a:solidFill>
+                  <a:schemeClr val="bg1"/>
+                </a:solidFill>
+              </a:rPr>
+              <a:t>4</a:t>
+            </a:r>
+            <a:endParaRPr lang="en-US" sz="1400" dirty="0"/>
+          </a:p>
+        </p:txBody>
+      </p:sp>
+      <p:sp>
+        <p:nvSpPr>
+          <p:cNvPr id="21" name="Text 19"/>
+          <p:cNvSpPr txBox="1"/>
+          <p:nvPr/>
+        </p:nvSpPr>
+        <p:spPr>
+          <a:xfrm>
+            <a:off x="1143000" y="2788920"/>
+            <a:ext cx="1828800" cy="384048"/>
+          </a:xfrm>
+          <a:prstGeom prst="rect">
+            <a:avLst/>
+          </a:prstGeom>
+          <a:noFill/>
+          <a:ln/>
+        </p:spPr>
+        <p:txBody>
+          <a:bodyPr wrap="square" lIns="0" tIns="0" rIns="0" bIns="0" rtlCol="0" anchor="ctr"/>
+          <a:lstStyle/>
+          <a:p>
+            <a:pPr indent="0" marL="0">
+              <a:buNone/>
+            </a:pPr>
+            <a:r>
+              <a:rPr lang="en-US" sz="1700" b="1" dirty="0">
+                <a:solidFill>
+                  <a:schemeClr val="tx2"/>
+                </a:solidFill>
+              </a:rPr>
+              <a:t>누가 만드나</a:t>
+            </a:r>
+            <a:endParaRPr lang="en-US" sz="1700" dirty="0"/>
+          </a:p>
+        </p:txBody>
+      </p:sp>
+      <p:sp>
+        <p:nvSpPr>
+          <p:cNvPr id="22" name="Text 20"/>
+          <p:cNvSpPr txBox="1"/>
+          <p:nvPr/>
+        </p:nvSpPr>
+        <p:spPr>
+          <a:xfrm>
+            <a:off x="640080" y="3291840"/>
+            <a:ext cx="2286000" cy="457200"/>
+          </a:xfrm>
+          <a:prstGeom prst="rect">
+            <a:avLst/>
+          </a:prstGeom>
+          <a:noFill/>
+          <a:ln/>
+        </p:spPr>
+        <p:txBody>
+          <a:bodyPr wrap="square" lIns="0" tIns="0" rIns="0" bIns="0" rtlCol="0" anchor="t"/>
+          <a:lstStyle/>
+          <a:p>
+            <a:pPr indent="0" marL="0">
+              <a:buNone/>
+            </a:pPr>
+            <a:r>
+              <a:rPr lang="en-US" sz="1200" dirty="0">
+                <a:solidFill>
+                  <a:schemeClr val="accent4"/>
+                </a:solidFill>
+              </a:rPr>
+              <a:t>운영자 · 회원 · 판매자 · AI</a:t>
+            </a:r>
+            <a:endParaRPr lang="en-US" sz="1200" dirty="0"/>
+          </a:p>
+        </p:txBody>
+      </p:sp>
+      <p:sp>
+        <p:nvSpPr>
+          <p:cNvPr id="23" name="card"/>
+          <p:cNvSpPr/>
+          <p:nvPr/>
+        </p:nvSpPr>
+        <p:spPr>
+          <a:xfrm>
+            <a:off x="3246120" y="2606040"/>
+            <a:ext cx="2606040" cy="1234440"/>
+          </a:xfrm>
+          <a:prstGeom prst="roundRect">
+            <a:avLst>
+              <a:gd name="adj" fmla="val 5926"/>
+            </a:avLst>
+          </a:prstGeom>
+          <a:solidFill>
+            <a:schemeClr val="bg2"/>
+          </a:solidFill>
+          <a:ln/>
+        </p:spPr>
+      </p:sp>
+      <p:sp>
+        <p:nvSpPr>
+          <p:cNvPr id="24" name="badge5"/>
+          <p:cNvSpPr/>
+          <p:nvPr/>
+        </p:nvSpPr>
+        <p:spPr>
+          <a:xfrm>
+            <a:off x="3429000" y="2788920"/>
+            <a:ext cx="384048" cy="384048"/>
+          </a:xfrm>
+          <a:prstGeom prst="ellipse">
+            <a:avLst/>
+          </a:prstGeom>
+          <a:solidFill>
+            <a:schemeClr val="tx2"/>
+          </a:solidFill>
+          <a:ln/>
+        </p:spPr>
+      </p:sp>
+      <p:sp>
+        <p:nvSpPr>
+          <p:cNvPr id="25" name="Text 23"/>
+          <p:cNvSpPr txBox="1"/>
+          <p:nvPr/>
+        </p:nvSpPr>
+        <p:spPr>
+          <a:xfrm>
+            <a:off x="3429000" y="2788920"/>
+            <a:ext cx="384048" cy="384048"/>
+          </a:xfrm>
+          <a:prstGeom prst="rect">
+            <a:avLst/>
+          </a:prstGeom>
+          <a:noFill/>
+          <a:ln/>
+        </p:spPr>
+        <p:txBody>
+          <a:bodyPr wrap="square" lIns="0" tIns="0" rIns="0" bIns="0" rtlCol="0" anchor="ctr"/>
+          <a:lstStyle/>
+          <a:p>
+            <a:pPr algn="ctr" indent="0" marL="0">
+              <a:buNone/>
+            </a:pPr>
+            <a:r>
+              <a:rPr lang="en-US" sz="1400" b="1" dirty="0">
+                <a:solidFill>
+                  <a:schemeClr val="bg1"/>
+                </a:solidFill>
+              </a:rPr>
+              <a:t>5</a:t>
+            </a:r>
+            <a:endParaRPr lang="en-US" sz="1400" dirty="0"/>
+          </a:p>
+        </p:txBody>
+      </p:sp>
+      <p:sp>
+        <p:nvSpPr>
+          <p:cNvPr id="26" name="Text 24"/>
+          <p:cNvSpPr txBox="1"/>
+          <p:nvPr/>
+        </p:nvSpPr>
+        <p:spPr>
+          <a:xfrm>
+            <a:off x="3931920" y="2788920"/>
+            <a:ext cx="1828800" cy="384048"/>
+          </a:xfrm>
+          <a:prstGeom prst="rect">
+            <a:avLst/>
+          </a:prstGeom>
+          <a:noFill/>
+          <a:ln/>
+        </p:spPr>
+        <p:txBody>
+          <a:bodyPr wrap="square" lIns="0" tIns="0" rIns="0" bIns="0" rtlCol="0" anchor="ctr"/>
+          <a:lstStyle/>
+          <a:p>
+            <a:pPr indent="0" marL="0">
+              <a:buNone/>
+            </a:pPr>
+            <a:r>
+              <a:rPr lang="en-US" sz="1700" b="1" dirty="0">
+                <a:solidFill>
+                  <a:schemeClr val="tx2"/>
+                </a:solidFill>
+              </a:rPr>
+              <a:t>어디서</a:t>
+            </a:r>
+            <a:endParaRPr lang="en-US" sz="1700" dirty="0"/>
+          </a:p>
+        </p:txBody>
+      </p:sp>
+      <p:sp>
+        <p:nvSpPr>
+          <p:cNvPr id="27" name="Text 25"/>
+          <p:cNvSpPr txBox="1"/>
+          <p:nvPr/>
+        </p:nvSpPr>
+        <p:spPr>
+          <a:xfrm>
+            <a:off x="3429000" y="3291840"/>
+            <a:ext cx="2286000" cy="457200"/>
+          </a:xfrm>
+          <a:prstGeom prst="rect">
+            <a:avLst/>
+          </a:prstGeom>
+          <a:noFill/>
+          <a:ln/>
+        </p:spPr>
+        <p:txBody>
+          <a:bodyPr wrap="square" lIns="0" tIns="0" rIns="0" bIns="0" rtlCol="0" anchor="t"/>
+          <a:lstStyle/>
+          <a:p>
+            <a:pPr indent="0" marL="0">
+              <a:buNone/>
+            </a:pPr>
+            <a:r>
+              <a:rPr lang="en-US" sz="1200" dirty="0">
+                <a:solidFill>
+                  <a:schemeClr val="accent4"/>
+                </a:solidFill>
+              </a:rPr>
+              <a:t>내 사이트 / 남의 플랫폼</a:t>
+            </a:r>
+            <a:endParaRPr lang="en-US" sz="1200" dirty="0"/>
+          </a:p>
+        </p:txBody>
+      </p:sp>
+      <p:sp>
+        <p:nvSpPr>
+          <p:cNvPr id="28" name="card"/>
+          <p:cNvSpPr/>
+          <p:nvPr/>
+        </p:nvSpPr>
+        <p:spPr>
+          <a:xfrm>
+            <a:off x="6035040" y="2606040"/>
+            <a:ext cx="2606040" cy="1234440"/>
+          </a:xfrm>
+          <a:prstGeom prst="roundRect">
+            <a:avLst>
+              <a:gd name="adj" fmla="val 5926"/>
+            </a:avLst>
+          </a:prstGeom>
+          <a:solidFill>
+            <a:schemeClr val="tx2"/>
+          </a:solidFill>
+          <a:ln/>
+        </p:spPr>
+      </p:sp>
+      <p:sp>
+        <p:nvSpPr>
+          <p:cNvPr id="29" name="badge6"/>
+          <p:cNvSpPr/>
+          <p:nvPr/>
+        </p:nvSpPr>
+        <p:spPr>
+          <a:xfrm>
+            <a:off x="6217920" y="2788920"/>
+            <a:ext cx="384048" cy="384048"/>
+          </a:xfrm>
+          <a:prstGeom prst="ellipse">
+            <a:avLst/>
+          </a:prstGeom>
+          <a:solidFill>
+            <a:schemeClr val="accent2"/>
+          </a:solidFill>
+          <a:ln/>
+        </p:spPr>
+      </p:sp>
+      <p:sp>
+        <p:nvSpPr>
+          <p:cNvPr id="30" name="Text 28"/>
+          <p:cNvSpPr txBox="1"/>
+          <p:nvPr/>
+        </p:nvSpPr>
+        <p:spPr>
+          <a:xfrm>
+            <a:off x="6217920" y="2788920"/>
+            <a:ext cx="384048" cy="384048"/>
+          </a:xfrm>
+          <a:prstGeom prst="rect">
+            <a:avLst/>
+          </a:prstGeom>
+          <a:noFill/>
+          <a:ln/>
+        </p:spPr>
+        <p:txBody>
+          <a:bodyPr wrap="square" lIns="0" tIns="0" rIns="0" bIns="0" rtlCol="0" anchor="ctr"/>
+          <a:lstStyle/>
+          <a:p>
+            <a:pPr algn="ctr" indent="0" marL="0">
+              <a:buNone/>
+            </a:pPr>
+            <a:r>
+              <a:rPr lang="en-US" sz="1400" b="1" dirty="0">
+                <a:solidFill>
+                  <a:schemeClr val="bg1"/>
+                </a:solidFill>
+              </a:rPr>
+              <a:t>6</a:t>
+            </a:r>
+            <a:endParaRPr lang="en-US" sz="1400" dirty="0"/>
+          </a:p>
+        </p:txBody>
+      </p:sp>
+      <p:sp>
+        <p:nvSpPr>
+          <p:cNvPr id="31" name="Text 29"/>
+          <p:cNvSpPr txBox="1"/>
+          <p:nvPr/>
+        </p:nvSpPr>
+        <p:spPr>
+          <a:xfrm>
+            <a:off x="6720840" y="2788920"/>
+            <a:ext cx="1828800" cy="384048"/>
+          </a:xfrm>
+          <a:prstGeom prst="rect">
+            <a:avLst/>
+          </a:prstGeom>
+          <a:noFill/>
+          <a:ln/>
+        </p:spPr>
+        <p:txBody>
+          <a:bodyPr wrap="square" lIns="0" tIns="0" rIns="0" bIns="0" rtlCol="0" anchor="ctr"/>
+          <a:lstStyle/>
+          <a:p>
+            <a:pPr indent="0" marL="0">
+              <a:buNone/>
+            </a:pPr>
+            <a:r>
+              <a:rPr lang="en-US" sz="1700" b="1" dirty="0">
+                <a:solidFill>
+                  <a:schemeClr val="bg1"/>
+                </a:solidFill>
+              </a:rPr>
+              <a:t>규제</a:t>
+            </a:r>
+            <a:endParaRPr lang="en-US" sz="1700" dirty="0"/>
+          </a:p>
+        </p:txBody>
+      </p:sp>
+      <p:sp>
+        <p:nvSpPr>
+          <p:cNvPr id="32" name="Text 30"/>
+          <p:cNvSpPr txBox="1"/>
+          <p:nvPr/>
+        </p:nvSpPr>
+        <p:spPr>
+          <a:xfrm>
+            <a:off x="6217920" y="3291840"/>
+            <a:ext cx="2286000" cy="457200"/>
+          </a:xfrm>
+          <a:prstGeom prst="rect">
+            <a:avLst/>
+          </a:prstGeom>
+          <a:noFill/>
+          <a:ln/>
+        </p:spPr>
+        <p:txBody>
+          <a:bodyPr wrap="square" lIns="0" tIns="0" rIns="0" bIns="0" rtlCol="0" anchor="t"/>
+          <a:lstStyle/>
+          <a:p>
+            <a:pPr indent="0" marL="0">
+              <a:buNone/>
+            </a:pPr>
+            <a:r>
+              <a:rPr lang="en-US" sz="1200" dirty="0">
+                <a:solidFill>
+                  <a:schemeClr val="bg2"/>
+                </a:solidFill>
+              </a:rPr>
+              <a:t>신고만 / 등록·허가 / 금지</a:t>
+            </a:r>
+            <a:endParaRPr lang="en-US" sz="1200" dirty="0"/>
+          </a:p>
+        </p:txBody>
+      </p:sp>
+      <p:sp>
+        <p:nvSpPr>
+          <p:cNvPr id="33" name="Text 31"/>
+          <p:cNvSpPr txBox="1"/>
+          <p:nvPr/>
+        </p:nvSpPr>
+        <p:spPr>
+          <a:xfrm>
+            <a:off x="457200" y="4645152"/>
+            <a:ext cx="7680960" cy="274320"/>
+          </a:xfrm>
+          <a:prstGeom prst="rect">
+            <a:avLst/>
+          </a:prstGeom>
+          <a:noFill/>
+          <a:ln/>
+        </p:spPr>
+        <p:txBody>
+          <a:bodyPr wrap="square" lIns="0" tIns="0" rIns="0" bIns="0" rtlCol="0" anchor="t"/>
+          <a:lstStyle/>
+          <a:p>
+            <a:pPr indent="0" marL="0">
+              <a:buNone/>
+            </a:pPr>
+            <a:r>
+              <a:rPr lang="en-US" sz="1000" dirty="0">
+                <a:solidFill>
+                  <a:schemeClr val="accent4"/>
+                </a:solidFill>
+              </a:rPr>
+              <a:t>새 아이디어는 6칸을 채워 보며 위험을 찾는다 (22장)</a:t>
+            </a:r>
+            <a:endParaRPr lang="en-US" sz="1000" dirty="0"/>
+          </a:p>
+        </p:txBody>
+      </p:sp>
+      <p:sp>
+        <p:nvSpPr>
+          <p:cNvPr id="25" name="Slide Number Placeholder 0"/>
+          <p:cNvSpPr>
+            <a:spLocks noGrp="1"/>
+          </p:cNvSpPr>
+          <p:nvPr>
+            <p:ph type="sldNum" sz="quarter" idx="4294967295"/>
+          </p:nvPr>
+        </p:nvSpPr>
+        <p:spPr>
+          <a:xfrm>
+            <a:off x="8321040" y="4754880"/>
+            <a:ext cx="457200" cy="274320"/>
+          </a:xfrm>
+          <a:prstGeom prst="rect">
+            <a:avLst/>
+          </a:prstGeom>
+          <a:extLst>
+            <a:ext uri="{C572A759-6A51-4108-AA02-DFA0A04FC94B}">
+              <ma14:wrappingTextBoxFlag xmlns:ma14="http://schemas.microsoft.com/office/mac/drawingml/2011/main" val="0"/>
+            </a:ext>
+          </a:extLst>
+        </p:spPr>
+        <p:txBody>
+          <a:bodyPr/>
+          <a:lstStyle>
+            <a:lvl1pPr>
+              <a:defRPr sz="1000">
+                <a:solidFill>
+                  <a:schemeClr val="accent4"/>
+                </a:solidFill>
+              </a:defRPr>
+            </a:lvl1pPr>
+          </a:lstStyle>
+          <a:p>
+            <a:pPr algn="r"/>
+            <a:fld id="{F7021451-1387-4CA6-816F-3879F97B5CBC}" type="slidenum">
+              <a:rPr b="0" lang="en-US"/>
+              <a:t>31</a:t>
+            </a:fld>
+            <a:endParaRPr lang="en-US"/>
+          </a:p>
+        </p:txBody>
+      </p:sp>
+    </p:spTree>
+  </p:cSld>
+  <p:clrMapOvr>
+    <a:masterClrMapping/>
+  </p:clrMapOvr>
+</p:sld>
+</file>
+
+<file path=ppt/slides/slide32.xml><?xml version="1.0" encoding="utf-8"?>
+<p:sld xmlns:a="http://schemas.openxmlformats.org/drawingml/2006/main" xmlns:r="http://schemas.openxmlformats.org/officeDocument/2006/relationships" xmlns:p="http://schemas.openxmlformats.org/presentationml/2006/main">
+  <p:cSld name="Slide 32">
+    <p:spTree>
+      <p:nvGrpSpPr>
+        <p:cNvPr id="1" name=""/>
+        <p:cNvGrpSpPr/>
+        <p:nvPr/>
+      </p:nvGrpSpPr>
+      <p:grpSpPr>
+        <a:xfrm>
+          <a:off x="0" y="0"/>
+          <a:ext cx="0" cy="0"/>
+          <a:chOff x="0" y="0"/>
+          <a:chExt cx="0" cy="0"/>
+        </a:xfrm>
+      </p:grpSpPr>
+      <p:sp>
+        <p:nvSpPr>
+          <p:cNvPr id="2" name="Text 0"/>
+          <p:cNvSpPr/>
+          <p:nvPr>
+            <p:ph idx="100" type="title" hasCustomPrompt="1"/>
+          </p:nvPr>
+        </p:nvSpPr>
+        <p:spPr>
+          <a:xfrm>
+            <a:off x="457200" y="274320"/>
+            <a:ext cx="8229600" cy="685800"/>
+          </a:xfrm>
+          <a:prstGeom prst="rect">
+            <a:avLst/>
+          </a:prstGeom>
+          <a:noFill/>
+          <a:ln/>
+        </p:spPr>
+        <p:txBody>
+          <a:bodyPr wrap="square" lIns="0" tIns="0" rIns="0" bIns="0" rtlCol="0" anchor="ctr"/>
+          <a:lstStyle/>
+          <a:p>
+            <a:pPr indent="0" marL="0">
+              <a:buNone/>
+            </a:pPr>
+            <a:r>
+              <a:rPr lang="en-US" sz="2800" b="1" dirty="0">
+                <a:solidFill>
+                  <a:schemeClr val="tx2"/>
+                </a:solidFill>
+              </a:rPr>
+              <a:t>오픈마켓 셀러와 크리에이터</a:t>
+            </a:r>
+            <a:endParaRPr lang="en-US" sz="2800" dirty="0"/>
+          </a:p>
+        </p:txBody>
+      </p:sp>
+      <p:sp>
+        <p:nvSpPr>
+          <p:cNvPr id="3" name="card"/>
+          <p:cNvSpPr/>
+          <p:nvPr/>
+        </p:nvSpPr>
+        <p:spPr>
+          <a:xfrm>
+            <a:off x="457200" y="1188720"/>
+            <a:ext cx="4023360" cy="3200400"/>
+          </a:xfrm>
+          <a:prstGeom prst="roundRect">
+            <a:avLst>
+              <a:gd name="adj" fmla="val 2286"/>
+            </a:avLst>
+          </a:prstGeom>
+          <a:solidFill>
+            <a:schemeClr val="bg2"/>
+          </a:solidFill>
+          <a:ln/>
+        </p:spPr>
+      </p:sp>
+      <p:sp>
+        <p:nvSpPr>
+          <p:cNvPr id="4" name="sc0"/>
+          <p:cNvSpPr/>
+          <p:nvPr/>
+        </p:nvSpPr>
+        <p:spPr>
+          <a:xfrm>
+            <a:off x="457200" y="1188720"/>
+            <a:ext cx="4023360" cy="640080"/>
+          </a:xfrm>
+          <a:prstGeom prst="roundRect">
+            <a:avLst>
+              <a:gd name="adj" fmla="val 11429"/>
+            </a:avLst>
+          </a:prstGeom>
+          <a:solidFill>
+            <a:schemeClr val="tx2"/>
+          </a:solidFill>
+          <a:ln/>
+        </p:spPr>
+      </p:sp>
+      <p:sp>
+        <p:nvSpPr>
+          <p:cNvPr id="5" name="Text 3"/>
+          <p:cNvSpPr txBox="1"/>
+          <p:nvPr/>
+        </p:nvSpPr>
+        <p:spPr>
+          <a:xfrm>
+            <a:off x="685800" y="1188720"/>
+            <a:ext cx="2743200" cy="640080"/>
+          </a:xfrm>
+          <a:prstGeom prst="rect">
+            <a:avLst/>
+          </a:prstGeom>
+          <a:noFill/>
+          <a:ln/>
+        </p:spPr>
+        <p:txBody>
+          <a:bodyPr wrap="square" lIns="0" tIns="0" rIns="0" bIns="0" rtlCol="0" anchor="ctr"/>
+          <a:lstStyle/>
+          <a:p>
+            <a:pPr indent="0" marL="0">
+              <a:buNone/>
+            </a:pPr>
+            <a:r>
+              <a:rPr lang="en-US" sz="1900" b="1" dirty="0">
+                <a:solidFill>
+                  <a:schemeClr val="bg1"/>
+                </a:solidFill>
+              </a:rPr>
+              <a:t>오픈마켓 셀러</a:t>
+            </a:r>
+            <a:endParaRPr lang="en-US" sz="1900" dirty="0"/>
+          </a:p>
+        </p:txBody>
+      </p:sp>
+      <p:sp>
+        <p:nvSpPr>
+          <p:cNvPr id="6" name="Text 4"/>
+          <p:cNvSpPr txBox="1"/>
+          <p:nvPr/>
+        </p:nvSpPr>
+        <p:spPr>
+          <a:xfrm>
+            <a:off x="3383280" y="1188720"/>
+            <a:ext cx="914400" cy="640080"/>
+          </a:xfrm>
+          <a:prstGeom prst="rect">
+            <a:avLst/>
+          </a:prstGeom>
+          <a:noFill/>
+          <a:ln/>
+        </p:spPr>
+        <p:txBody>
+          <a:bodyPr wrap="square" lIns="0" tIns="0" rIns="0" bIns="0" rtlCol="0" anchor="ctr"/>
+          <a:lstStyle/>
+          <a:p>
+            <a:pPr algn="r" indent="0" marL="0">
+              <a:buNone/>
+            </a:pPr>
+            <a:r>
+              <a:rPr lang="en-US" sz="1200" dirty="0">
+                <a:solidFill>
+                  <a:schemeClr val="bg1"/>
+                </a:solidFill>
+              </a:rPr>
+              <a:t>23장</a:t>
+            </a:r>
+            <a:endParaRPr lang="en-US" sz="1200" dirty="0"/>
+          </a:p>
+        </p:txBody>
+      </p:sp>
+      <p:sp>
+        <p:nvSpPr>
+          <p:cNvPr id="7" name="Text 5"/>
+          <p:cNvSpPr txBox="1"/>
+          <p:nvPr/>
+        </p:nvSpPr>
+        <p:spPr>
+          <a:xfrm>
+            <a:off x="685800" y="2011680"/>
+            <a:ext cx="3611880" cy="2194560"/>
+          </a:xfrm>
+          <a:prstGeom prst="rect">
+            <a:avLst/>
+          </a:prstGeom>
+          <a:noFill/>
+          <a:ln/>
+        </p:spPr>
+        <p:txBody>
+          <a:bodyPr wrap="square" lIns="0" tIns="0" rIns="0" bIns="0" rtlCol="0" anchor="t"/>
+          <a:lstStyle/>
+          <a:p>
+            <a:pPr marL="342900" indent="-342900">
+              <a:spcAft>
+                <a:spcPts val="1000"/>
+              </a:spcAft>
+              <a:buSzPct val="100000"/>
+              <a:buChar char="•"/>
+            </a:pPr>
+            <a:r>
+              <a:rPr lang="en-US" sz="1400" dirty="0">
+                <a:solidFill>
+                  <a:schemeClr val="tx1"/>
+                </a:solidFill>
+              </a:rPr>
+              <a:t>손님은 이미 있음, 대신 수수료·경쟁</a:t>
+            </a:r>
+            <a:endParaRPr lang="en-US" sz="1400" dirty="0"/>
+          </a:p>
+          <a:p>
+            <a:pPr marL="342900" indent="-342900">
+              <a:spcAft>
+                <a:spcPts val="1000"/>
+              </a:spcAft>
+              <a:buSzPct val="100000"/>
+              <a:buChar char="•"/>
+            </a:pPr>
+            <a:r>
+              <a:rPr lang="en-US" sz="1400" dirty="0">
+                <a:solidFill>
+                  <a:schemeClr val="tx1"/>
+                </a:solidFill>
+              </a:rPr>
+              <a:t>사입 · 위탁판매 · 구매대행 · 내 브랜드</a:t>
+            </a:r>
+            <a:endParaRPr lang="en-US" sz="1400" dirty="0"/>
+          </a:p>
+          <a:p>
+            <a:pPr marL="342900" indent="-342900">
+              <a:spcAft>
+                <a:spcPts val="1000"/>
+              </a:spcAft>
+              <a:buSzPct val="100000"/>
+              <a:buChar char="•"/>
+            </a:pPr>
+            <a:r>
+              <a:rPr lang="en-US" sz="1400" dirty="0">
+                <a:solidFill>
+                  <a:schemeClr val="tx1"/>
+                </a:solidFill>
+              </a:rPr>
+              <a:t>마켓 안 검색 최적화 + 수수료 뺀 마진</a:t>
+            </a:r>
+            <a:endParaRPr lang="en-US" sz="1400" dirty="0"/>
+          </a:p>
+          <a:p>
+            <a:pPr marL="342900" indent="-342900">
+              <a:spcAft>
+                <a:spcPts val="1000"/>
+              </a:spcAft>
+              <a:buSzPct val="100000"/>
+              <a:buChar char="•"/>
+            </a:pPr>
+            <a:r>
+              <a:rPr lang="en-US" sz="1400" dirty="0">
+                <a:solidFill>
+                  <a:schemeClr val="tx1"/>
+                </a:solidFill>
+              </a:rPr>
+              <a:t>배송 기한·CS 점수 관리</a:t>
+            </a:r>
+            <a:endParaRPr lang="en-US" sz="1400" dirty="0"/>
+          </a:p>
+        </p:txBody>
+      </p:sp>
+      <p:sp>
+        <p:nvSpPr>
+          <p:cNvPr id="8" name="card"/>
+          <p:cNvSpPr/>
+          <p:nvPr/>
+        </p:nvSpPr>
+        <p:spPr>
+          <a:xfrm>
+            <a:off x="4663440" y="1188720"/>
+            <a:ext cx="4023360" cy="3200400"/>
+          </a:xfrm>
+          <a:prstGeom prst="roundRect">
+            <a:avLst>
+              <a:gd name="adj" fmla="val 2286"/>
+            </a:avLst>
+          </a:prstGeom>
+          <a:solidFill>
+            <a:schemeClr val="bg2"/>
+          </a:solidFill>
+          <a:ln/>
+        </p:spPr>
+      </p:sp>
+      <p:sp>
+        <p:nvSpPr>
+          <p:cNvPr id="9" name="sc1"/>
+          <p:cNvSpPr/>
+          <p:nvPr/>
+        </p:nvSpPr>
+        <p:spPr>
+          <a:xfrm>
+            <a:off x="4663440" y="1188720"/>
+            <a:ext cx="4023360" cy="640080"/>
+          </a:xfrm>
+          <a:prstGeom prst="roundRect">
+            <a:avLst>
+              <a:gd name="adj" fmla="val 11429"/>
+            </a:avLst>
+          </a:prstGeom>
+          <a:solidFill>
+            <a:schemeClr val="accent2"/>
+          </a:solidFill>
+          <a:ln/>
+        </p:spPr>
+      </p:sp>
+      <p:sp>
+        <p:nvSpPr>
+          <p:cNvPr id="10" name="Text 8"/>
+          <p:cNvSpPr txBox="1"/>
+          <p:nvPr/>
+        </p:nvSpPr>
+        <p:spPr>
+          <a:xfrm>
+            <a:off x="4892040" y="1188720"/>
+            <a:ext cx="2743200" cy="640080"/>
+          </a:xfrm>
+          <a:prstGeom prst="rect">
+            <a:avLst/>
+          </a:prstGeom>
+          <a:noFill/>
+          <a:ln/>
+        </p:spPr>
+        <p:txBody>
+          <a:bodyPr wrap="square" lIns="0" tIns="0" rIns="0" bIns="0" rtlCol="0" anchor="ctr"/>
+          <a:lstStyle/>
+          <a:p>
+            <a:pPr indent="0" marL="0">
+              <a:buNone/>
+            </a:pPr>
+            <a:r>
+              <a:rPr lang="en-US" sz="1900" b="1" dirty="0">
+                <a:solidFill>
+                  <a:schemeClr val="bg1"/>
+                </a:solidFill>
+              </a:rPr>
+              <a:t>크리에이터</a:t>
+            </a:r>
+            <a:endParaRPr lang="en-US" sz="1900" dirty="0"/>
+          </a:p>
+        </p:txBody>
+      </p:sp>
+      <p:sp>
+        <p:nvSpPr>
+          <p:cNvPr id="11" name="Text 9"/>
+          <p:cNvSpPr txBox="1"/>
+          <p:nvPr/>
+        </p:nvSpPr>
+        <p:spPr>
+          <a:xfrm>
+            <a:off x="7589520" y="1188720"/>
+            <a:ext cx="914400" cy="640080"/>
+          </a:xfrm>
+          <a:prstGeom prst="rect">
+            <a:avLst/>
+          </a:prstGeom>
+          <a:noFill/>
+          <a:ln/>
+        </p:spPr>
+        <p:txBody>
+          <a:bodyPr wrap="square" lIns="0" tIns="0" rIns="0" bIns="0" rtlCol="0" anchor="ctr"/>
+          <a:lstStyle/>
+          <a:p>
+            <a:pPr algn="r" indent="0" marL="0">
+              <a:buNone/>
+            </a:pPr>
+            <a:r>
+              <a:rPr lang="en-US" sz="1200" dirty="0">
+                <a:solidFill>
+                  <a:schemeClr val="bg1"/>
+                </a:solidFill>
+              </a:rPr>
+              <a:t>24장</a:t>
+            </a:r>
+            <a:endParaRPr lang="en-US" sz="1200" dirty="0"/>
+          </a:p>
+        </p:txBody>
+      </p:sp>
+      <p:sp>
+        <p:nvSpPr>
+          <p:cNvPr id="12" name="Text 10"/>
+          <p:cNvSpPr txBox="1"/>
+          <p:nvPr/>
+        </p:nvSpPr>
+        <p:spPr>
+          <a:xfrm>
+            <a:off x="4892040" y="2011680"/>
+            <a:ext cx="3611880" cy="2194560"/>
+          </a:xfrm>
+          <a:prstGeom prst="rect">
+            <a:avLst/>
+          </a:prstGeom>
+          <a:noFill/>
+          <a:ln/>
+        </p:spPr>
+        <p:txBody>
+          <a:bodyPr wrap="square" lIns="0" tIns="0" rIns="0" bIns="0" rtlCol="0" anchor="t"/>
+          <a:lstStyle/>
+          <a:p>
+            <a:pPr marL="342900" indent="-342900">
+              <a:spcAft>
+                <a:spcPts val="1000"/>
+              </a:spcAft>
+              <a:buSzPct val="100000"/>
+              <a:buChar char="•"/>
+            </a:pPr>
+            <a:r>
+              <a:rPr lang="en-US" sz="1400" dirty="0">
+                <a:solidFill>
+                  <a:schemeClr val="tx1"/>
+                </a:solidFill>
+              </a:rPr>
+              <a:t>콘텐츠 = 제품, 업로드 = 배포</a:t>
+            </a:r>
+            <a:endParaRPr lang="en-US" sz="1400" dirty="0"/>
+          </a:p>
+          <a:p>
+            <a:pPr marL="342900" indent="-342900">
+              <a:spcAft>
+                <a:spcPts val="1000"/>
+              </a:spcAft>
+              <a:buSzPct val="100000"/>
+              <a:buChar char="•"/>
+            </a:pPr>
+            <a:r>
+              <a:rPr lang="en-US" sz="1400" dirty="0">
+                <a:solidFill>
+                  <a:schemeClr val="tx1"/>
+                </a:solidFill>
+              </a:rPr>
+              <a:t>광고 배분 + 후원·멤버십 + 협찬</a:t>
+            </a:r>
+            <a:endParaRPr lang="en-US" sz="1400" dirty="0"/>
+          </a:p>
+          <a:p>
+            <a:pPr marL="342900" indent="-342900">
+              <a:spcAft>
+                <a:spcPts val="1000"/>
+              </a:spcAft>
+              <a:buSzPct val="100000"/>
+              <a:buChar char="•"/>
+            </a:pPr>
+            <a:r>
+              <a:rPr lang="en-US" sz="1400" dirty="0">
+                <a:solidFill>
+                  <a:schemeClr val="tx1"/>
+                </a:solidFill>
+              </a:rPr>
+              <a:t>협찬은 반드시 광고 표시</a:t>
+            </a:r>
+            <a:endParaRPr lang="en-US" sz="1400" dirty="0"/>
+          </a:p>
+          <a:p>
+            <a:pPr marL="342900" indent="-342900">
+              <a:spcAft>
+                <a:spcPts val="1000"/>
+              </a:spcAft>
+              <a:buSzPct val="100000"/>
+              <a:buChar char="•"/>
+            </a:pPr>
+            <a:r>
+              <a:rPr lang="en-US" sz="1400" dirty="0">
+                <a:solidFill>
+                  <a:schemeClr val="tx1"/>
+                </a:solidFill>
+              </a:rPr>
+              <a:t>원본 백업 · 2단계 인증 · 팬을 내 채널로</a:t>
+            </a:r>
+            <a:endParaRPr lang="en-US" sz="1400" dirty="0"/>
+          </a:p>
+        </p:txBody>
+      </p:sp>
+      <p:sp>
+        <p:nvSpPr>
+          <p:cNvPr id="25" name="Slide Number Placeholder 0"/>
+          <p:cNvSpPr>
+            <a:spLocks noGrp="1"/>
+          </p:cNvSpPr>
+          <p:nvPr>
+            <p:ph type="sldNum" sz="quarter" idx="4294967295"/>
+          </p:nvPr>
+        </p:nvSpPr>
+        <p:spPr>
+          <a:xfrm>
+            <a:off x="8321040" y="4754880"/>
+            <a:ext cx="457200" cy="274320"/>
+          </a:xfrm>
+          <a:prstGeom prst="rect">
+            <a:avLst/>
+          </a:prstGeom>
+          <a:extLst>
+            <a:ext uri="{C572A759-6A51-4108-AA02-DFA0A04FC94B}">
+              <ma14:wrappingTextBoxFlag xmlns:ma14="http://schemas.microsoft.com/office/mac/drawingml/2011/main" val="0"/>
+            </a:ext>
+          </a:extLst>
+        </p:spPr>
+        <p:txBody>
+          <a:bodyPr/>
+          <a:lstStyle>
+            <a:lvl1pPr>
+              <a:defRPr sz="1000">
+                <a:solidFill>
+                  <a:schemeClr val="accent4"/>
+                </a:solidFill>
+              </a:defRPr>
+            </a:lvl1pPr>
+          </a:lstStyle>
+          <a:p>
+            <a:pPr algn="r"/>
+            <a:fld id="{F7021451-1387-4CA6-816F-3879F97B5CBC}" type="slidenum">
+              <a:rPr b="0" lang="en-US"/>
+              <a:t>32</a:t>
+            </a:fld>
+            <a:endParaRPr lang="en-US"/>
+          </a:p>
+        </p:txBody>
+      </p:sp>
+    </p:spTree>
+  </p:cSld>
+  <p:clrMapOvr>
+    <a:masterClrMapping/>
+  </p:clrMapOvr>
+</p:sld>
+</file>
+
+<file path=ppt/slides/slide33.xml><?xml version="1.0" encoding="utf-8"?>
+<p:sld xmlns:a="http://schemas.openxmlformats.org/drawingml/2006/main" xmlns:r="http://schemas.openxmlformats.org/officeDocument/2006/relationships" xmlns:p="http://schemas.openxmlformats.org/presentationml/2006/main">
+  <p:cSld name="Slide 33">
+    <p:spTree>
+      <p:nvGrpSpPr>
+        <p:cNvPr id="1" name=""/>
+        <p:cNvGrpSpPr/>
+        <p:nvPr/>
+      </p:nvGrpSpPr>
+      <p:grpSpPr>
+        <a:xfrm>
+          <a:off x="0" y="0"/>
+          <a:ext cx="0" cy="0"/>
+          <a:chOff x="0" y="0"/>
+          <a:chExt cx="0" cy="0"/>
+        </a:xfrm>
+      </p:grpSpPr>
+      <p:sp>
+        <p:nvSpPr>
+          <p:cNvPr id="2" name="Text 0"/>
+          <p:cNvSpPr/>
+          <p:nvPr>
+            <p:ph idx="100" type="title" hasCustomPrompt="1"/>
+          </p:nvPr>
+        </p:nvSpPr>
+        <p:spPr>
+          <a:xfrm>
+            <a:off x="457200" y="274320"/>
+            <a:ext cx="8229600" cy="685800"/>
+          </a:xfrm>
+          <a:prstGeom prst="rect">
+            <a:avLst/>
+          </a:prstGeom>
+          <a:noFill/>
+          <a:ln/>
+        </p:spPr>
+        <p:txBody>
+          <a:bodyPr wrap="square" lIns="0" tIns="0" rIns="0" bIns="0" rtlCol="0" anchor="ctr"/>
+          <a:lstStyle/>
+          <a:p>
+            <a:pPr indent="0" marL="0">
+              <a:buNone/>
+            </a:pPr>
+            <a:r>
+              <a:rPr lang="en-US" sz="2800" b="1" dirty="0">
+                <a:solidFill>
+                  <a:schemeClr val="tx2"/>
+                </a:solidFill>
+              </a:rPr>
+              <a:t>앱은 웹보다 업데이트가 어렵다</a:t>
+            </a:r>
+            <a:endParaRPr lang="en-US" sz="2800" dirty="0"/>
+          </a:p>
+        </p:txBody>
+      </p:sp>
+      <p:sp>
+        <p:nvSpPr>
+          <p:cNvPr id="3" name="card"/>
+          <p:cNvSpPr/>
+          <p:nvPr/>
+        </p:nvSpPr>
+        <p:spPr>
+          <a:xfrm>
+            <a:off x="457200" y="1188720"/>
+            <a:ext cx="2606040" cy="1463040"/>
+          </a:xfrm>
+          <a:prstGeom prst="roundRect">
+            <a:avLst>
+              <a:gd name="adj" fmla="val 5000"/>
+            </a:avLst>
+          </a:prstGeom>
+          <a:solidFill>
+            <a:schemeClr val="bg2"/>
+          </a:solidFill>
+          <a:ln/>
+        </p:spPr>
+      </p:sp>
+      <p:sp>
+        <p:nvSpPr>
+          <p:cNvPr id="4" name="badge1"/>
+          <p:cNvSpPr/>
+          <p:nvPr/>
+        </p:nvSpPr>
+        <p:spPr>
+          <a:xfrm>
+            <a:off x="640080" y="1353312"/>
+            <a:ext cx="384048" cy="384048"/>
+          </a:xfrm>
+          <a:prstGeom prst="ellipse">
+            <a:avLst/>
+          </a:prstGeom>
+          <a:solidFill>
+            <a:schemeClr val="accent5"/>
+          </a:solidFill>
+          <a:ln/>
+        </p:spPr>
+      </p:sp>
+      <p:sp>
+        <p:nvSpPr>
+          <p:cNvPr id="5" name="Text 3"/>
+          <p:cNvSpPr txBox="1"/>
+          <p:nvPr/>
+        </p:nvSpPr>
+        <p:spPr>
+          <a:xfrm>
+            <a:off x="640080" y="1353312"/>
+            <a:ext cx="384048" cy="384048"/>
+          </a:xfrm>
+          <a:prstGeom prst="rect">
+            <a:avLst/>
+          </a:prstGeom>
+          <a:noFill/>
+          <a:ln/>
+        </p:spPr>
+        <p:txBody>
+          <a:bodyPr wrap="square" lIns="0" tIns="0" rIns="0" bIns="0" rtlCol="0" anchor="ctr"/>
+          <a:lstStyle/>
+          <a:p>
+            <a:pPr algn="ctr" indent="0" marL="0">
+              <a:buNone/>
+            </a:pPr>
+            <a:r>
+              <a:rPr lang="en-US" sz="1400" b="1" dirty="0">
+                <a:solidFill>
+                  <a:schemeClr val="bg1"/>
+                </a:solidFill>
+              </a:rPr>
+              <a:t>1</a:t>
+            </a:r>
+            <a:endParaRPr lang="en-US" sz="1400" dirty="0"/>
+          </a:p>
+        </p:txBody>
+      </p:sp>
+      <p:sp>
+        <p:nvSpPr>
+          <p:cNvPr id="6" name="Text 4"/>
+          <p:cNvSpPr txBox="1"/>
+          <p:nvPr/>
+        </p:nvSpPr>
+        <p:spPr>
+          <a:xfrm>
+            <a:off x="1143000" y="1353312"/>
+            <a:ext cx="1828800" cy="384048"/>
+          </a:xfrm>
+          <a:prstGeom prst="rect">
+            <a:avLst/>
+          </a:prstGeom>
+          <a:noFill/>
+          <a:ln/>
+        </p:spPr>
+        <p:txBody>
+          <a:bodyPr wrap="square" lIns="0" tIns="0" rIns="0" bIns="0" rtlCol="0" anchor="ctr"/>
+          <a:lstStyle/>
+          <a:p>
+            <a:pPr indent="0" marL="0">
+              <a:buNone/>
+            </a:pPr>
+            <a:r>
+              <a:rPr lang="en-US" sz="1600" b="1" dirty="0">
+                <a:solidFill>
+                  <a:schemeClr val="tx1"/>
+                </a:solidFill>
+              </a:rPr>
+              <a:t>심사</a:t>
+            </a:r>
+            <a:endParaRPr lang="en-US" sz="1600" dirty="0"/>
+          </a:p>
+        </p:txBody>
+      </p:sp>
+      <p:sp>
+        <p:nvSpPr>
+          <p:cNvPr id="7" name="Text 5"/>
+          <p:cNvSpPr txBox="1"/>
+          <p:nvPr/>
+        </p:nvSpPr>
+        <p:spPr>
+          <a:xfrm>
+            <a:off x="640080" y="1920240"/>
+            <a:ext cx="2286000" cy="548640"/>
+          </a:xfrm>
+          <a:prstGeom prst="rect">
+            <a:avLst/>
+          </a:prstGeom>
+          <a:noFill/>
+          <a:ln/>
+        </p:spPr>
+        <p:txBody>
+          <a:bodyPr wrap="square" lIns="0" tIns="0" rIns="0" bIns="0" rtlCol="0" anchor="t"/>
+          <a:lstStyle/>
+          <a:p>
+            <a:pPr indent="0" marL="0">
+              <a:buNone/>
+            </a:pPr>
+            <a:r>
+              <a:rPr lang="en-US" sz="1300" dirty="0">
+                <a:solidFill>
+                  <a:schemeClr val="accent4"/>
+                </a:solidFill>
+              </a:rPr>
+              <a:t>올려도 마켓 심사를 통과해야 나감</a:t>
+            </a:r>
+            <a:endParaRPr lang="en-US" sz="1300" dirty="0"/>
+          </a:p>
+        </p:txBody>
+      </p:sp>
+      <p:sp>
+        <p:nvSpPr>
+          <p:cNvPr id="8" name="card"/>
+          <p:cNvSpPr/>
+          <p:nvPr/>
+        </p:nvSpPr>
+        <p:spPr>
+          <a:xfrm>
+            <a:off x="3246120" y="1188720"/>
+            <a:ext cx="2606040" cy="1463040"/>
+          </a:xfrm>
+          <a:prstGeom prst="roundRect">
+            <a:avLst>
+              <a:gd name="adj" fmla="val 5000"/>
+            </a:avLst>
+          </a:prstGeom>
+          <a:solidFill>
+            <a:schemeClr val="bg2"/>
+          </a:solidFill>
+          <a:ln/>
+        </p:spPr>
+      </p:sp>
+      <p:sp>
+        <p:nvSpPr>
+          <p:cNvPr id="9" name="badge2"/>
+          <p:cNvSpPr/>
+          <p:nvPr/>
+        </p:nvSpPr>
+        <p:spPr>
+          <a:xfrm>
+            <a:off x="3429000" y="1353312"/>
+            <a:ext cx="384048" cy="384048"/>
+          </a:xfrm>
+          <a:prstGeom prst="ellipse">
+            <a:avLst/>
+          </a:prstGeom>
+          <a:solidFill>
+            <a:schemeClr val="accent5"/>
+          </a:solidFill>
+          <a:ln/>
+        </p:spPr>
+      </p:sp>
+      <p:sp>
+        <p:nvSpPr>
+          <p:cNvPr id="10" name="Text 8"/>
+          <p:cNvSpPr txBox="1"/>
+          <p:nvPr/>
+        </p:nvSpPr>
+        <p:spPr>
+          <a:xfrm>
+            <a:off x="3429000" y="1353312"/>
+            <a:ext cx="384048" cy="384048"/>
+          </a:xfrm>
+          <a:prstGeom prst="rect">
+            <a:avLst/>
+          </a:prstGeom>
+          <a:noFill/>
+          <a:ln/>
+        </p:spPr>
+        <p:txBody>
+          <a:bodyPr wrap="square" lIns="0" tIns="0" rIns="0" bIns="0" rtlCol="0" anchor="ctr"/>
+          <a:lstStyle/>
+          <a:p>
+            <a:pPr algn="ctr" indent="0" marL="0">
+              <a:buNone/>
+            </a:pPr>
+            <a:r>
+              <a:rPr lang="en-US" sz="1400" b="1" dirty="0">
+                <a:solidFill>
+                  <a:schemeClr val="bg1"/>
+                </a:solidFill>
+              </a:rPr>
+              <a:t>2</a:t>
+            </a:r>
+            <a:endParaRPr lang="en-US" sz="1400" dirty="0"/>
+          </a:p>
+        </p:txBody>
+      </p:sp>
+      <p:sp>
+        <p:nvSpPr>
+          <p:cNvPr id="11" name="Text 9"/>
+          <p:cNvSpPr txBox="1"/>
+          <p:nvPr/>
+        </p:nvSpPr>
+        <p:spPr>
+          <a:xfrm>
+            <a:off x="3931920" y="1353312"/>
+            <a:ext cx="1828800" cy="384048"/>
+          </a:xfrm>
+          <a:prstGeom prst="rect">
+            <a:avLst/>
+          </a:prstGeom>
+          <a:noFill/>
+          <a:ln/>
+        </p:spPr>
+        <p:txBody>
+          <a:bodyPr wrap="square" lIns="0" tIns="0" rIns="0" bIns="0" rtlCol="0" anchor="ctr"/>
+          <a:lstStyle/>
+          <a:p>
+            <a:pPr indent="0" marL="0">
+              <a:buNone/>
+            </a:pPr>
+            <a:r>
+              <a:rPr lang="en-US" sz="1600" b="1" dirty="0">
+                <a:solidFill>
+                  <a:schemeClr val="tx1"/>
+                </a:solidFill>
+              </a:rPr>
+              <a:t>되돌리기 불가</a:t>
+            </a:r>
+            <a:endParaRPr lang="en-US" sz="1600" dirty="0"/>
+          </a:p>
+        </p:txBody>
+      </p:sp>
+      <p:sp>
+        <p:nvSpPr>
+          <p:cNvPr id="12" name="Text 10"/>
+          <p:cNvSpPr txBox="1"/>
+          <p:nvPr/>
+        </p:nvSpPr>
+        <p:spPr>
+          <a:xfrm>
+            <a:off x="3429000" y="1920240"/>
+            <a:ext cx="2286000" cy="548640"/>
+          </a:xfrm>
+          <a:prstGeom prst="rect">
+            <a:avLst/>
+          </a:prstGeom>
+          <a:noFill/>
+          <a:ln/>
+        </p:spPr>
+        <p:txBody>
+          <a:bodyPr wrap="square" lIns="0" tIns="0" rIns="0" bIns="0" rtlCol="0" anchor="t"/>
+          <a:lstStyle/>
+          <a:p>
+            <a:pPr indent="0" marL="0">
+              <a:buNone/>
+            </a:pPr>
+            <a:r>
+              <a:rPr lang="en-US" sz="1300" dirty="0">
+                <a:solidFill>
+                  <a:schemeClr val="accent4"/>
+                </a:solidFill>
+              </a:rPr>
+              <a:t>이미 깔린 버전은 되돌릴 수 없음</a:t>
+            </a:r>
+            <a:endParaRPr lang="en-US" sz="1300" dirty="0"/>
+          </a:p>
+        </p:txBody>
+      </p:sp>
+      <p:sp>
+        <p:nvSpPr>
+          <p:cNvPr id="13" name="card"/>
+          <p:cNvSpPr/>
+          <p:nvPr/>
+        </p:nvSpPr>
+        <p:spPr>
+          <a:xfrm>
+            <a:off x="6035040" y="1188720"/>
+            <a:ext cx="2606040" cy="1463040"/>
+          </a:xfrm>
+          <a:prstGeom prst="roundRect">
+            <a:avLst>
+              <a:gd name="adj" fmla="val 5000"/>
+            </a:avLst>
+          </a:prstGeom>
+          <a:solidFill>
+            <a:schemeClr val="bg2"/>
+          </a:solidFill>
+          <a:ln/>
+        </p:spPr>
+      </p:sp>
+      <p:sp>
+        <p:nvSpPr>
+          <p:cNvPr id="14" name="badge3"/>
+          <p:cNvSpPr/>
+          <p:nvPr/>
+        </p:nvSpPr>
+        <p:spPr>
+          <a:xfrm>
+            <a:off x="6217920" y="1353312"/>
+            <a:ext cx="384048" cy="384048"/>
+          </a:xfrm>
+          <a:prstGeom prst="ellipse">
+            <a:avLst/>
+          </a:prstGeom>
+          <a:solidFill>
+            <a:schemeClr val="accent5"/>
+          </a:solidFill>
+          <a:ln/>
+        </p:spPr>
+      </p:sp>
+      <p:sp>
+        <p:nvSpPr>
+          <p:cNvPr id="15" name="Text 13"/>
+          <p:cNvSpPr txBox="1"/>
+          <p:nvPr/>
+        </p:nvSpPr>
+        <p:spPr>
+          <a:xfrm>
+            <a:off x="6217920" y="1353312"/>
+            <a:ext cx="384048" cy="384048"/>
+          </a:xfrm>
+          <a:prstGeom prst="rect">
+            <a:avLst/>
+          </a:prstGeom>
+          <a:noFill/>
+          <a:ln/>
+        </p:spPr>
+        <p:txBody>
+          <a:bodyPr wrap="square" lIns="0" tIns="0" rIns="0" bIns="0" rtlCol="0" anchor="ctr"/>
+          <a:lstStyle/>
+          <a:p>
+            <a:pPr algn="ctr" indent="0" marL="0">
+              <a:buNone/>
+            </a:pPr>
+            <a:r>
+              <a:rPr lang="en-US" sz="1400" b="1" dirty="0">
+                <a:solidFill>
+                  <a:schemeClr val="bg1"/>
+                </a:solidFill>
+              </a:rPr>
+              <a:t>3</a:t>
+            </a:r>
+            <a:endParaRPr lang="en-US" sz="1400" dirty="0"/>
+          </a:p>
+        </p:txBody>
+      </p:sp>
+      <p:sp>
+        <p:nvSpPr>
+          <p:cNvPr id="16" name="Text 14"/>
+          <p:cNvSpPr txBox="1"/>
+          <p:nvPr/>
+        </p:nvSpPr>
+        <p:spPr>
+          <a:xfrm>
+            <a:off x="6720840" y="1353312"/>
+            <a:ext cx="1828800" cy="384048"/>
+          </a:xfrm>
+          <a:prstGeom prst="rect">
+            <a:avLst/>
+          </a:prstGeom>
+          <a:noFill/>
+          <a:ln/>
+        </p:spPr>
+        <p:txBody>
+          <a:bodyPr wrap="square" lIns="0" tIns="0" rIns="0" bIns="0" rtlCol="0" anchor="ctr"/>
+          <a:lstStyle/>
+          <a:p>
+            <a:pPr indent="0" marL="0">
+              <a:buNone/>
+            </a:pPr>
+            <a:r>
+              <a:rPr lang="en-US" sz="1600" b="1" dirty="0">
+                <a:solidFill>
+                  <a:schemeClr val="tx1"/>
+                </a:solidFill>
+              </a:rPr>
+              <a:t>옛 버전 공존</a:t>
+            </a:r>
+            <a:endParaRPr lang="en-US" sz="1600" dirty="0"/>
+          </a:p>
+        </p:txBody>
+      </p:sp>
+      <p:sp>
+        <p:nvSpPr>
+          <p:cNvPr id="17" name="Text 15"/>
+          <p:cNvSpPr txBox="1"/>
+          <p:nvPr/>
+        </p:nvSpPr>
+        <p:spPr>
+          <a:xfrm>
+            <a:off x="6217920" y="1920240"/>
+            <a:ext cx="2286000" cy="548640"/>
+          </a:xfrm>
+          <a:prstGeom prst="rect">
+            <a:avLst/>
+          </a:prstGeom>
+          <a:noFill/>
+          <a:ln/>
+        </p:spPr>
+        <p:txBody>
+          <a:bodyPr wrap="square" lIns="0" tIns="0" rIns="0" bIns="0" rtlCol="0" anchor="t"/>
+          <a:lstStyle/>
+          <a:p>
+            <a:pPr indent="0" marL="0">
+              <a:buNone/>
+            </a:pPr>
+            <a:r>
+              <a:rPr lang="en-US" sz="1300" dirty="0">
+                <a:solidFill>
+                  <a:schemeClr val="accent4"/>
+                </a:solidFill>
+              </a:rPr>
+              <a:t>업데이트 안 한 사람이 계속 남음</a:t>
+            </a:r>
+            <a:endParaRPr lang="en-US" sz="1300" dirty="0"/>
+          </a:p>
+        </p:txBody>
+      </p:sp>
+      <p:sp>
+        <p:nvSpPr>
+          <p:cNvPr id="18" name="card"/>
+          <p:cNvSpPr/>
+          <p:nvPr/>
+        </p:nvSpPr>
+        <p:spPr>
+          <a:xfrm>
+            <a:off x="457200" y="2880360"/>
+            <a:ext cx="8229600" cy="1508760"/>
+          </a:xfrm>
+          <a:prstGeom prst="roundRect">
+            <a:avLst>
+              <a:gd name="adj" fmla="val 4848"/>
+            </a:avLst>
+          </a:prstGeom>
+          <a:solidFill>
+            <a:schemeClr val="tx2"/>
+          </a:solidFill>
+          <a:ln/>
+        </p:spPr>
+      </p:sp>
+      <p:sp>
+        <p:nvSpPr>
+          <p:cNvPr id="19" name="Text 17"/>
+          <p:cNvSpPr txBox="1"/>
+          <p:nvPr/>
+        </p:nvSpPr>
+        <p:spPr>
+          <a:xfrm>
+            <a:off x="731520" y="3017520"/>
+            <a:ext cx="7680960" cy="365760"/>
+          </a:xfrm>
+          <a:prstGeom prst="rect">
+            <a:avLst/>
+          </a:prstGeom>
+          <a:noFill/>
+          <a:ln/>
+        </p:spPr>
+        <p:txBody>
+          <a:bodyPr wrap="square" lIns="0" tIns="0" rIns="0" bIns="0" rtlCol="0" anchor="t"/>
+          <a:lstStyle/>
+          <a:p>
+            <a:pPr indent="0" marL="0">
+              <a:buNone/>
+            </a:pPr>
+            <a:r>
+              <a:rPr lang="en-US" sz="1600" b="1" dirty="0">
+                <a:solidFill>
+                  <a:schemeClr val="accent6"/>
+                </a:solidFill>
+              </a:rPr>
+              <a:t>그래서 쓰는 장치</a:t>
+            </a:r>
+            <a:endParaRPr lang="en-US" sz="1600" dirty="0"/>
+          </a:p>
+        </p:txBody>
+      </p:sp>
+      <p:sp>
+        <p:nvSpPr>
+          <p:cNvPr id="20" name="Text 18"/>
+          <p:cNvSpPr txBox="1"/>
+          <p:nvPr/>
+        </p:nvSpPr>
+        <p:spPr>
+          <a:xfrm>
+            <a:off x="731520" y="3429000"/>
+            <a:ext cx="7680960" cy="822960"/>
+          </a:xfrm>
+          <a:prstGeom prst="rect">
+            <a:avLst/>
+          </a:prstGeom>
+          <a:noFill/>
+          <a:ln/>
+        </p:spPr>
+        <p:txBody>
+          <a:bodyPr wrap="square" lIns="0" tIns="0" rIns="0" bIns="0" rtlCol="0" anchor="t"/>
+          <a:lstStyle/>
+          <a:p>
+            <a:pPr indent="0" marL="0">
+              <a:buNone/>
+            </a:pPr>
+            <a:r>
+              <a:rPr lang="en-US" sz="1300" dirty="0">
+                <a:solidFill>
+                  <a:schemeClr val="bg1"/>
+                </a:solidFill>
+              </a:rPr>
+              <a:t>단계적 출시 · 베타 테스트 · 기능 플래그 · 서버에서 설정 바꾸기 · 강제 업데이트 · 크래시 리포트</a:t>
+            </a:r>
+            <a:endParaRPr lang="en-US" sz="1300" dirty="0"/>
+          </a:p>
+          <a:p>
+            <a:pPr indent="0" marL="0">
+              <a:buNone/>
+            </a:pPr>
+            <a:r>
+              <a:rPr lang="en-US" sz="1300" dirty="0">
+                <a:solidFill>
+                  <a:schemeClr val="bg1"/>
+                </a:solidFill>
+              </a:rPr>
+              <a:t>디지털 상품 결제엔 앱 마켓 수수료 15–30% (조건에 따라)</a:t>
+            </a:r>
+            <a:endParaRPr lang="en-US" sz="1300" dirty="0"/>
+          </a:p>
+        </p:txBody>
+      </p:sp>
+      <p:sp>
+        <p:nvSpPr>
+          <p:cNvPr id="25" name="Slide Number Placeholder 0"/>
+          <p:cNvSpPr>
+            <a:spLocks noGrp="1"/>
+          </p:cNvSpPr>
+          <p:nvPr>
+            <p:ph type="sldNum" sz="quarter" idx="4294967295"/>
+          </p:nvPr>
+        </p:nvSpPr>
+        <p:spPr>
+          <a:xfrm>
+            <a:off x="8321040" y="4754880"/>
+            <a:ext cx="457200" cy="274320"/>
+          </a:xfrm>
+          <a:prstGeom prst="rect">
+            <a:avLst/>
+          </a:prstGeom>
+          <a:extLst>
+            <a:ext uri="{C572A759-6A51-4108-AA02-DFA0A04FC94B}">
+              <ma14:wrappingTextBoxFlag xmlns:ma14="http://schemas.microsoft.com/office/mac/drawingml/2011/main" val="0"/>
+            </a:ext>
+          </a:extLst>
+        </p:spPr>
+        <p:txBody>
+          <a:bodyPr/>
+          <a:lstStyle>
+            <a:lvl1pPr>
+              <a:defRPr sz="1000">
+                <a:solidFill>
+                  <a:schemeClr val="accent4"/>
+                </a:solidFill>
+              </a:defRPr>
+            </a:lvl1pPr>
+          </a:lstStyle>
+          <a:p>
+            <a:pPr algn="r"/>
+            <a:fld id="{F7021451-1387-4CA6-816F-3879F97B5CBC}" type="slidenum">
+              <a:rPr b="0" lang="en-US"/>
+              <a:t>33</a:t>
+            </a:fld>
+            <a:endParaRPr lang="en-US"/>
+          </a:p>
+        </p:txBody>
+      </p:sp>
+    </p:spTree>
+  </p:cSld>
+  <p:clrMapOvr>
+    <a:masterClrMapping/>
+  </p:clrMapOvr>
+</p:sld>
+</file>
+
+<file path=ppt/slides/slide34.xml><?xml version="1.0" encoding="utf-8"?>
+<p:sld xmlns:a="http://schemas.openxmlformats.org/drawingml/2006/main" xmlns:r="http://schemas.openxmlformats.org/officeDocument/2006/relationships" xmlns:p="http://schemas.openxmlformats.org/presentationml/2006/main">
+  <p:cSld name="Slide 34">
+    <p:spTree>
+      <p:nvGrpSpPr>
+        <p:cNvPr id="1" name=""/>
+        <p:cNvGrpSpPr/>
+        <p:nvPr/>
+      </p:nvGrpSpPr>
+      <p:grpSpPr>
+        <a:xfrm>
+          <a:off x="0" y="0"/>
+          <a:ext cx="0" cy="0"/>
+          <a:chOff x="0" y="0"/>
+          <a:chExt cx="0" cy="0"/>
+        </a:xfrm>
+      </p:grpSpPr>
+      <p:sp>
+        <p:nvSpPr>
+          <p:cNvPr id="2" name="Text 0"/>
+          <p:cNvSpPr/>
+          <p:nvPr>
+            <p:ph idx="100" type="title" hasCustomPrompt="1"/>
+          </p:nvPr>
+        </p:nvSpPr>
+        <p:spPr>
+          <a:xfrm>
+            <a:off x="457200" y="274320"/>
+            <a:ext cx="8229600" cy="685800"/>
+          </a:xfrm>
+          <a:prstGeom prst="rect">
+            <a:avLst/>
+          </a:prstGeom>
+          <a:noFill/>
+          <a:ln/>
+        </p:spPr>
+        <p:txBody>
+          <a:bodyPr wrap="square" lIns="0" tIns="0" rIns="0" bIns="0" rtlCol="0" anchor="ctr"/>
+          <a:lstStyle/>
+          <a:p>
+            <a:pPr indent="0" marL="0">
+              <a:buNone/>
+            </a:pPr>
+            <a:r>
+              <a:rPr lang="en-US" sz="2800" b="1" dirty="0">
+                <a:solidFill>
+                  <a:schemeClr val="tx2"/>
+                </a:solidFill>
+              </a:rPr>
+              <a:t>지식·외주 판매와 중개 플랫폼</a:t>
+            </a:r>
+            <a:endParaRPr lang="en-US" sz="2800" dirty="0"/>
+          </a:p>
+        </p:txBody>
+      </p:sp>
+      <p:sp>
+        <p:nvSpPr>
+          <p:cNvPr id="3" name="Text 1"/>
+          <p:cNvSpPr txBox="1"/>
+          <p:nvPr/>
+        </p:nvSpPr>
+        <p:spPr>
+          <a:xfrm>
+            <a:off x="457200" y="1188720"/>
+            <a:ext cx="3840480" cy="365760"/>
+          </a:xfrm>
+          <a:prstGeom prst="rect">
+            <a:avLst/>
+          </a:prstGeom>
+          <a:noFill/>
+          <a:ln/>
+        </p:spPr>
+        <p:txBody>
+          <a:bodyPr wrap="square" lIns="0" tIns="0" rIns="0" bIns="0" rtlCol="0" anchor="t"/>
+          <a:lstStyle/>
+          <a:p>
+            <a:pPr indent="0" marL="0">
+              <a:buNone/>
+            </a:pPr>
+            <a:r>
+              <a:rPr lang="en-US" sz="1600" b="1" dirty="0">
+                <a:solidFill>
+                  <a:schemeClr val="accent2"/>
+                </a:solidFill>
+              </a:rPr>
+              <a:t>지식·외주 (26장)</a:t>
+            </a:r>
+            <a:endParaRPr lang="en-US" sz="1600" dirty="0"/>
+          </a:p>
+        </p:txBody>
+      </p:sp>
+      <p:sp>
+        <p:nvSpPr>
+          <p:cNvPr id="4" name="badge1"/>
+          <p:cNvSpPr/>
+          <p:nvPr/>
+        </p:nvSpPr>
+        <p:spPr>
+          <a:xfrm>
+            <a:off x="457200" y="1691640"/>
+            <a:ext cx="384048" cy="384048"/>
+          </a:xfrm>
+          <a:prstGeom prst="ellipse">
+            <a:avLst/>
+          </a:prstGeom>
+          <a:solidFill>
+            <a:schemeClr val="tx2"/>
+          </a:solidFill>
+          <a:ln/>
+        </p:spPr>
+      </p:sp>
+      <p:sp>
+        <p:nvSpPr>
+          <p:cNvPr id="5" name="Text 3"/>
+          <p:cNvSpPr txBox="1"/>
+          <p:nvPr/>
+        </p:nvSpPr>
+        <p:spPr>
+          <a:xfrm>
+            <a:off x="457200" y="1691640"/>
+            <a:ext cx="384048" cy="384048"/>
+          </a:xfrm>
+          <a:prstGeom prst="rect">
+            <a:avLst/>
+          </a:prstGeom>
+          <a:noFill/>
+          <a:ln/>
+        </p:spPr>
+        <p:txBody>
+          <a:bodyPr wrap="square" lIns="0" tIns="0" rIns="0" bIns="0" rtlCol="0" anchor="ctr"/>
+          <a:lstStyle/>
+          <a:p>
+            <a:pPr algn="ctr" indent="0" marL="0">
+              <a:buNone/>
+            </a:pPr>
+            <a:r>
+              <a:rPr lang="en-US" sz="1400" b="1" dirty="0">
+                <a:solidFill>
+                  <a:schemeClr val="bg1"/>
+                </a:solidFill>
+              </a:rPr>
+              <a:t>1</a:t>
+            </a:r>
+            <a:endParaRPr lang="en-US" sz="1400" dirty="0"/>
+          </a:p>
+        </p:txBody>
+      </p:sp>
+      <p:sp>
+        <p:nvSpPr>
+          <p:cNvPr id="6" name="Text 4"/>
+          <p:cNvSpPr txBox="1"/>
+          <p:nvPr/>
+        </p:nvSpPr>
+        <p:spPr>
+          <a:xfrm>
+            <a:off x="960120" y="1645920"/>
+            <a:ext cx="3383280" cy="731520"/>
+          </a:xfrm>
+          <a:prstGeom prst="rect">
+            <a:avLst/>
+          </a:prstGeom>
+          <a:noFill/>
+          <a:ln/>
+        </p:spPr>
+        <p:txBody>
+          <a:bodyPr wrap="square" lIns="0" tIns="0" rIns="0" bIns="0" rtlCol="0" anchor="t"/>
+          <a:lstStyle/>
+          <a:p>
+            <a:pPr indent="0" marL="0">
+              <a:buNone/>
+            </a:pPr>
+            <a:r>
+              <a:rPr lang="en-US" sz="1500" b="1" dirty="0">
+                <a:solidFill>
+                  <a:schemeClr val="tx1"/>
+                </a:solidFill>
+              </a:rPr>
+              <a:t>디지털 상품</a:t>
+            </a:r>
+            <a:endParaRPr lang="en-US" sz="1500" dirty="0"/>
+          </a:p>
+          <a:p>
+            <a:pPr indent="0" marL="0">
+              <a:buNone/>
+            </a:pPr>
+            <a:r>
+              <a:rPr lang="en-US" sz="1200" dirty="0">
+                <a:solidFill>
+                  <a:schemeClr val="accent4"/>
+                </a:solidFill>
+              </a:rPr>
+              <a:t>한 번 만들어 계속 판매</a:t>
+            </a:r>
+            <a:endParaRPr lang="en-US" sz="1500" dirty="0"/>
+          </a:p>
+        </p:txBody>
+      </p:sp>
+      <p:sp>
+        <p:nvSpPr>
+          <p:cNvPr id="7" name="badge2"/>
+          <p:cNvSpPr/>
+          <p:nvPr/>
+        </p:nvSpPr>
+        <p:spPr>
+          <a:xfrm>
+            <a:off x="457200" y="2560320"/>
+            <a:ext cx="384048" cy="384048"/>
+          </a:xfrm>
+          <a:prstGeom prst="ellipse">
+            <a:avLst/>
+          </a:prstGeom>
+          <a:solidFill>
+            <a:schemeClr val="tx2"/>
+          </a:solidFill>
+          <a:ln/>
+        </p:spPr>
+      </p:sp>
+      <p:sp>
+        <p:nvSpPr>
+          <p:cNvPr id="8" name="Text 6"/>
+          <p:cNvSpPr txBox="1"/>
+          <p:nvPr/>
+        </p:nvSpPr>
+        <p:spPr>
+          <a:xfrm>
+            <a:off x="457200" y="2560320"/>
+            <a:ext cx="384048" cy="384048"/>
+          </a:xfrm>
+          <a:prstGeom prst="rect">
+            <a:avLst/>
+          </a:prstGeom>
+          <a:noFill/>
+          <a:ln/>
+        </p:spPr>
+        <p:txBody>
+          <a:bodyPr wrap="square" lIns="0" tIns="0" rIns="0" bIns="0" rtlCol="0" anchor="ctr"/>
+          <a:lstStyle/>
+          <a:p>
+            <a:pPr algn="ctr" indent="0" marL="0">
+              <a:buNone/>
+            </a:pPr>
+            <a:r>
+              <a:rPr lang="en-US" sz="1400" b="1" dirty="0">
+                <a:solidFill>
+                  <a:schemeClr val="bg1"/>
+                </a:solidFill>
+              </a:rPr>
+              <a:t>2</a:t>
+            </a:r>
+            <a:endParaRPr lang="en-US" sz="1400" dirty="0"/>
+          </a:p>
+        </p:txBody>
+      </p:sp>
+      <p:sp>
+        <p:nvSpPr>
+          <p:cNvPr id="9" name="Text 7"/>
+          <p:cNvSpPr txBox="1"/>
+          <p:nvPr/>
+        </p:nvSpPr>
+        <p:spPr>
+          <a:xfrm>
+            <a:off x="960120" y="2514600"/>
+            <a:ext cx="3383280" cy="731520"/>
+          </a:xfrm>
+          <a:prstGeom prst="rect">
+            <a:avLst/>
+          </a:prstGeom>
+          <a:noFill/>
+          <a:ln/>
+        </p:spPr>
+        <p:txBody>
+          <a:bodyPr wrap="square" lIns="0" tIns="0" rIns="0" bIns="0" rtlCol="0" anchor="t"/>
+          <a:lstStyle/>
+          <a:p>
+            <a:pPr indent="0" marL="0">
+              <a:buNone/>
+            </a:pPr>
+            <a:r>
+              <a:rPr lang="en-US" sz="1500" b="1" dirty="0">
+                <a:solidFill>
+                  <a:schemeClr val="tx1"/>
+                </a:solidFill>
+              </a:rPr>
+              <a:t>강의·코칭</a:t>
+            </a:r>
+            <a:endParaRPr lang="en-US" sz="1500" dirty="0"/>
+          </a:p>
+          <a:p>
+            <a:pPr indent="0" marL="0">
+              <a:buNone/>
+            </a:pPr>
+            <a:r>
+              <a:rPr lang="en-US" sz="1200" dirty="0">
+                <a:solidFill>
+                  <a:schemeClr val="accent4"/>
+                </a:solidFill>
+              </a:rPr>
+              <a:t>만들기 전 사전 신청으로 수요 확인</a:t>
+            </a:r>
+            <a:endParaRPr lang="en-US" sz="1500" dirty="0"/>
+          </a:p>
+        </p:txBody>
+      </p:sp>
+      <p:sp>
+        <p:nvSpPr>
+          <p:cNvPr id="10" name="badge3"/>
+          <p:cNvSpPr/>
+          <p:nvPr/>
+        </p:nvSpPr>
+        <p:spPr>
+          <a:xfrm>
+            <a:off x="457200" y="3429000"/>
+            <a:ext cx="384048" cy="384048"/>
+          </a:xfrm>
+          <a:prstGeom prst="ellipse">
+            <a:avLst/>
+          </a:prstGeom>
+          <a:solidFill>
+            <a:schemeClr val="tx2"/>
+          </a:solidFill>
+          <a:ln/>
+        </p:spPr>
+      </p:sp>
+      <p:sp>
+        <p:nvSpPr>
+          <p:cNvPr id="11" name="Text 9"/>
+          <p:cNvSpPr txBox="1"/>
+          <p:nvPr/>
+        </p:nvSpPr>
+        <p:spPr>
+          <a:xfrm>
+            <a:off x="457200" y="3429000"/>
+            <a:ext cx="384048" cy="384048"/>
+          </a:xfrm>
+          <a:prstGeom prst="rect">
+            <a:avLst/>
+          </a:prstGeom>
+          <a:noFill/>
+          <a:ln/>
+        </p:spPr>
+        <p:txBody>
+          <a:bodyPr wrap="square" lIns="0" tIns="0" rIns="0" bIns="0" rtlCol="0" anchor="ctr"/>
+          <a:lstStyle/>
+          <a:p>
+            <a:pPr algn="ctr" indent="0" marL="0">
+              <a:buNone/>
+            </a:pPr>
+            <a:r>
+              <a:rPr lang="en-US" sz="1400" b="1" dirty="0">
+                <a:solidFill>
+                  <a:schemeClr val="bg1"/>
+                </a:solidFill>
+              </a:rPr>
+              <a:t>3</a:t>
+            </a:r>
+            <a:endParaRPr lang="en-US" sz="1400" dirty="0"/>
+          </a:p>
+        </p:txBody>
+      </p:sp>
+      <p:sp>
+        <p:nvSpPr>
+          <p:cNvPr id="12" name="Text 10"/>
+          <p:cNvSpPr txBox="1"/>
+          <p:nvPr/>
+        </p:nvSpPr>
+        <p:spPr>
+          <a:xfrm>
+            <a:off x="960120" y="3383280"/>
+            <a:ext cx="3383280" cy="731520"/>
+          </a:xfrm>
+          <a:prstGeom prst="rect">
+            <a:avLst/>
+          </a:prstGeom>
+          <a:noFill/>
+          <a:ln/>
+        </p:spPr>
+        <p:txBody>
+          <a:bodyPr wrap="square" lIns="0" tIns="0" rIns="0" bIns="0" rtlCol="0" anchor="t"/>
+          <a:lstStyle/>
+          <a:p>
+            <a:pPr indent="0" marL="0">
+              <a:buNone/>
+            </a:pPr>
+            <a:r>
+              <a:rPr lang="en-US" sz="1500" b="1" dirty="0">
+                <a:solidFill>
+                  <a:schemeClr val="tx1"/>
+                </a:solidFill>
+              </a:rPr>
+              <a:t>외주</a:t>
+            </a:r>
+            <a:endParaRPr lang="en-US" sz="1500" dirty="0"/>
+          </a:p>
+          <a:p>
+            <a:pPr indent="0" marL="0">
+              <a:buNone/>
+            </a:pPr>
+            <a:r>
+              <a:rPr lang="en-US" sz="1200" dirty="0">
+                <a:solidFill>
+                  <a:schemeClr val="accent4"/>
+                </a:solidFill>
+              </a:rPr>
+              <a:t>계약서: 범위·수정 횟수·저작권</a:t>
+            </a:r>
+            <a:endParaRPr lang="en-US" sz="1500" dirty="0"/>
+          </a:p>
+        </p:txBody>
+      </p:sp>
+      <p:sp>
+        <p:nvSpPr>
+          <p:cNvPr id="13" name="card"/>
+          <p:cNvSpPr/>
+          <p:nvPr/>
+        </p:nvSpPr>
+        <p:spPr>
+          <a:xfrm>
+            <a:off x="4572000" y="1188720"/>
+            <a:ext cx="4114800" cy="3200400"/>
+          </a:xfrm>
+          <a:prstGeom prst="roundRect">
+            <a:avLst>
+              <a:gd name="adj" fmla="val 2286"/>
+            </a:avLst>
+          </a:prstGeom>
+          <a:solidFill>
+            <a:schemeClr val="bg2"/>
+          </a:solidFill>
+          <a:ln/>
+        </p:spPr>
+      </p:sp>
+      <p:sp>
+        <p:nvSpPr>
+          <p:cNvPr id="14" name="Text 12"/>
+          <p:cNvSpPr txBox="1"/>
+          <p:nvPr/>
+        </p:nvSpPr>
+        <p:spPr>
+          <a:xfrm>
+            <a:off x="4800600" y="1325880"/>
+            <a:ext cx="3657600" cy="365760"/>
+          </a:xfrm>
+          <a:prstGeom prst="rect">
+            <a:avLst/>
+          </a:prstGeom>
+          <a:noFill/>
+          <a:ln/>
+        </p:spPr>
+        <p:txBody>
+          <a:bodyPr wrap="square" lIns="0" tIns="0" rIns="0" bIns="0" rtlCol="0" anchor="t"/>
+          <a:lstStyle/>
+          <a:p>
+            <a:pPr indent="0" marL="0">
+              <a:buNone/>
+            </a:pPr>
+            <a:r>
+              <a:rPr lang="en-US" sz="1600" b="1" dirty="0">
+                <a:solidFill>
+                  <a:schemeClr val="tx2"/>
+                </a:solidFill>
+              </a:rPr>
+              <a:t>중개 플랫폼 (27장)</a:t>
+            </a:r>
+            <a:endParaRPr lang="en-US" sz="1600" dirty="0"/>
+          </a:p>
+        </p:txBody>
+      </p:sp>
+      <p:sp>
+        <p:nvSpPr>
+          <p:cNvPr id="15" name="Text 13"/>
+          <p:cNvSpPr txBox="1"/>
+          <p:nvPr/>
+        </p:nvSpPr>
+        <p:spPr>
+          <a:xfrm>
+            <a:off x="4800600" y="1783080"/>
+            <a:ext cx="3703320" cy="2468880"/>
+          </a:xfrm>
+          <a:prstGeom prst="rect">
+            <a:avLst/>
+          </a:prstGeom>
+          <a:noFill/>
+          <a:ln/>
+        </p:spPr>
+        <p:txBody>
+          <a:bodyPr wrap="square" lIns="0" tIns="0" rIns="0" bIns="0" rtlCol="0" anchor="t"/>
+          <a:lstStyle/>
+          <a:p>
+            <a:pPr marL="342900" indent="-342900">
+              <a:spcAft>
+                <a:spcPts val="800"/>
+              </a:spcAft>
+              <a:buSzPct val="100000"/>
+              <a:buChar char="•"/>
+            </a:pPr>
+            <a:r>
+              <a:rPr lang="en-US" sz="1400" dirty="0">
+                <a:solidFill>
+                  <a:schemeClr val="tx1"/>
+                </a:solidFill>
+              </a:rPr>
+              <a:t>한쪽 먼저, 좁은 지역·분야부터</a:t>
+            </a:r>
+            <a:endParaRPr lang="en-US" sz="1400" dirty="0"/>
+          </a:p>
+          <a:p>
+            <a:pPr marL="342900" indent="-342900">
+              <a:spcAft>
+                <a:spcPts val="800"/>
+              </a:spcAft>
+              <a:buSzPct val="100000"/>
+              <a:buChar char="•"/>
+            </a:pPr>
+            <a:r>
+              <a:rPr lang="en-US" sz="1400" dirty="0">
+                <a:solidFill>
+                  <a:schemeClr val="tx1"/>
+                </a:solidFill>
+              </a:rPr>
+              <a:t>신뢰 장치: 본인 확인·리뷰·안전결제</a:t>
+            </a:r>
+            <a:endParaRPr lang="en-US" sz="1400" dirty="0"/>
+          </a:p>
+          <a:p>
+            <a:pPr marL="342900" indent="-342900">
+              <a:spcAft>
+                <a:spcPts val="800"/>
+              </a:spcAft>
+              <a:buSzPct val="100000"/>
+              <a:buChar char="•"/>
+            </a:pPr>
+            <a:r>
+              <a:rPr lang="en-US" sz="1400" dirty="0">
+                <a:solidFill>
+                  <a:schemeClr val="tx1"/>
+                </a:solidFill>
+              </a:rPr>
+              <a:t>탈중개(직거래) 막을 혜택 만들기</a:t>
+            </a:r>
+            <a:endParaRPr lang="en-US" sz="1400" dirty="0"/>
+          </a:p>
+          <a:p>
+            <a:pPr marL="342900" indent="-342900">
+              <a:spcAft>
+                <a:spcPts val="800"/>
+              </a:spcAft>
+              <a:buSzPct val="100000"/>
+              <a:buChar char="•"/>
+            </a:pPr>
+            <a:r>
+              <a:rPr lang="en-US" sz="1400" dirty="0">
+                <a:solidFill>
+                  <a:schemeClr val="tx1"/>
+                </a:solidFill>
+              </a:rPr>
+              <a:t>구인구직·결혼중개·숙박·의료는 업종별 신고·등록 확인</a:t>
+            </a:r>
+            <a:endParaRPr lang="en-US" sz="1400" dirty="0"/>
+          </a:p>
+        </p:txBody>
+      </p:sp>
+      <p:sp>
+        <p:nvSpPr>
+          <p:cNvPr id="25" name="Slide Number Placeholder 0"/>
+          <p:cNvSpPr>
+            <a:spLocks noGrp="1"/>
+          </p:cNvSpPr>
+          <p:nvPr>
+            <p:ph type="sldNum" sz="quarter" idx="4294967295"/>
+          </p:nvPr>
+        </p:nvSpPr>
+        <p:spPr>
+          <a:xfrm>
+            <a:off x="8321040" y="4754880"/>
+            <a:ext cx="457200" cy="274320"/>
+          </a:xfrm>
+          <a:prstGeom prst="rect">
+            <a:avLst/>
+          </a:prstGeom>
+          <a:extLst>
+            <a:ext uri="{C572A759-6A51-4108-AA02-DFA0A04FC94B}">
+              <ma14:wrappingTextBoxFlag xmlns:ma14="http://schemas.microsoft.com/office/mac/drawingml/2011/main" val="0"/>
+            </a:ext>
+          </a:extLst>
+        </p:spPr>
+        <p:txBody>
+          <a:bodyPr/>
+          <a:lstStyle>
+            <a:lvl1pPr>
+              <a:defRPr sz="1000">
+                <a:solidFill>
+                  <a:schemeClr val="accent4"/>
+                </a:solidFill>
+              </a:defRPr>
+            </a:lvl1pPr>
+          </a:lstStyle>
+          <a:p>
+            <a:pPr algn="r"/>
+            <a:fld id="{F7021451-1387-4CA6-816F-3879F97B5CBC}" type="slidenum">
+              <a:rPr b="0" lang="en-US"/>
+              <a:t>34</a:t>
+            </a:fld>
+            <a:endParaRPr lang="en-US"/>
+          </a:p>
+        </p:txBody>
+      </p:sp>
+    </p:spTree>
+  </p:cSld>
+  <p:clrMapOvr>
+    <a:masterClrMapping/>
+  </p:clrMapOvr>
+</p:sld>
+</file>
+
+<file path=ppt/slides/slide35.xml><?xml version="1.0" encoding="utf-8"?>
+<p:sld xmlns:a="http://schemas.openxmlformats.org/drawingml/2006/main" xmlns:r="http://schemas.openxmlformats.org/officeDocument/2006/relationships" xmlns:p="http://schemas.openxmlformats.org/presentationml/2006/main">
+  <p:cSld name="Slide 35">
+    <p:spTree>
+      <p:nvGrpSpPr>
+        <p:cNvPr id="1" name=""/>
+        <p:cNvGrpSpPr/>
+        <p:nvPr/>
+      </p:nvGrpSpPr>
+      <p:grpSpPr>
+        <a:xfrm>
+          <a:off x="0" y="0"/>
+          <a:ext cx="0" cy="0"/>
+          <a:chOff x="0" y="0"/>
+          <a:chExt cx="0" cy="0"/>
+        </a:xfrm>
+      </p:grpSpPr>
+      <p:sp>
+        <p:nvSpPr>
+          <p:cNvPr id="2" name="Text 0"/>
+          <p:cNvSpPr/>
+          <p:nvPr>
+            <p:ph idx="100" type="title" hasCustomPrompt="1"/>
+          </p:nvPr>
+        </p:nvSpPr>
+        <p:spPr>
+          <a:xfrm>
+            <a:off x="457200" y="274320"/>
+            <a:ext cx="8229600" cy="685800"/>
+          </a:xfrm>
+          <a:prstGeom prst="rect">
+            <a:avLst/>
+          </a:prstGeom>
+          <a:noFill/>
+          <a:ln/>
+        </p:spPr>
+        <p:txBody>
+          <a:bodyPr wrap="square" lIns="0" tIns="0" rIns="0" bIns="0" rtlCol="0" anchor="ctr"/>
+          <a:lstStyle/>
+          <a:p>
+            <a:pPr indent="0" marL="0">
+              <a:buNone/>
+            </a:pPr>
+            <a:r>
+              <a:rPr lang="en-US" sz="2800" b="1" dirty="0">
+                <a:solidFill>
+                  <a:schemeClr val="tx2"/>
+                </a:solidFill>
+              </a:rPr>
+              <a:t>AI 서비스: 쓸 때마다 원가가 나간다</a:t>
+            </a:r>
+            <a:endParaRPr lang="en-US" sz="2800" dirty="0"/>
+          </a:p>
+        </p:txBody>
+      </p:sp>
+      <p:graphicFrame>
+        <p:nvGraphicFramePr>
+          <p:cNvPr id="3" name="Chart 0" descr=""/>
+          <p:cNvGraphicFramePr/>
+          <p:nvPr/>
+        </p:nvGraphicFramePr>
+        <p:xfrm>
+          <a:off x="365760" y="1097280"/>
+          <a:ext cx="5120640" cy="3291840"/>
+        </p:xfrm>
+        <a:graphic xmlns:a="http://schemas.openxmlformats.org/drawingml/2006/main">
+          <a:graphicData uri="http://schemas.openxmlformats.org/drawingml/2006/chart">
+            <c:chart xmlns:c="http://schemas.openxmlformats.org/drawingml/2006/chart" r:id="rId1"/>
+          </a:graphicData>
+        </a:graphic>
+      </p:graphicFrame>
+      <p:sp>
+        <p:nvSpPr>
+          <p:cNvPr id="4" name="card"/>
+          <p:cNvSpPr/>
+          <p:nvPr/>
+        </p:nvSpPr>
+        <p:spPr>
+          <a:xfrm>
+            <a:off x="5760720" y="1188720"/>
+            <a:ext cx="2926080" cy="3200400"/>
+          </a:xfrm>
+          <a:prstGeom prst="roundRect">
+            <a:avLst>
+              <a:gd name="adj" fmla="val 2500"/>
+            </a:avLst>
+          </a:prstGeom>
+          <a:solidFill>
+            <a:schemeClr val="bg2"/>
+          </a:solidFill>
+          <a:ln/>
+        </p:spPr>
+      </p:sp>
+      <p:sp>
+        <p:nvSpPr>
+          <p:cNvPr id="5" name="Text 2"/>
+          <p:cNvSpPr txBox="1"/>
+          <p:nvPr/>
+        </p:nvSpPr>
+        <p:spPr>
+          <a:xfrm>
+            <a:off x="5943600" y="1325880"/>
+            <a:ext cx="2560320" cy="365760"/>
+          </a:xfrm>
+          <a:prstGeom prst="rect">
+            <a:avLst/>
+          </a:prstGeom>
+          <a:noFill/>
+          <a:ln/>
+        </p:spPr>
+        <p:txBody>
+          <a:bodyPr wrap="square" lIns="0" tIns="0" rIns="0" bIns="0" rtlCol="0" anchor="t"/>
+          <a:lstStyle/>
+          <a:p>
+            <a:pPr indent="0" marL="0">
+              <a:buNone/>
+            </a:pPr>
+            <a:r>
+              <a:rPr lang="en-US" sz="1500" b="1" dirty="0">
+                <a:solidFill>
+                  <a:schemeClr val="accent2"/>
+                </a:solidFill>
+              </a:rPr>
+              <a:t>운영 체크</a:t>
+            </a:r>
+            <a:endParaRPr lang="en-US" sz="1500" dirty="0"/>
+          </a:p>
+        </p:txBody>
+      </p:sp>
+      <p:sp>
+        <p:nvSpPr>
+          <p:cNvPr id="6" name="Text 3"/>
+          <p:cNvSpPr txBox="1"/>
+          <p:nvPr/>
+        </p:nvSpPr>
+        <p:spPr>
+          <a:xfrm>
+            <a:off x="5943600" y="1783080"/>
+            <a:ext cx="2606040" cy="2468880"/>
+          </a:xfrm>
+          <a:prstGeom prst="rect">
+            <a:avLst/>
+          </a:prstGeom>
+          <a:noFill/>
+          <a:ln/>
+        </p:spPr>
+        <p:txBody>
+          <a:bodyPr wrap="square" lIns="0" tIns="0" rIns="0" bIns="0" rtlCol="0" anchor="t"/>
+          <a:lstStyle/>
+          <a:p>
+            <a:pPr marL="342900" indent="-342900">
+              <a:spcAft>
+                <a:spcPts val="800"/>
+              </a:spcAft>
+              <a:buSzPct val="100000"/>
+              <a:buChar char="•"/>
+            </a:pPr>
+            <a:r>
+              <a:rPr lang="en-US" sz="1300" dirty="0">
+                <a:solidFill>
+                  <a:schemeClr val="tx1"/>
+                </a:solidFill>
+              </a:rPr>
+              <a:t>사용량 제한·과금</a:t>
+            </a:r>
+            <a:endParaRPr lang="en-US" sz="1300" dirty="0"/>
+          </a:p>
+          <a:p>
+            <a:pPr marL="342900" indent="-342900">
+              <a:spcAft>
+                <a:spcPts val="800"/>
+              </a:spcAft>
+              <a:buSzPct val="100000"/>
+              <a:buChar char="•"/>
+            </a:pPr>
+            <a:r>
+              <a:rPr lang="en-US" sz="1300" dirty="0">
+                <a:solidFill>
+                  <a:schemeClr val="tx1"/>
+                </a:solidFill>
+              </a:rPr>
+              <a:t>틀린 답(환각) 안내</a:t>
+            </a:r>
+            <a:endParaRPr lang="en-US" sz="1300" dirty="0"/>
+          </a:p>
+          <a:p>
+            <a:pPr marL="342900" indent="-342900">
+              <a:spcAft>
+                <a:spcPts val="800"/>
+              </a:spcAft>
+              <a:buSzPct val="100000"/>
+              <a:buChar char="•"/>
+            </a:pPr>
+            <a:r>
+              <a:rPr lang="en-US" sz="1300" dirty="0">
+                <a:solidFill>
+                  <a:schemeClr val="tx1"/>
+                </a:solidFill>
+              </a:rPr>
+              <a:t>모델 바뀌면 테스트</a:t>
+            </a:r>
+            <a:endParaRPr lang="en-US" sz="1300" dirty="0"/>
+          </a:p>
+          <a:p>
+            <a:pPr marL="342900" indent="-342900">
+              <a:spcAft>
+                <a:spcPts val="800"/>
+              </a:spcAft>
+              <a:buSzPct val="100000"/>
+              <a:buChar char="•"/>
+            </a:pPr>
+            <a:r>
+              <a:rPr lang="en-US" sz="1300" dirty="0">
+                <a:solidFill>
+                  <a:schemeClr val="tx1"/>
+                </a:solidFill>
+              </a:rPr>
+              <a:t>입력 정보 외부 전송 고지</a:t>
+            </a:r>
+            <a:endParaRPr lang="en-US" sz="1300" dirty="0"/>
+          </a:p>
+          <a:p>
+            <a:pPr marL="342900" indent="-342900">
+              <a:spcAft>
+                <a:spcPts val="800"/>
+              </a:spcAft>
+              <a:buSzPct val="100000"/>
+              <a:buChar char="•"/>
+            </a:pPr>
+            <a:r>
+              <a:rPr lang="en-US" sz="1300" dirty="0">
+                <a:solidFill>
+                  <a:schemeClr val="tx1"/>
+                </a:solidFill>
+              </a:rPr>
+              <a:t>AI 생성물 표시 (AI 기본법)</a:t>
+            </a:r>
+            <a:endParaRPr lang="en-US" sz="1300" dirty="0"/>
+          </a:p>
+        </p:txBody>
+      </p:sp>
+      <p:sp>
+        <p:nvSpPr>
+          <p:cNvPr id="25" name="Slide Number Placeholder 0"/>
+          <p:cNvSpPr>
+            <a:spLocks noGrp="1"/>
+          </p:cNvSpPr>
+          <p:nvPr>
+            <p:ph type="sldNum" sz="quarter" idx="4294967295"/>
+          </p:nvPr>
+        </p:nvSpPr>
+        <p:spPr>
+          <a:xfrm>
+            <a:off x="8321040" y="4754880"/>
+            <a:ext cx="457200" cy="274320"/>
+          </a:xfrm>
+          <a:prstGeom prst="rect">
+            <a:avLst/>
+          </a:prstGeom>
+          <a:extLst>
+            <a:ext uri="{C572A759-6A51-4108-AA02-DFA0A04FC94B}">
+              <ma14:wrappingTextBoxFlag xmlns:ma14="http://schemas.microsoft.com/office/mac/drawingml/2011/main" val="0"/>
+            </a:ext>
+          </a:extLst>
+        </p:spPr>
+        <p:txBody>
+          <a:bodyPr/>
+          <a:lstStyle>
+            <a:lvl1pPr>
+              <a:defRPr sz="1000">
+                <a:solidFill>
+                  <a:schemeClr val="accent4"/>
+                </a:solidFill>
+              </a:defRPr>
+            </a:lvl1pPr>
+          </a:lstStyle>
+          <a:p>
+            <a:pPr algn="r"/>
+            <a:fld id="{F7021451-1387-4CA6-816F-3879F97B5CBC}" type="slidenum">
+              <a:rPr b="0" lang="en-US"/>
+              <a:t>35</a:t>
+            </a:fld>
+            <a:endParaRPr lang="en-US"/>
+          </a:p>
+        </p:txBody>
+      </p:sp>
+    </p:spTree>
+  </p:cSld>
+  <p:clrMapOvr>
+    <a:masterClrMapping/>
+  </p:clrMapOvr>
+</p:sld>
+</file>
+
+<file path=ppt/slides/slide36.xml><?xml version="1.0" encoding="utf-8"?>
+<p:sld xmlns:a="http://schemas.openxmlformats.org/drawingml/2006/main" xmlns:r="http://schemas.openxmlformats.org/officeDocument/2006/relationships" xmlns:p="http://schemas.openxmlformats.org/presentationml/2006/main">
+  <p:cSld name="Slide 36">
+    <p:spTree>
+      <p:nvGrpSpPr>
+        <p:cNvPr id="1" name=""/>
+        <p:cNvGrpSpPr/>
+        <p:nvPr/>
+      </p:nvGrpSpPr>
+      <p:grpSpPr>
+        <a:xfrm>
+          <a:off x="0" y="0"/>
+          <a:ext cx="0" cy="0"/>
+          <a:chOff x="0" y="0"/>
+          <a:chExt cx="0" cy="0"/>
+        </a:xfrm>
+      </p:grpSpPr>
+      <p:sp>
+        <p:nvSpPr>
+          <p:cNvPr id="2" name="Text 0"/>
+          <p:cNvSpPr/>
+          <p:nvPr>
+            <p:ph idx="100" type="title" hasCustomPrompt="1"/>
+          </p:nvPr>
+        </p:nvSpPr>
+        <p:spPr>
+          <a:xfrm>
+            <a:off x="457200" y="274320"/>
+            <a:ext cx="8229600" cy="685800"/>
+          </a:xfrm>
+          <a:prstGeom prst="rect">
+            <a:avLst/>
+          </a:prstGeom>
+          <a:noFill/>
+          <a:ln/>
+        </p:spPr>
+        <p:txBody>
+          <a:bodyPr wrap="square" lIns="0" tIns="0" rIns="0" bIns="0" rtlCol="0" anchor="ctr"/>
+          <a:lstStyle/>
+          <a:p>
+            <a:pPr indent="0" marL="0">
+              <a:buNone/>
+            </a:pPr>
+            <a:r>
+              <a:rPr lang="en-US" sz="2800" b="1" dirty="0">
+                <a:solidFill>
+                  <a:schemeClr val="tx2"/>
+                </a:solidFill>
+              </a:rPr>
+              <a:t>시작 전에 확인할 규제 업종</a:t>
+            </a:r>
+            <a:endParaRPr lang="en-US" sz="2800" dirty="0"/>
+          </a:p>
+        </p:txBody>
+      </p:sp>
+      <p:sp>
+        <p:nvSpPr>
+          <p:cNvPr id="3" name="card"/>
+          <p:cNvSpPr/>
+          <p:nvPr/>
+        </p:nvSpPr>
+        <p:spPr>
+          <a:xfrm>
+            <a:off x="457200" y="1188720"/>
+            <a:ext cx="8229600" cy="685800"/>
+          </a:xfrm>
+          <a:prstGeom prst="roundRect">
+            <a:avLst>
+              <a:gd name="adj" fmla="val 10667"/>
+            </a:avLst>
+          </a:prstGeom>
+          <a:solidFill>
+            <a:schemeClr val="bg2"/>
+          </a:solidFill>
+          <a:ln/>
+        </p:spPr>
+      </p:sp>
+      <p:sp>
+        <p:nvSpPr>
+          <p:cNvPr id="4" name="reg0"/>
+          <p:cNvSpPr/>
+          <p:nvPr/>
+        </p:nvSpPr>
+        <p:spPr>
+          <a:xfrm>
+            <a:off x="640080" y="1344168"/>
+            <a:ext cx="365760" cy="365760"/>
+          </a:xfrm>
+          <a:prstGeom prst="ellipse">
+            <a:avLst/>
+          </a:prstGeom>
+          <a:solidFill>
+            <a:srgbClr val="3E9B6B"/>
+          </a:solidFill>
+          <a:ln/>
+        </p:spPr>
+      </p:sp>
+      <p:sp>
+        <p:nvSpPr>
+          <p:cNvPr id="5" name="Text 3"/>
+          <p:cNvSpPr txBox="1"/>
+          <p:nvPr/>
+        </p:nvSpPr>
+        <p:spPr>
+          <a:xfrm>
+            <a:off x="1188720" y="1188720"/>
+            <a:ext cx="2377440" cy="685800"/>
+          </a:xfrm>
+          <a:prstGeom prst="rect">
+            <a:avLst/>
+          </a:prstGeom>
+          <a:noFill/>
+          <a:ln/>
+        </p:spPr>
+        <p:txBody>
+          <a:bodyPr wrap="square" lIns="0" tIns="0" rIns="0" bIns="0" rtlCol="0" anchor="ctr"/>
+          <a:lstStyle/>
+          <a:p>
+            <a:pPr indent="0" marL="0">
+              <a:buNone/>
+            </a:pPr>
+            <a:r>
+              <a:rPr lang="en-US" sz="1500" b="1" dirty="0">
+                <a:solidFill>
+                  <a:schemeClr val="tx1"/>
+                </a:solidFill>
+              </a:rPr>
+              <a:t>신고 정도면 시작</a:t>
+            </a:r>
+            <a:endParaRPr lang="en-US" sz="1500" dirty="0"/>
+          </a:p>
+        </p:txBody>
+      </p:sp>
+      <p:sp>
+        <p:nvSpPr>
+          <p:cNvPr id="6" name="Text 4"/>
+          <p:cNvSpPr txBox="1"/>
+          <p:nvPr/>
+        </p:nvSpPr>
+        <p:spPr>
+          <a:xfrm>
+            <a:off x="3657600" y="1188720"/>
+            <a:ext cx="4846320" cy="685800"/>
+          </a:xfrm>
+          <a:prstGeom prst="rect">
+            <a:avLst/>
+          </a:prstGeom>
+          <a:noFill/>
+          <a:ln/>
+        </p:spPr>
+        <p:txBody>
+          <a:bodyPr wrap="square" lIns="0" tIns="0" rIns="0" bIns="0" rtlCol="0" anchor="ctr"/>
+          <a:lstStyle/>
+          <a:p>
+            <a:pPr indent="0" marL="0">
+              <a:buNone/>
+            </a:pPr>
+            <a:r>
+              <a:rPr lang="en-US" sz="1300" dirty="0">
+                <a:solidFill>
+                  <a:schemeClr val="accent4"/>
+                </a:solidFill>
+              </a:rPr>
+              <a:t>일반 쇼핑몰 · 정보 사이트 · 템플릿</a:t>
+            </a:r>
+            <a:endParaRPr lang="en-US" sz="1300" dirty="0"/>
+          </a:p>
+        </p:txBody>
+      </p:sp>
+      <p:sp>
+        <p:nvSpPr>
+          <p:cNvPr id="7" name="card"/>
+          <p:cNvSpPr/>
+          <p:nvPr/>
+        </p:nvSpPr>
+        <p:spPr>
+          <a:xfrm>
+            <a:off x="457200" y="1993392"/>
+            <a:ext cx="8229600" cy="685800"/>
+          </a:xfrm>
+          <a:prstGeom prst="roundRect">
+            <a:avLst>
+              <a:gd name="adj" fmla="val 10667"/>
+            </a:avLst>
+          </a:prstGeom>
+          <a:solidFill>
+            <a:schemeClr val="bg2"/>
+          </a:solidFill>
+          <a:ln/>
+        </p:spPr>
+      </p:sp>
+      <p:sp>
+        <p:nvSpPr>
+          <p:cNvPr id="8" name="reg1"/>
+          <p:cNvSpPr/>
+          <p:nvPr/>
+        </p:nvSpPr>
+        <p:spPr>
+          <a:xfrm>
+            <a:off x="640080" y="2148840"/>
+            <a:ext cx="365760" cy="365760"/>
+          </a:xfrm>
+          <a:prstGeom prst="ellipse">
+            <a:avLst/>
+          </a:prstGeom>
+          <a:solidFill>
+            <a:srgbClr val="E0A526"/>
+          </a:solidFill>
+          <a:ln/>
+        </p:spPr>
+      </p:sp>
+      <p:sp>
+        <p:nvSpPr>
+          <p:cNvPr id="9" name="Text 7"/>
+          <p:cNvSpPr txBox="1"/>
+          <p:nvPr/>
+        </p:nvSpPr>
+        <p:spPr>
+          <a:xfrm>
+            <a:off x="1188720" y="1993392"/>
+            <a:ext cx="2377440" cy="685800"/>
+          </a:xfrm>
+          <a:prstGeom prst="rect">
+            <a:avLst/>
+          </a:prstGeom>
+          <a:noFill/>
+          <a:ln/>
+        </p:spPr>
+        <p:txBody>
+          <a:bodyPr wrap="square" lIns="0" tIns="0" rIns="0" bIns="0" rtlCol="0" anchor="ctr"/>
+          <a:lstStyle/>
+          <a:p>
+            <a:pPr indent="0" marL="0">
+              <a:buNone/>
+            </a:pPr>
+            <a:r>
+              <a:rPr lang="en-US" sz="1500" b="1" dirty="0">
+                <a:solidFill>
+                  <a:schemeClr val="tx1"/>
+                </a:solidFill>
+              </a:rPr>
+              <a:t>추가 신고·등록</a:t>
+            </a:r>
+            <a:endParaRPr lang="en-US" sz="1500" dirty="0"/>
+          </a:p>
+        </p:txBody>
+      </p:sp>
+      <p:sp>
+        <p:nvSpPr>
+          <p:cNvPr id="10" name="Text 8"/>
+          <p:cNvSpPr txBox="1"/>
+          <p:nvPr/>
+        </p:nvSpPr>
+        <p:spPr>
+          <a:xfrm>
+            <a:off x="3657600" y="1993392"/>
+            <a:ext cx="4846320" cy="685800"/>
+          </a:xfrm>
+          <a:prstGeom prst="rect">
+            <a:avLst/>
+          </a:prstGeom>
+          <a:noFill/>
+          <a:ln/>
+        </p:spPr>
+        <p:txBody>
+          <a:bodyPr wrap="square" lIns="0" tIns="0" rIns="0" bIns="0" rtlCol="0" anchor="ctr"/>
+          <a:lstStyle/>
+          <a:p>
+            <a:pPr indent="0" marL="0">
+              <a:buNone/>
+            </a:pPr>
+            <a:r>
+              <a:rPr lang="en-US" sz="1300" dirty="0">
+                <a:solidFill>
+                  <a:schemeClr val="accent4"/>
+                </a:solidFill>
+              </a:rPr>
+              <a:t>건강기능식품 · 직업소개 · 위치정보 · 게임</a:t>
+            </a:r>
+            <a:endParaRPr lang="en-US" sz="1300" dirty="0"/>
+          </a:p>
+        </p:txBody>
+      </p:sp>
+      <p:sp>
+        <p:nvSpPr>
+          <p:cNvPr id="11" name="card"/>
+          <p:cNvSpPr/>
+          <p:nvPr/>
+        </p:nvSpPr>
+        <p:spPr>
+          <a:xfrm>
+            <a:off x="457200" y="2798064"/>
+            <a:ext cx="8229600" cy="685800"/>
+          </a:xfrm>
+          <a:prstGeom prst="roundRect">
+            <a:avLst>
+              <a:gd name="adj" fmla="val 10667"/>
+            </a:avLst>
+          </a:prstGeom>
+          <a:solidFill>
+            <a:schemeClr val="bg2"/>
+          </a:solidFill>
+          <a:ln/>
+        </p:spPr>
+      </p:sp>
+      <p:sp>
+        <p:nvSpPr>
+          <p:cNvPr id="12" name="reg2"/>
+          <p:cNvSpPr/>
+          <p:nvPr/>
+        </p:nvSpPr>
+        <p:spPr>
+          <a:xfrm>
+            <a:off x="640080" y="2953512"/>
+            <a:ext cx="365760" cy="365760"/>
+          </a:xfrm>
+          <a:prstGeom prst="ellipse">
+            <a:avLst/>
+          </a:prstGeom>
+          <a:solidFill>
+            <a:srgbClr val="D9534F"/>
+          </a:solidFill>
+          <a:ln/>
+        </p:spPr>
+      </p:sp>
+      <p:sp>
+        <p:nvSpPr>
+          <p:cNvPr id="13" name="Text 11"/>
+          <p:cNvSpPr txBox="1"/>
+          <p:nvPr/>
+        </p:nvSpPr>
+        <p:spPr>
+          <a:xfrm>
+            <a:off x="1188720" y="2798064"/>
+            <a:ext cx="2377440" cy="685800"/>
+          </a:xfrm>
+          <a:prstGeom prst="rect">
+            <a:avLst/>
+          </a:prstGeom>
+          <a:noFill/>
+          <a:ln/>
+        </p:spPr>
+        <p:txBody>
+          <a:bodyPr wrap="square" lIns="0" tIns="0" rIns="0" bIns="0" rtlCol="0" anchor="ctr"/>
+          <a:lstStyle/>
+          <a:p>
+            <a:pPr indent="0" marL="0">
+              <a:buNone/>
+            </a:pPr>
+            <a:r>
+              <a:rPr lang="en-US" sz="1500" b="1" dirty="0">
+                <a:solidFill>
+                  <a:schemeClr val="tx1"/>
+                </a:solidFill>
+              </a:rPr>
+              <a:t>허가·라이선스</a:t>
+            </a:r>
+            <a:endParaRPr lang="en-US" sz="1500" dirty="0"/>
+          </a:p>
+        </p:txBody>
+      </p:sp>
+      <p:sp>
+        <p:nvSpPr>
+          <p:cNvPr id="14" name="Text 12"/>
+          <p:cNvSpPr txBox="1"/>
+          <p:nvPr/>
+        </p:nvSpPr>
+        <p:spPr>
+          <a:xfrm>
+            <a:off x="3657600" y="2798064"/>
+            <a:ext cx="4846320" cy="685800"/>
+          </a:xfrm>
+          <a:prstGeom prst="rect">
+            <a:avLst/>
+          </a:prstGeom>
+          <a:noFill/>
+          <a:ln/>
+        </p:spPr>
+        <p:txBody>
+          <a:bodyPr wrap="square" lIns="0" tIns="0" rIns="0" bIns="0" rtlCol="0" anchor="ctr"/>
+          <a:lstStyle/>
+          <a:p>
+            <a:pPr indent="0" marL="0">
+              <a:buNone/>
+            </a:pPr>
+            <a:r>
+              <a:rPr lang="en-US" sz="1300" dirty="0">
+                <a:solidFill>
+                  <a:schemeClr val="accent4"/>
+                </a:solidFill>
+              </a:rPr>
+              <a:t>결제·송금 · 투자자문 · 가상자산 · 의료</a:t>
+            </a:r>
+            <a:endParaRPr lang="en-US" sz="1300" dirty="0"/>
+          </a:p>
+        </p:txBody>
+      </p:sp>
+      <p:sp>
+        <p:nvSpPr>
+          <p:cNvPr id="15" name="card"/>
+          <p:cNvSpPr/>
+          <p:nvPr/>
+        </p:nvSpPr>
+        <p:spPr>
+          <a:xfrm>
+            <a:off x="457200" y="3602736"/>
+            <a:ext cx="8229600" cy="685800"/>
+          </a:xfrm>
+          <a:prstGeom prst="roundRect">
+            <a:avLst>
+              <a:gd name="adj" fmla="val 10667"/>
+            </a:avLst>
+          </a:prstGeom>
+          <a:solidFill>
+            <a:schemeClr val="bg2"/>
+          </a:solidFill>
+          <a:ln/>
+        </p:spPr>
+      </p:sp>
+      <p:sp>
+        <p:nvSpPr>
+          <p:cNvPr id="16" name="reg3"/>
+          <p:cNvSpPr/>
+          <p:nvPr/>
+        </p:nvSpPr>
+        <p:spPr>
+          <a:xfrm>
+            <a:off x="640080" y="3758184"/>
+            <a:ext cx="365760" cy="365760"/>
+          </a:xfrm>
+          <a:prstGeom prst="ellipse">
+            <a:avLst/>
+          </a:prstGeom>
+          <a:solidFill>
+            <a:srgbClr val="1B2B2E"/>
+          </a:solidFill>
+          <a:ln/>
+        </p:spPr>
+      </p:sp>
+      <p:sp>
+        <p:nvSpPr>
+          <p:cNvPr id="17" name="Text 15"/>
+          <p:cNvSpPr txBox="1"/>
+          <p:nvPr/>
+        </p:nvSpPr>
+        <p:spPr>
+          <a:xfrm>
+            <a:off x="1188720" y="3602736"/>
+            <a:ext cx="2377440" cy="685800"/>
+          </a:xfrm>
+          <a:prstGeom prst="rect">
+            <a:avLst/>
+          </a:prstGeom>
+          <a:noFill/>
+          <a:ln/>
+        </p:spPr>
+        <p:txBody>
+          <a:bodyPr wrap="square" lIns="0" tIns="0" rIns="0" bIns="0" rtlCol="0" anchor="ctr"/>
+          <a:lstStyle/>
+          <a:p>
+            <a:pPr indent="0" marL="0">
+              <a:buNone/>
+            </a:pPr>
+            <a:r>
+              <a:rPr lang="en-US" sz="1500" b="1" dirty="0">
+                <a:solidFill>
+                  <a:schemeClr val="tx1"/>
+                </a:solidFill>
+              </a:rPr>
+              <a:t>온라인 판매 금지·제한</a:t>
+            </a:r>
+            <a:endParaRPr lang="en-US" sz="1500" dirty="0"/>
+          </a:p>
+        </p:txBody>
+      </p:sp>
+      <p:sp>
+        <p:nvSpPr>
+          <p:cNvPr id="18" name="Text 16"/>
+          <p:cNvSpPr txBox="1"/>
+          <p:nvPr/>
+        </p:nvSpPr>
+        <p:spPr>
+          <a:xfrm>
+            <a:off x="3657600" y="3602736"/>
+            <a:ext cx="4846320" cy="685800"/>
+          </a:xfrm>
+          <a:prstGeom prst="rect">
+            <a:avLst/>
+          </a:prstGeom>
+          <a:noFill/>
+          <a:ln/>
+        </p:spPr>
+        <p:txBody>
+          <a:bodyPr wrap="square" lIns="0" tIns="0" rIns="0" bIns="0" rtlCol="0" anchor="ctr"/>
+          <a:lstStyle/>
+          <a:p>
+            <a:pPr indent="0" marL="0">
+              <a:buNone/>
+            </a:pPr>
+            <a:r>
+              <a:rPr lang="en-US" sz="1300" dirty="0">
+                <a:solidFill>
+                  <a:schemeClr val="accent4"/>
+                </a:solidFill>
+              </a:rPr>
+              <a:t>의약품 · 담배 · 주류(일부 예외) · 도수 렌즈</a:t>
+            </a:r>
+            <a:endParaRPr lang="en-US" sz="1300" dirty="0"/>
+          </a:p>
+        </p:txBody>
+      </p:sp>
+      <p:sp>
+        <p:nvSpPr>
+          <p:cNvPr id="19" name="Text 17"/>
+          <p:cNvSpPr txBox="1"/>
+          <p:nvPr/>
+        </p:nvSpPr>
+        <p:spPr>
+          <a:xfrm>
+            <a:off x="457200" y="4645152"/>
+            <a:ext cx="7680960" cy="274320"/>
+          </a:xfrm>
+          <a:prstGeom prst="rect">
+            <a:avLst/>
+          </a:prstGeom>
+          <a:noFill/>
+          <a:ln/>
+        </p:spPr>
+        <p:txBody>
+          <a:bodyPr wrap="square" lIns="0" tIns="0" rIns="0" bIns="0" rtlCol="0" anchor="t"/>
+          <a:lstStyle/>
+          <a:p>
+            <a:pPr indent="0" marL="0">
+              <a:buNone/>
+            </a:pPr>
+            <a:r>
+              <a:rPr lang="en-US" sz="1000" dirty="0">
+                <a:solidFill>
+                  <a:schemeClr val="accent4"/>
+                </a:solidFill>
+              </a:rPr>
+              <a:t>애매하면 정부24에서 업종 인허가 검색, 관계 기관·전문가에게 확인 (29장)</a:t>
+            </a:r>
+            <a:endParaRPr lang="en-US" sz="1000" dirty="0"/>
+          </a:p>
+        </p:txBody>
+      </p:sp>
+      <p:sp>
+        <p:nvSpPr>
+          <p:cNvPr id="25" name="Slide Number Placeholder 0"/>
+          <p:cNvSpPr>
+            <a:spLocks noGrp="1"/>
+          </p:cNvSpPr>
+          <p:nvPr>
+            <p:ph type="sldNum" sz="quarter" idx="4294967295"/>
+          </p:nvPr>
+        </p:nvSpPr>
+        <p:spPr>
+          <a:xfrm>
+            <a:off x="8321040" y="4754880"/>
+            <a:ext cx="457200" cy="274320"/>
+          </a:xfrm>
+          <a:prstGeom prst="rect">
+            <a:avLst/>
+          </a:prstGeom>
+          <a:extLst>
+            <a:ext uri="{C572A759-6A51-4108-AA02-DFA0A04FC94B}">
+              <ma14:wrappingTextBoxFlag xmlns:ma14="http://schemas.microsoft.com/office/mac/drawingml/2011/main" val="0"/>
+            </a:ext>
+          </a:extLst>
+        </p:spPr>
+        <p:txBody>
+          <a:bodyPr/>
+          <a:lstStyle>
+            <a:lvl1pPr>
+              <a:defRPr sz="1000">
+                <a:solidFill>
+                  <a:schemeClr val="accent4"/>
+                </a:solidFill>
+              </a:defRPr>
+            </a:lvl1pPr>
+          </a:lstStyle>
+          <a:p>
+            <a:pPr algn="r"/>
+            <a:fld id="{F7021451-1387-4CA6-816F-3879F97B5CBC}" type="slidenum">
+              <a:rPr b="0" lang="en-US"/>
+              <a:t>36</a:t>
+            </a:fld>
+            <a:endParaRPr lang="en-US"/>
+          </a:p>
+        </p:txBody>
+      </p:sp>
+    </p:spTree>
+  </p:cSld>
+  <p:clrMapOvr>
+    <a:masterClrMapping/>
+  </p:clrMapOvr>
+</p:sld>
+</file>
+
+<file path=ppt/slides/slide37.xml><?xml version="1.0" encoding="utf-8"?>
+<p:sld xmlns:a="http://schemas.openxmlformats.org/drawingml/2006/main" xmlns:r="http://schemas.openxmlformats.org/officeDocument/2006/relationships" xmlns:p="http://schemas.openxmlformats.org/presentationml/2006/main">
+  <p:cSld name="Slide 37">
+    <p:spTree>
+      <p:nvGrpSpPr>
+        <p:cNvPr id="1" name=""/>
+        <p:cNvGrpSpPr/>
+        <p:nvPr/>
+      </p:nvGrpSpPr>
+      <p:grpSpPr>
+        <a:xfrm>
+          <a:off x="0" y="0"/>
+          <a:ext cx="0" cy="0"/>
+          <a:chOff x="0" y="0"/>
+          <a:chExt cx="0" cy="0"/>
+        </a:xfrm>
+      </p:grpSpPr>
+      <p:sp>
+        <p:nvSpPr>
+          <p:cNvPr id="2" name="Text 0"/>
+          <p:cNvSpPr/>
+          <p:nvPr>
+            <p:ph idx="100" type="title" hasCustomPrompt="1"/>
+          </p:nvPr>
+        </p:nvSpPr>
+        <p:spPr>
+          <a:xfrm>
+            <a:off x="548640" y="1371600"/>
+            <a:ext cx="8046720" cy="1280160"/>
+          </a:xfrm>
+          <a:prstGeom prst="rect">
+            <a:avLst/>
+          </a:prstGeom>
+          <a:noFill/>
+          <a:ln/>
+        </p:spPr>
+        <p:txBody>
+          <a:bodyPr wrap="square" lIns="0" tIns="0" rIns="0" bIns="0" rtlCol="0" anchor="b"/>
+          <a:lstStyle/>
+          <a:p>
+            <a:pPr algn="l" indent="0" marL="0">
+              <a:buNone/>
+            </a:pPr>
+            <a:r>
+              <a:rPr lang="en-US" sz="4000" b="1" dirty="0">
+                <a:solidFill>
+                  <a:schemeClr val="bg1"/>
+                </a:solidFill>
+              </a:rPr>
               <a:t>안전하게, 자주 반복하기</a:t>
             </a:r>
             <a:endParaRPr lang="en-US" sz="4000" dirty="0"/>

--- a/slides/internet-business-101.pptx
+++ b/slides/internet-business-101.pptx
@@ -42,9 +42,14 @@
     <p:sldId id="290" r:id="rId36"/>
     <p:sldId id="291" r:id="rId37"/>
     <p:sldId id="292" r:id="rId38"/>
+    <p:sldId id="293" r:id="rId39"/>
+    <p:sldId id="294" r:id="rId40"/>
+    <p:sldId id="295" r:id="rId41"/>
+    <p:sldId id="296" r:id="rId42"/>
+    <p:sldId id="297" r:id="rId43"/>
   </p:sldIdLst>
   <p:notesMasterIdLst>
-    <p:notesMasterId r:id="rId39"/>
+    <p:notesMasterId r:id="rId44"/>
   </p:notesMasterIdLst>
   <p:sldSz cx="9144000" cy="5143500"/>
   <p:notesSz cx="5143500" cy="9144000"/>
@@ -143,13 +148,13 @@
   <p:extLst>
     <p:ext uri="{521415D9-36F7-43E2-AB2F-B90AF26B5E84}">
       <p14:sectionLst xmlns:p14="http://schemas.microsoft.com/office/powerpoint/2010/main">
-        <p14:section name="시작" id="{718abb55-2b60-5903-dabc-f92c232a3ef0}">
+        <p14:section name="시작" id="{10e2940f-c33a-d474-aa37-fa31966246c9}">
           <p14:sldIdLst>
             <p14:sldId id="256"/>
             <p14:sldId id="257"/>
           </p14:sldIdLst>
         </p14:section>
-        <p14:section name="큰 그림" id="{b1918885-5800-00e5-b090-3093ad1b94d9}">
+        <p14:section name="큰 그림" id="{d07508c2-be9a-d2d1-f51a-7dccbe0421ce}">
           <p14:sldIdLst>
             <p14:sldId id="258"/>
             <p14:sldId id="259"/>
@@ -158,13 +163,13 @@
             <p14:sldId id="262"/>
           </p14:sldIdLst>
         </p14:section>
-        <p14:section name="만들기" id="{838c3b18-ad49-08a3-d5bc-ab5344cb1a1e}">
+        <p14:section name="만들기" id="{f7fc37d8-9336-246f-5dc1-b8165271ebd5}">
           <p14:sldIdLst>
             <p14:sldId id="263"/>
             <p14:sldId id="264"/>
           </p14:sldIdLst>
         </p14:section>
-        <p14:section name="운영하기" id="{c0bcc65a-2691-dd52-5d6e-7c47c9412fbb}">
+        <p14:section name="운영하기" id="{b92e6db4-1192-d4f6-f3cd-f30ad2a7ee03}">
           <p14:sldIdLst>
             <p14:sldId id="265"/>
             <p14:sldId id="266"/>
@@ -178,18 +183,18 @@
             <p14:sldId id="274"/>
           </p14:sldIdLst>
         </p14:section>
-        <p14:section name="키우기" id="{890df497-0bd3-61b4-8889-25dd9b6edc47}">
+        <p14:section name="키우기" id="{739c3264-c882-085d-bfe1-dc5a738132b0}">
           <p14:sldIdLst>
             <p14:sldId id="275"/>
             <p14:sldId id="276"/>
           </p14:sldIdLst>
         </p14:section>
-        <p14:section name="실전" id="{72f7af09-f111-c1ea-02b8-98601458f034}">
+        <p14:section name="실전" id="{4906123d-c906-4cb5-7674-cdf334ca36d3}">
           <p14:sldIdLst>
             <p14:sldId id="277"/>
           </p14:sldIdLst>
         </p14:section>
-        <p14:section name="여러 가지 사이트 사업" id="{b41d8c00-72d6-b21d-7f92-56a159d3a210}">
+        <p14:section name="여러 가지 사이트 사업" id="{ffa65975-0998-bb64-9284-d47561e1ea04}">
           <p14:sldIdLst>
             <p14:sldId id="278"/>
             <p14:sldId id="279"/>
@@ -200,7 +205,7 @@
             <p14:sldId id="284"/>
           </p14:sldIdLst>
         </p14:section>
-        <p14:section name="더 넓은 분류" id="{e8f1588e-68d9-f72e-d53d-d652945b55e1}">
+        <p14:section name="더 넓은 분류" id="{eea227fe-7526-e5dc-dd1d-e6fae17eab13}">
           <p14:sldIdLst>
             <p14:sldId id="285"/>
             <p14:sldId id="286"/>
@@ -209,7 +214,16 @@
             <p14:sldId id="289"/>
             <p14:sldId id="290"/>
             <p14:sldId id="291"/>
+          </p14:sldIdLst>
+        </p14:section>
+        <p14:section name="문의·광고 받기" id="{2f74dd51-0644-9677-747c-d49b0f225536}">
+          <p14:sldIdLst>
             <p14:sldId id="292"/>
+            <p14:sldId id="293"/>
+            <p14:sldId id="294"/>
+            <p14:sldId id="295"/>
+            <p14:sldId id="296"/>
+            <p14:sldId id="297"/>
           </p14:sldIdLst>
         </p14:section>
       </p14:sectionLst>
@@ -4242,6 +4256,182 @@
 </p:notes>
 </file>
 
+<file path=ppt/notesSlides/notesSlide38.xml><?xml version="1.0" encoding="utf-8"?>
+<p:notes xmlns:a="http://schemas.openxmlformats.org/drawingml/2006/main" xmlns:r="http://schemas.openxmlformats.org/officeDocument/2006/relationships" xmlns:p="http://schemas.openxmlformats.org/presentationml/2006/main">
+  <p:cSld>
+    <p:spTree>
+      <p:nvGrpSpPr>
+        <p:cNvPr id="1" name=""/>
+        <p:cNvGrpSpPr/>
+        <p:nvPr/>
+      </p:nvGrpSpPr>
+      <p:grpSpPr>
+        <a:xfrm>
+          <a:off x="0" y="0"/>
+          <a:ext cx="0" cy="0"/>
+          <a:chOff x="0" y="0"/>
+          <a:chExt cx="0" cy="0"/>
+        </a:xfrm>
+      </p:grpSpPr>
+      <p:sp>
+        <p:nvSpPr>
+          <p:cNvPr id="2" name="Slide Image Placeholder 1"/>
+          <p:cNvSpPr>
+            <a:spLocks noGrp="1" noRot="1" noChangeAspect="1"/>
+          </p:cNvSpPr>
+          <p:nvPr>
+            <p:ph type="sldImg"/>
+          </p:nvPr>
+        </p:nvSpPr>
+        <p:spPr/>
+      </p:sp>
+      <p:sp>
+        <p:nvSpPr>
+          <p:cNvPr id="3" name="Notes Placeholder 2"/>
+          <p:cNvSpPr>
+            <a:spLocks noGrp="1"/>
+          </p:cNvSpPr>
+          <p:nvPr>
+            <p:ph type="body" idx="1"/>
+          </p:nvPr>
+        </p:nvSpPr>
+        <p:spPr/>
+        <p:txBody>
+          <a:bodyPr/>
+          <a:lstStyle/>
+          <a:p>
+            <a:r>
+              <a:rPr lang="en-US" dirty="0"/>
+              <a:t/>
+            </a:r>
+            <a:endParaRPr lang="en-US" dirty="0"/>
+          </a:p>
+        </p:txBody>
+      </p:sp>
+      <p:sp>
+        <p:nvSpPr>
+          <p:cNvPr id="4" name="Slide Number Placeholder 3"/>
+          <p:cNvSpPr>
+            <a:spLocks noGrp="1"/>
+          </p:cNvSpPr>
+          <p:nvPr>
+            <p:ph type="sldNum" sz="quarter" idx="10"/>
+          </p:nvPr>
+        </p:nvSpPr>
+        <p:spPr/>
+        <p:txBody>
+          <a:bodyPr/>
+          <a:lstStyle/>
+          <a:p>
+            <a:fld id="{F7021451-1387-4CA6-816F-3879F97B5CBC}" type="slidenum">
+              <a:rPr lang="en-US"/>
+              <a:t>38</a:t>
+            </a:fld>
+            <a:endParaRPr lang="en-US"/>
+          </a:p>
+        </p:txBody>
+      </p:sp>
+    </p:spTree>
+    <p:extLst>
+      <p:ext uri="{BB962C8B-B14F-4D97-AF65-F5344CB8AC3E}">
+        <p14:creationId xmlns:p14="http://schemas.microsoft.com/office/powerpoint/2010/main" val="1024086991"/>
+      </p:ext>
+    </p:extLst>
+  </p:cSld>
+  <p:clrMapOvr>
+    <a:masterClrMapping/>
+  </p:clrMapOvr>
+</p:notes>
+</file>
+
+<file path=ppt/notesSlides/notesSlide39.xml><?xml version="1.0" encoding="utf-8"?>
+<p:notes xmlns:a="http://schemas.openxmlformats.org/drawingml/2006/main" xmlns:r="http://schemas.openxmlformats.org/officeDocument/2006/relationships" xmlns:p="http://schemas.openxmlformats.org/presentationml/2006/main">
+  <p:cSld>
+    <p:spTree>
+      <p:nvGrpSpPr>
+        <p:cNvPr id="1" name=""/>
+        <p:cNvGrpSpPr/>
+        <p:nvPr/>
+      </p:nvGrpSpPr>
+      <p:grpSpPr>
+        <a:xfrm>
+          <a:off x="0" y="0"/>
+          <a:ext cx="0" cy="0"/>
+          <a:chOff x="0" y="0"/>
+          <a:chExt cx="0" cy="0"/>
+        </a:xfrm>
+      </p:grpSpPr>
+      <p:sp>
+        <p:nvSpPr>
+          <p:cNvPr id="2" name="Slide Image Placeholder 1"/>
+          <p:cNvSpPr>
+            <a:spLocks noGrp="1" noRot="1" noChangeAspect="1"/>
+          </p:cNvSpPr>
+          <p:nvPr>
+            <p:ph type="sldImg"/>
+          </p:nvPr>
+        </p:nvSpPr>
+        <p:spPr/>
+      </p:sp>
+      <p:sp>
+        <p:nvSpPr>
+          <p:cNvPr id="3" name="Notes Placeholder 2"/>
+          <p:cNvSpPr>
+            <a:spLocks noGrp="1"/>
+          </p:cNvSpPr>
+          <p:nvPr>
+            <p:ph type="body" idx="1"/>
+          </p:nvPr>
+        </p:nvSpPr>
+        <p:spPr/>
+        <p:txBody>
+          <a:bodyPr/>
+          <a:lstStyle/>
+          <a:p>
+            <a:r>
+              <a:rPr lang="en-US" dirty="0"/>
+              <a:t/>
+            </a:r>
+            <a:endParaRPr lang="en-US" dirty="0"/>
+          </a:p>
+        </p:txBody>
+      </p:sp>
+      <p:sp>
+        <p:nvSpPr>
+          <p:cNvPr id="4" name="Slide Number Placeholder 3"/>
+          <p:cNvSpPr>
+            <a:spLocks noGrp="1"/>
+          </p:cNvSpPr>
+          <p:nvPr>
+            <p:ph type="sldNum" sz="quarter" idx="10"/>
+          </p:nvPr>
+        </p:nvSpPr>
+        <p:spPr/>
+        <p:txBody>
+          <a:bodyPr/>
+          <a:lstStyle/>
+          <a:p>
+            <a:fld id="{F7021451-1387-4CA6-816F-3879F97B5CBC}" type="slidenum">
+              <a:rPr lang="en-US"/>
+              <a:t>39</a:t>
+            </a:fld>
+            <a:endParaRPr lang="en-US"/>
+          </a:p>
+        </p:txBody>
+      </p:sp>
+    </p:spTree>
+    <p:extLst>
+      <p:ext uri="{BB962C8B-B14F-4D97-AF65-F5344CB8AC3E}">
+        <p14:creationId xmlns:p14="http://schemas.microsoft.com/office/powerpoint/2010/main" val="1024086991"/>
+      </p:ext>
+    </p:extLst>
+  </p:cSld>
+  <p:clrMapOvr>
+    <a:masterClrMapping/>
+  </p:clrMapOvr>
+</p:notes>
+</file>
+
 <file path=ppt/notesSlides/notesSlide4.xml><?xml version="1.0" encoding="utf-8"?>
 <p:notes xmlns:a="http://schemas.openxmlformats.org/drawingml/2006/main" xmlns:r="http://schemas.openxmlformats.org/officeDocument/2006/relationships" xmlns:p="http://schemas.openxmlformats.org/presentationml/2006/main">
   <p:cSld>
@@ -4312,6 +4502,270 @@
             <a:fld id="{F7021451-1387-4CA6-816F-3879F97B5CBC}" type="slidenum">
               <a:rPr lang="en-US"/>
               <a:t>4</a:t>
+            </a:fld>
+            <a:endParaRPr lang="en-US"/>
+          </a:p>
+        </p:txBody>
+      </p:sp>
+    </p:spTree>
+    <p:extLst>
+      <p:ext uri="{BB962C8B-B14F-4D97-AF65-F5344CB8AC3E}">
+        <p14:creationId xmlns:p14="http://schemas.microsoft.com/office/powerpoint/2010/main" val="1024086991"/>
+      </p:ext>
+    </p:extLst>
+  </p:cSld>
+  <p:clrMapOvr>
+    <a:masterClrMapping/>
+  </p:clrMapOvr>
+</p:notes>
+</file>
+
+<file path=ppt/notesSlides/notesSlide40.xml><?xml version="1.0" encoding="utf-8"?>
+<p:notes xmlns:a="http://schemas.openxmlformats.org/drawingml/2006/main" xmlns:r="http://schemas.openxmlformats.org/officeDocument/2006/relationships" xmlns:p="http://schemas.openxmlformats.org/presentationml/2006/main">
+  <p:cSld>
+    <p:spTree>
+      <p:nvGrpSpPr>
+        <p:cNvPr id="1" name=""/>
+        <p:cNvGrpSpPr/>
+        <p:nvPr/>
+      </p:nvGrpSpPr>
+      <p:grpSpPr>
+        <a:xfrm>
+          <a:off x="0" y="0"/>
+          <a:ext cx="0" cy="0"/>
+          <a:chOff x="0" y="0"/>
+          <a:chExt cx="0" cy="0"/>
+        </a:xfrm>
+      </p:grpSpPr>
+      <p:sp>
+        <p:nvSpPr>
+          <p:cNvPr id="2" name="Slide Image Placeholder 1"/>
+          <p:cNvSpPr>
+            <a:spLocks noGrp="1" noRot="1" noChangeAspect="1"/>
+          </p:cNvSpPr>
+          <p:nvPr>
+            <p:ph type="sldImg"/>
+          </p:nvPr>
+        </p:nvSpPr>
+        <p:spPr/>
+      </p:sp>
+      <p:sp>
+        <p:nvSpPr>
+          <p:cNvPr id="3" name="Notes Placeholder 2"/>
+          <p:cNvSpPr>
+            <a:spLocks noGrp="1"/>
+          </p:cNvSpPr>
+          <p:nvPr>
+            <p:ph type="body" idx="1"/>
+          </p:nvPr>
+        </p:nvSpPr>
+        <p:spPr/>
+        <p:txBody>
+          <a:bodyPr/>
+          <a:lstStyle/>
+          <a:p>
+            <a:r>
+              <a:rPr lang="en-US" dirty="0"/>
+              <a:t/>
+            </a:r>
+            <a:endParaRPr lang="en-US" dirty="0"/>
+          </a:p>
+        </p:txBody>
+      </p:sp>
+      <p:sp>
+        <p:nvSpPr>
+          <p:cNvPr id="4" name="Slide Number Placeholder 3"/>
+          <p:cNvSpPr>
+            <a:spLocks noGrp="1"/>
+          </p:cNvSpPr>
+          <p:nvPr>
+            <p:ph type="sldNum" sz="quarter" idx="10"/>
+          </p:nvPr>
+        </p:nvSpPr>
+        <p:spPr/>
+        <p:txBody>
+          <a:bodyPr/>
+          <a:lstStyle/>
+          <a:p>
+            <a:fld id="{F7021451-1387-4CA6-816F-3879F97B5CBC}" type="slidenum">
+              <a:rPr lang="en-US"/>
+              <a:t>40</a:t>
+            </a:fld>
+            <a:endParaRPr lang="en-US"/>
+          </a:p>
+        </p:txBody>
+      </p:sp>
+    </p:spTree>
+    <p:extLst>
+      <p:ext uri="{BB962C8B-B14F-4D97-AF65-F5344CB8AC3E}">
+        <p14:creationId xmlns:p14="http://schemas.microsoft.com/office/powerpoint/2010/main" val="1024086991"/>
+      </p:ext>
+    </p:extLst>
+  </p:cSld>
+  <p:clrMapOvr>
+    <a:masterClrMapping/>
+  </p:clrMapOvr>
+</p:notes>
+</file>
+
+<file path=ppt/notesSlides/notesSlide41.xml><?xml version="1.0" encoding="utf-8"?>
+<p:notes xmlns:a="http://schemas.openxmlformats.org/drawingml/2006/main" xmlns:r="http://schemas.openxmlformats.org/officeDocument/2006/relationships" xmlns:p="http://schemas.openxmlformats.org/presentationml/2006/main">
+  <p:cSld>
+    <p:spTree>
+      <p:nvGrpSpPr>
+        <p:cNvPr id="1" name=""/>
+        <p:cNvGrpSpPr/>
+        <p:nvPr/>
+      </p:nvGrpSpPr>
+      <p:grpSpPr>
+        <a:xfrm>
+          <a:off x="0" y="0"/>
+          <a:ext cx="0" cy="0"/>
+          <a:chOff x="0" y="0"/>
+          <a:chExt cx="0" cy="0"/>
+        </a:xfrm>
+      </p:grpSpPr>
+      <p:sp>
+        <p:nvSpPr>
+          <p:cNvPr id="2" name="Slide Image Placeholder 1"/>
+          <p:cNvSpPr>
+            <a:spLocks noGrp="1" noRot="1" noChangeAspect="1"/>
+          </p:cNvSpPr>
+          <p:nvPr>
+            <p:ph type="sldImg"/>
+          </p:nvPr>
+        </p:nvSpPr>
+        <p:spPr/>
+      </p:sp>
+      <p:sp>
+        <p:nvSpPr>
+          <p:cNvPr id="3" name="Notes Placeholder 2"/>
+          <p:cNvSpPr>
+            <a:spLocks noGrp="1"/>
+          </p:cNvSpPr>
+          <p:nvPr>
+            <p:ph type="body" idx="1"/>
+          </p:nvPr>
+        </p:nvSpPr>
+        <p:spPr/>
+        <p:txBody>
+          <a:bodyPr/>
+          <a:lstStyle/>
+          <a:p>
+            <a:r>
+              <a:rPr lang="en-US" dirty="0"/>
+              <a:t/>
+            </a:r>
+            <a:endParaRPr lang="en-US" dirty="0"/>
+          </a:p>
+        </p:txBody>
+      </p:sp>
+      <p:sp>
+        <p:nvSpPr>
+          <p:cNvPr id="4" name="Slide Number Placeholder 3"/>
+          <p:cNvSpPr>
+            <a:spLocks noGrp="1"/>
+          </p:cNvSpPr>
+          <p:nvPr>
+            <p:ph type="sldNum" sz="quarter" idx="10"/>
+          </p:nvPr>
+        </p:nvSpPr>
+        <p:spPr/>
+        <p:txBody>
+          <a:bodyPr/>
+          <a:lstStyle/>
+          <a:p>
+            <a:fld id="{F7021451-1387-4CA6-816F-3879F97B5CBC}" type="slidenum">
+              <a:rPr lang="en-US"/>
+              <a:t>41</a:t>
+            </a:fld>
+            <a:endParaRPr lang="en-US"/>
+          </a:p>
+        </p:txBody>
+      </p:sp>
+    </p:spTree>
+    <p:extLst>
+      <p:ext uri="{BB962C8B-B14F-4D97-AF65-F5344CB8AC3E}">
+        <p14:creationId xmlns:p14="http://schemas.microsoft.com/office/powerpoint/2010/main" val="1024086991"/>
+      </p:ext>
+    </p:extLst>
+  </p:cSld>
+  <p:clrMapOvr>
+    <a:masterClrMapping/>
+  </p:clrMapOvr>
+</p:notes>
+</file>
+
+<file path=ppt/notesSlides/notesSlide42.xml><?xml version="1.0" encoding="utf-8"?>
+<p:notes xmlns:a="http://schemas.openxmlformats.org/drawingml/2006/main" xmlns:r="http://schemas.openxmlformats.org/officeDocument/2006/relationships" xmlns:p="http://schemas.openxmlformats.org/presentationml/2006/main">
+  <p:cSld>
+    <p:spTree>
+      <p:nvGrpSpPr>
+        <p:cNvPr id="1" name=""/>
+        <p:cNvGrpSpPr/>
+        <p:nvPr/>
+      </p:nvGrpSpPr>
+      <p:grpSpPr>
+        <a:xfrm>
+          <a:off x="0" y="0"/>
+          <a:ext cx="0" cy="0"/>
+          <a:chOff x="0" y="0"/>
+          <a:chExt cx="0" cy="0"/>
+        </a:xfrm>
+      </p:grpSpPr>
+      <p:sp>
+        <p:nvSpPr>
+          <p:cNvPr id="2" name="Slide Image Placeholder 1"/>
+          <p:cNvSpPr>
+            <a:spLocks noGrp="1" noRot="1" noChangeAspect="1"/>
+          </p:cNvSpPr>
+          <p:nvPr>
+            <p:ph type="sldImg"/>
+          </p:nvPr>
+        </p:nvSpPr>
+        <p:spPr/>
+      </p:sp>
+      <p:sp>
+        <p:nvSpPr>
+          <p:cNvPr id="3" name="Notes Placeholder 2"/>
+          <p:cNvSpPr>
+            <a:spLocks noGrp="1"/>
+          </p:cNvSpPr>
+          <p:nvPr>
+            <p:ph type="body" idx="1"/>
+          </p:nvPr>
+        </p:nvSpPr>
+        <p:spPr/>
+        <p:txBody>
+          <a:bodyPr/>
+          <a:lstStyle/>
+          <a:p>
+            <a:r>
+              <a:rPr lang="en-US" dirty="0"/>
+              <a:t/>
+            </a:r>
+            <a:endParaRPr lang="en-US" dirty="0"/>
+          </a:p>
+        </p:txBody>
+      </p:sp>
+      <p:sp>
+        <p:nvSpPr>
+          <p:cNvPr id="4" name="Slide Number Placeholder 3"/>
+          <p:cNvSpPr>
+            <a:spLocks noGrp="1"/>
+          </p:cNvSpPr>
+          <p:nvPr>
+            <p:ph type="sldNum" sz="quarter" idx="10"/>
+          </p:nvPr>
+        </p:nvSpPr>
+        <p:spPr/>
+        <p:txBody>
+          <a:bodyPr/>
+          <a:lstStyle/>
+          <a:p>
+            <a:fld id="{F7021451-1387-4CA6-816F-3879F97B5CBC}" type="slidenum">
+              <a:rPr lang="en-US"/>
+              <a:t>42</a:t>
             </a:fld>
             <a:endParaRPr lang="en-US"/>
           </a:p>
@@ -28202,7 +28656,7 @@
                   <a:schemeClr val="bg1"/>
                 </a:solidFill>
               </a:rPr>
-              <a:t>안전하게, 자주 반복하기</a:t>
+              <a:t>문의·광고 받기</a:t>
             </a:r>
             <a:endParaRPr lang="en-US" sz="4000" dirty="0"/>
           </a:p>
@@ -28240,23 +28694,1410 @@
                   <a:schemeClr val="bg2"/>
                 </a:solidFill>
               </a:rPr>
-              <a:t>기획 → 백업 → 연습용 사이트에서 수정 → 확인 → 배포 → 감시 → 숫자 보기 → 다시 기획</a:t>
+              <a:t>문의 창구 · 도메인 이메일 · 스팸함 피하기 · 광고 메일 규칙 · 광고·제휴 문의 — 30–31장</a:t>
             </a:r>
             <a:endParaRPr lang="en-US" sz="1800" dirty="0"/>
           </a:p>
-          <a:p>
-            <a:pPr algn="l" indent="0" marL="0">
-              <a:buNone/>
-            </a:pPr>
-            <a:r>
-              <a:rPr lang="en-US" sz="1800" dirty="0">
+        </p:txBody>
+      </p:sp>
+    </p:spTree>
+  </p:cSld>
+  <p:clrMapOvr>
+    <a:masterClrMapping/>
+  </p:clrMapOvr>
+</p:sld>
+</file>
+
+<file path=ppt/slides/slide38.xml><?xml version="1.0" encoding="utf-8"?>
+<p:sld xmlns:a="http://schemas.openxmlformats.org/drawingml/2006/main" xmlns:r="http://schemas.openxmlformats.org/officeDocument/2006/relationships" xmlns:p="http://schemas.openxmlformats.org/presentationml/2006/main">
+  <p:cSld name="Slide 38">
+    <p:spTree>
+      <p:nvGrpSpPr>
+        <p:cNvPr id="1" name=""/>
+        <p:cNvGrpSpPr/>
+        <p:nvPr/>
+      </p:nvGrpSpPr>
+      <p:grpSpPr>
+        <a:xfrm>
+          <a:off x="0" y="0"/>
+          <a:ext cx="0" cy="0"/>
+          <a:chOff x="0" y="0"/>
+          <a:chExt cx="0" cy="0"/>
+        </a:xfrm>
+      </p:grpSpPr>
+      <p:sp>
+        <p:nvSpPr>
+          <p:cNvPr id="2" name="Text 0"/>
+          <p:cNvSpPr/>
+          <p:nvPr>
+            <p:ph idx="100" type="title" hasCustomPrompt="1"/>
+          </p:nvPr>
+        </p:nvSpPr>
+        <p:spPr>
+          <a:xfrm>
+            <a:off x="457200" y="274320"/>
+            <a:ext cx="8229600" cy="685800"/>
+          </a:xfrm>
+          <a:prstGeom prst="rect">
+            <a:avLst/>
+          </a:prstGeom>
+          <a:noFill/>
+          <a:ln/>
+        </p:spPr>
+        <p:txBody>
+          <a:bodyPr wrap="square" lIns="0" tIns="0" rIns="0" bIns="0" rtlCol="0" anchor="ctr"/>
+          <a:lstStyle/>
+          <a:p>
+            <a:pPr indent="0" marL="0">
+              <a:buNone/>
+            </a:pPr>
+            <a:r>
+              <a:rPr lang="en-US" sz="2800" b="1" dirty="0">
+                <a:solidFill>
+                  <a:schemeClr val="tx2"/>
+                </a:solidFill>
+              </a:rPr>
+              <a:t>시작은 도메인 이메일 1개 + 문의 폼 1개</a:t>
+            </a:r>
+            <a:endParaRPr lang="en-US" sz="2800" dirty="0"/>
+          </a:p>
+        </p:txBody>
+      </p:sp>
+      <p:sp>
+        <p:nvSpPr>
+          <p:cNvPr id="3" name="Text 1"/>
+          <p:cNvSpPr txBox="1"/>
+          <p:nvPr/>
+        </p:nvSpPr>
+        <p:spPr>
+          <a:xfrm>
+            <a:off x="457200" y="1188720"/>
+            <a:ext cx="3840480" cy="365760"/>
+          </a:xfrm>
+          <a:prstGeom prst="rect">
+            <a:avLst/>
+          </a:prstGeom>
+          <a:noFill/>
+          <a:ln/>
+        </p:spPr>
+        <p:txBody>
+          <a:bodyPr wrap="square" lIns="0" tIns="0" rIns="0" bIns="0" rtlCol="0" anchor="t"/>
+          <a:lstStyle/>
+          <a:p>
+            <a:pPr indent="0" marL="0">
+              <a:buNone/>
+            </a:pPr>
+            <a:r>
+              <a:rPr lang="en-US" sz="1600" b="1" dirty="0">
+                <a:solidFill>
+                  <a:schemeClr val="accent2"/>
+                </a:solidFill>
+              </a:rPr>
+              <a:t>문의 창구</a:t>
+            </a:r>
+            <a:endParaRPr lang="en-US" sz="1600" dirty="0"/>
+          </a:p>
+        </p:txBody>
+      </p:sp>
+      <p:sp>
+        <p:nvSpPr>
+          <p:cNvPr id="4" name="Text 2"/>
+          <p:cNvSpPr txBox="1"/>
+          <p:nvPr/>
+        </p:nvSpPr>
+        <p:spPr>
+          <a:xfrm>
+            <a:off x="457200" y="1645920"/>
+            <a:ext cx="3931920" cy="2651760"/>
+          </a:xfrm>
+          <a:prstGeom prst="rect">
+            <a:avLst/>
+          </a:prstGeom>
+          <a:noFill/>
+          <a:ln/>
+        </p:spPr>
+        <p:txBody>
+          <a:bodyPr wrap="square" lIns="0" tIns="0" rIns="0" bIns="0" rtlCol="0" anchor="t"/>
+          <a:lstStyle/>
+          <a:p>
+            <a:pPr marL="342900" indent="-342900">
+              <a:spcAft>
+                <a:spcPts val="800"/>
+              </a:spcAft>
+              <a:buSzPct val="100000"/>
+              <a:buChar char="•"/>
+            </a:pPr>
+            <a:r>
+              <a:rPr lang="en-US" sz="1400" dirty="0">
+                <a:solidFill>
+                  <a:schemeClr val="tx1"/>
+                </a:solidFill>
+              </a:rPr>
+              <a:t>이메일 — 모든 사업의 기본</a:t>
+            </a:r>
+            <a:endParaRPr lang="en-US" sz="1400" dirty="0"/>
+          </a:p>
+          <a:p>
+            <a:pPr marL="342900" indent="-342900">
+              <a:spcAft>
+                <a:spcPts val="800"/>
+              </a:spcAft>
+              <a:buSzPct val="100000"/>
+              <a:buChar char="•"/>
+            </a:pPr>
+            <a:r>
+              <a:rPr lang="en-US" sz="1400" dirty="0">
+                <a:solidFill>
+                  <a:schemeClr val="tx1"/>
+                </a:solidFill>
+              </a:rPr>
+              <a:t>문의 폼 — 필요한 정보만, 스팸 막기 쉬움</a:t>
+            </a:r>
+            <a:endParaRPr lang="en-US" sz="1400" dirty="0"/>
+          </a:p>
+          <a:p>
+            <a:pPr marL="342900" indent="-342900">
+              <a:spcAft>
+                <a:spcPts val="800"/>
+              </a:spcAft>
+              <a:buSzPct val="100000"/>
+              <a:buChar char="•"/>
+            </a:pPr>
+            <a:r>
+              <a:rPr lang="en-US" sz="1400" dirty="0">
+                <a:solidFill>
+                  <a:schemeClr val="tx1"/>
+                </a:solidFill>
+              </a:rPr>
+              <a:t>1:1 게시판 · 카카오톡 채널 · 채팅</a:t>
+            </a:r>
+            <a:endParaRPr lang="en-US" sz="1400" dirty="0"/>
+          </a:p>
+          <a:p>
+            <a:pPr marL="342900" indent="-342900">
+              <a:spcAft>
+                <a:spcPts val="800"/>
+              </a:spcAft>
+              <a:buSzPct val="100000"/>
+              <a:buChar char="•"/>
+            </a:pPr>
+            <a:r>
+              <a:rPr lang="en-US" sz="1400" dirty="0">
+                <a:solidFill>
+                  <a:schemeClr val="tx1"/>
+                </a:solidFill>
+              </a:rPr>
+              <a:t>앱 안 문의 · 마켓 문의 기능</a:t>
+            </a:r>
+            <a:endParaRPr lang="en-US" sz="1400" dirty="0"/>
+          </a:p>
+          <a:p>
+            <a:pPr marL="342900" indent="-342900">
+              <a:spcAft>
+                <a:spcPts val="800"/>
+              </a:spcAft>
+              <a:buSzPct val="100000"/>
+              <a:buChar char="•"/>
+            </a:pPr>
+            <a:r>
+              <a:rPr lang="en-US" sz="1400" dirty="0">
+                <a:solidFill>
+                  <a:schemeClr val="tx1"/>
+                </a:solidFill>
+              </a:rPr>
+              <a:t>창구가 많을수록 놓치는 문의도 늘어남</a:t>
+            </a:r>
+            <a:endParaRPr lang="en-US" sz="1400" dirty="0"/>
+          </a:p>
+        </p:txBody>
+      </p:sp>
+      <p:sp>
+        <p:nvSpPr>
+          <p:cNvPr id="5" name="card"/>
+          <p:cNvSpPr/>
+          <p:nvPr/>
+        </p:nvSpPr>
+        <p:spPr>
+          <a:xfrm>
+            <a:off x="4572000" y="1188720"/>
+            <a:ext cx="4114800" cy="3200400"/>
+          </a:xfrm>
+          <a:prstGeom prst="roundRect">
+            <a:avLst>
+              <a:gd name="adj" fmla="val 2286"/>
+            </a:avLst>
+          </a:prstGeom>
+          <a:solidFill>
+            <a:schemeClr val="bg2"/>
+          </a:solidFill>
+          <a:ln/>
+        </p:spPr>
+      </p:sp>
+      <p:sp>
+        <p:nvSpPr>
+          <p:cNvPr id="6" name="Text 4"/>
+          <p:cNvSpPr txBox="1"/>
+          <p:nvPr/>
+        </p:nvSpPr>
+        <p:spPr>
+          <a:xfrm>
+            <a:off x="4800600" y="1325880"/>
+            <a:ext cx="3749040" cy="365760"/>
+          </a:xfrm>
+          <a:prstGeom prst="rect">
+            <a:avLst/>
+          </a:prstGeom>
+          <a:noFill/>
+          <a:ln/>
+        </p:spPr>
+        <p:txBody>
+          <a:bodyPr wrap="square" lIns="0" tIns="0" rIns="0" bIns="0" rtlCol="0" anchor="t"/>
+          <a:lstStyle/>
+          <a:p>
+            <a:pPr indent="0" marL="0">
+              <a:buNone/>
+            </a:pPr>
+            <a:r>
+              <a:rPr lang="en-US" sz="1400" b="1" dirty="0">
+                <a:solidFill>
+                  <a:schemeClr val="tx2"/>
+                </a:solidFill>
+              </a:rPr>
+              <a:t>용도별 주소 (한 메일함으로 모으기)</a:t>
+            </a:r>
+            <a:endParaRPr lang="en-US" sz="1400" dirty="0"/>
+          </a:p>
+        </p:txBody>
+      </p:sp>
+      <p:sp>
+        <p:nvSpPr>
+          <p:cNvPr id="7" name="Text 5"/>
+          <p:cNvSpPr txBox="1"/>
+          <p:nvPr/>
+        </p:nvSpPr>
+        <p:spPr>
+          <a:xfrm>
+            <a:off x="4800600" y="1783080"/>
+            <a:ext cx="1280160" cy="411480"/>
+          </a:xfrm>
+          <a:prstGeom prst="rect">
+            <a:avLst/>
+          </a:prstGeom>
+          <a:noFill/>
+          <a:ln/>
+        </p:spPr>
+        <p:txBody>
+          <a:bodyPr wrap="square" lIns="0" tIns="0" rIns="0" bIns="0" rtlCol="0" anchor="ctr"/>
+          <a:lstStyle/>
+          <a:p>
+            <a:pPr indent="0" marL="0">
+              <a:buNone/>
+            </a:pPr>
+            <a:r>
+              <a:rPr lang="en-US" sz="1400" b="1" dirty="0">
+                <a:solidFill>
+                  <a:schemeClr val="accent2"/>
+                </a:solidFill>
+                <a:latin typeface="Courier New" pitchFamily="34" charset="0"/>
+                <a:ea typeface="Courier New" pitchFamily="34" charset="-122"/>
+                <a:cs typeface="Courier New" pitchFamily="34" charset="-120"/>
+              </a:rPr>
+              <a:t>help@</a:t>
+            </a:r>
+            <a:endParaRPr lang="en-US" sz="1400" dirty="0"/>
+          </a:p>
+        </p:txBody>
+      </p:sp>
+      <p:sp>
+        <p:nvSpPr>
+          <p:cNvPr id="8" name="Text 6"/>
+          <p:cNvSpPr txBox="1"/>
+          <p:nvPr/>
+        </p:nvSpPr>
+        <p:spPr>
+          <a:xfrm>
+            <a:off x="6126480" y="1783080"/>
+            <a:ext cx="2377440" cy="411480"/>
+          </a:xfrm>
+          <a:prstGeom prst="rect">
+            <a:avLst/>
+          </a:prstGeom>
+          <a:noFill/>
+          <a:ln/>
+        </p:spPr>
+        <p:txBody>
+          <a:bodyPr wrap="square" lIns="0" tIns="0" rIns="0" bIns="0" rtlCol="0" anchor="ctr"/>
+          <a:lstStyle/>
+          <a:p>
+            <a:pPr indent="0" marL="0">
+              <a:buNone/>
+            </a:pPr>
+            <a:r>
+              <a:rPr lang="en-US" sz="1400" dirty="0">
+                <a:solidFill>
+                  <a:schemeClr val="tx1"/>
+                </a:solidFill>
+              </a:rPr>
+              <a:t>일반 문의</a:t>
+            </a:r>
+            <a:endParaRPr lang="en-US" sz="1400" dirty="0"/>
+          </a:p>
+        </p:txBody>
+      </p:sp>
+      <p:sp>
+        <p:nvSpPr>
+          <p:cNvPr id="9" name="Text 7"/>
+          <p:cNvSpPr txBox="1"/>
+          <p:nvPr/>
+        </p:nvSpPr>
+        <p:spPr>
+          <a:xfrm>
+            <a:off x="4800600" y="2286000"/>
+            <a:ext cx="1280160" cy="411480"/>
+          </a:xfrm>
+          <a:prstGeom prst="rect">
+            <a:avLst/>
+          </a:prstGeom>
+          <a:noFill/>
+          <a:ln/>
+        </p:spPr>
+        <p:txBody>
+          <a:bodyPr wrap="square" lIns="0" tIns="0" rIns="0" bIns="0" rtlCol="0" anchor="ctr"/>
+          <a:lstStyle/>
+          <a:p>
+            <a:pPr indent="0" marL="0">
+              <a:buNone/>
+            </a:pPr>
+            <a:r>
+              <a:rPr lang="en-US" sz="1400" b="1" dirty="0">
+                <a:solidFill>
+                  <a:schemeClr val="accent2"/>
+                </a:solidFill>
+                <a:latin typeface="Courier New" pitchFamily="34" charset="0"/>
+                <a:ea typeface="Courier New" pitchFamily="34" charset="-122"/>
+                <a:cs typeface="Courier New" pitchFamily="34" charset="-120"/>
+              </a:rPr>
+              <a:t>ads@</a:t>
+            </a:r>
+            <a:endParaRPr lang="en-US" sz="1400" dirty="0"/>
+          </a:p>
+        </p:txBody>
+      </p:sp>
+      <p:sp>
+        <p:nvSpPr>
+          <p:cNvPr id="10" name="Text 8"/>
+          <p:cNvSpPr txBox="1"/>
+          <p:nvPr/>
+        </p:nvSpPr>
+        <p:spPr>
+          <a:xfrm>
+            <a:off x="6126480" y="2286000"/>
+            <a:ext cx="2377440" cy="411480"/>
+          </a:xfrm>
+          <a:prstGeom prst="rect">
+            <a:avLst/>
+          </a:prstGeom>
+          <a:noFill/>
+          <a:ln/>
+        </p:spPr>
+        <p:txBody>
+          <a:bodyPr wrap="square" lIns="0" tIns="0" rIns="0" bIns="0" rtlCol="0" anchor="ctr"/>
+          <a:lstStyle/>
+          <a:p>
+            <a:pPr indent="0" marL="0">
+              <a:buNone/>
+            </a:pPr>
+            <a:r>
+              <a:rPr lang="en-US" sz="1400" dirty="0">
+                <a:solidFill>
+                  <a:schemeClr val="tx1"/>
+                </a:solidFill>
+              </a:rPr>
+              <a:t>광고·제휴</a:t>
+            </a:r>
+            <a:endParaRPr lang="en-US" sz="1400" dirty="0"/>
+          </a:p>
+        </p:txBody>
+      </p:sp>
+      <p:sp>
+        <p:nvSpPr>
+          <p:cNvPr id="11" name="Text 9"/>
+          <p:cNvSpPr txBox="1"/>
+          <p:nvPr/>
+        </p:nvSpPr>
+        <p:spPr>
+          <a:xfrm>
+            <a:off x="4800600" y="2788920"/>
+            <a:ext cx="1280160" cy="411480"/>
+          </a:xfrm>
+          <a:prstGeom prst="rect">
+            <a:avLst/>
+          </a:prstGeom>
+          <a:noFill/>
+          <a:ln/>
+        </p:spPr>
+        <p:txBody>
+          <a:bodyPr wrap="square" lIns="0" tIns="0" rIns="0" bIns="0" rtlCol="0" anchor="ctr"/>
+          <a:lstStyle/>
+          <a:p>
+            <a:pPr indent="0" marL="0">
+              <a:buNone/>
+            </a:pPr>
+            <a:r>
+              <a:rPr lang="en-US" sz="1400" b="1" dirty="0">
+                <a:solidFill>
+                  <a:schemeClr val="accent2"/>
+                </a:solidFill>
+                <a:latin typeface="Courier New" pitchFamily="34" charset="0"/>
+                <a:ea typeface="Courier New" pitchFamily="34" charset="-122"/>
+                <a:cs typeface="Courier New" pitchFamily="34" charset="-120"/>
+              </a:rPr>
+              <a:t>privacy@</a:t>
+            </a:r>
+            <a:endParaRPr lang="en-US" sz="1400" dirty="0"/>
+          </a:p>
+        </p:txBody>
+      </p:sp>
+      <p:sp>
+        <p:nvSpPr>
+          <p:cNvPr id="12" name="Text 10"/>
+          <p:cNvSpPr txBox="1"/>
+          <p:nvPr/>
+        </p:nvSpPr>
+        <p:spPr>
+          <a:xfrm>
+            <a:off x="6126480" y="2788920"/>
+            <a:ext cx="2377440" cy="411480"/>
+          </a:xfrm>
+          <a:prstGeom prst="rect">
+            <a:avLst/>
+          </a:prstGeom>
+          <a:noFill/>
+          <a:ln/>
+        </p:spPr>
+        <p:txBody>
+          <a:bodyPr wrap="square" lIns="0" tIns="0" rIns="0" bIns="0" rtlCol="0" anchor="ctr"/>
+          <a:lstStyle/>
+          <a:p>
+            <a:pPr indent="0" marL="0">
+              <a:buNone/>
+            </a:pPr>
+            <a:r>
+              <a:rPr lang="en-US" sz="1400" dirty="0">
+                <a:solidFill>
+                  <a:schemeClr val="tx1"/>
+                </a:solidFill>
+              </a:rPr>
+              <a:t>개인정보 요청</a:t>
+            </a:r>
+            <a:endParaRPr lang="en-US" sz="1400" dirty="0"/>
+          </a:p>
+        </p:txBody>
+      </p:sp>
+      <p:sp>
+        <p:nvSpPr>
+          <p:cNvPr id="13" name="Text 11"/>
+          <p:cNvSpPr txBox="1"/>
+          <p:nvPr/>
+        </p:nvSpPr>
+        <p:spPr>
+          <a:xfrm>
+            <a:off x="4800600" y="3291840"/>
+            <a:ext cx="1280160" cy="411480"/>
+          </a:xfrm>
+          <a:prstGeom prst="rect">
+            <a:avLst/>
+          </a:prstGeom>
+          <a:noFill/>
+          <a:ln/>
+        </p:spPr>
+        <p:txBody>
+          <a:bodyPr wrap="square" lIns="0" tIns="0" rIns="0" bIns="0" rtlCol="0" anchor="ctr"/>
+          <a:lstStyle/>
+          <a:p>
+            <a:pPr indent="0" marL="0">
+              <a:buNone/>
+            </a:pPr>
+            <a:r>
+              <a:rPr lang="en-US" sz="1400" b="1" dirty="0">
+                <a:solidFill>
+                  <a:schemeClr val="accent2"/>
+                </a:solidFill>
+                <a:latin typeface="Courier New" pitchFamily="34" charset="0"/>
+                <a:ea typeface="Courier New" pitchFamily="34" charset="-122"/>
+                <a:cs typeface="Courier New" pitchFamily="34" charset="-120"/>
+              </a:rPr>
+              <a:t>report@</a:t>
+            </a:r>
+            <a:endParaRPr lang="en-US" sz="1400" dirty="0"/>
+          </a:p>
+        </p:txBody>
+      </p:sp>
+      <p:sp>
+        <p:nvSpPr>
+          <p:cNvPr id="14" name="Text 12"/>
+          <p:cNvSpPr txBox="1"/>
+          <p:nvPr/>
+        </p:nvSpPr>
+        <p:spPr>
+          <a:xfrm>
+            <a:off x="6126480" y="3291840"/>
+            <a:ext cx="2377440" cy="411480"/>
+          </a:xfrm>
+          <a:prstGeom prst="rect">
+            <a:avLst/>
+          </a:prstGeom>
+          <a:noFill/>
+          <a:ln/>
+        </p:spPr>
+        <p:txBody>
+          <a:bodyPr wrap="square" lIns="0" tIns="0" rIns="0" bIns="0" rtlCol="0" anchor="ctr"/>
+          <a:lstStyle/>
+          <a:p>
+            <a:pPr indent="0" marL="0">
+              <a:buNone/>
+            </a:pPr>
+            <a:r>
+              <a:rPr lang="en-US" sz="1400" dirty="0">
+                <a:solidFill>
+                  <a:schemeClr val="tx1"/>
+                </a:solidFill>
+              </a:rPr>
+              <a:t>불법 게시물 신고</a:t>
+            </a:r>
+            <a:endParaRPr lang="en-US" sz="1400" dirty="0"/>
+          </a:p>
+        </p:txBody>
+      </p:sp>
+      <p:sp>
+        <p:nvSpPr>
+          <p:cNvPr id="15" name="Text 13"/>
+          <p:cNvSpPr txBox="1"/>
+          <p:nvPr/>
+        </p:nvSpPr>
+        <p:spPr>
+          <a:xfrm>
+            <a:off x="4800600" y="3794760"/>
+            <a:ext cx="1280160" cy="411480"/>
+          </a:xfrm>
+          <a:prstGeom prst="rect">
+            <a:avLst/>
+          </a:prstGeom>
+          <a:noFill/>
+          <a:ln/>
+        </p:spPr>
+        <p:txBody>
+          <a:bodyPr wrap="square" lIns="0" tIns="0" rIns="0" bIns="0" rtlCol="0" anchor="ctr"/>
+          <a:lstStyle/>
+          <a:p>
+            <a:pPr indent="0" marL="0">
+              <a:buNone/>
+            </a:pPr>
+            <a:r>
+              <a:rPr lang="en-US" sz="1400" b="1" dirty="0">
+                <a:solidFill>
+                  <a:schemeClr val="accent2"/>
+                </a:solidFill>
+                <a:latin typeface="Courier New" pitchFamily="34" charset="0"/>
+                <a:ea typeface="Courier New" pitchFamily="34" charset="-122"/>
+                <a:cs typeface="Courier New" pitchFamily="34" charset="-120"/>
+              </a:rPr>
+              <a:t>billing@</a:t>
+            </a:r>
+            <a:endParaRPr lang="en-US" sz="1400" dirty="0"/>
+          </a:p>
+        </p:txBody>
+      </p:sp>
+      <p:sp>
+        <p:nvSpPr>
+          <p:cNvPr id="16" name="Text 14"/>
+          <p:cNvSpPr txBox="1"/>
+          <p:nvPr/>
+        </p:nvSpPr>
+        <p:spPr>
+          <a:xfrm>
+            <a:off x="6126480" y="3794760"/>
+            <a:ext cx="2377440" cy="411480"/>
+          </a:xfrm>
+          <a:prstGeom prst="rect">
+            <a:avLst/>
+          </a:prstGeom>
+          <a:noFill/>
+          <a:ln/>
+        </p:spPr>
+        <p:txBody>
+          <a:bodyPr wrap="square" lIns="0" tIns="0" rIns="0" bIns="0" rtlCol="0" anchor="ctr"/>
+          <a:lstStyle/>
+          <a:p>
+            <a:pPr indent="0" marL="0">
+              <a:buNone/>
+            </a:pPr>
+            <a:r>
+              <a:rPr lang="en-US" sz="1400" dirty="0">
+                <a:solidFill>
+                  <a:schemeClr val="tx1"/>
+                </a:solidFill>
+              </a:rPr>
+              <a:t>결제·환불</a:t>
+            </a:r>
+            <a:endParaRPr lang="en-US" sz="1400" dirty="0"/>
+          </a:p>
+        </p:txBody>
+      </p:sp>
+      <p:sp>
+        <p:nvSpPr>
+          <p:cNvPr id="25" name="Slide Number Placeholder 0"/>
+          <p:cNvSpPr>
+            <a:spLocks noGrp="1"/>
+          </p:cNvSpPr>
+          <p:nvPr>
+            <p:ph type="sldNum" sz="quarter" idx="4294967295"/>
+          </p:nvPr>
+        </p:nvSpPr>
+        <p:spPr>
+          <a:xfrm>
+            <a:off x="8321040" y="4754880"/>
+            <a:ext cx="457200" cy="274320"/>
+          </a:xfrm>
+          <a:prstGeom prst="rect">
+            <a:avLst/>
+          </a:prstGeom>
+          <a:extLst>
+            <a:ext uri="{C572A759-6A51-4108-AA02-DFA0A04FC94B}">
+              <ma14:wrappingTextBoxFlag xmlns:ma14="http://schemas.microsoft.com/office/mac/drawingml/2011/main" val="0"/>
+            </a:ext>
+          </a:extLst>
+        </p:spPr>
+        <p:txBody>
+          <a:bodyPr/>
+          <a:lstStyle>
+            <a:lvl1pPr>
+              <a:defRPr sz="1000">
+                <a:solidFill>
+                  <a:schemeClr val="accent4"/>
+                </a:solidFill>
+              </a:defRPr>
+            </a:lvl1pPr>
+          </a:lstStyle>
+          <a:p>
+            <a:pPr algn="r"/>
+            <a:fld id="{F7021451-1387-4CA6-816F-3879F97B5CBC}" type="slidenum">
+              <a:rPr b="0" lang="en-US"/>
+              <a:t>38</a:t>
+            </a:fld>
+            <a:endParaRPr lang="en-US"/>
+          </a:p>
+        </p:txBody>
+      </p:sp>
+    </p:spTree>
+  </p:cSld>
+  <p:clrMapOvr>
+    <a:masterClrMapping/>
+  </p:clrMapOvr>
+</p:sld>
+</file>
+
+<file path=ppt/slides/slide39.xml><?xml version="1.0" encoding="utf-8"?>
+<p:sld xmlns:a="http://schemas.openxmlformats.org/drawingml/2006/main" xmlns:r="http://schemas.openxmlformats.org/officeDocument/2006/relationships" xmlns:p="http://schemas.openxmlformats.org/presentationml/2006/main">
+  <p:cSld name="Slide 39">
+    <p:spTree>
+      <p:nvGrpSpPr>
+        <p:cNvPr id="1" name=""/>
+        <p:cNvGrpSpPr/>
+        <p:nvPr/>
+      </p:nvGrpSpPr>
+      <p:grpSpPr>
+        <a:xfrm>
+          <a:off x="0" y="0"/>
+          <a:ext cx="0" cy="0"/>
+          <a:chOff x="0" y="0"/>
+          <a:chExt cx="0" cy="0"/>
+        </a:xfrm>
+      </p:grpSpPr>
+      <p:sp>
+        <p:nvSpPr>
+          <p:cNvPr id="2" name="Text 0"/>
+          <p:cNvSpPr/>
+          <p:nvPr>
+            <p:ph idx="100" type="title" hasCustomPrompt="1"/>
+          </p:nvPr>
+        </p:nvSpPr>
+        <p:spPr>
+          <a:xfrm>
+            <a:off x="457200" y="274320"/>
+            <a:ext cx="8229600" cy="685800"/>
+          </a:xfrm>
+          <a:prstGeom prst="rect">
+            <a:avLst/>
+          </a:prstGeom>
+          <a:noFill/>
+          <a:ln/>
+        </p:spPr>
+        <p:txBody>
+          <a:bodyPr wrap="square" lIns="0" tIns="0" rIns="0" bIns="0" rtlCol="0" anchor="ctr"/>
+          <a:lstStyle/>
+          <a:p>
+            <a:pPr indent="0" marL="0">
+              <a:buNone/>
+            </a:pPr>
+            <a:r>
+              <a:rPr lang="en-US" sz="2800" b="1" dirty="0">
+                <a:solidFill>
+                  <a:schemeClr val="tx2"/>
+                </a:solidFill>
+              </a:rPr>
+              <a:t>스팸함에 안 빠지게: SPF · DKIM · DMARC</a:t>
+            </a:r>
+            <a:endParaRPr lang="en-US" sz="2800" dirty="0"/>
+          </a:p>
+        </p:txBody>
+      </p:sp>
+      <p:sp>
+        <p:nvSpPr>
+          <p:cNvPr id="3" name="card"/>
+          <p:cNvSpPr/>
+          <p:nvPr/>
+        </p:nvSpPr>
+        <p:spPr>
+          <a:xfrm>
+            <a:off x="457200" y="1188720"/>
+            <a:ext cx="1920240" cy="1920240"/>
+          </a:xfrm>
+          <a:prstGeom prst="roundRect">
+            <a:avLst>
+              <a:gd name="adj" fmla="val 3810"/>
+            </a:avLst>
+          </a:prstGeom>
+          <a:solidFill>
+            <a:schemeClr val="bg2"/>
+          </a:solidFill>
+          <a:ln/>
+        </p:spPr>
+      </p:sp>
+      <p:sp>
+        <p:nvSpPr>
+          <p:cNvPr id="4" name="Text 2"/>
+          <p:cNvSpPr txBox="1"/>
+          <p:nvPr/>
+        </p:nvSpPr>
+        <p:spPr>
+          <a:xfrm>
+            <a:off x="640080" y="1325880"/>
+            <a:ext cx="1554480" cy="502920"/>
+          </a:xfrm>
+          <a:prstGeom prst="rect">
+            <a:avLst/>
+          </a:prstGeom>
+          <a:noFill/>
+          <a:ln/>
+        </p:spPr>
+        <p:txBody>
+          <a:bodyPr wrap="square" lIns="0" tIns="0" rIns="0" bIns="0" rtlCol="0" anchor="t"/>
+          <a:lstStyle/>
+          <a:p>
+            <a:pPr indent="0" marL="0">
+              <a:buNone/>
+            </a:pPr>
+            <a:r>
+              <a:rPr lang="en-US" sz="2200" b="1" dirty="0">
+                <a:solidFill>
+                  <a:schemeClr val="tx2"/>
+                </a:solidFill>
+              </a:rPr>
+              <a:t>MX</a:t>
+            </a:r>
+            <a:endParaRPr lang="en-US" sz="2200" dirty="0"/>
+          </a:p>
+        </p:txBody>
+      </p:sp>
+      <p:sp>
+        <p:nvSpPr>
+          <p:cNvPr id="5" name="Text 3"/>
+          <p:cNvSpPr txBox="1"/>
+          <p:nvPr/>
+        </p:nvSpPr>
+        <p:spPr>
+          <a:xfrm>
+            <a:off x="640080" y="1874520"/>
+            <a:ext cx="1645920" cy="365760"/>
+          </a:xfrm>
+          <a:prstGeom prst="rect">
+            <a:avLst/>
+          </a:prstGeom>
+          <a:noFill/>
+          <a:ln/>
+        </p:spPr>
+        <p:txBody>
+          <a:bodyPr wrap="square" lIns="0" tIns="0" rIns="0" bIns="0" rtlCol="0" anchor="t"/>
+          <a:lstStyle/>
+          <a:p>
+            <a:pPr indent="0" marL="0">
+              <a:buNone/>
+            </a:pPr>
+            <a:r>
+              <a:rPr lang="en-US" sz="1300" b="1" dirty="0">
+                <a:solidFill>
+                  <a:schemeClr val="accent2"/>
+                </a:solidFill>
+              </a:rPr>
+              <a:t>우편함 위치</a:t>
+            </a:r>
+            <a:endParaRPr lang="en-US" sz="1300" dirty="0"/>
+          </a:p>
+        </p:txBody>
+      </p:sp>
+      <p:sp>
+        <p:nvSpPr>
+          <p:cNvPr id="6" name="Text 4"/>
+          <p:cNvSpPr txBox="1"/>
+          <p:nvPr/>
+        </p:nvSpPr>
+        <p:spPr>
+          <a:xfrm>
+            <a:off x="640080" y="2286000"/>
+            <a:ext cx="1645920" cy="685800"/>
+          </a:xfrm>
+          <a:prstGeom prst="rect">
+            <a:avLst/>
+          </a:prstGeom>
+          <a:noFill/>
+          <a:ln/>
+        </p:spPr>
+        <p:txBody>
+          <a:bodyPr wrap="square" lIns="0" tIns="0" rIns="0" bIns="0" rtlCol="0" anchor="t"/>
+          <a:lstStyle/>
+          <a:p>
+            <a:pPr indent="0" marL="0">
+              <a:buNone/>
+            </a:pPr>
+            <a:r>
+              <a:rPr lang="en-US" sz="1200" dirty="0">
+                <a:solidFill>
+                  <a:schemeClr val="tx1"/>
+                </a:solidFill>
+              </a:rPr>
+              <a:t>어느 서버가 메일을 받나</a:t>
+            </a:r>
+            <a:endParaRPr lang="en-US" sz="1200" dirty="0"/>
+          </a:p>
+        </p:txBody>
+      </p:sp>
+      <p:sp>
+        <p:nvSpPr>
+          <p:cNvPr id="7" name="card"/>
+          <p:cNvSpPr/>
+          <p:nvPr/>
+        </p:nvSpPr>
+        <p:spPr>
+          <a:xfrm>
+            <a:off x="2560320" y="1188720"/>
+            <a:ext cx="1920240" cy="1920240"/>
+          </a:xfrm>
+          <a:prstGeom prst="roundRect">
+            <a:avLst>
+              <a:gd name="adj" fmla="val 3810"/>
+            </a:avLst>
+          </a:prstGeom>
+          <a:solidFill>
+            <a:schemeClr val="tx2"/>
+          </a:solidFill>
+          <a:ln/>
+        </p:spPr>
+      </p:sp>
+      <p:sp>
+        <p:nvSpPr>
+          <p:cNvPr id="8" name="Text 6"/>
+          <p:cNvSpPr txBox="1"/>
+          <p:nvPr/>
+        </p:nvSpPr>
+        <p:spPr>
+          <a:xfrm>
+            <a:off x="2743200" y="1325880"/>
+            <a:ext cx="1554480" cy="502920"/>
+          </a:xfrm>
+          <a:prstGeom prst="rect">
+            <a:avLst/>
+          </a:prstGeom>
+          <a:noFill/>
+          <a:ln/>
+        </p:spPr>
+        <p:txBody>
+          <a:bodyPr wrap="square" lIns="0" tIns="0" rIns="0" bIns="0" rtlCol="0" anchor="t"/>
+          <a:lstStyle/>
+          <a:p>
+            <a:pPr indent="0" marL="0">
+              <a:buNone/>
+            </a:pPr>
+            <a:r>
+              <a:rPr lang="en-US" sz="2200" b="1" dirty="0">
+                <a:solidFill>
+                  <a:schemeClr val="accent6"/>
+                </a:solidFill>
+              </a:rPr>
+              <a:t>SPF</a:t>
+            </a:r>
+            <a:endParaRPr lang="en-US" sz="2200" dirty="0"/>
+          </a:p>
+        </p:txBody>
+      </p:sp>
+      <p:sp>
+        <p:nvSpPr>
+          <p:cNvPr id="9" name="Text 7"/>
+          <p:cNvSpPr txBox="1"/>
+          <p:nvPr/>
+        </p:nvSpPr>
+        <p:spPr>
+          <a:xfrm>
+            <a:off x="2743200" y="1874520"/>
+            <a:ext cx="1645920" cy="365760"/>
+          </a:xfrm>
+          <a:prstGeom prst="rect">
+            <a:avLst/>
+          </a:prstGeom>
+          <a:noFill/>
+          <a:ln/>
+        </p:spPr>
+        <p:txBody>
+          <a:bodyPr wrap="square" lIns="0" tIns="0" rIns="0" bIns="0" rtlCol="0" anchor="t"/>
+          <a:lstStyle/>
+          <a:p>
+            <a:pPr indent="0" marL="0">
+              <a:buNone/>
+            </a:pPr>
+            <a:r>
+              <a:rPr lang="en-US" sz="1300" b="1" dirty="0">
+                <a:solidFill>
+                  <a:schemeClr val="bg1"/>
+                </a:solidFill>
+              </a:rPr>
+              <a:t>보내는 우체국 명단</a:t>
+            </a:r>
+            <a:endParaRPr lang="en-US" sz="1300" dirty="0"/>
+          </a:p>
+        </p:txBody>
+      </p:sp>
+      <p:sp>
+        <p:nvSpPr>
+          <p:cNvPr id="10" name="Text 8"/>
+          <p:cNvSpPr txBox="1"/>
+          <p:nvPr/>
+        </p:nvSpPr>
+        <p:spPr>
+          <a:xfrm>
+            <a:off x="2743200" y="2286000"/>
+            <a:ext cx="1645920" cy="685800"/>
+          </a:xfrm>
+          <a:prstGeom prst="rect">
+            <a:avLst/>
+          </a:prstGeom>
+          <a:noFill/>
+          <a:ln/>
+        </p:spPr>
+        <p:txBody>
+          <a:bodyPr wrap="square" lIns="0" tIns="0" rIns="0" bIns="0" rtlCol="0" anchor="t"/>
+          <a:lstStyle/>
+          <a:p>
+            <a:pPr indent="0" marL="0">
+              <a:buNone/>
+            </a:pPr>
+            <a:r>
+              <a:rPr lang="en-US" sz="1200" dirty="0">
                 <a:solidFill>
                   <a:schemeClr val="bg2"/>
                 </a:solidFill>
               </a:rPr>
-              <a:t>다음 할 일: docs/13-practice-scenario.md 를 읽고 15장 퀴즈 풀기</a:t>
-            </a:r>
-            <a:endParaRPr lang="en-US" sz="1800" dirty="0"/>
+              <a:t>내 이름으로 보내도 되는 서버</a:t>
+            </a:r>
+            <a:endParaRPr lang="en-US" sz="1200" dirty="0"/>
+          </a:p>
+        </p:txBody>
+      </p:sp>
+      <p:sp>
+        <p:nvSpPr>
+          <p:cNvPr id="11" name="card"/>
+          <p:cNvSpPr/>
+          <p:nvPr/>
+        </p:nvSpPr>
+        <p:spPr>
+          <a:xfrm>
+            <a:off x="4663440" y="1188720"/>
+            <a:ext cx="1920240" cy="1920240"/>
+          </a:xfrm>
+          <a:prstGeom prst="roundRect">
+            <a:avLst>
+              <a:gd name="adj" fmla="val 3810"/>
+            </a:avLst>
+          </a:prstGeom>
+          <a:solidFill>
+            <a:schemeClr val="tx2"/>
+          </a:solidFill>
+          <a:ln/>
+        </p:spPr>
+      </p:sp>
+      <p:sp>
+        <p:nvSpPr>
+          <p:cNvPr id="12" name="Text 10"/>
+          <p:cNvSpPr txBox="1"/>
+          <p:nvPr/>
+        </p:nvSpPr>
+        <p:spPr>
+          <a:xfrm>
+            <a:off x="4846320" y="1325880"/>
+            <a:ext cx="1554480" cy="502920"/>
+          </a:xfrm>
+          <a:prstGeom prst="rect">
+            <a:avLst/>
+          </a:prstGeom>
+          <a:noFill/>
+          <a:ln/>
+        </p:spPr>
+        <p:txBody>
+          <a:bodyPr wrap="square" lIns="0" tIns="0" rIns="0" bIns="0" rtlCol="0" anchor="t"/>
+          <a:lstStyle/>
+          <a:p>
+            <a:pPr indent="0" marL="0">
+              <a:buNone/>
+            </a:pPr>
+            <a:r>
+              <a:rPr lang="en-US" sz="2200" b="1" dirty="0">
+                <a:solidFill>
+                  <a:schemeClr val="accent6"/>
+                </a:solidFill>
+              </a:rPr>
+              <a:t>DKIM</a:t>
+            </a:r>
+            <a:endParaRPr lang="en-US" sz="2200" dirty="0"/>
+          </a:p>
+        </p:txBody>
+      </p:sp>
+      <p:sp>
+        <p:nvSpPr>
+          <p:cNvPr id="13" name="Text 11"/>
+          <p:cNvSpPr txBox="1"/>
+          <p:nvPr/>
+        </p:nvSpPr>
+        <p:spPr>
+          <a:xfrm>
+            <a:off x="4846320" y="1874520"/>
+            <a:ext cx="1645920" cy="365760"/>
+          </a:xfrm>
+          <a:prstGeom prst="rect">
+            <a:avLst/>
+          </a:prstGeom>
+          <a:noFill/>
+          <a:ln/>
+        </p:spPr>
+        <p:txBody>
+          <a:bodyPr wrap="square" lIns="0" tIns="0" rIns="0" bIns="0" rtlCol="0" anchor="t"/>
+          <a:lstStyle/>
+          <a:p>
+            <a:pPr indent="0" marL="0">
+              <a:buNone/>
+            </a:pPr>
+            <a:r>
+              <a:rPr lang="en-US" sz="1300" b="1" dirty="0">
+                <a:solidFill>
+                  <a:schemeClr val="bg1"/>
+                </a:solidFill>
+              </a:rPr>
+              <a:t>봉투의 도장</a:t>
+            </a:r>
+            <a:endParaRPr lang="en-US" sz="1300" dirty="0"/>
+          </a:p>
+        </p:txBody>
+      </p:sp>
+      <p:sp>
+        <p:nvSpPr>
+          <p:cNvPr id="14" name="Text 12"/>
+          <p:cNvSpPr txBox="1"/>
+          <p:nvPr/>
+        </p:nvSpPr>
+        <p:spPr>
+          <a:xfrm>
+            <a:off x="4846320" y="2286000"/>
+            <a:ext cx="1645920" cy="685800"/>
+          </a:xfrm>
+          <a:prstGeom prst="rect">
+            <a:avLst/>
+          </a:prstGeom>
+          <a:noFill/>
+          <a:ln/>
+        </p:spPr>
+        <p:txBody>
+          <a:bodyPr wrap="square" lIns="0" tIns="0" rIns="0" bIns="0" rtlCol="0" anchor="t"/>
+          <a:lstStyle/>
+          <a:p>
+            <a:pPr indent="0" marL="0">
+              <a:buNone/>
+            </a:pPr>
+            <a:r>
+              <a:rPr lang="en-US" sz="1200" dirty="0">
+                <a:solidFill>
+                  <a:schemeClr val="bg2"/>
+                </a:solidFill>
+              </a:rPr>
+              <a:t>중간에 안 바뀌었다는 서명</a:t>
+            </a:r>
+            <a:endParaRPr lang="en-US" sz="1200" dirty="0"/>
+          </a:p>
+        </p:txBody>
+      </p:sp>
+      <p:sp>
+        <p:nvSpPr>
+          <p:cNvPr id="15" name="card"/>
+          <p:cNvSpPr/>
+          <p:nvPr/>
+        </p:nvSpPr>
+        <p:spPr>
+          <a:xfrm>
+            <a:off x="6766560" y="1188720"/>
+            <a:ext cx="1920240" cy="1920240"/>
+          </a:xfrm>
+          <a:prstGeom prst="roundRect">
+            <a:avLst>
+              <a:gd name="adj" fmla="val 3810"/>
+            </a:avLst>
+          </a:prstGeom>
+          <a:solidFill>
+            <a:schemeClr val="tx2"/>
+          </a:solidFill>
+          <a:ln/>
+        </p:spPr>
+      </p:sp>
+      <p:sp>
+        <p:nvSpPr>
+          <p:cNvPr id="16" name="Text 14"/>
+          <p:cNvSpPr txBox="1"/>
+          <p:nvPr/>
+        </p:nvSpPr>
+        <p:spPr>
+          <a:xfrm>
+            <a:off x="6949440" y="1325880"/>
+            <a:ext cx="1554480" cy="502920"/>
+          </a:xfrm>
+          <a:prstGeom prst="rect">
+            <a:avLst/>
+          </a:prstGeom>
+          <a:noFill/>
+          <a:ln/>
+        </p:spPr>
+        <p:txBody>
+          <a:bodyPr wrap="square" lIns="0" tIns="0" rIns="0" bIns="0" rtlCol="0" anchor="t"/>
+          <a:lstStyle/>
+          <a:p>
+            <a:pPr indent="0" marL="0">
+              <a:buNone/>
+            </a:pPr>
+            <a:r>
+              <a:rPr lang="en-US" sz="2200" b="1" dirty="0">
+                <a:solidFill>
+                  <a:schemeClr val="accent6"/>
+                </a:solidFill>
+              </a:rPr>
+              <a:t>DMARC</a:t>
+            </a:r>
+            <a:endParaRPr lang="en-US" sz="2200" dirty="0"/>
+          </a:p>
+        </p:txBody>
+      </p:sp>
+      <p:sp>
+        <p:nvSpPr>
+          <p:cNvPr id="17" name="Text 15"/>
+          <p:cNvSpPr txBox="1"/>
+          <p:nvPr/>
+        </p:nvSpPr>
+        <p:spPr>
+          <a:xfrm>
+            <a:off x="6949440" y="1874520"/>
+            <a:ext cx="1645920" cy="365760"/>
+          </a:xfrm>
+          <a:prstGeom prst="rect">
+            <a:avLst/>
+          </a:prstGeom>
+          <a:noFill/>
+          <a:ln/>
+        </p:spPr>
+        <p:txBody>
+          <a:bodyPr wrap="square" lIns="0" tIns="0" rIns="0" bIns="0" rtlCol="0" anchor="t"/>
+          <a:lstStyle/>
+          <a:p>
+            <a:pPr indent="0" marL="0">
+              <a:buNone/>
+            </a:pPr>
+            <a:r>
+              <a:rPr lang="en-US" sz="1300" b="1" dirty="0">
+                <a:solidFill>
+                  <a:schemeClr val="bg1"/>
+                </a:solidFill>
+              </a:rPr>
+              <a:t>처리 지침</a:t>
+            </a:r>
+            <a:endParaRPr lang="en-US" sz="1300" dirty="0"/>
+          </a:p>
+        </p:txBody>
+      </p:sp>
+      <p:sp>
+        <p:nvSpPr>
+          <p:cNvPr id="18" name="Text 16"/>
+          <p:cNvSpPr txBox="1"/>
+          <p:nvPr/>
+        </p:nvSpPr>
+        <p:spPr>
+          <a:xfrm>
+            <a:off x="6949440" y="2286000"/>
+            <a:ext cx="1645920" cy="685800"/>
+          </a:xfrm>
+          <a:prstGeom prst="rect">
+            <a:avLst/>
+          </a:prstGeom>
+          <a:noFill/>
+          <a:ln/>
+        </p:spPr>
+        <p:txBody>
+          <a:bodyPr wrap="square" lIns="0" tIns="0" rIns="0" bIns="0" rtlCol="0" anchor="t"/>
+          <a:lstStyle/>
+          <a:p>
+            <a:pPr indent="0" marL="0">
+              <a:buNone/>
+            </a:pPr>
+            <a:r>
+              <a:rPr lang="en-US" sz="1200" dirty="0">
+                <a:solidFill>
+                  <a:schemeClr val="bg2"/>
+                </a:solidFill>
+              </a:rPr>
+              <a:t>검사 실패 메일을 어떻게 할지</a:t>
+            </a:r>
+            <a:endParaRPr lang="en-US" sz="1200" dirty="0"/>
+          </a:p>
+        </p:txBody>
+      </p:sp>
+      <p:sp>
+        <p:nvSpPr>
+          <p:cNvPr id="19" name="Text 17"/>
+          <p:cNvSpPr txBox="1"/>
+          <p:nvPr/>
+        </p:nvSpPr>
+        <p:spPr>
+          <a:xfrm>
+            <a:off x="457200" y="3337560"/>
+            <a:ext cx="8229600" cy="1097280"/>
+          </a:xfrm>
+          <a:prstGeom prst="rect">
+            <a:avLst/>
+          </a:prstGeom>
+          <a:noFill/>
+          <a:ln/>
+        </p:spPr>
+        <p:txBody>
+          <a:bodyPr wrap="square" lIns="0" tIns="0" rIns="0" bIns="0" rtlCol="0" anchor="t"/>
+          <a:lstStyle/>
+          <a:p>
+            <a:pPr indent="0" marL="0">
+              <a:spcAft>
+                <a:spcPts val="800"/>
+              </a:spcAft>
+              <a:buNone/>
+            </a:pPr>
+            <a:r>
+              <a:rPr lang="en-US" sz="1300" b="1" dirty="0">
+                <a:solidFill>
+                  <a:schemeClr val="accent2"/>
+                </a:solidFill>
+              </a:rPr>
+              <a:t>설정 팁  </a:t>
+            </a:r>
+            <a:pPr indent="0" marL="0">
+              <a:spcAft>
+                <a:spcPts val="800"/>
+              </a:spcAft>
+              <a:buNone/>
+            </a:pPr>
+            <a:r>
+              <a:rPr lang="en-US" sz="1300" dirty="0">
+                <a:solidFill>
+                  <a:schemeClr val="tx1"/>
+                </a:solidFill>
+              </a:rPr>
+              <a:t>값은 내 메일 서비스가 알려 주는 그대로 · SPF는 도메인당 하나(합치기) · DMARC는 p=none으로 시작해 단계적으로</a:t>
+            </a:r>
+            <a:endParaRPr lang="en-US" sz="1300" dirty="0"/>
+          </a:p>
+          <a:p>
+            <a:pPr indent="0" marL="0">
+              <a:spcAft>
+                <a:spcPts val="800"/>
+              </a:spcAft>
+              <a:buNone/>
+            </a:pPr>
+            <a:r>
+              <a:rPr lang="en-US" sz="1300" b="1" dirty="0">
+                <a:solidFill>
+                  <a:schemeClr val="accent2"/>
+                </a:solidFill>
+              </a:rPr>
+              <a:t>대량 발송 규칙  </a:t>
+            </a:r>
+            <a:pPr indent="0" marL="0">
+              <a:spcAft>
+                <a:spcPts val="800"/>
+              </a:spcAft>
+              <a:buNone/>
+            </a:pPr>
+            <a:r>
+              <a:rPr lang="en-US" sz="1300" dirty="0">
+                <a:solidFill>
+                  <a:schemeClr val="tx1"/>
+                </a:solidFill>
+              </a:rPr>
+              <a:t>하루 약 5,000통 이상이면 세 가지 모두 + 원클릭 수신거부 + 스팸 신고율 0.3% 미만 (Gmail·Yahoo)</a:t>
+            </a:r>
+            <a:endParaRPr lang="en-US" sz="1300" dirty="0"/>
+          </a:p>
+        </p:txBody>
+      </p:sp>
+      <p:sp>
+        <p:nvSpPr>
+          <p:cNvPr id="25" name="Slide Number Placeholder 0"/>
+          <p:cNvSpPr>
+            <a:spLocks noGrp="1"/>
+          </p:cNvSpPr>
+          <p:nvPr>
+            <p:ph type="sldNum" sz="quarter" idx="4294967295"/>
+          </p:nvPr>
+        </p:nvSpPr>
+        <p:spPr>
+          <a:xfrm>
+            <a:off x="8321040" y="4754880"/>
+            <a:ext cx="457200" cy="274320"/>
+          </a:xfrm>
+          <a:prstGeom prst="rect">
+            <a:avLst/>
+          </a:prstGeom>
+          <a:extLst>
+            <a:ext uri="{C572A759-6A51-4108-AA02-DFA0A04FC94B}">
+              <ma14:wrappingTextBoxFlag xmlns:ma14="http://schemas.microsoft.com/office/mac/drawingml/2011/main" val="0"/>
+            </a:ext>
+          </a:extLst>
+        </p:spPr>
+        <p:txBody>
+          <a:bodyPr/>
+          <a:lstStyle>
+            <a:lvl1pPr>
+              <a:defRPr sz="1000">
+                <a:solidFill>
+                  <a:schemeClr val="accent4"/>
+                </a:solidFill>
+              </a:defRPr>
+            </a:lvl1pPr>
+          </a:lstStyle>
+          <a:p>
+            <a:pPr algn="r"/>
+            <a:fld id="{F7021451-1387-4CA6-816F-3879F97B5CBC}" type="slidenum">
+              <a:rPr b="0" lang="en-US"/>
+              <a:t>39</a:t>
+            </a:fld>
+            <a:endParaRPr lang="en-US"/>
           </a:p>
         </p:txBody>
       </p:sp>
@@ -28749,6 +30590,2011 @@
               <a:t>4</a:t>
             </a:fld>
             <a:endParaRPr lang="en-US"/>
+          </a:p>
+        </p:txBody>
+      </p:sp>
+    </p:spTree>
+  </p:cSld>
+  <p:clrMapOvr>
+    <a:masterClrMapping/>
+  </p:clrMapOvr>
+</p:sld>
+</file>
+
+<file path=ppt/slides/slide40.xml><?xml version="1.0" encoding="utf-8"?>
+<p:sld xmlns:a="http://schemas.openxmlformats.org/drawingml/2006/main" xmlns:r="http://schemas.openxmlformats.org/officeDocument/2006/relationships" xmlns:p="http://schemas.openxmlformats.org/presentationml/2006/main">
+  <p:cSld name="Slide 40">
+    <p:spTree>
+      <p:nvGrpSpPr>
+        <p:cNvPr id="1" name=""/>
+        <p:cNvGrpSpPr/>
+        <p:nvPr/>
+      </p:nvGrpSpPr>
+      <p:grpSpPr>
+        <a:xfrm>
+          <a:off x="0" y="0"/>
+          <a:ext cx="0" cy="0"/>
+          <a:chOff x="0" y="0"/>
+          <a:chExt cx="0" cy="0"/>
+        </a:xfrm>
+      </p:grpSpPr>
+      <p:sp>
+        <p:nvSpPr>
+          <p:cNvPr id="2" name="Text 0"/>
+          <p:cNvSpPr/>
+          <p:nvPr>
+            <p:ph idx="100" type="title" hasCustomPrompt="1"/>
+          </p:nvPr>
+        </p:nvSpPr>
+        <p:spPr>
+          <a:xfrm>
+            <a:off x="457200" y="274320"/>
+            <a:ext cx="8229600" cy="685800"/>
+          </a:xfrm>
+          <a:prstGeom prst="rect">
+            <a:avLst/>
+          </a:prstGeom>
+          <a:noFill/>
+          <a:ln/>
+        </p:spPr>
+        <p:txBody>
+          <a:bodyPr wrap="square" lIns="0" tIns="0" rIns="0" bIns="0" rtlCol="0" anchor="ctr"/>
+          <a:lstStyle/>
+          <a:p>
+            <a:pPr indent="0" marL="0">
+              <a:buNone/>
+            </a:pPr>
+            <a:r>
+              <a:rPr lang="en-US" sz="2800" b="1" dirty="0">
+                <a:solidFill>
+                  <a:schemeClr val="tx2"/>
+                </a:solidFill>
+              </a:rPr>
+              <a:t>광고 메일·문자를 보낼 때 5가지 규칙</a:t>
+            </a:r>
+            <a:endParaRPr lang="en-US" sz="2800" dirty="0"/>
+          </a:p>
+        </p:txBody>
+      </p:sp>
+      <p:sp>
+        <p:nvSpPr>
+          <p:cNvPr id="3" name="card"/>
+          <p:cNvSpPr/>
+          <p:nvPr/>
+        </p:nvSpPr>
+        <p:spPr>
+          <a:xfrm>
+            <a:off x="457200" y="1143000"/>
+            <a:ext cx="8229600" cy="566928"/>
+          </a:xfrm>
+          <a:prstGeom prst="roundRect">
+            <a:avLst>
+              <a:gd name="adj" fmla="val 12903"/>
+            </a:avLst>
+          </a:prstGeom>
+          <a:solidFill>
+            <a:schemeClr val="bg2"/>
+          </a:solidFill>
+          <a:ln/>
+        </p:spPr>
+      </p:sp>
+      <p:sp>
+        <p:nvSpPr>
+          <p:cNvPr id="4" name="badge1"/>
+          <p:cNvSpPr/>
+          <p:nvPr/>
+        </p:nvSpPr>
+        <p:spPr>
+          <a:xfrm>
+            <a:off x="594360" y="1234440"/>
+            <a:ext cx="384048" cy="384048"/>
+          </a:xfrm>
+          <a:prstGeom prst="ellipse">
+            <a:avLst/>
+          </a:prstGeom>
+          <a:solidFill>
+            <a:schemeClr val="accent2"/>
+          </a:solidFill>
+          <a:ln/>
+        </p:spPr>
+      </p:sp>
+      <p:sp>
+        <p:nvSpPr>
+          <p:cNvPr id="5" name="Text 3"/>
+          <p:cNvSpPr txBox="1"/>
+          <p:nvPr/>
+        </p:nvSpPr>
+        <p:spPr>
+          <a:xfrm>
+            <a:off x="594360" y="1234440"/>
+            <a:ext cx="384048" cy="384048"/>
+          </a:xfrm>
+          <a:prstGeom prst="rect">
+            <a:avLst/>
+          </a:prstGeom>
+          <a:noFill/>
+          <a:ln/>
+        </p:spPr>
+        <p:txBody>
+          <a:bodyPr wrap="square" lIns="0" tIns="0" rIns="0" bIns="0" rtlCol="0" anchor="ctr"/>
+          <a:lstStyle/>
+          <a:p>
+            <a:pPr algn="ctr" indent="0" marL="0">
+              <a:buNone/>
+            </a:pPr>
+            <a:r>
+              <a:rPr lang="en-US" sz="1400" b="1" dirty="0">
+                <a:solidFill>
+                  <a:schemeClr val="bg1"/>
+                </a:solidFill>
+              </a:rPr>
+              <a:t>1</a:t>
+            </a:r>
+            <a:endParaRPr lang="en-US" sz="1400" dirty="0"/>
+          </a:p>
+        </p:txBody>
+      </p:sp>
+      <p:sp>
+        <p:nvSpPr>
+          <p:cNvPr id="6" name="Text 4"/>
+          <p:cNvSpPr txBox="1"/>
+          <p:nvPr/>
+        </p:nvSpPr>
+        <p:spPr>
+          <a:xfrm>
+            <a:off x="1143000" y="1143000"/>
+            <a:ext cx="2377440" cy="566928"/>
+          </a:xfrm>
+          <a:prstGeom prst="rect">
+            <a:avLst/>
+          </a:prstGeom>
+          <a:noFill/>
+          <a:ln/>
+        </p:spPr>
+        <p:txBody>
+          <a:bodyPr wrap="square" lIns="0" tIns="0" rIns="0" bIns="0" rtlCol="0" anchor="ctr"/>
+          <a:lstStyle/>
+          <a:p>
+            <a:pPr indent="0" marL="0">
+              <a:buNone/>
+            </a:pPr>
+            <a:r>
+              <a:rPr lang="en-US" sz="1500" b="1" dirty="0">
+                <a:solidFill>
+                  <a:schemeClr val="tx1"/>
+                </a:solidFill>
+              </a:rPr>
+              <a:t>사전 동의</a:t>
+            </a:r>
+            <a:endParaRPr lang="en-US" sz="1500" dirty="0"/>
+          </a:p>
+        </p:txBody>
+      </p:sp>
+      <p:sp>
+        <p:nvSpPr>
+          <p:cNvPr id="7" name="Text 5"/>
+          <p:cNvSpPr txBox="1"/>
+          <p:nvPr/>
+        </p:nvSpPr>
+        <p:spPr>
+          <a:xfrm>
+            <a:off x="3566160" y="1143000"/>
+            <a:ext cx="4937760" cy="566928"/>
+          </a:xfrm>
+          <a:prstGeom prst="rect">
+            <a:avLst/>
+          </a:prstGeom>
+          <a:noFill/>
+          <a:ln/>
+        </p:spPr>
+        <p:txBody>
+          <a:bodyPr wrap="square" lIns="0" tIns="0" rIns="0" bIns="0" rtlCol="0" anchor="ctr"/>
+          <a:lstStyle/>
+          <a:p>
+            <a:pPr indent="0" marL="0">
+              <a:buNone/>
+            </a:pPr>
+            <a:r>
+              <a:rPr lang="en-US" sz="1300" dirty="0">
+                <a:solidFill>
+                  <a:schemeClr val="accent4"/>
+                </a:solidFill>
+              </a:rPr>
+              <a:t>약관에 섞지 말고 선택 항목으로 따로</a:t>
+            </a:r>
+            <a:endParaRPr lang="en-US" sz="1300" dirty="0"/>
+          </a:p>
+        </p:txBody>
+      </p:sp>
+      <p:sp>
+        <p:nvSpPr>
+          <p:cNvPr id="8" name="card"/>
+          <p:cNvSpPr/>
+          <p:nvPr/>
+        </p:nvSpPr>
+        <p:spPr>
+          <a:xfrm>
+            <a:off x="457200" y="1801368"/>
+            <a:ext cx="8229600" cy="566928"/>
+          </a:xfrm>
+          <a:prstGeom prst="roundRect">
+            <a:avLst>
+              <a:gd name="adj" fmla="val 12903"/>
+            </a:avLst>
+          </a:prstGeom>
+          <a:solidFill>
+            <a:schemeClr val="bg2"/>
+          </a:solidFill>
+          <a:ln/>
+        </p:spPr>
+      </p:sp>
+      <p:sp>
+        <p:nvSpPr>
+          <p:cNvPr id="9" name="badge2"/>
+          <p:cNvSpPr/>
+          <p:nvPr/>
+        </p:nvSpPr>
+        <p:spPr>
+          <a:xfrm>
+            <a:off x="594360" y="1892808"/>
+            <a:ext cx="384048" cy="384048"/>
+          </a:xfrm>
+          <a:prstGeom prst="ellipse">
+            <a:avLst/>
+          </a:prstGeom>
+          <a:solidFill>
+            <a:schemeClr val="accent2"/>
+          </a:solidFill>
+          <a:ln/>
+        </p:spPr>
+      </p:sp>
+      <p:sp>
+        <p:nvSpPr>
+          <p:cNvPr id="10" name="Text 8"/>
+          <p:cNvSpPr txBox="1"/>
+          <p:nvPr/>
+        </p:nvSpPr>
+        <p:spPr>
+          <a:xfrm>
+            <a:off x="594360" y="1892808"/>
+            <a:ext cx="384048" cy="384048"/>
+          </a:xfrm>
+          <a:prstGeom prst="rect">
+            <a:avLst/>
+          </a:prstGeom>
+          <a:noFill/>
+          <a:ln/>
+        </p:spPr>
+        <p:txBody>
+          <a:bodyPr wrap="square" lIns="0" tIns="0" rIns="0" bIns="0" rtlCol="0" anchor="ctr"/>
+          <a:lstStyle/>
+          <a:p>
+            <a:pPr algn="ctr" indent="0" marL="0">
+              <a:buNone/>
+            </a:pPr>
+            <a:r>
+              <a:rPr lang="en-US" sz="1400" b="1" dirty="0">
+                <a:solidFill>
+                  <a:schemeClr val="bg1"/>
+                </a:solidFill>
+              </a:rPr>
+              <a:t>2</a:t>
+            </a:r>
+            <a:endParaRPr lang="en-US" sz="1400" dirty="0"/>
+          </a:p>
+        </p:txBody>
+      </p:sp>
+      <p:sp>
+        <p:nvSpPr>
+          <p:cNvPr id="11" name="Text 9"/>
+          <p:cNvSpPr txBox="1"/>
+          <p:nvPr/>
+        </p:nvSpPr>
+        <p:spPr>
+          <a:xfrm>
+            <a:off x="1143000" y="1801368"/>
+            <a:ext cx="2377440" cy="566928"/>
+          </a:xfrm>
+          <a:prstGeom prst="rect">
+            <a:avLst/>
+          </a:prstGeom>
+          <a:noFill/>
+          <a:ln/>
+        </p:spPr>
+        <p:txBody>
+          <a:bodyPr wrap="square" lIns="0" tIns="0" rIns="0" bIns="0" rtlCol="0" anchor="ctr"/>
+          <a:lstStyle/>
+          <a:p>
+            <a:pPr indent="0" marL="0">
+              <a:buNone/>
+            </a:pPr>
+            <a:r>
+              <a:rPr lang="en-US" sz="1500" b="1" dirty="0">
+                <a:solidFill>
+                  <a:schemeClr val="tx1"/>
+                </a:solidFill>
+              </a:rPr>
+              <a:t>(광고) 표시</a:t>
+            </a:r>
+            <a:endParaRPr lang="en-US" sz="1500" dirty="0"/>
+          </a:p>
+        </p:txBody>
+      </p:sp>
+      <p:sp>
+        <p:nvSpPr>
+          <p:cNvPr id="12" name="Text 10"/>
+          <p:cNvSpPr txBox="1"/>
+          <p:nvPr/>
+        </p:nvSpPr>
+        <p:spPr>
+          <a:xfrm>
+            <a:off x="3566160" y="1801368"/>
+            <a:ext cx="4937760" cy="566928"/>
+          </a:xfrm>
+          <a:prstGeom prst="rect">
+            <a:avLst/>
+          </a:prstGeom>
+          <a:noFill/>
+          <a:ln/>
+        </p:spPr>
+        <p:txBody>
+          <a:bodyPr wrap="square" lIns="0" tIns="0" rIns="0" bIns="0" rtlCol="0" anchor="ctr"/>
+          <a:lstStyle/>
+          <a:p>
+            <a:pPr indent="0" marL="0">
+              <a:buNone/>
+            </a:pPr>
+            <a:r>
+              <a:rPr lang="en-US" sz="1300" dirty="0">
+                <a:solidFill>
+                  <a:schemeClr val="accent4"/>
+                </a:solidFill>
+              </a:rPr>
+              <a:t>제목·문자 맨 앞에</a:t>
+            </a:r>
+            <a:endParaRPr lang="en-US" sz="1300" dirty="0"/>
+          </a:p>
+        </p:txBody>
+      </p:sp>
+      <p:sp>
+        <p:nvSpPr>
+          <p:cNvPr id="13" name="card"/>
+          <p:cNvSpPr/>
+          <p:nvPr/>
+        </p:nvSpPr>
+        <p:spPr>
+          <a:xfrm>
+            <a:off x="457200" y="2459736"/>
+            <a:ext cx="8229600" cy="566928"/>
+          </a:xfrm>
+          <a:prstGeom prst="roundRect">
+            <a:avLst>
+              <a:gd name="adj" fmla="val 12903"/>
+            </a:avLst>
+          </a:prstGeom>
+          <a:solidFill>
+            <a:schemeClr val="bg2"/>
+          </a:solidFill>
+          <a:ln/>
+        </p:spPr>
+      </p:sp>
+      <p:sp>
+        <p:nvSpPr>
+          <p:cNvPr id="14" name="badge3"/>
+          <p:cNvSpPr/>
+          <p:nvPr/>
+        </p:nvSpPr>
+        <p:spPr>
+          <a:xfrm>
+            <a:off x="594360" y="2551176"/>
+            <a:ext cx="384048" cy="384048"/>
+          </a:xfrm>
+          <a:prstGeom prst="ellipse">
+            <a:avLst/>
+          </a:prstGeom>
+          <a:solidFill>
+            <a:schemeClr val="accent2"/>
+          </a:solidFill>
+          <a:ln/>
+        </p:spPr>
+      </p:sp>
+      <p:sp>
+        <p:nvSpPr>
+          <p:cNvPr id="15" name="Text 13"/>
+          <p:cNvSpPr txBox="1"/>
+          <p:nvPr/>
+        </p:nvSpPr>
+        <p:spPr>
+          <a:xfrm>
+            <a:off x="594360" y="2551176"/>
+            <a:ext cx="384048" cy="384048"/>
+          </a:xfrm>
+          <a:prstGeom prst="rect">
+            <a:avLst/>
+          </a:prstGeom>
+          <a:noFill/>
+          <a:ln/>
+        </p:spPr>
+        <p:txBody>
+          <a:bodyPr wrap="square" lIns="0" tIns="0" rIns="0" bIns="0" rtlCol="0" anchor="ctr"/>
+          <a:lstStyle/>
+          <a:p>
+            <a:pPr algn="ctr" indent="0" marL="0">
+              <a:buNone/>
+            </a:pPr>
+            <a:r>
+              <a:rPr lang="en-US" sz="1400" b="1" dirty="0">
+                <a:solidFill>
+                  <a:schemeClr val="bg1"/>
+                </a:solidFill>
+              </a:rPr>
+              <a:t>3</a:t>
+            </a:r>
+            <a:endParaRPr lang="en-US" sz="1400" dirty="0"/>
+          </a:p>
+        </p:txBody>
+      </p:sp>
+      <p:sp>
+        <p:nvSpPr>
+          <p:cNvPr id="16" name="Text 14"/>
+          <p:cNvSpPr txBox="1"/>
+          <p:nvPr/>
+        </p:nvSpPr>
+        <p:spPr>
+          <a:xfrm>
+            <a:off x="1143000" y="2459736"/>
+            <a:ext cx="2377440" cy="566928"/>
+          </a:xfrm>
+          <a:prstGeom prst="rect">
+            <a:avLst/>
+          </a:prstGeom>
+          <a:noFill/>
+          <a:ln/>
+        </p:spPr>
+        <p:txBody>
+          <a:bodyPr wrap="square" lIns="0" tIns="0" rIns="0" bIns="0" rtlCol="0" anchor="ctr"/>
+          <a:lstStyle/>
+          <a:p>
+            <a:pPr indent="0" marL="0">
+              <a:buNone/>
+            </a:pPr>
+            <a:r>
+              <a:rPr lang="en-US" sz="1500" b="1" dirty="0">
+                <a:solidFill>
+                  <a:schemeClr val="tx1"/>
+                </a:solidFill>
+              </a:rPr>
+              <a:t>쉬운 수신거부</a:t>
+            </a:r>
+            <a:endParaRPr lang="en-US" sz="1500" dirty="0"/>
+          </a:p>
+        </p:txBody>
+      </p:sp>
+      <p:sp>
+        <p:nvSpPr>
+          <p:cNvPr id="17" name="Text 15"/>
+          <p:cNvSpPr txBox="1"/>
+          <p:nvPr/>
+        </p:nvSpPr>
+        <p:spPr>
+          <a:xfrm>
+            <a:off x="3566160" y="2459736"/>
+            <a:ext cx="4937760" cy="566928"/>
+          </a:xfrm>
+          <a:prstGeom prst="rect">
+            <a:avLst/>
+          </a:prstGeom>
+          <a:noFill/>
+          <a:ln/>
+        </p:spPr>
+        <p:txBody>
+          <a:bodyPr wrap="square" lIns="0" tIns="0" rIns="0" bIns="0" rtlCol="0" anchor="ctr"/>
+          <a:lstStyle/>
+          <a:p>
+            <a:pPr indent="0" marL="0">
+              <a:buNone/>
+            </a:pPr>
+            <a:r>
+              <a:rPr lang="en-US" sz="1300" dirty="0">
+                <a:solidFill>
+                  <a:schemeClr val="accent4"/>
+                </a:solidFill>
+              </a:rPr>
+              <a:t>로그인 요구 등 방해 금지</a:t>
+            </a:r>
+            <a:endParaRPr lang="en-US" sz="1300" dirty="0"/>
+          </a:p>
+        </p:txBody>
+      </p:sp>
+      <p:sp>
+        <p:nvSpPr>
+          <p:cNvPr id="18" name="card"/>
+          <p:cNvSpPr/>
+          <p:nvPr/>
+        </p:nvSpPr>
+        <p:spPr>
+          <a:xfrm>
+            <a:off x="457200" y="3118104"/>
+            <a:ext cx="8229600" cy="566928"/>
+          </a:xfrm>
+          <a:prstGeom prst="roundRect">
+            <a:avLst>
+              <a:gd name="adj" fmla="val 12903"/>
+            </a:avLst>
+          </a:prstGeom>
+          <a:solidFill>
+            <a:schemeClr val="bg2"/>
+          </a:solidFill>
+          <a:ln/>
+        </p:spPr>
+      </p:sp>
+      <p:sp>
+        <p:nvSpPr>
+          <p:cNvPr id="19" name="badge4"/>
+          <p:cNvSpPr/>
+          <p:nvPr/>
+        </p:nvSpPr>
+        <p:spPr>
+          <a:xfrm>
+            <a:off x="594360" y="3209544"/>
+            <a:ext cx="384048" cy="384048"/>
+          </a:xfrm>
+          <a:prstGeom prst="ellipse">
+            <a:avLst/>
+          </a:prstGeom>
+          <a:solidFill>
+            <a:schemeClr val="accent2"/>
+          </a:solidFill>
+          <a:ln/>
+        </p:spPr>
+      </p:sp>
+      <p:sp>
+        <p:nvSpPr>
+          <p:cNvPr id="20" name="Text 18"/>
+          <p:cNvSpPr txBox="1"/>
+          <p:nvPr/>
+        </p:nvSpPr>
+        <p:spPr>
+          <a:xfrm>
+            <a:off x="594360" y="3209544"/>
+            <a:ext cx="384048" cy="384048"/>
+          </a:xfrm>
+          <a:prstGeom prst="rect">
+            <a:avLst/>
+          </a:prstGeom>
+          <a:noFill/>
+          <a:ln/>
+        </p:spPr>
+        <p:txBody>
+          <a:bodyPr wrap="square" lIns="0" tIns="0" rIns="0" bIns="0" rtlCol="0" anchor="ctr"/>
+          <a:lstStyle/>
+          <a:p>
+            <a:pPr algn="ctr" indent="0" marL="0">
+              <a:buNone/>
+            </a:pPr>
+            <a:r>
+              <a:rPr lang="en-US" sz="1400" b="1" dirty="0">
+                <a:solidFill>
+                  <a:schemeClr val="bg1"/>
+                </a:solidFill>
+              </a:rPr>
+              <a:t>4</a:t>
+            </a:r>
+            <a:endParaRPr lang="en-US" sz="1400" dirty="0"/>
+          </a:p>
+        </p:txBody>
+      </p:sp>
+      <p:sp>
+        <p:nvSpPr>
+          <p:cNvPr id="21" name="Text 19"/>
+          <p:cNvSpPr txBox="1"/>
+          <p:nvPr/>
+        </p:nvSpPr>
+        <p:spPr>
+          <a:xfrm>
+            <a:off x="1143000" y="3118104"/>
+            <a:ext cx="2377440" cy="566928"/>
+          </a:xfrm>
+          <a:prstGeom prst="rect">
+            <a:avLst/>
+          </a:prstGeom>
+          <a:noFill/>
+          <a:ln/>
+        </p:spPr>
+        <p:txBody>
+          <a:bodyPr wrap="square" lIns="0" tIns="0" rIns="0" bIns="0" rtlCol="0" anchor="ctr"/>
+          <a:lstStyle/>
+          <a:p>
+            <a:pPr indent="0" marL="0">
+              <a:buNone/>
+            </a:pPr>
+            <a:r>
+              <a:rPr lang="en-US" sz="1500" b="1" dirty="0">
+                <a:solidFill>
+                  <a:schemeClr val="tx1"/>
+                </a:solidFill>
+              </a:rPr>
+              <a:t>야간 별도 동의</a:t>
+            </a:r>
+            <a:endParaRPr lang="en-US" sz="1500" dirty="0"/>
+          </a:p>
+        </p:txBody>
+      </p:sp>
+      <p:sp>
+        <p:nvSpPr>
+          <p:cNvPr id="22" name="Text 20"/>
+          <p:cNvSpPr txBox="1"/>
+          <p:nvPr/>
+        </p:nvSpPr>
+        <p:spPr>
+          <a:xfrm>
+            <a:off x="3566160" y="3118104"/>
+            <a:ext cx="4937760" cy="566928"/>
+          </a:xfrm>
+          <a:prstGeom prst="rect">
+            <a:avLst/>
+          </a:prstGeom>
+          <a:noFill/>
+          <a:ln/>
+        </p:spPr>
+        <p:txBody>
+          <a:bodyPr wrap="square" lIns="0" tIns="0" rIns="0" bIns="0" rtlCol="0" anchor="ctr"/>
+          <a:lstStyle/>
+          <a:p>
+            <a:pPr indent="0" marL="0">
+              <a:buNone/>
+            </a:pPr>
+            <a:r>
+              <a:rPr lang="en-US" sz="1300" dirty="0">
+                <a:solidFill>
+                  <a:schemeClr val="accent4"/>
+                </a:solidFill>
+              </a:rPr>
+              <a:t>흔히 21시~다음 날 8시</a:t>
+            </a:r>
+            <a:endParaRPr lang="en-US" sz="1300" dirty="0"/>
+          </a:p>
+        </p:txBody>
+      </p:sp>
+      <p:sp>
+        <p:nvSpPr>
+          <p:cNvPr id="23" name="card"/>
+          <p:cNvSpPr/>
+          <p:nvPr/>
+        </p:nvSpPr>
+        <p:spPr>
+          <a:xfrm>
+            <a:off x="457200" y="3776472"/>
+            <a:ext cx="8229600" cy="566928"/>
+          </a:xfrm>
+          <a:prstGeom prst="roundRect">
+            <a:avLst>
+              <a:gd name="adj" fmla="val 12903"/>
+            </a:avLst>
+          </a:prstGeom>
+          <a:solidFill>
+            <a:schemeClr val="bg2"/>
+          </a:solidFill>
+          <a:ln/>
+        </p:spPr>
+      </p:sp>
+      <p:sp>
+        <p:nvSpPr>
+          <p:cNvPr id="24" name="badge5"/>
+          <p:cNvSpPr/>
+          <p:nvPr/>
+        </p:nvSpPr>
+        <p:spPr>
+          <a:xfrm>
+            <a:off x="594360" y="3867912"/>
+            <a:ext cx="384048" cy="384048"/>
+          </a:xfrm>
+          <a:prstGeom prst="ellipse">
+            <a:avLst/>
+          </a:prstGeom>
+          <a:solidFill>
+            <a:schemeClr val="accent2"/>
+          </a:solidFill>
+          <a:ln/>
+        </p:spPr>
+      </p:sp>
+      <p:sp>
+        <p:nvSpPr>
+          <p:cNvPr id="25" name="Text 23"/>
+          <p:cNvSpPr txBox="1"/>
+          <p:nvPr/>
+        </p:nvSpPr>
+        <p:spPr>
+          <a:xfrm>
+            <a:off x="594360" y="3867912"/>
+            <a:ext cx="384048" cy="384048"/>
+          </a:xfrm>
+          <a:prstGeom prst="rect">
+            <a:avLst/>
+          </a:prstGeom>
+          <a:noFill/>
+          <a:ln/>
+        </p:spPr>
+        <p:txBody>
+          <a:bodyPr wrap="square" lIns="0" tIns="0" rIns="0" bIns="0" rtlCol="0" anchor="ctr"/>
+          <a:lstStyle/>
+          <a:p>
+            <a:pPr algn="ctr" indent="0" marL="0">
+              <a:buNone/>
+            </a:pPr>
+            <a:r>
+              <a:rPr lang="en-US" sz="1400" b="1" dirty="0">
+                <a:solidFill>
+                  <a:schemeClr val="bg1"/>
+                </a:solidFill>
+              </a:rPr>
+              <a:t>5</a:t>
+            </a:r>
+            <a:endParaRPr lang="en-US" sz="1400" dirty="0"/>
+          </a:p>
+        </p:txBody>
+      </p:sp>
+      <p:sp>
+        <p:nvSpPr>
+          <p:cNvPr id="26" name="Text 24"/>
+          <p:cNvSpPr txBox="1"/>
+          <p:nvPr/>
+        </p:nvSpPr>
+        <p:spPr>
+          <a:xfrm>
+            <a:off x="1143000" y="3776472"/>
+            <a:ext cx="2377440" cy="566928"/>
+          </a:xfrm>
+          <a:prstGeom prst="rect">
+            <a:avLst/>
+          </a:prstGeom>
+          <a:noFill/>
+          <a:ln/>
+        </p:spPr>
+        <p:txBody>
+          <a:bodyPr wrap="square" lIns="0" tIns="0" rIns="0" bIns="0" rtlCol="0" anchor="ctr"/>
+          <a:lstStyle/>
+          <a:p>
+            <a:pPr indent="0" marL="0">
+              <a:buNone/>
+            </a:pPr>
+            <a:r>
+              <a:rPr lang="en-US" sz="1500" b="1" dirty="0">
+                <a:solidFill>
+                  <a:schemeClr val="tx1"/>
+                </a:solidFill>
+              </a:rPr>
+              <a:t>2년마다 확인</a:t>
+            </a:r>
+            <a:endParaRPr lang="en-US" sz="1500" dirty="0"/>
+          </a:p>
+        </p:txBody>
+      </p:sp>
+      <p:sp>
+        <p:nvSpPr>
+          <p:cNvPr id="27" name="Text 25"/>
+          <p:cNvSpPr txBox="1"/>
+          <p:nvPr/>
+        </p:nvSpPr>
+        <p:spPr>
+          <a:xfrm>
+            <a:off x="3566160" y="3776472"/>
+            <a:ext cx="4937760" cy="566928"/>
+          </a:xfrm>
+          <a:prstGeom prst="rect">
+            <a:avLst/>
+          </a:prstGeom>
+          <a:noFill/>
+          <a:ln/>
+        </p:spPr>
+        <p:txBody>
+          <a:bodyPr wrap="square" lIns="0" tIns="0" rIns="0" bIns="0" rtlCol="0" anchor="ctr"/>
+          <a:lstStyle/>
+          <a:p>
+            <a:pPr indent="0" marL="0">
+              <a:buNone/>
+            </a:pPr>
+            <a:r>
+              <a:rPr lang="en-US" sz="1300" dirty="0">
+                <a:solidFill>
+                  <a:schemeClr val="accent4"/>
+                </a:solidFill>
+              </a:rPr>
+              <a:t>계속 받을지 다시 묻기</a:t>
+            </a:r>
+            <a:endParaRPr lang="en-US" sz="1300" dirty="0"/>
+          </a:p>
+        </p:txBody>
+      </p:sp>
+      <p:sp>
+        <p:nvSpPr>
+          <p:cNvPr id="28" name="Text 26"/>
+          <p:cNvSpPr txBox="1"/>
+          <p:nvPr/>
+        </p:nvSpPr>
+        <p:spPr>
+          <a:xfrm>
+            <a:off x="457200" y="4645152"/>
+            <a:ext cx="7680960" cy="274320"/>
+          </a:xfrm>
+          <a:prstGeom prst="rect">
+            <a:avLst/>
+          </a:prstGeom>
+          <a:noFill/>
+          <a:ln/>
+        </p:spPr>
+        <p:txBody>
+          <a:bodyPr wrap="square" lIns="0" tIns="0" rIns="0" bIns="0" rtlCol="0" anchor="t"/>
+          <a:lstStyle/>
+          <a:p>
+            <a:pPr indent="0" marL="0">
+              <a:buNone/>
+            </a:pPr>
+            <a:r>
+              <a:rPr lang="en-US" sz="1000" dirty="0">
+                <a:solidFill>
+                  <a:schemeClr val="accent4"/>
+                </a:solidFill>
+              </a:rPr>
+              <a:t>주문 안내 같은 거래 메일에 광고를 섞지 않기 — 정보통신망법 제50조 (30장)</a:t>
+            </a:r>
+            <a:endParaRPr lang="en-US" sz="1000" dirty="0"/>
+          </a:p>
+        </p:txBody>
+      </p:sp>
+      <p:sp>
+        <p:nvSpPr>
+          <p:cNvPr id="25" name="Slide Number Placeholder 0"/>
+          <p:cNvSpPr>
+            <a:spLocks noGrp="1"/>
+          </p:cNvSpPr>
+          <p:nvPr>
+            <p:ph type="sldNum" sz="quarter" idx="4294967295"/>
+          </p:nvPr>
+        </p:nvSpPr>
+        <p:spPr>
+          <a:xfrm>
+            <a:off x="8321040" y="4754880"/>
+            <a:ext cx="457200" cy="274320"/>
+          </a:xfrm>
+          <a:prstGeom prst="rect">
+            <a:avLst/>
+          </a:prstGeom>
+          <a:extLst>
+            <a:ext uri="{C572A759-6A51-4108-AA02-DFA0A04FC94B}">
+              <ma14:wrappingTextBoxFlag xmlns:ma14="http://schemas.microsoft.com/office/mac/drawingml/2011/main" val="0"/>
+            </a:ext>
+          </a:extLst>
+        </p:spPr>
+        <p:txBody>
+          <a:bodyPr/>
+          <a:lstStyle>
+            <a:lvl1pPr>
+              <a:defRPr sz="1000">
+                <a:solidFill>
+                  <a:schemeClr val="accent4"/>
+                </a:solidFill>
+              </a:defRPr>
+            </a:lvl1pPr>
+          </a:lstStyle>
+          <a:p>
+            <a:pPr algn="r"/>
+            <a:fld id="{F7021451-1387-4CA6-816F-3879F97B5CBC}" type="slidenum">
+              <a:rPr b="0" lang="en-US"/>
+              <a:t>40</a:t>
+            </a:fld>
+            <a:endParaRPr lang="en-US"/>
+          </a:p>
+        </p:txBody>
+      </p:sp>
+    </p:spTree>
+  </p:cSld>
+  <p:clrMapOvr>
+    <a:masterClrMapping/>
+  </p:clrMapOvr>
+</p:sld>
+</file>
+
+<file path=ppt/slides/slide41.xml><?xml version="1.0" encoding="utf-8"?>
+<p:sld xmlns:a="http://schemas.openxmlformats.org/drawingml/2006/main" xmlns:r="http://schemas.openxmlformats.org/officeDocument/2006/relationships" xmlns:p="http://schemas.openxmlformats.org/presentationml/2006/main">
+  <p:cSld name="Slide 41">
+    <p:spTree>
+      <p:nvGrpSpPr>
+        <p:cNvPr id="1" name=""/>
+        <p:cNvGrpSpPr/>
+        <p:nvPr/>
+      </p:nvGrpSpPr>
+      <p:grpSpPr>
+        <a:xfrm>
+          <a:off x="0" y="0"/>
+          <a:ext cx="0" cy="0"/>
+          <a:chOff x="0" y="0"/>
+          <a:chExt cx="0" cy="0"/>
+        </a:xfrm>
+      </p:grpSpPr>
+      <p:sp>
+        <p:nvSpPr>
+          <p:cNvPr id="2" name="Text 0"/>
+          <p:cNvSpPr/>
+          <p:nvPr>
+            <p:ph idx="100" type="title" hasCustomPrompt="1"/>
+          </p:nvPr>
+        </p:nvSpPr>
+        <p:spPr>
+          <a:xfrm>
+            <a:off x="457200" y="274320"/>
+            <a:ext cx="8229600" cy="685800"/>
+          </a:xfrm>
+          <a:prstGeom prst="rect">
+            <a:avLst/>
+          </a:prstGeom>
+          <a:noFill/>
+          <a:ln/>
+        </p:spPr>
+        <p:txBody>
+          <a:bodyPr wrap="square" lIns="0" tIns="0" rIns="0" bIns="0" rtlCol="0" anchor="ctr"/>
+          <a:lstStyle/>
+          <a:p>
+            <a:pPr indent="0" marL="0">
+              <a:buNone/>
+            </a:pPr>
+            <a:r>
+              <a:rPr lang="en-US" sz="2800" b="1" dirty="0">
+                <a:solidFill>
+                  <a:schemeClr val="tx2"/>
+                </a:solidFill>
+              </a:rPr>
+              <a:t>광고·제휴 문의 받기</a:t>
+            </a:r>
+            <a:endParaRPr lang="en-US" sz="2800" dirty="0"/>
+          </a:p>
+        </p:txBody>
+      </p:sp>
+      <p:sp>
+        <p:nvSpPr>
+          <p:cNvPr id="3" name="Text 1"/>
+          <p:cNvSpPr txBox="1"/>
+          <p:nvPr/>
+        </p:nvSpPr>
+        <p:spPr>
+          <a:xfrm>
+            <a:off x="457200" y="1188720"/>
+            <a:ext cx="2560320" cy="365760"/>
+          </a:xfrm>
+          <a:prstGeom prst="rect">
+            <a:avLst/>
+          </a:prstGeom>
+          <a:noFill/>
+          <a:ln/>
+        </p:spPr>
+        <p:txBody>
+          <a:bodyPr wrap="square" lIns="0" tIns="0" rIns="0" bIns="0" rtlCol="0" anchor="t"/>
+          <a:lstStyle/>
+          <a:p>
+            <a:pPr indent="0" marL="0">
+              <a:buNone/>
+            </a:pPr>
+            <a:r>
+              <a:rPr lang="en-US" sz="1600" b="1" dirty="0">
+                <a:solidFill>
+                  <a:schemeClr val="accent2"/>
+                </a:solidFill>
+              </a:rPr>
+              <a:t>준비물</a:t>
+            </a:r>
+            <a:endParaRPr lang="en-US" sz="1600" dirty="0"/>
+          </a:p>
+        </p:txBody>
+      </p:sp>
+      <p:sp>
+        <p:nvSpPr>
+          <p:cNvPr id="4" name="Text 2"/>
+          <p:cNvSpPr txBox="1"/>
+          <p:nvPr/>
+        </p:nvSpPr>
+        <p:spPr>
+          <a:xfrm>
+            <a:off x="457200" y="1645920"/>
+            <a:ext cx="2651760" cy="2194560"/>
+          </a:xfrm>
+          <a:prstGeom prst="rect">
+            <a:avLst/>
+          </a:prstGeom>
+          <a:noFill/>
+          <a:ln/>
+        </p:spPr>
+        <p:txBody>
+          <a:bodyPr wrap="square" lIns="0" tIns="0" rIns="0" bIns="0" rtlCol="0" anchor="t"/>
+          <a:lstStyle/>
+          <a:p>
+            <a:pPr marL="342900" indent="-342900">
+              <a:spcAft>
+                <a:spcPts val="800"/>
+              </a:spcAft>
+              <a:buSzPct val="100000"/>
+              <a:buChar char="•"/>
+            </a:pPr>
+            <a:r>
+              <a:rPr lang="en-US" sz="1300" dirty="0">
+                <a:solidFill>
+                  <a:schemeClr val="tx1"/>
+                </a:solidFill>
+              </a:rPr>
+              <a:t>광고 문의 페이지</a:t>
+            </a:r>
+            <a:endParaRPr lang="en-US" sz="1300" dirty="0"/>
+          </a:p>
+          <a:p>
+            <a:pPr marL="342900" indent="-342900">
+              <a:spcAft>
+                <a:spcPts val="800"/>
+              </a:spcAft>
+              <a:buSzPct val="100000"/>
+              <a:buChar char="•"/>
+            </a:pPr>
+            <a:r>
+              <a:rPr lang="en-US" sz="1300" dirty="0">
+                <a:solidFill>
+                  <a:schemeClr val="tx1"/>
+                </a:solidFill>
+              </a:rPr>
+              <a:t>ads@ 전용 주소</a:t>
+            </a:r>
+            <a:endParaRPr lang="en-US" sz="1300" dirty="0"/>
+          </a:p>
+          <a:p>
+            <a:pPr marL="342900" indent="-342900">
+              <a:spcAft>
+                <a:spcPts val="800"/>
+              </a:spcAft>
+              <a:buSzPct val="100000"/>
+              <a:buChar char="•"/>
+            </a:pPr>
+            <a:r>
+              <a:rPr lang="en-US" sz="1300" dirty="0">
+                <a:solidFill>
+                  <a:schemeClr val="tx1"/>
+                </a:solidFill>
+              </a:rPr>
+              <a:t>미디어킷: 방문자 숫자 · 독자 특징 · 상품 · 가격 · 원칙</a:t>
+            </a:r>
+            <a:endParaRPr lang="en-US" sz="1300" dirty="0"/>
+          </a:p>
+        </p:txBody>
+      </p:sp>
+      <p:sp>
+        <p:nvSpPr>
+          <p:cNvPr id="5" name="Text 3"/>
+          <p:cNvSpPr txBox="1"/>
+          <p:nvPr/>
+        </p:nvSpPr>
+        <p:spPr>
+          <a:xfrm>
+            <a:off x="3291840" y="1188720"/>
+            <a:ext cx="2377440" cy="365760"/>
+          </a:xfrm>
+          <a:prstGeom prst="rect">
+            <a:avLst/>
+          </a:prstGeom>
+          <a:noFill/>
+          <a:ln/>
+        </p:spPr>
+        <p:txBody>
+          <a:bodyPr wrap="square" lIns="0" tIns="0" rIns="0" bIns="0" rtlCol="0" anchor="t"/>
+          <a:lstStyle/>
+          <a:p>
+            <a:pPr indent="0" marL="0">
+              <a:buNone/>
+            </a:pPr>
+            <a:r>
+              <a:rPr lang="en-US" sz="1600" b="1" dirty="0">
+                <a:solidFill>
+                  <a:schemeClr val="tx2"/>
+                </a:solidFill>
+              </a:rPr>
+              <a:t>진행 순서</a:t>
+            </a:r>
+            <a:endParaRPr lang="en-US" sz="1600" dirty="0"/>
+          </a:p>
+        </p:txBody>
+      </p:sp>
+      <p:sp>
+        <p:nvSpPr>
+          <p:cNvPr id="6" name="badge1"/>
+          <p:cNvSpPr/>
+          <p:nvPr/>
+        </p:nvSpPr>
+        <p:spPr>
+          <a:xfrm>
+            <a:off x="3291840" y="1645920"/>
+            <a:ext cx="329184" cy="329184"/>
+          </a:xfrm>
+          <a:prstGeom prst="ellipse">
+            <a:avLst/>
+          </a:prstGeom>
+          <a:solidFill>
+            <a:schemeClr val="tx2"/>
+          </a:solidFill>
+          <a:ln/>
+        </p:spPr>
+      </p:sp>
+      <p:sp>
+        <p:nvSpPr>
+          <p:cNvPr id="7" name="Text 5"/>
+          <p:cNvSpPr txBox="1"/>
+          <p:nvPr/>
+        </p:nvSpPr>
+        <p:spPr>
+          <a:xfrm>
+            <a:off x="3291840" y="1645920"/>
+            <a:ext cx="329184" cy="329184"/>
+          </a:xfrm>
+          <a:prstGeom prst="rect">
+            <a:avLst/>
+          </a:prstGeom>
+          <a:noFill/>
+          <a:ln/>
+        </p:spPr>
+        <p:txBody>
+          <a:bodyPr wrap="square" lIns="0" tIns="0" rIns="0" bIns="0" rtlCol="0" anchor="ctr"/>
+          <a:lstStyle/>
+          <a:p>
+            <a:pPr algn="ctr" indent="0" marL="0">
+              <a:buNone/>
+            </a:pPr>
+            <a:r>
+              <a:rPr lang="en-US" sz="1400" b="1" dirty="0">
+                <a:solidFill>
+                  <a:schemeClr val="bg1"/>
+                </a:solidFill>
+              </a:rPr>
+              <a:t>1</a:t>
+            </a:r>
+            <a:endParaRPr lang="en-US" sz="1400" dirty="0"/>
+          </a:p>
+        </p:txBody>
+      </p:sp>
+      <p:sp>
+        <p:nvSpPr>
+          <p:cNvPr id="8" name="Text 6"/>
+          <p:cNvSpPr txBox="1"/>
+          <p:nvPr/>
+        </p:nvSpPr>
+        <p:spPr>
+          <a:xfrm>
+            <a:off x="3703320" y="1627632"/>
+            <a:ext cx="1828800" cy="365760"/>
+          </a:xfrm>
+          <a:prstGeom prst="rect">
+            <a:avLst/>
+          </a:prstGeom>
+          <a:noFill/>
+          <a:ln/>
+        </p:spPr>
+        <p:txBody>
+          <a:bodyPr wrap="square" lIns="0" tIns="0" rIns="0" bIns="0" rtlCol="0" anchor="ctr"/>
+          <a:lstStyle/>
+          <a:p>
+            <a:pPr indent="0" marL="0">
+              <a:buNone/>
+            </a:pPr>
+            <a:r>
+              <a:rPr lang="en-US" sz="1300" dirty="0">
+                <a:solidFill>
+                  <a:schemeClr val="tx1"/>
+                </a:solidFill>
+              </a:rPr>
+              <a:t>광고주 확인</a:t>
+            </a:r>
+            <a:endParaRPr lang="en-US" sz="1300" dirty="0"/>
+          </a:p>
+        </p:txBody>
+      </p:sp>
+      <p:sp>
+        <p:nvSpPr>
+          <p:cNvPr id="9" name="badge2"/>
+          <p:cNvSpPr/>
+          <p:nvPr/>
+        </p:nvSpPr>
+        <p:spPr>
+          <a:xfrm>
+            <a:off x="3291840" y="2075688"/>
+            <a:ext cx="329184" cy="329184"/>
+          </a:xfrm>
+          <a:prstGeom prst="ellipse">
+            <a:avLst/>
+          </a:prstGeom>
+          <a:solidFill>
+            <a:schemeClr val="tx2"/>
+          </a:solidFill>
+          <a:ln/>
+        </p:spPr>
+      </p:sp>
+      <p:sp>
+        <p:nvSpPr>
+          <p:cNvPr id="10" name="Text 8"/>
+          <p:cNvSpPr txBox="1"/>
+          <p:nvPr/>
+        </p:nvSpPr>
+        <p:spPr>
+          <a:xfrm>
+            <a:off x="3291840" y="2075688"/>
+            <a:ext cx="329184" cy="329184"/>
+          </a:xfrm>
+          <a:prstGeom prst="rect">
+            <a:avLst/>
+          </a:prstGeom>
+          <a:noFill/>
+          <a:ln/>
+        </p:spPr>
+        <p:txBody>
+          <a:bodyPr wrap="square" lIns="0" tIns="0" rIns="0" bIns="0" rtlCol="0" anchor="ctr"/>
+          <a:lstStyle/>
+          <a:p>
+            <a:pPr algn="ctr" indent="0" marL="0">
+              <a:buNone/>
+            </a:pPr>
+            <a:r>
+              <a:rPr lang="en-US" sz="1400" b="1" dirty="0">
+                <a:solidFill>
+                  <a:schemeClr val="bg1"/>
+                </a:solidFill>
+              </a:rPr>
+              <a:t>2</a:t>
+            </a:r>
+            <a:endParaRPr lang="en-US" sz="1400" dirty="0"/>
+          </a:p>
+        </p:txBody>
+      </p:sp>
+      <p:sp>
+        <p:nvSpPr>
+          <p:cNvPr id="11" name="Text 9"/>
+          <p:cNvSpPr txBox="1"/>
+          <p:nvPr/>
+        </p:nvSpPr>
+        <p:spPr>
+          <a:xfrm>
+            <a:off x="3703320" y="2057400"/>
+            <a:ext cx="1828800" cy="365760"/>
+          </a:xfrm>
+          <a:prstGeom prst="rect">
+            <a:avLst/>
+          </a:prstGeom>
+          <a:noFill/>
+          <a:ln/>
+        </p:spPr>
+        <p:txBody>
+          <a:bodyPr wrap="square" lIns="0" tIns="0" rIns="0" bIns="0" rtlCol="0" anchor="ctr"/>
+          <a:lstStyle/>
+          <a:p>
+            <a:pPr indent="0" marL="0">
+              <a:buNone/>
+            </a:pPr>
+            <a:r>
+              <a:rPr lang="en-US" sz="1300" dirty="0">
+                <a:solidFill>
+                  <a:schemeClr val="tx1"/>
+                </a:solidFill>
+              </a:rPr>
+              <a:t>견적 · 계약</a:t>
+            </a:r>
+            <a:endParaRPr lang="en-US" sz="1300" dirty="0"/>
+          </a:p>
+        </p:txBody>
+      </p:sp>
+      <p:sp>
+        <p:nvSpPr>
+          <p:cNvPr id="12" name="badge3"/>
+          <p:cNvSpPr/>
+          <p:nvPr/>
+        </p:nvSpPr>
+        <p:spPr>
+          <a:xfrm>
+            <a:off x="3291840" y="2505456"/>
+            <a:ext cx="329184" cy="329184"/>
+          </a:xfrm>
+          <a:prstGeom prst="ellipse">
+            <a:avLst/>
+          </a:prstGeom>
+          <a:solidFill>
+            <a:schemeClr val="tx2"/>
+          </a:solidFill>
+          <a:ln/>
+        </p:spPr>
+      </p:sp>
+      <p:sp>
+        <p:nvSpPr>
+          <p:cNvPr id="13" name="Text 11"/>
+          <p:cNvSpPr txBox="1"/>
+          <p:nvPr/>
+        </p:nvSpPr>
+        <p:spPr>
+          <a:xfrm>
+            <a:off x="3291840" y="2505456"/>
+            <a:ext cx="329184" cy="329184"/>
+          </a:xfrm>
+          <a:prstGeom prst="rect">
+            <a:avLst/>
+          </a:prstGeom>
+          <a:noFill/>
+          <a:ln/>
+        </p:spPr>
+        <p:txBody>
+          <a:bodyPr wrap="square" lIns="0" tIns="0" rIns="0" bIns="0" rtlCol="0" anchor="ctr"/>
+          <a:lstStyle/>
+          <a:p>
+            <a:pPr algn="ctr" indent="0" marL="0">
+              <a:buNone/>
+            </a:pPr>
+            <a:r>
+              <a:rPr lang="en-US" sz="1400" b="1" dirty="0">
+                <a:solidFill>
+                  <a:schemeClr val="bg1"/>
+                </a:solidFill>
+              </a:rPr>
+              <a:t>3</a:t>
+            </a:r>
+            <a:endParaRPr lang="en-US" sz="1400" dirty="0"/>
+          </a:p>
+        </p:txBody>
+      </p:sp>
+      <p:sp>
+        <p:nvSpPr>
+          <p:cNvPr id="14" name="Text 12"/>
+          <p:cNvSpPr txBox="1"/>
+          <p:nvPr/>
+        </p:nvSpPr>
+        <p:spPr>
+          <a:xfrm>
+            <a:off x="3703320" y="2487168"/>
+            <a:ext cx="1828800" cy="365760"/>
+          </a:xfrm>
+          <a:prstGeom prst="rect">
+            <a:avLst/>
+          </a:prstGeom>
+          <a:noFill/>
+          <a:ln/>
+        </p:spPr>
+        <p:txBody>
+          <a:bodyPr wrap="square" lIns="0" tIns="0" rIns="0" bIns="0" rtlCol="0" anchor="ctr"/>
+          <a:lstStyle/>
+          <a:p>
+            <a:pPr indent="0" marL="0">
+              <a:buNone/>
+            </a:pPr>
+            <a:r>
+              <a:rPr lang="en-US" sz="1300" dirty="0">
+                <a:solidFill>
+                  <a:schemeClr val="tx1"/>
+                </a:solidFill>
+              </a:rPr>
+              <a:t>선불 결제</a:t>
+            </a:r>
+            <a:endParaRPr lang="en-US" sz="1300" dirty="0"/>
+          </a:p>
+        </p:txBody>
+      </p:sp>
+      <p:sp>
+        <p:nvSpPr>
+          <p:cNvPr id="15" name="badge4"/>
+          <p:cNvSpPr/>
+          <p:nvPr/>
+        </p:nvSpPr>
+        <p:spPr>
+          <a:xfrm>
+            <a:off x="3291840" y="2935224"/>
+            <a:ext cx="329184" cy="329184"/>
+          </a:xfrm>
+          <a:prstGeom prst="ellipse">
+            <a:avLst/>
+          </a:prstGeom>
+          <a:solidFill>
+            <a:schemeClr val="tx2"/>
+          </a:solidFill>
+          <a:ln/>
+        </p:spPr>
+      </p:sp>
+      <p:sp>
+        <p:nvSpPr>
+          <p:cNvPr id="16" name="Text 14"/>
+          <p:cNvSpPr txBox="1"/>
+          <p:nvPr/>
+        </p:nvSpPr>
+        <p:spPr>
+          <a:xfrm>
+            <a:off x="3291840" y="2935224"/>
+            <a:ext cx="329184" cy="329184"/>
+          </a:xfrm>
+          <a:prstGeom prst="rect">
+            <a:avLst/>
+          </a:prstGeom>
+          <a:noFill/>
+          <a:ln/>
+        </p:spPr>
+        <p:txBody>
+          <a:bodyPr wrap="square" lIns="0" tIns="0" rIns="0" bIns="0" rtlCol="0" anchor="ctr"/>
+          <a:lstStyle/>
+          <a:p>
+            <a:pPr algn="ctr" indent="0" marL="0">
+              <a:buNone/>
+            </a:pPr>
+            <a:r>
+              <a:rPr lang="en-US" sz="1400" b="1" dirty="0">
+                <a:solidFill>
+                  <a:schemeClr val="bg1"/>
+                </a:solidFill>
+              </a:rPr>
+              <a:t>4</a:t>
+            </a:r>
+            <a:endParaRPr lang="en-US" sz="1400" dirty="0"/>
+          </a:p>
+        </p:txBody>
+      </p:sp>
+      <p:sp>
+        <p:nvSpPr>
+          <p:cNvPr id="17" name="Text 15"/>
+          <p:cNvSpPr txBox="1"/>
+          <p:nvPr/>
+        </p:nvSpPr>
+        <p:spPr>
+          <a:xfrm>
+            <a:off x="3703320" y="2916936"/>
+            <a:ext cx="1828800" cy="365760"/>
+          </a:xfrm>
+          <a:prstGeom prst="rect">
+            <a:avLst/>
+          </a:prstGeom>
+          <a:noFill/>
+          <a:ln/>
+        </p:spPr>
+        <p:txBody>
+          <a:bodyPr wrap="square" lIns="0" tIns="0" rIns="0" bIns="0" rtlCol="0" anchor="ctr"/>
+          <a:lstStyle/>
+          <a:p>
+            <a:pPr indent="0" marL="0">
+              <a:buNone/>
+            </a:pPr>
+            <a:r>
+              <a:rPr lang="en-US" sz="1300" dirty="0">
+                <a:solidFill>
+                  <a:schemeClr val="tx1"/>
+                </a:solidFill>
+              </a:rPr>
+              <a:t>소재 검수</a:t>
+            </a:r>
+            <a:endParaRPr lang="en-US" sz="1300" dirty="0"/>
+          </a:p>
+        </p:txBody>
+      </p:sp>
+      <p:sp>
+        <p:nvSpPr>
+          <p:cNvPr id="18" name="badge5"/>
+          <p:cNvSpPr/>
+          <p:nvPr/>
+        </p:nvSpPr>
+        <p:spPr>
+          <a:xfrm>
+            <a:off x="3291840" y="3364992"/>
+            <a:ext cx="329184" cy="329184"/>
+          </a:xfrm>
+          <a:prstGeom prst="ellipse">
+            <a:avLst/>
+          </a:prstGeom>
+          <a:solidFill>
+            <a:schemeClr val="tx2"/>
+          </a:solidFill>
+          <a:ln/>
+        </p:spPr>
+      </p:sp>
+      <p:sp>
+        <p:nvSpPr>
+          <p:cNvPr id="19" name="Text 17"/>
+          <p:cNvSpPr txBox="1"/>
+          <p:nvPr/>
+        </p:nvSpPr>
+        <p:spPr>
+          <a:xfrm>
+            <a:off x="3291840" y="3364992"/>
+            <a:ext cx="329184" cy="329184"/>
+          </a:xfrm>
+          <a:prstGeom prst="rect">
+            <a:avLst/>
+          </a:prstGeom>
+          <a:noFill/>
+          <a:ln/>
+        </p:spPr>
+        <p:txBody>
+          <a:bodyPr wrap="square" lIns="0" tIns="0" rIns="0" bIns="0" rtlCol="0" anchor="ctr"/>
+          <a:lstStyle/>
+          <a:p>
+            <a:pPr algn="ctr" indent="0" marL="0">
+              <a:buNone/>
+            </a:pPr>
+            <a:r>
+              <a:rPr lang="en-US" sz="1400" b="1" dirty="0">
+                <a:solidFill>
+                  <a:schemeClr val="bg1"/>
+                </a:solidFill>
+              </a:rPr>
+              <a:t>5</a:t>
+            </a:r>
+            <a:endParaRPr lang="en-US" sz="1400" dirty="0"/>
+          </a:p>
+        </p:txBody>
+      </p:sp>
+      <p:sp>
+        <p:nvSpPr>
+          <p:cNvPr id="20" name="Text 18"/>
+          <p:cNvSpPr txBox="1"/>
+          <p:nvPr/>
+        </p:nvSpPr>
+        <p:spPr>
+          <a:xfrm>
+            <a:off x="3703320" y="3346704"/>
+            <a:ext cx="1828800" cy="365760"/>
+          </a:xfrm>
+          <a:prstGeom prst="rect">
+            <a:avLst/>
+          </a:prstGeom>
+          <a:noFill/>
+          <a:ln/>
+        </p:spPr>
+        <p:txBody>
+          <a:bodyPr wrap="square" lIns="0" tIns="0" rIns="0" bIns="0" rtlCol="0" anchor="ctr"/>
+          <a:lstStyle/>
+          <a:p>
+            <a:pPr indent="0" marL="0">
+              <a:buNone/>
+            </a:pPr>
+            <a:r>
+              <a:rPr lang="en-US" sz="1300" dirty="0">
+                <a:solidFill>
+                  <a:schemeClr val="tx1"/>
+                </a:solidFill>
+              </a:rPr>
+              <a:t>광고 표시 게재</a:t>
+            </a:r>
+            <a:endParaRPr lang="en-US" sz="1300" dirty="0"/>
+          </a:p>
+        </p:txBody>
+      </p:sp>
+      <p:sp>
+        <p:nvSpPr>
+          <p:cNvPr id="21" name="badge6"/>
+          <p:cNvSpPr/>
+          <p:nvPr/>
+        </p:nvSpPr>
+        <p:spPr>
+          <a:xfrm>
+            <a:off x="3291840" y="3794760"/>
+            <a:ext cx="329184" cy="329184"/>
+          </a:xfrm>
+          <a:prstGeom prst="ellipse">
+            <a:avLst/>
+          </a:prstGeom>
+          <a:solidFill>
+            <a:schemeClr val="tx2"/>
+          </a:solidFill>
+          <a:ln/>
+        </p:spPr>
+      </p:sp>
+      <p:sp>
+        <p:nvSpPr>
+          <p:cNvPr id="22" name="Text 20"/>
+          <p:cNvSpPr txBox="1"/>
+          <p:nvPr/>
+        </p:nvSpPr>
+        <p:spPr>
+          <a:xfrm>
+            <a:off x="3291840" y="3794760"/>
+            <a:ext cx="329184" cy="329184"/>
+          </a:xfrm>
+          <a:prstGeom prst="rect">
+            <a:avLst/>
+          </a:prstGeom>
+          <a:noFill/>
+          <a:ln/>
+        </p:spPr>
+        <p:txBody>
+          <a:bodyPr wrap="square" lIns="0" tIns="0" rIns="0" bIns="0" rtlCol="0" anchor="ctr"/>
+          <a:lstStyle/>
+          <a:p>
+            <a:pPr algn="ctr" indent="0" marL="0">
+              <a:buNone/>
+            </a:pPr>
+            <a:r>
+              <a:rPr lang="en-US" sz="1400" b="1" dirty="0">
+                <a:solidFill>
+                  <a:schemeClr val="bg1"/>
+                </a:solidFill>
+              </a:rPr>
+              <a:t>6</a:t>
+            </a:r>
+            <a:endParaRPr lang="en-US" sz="1400" dirty="0"/>
+          </a:p>
+        </p:txBody>
+      </p:sp>
+      <p:sp>
+        <p:nvSpPr>
+          <p:cNvPr id="23" name="Text 21"/>
+          <p:cNvSpPr txBox="1"/>
+          <p:nvPr/>
+        </p:nvSpPr>
+        <p:spPr>
+          <a:xfrm>
+            <a:off x="3703320" y="3776472"/>
+            <a:ext cx="1828800" cy="365760"/>
+          </a:xfrm>
+          <a:prstGeom prst="rect">
+            <a:avLst/>
+          </a:prstGeom>
+          <a:noFill/>
+          <a:ln/>
+        </p:spPr>
+        <p:txBody>
+          <a:bodyPr wrap="square" lIns="0" tIns="0" rIns="0" bIns="0" rtlCol="0" anchor="ctr"/>
+          <a:lstStyle/>
+          <a:p>
+            <a:pPr indent="0" marL="0">
+              <a:buNone/>
+            </a:pPr>
+            <a:r>
+              <a:rPr lang="en-US" sz="1300" dirty="0">
+                <a:solidFill>
+                  <a:schemeClr val="tx1"/>
+                </a:solidFill>
+              </a:rPr>
+              <a:t>결과 보고</a:t>
+            </a:r>
+            <a:endParaRPr lang="en-US" sz="1300" dirty="0"/>
+          </a:p>
+        </p:txBody>
+      </p:sp>
+      <p:sp>
+        <p:nvSpPr>
+          <p:cNvPr id="24" name="card"/>
+          <p:cNvSpPr/>
+          <p:nvPr/>
+        </p:nvSpPr>
+        <p:spPr>
+          <a:xfrm>
+            <a:off x="5852160" y="1188720"/>
+            <a:ext cx="2834640" cy="3200400"/>
+          </a:xfrm>
+          <a:prstGeom prst="roundRect">
+            <a:avLst>
+              <a:gd name="adj" fmla="val 2581"/>
+            </a:avLst>
+          </a:prstGeom>
+          <a:solidFill>
+            <a:schemeClr val="tx2"/>
+          </a:solidFill>
+          <a:ln/>
+        </p:spPr>
+      </p:sp>
+      <p:sp>
+        <p:nvSpPr>
+          <p:cNvPr id="25" name="Text 23"/>
+          <p:cNvSpPr txBox="1"/>
+          <p:nvPr/>
+        </p:nvSpPr>
+        <p:spPr>
+          <a:xfrm>
+            <a:off x="6035040" y="1325880"/>
+            <a:ext cx="2468880" cy="365760"/>
+          </a:xfrm>
+          <a:prstGeom prst="rect">
+            <a:avLst/>
+          </a:prstGeom>
+          <a:noFill/>
+          <a:ln/>
+        </p:spPr>
+        <p:txBody>
+          <a:bodyPr wrap="square" lIns="0" tIns="0" rIns="0" bIns="0" rtlCol="0" anchor="t"/>
+          <a:lstStyle/>
+          <a:p>
+            <a:pPr indent="0" marL="0">
+              <a:buNone/>
+            </a:pPr>
+            <a:r>
+              <a:rPr lang="en-US" sz="1600" b="1" dirty="0">
+                <a:solidFill>
+                  <a:schemeClr val="accent6"/>
+                </a:solidFill>
+              </a:rPr>
+              <a:t>거절할 광고</a:t>
+            </a:r>
+            <a:endParaRPr lang="en-US" sz="1600" dirty="0"/>
+          </a:p>
+        </p:txBody>
+      </p:sp>
+      <p:sp>
+        <p:nvSpPr>
+          <p:cNvPr id="26" name="Text 24"/>
+          <p:cNvSpPr txBox="1"/>
+          <p:nvPr/>
+        </p:nvSpPr>
+        <p:spPr>
+          <a:xfrm>
+            <a:off x="6035040" y="1783080"/>
+            <a:ext cx="2560320" cy="2468880"/>
+          </a:xfrm>
+          <a:prstGeom prst="rect">
+            <a:avLst/>
+          </a:prstGeom>
+          <a:noFill/>
+          <a:ln/>
+        </p:spPr>
+        <p:txBody>
+          <a:bodyPr wrap="square" lIns="0" tIns="0" rIns="0" bIns="0" rtlCol="0" anchor="t"/>
+          <a:lstStyle/>
+          <a:p>
+            <a:pPr marL="342900" indent="-342900">
+              <a:spcAft>
+                <a:spcPts val="600"/>
+              </a:spcAft>
+              <a:buSzPct val="100000"/>
+              <a:buChar char="•"/>
+            </a:pPr>
+            <a:r>
+              <a:rPr lang="en-US" sz="1200" dirty="0">
+                <a:solidFill>
+                  <a:schemeClr val="bg1"/>
+                </a:solidFill>
+              </a:rPr>
+              <a:t>불법 도박 · 토토</a:t>
+            </a:r>
+            <a:endParaRPr lang="en-US" sz="1200" dirty="0"/>
+          </a:p>
+          <a:p>
+            <a:pPr marL="342900" indent="-342900">
+              <a:spcAft>
+                <a:spcPts val="600"/>
+              </a:spcAft>
+              <a:buSzPct val="100000"/>
+              <a:buChar char="•"/>
+            </a:pPr>
+            <a:r>
+              <a:rPr lang="en-US" sz="1200" dirty="0">
+                <a:solidFill>
+                  <a:schemeClr val="bg1"/>
+                </a:solidFill>
+              </a:rPr>
+              <a:t>성인물</a:t>
+            </a:r>
+            <a:endParaRPr lang="en-US" sz="1200" dirty="0"/>
+          </a:p>
+          <a:p>
+            <a:pPr marL="342900" indent="-342900">
+              <a:spcAft>
+                <a:spcPts val="600"/>
+              </a:spcAft>
+              <a:buSzPct val="100000"/>
+              <a:buChar char="•"/>
+            </a:pPr>
+            <a:r>
+              <a:rPr lang="en-US" sz="1200" dirty="0">
+                <a:solidFill>
+                  <a:schemeClr val="bg1"/>
+                </a:solidFill>
+              </a:rPr>
+              <a:t>수익 보장 투자 · 코인</a:t>
+            </a:r>
+            <a:endParaRPr lang="en-US" sz="1200" dirty="0"/>
+          </a:p>
+          <a:p>
+            <a:pPr marL="342900" indent="-342900">
+              <a:spcAft>
+                <a:spcPts val="600"/>
+              </a:spcAft>
+              <a:buSzPct val="100000"/>
+              <a:buChar char="•"/>
+            </a:pPr>
+            <a:r>
+              <a:rPr lang="en-US" sz="1200" dirty="0">
+                <a:solidFill>
+                  <a:schemeClr val="bg1"/>
+                </a:solidFill>
+              </a:rPr>
+              <a:t>의약품 효능</a:t>
+            </a:r>
+            <a:endParaRPr lang="en-US" sz="1200" dirty="0"/>
+          </a:p>
+          <a:p>
+            <a:pPr marL="342900" indent="-342900">
+              <a:spcAft>
+                <a:spcPts val="600"/>
+              </a:spcAft>
+              <a:buSzPct val="100000"/>
+              <a:buChar char="•"/>
+            </a:pPr>
+            <a:r>
+              <a:rPr lang="en-US" sz="1200" dirty="0">
+                <a:solidFill>
+                  <a:schemeClr val="bg1"/>
+                </a:solidFill>
+              </a:rPr>
+              <a:t>광고 표시 없이 해 달라는 요청</a:t>
+            </a:r>
+            <a:endParaRPr lang="en-US" sz="1200" dirty="0"/>
+          </a:p>
+          <a:p>
+            <a:pPr marL="342900" indent="-342900">
+              <a:spcAft>
+                <a:spcPts val="600"/>
+              </a:spcAft>
+              <a:buSzPct val="100000"/>
+              <a:buChar char="•"/>
+            </a:pPr>
+            <a:r>
+              <a:rPr lang="en-US" sz="1200" dirty="0">
+                <a:solidFill>
+                  <a:schemeClr val="bg1"/>
+                </a:solidFill>
+              </a:rPr>
+              <a:t>백링크 판매 · 수상한 첨부 파일</a:t>
+            </a:r>
+            <a:endParaRPr lang="en-US" sz="1200" dirty="0"/>
+          </a:p>
+        </p:txBody>
+      </p:sp>
+      <p:sp>
+        <p:nvSpPr>
+          <p:cNvPr id="25" name="Slide Number Placeholder 0"/>
+          <p:cNvSpPr>
+            <a:spLocks noGrp="1"/>
+          </p:cNvSpPr>
+          <p:nvPr>
+            <p:ph type="sldNum" sz="quarter" idx="4294967295"/>
+          </p:nvPr>
+        </p:nvSpPr>
+        <p:spPr>
+          <a:xfrm>
+            <a:off x="8321040" y="4754880"/>
+            <a:ext cx="457200" cy="274320"/>
+          </a:xfrm>
+          <a:prstGeom prst="rect">
+            <a:avLst/>
+          </a:prstGeom>
+          <a:extLst>
+            <a:ext uri="{C572A759-6A51-4108-AA02-DFA0A04FC94B}">
+              <ma14:wrappingTextBoxFlag xmlns:ma14="http://schemas.microsoft.com/office/mac/drawingml/2011/main" val="0"/>
+            </a:ext>
+          </a:extLst>
+        </p:spPr>
+        <p:txBody>
+          <a:bodyPr/>
+          <a:lstStyle>
+            <a:lvl1pPr>
+              <a:defRPr sz="1000">
+                <a:solidFill>
+                  <a:schemeClr val="accent4"/>
+                </a:solidFill>
+              </a:defRPr>
+            </a:lvl1pPr>
+          </a:lstStyle>
+          <a:p>
+            <a:pPr algn="r"/>
+            <a:fld id="{F7021451-1387-4CA6-816F-3879F97B5CBC}" type="slidenum">
+              <a:rPr b="0" lang="en-US"/>
+              <a:t>41</a:t>
+            </a:fld>
+            <a:endParaRPr lang="en-US"/>
+          </a:p>
+        </p:txBody>
+      </p:sp>
+    </p:spTree>
+  </p:cSld>
+  <p:clrMapOvr>
+    <a:masterClrMapping/>
+  </p:clrMapOvr>
+</p:sld>
+</file>
+
+<file path=ppt/slides/slide42.xml><?xml version="1.0" encoding="utf-8"?>
+<p:sld xmlns:a="http://schemas.openxmlformats.org/drawingml/2006/main" xmlns:r="http://schemas.openxmlformats.org/officeDocument/2006/relationships" xmlns:p="http://schemas.openxmlformats.org/presentationml/2006/main">
+  <p:cSld name="Slide 42">
+    <p:spTree>
+      <p:nvGrpSpPr>
+        <p:cNvPr id="1" name=""/>
+        <p:cNvGrpSpPr/>
+        <p:nvPr/>
+      </p:nvGrpSpPr>
+      <p:grpSpPr>
+        <a:xfrm>
+          <a:off x="0" y="0"/>
+          <a:ext cx="0" cy="0"/>
+          <a:chOff x="0" y="0"/>
+          <a:chExt cx="0" cy="0"/>
+        </a:xfrm>
+      </p:grpSpPr>
+      <p:sp>
+        <p:nvSpPr>
+          <p:cNvPr id="2" name="Text 0"/>
+          <p:cNvSpPr/>
+          <p:nvPr>
+            <p:ph idx="100" type="title" hasCustomPrompt="1"/>
+          </p:nvPr>
+        </p:nvSpPr>
+        <p:spPr>
+          <a:xfrm>
+            <a:off x="548640" y="1371600"/>
+            <a:ext cx="8046720" cy="1280160"/>
+          </a:xfrm>
+          <a:prstGeom prst="rect">
+            <a:avLst/>
+          </a:prstGeom>
+          <a:noFill/>
+          <a:ln/>
+        </p:spPr>
+        <p:txBody>
+          <a:bodyPr wrap="square" lIns="0" tIns="0" rIns="0" bIns="0" rtlCol="0" anchor="b"/>
+          <a:lstStyle/>
+          <a:p>
+            <a:pPr algn="l" indent="0" marL="0">
+              <a:buNone/>
+            </a:pPr>
+            <a:r>
+              <a:rPr lang="en-US" sz="4000" b="1" dirty="0">
+                <a:solidFill>
+                  <a:schemeClr val="bg1"/>
+                </a:solidFill>
+              </a:rPr>
+              <a:t>안전하게, 자주 반복하기</a:t>
+            </a:r>
+            <a:endParaRPr lang="en-US" sz="4000" dirty="0"/>
+          </a:p>
+        </p:txBody>
+      </p:sp>
+      <p:sp>
+        <p:nvSpPr>
+          <p:cNvPr id="3" name="Text 0"/>
+          <p:cNvSpPr/>
+          <p:nvPr>
+            <p:ph idx="101" type="body" hasCustomPrompt="1"/>
+          </p:nvPr>
+        </p:nvSpPr>
+        <p:spPr>
+          <a:xfrm>
+            <a:off x="548640" y="2788920"/>
+            <a:ext cx="8046720" cy="1097280"/>
+          </a:xfrm>
+          <a:prstGeom prst="rect">
+            <a:avLst/>
+          </a:prstGeom>
+          <a:noFill/>
+          <a:ln/>
+        </p:spPr>
+        <p:txBody>
+          <a:bodyPr wrap="square" lIns="0" tIns="0" rIns="0" bIns="0" rtlCol="0" anchor="t"/>
+          <a:lstStyle/>
+          <a:p>
+            <a:pPr algn="l" indent="0" marL="0">
+              <a:buNone/>
+            </a:pPr>
+            <a:r>
+              <a:rPr lang="en-US" sz="1800" dirty="0">
+                <a:solidFill>
+                  <a:schemeClr val="bg2"/>
+                </a:solidFill>
+              </a:rPr>
+              <a:t>기획 → 백업 → 연습용 사이트에서 수정 → 확인 → 배포 → 감시 → 숫자 보기 → 다시 기획</a:t>
+            </a:r>
+            <a:endParaRPr lang="en-US" sz="1800" dirty="0"/>
+          </a:p>
+          <a:p>
+            <a:pPr algn="l" indent="0" marL="0">
+              <a:buNone/>
+            </a:pPr>
+            <a:r>
+              <a:rPr lang="en-US" sz="1800" dirty="0">
+                <a:solidFill>
+                  <a:schemeClr val="bg2"/>
+                </a:solidFill>
+              </a:rPr>
+              <a:t>다음 할 일: docs/13-practice-scenario.md 를 읽고 15장 퀴즈 풀기</a:t>
+            </a:r>
+            <a:endParaRPr lang="en-US" sz="1800" dirty="0"/>
           </a:p>
         </p:txBody>
       </p:sp>

--- a/slides/internet-business-101.pptx
+++ b/slides/internet-business-101.pptx
@@ -47,9 +47,16 @@
     <p:sldId id="295" r:id="rId41"/>
     <p:sldId id="296" r:id="rId42"/>
     <p:sldId id="297" r:id="rId43"/>
+    <p:sldId id="298" r:id="rId44"/>
+    <p:sldId id="299" r:id="rId45"/>
+    <p:sldId id="300" r:id="rId46"/>
+    <p:sldId id="301" r:id="rId47"/>
+    <p:sldId id="302" r:id="rId48"/>
+    <p:sldId id="303" r:id="rId49"/>
+    <p:sldId id="304" r:id="rId50"/>
   </p:sldIdLst>
   <p:notesMasterIdLst>
-    <p:notesMasterId r:id="rId44"/>
+    <p:notesMasterId r:id="rId51"/>
   </p:notesMasterIdLst>
   <p:sldSz cx="9144000" cy="5143500"/>
   <p:notesSz cx="5143500" cy="9144000"/>
@@ -148,13 +155,13 @@
   <p:extLst>
     <p:ext uri="{521415D9-36F7-43E2-AB2F-B90AF26B5E84}">
       <p14:sectionLst xmlns:p14="http://schemas.microsoft.com/office/powerpoint/2010/main">
-        <p14:section name="시작" id="{10e2940f-c33a-d474-aa37-fa31966246c9}">
+        <p14:section name="시작" id="{92378333-d2d1-b9ce-3178-93a32a897fc6}">
           <p14:sldIdLst>
             <p14:sldId id="256"/>
             <p14:sldId id="257"/>
           </p14:sldIdLst>
         </p14:section>
-        <p14:section name="큰 그림" id="{d07508c2-be9a-d2d1-f51a-7dccbe0421ce}">
+        <p14:section name="큰 그림" id="{409d245e-d63d-d1c1-0cfa-994d67e0510f}">
           <p14:sldIdLst>
             <p14:sldId id="258"/>
             <p14:sldId id="259"/>
@@ -163,13 +170,13 @@
             <p14:sldId id="262"/>
           </p14:sldIdLst>
         </p14:section>
-        <p14:section name="만들기" id="{f7fc37d8-9336-246f-5dc1-b8165271ebd5}">
+        <p14:section name="만들기" id="{0dc08d9a-aee0-b602-fc2c-d92142e9d3fa}">
           <p14:sldIdLst>
             <p14:sldId id="263"/>
             <p14:sldId id="264"/>
           </p14:sldIdLst>
         </p14:section>
-        <p14:section name="운영하기" id="{b92e6db4-1192-d4f6-f3cd-f30ad2a7ee03}">
+        <p14:section name="운영하기" id="{ab3a47b9-ef36-865c-c704-acf112ed8b24}">
           <p14:sldIdLst>
             <p14:sldId id="265"/>
             <p14:sldId id="266"/>
@@ -183,18 +190,18 @@
             <p14:sldId id="274"/>
           </p14:sldIdLst>
         </p14:section>
-        <p14:section name="키우기" id="{739c3264-c882-085d-bfe1-dc5a738132b0}">
+        <p14:section name="키우기" id="{04c8a67d-7a86-ca1c-aa35-4676d7ccd5cb}">
           <p14:sldIdLst>
             <p14:sldId id="275"/>
             <p14:sldId id="276"/>
           </p14:sldIdLst>
         </p14:section>
-        <p14:section name="실전" id="{4906123d-c906-4cb5-7674-cdf334ca36d3}">
+        <p14:section name="실전" id="{11d1d42d-8101-6295-9512-c1bdd0f48013}">
           <p14:sldIdLst>
             <p14:sldId id="277"/>
           </p14:sldIdLst>
         </p14:section>
-        <p14:section name="여러 가지 사이트 사업" id="{ffa65975-0998-bb64-9284-d47561e1ea04}">
+        <p14:section name="여러 가지 사이트 사업" id="{7081f729-0752-8e5d-d07a-5ed32d60d222}">
           <p14:sldIdLst>
             <p14:sldId id="278"/>
             <p14:sldId id="279"/>
@@ -205,7 +212,7 @@
             <p14:sldId id="284"/>
           </p14:sldIdLst>
         </p14:section>
-        <p14:section name="더 넓은 분류" id="{eea227fe-7526-e5dc-dd1d-e6fae17eab13}">
+        <p14:section name="더 넓은 분류" id="{46b14099-68ed-1128-ee0a-e95c26c4b115}">
           <p14:sldIdLst>
             <p14:sldId id="285"/>
             <p14:sldId id="286"/>
@@ -216,14 +223,25 @@
             <p14:sldId id="291"/>
           </p14:sldIdLst>
         </p14:section>
-        <p14:section name="문의·광고 받기" id="{2f74dd51-0644-9677-747c-d49b0f225536}">
+        <p14:section name="문의·광고 받기" id="{6084dcc1-3161-c67a-b52f-26f2026a8e56}">
           <p14:sldIdLst>
             <p14:sldId id="292"/>
             <p14:sldId id="293"/>
             <p14:sldId id="294"/>
             <p14:sldId id="295"/>
             <p14:sldId id="296"/>
+          </p14:sldIdLst>
+        </p14:section>
+        <p14:section name="마케팅 실전" id="{2ec1711a-04c7-598d-dded-c86fc39889e8}">
+          <p14:sldIdLst>
             <p14:sldId id="297"/>
+            <p14:sldId id="298"/>
+            <p14:sldId id="299"/>
+            <p14:sldId id="300"/>
+            <p14:sldId id="301"/>
+            <p14:sldId id="302"/>
+            <p14:sldId id="303"/>
+            <p14:sldId id="304"/>
           </p14:sldIdLst>
         </p14:section>
       </p14:sectionLst>
@@ -4766,6 +4784,622 @@
             <a:fld id="{F7021451-1387-4CA6-816F-3879F97B5CBC}" type="slidenum">
               <a:rPr lang="en-US"/>
               <a:t>42</a:t>
+            </a:fld>
+            <a:endParaRPr lang="en-US"/>
+          </a:p>
+        </p:txBody>
+      </p:sp>
+    </p:spTree>
+    <p:extLst>
+      <p:ext uri="{BB962C8B-B14F-4D97-AF65-F5344CB8AC3E}">
+        <p14:creationId xmlns:p14="http://schemas.microsoft.com/office/powerpoint/2010/main" val="1024086991"/>
+      </p:ext>
+    </p:extLst>
+  </p:cSld>
+  <p:clrMapOvr>
+    <a:masterClrMapping/>
+  </p:clrMapOvr>
+</p:notes>
+</file>
+
+<file path=ppt/notesSlides/notesSlide43.xml><?xml version="1.0" encoding="utf-8"?>
+<p:notes xmlns:a="http://schemas.openxmlformats.org/drawingml/2006/main" xmlns:r="http://schemas.openxmlformats.org/officeDocument/2006/relationships" xmlns:p="http://schemas.openxmlformats.org/presentationml/2006/main">
+  <p:cSld>
+    <p:spTree>
+      <p:nvGrpSpPr>
+        <p:cNvPr id="1" name=""/>
+        <p:cNvGrpSpPr/>
+        <p:nvPr/>
+      </p:nvGrpSpPr>
+      <p:grpSpPr>
+        <a:xfrm>
+          <a:off x="0" y="0"/>
+          <a:ext cx="0" cy="0"/>
+          <a:chOff x="0" y="0"/>
+          <a:chExt cx="0" cy="0"/>
+        </a:xfrm>
+      </p:grpSpPr>
+      <p:sp>
+        <p:nvSpPr>
+          <p:cNvPr id="2" name="Slide Image Placeholder 1"/>
+          <p:cNvSpPr>
+            <a:spLocks noGrp="1" noRot="1" noChangeAspect="1"/>
+          </p:cNvSpPr>
+          <p:nvPr>
+            <p:ph type="sldImg"/>
+          </p:nvPr>
+        </p:nvSpPr>
+        <p:spPr/>
+      </p:sp>
+      <p:sp>
+        <p:nvSpPr>
+          <p:cNvPr id="3" name="Notes Placeholder 2"/>
+          <p:cNvSpPr>
+            <a:spLocks noGrp="1"/>
+          </p:cNvSpPr>
+          <p:nvPr>
+            <p:ph type="body" idx="1"/>
+          </p:nvPr>
+        </p:nvSpPr>
+        <p:spPr/>
+        <p:txBody>
+          <a:bodyPr/>
+          <a:lstStyle/>
+          <a:p>
+            <a:r>
+              <a:rPr lang="en-US" dirty="0"/>
+              <a:t/>
+            </a:r>
+            <a:endParaRPr lang="en-US" dirty="0"/>
+          </a:p>
+        </p:txBody>
+      </p:sp>
+      <p:sp>
+        <p:nvSpPr>
+          <p:cNvPr id="4" name="Slide Number Placeholder 3"/>
+          <p:cNvSpPr>
+            <a:spLocks noGrp="1"/>
+          </p:cNvSpPr>
+          <p:nvPr>
+            <p:ph type="sldNum" sz="quarter" idx="10"/>
+          </p:nvPr>
+        </p:nvSpPr>
+        <p:spPr/>
+        <p:txBody>
+          <a:bodyPr/>
+          <a:lstStyle/>
+          <a:p>
+            <a:fld id="{F7021451-1387-4CA6-816F-3879F97B5CBC}" type="slidenum">
+              <a:rPr lang="en-US"/>
+              <a:t>43</a:t>
+            </a:fld>
+            <a:endParaRPr lang="en-US"/>
+          </a:p>
+        </p:txBody>
+      </p:sp>
+    </p:spTree>
+    <p:extLst>
+      <p:ext uri="{BB962C8B-B14F-4D97-AF65-F5344CB8AC3E}">
+        <p14:creationId xmlns:p14="http://schemas.microsoft.com/office/powerpoint/2010/main" val="1024086991"/>
+      </p:ext>
+    </p:extLst>
+  </p:cSld>
+  <p:clrMapOvr>
+    <a:masterClrMapping/>
+  </p:clrMapOvr>
+</p:notes>
+</file>
+
+<file path=ppt/notesSlides/notesSlide44.xml><?xml version="1.0" encoding="utf-8"?>
+<p:notes xmlns:a="http://schemas.openxmlformats.org/drawingml/2006/main" xmlns:r="http://schemas.openxmlformats.org/officeDocument/2006/relationships" xmlns:p="http://schemas.openxmlformats.org/presentationml/2006/main">
+  <p:cSld>
+    <p:spTree>
+      <p:nvGrpSpPr>
+        <p:cNvPr id="1" name=""/>
+        <p:cNvGrpSpPr/>
+        <p:nvPr/>
+      </p:nvGrpSpPr>
+      <p:grpSpPr>
+        <a:xfrm>
+          <a:off x="0" y="0"/>
+          <a:ext cx="0" cy="0"/>
+          <a:chOff x="0" y="0"/>
+          <a:chExt cx="0" cy="0"/>
+        </a:xfrm>
+      </p:grpSpPr>
+      <p:sp>
+        <p:nvSpPr>
+          <p:cNvPr id="2" name="Slide Image Placeholder 1"/>
+          <p:cNvSpPr>
+            <a:spLocks noGrp="1" noRot="1" noChangeAspect="1"/>
+          </p:cNvSpPr>
+          <p:nvPr>
+            <p:ph type="sldImg"/>
+          </p:nvPr>
+        </p:nvSpPr>
+        <p:spPr/>
+      </p:sp>
+      <p:sp>
+        <p:nvSpPr>
+          <p:cNvPr id="3" name="Notes Placeholder 2"/>
+          <p:cNvSpPr>
+            <a:spLocks noGrp="1"/>
+          </p:cNvSpPr>
+          <p:nvPr>
+            <p:ph type="body" idx="1"/>
+          </p:nvPr>
+        </p:nvSpPr>
+        <p:spPr/>
+        <p:txBody>
+          <a:bodyPr/>
+          <a:lstStyle/>
+          <a:p>
+            <a:r>
+              <a:rPr lang="en-US" dirty="0"/>
+              <a:t/>
+            </a:r>
+            <a:endParaRPr lang="en-US" dirty="0"/>
+          </a:p>
+        </p:txBody>
+      </p:sp>
+      <p:sp>
+        <p:nvSpPr>
+          <p:cNvPr id="4" name="Slide Number Placeholder 3"/>
+          <p:cNvSpPr>
+            <a:spLocks noGrp="1"/>
+          </p:cNvSpPr>
+          <p:nvPr>
+            <p:ph type="sldNum" sz="quarter" idx="10"/>
+          </p:nvPr>
+        </p:nvSpPr>
+        <p:spPr/>
+        <p:txBody>
+          <a:bodyPr/>
+          <a:lstStyle/>
+          <a:p>
+            <a:fld id="{F7021451-1387-4CA6-816F-3879F97B5CBC}" type="slidenum">
+              <a:rPr lang="en-US"/>
+              <a:t>44</a:t>
+            </a:fld>
+            <a:endParaRPr lang="en-US"/>
+          </a:p>
+        </p:txBody>
+      </p:sp>
+    </p:spTree>
+    <p:extLst>
+      <p:ext uri="{BB962C8B-B14F-4D97-AF65-F5344CB8AC3E}">
+        <p14:creationId xmlns:p14="http://schemas.microsoft.com/office/powerpoint/2010/main" val="1024086991"/>
+      </p:ext>
+    </p:extLst>
+  </p:cSld>
+  <p:clrMapOvr>
+    <a:masterClrMapping/>
+  </p:clrMapOvr>
+</p:notes>
+</file>
+
+<file path=ppt/notesSlides/notesSlide45.xml><?xml version="1.0" encoding="utf-8"?>
+<p:notes xmlns:a="http://schemas.openxmlformats.org/drawingml/2006/main" xmlns:r="http://schemas.openxmlformats.org/officeDocument/2006/relationships" xmlns:p="http://schemas.openxmlformats.org/presentationml/2006/main">
+  <p:cSld>
+    <p:spTree>
+      <p:nvGrpSpPr>
+        <p:cNvPr id="1" name=""/>
+        <p:cNvGrpSpPr/>
+        <p:nvPr/>
+      </p:nvGrpSpPr>
+      <p:grpSpPr>
+        <a:xfrm>
+          <a:off x="0" y="0"/>
+          <a:ext cx="0" cy="0"/>
+          <a:chOff x="0" y="0"/>
+          <a:chExt cx="0" cy="0"/>
+        </a:xfrm>
+      </p:grpSpPr>
+      <p:sp>
+        <p:nvSpPr>
+          <p:cNvPr id="2" name="Slide Image Placeholder 1"/>
+          <p:cNvSpPr>
+            <a:spLocks noGrp="1" noRot="1" noChangeAspect="1"/>
+          </p:cNvSpPr>
+          <p:nvPr>
+            <p:ph type="sldImg"/>
+          </p:nvPr>
+        </p:nvSpPr>
+        <p:spPr/>
+      </p:sp>
+      <p:sp>
+        <p:nvSpPr>
+          <p:cNvPr id="3" name="Notes Placeholder 2"/>
+          <p:cNvSpPr>
+            <a:spLocks noGrp="1"/>
+          </p:cNvSpPr>
+          <p:nvPr>
+            <p:ph type="body" idx="1"/>
+          </p:nvPr>
+        </p:nvSpPr>
+        <p:spPr/>
+        <p:txBody>
+          <a:bodyPr/>
+          <a:lstStyle/>
+          <a:p>
+            <a:r>
+              <a:rPr lang="en-US" dirty="0"/>
+              <a:t/>
+            </a:r>
+            <a:endParaRPr lang="en-US" dirty="0"/>
+          </a:p>
+        </p:txBody>
+      </p:sp>
+      <p:sp>
+        <p:nvSpPr>
+          <p:cNvPr id="4" name="Slide Number Placeholder 3"/>
+          <p:cNvSpPr>
+            <a:spLocks noGrp="1"/>
+          </p:cNvSpPr>
+          <p:nvPr>
+            <p:ph type="sldNum" sz="quarter" idx="10"/>
+          </p:nvPr>
+        </p:nvSpPr>
+        <p:spPr/>
+        <p:txBody>
+          <a:bodyPr/>
+          <a:lstStyle/>
+          <a:p>
+            <a:fld id="{F7021451-1387-4CA6-816F-3879F97B5CBC}" type="slidenum">
+              <a:rPr lang="en-US"/>
+              <a:t>45</a:t>
+            </a:fld>
+            <a:endParaRPr lang="en-US"/>
+          </a:p>
+        </p:txBody>
+      </p:sp>
+    </p:spTree>
+    <p:extLst>
+      <p:ext uri="{BB962C8B-B14F-4D97-AF65-F5344CB8AC3E}">
+        <p14:creationId xmlns:p14="http://schemas.microsoft.com/office/powerpoint/2010/main" val="1024086991"/>
+      </p:ext>
+    </p:extLst>
+  </p:cSld>
+  <p:clrMapOvr>
+    <a:masterClrMapping/>
+  </p:clrMapOvr>
+</p:notes>
+</file>
+
+<file path=ppt/notesSlides/notesSlide46.xml><?xml version="1.0" encoding="utf-8"?>
+<p:notes xmlns:a="http://schemas.openxmlformats.org/drawingml/2006/main" xmlns:r="http://schemas.openxmlformats.org/officeDocument/2006/relationships" xmlns:p="http://schemas.openxmlformats.org/presentationml/2006/main">
+  <p:cSld>
+    <p:spTree>
+      <p:nvGrpSpPr>
+        <p:cNvPr id="1" name=""/>
+        <p:cNvGrpSpPr/>
+        <p:nvPr/>
+      </p:nvGrpSpPr>
+      <p:grpSpPr>
+        <a:xfrm>
+          <a:off x="0" y="0"/>
+          <a:ext cx="0" cy="0"/>
+          <a:chOff x="0" y="0"/>
+          <a:chExt cx="0" cy="0"/>
+        </a:xfrm>
+      </p:grpSpPr>
+      <p:sp>
+        <p:nvSpPr>
+          <p:cNvPr id="2" name="Slide Image Placeholder 1"/>
+          <p:cNvSpPr>
+            <a:spLocks noGrp="1" noRot="1" noChangeAspect="1"/>
+          </p:cNvSpPr>
+          <p:nvPr>
+            <p:ph type="sldImg"/>
+          </p:nvPr>
+        </p:nvSpPr>
+        <p:spPr/>
+      </p:sp>
+      <p:sp>
+        <p:nvSpPr>
+          <p:cNvPr id="3" name="Notes Placeholder 2"/>
+          <p:cNvSpPr>
+            <a:spLocks noGrp="1"/>
+          </p:cNvSpPr>
+          <p:nvPr>
+            <p:ph type="body" idx="1"/>
+          </p:nvPr>
+        </p:nvSpPr>
+        <p:spPr/>
+        <p:txBody>
+          <a:bodyPr/>
+          <a:lstStyle/>
+          <a:p>
+            <a:r>
+              <a:rPr lang="en-US" dirty="0"/>
+              <a:t/>
+            </a:r>
+            <a:endParaRPr lang="en-US" dirty="0"/>
+          </a:p>
+        </p:txBody>
+      </p:sp>
+      <p:sp>
+        <p:nvSpPr>
+          <p:cNvPr id="4" name="Slide Number Placeholder 3"/>
+          <p:cNvSpPr>
+            <a:spLocks noGrp="1"/>
+          </p:cNvSpPr>
+          <p:nvPr>
+            <p:ph type="sldNum" sz="quarter" idx="10"/>
+          </p:nvPr>
+        </p:nvSpPr>
+        <p:spPr/>
+        <p:txBody>
+          <a:bodyPr/>
+          <a:lstStyle/>
+          <a:p>
+            <a:fld id="{F7021451-1387-4CA6-816F-3879F97B5CBC}" type="slidenum">
+              <a:rPr lang="en-US"/>
+              <a:t>46</a:t>
+            </a:fld>
+            <a:endParaRPr lang="en-US"/>
+          </a:p>
+        </p:txBody>
+      </p:sp>
+    </p:spTree>
+    <p:extLst>
+      <p:ext uri="{BB962C8B-B14F-4D97-AF65-F5344CB8AC3E}">
+        <p14:creationId xmlns:p14="http://schemas.microsoft.com/office/powerpoint/2010/main" val="1024086991"/>
+      </p:ext>
+    </p:extLst>
+  </p:cSld>
+  <p:clrMapOvr>
+    <a:masterClrMapping/>
+  </p:clrMapOvr>
+</p:notes>
+</file>
+
+<file path=ppt/notesSlides/notesSlide47.xml><?xml version="1.0" encoding="utf-8"?>
+<p:notes xmlns:a="http://schemas.openxmlformats.org/drawingml/2006/main" xmlns:r="http://schemas.openxmlformats.org/officeDocument/2006/relationships" xmlns:p="http://schemas.openxmlformats.org/presentationml/2006/main">
+  <p:cSld>
+    <p:spTree>
+      <p:nvGrpSpPr>
+        <p:cNvPr id="1" name=""/>
+        <p:cNvGrpSpPr/>
+        <p:nvPr/>
+      </p:nvGrpSpPr>
+      <p:grpSpPr>
+        <a:xfrm>
+          <a:off x="0" y="0"/>
+          <a:ext cx="0" cy="0"/>
+          <a:chOff x="0" y="0"/>
+          <a:chExt cx="0" cy="0"/>
+        </a:xfrm>
+      </p:grpSpPr>
+      <p:sp>
+        <p:nvSpPr>
+          <p:cNvPr id="2" name="Slide Image Placeholder 1"/>
+          <p:cNvSpPr>
+            <a:spLocks noGrp="1" noRot="1" noChangeAspect="1"/>
+          </p:cNvSpPr>
+          <p:nvPr>
+            <p:ph type="sldImg"/>
+          </p:nvPr>
+        </p:nvSpPr>
+        <p:spPr/>
+      </p:sp>
+      <p:sp>
+        <p:nvSpPr>
+          <p:cNvPr id="3" name="Notes Placeholder 2"/>
+          <p:cNvSpPr>
+            <a:spLocks noGrp="1"/>
+          </p:cNvSpPr>
+          <p:nvPr>
+            <p:ph type="body" idx="1"/>
+          </p:nvPr>
+        </p:nvSpPr>
+        <p:spPr/>
+        <p:txBody>
+          <a:bodyPr/>
+          <a:lstStyle/>
+          <a:p>
+            <a:r>
+              <a:rPr lang="en-US" dirty="0"/>
+              <a:t/>
+            </a:r>
+            <a:endParaRPr lang="en-US" dirty="0"/>
+          </a:p>
+        </p:txBody>
+      </p:sp>
+      <p:sp>
+        <p:nvSpPr>
+          <p:cNvPr id="4" name="Slide Number Placeholder 3"/>
+          <p:cNvSpPr>
+            <a:spLocks noGrp="1"/>
+          </p:cNvSpPr>
+          <p:nvPr>
+            <p:ph type="sldNum" sz="quarter" idx="10"/>
+          </p:nvPr>
+        </p:nvSpPr>
+        <p:spPr/>
+        <p:txBody>
+          <a:bodyPr/>
+          <a:lstStyle/>
+          <a:p>
+            <a:fld id="{F7021451-1387-4CA6-816F-3879F97B5CBC}" type="slidenum">
+              <a:rPr lang="en-US"/>
+              <a:t>47</a:t>
+            </a:fld>
+            <a:endParaRPr lang="en-US"/>
+          </a:p>
+        </p:txBody>
+      </p:sp>
+    </p:spTree>
+    <p:extLst>
+      <p:ext uri="{BB962C8B-B14F-4D97-AF65-F5344CB8AC3E}">
+        <p14:creationId xmlns:p14="http://schemas.microsoft.com/office/powerpoint/2010/main" val="1024086991"/>
+      </p:ext>
+    </p:extLst>
+  </p:cSld>
+  <p:clrMapOvr>
+    <a:masterClrMapping/>
+  </p:clrMapOvr>
+</p:notes>
+</file>
+
+<file path=ppt/notesSlides/notesSlide48.xml><?xml version="1.0" encoding="utf-8"?>
+<p:notes xmlns:a="http://schemas.openxmlformats.org/drawingml/2006/main" xmlns:r="http://schemas.openxmlformats.org/officeDocument/2006/relationships" xmlns:p="http://schemas.openxmlformats.org/presentationml/2006/main">
+  <p:cSld>
+    <p:spTree>
+      <p:nvGrpSpPr>
+        <p:cNvPr id="1" name=""/>
+        <p:cNvGrpSpPr/>
+        <p:nvPr/>
+      </p:nvGrpSpPr>
+      <p:grpSpPr>
+        <a:xfrm>
+          <a:off x="0" y="0"/>
+          <a:ext cx="0" cy="0"/>
+          <a:chOff x="0" y="0"/>
+          <a:chExt cx="0" cy="0"/>
+        </a:xfrm>
+      </p:grpSpPr>
+      <p:sp>
+        <p:nvSpPr>
+          <p:cNvPr id="2" name="Slide Image Placeholder 1"/>
+          <p:cNvSpPr>
+            <a:spLocks noGrp="1" noRot="1" noChangeAspect="1"/>
+          </p:cNvSpPr>
+          <p:nvPr>
+            <p:ph type="sldImg"/>
+          </p:nvPr>
+        </p:nvSpPr>
+        <p:spPr/>
+      </p:sp>
+      <p:sp>
+        <p:nvSpPr>
+          <p:cNvPr id="3" name="Notes Placeholder 2"/>
+          <p:cNvSpPr>
+            <a:spLocks noGrp="1"/>
+          </p:cNvSpPr>
+          <p:nvPr>
+            <p:ph type="body" idx="1"/>
+          </p:nvPr>
+        </p:nvSpPr>
+        <p:spPr/>
+        <p:txBody>
+          <a:bodyPr/>
+          <a:lstStyle/>
+          <a:p>
+            <a:r>
+              <a:rPr lang="en-US" dirty="0"/>
+              <a:t/>
+            </a:r>
+            <a:endParaRPr lang="en-US" dirty="0"/>
+          </a:p>
+        </p:txBody>
+      </p:sp>
+      <p:sp>
+        <p:nvSpPr>
+          <p:cNvPr id="4" name="Slide Number Placeholder 3"/>
+          <p:cNvSpPr>
+            <a:spLocks noGrp="1"/>
+          </p:cNvSpPr>
+          <p:nvPr>
+            <p:ph type="sldNum" sz="quarter" idx="10"/>
+          </p:nvPr>
+        </p:nvSpPr>
+        <p:spPr/>
+        <p:txBody>
+          <a:bodyPr/>
+          <a:lstStyle/>
+          <a:p>
+            <a:fld id="{F7021451-1387-4CA6-816F-3879F97B5CBC}" type="slidenum">
+              <a:rPr lang="en-US"/>
+              <a:t>48</a:t>
+            </a:fld>
+            <a:endParaRPr lang="en-US"/>
+          </a:p>
+        </p:txBody>
+      </p:sp>
+    </p:spTree>
+    <p:extLst>
+      <p:ext uri="{BB962C8B-B14F-4D97-AF65-F5344CB8AC3E}">
+        <p14:creationId xmlns:p14="http://schemas.microsoft.com/office/powerpoint/2010/main" val="1024086991"/>
+      </p:ext>
+    </p:extLst>
+  </p:cSld>
+  <p:clrMapOvr>
+    <a:masterClrMapping/>
+  </p:clrMapOvr>
+</p:notes>
+</file>
+
+<file path=ppt/notesSlides/notesSlide49.xml><?xml version="1.0" encoding="utf-8"?>
+<p:notes xmlns:a="http://schemas.openxmlformats.org/drawingml/2006/main" xmlns:r="http://schemas.openxmlformats.org/officeDocument/2006/relationships" xmlns:p="http://schemas.openxmlformats.org/presentationml/2006/main">
+  <p:cSld>
+    <p:spTree>
+      <p:nvGrpSpPr>
+        <p:cNvPr id="1" name=""/>
+        <p:cNvGrpSpPr/>
+        <p:nvPr/>
+      </p:nvGrpSpPr>
+      <p:grpSpPr>
+        <a:xfrm>
+          <a:off x="0" y="0"/>
+          <a:ext cx="0" cy="0"/>
+          <a:chOff x="0" y="0"/>
+          <a:chExt cx="0" cy="0"/>
+        </a:xfrm>
+      </p:grpSpPr>
+      <p:sp>
+        <p:nvSpPr>
+          <p:cNvPr id="2" name="Slide Image Placeholder 1"/>
+          <p:cNvSpPr>
+            <a:spLocks noGrp="1" noRot="1" noChangeAspect="1"/>
+          </p:cNvSpPr>
+          <p:nvPr>
+            <p:ph type="sldImg"/>
+          </p:nvPr>
+        </p:nvSpPr>
+        <p:spPr/>
+      </p:sp>
+      <p:sp>
+        <p:nvSpPr>
+          <p:cNvPr id="3" name="Notes Placeholder 2"/>
+          <p:cNvSpPr>
+            <a:spLocks noGrp="1"/>
+          </p:cNvSpPr>
+          <p:nvPr>
+            <p:ph type="body" idx="1"/>
+          </p:nvPr>
+        </p:nvSpPr>
+        <p:spPr/>
+        <p:txBody>
+          <a:bodyPr/>
+          <a:lstStyle/>
+          <a:p>
+            <a:r>
+              <a:rPr lang="en-US" dirty="0"/>
+              <a:t/>
+            </a:r>
+            <a:endParaRPr lang="en-US" dirty="0"/>
+          </a:p>
+        </p:txBody>
+      </p:sp>
+      <p:sp>
+        <p:nvSpPr>
+          <p:cNvPr id="4" name="Slide Number Placeholder 3"/>
+          <p:cNvSpPr>
+            <a:spLocks noGrp="1"/>
+          </p:cNvSpPr>
+          <p:nvPr>
+            <p:ph type="sldNum" sz="quarter" idx="10"/>
+          </p:nvPr>
+        </p:nvSpPr>
+        <p:spPr/>
+        <p:txBody>
+          <a:bodyPr/>
+          <a:lstStyle/>
+          <a:p>
+            <a:fld id="{F7021451-1387-4CA6-816F-3879F97B5CBC}" type="slidenum">
+              <a:rPr lang="en-US"/>
+              <a:t>49</a:t>
             </a:fld>
             <a:endParaRPr lang="en-US"/>
           </a:p>
@@ -32540,6 +33174,5009 @@
                   <a:schemeClr val="bg1"/>
                 </a:solidFill>
               </a:rPr>
+              <a:t>마케팅 실전</a:t>
+            </a:r>
+            <a:endParaRPr lang="en-US" sz="4000" dirty="0"/>
+          </a:p>
+        </p:txBody>
+      </p:sp>
+      <p:sp>
+        <p:nvSpPr>
+          <p:cNvPr id="3" name="Text 0"/>
+          <p:cNvSpPr/>
+          <p:nvPr>
+            <p:ph idx="101" type="body" hasCustomPrompt="1"/>
+          </p:nvPr>
+        </p:nvSpPr>
+        <p:spPr>
+          <a:xfrm>
+            <a:off x="548640" y="2788920"/>
+            <a:ext cx="8046720" cy="1097280"/>
+          </a:xfrm>
+          <a:prstGeom prst="rect">
+            <a:avLst/>
+          </a:prstGeom>
+          <a:noFill/>
+          <a:ln/>
+        </p:spPr>
+        <p:txBody>
+          <a:bodyPr wrap="square" lIns="0" tIns="0" rIns="0" bIns="0" rtlCol="0" anchor="t"/>
+          <a:lstStyle/>
+          <a:p>
+            <a:pPr algn="l" indent="0" marL="0">
+              <a:buNone/>
+            </a:pPr>
+            <a:r>
+              <a:rPr lang="en-US" sz="1800" dirty="0">
+                <a:solidFill>
+                  <a:schemeClr val="bg2"/>
+                </a:solidFill>
+              </a:rPr>
+              <a:t>인스타그램 시작하기 · 광고 예산 · 네이버·당근 · 실제 사례 10가지 · 90일 계획 — 32–33장</a:t>
+            </a:r>
+            <a:endParaRPr lang="en-US" sz="1800" dirty="0"/>
+          </a:p>
+        </p:txBody>
+      </p:sp>
+    </p:spTree>
+  </p:cSld>
+  <p:clrMapOvr>
+    <a:masterClrMapping/>
+  </p:clrMapOvr>
+</p:sld>
+</file>
+
+<file path=ppt/slides/slide43.xml><?xml version="1.0" encoding="utf-8"?>
+<p:sld xmlns:a="http://schemas.openxmlformats.org/drawingml/2006/main" xmlns:r="http://schemas.openxmlformats.org/officeDocument/2006/relationships" xmlns:p="http://schemas.openxmlformats.org/presentationml/2006/main">
+  <p:cSld name="Slide 43">
+    <p:spTree>
+      <p:nvGrpSpPr>
+        <p:cNvPr id="1" name=""/>
+        <p:cNvGrpSpPr/>
+        <p:nvPr/>
+      </p:nvGrpSpPr>
+      <p:grpSpPr>
+        <a:xfrm>
+          <a:off x="0" y="0"/>
+          <a:ext cx="0" cy="0"/>
+          <a:chOff x="0" y="0"/>
+          <a:chExt cx="0" cy="0"/>
+        </a:xfrm>
+      </p:grpSpPr>
+      <p:sp>
+        <p:nvSpPr>
+          <p:cNvPr id="2" name="Text 0"/>
+          <p:cNvSpPr/>
+          <p:nvPr>
+            <p:ph idx="100" type="title" hasCustomPrompt="1"/>
+          </p:nvPr>
+        </p:nvSpPr>
+        <p:spPr>
+          <a:xfrm>
+            <a:off x="457200" y="274320"/>
+            <a:ext cx="8229600" cy="685800"/>
+          </a:xfrm>
+          <a:prstGeom prst="rect">
+            <a:avLst/>
+          </a:prstGeom>
+          <a:noFill/>
+          <a:ln/>
+        </p:spPr>
+        <p:txBody>
+          <a:bodyPr wrap="square" lIns="0" tIns="0" rIns="0" bIns="0" rtlCol="0" anchor="ctr"/>
+          <a:lstStyle/>
+          <a:p>
+            <a:pPr indent="0" marL="0">
+              <a:buNone/>
+            </a:pPr>
+            <a:r>
+              <a:rPr lang="en-US" sz="2800" b="1" dirty="0">
+                <a:solidFill>
+                  <a:schemeClr val="tx2"/>
+                </a:solidFill>
+              </a:rPr>
+              <a:t>인스타그램 첫날: 프로필부터</a:t>
+            </a:r>
+            <a:endParaRPr lang="en-US" sz="2800" dirty="0"/>
+          </a:p>
+        </p:txBody>
+      </p:sp>
+      <p:sp>
+        <p:nvSpPr>
+          <p:cNvPr id="3" name="card"/>
+          <p:cNvSpPr/>
+          <p:nvPr/>
+        </p:nvSpPr>
+        <p:spPr>
+          <a:xfrm>
+            <a:off x="457200" y="1188720"/>
+            <a:ext cx="4023360" cy="658368"/>
+          </a:xfrm>
+          <a:prstGeom prst="roundRect">
+            <a:avLst>
+              <a:gd name="adj" fmla="val 11111"/>
+            </a:avLst>
+          </a:prstGeom>
+          <a:solidFill>
+            <a:schemeClr val="bg2"/>
+          </a:solidFill>
+          <a:ln/>
+        </p:spPr>
+      </p:sp>
+      <p:sp>
+        <p:nvSpPr>
+          <p:cNvPr id="4" name="badge1"/>
+          <p:cNvSpPr/>
+          <p:nvPr/>
+        </p:nvSpPr>
+        <p:spPr>
+          <a:xfrm>
+            <a:off x="594360" y="1325880"/>
+            <a:ext cx="384048" cy="384048"/>
+          </a:xfrm>
+          <a:prstGeom prst="ellipse">
+            <a:avLst/>
+          </a:prstGeom>
+          <a:solidFill>
+            <a:schemeClr val="tx2"/>
+          </a:solidFill>
+          <a:ln/>
+        </p:spPr>
+      </p:sp>
+      <p:sp>
+        <p:nvSpPr>
+          <p:cNvPr id="5" name="Text 3"/>
+          <p:cNvSpPr txBox="1"/>
+          <p:nvPr/>
+        </p:nvSpPr>
+        <p:spPr>
+          <a:xfrm>
+            <a:off x="594360" y="1325880"/>
+            <a:ext cx="384048" cy="384048"/>
+          </a:xfrm>
+          <a:prstGeom prst="rect">
+            <a:avLst/>
+          </a:prstGeom>
+          <a:noFill/>
+          <a:ln/>
+        </p:spPr>
+        <p:txBody>
+          <a:bodyPr wrap="square" lIns="0" tIns="0" rIns="0" bIns="0" rtlCol="0" anchor="ctr"/>
+          <a:lstStyle/>
+          <a:p>
+            <a:pPr algn="ctr" indent="0" marL="0">
+              <a:buNone/>
+            </a:pPr>
+            <a:r>
+              <a:rPr lang="en-US" sz="1400" b="1" dirty="0">
+                <a:solidFill>
+                  <a:schemeClr val="bg1"/>
+                </a:solidFill>
+              </a:rPr>
+              <a:t>1</a:t>
+            </a:r>
+            <a:endParaRPr lang="en-US" sz="1400" dirty="0"/>
+          </a:p>
+        </p:txBody>
+      </p:sp>
+      <p:sp>
+        <p:nvSpPr>
+          <p:cNvPr id="6" name="Text 4"/>
+          <p:cNvSpPr txBox="1"/>
+          <p:nvPr/>
+        </p:nvSpPr>
+        <p:spPr>
+          <a:xfrm>
+            <a:off x="1097280" y="1243584"/>
+            <a:ext cx="3291840" cy="566928"/>
+          </a:xfrm>
+          <a:prstGeom prst="rect">
+            <a:avLst/>
+          </a:prstGeom>
+          <a:noFill/>
+          <a:ln/>
+        </p:spPr>
+        <p:txBody>
+          <a:bodyPr wrap="square" lIns="0" tIns="0" rIns="0" bIns="0" rtlCol="0" anchor="ctr"/>
+          <a:lstStyle/>
+          <a:p>
+            <a:pPr indent="0" marL="0">
+              <a:buNone/>
+            </a:pPr>
+            <a:r>
+              <a:rPr lang="en-US" sz="1400" b="1" dirty="0">
+                <a:solidFill>
+                  <a:schemeClr val="tx1"/>
+                </a:solidFill>
+              </a:rPr>
+              <a:t>프로페셔널 계정</a:t>
+            </a:r>
+            <a:endParaRPr lang="en-US" sz="1400" dirty="0"/>
+          </a:p>
+          <a:p>
+            <a:pPr indent="0" marL="0">
+              <a:buNone/>
+            </a:pPr>
+            <a:r>
+              <a:rPr lang="en-US" sz="1100" dirty="0">
+                <a:solidFill>
+                  <a:schemeClr val="accent4"/>
+                </a:solidFill>
+              </a:rPr>
+              <a:t>통계·광고·연락처 버튼</a:t>
+            </a:r>
+            <a:endParaRPr lang="en-US" sz="1400" dirty="0"/>
+          </a:p>
+        </p:txBody>
+      </p:sp>
+      <p:sp>
+        <p:nvSpPr>
+          <p:cNvPr id="7" name="card"/>
+          <p:cNvSpPr/>
+          <p:nvPr/>
+        </p:nvSpPr>
+        <p:spPr>
+          <a:xfrm>
+            <a:off x="457200" y="1965960"/>
+            <a:ext cx="4023360" cy="658368"/>
+          </a:xfrm>
+          <a:prstGeom prst="roundRect">
+            <a:avLst>
+              <a:gd name="adj" fmla="val 11111"/>
+            </a:avLst>
+          </a:prstGeom>
+          <a:solidFill>
+            <a:schemeClr val="bg2"/>
+          </a:solidFill>
+          <a:ln/>
+        </p:spPr>
+      </p:sp>
+      <p:sp>
+        <p:nvSpPr>
+          <p:cNvPr id="8" name="badge2"/>
+          <p:cNvSpPr/>
+          <p:nvPr/>
+        </p:nvSpPr>
+        <p:spPr>
+          <a:xfrm>
+            <a:off x="594360" y="2103120"/>
+            <a:ext cx="384048" cy="384048"/>
+          </a:xfrm>
+          <a:prstGeom prst="ellipse">
+            <a:avLst/>
+          </a:prstGeom>
+          <a:solidFill>
+            <a:schemeClr val="tx2"/>
+          </a:solidFill>
+          <a:ln/>
+        </p:spPr>
+      </p:sp>
+      <p:sp>
+        <p:nvSpPr>
+          <p:cNvPr id="9" name="Text 7"/>
+          <p:cNvSpPr txBox="1"/>
+          <p:nvPr/>
+        </p:nvSpPr>
+        <p:spPr>
+          <a:xfrm>
+            <a:off x="594360" y="2103120"/>
+            <a:ext cx="384048" cy="384048"/>
+          </a:xfrm>
+          <a:prstGeom prst="rect">
+            <a:avLst/>
+          </a:prstGeom>
+          <a:noFill/>
+          <a:ln/>
+        </p:spPr>
+        <p:txBody>
+          <a:bodyPr wrap="square" lIns="0" tIns="0" rIns="0" bIns="0" rtlCol="0" anchor="ctr"/>
+          <a:lstStyle/>
+          <a:p>
+            <a:pPr algn="ctr" indent="0" marL="0">
+              <a:buNone/>
+            </a:pPr>
+            <a:r>
+              <a:rPr lang="en-US" sz="1400" b="1" dirty="0">
+                <a:solidFill>
+                  <a:schemeClr val="bg1"/>
+                </a:solidFill>
+              </a:rPr>
+              <a:t>2</a:t>
+            </a:r>
+            <a:endParaRPr lang="en-US" sz="1400" dirty="0"/>
+          </a:p>
+        </p:txBody>
+      </p:sp>
+      <p:sp>
+        <p:nvSpPr>
+          <p:cNvPr id="10" name="Text 8"/>
+          <p:cNvSpPr txBox="1"/>
+          <p:nvPr/>
+        </p:nvSpPr>
+        <p:spPr>
+          <a:xfrm>
+            <a:off x="1097280" y="2020824"/>
+            <a:ext cx="3291840" cy="566928"/>
+          </a:xfrm>
+          <a:prstGeom prst="rect">
+            <a:avLst/>
+          </a:prstGeom>
+          <a:noFill/>
+          <a:ln/>
+        </p:spPr>
+        <p:txBody>
+          <a:bodyPr wrap="square" lIns="0" tIns="0" rIns="0" bIns="0" rtlCol="0" anchor="ctr"/>
+          <a:lstStyle/>
+          <a:p>
+            <a:pPr indent="0" marL="0">
+              <a:buNone/>
+            </a:pPr>
+            <a:r>
+              <a:rPr lang="en-US" sz="1400" b="1" dirty="0">
+                <a:solidFill>
+                  <a:schemeClr val="tx1"/>
+                </a:solidFill>
+              </a:rPr>
+              <a:t>소개 글 3줄</a:t>
+            </a:r>
+            <a:endParaRPr lang="en-US" sz="1400" dirty="0"/>
+          </a:p>
+          <a:p>
+            <a:pPr indent="0" marL="0">
+              <a:buNone/>
+            </a:pPr>
+            <a:r>
+              <a:rPr lang="en-US" sz="1100" dirty="0">
+                <a:solidFill>
+                  <a:schemeClr val="accent4"/>
+                </a:solidFill>
+              </a:rPr>
+              <a:t>누구를 위한 / 무엇을 / 지금 할 행동</a:t>
+            </a:r>
+            <a:endParaRPr lang="en-US" sz="1400" dirty="0"/>
+          </a:p>
+        </p:txBody>
+      </p:sp>
+      <p:sp>
+        <p:nvSpPr>
+          <p:cNvPr id="11" name="card"/>
+          <p:cNvSpPr/>
+          <p:nvPr/>
+        </p:nvSpPr>
+        <p:spPr>
+          <a:xfrm>
+            <a:off x="457200" y="2743200"/>
+            <a:ext cx="4023360" cy="658368"/>
+          </a:xfrm>
+          <a:prstGeom prst="roundRect">
+            <a:avLst>
+              <a:gd name="adj" fmla="val 11111"/>
+            </a:avLst>
+          </a:prstGeom>
+          <a:solidFill>
+            <a:schemeClr val="bg2"/>
+          </a:solidFill>
+          <a:ln/>
+        </p:spPr>
+      </p:sp>
+      <p:sp>
+        <p:nvSpPr>
+          <p:cNvPr id="12" name="badge3"/>
+          <p:cNvSpPr/>
+          <p:nvPr/>
+        </p:nvSpPr>
+        <p:spPr>
+          <a:xfrm>
+            <a:off x="594360" y="2880360"/>
+            <a:ext cx="384048" cy="384048"/>
+          </a:xfrm>
+          <a:prstGeom prst="ellipse">
+            <a:avLst/>
+          </a:prstGeom>
+          <a:solidFill>
+            <a:schemeClr val="tx2"/>
+          </a:solidFill>
+          <a:ln/>
+        </p:spPr>
+      </p:sp>
+      <p:sp>
+        <p:nvSpPr>
+          <p:cNvPr id="13" name="Text 11"/>
+          <p:cNvSpPr txBox="1"/>
+          <p:nvPr/>
+        </p:nvSpPr>
+        <p:spPr>
+          <a:xfrm>
+            <a:off x="594360" y="2880360"/>
+            <a:ext cx="384048" cy="384048"/>
+          </a:xfrm>
+          <a:prstGeom prst="rect">
+            <a:avLst/>
+          </a:prstGeom>
+          <a:noFill/>
+          <a:ln/>
+        </p:spPr>
+        <p:txBody>
+          <a:bodyPr wrap="square" lIns="0" tIns="0" rIns="0" bIns="0" rtlCol="0" anchor="ctr"/>
+          <a:lstStyle/>
+          <a:p>
+            <a:pPr algn="ctr" indent="0" marL="0">
+              <a:buNone/>
+            </a:pPr>
+            <a:r>
+              <a:rPr lang="en-US" sz="1400" b="1" dirty="0">
+                <a:solidFill>
+                  <a:schemeClr val="bg1"/>
+                </a:solidFill>
+              </a:rPr>
+              <a:t>3</a:t>
+            </a:r>
+            <a:endParaRPr lang="en-US" sz="1400" dirty="0"/>
+          </a:p>
+        </p:txBody>
+      </p:sp>
+      <p:sp>
+        <p:nvSpPr>
+          <p:cNvPr id="14" name="Text 12"/>
+          <p:cNvSpPr txBox="1"/>
+          <p:nvPr/>
+        </p:nvSpPr>
+        <p:spPr>
+          <a:xfrm>
+            <a:off x="1097280" y="2798064"/>
+            <a:ext cx="3291840" cy="566928"/>
+          </a:xfrm>
+          <a:prstGeom prst="rect">
+            <a:avLst/>
+          </a:prstGeom>
+          <a:noFill/>
+          <a:ln/>
+        </p:spPr>
+        <p:txBody>
+          <a:bodyPr wrap="square" lIns="0" tIns="0" rIns="0" bIns="0" rtlCol="0" anchor="ctr"/>
+          <a:lstStyle/>
+          <a:p>
+            <a:pPr indent="0" marL="0">
+              <a:buNone/>
+            </a:pPr>
+            <a:r>
+              <a:rPr lang="en-US" sz="1400" b="1" dirty="0">
+                <a:solidFill>
+                  <a:schemeClr val="tx1"/>
+                </a:solidFill>
+              </a:rPr>
+              <a:t>링크 + UTM</a:t>
+            </a:r>
+            <a:endParaRPr lang="en-US" sz="1400" dirty="0"/>
+          </a:p>
+          <a:p>
+            <a:pPr indent="0" marL="0">
+              <a:buNone/>
+            </a:pPr>
+            <a:r>
+              <a:rPr lang="en-US" sz="1100" dirty="0">
+                <a:solidFill>
+                  <a:schemeClr val="accent4"/>
+                </a:solidFill>
+              </a:rPr>
+              <a:t>인스타에서 온 손님을 따로 세기</a:t>
+            </a:r>
+            <a:endParaRPr lang="en-US" sz="1400" dirty="0"/>
+          </a:p>
+        </p:txBody>
+      </p:sp>
+      <p:sp>
+        <p:nvSpPr>
+          <p:cNvPr id="15" name="card"/>
+          <p:cNvSpPr/>
+          <p:nvPr/>
+        </p:nvSpPr>
+        <p:spPr>
+          <a:xfrm>
+            <a:off x="457200" y="3520440"/>
+            <a:ext cx="4023360" cy="658368"/>
+          </a:xfrm>
+          <a:prstGeom prst="roundRect">
+            <a:avLst>
+              <a:gd name="adj" fmla="val 11111"/>
+            </a:avLst>
+          </a:prstGeom>
+          <a:solidFill>
+            <a:schemeClr val="bg2"/>
+          </a:solidFill>
+          <a:ln/>
+        </p:spPr>
+      </p:sp>
+      <p:sp>
+        <p:nvSpPr>
+          <p:cNvPr id="16" name="badge4"/>
+          <p:cNvSpPr/>
+          <p:nvPr/>
+        </p:nvSpPr>
+        <p:spPr>
+          <a:xfrm>
+            <a:off x="594360" y="3657600"/>
+            <a:ext cx="384048" cy="384048"/>
+          </a:xfrm>
+          <a:prstGeom prst="ellipse">
+            <a:avLst/>
+          </a:prstGeom>
+          <a:solidFill>
+            <a:schemeClr val="tx2"/>
+          </a:solidFill>
+          <a:ln/>
+        </p:spPr>
+      </p:sp>
+      <p:sp>
+        <p:nvSpPr>
+          <p:cNvPr id="17" name="Text 15"/>
+          <p:cNvSpPr txBox="1"/>
+          <p:nvPr/>
+        </p:nvSpPr>
+        <p:spPr>
+          <a:xfrm>
+            <a:off x="594360" y="3657600"/>
+            <a:ext cx="384048" cy="384048"/>
+          </a:xfrm>
+          <a:prstGeom prst="rect">
+            <a:avLst/>
+          </a:prstGeom>
+          <a:noFill/>
+          <a:ln/>
+        </p:spPr>
+        <p:txBody>
+          <a:bodyPr wrap="square" lIns="0" tIns="0" rIns="0" bIns="0" rtlCol="0" anchor="ctr"/>
+          <a:lstStyle/>
+          <a:p>
+            <a:pPr algn="ctr" indent="0" marL="0">
+              <a:buNone/>
+            </a:pPr>
+            <a:r>
+              <a:rPr lang="en-US" sz="1400" b="1" dirty="0">
+                <a:solidFill>
+                  <a:schemeClr val="bg1"/>
+                </a:solidFill>
+              </a:rPr>
+              <a:t>4</a:t>
+            </a:r>
+            <a:endParaRPr lang="en-US" sz="1400" dirty="0"/>
+          </a:p>
+        </p:txBody>
+      </p:sp>
+      <p:sp>
+        <p:nvSpPr>
+          <p:cNvPr id="18" name="Text 16"/>
+          <p:cNvSpPr txBox="1"/>
+          <p:nvPr/>
+        </p:nvSpPr>
+        <p:spPr>
+          <a:xfrm>
+            <a:off x="1097280" y="3575304"/>
+            <a:ext cx="3291840" cy="566928"/>
+          </a:xfrm>
+          <a:prstGeom prst="rect">
+            <a:avLst/>
+          </a:prstGeom>
+          <a:noFill/>
+          <a:ln/>
+        </p:spPr>
+        <p:txBody>
+          <a:bodyPr wrap="square" lIns="0" tIns="0" rIns="0" bIns="0" rtlCol="0" anchor="ctr"/>
+          <a:lstStyle/>
+          <a:p>
+            <a:pPr indent="0" marL="0">
+              <a:buNone/>
+            </a:pPr>
+            <a:r>
+              <a:rPr lang="en-US" sz="1400" b="1" dirty="0">
+                <a:solidFill>
+                  <a:schemeClr val="tx1"/>
+                </a:solidFill>
+              </a:rPr>
+              <a:t>하이라이트</a:t>
+            </a:r>
+            <a:endParaRPr lang="en-US" sz="1400" dirty="0"/>
+          </a:p>
+          <a:p>
+            <a:pPr indent="0" marL="0">
+              <a:buNone/>
+            </a:pPr>
+            <a:r>
+              <a:rPr lang="en-US" sz="1100" dirty="0">
+                <a:solidFill>
+                  <a:schemeClr val="accent4"/>
+                </a:solidFill>
+              </a:rPr>
+              <a:t>후기 · FAQ · 이벤트 · 배송</a:t>
+            </a:r>
+            <a:endParaRPr lang="en-US" sz="1400" dirty="0"/>
+          </a:p>
+        </p:txBody>
+      </p:sp>
+      <p:sp>
+        <p:nvSpPr>
+          <p:cNvPr id="19" name="card"/>
+          <p:cNvSpPr/>
+          <p:nvPr/>
+        </p:nvSpPr>
+        <p:spPr>
+          <a:xfrm>
+            <a:off x="4663440" y="1188720"/>
+            <a:ext cx="4023360" cy="3017520"/>
+          </a:xfrm>
+          <a:prstGeom prst="roundRect">
+            <a:avLst>
+              <a:gd name="adj" fmla="val 2424"/>
+            </a:avLst>
+          </a:prstGeom>
+          <a:solidFill>
+            <a:schemeClr val="tx2"/>
+          </a:solidFill>
+          <a:ln/>
+        </p:spPr>
+      </p:sp>
+      <p:sp>
+        <p:nvSpPr>
+          <p:cNvPr id="20" name="Text 18"/>
+          <p:cNvSpPr txBox="1"/>
+          <p:nvPr/>
+        </p:nvSpPr>
+        <p:spPr>
+          <a:xfrm>
+            <a:off x="4892040" y="1325880"/>
+            <a:ext cx="3566160" cy="365760"/>
+          </a:xfrm>
+          <a:prstGeom prst="rect">
+            <a:avLst/>
+          </a:prstGeom>
+          <a:noFill/>
+          <a:ln/>
+        </p:spPr>
+        <p:txBody>
+          <a:bodyPr wrap="square" lIns="0" tIns="0" rIns="0" bIns="0" rtlCol="0" anchor="t"/>
+          <a:lstStyle/>
+          <a:p>
+            <a:pPr indent="0" marL="0">
+              <a:buNone/>
+            </a:pPr>
+            <a:r>
+              <a:rPr lang="en-US" sz="1600" b="1" dirty="0">
+                <a:solidFill>
+                  <a:schemeClr val="accent6"/>
+                </a:solidFill>
+              </a:rPr>
+              <a:t>콘텐츠 3종류</a:t>
+            </a:r>
+            <a:endParaRPr lang="en-US" sz="1600" dirty="0"/>
+          </a:p>
+        </p:txBody>
+      </p:sp>
+      <p:sp>
+        <p:nvSpPr>
+          <p:cNvPr id="21" name="Text 19"/>
+          <p:cNvSpPr txBox="1"/>
+          <p:nvPr/>
+        </p:nvSpPr>
+        <p:spPr>
+          <a:xfrm>
+            <a:off x="4892040" y="1828800"/>
+            <a:ext cx="822960" cy="640080"/>
+          </a:xfrm>
+          <a:prstGeom prst="rect">
+            <a:avLst/>
+          </a:prstGeom>
+          <a:noFill/>
+          <a:ln/>
+        </p:spPr>
+        <p:txBody>
+          <a:bodyPr wrap="square" lIns="0" tIns="0" rIns="0" bIns="0" rtlCol="0" anchor="ctr"/>
+          <a:lstStyle/>
+          <a:p>
+            <a:pPr indent="0" marL="0">
+              <a:buNone/>
+            </a:pPr>
+            <a:r>
+              <a:rPr lang="en-US" sz="1800" b="1" dirty="0">
+                <a:solidFill>
+                  <a:schemeClr val="accent2"/>
+                </a:solidFill>
+              </a:rPr>
+              <a:t>절반</a:t>
+            </a:r>
+            <a:endParaRPr lang="en-US" sz="1800" dirty="0"/>
+          </a:p>
+        </p:txBody>
+      </p:sp>
+      <p:sp>
+        <p:nvSpPr>
+          <p:cNvPr id="22" name="Text 20"/>
+          <p:cNvSpPr txBox="1"/>
+          <p:nvPr/>
+        </p:nvSpPr>
+        <p:spPr>
+          <a:xfrm>
+            <a:off x="5760720" y="1828800"/>
+            <a:ext cx="2834640" cy="640080"/>
+          </a:xfrm>
+          <a:prstGeom prst="rect">
+            <a:avLst/>
+          </a:prstGeom>
+          <a:noFill/>
+          <a:ln/>
+        </p:spPr>
+        <p:txBody>
+          <a:bodyPr wrap="square" lIns="0" tIns="0" rIns="0" bIns="0" rtlCol="0" anchor="ctr"/>
+          <a:lstStyle/>
+          <a:p>
+            <a:pPr indent="0" marL="0">
+              <a:buNone/>
+            </a:pPr>
+            <a:r>
+              <a:rPr lang="en-US" sz="1400" b="1" dirty="0">
+                <a:solidFill>
+                  <a:schemeClr val="bg1"/>
+                </a:solidFill>
+              </a:rPr>
+              <a:t>도움 되는 것</a:t>
+            </a:r>
+            <a:endParaRPr lang="en-US" sz="1400" dirty="0"/>
+          </a:p>
+          <a:p>
+            <a:pPr indent="0" marL="0">
+              <a:buNone/>
+            </a:pPr>
+            <a:r>
+              <a:rPr lang="en-US" sz="1200" dirty="0">
+                <a:solidFill>
+                  <a:schemeClr val="bg1"/>
+                </a:solidFill>
+              </a:rPr>
+              <a:t>저장·공유로 새 사람에게</a:t>
+            </a:r>
+            <a:endParaRPr lang="en-US" sz="1400" dirty="0"/>
+          </a:p>
+        </p:txBody>
+      </p:sp>
+      <p:sp>
+        <p:nvSpPr>
+          <p:cNvPr id="23" name="Text 21"/>
+          <p:cNvSpPr txBox="1"/>
+          <p:nvPr/>
+        </p:nvSpPr>
+        <p:spPr>
+          <a:xfrm>
+            <a:off x="4892040" y="2578608"/>
+            <a:ext cx="822960" cy="640080"/>
+          </a:xfrm>
+          <a:prstGeom prst="rect">
+            <a:avLst/>
+          </a:prstGeom>
+          <a:noFill/>
+          <a:ln/>
+        </p:spPr>
+        <p:txBody>
+          <a:bodyPr wrap="square" lIns="0" tIns="0" rIns="0" bIns="0" rtlCol="0" anchor="ctr"/>
+          <a:lstStyle/>
+          <a:p>
+            <a:pPr indent="0" marL="0">
+              <a:buNone/>
+            </a:pPr>
+            <a:r>
+              <a:rPr lang="en-US" sz="1800" b="1" dirty="0">
+                <a:solidFill>
+                  <a:schemeClr val="accent2"/>
+                </a:solidFill>
+              </a:rPr>
+              <a:t>1/3</a:t>
+            </a:r>
+            <a:endParaRPr lang="en-US" sz="1800" dirty="0"/>
+          </a:p>
+        </p:txBody>
+      </p:sp>
+      <p:sp>
+        <p:nvSpPr>
+          <p:cNvPr id="24" name="Text 22"/>
+          <p:cNvSpPr txBox="1"/>
+          <p:nvPr/>
+        </p:nvSpPr>
+        <p:spPr>
+          <a:xfrm>
+            <a:off x="5760720" y="2578608"/>
+            <a:ext cx="2834640" cy="640080"/>
+          </a:xfrm>
+          <a:prstGeom prst="rect">
+            <a:avLst/>
+          </a:prstGeom>
+          <a:noFill/>
+          <a:ln/>
+        </p:spPr>
+        <p:txBody>
+          <a:bodyPr wrap="square" lIns="0" tIns="0" rIns="0" bIns="0" rtlCol="0" anchor="ctr"/>
+          <a:lstStyle/>
+          <a:p>
+            <a:pPr indent="0" marL="0">
+              <a:buNone/>
+            </a:pPr>
+            <a:r>
+              <a:rPr lang="en-US" sz="1400" b="1" dirty="0">
+                <a:solidFill>
+                  <a:schemeClr val="bg1"/>
+                </a:solidFill>
+              </a:rPr>
+              <a:t>믿음 주는 것</a:t>
+            </a:r>
+            <a:endParaRPr lang="en-US" sz="1400" dirty="0"/>
+          </a:p>
+          <a:p>
+            <a:pPr indent="0" marL="0">
+              <a:buNone/>
+            </a:pPr>
+            <a:r>
+              <a:rPr lang="en-US" sz="1200" dirty="0">
+                <a:solidFill>
+                  <a:schemeClr val="bg1"/>
+                </a:solidFill>
+              </a:rPr>
+              <a:t>과정·후기·대표 이야기</a:t>
+            </a:r>
+            <a:endParaRPr lang="en-US" sz="1400" dirty="0"/>
+          </a:p>
+        </p:txBody>
+      </p:sp>
+      <p:sp>
+        <p:nvSpPr>
+          <p:cNvPr id="25" name="Text 23"/>
+          <p:cNvSpPr txBox="1"/>
+          <p:nvPr/>
+        </p:nvSpPr>
+        <p:spPr>
+          <a:xfrm>
+            <a:off x="4892040" y="3328416"/>
+            <a:ext cx="822960" cy="640080"/>
+          </a:xfrm>
+          <a:prstGeom prst="rect">
+            <a:avLst/>
+          </a:prstGeom>
+          <a:noFill/>
+          <a:ln/>
+        </p:spPr>
+        <p:txBody>
+          <a:bodyPr wrap="square" lIns="0" tIns="0" rIns="0" bIns="0" rtlCol="0" anchor="ctr"/>
+          <a:lstStyle/>
+          <a:p>
+            <a:pPr indent="0" marL="0">
+              <a:buNone/>
+            </a:pPr>
+            <a:r>
+              <a:rPr lang="en-US" sz="1800" b="1" dirty="0">
+                <a:solidFill>
+                  <a:schemeClr val="accent2"/>
+                </a:solidFill>
+              </a:rPr>
+              <a:t>조금</a:t>
+            </a:r>
+            <a:endParaRPr lang="en-US" sz="1800" dirty="0"/>
+          </a:p>
+        </p:txBody>
+      </p:sp>
+      <p:sp>
+        <p:nvSpPr>
+          <p:cNvPr id="26" name="Text 24"/>
+          <p:cNvSpPr txBox="1"/>
+          <p:nvPr/>
+        </p:nvSpPr>
+        <p:spPr>
+          <a:xfrm>
+            <a:off x="5760720" y="3328416"/>
+            <a:ext cx="2834640" cy="640080"/>
+          </a:xfrm>
+          <a:prstGeom prst="rect">
+            <a:avLst/>
+          </a:prstGeom>
+          <a:noFill/>
+          <a:ln/>
+        </p:spPr>
+        <p:txBody>
+          <a:bodyPr wrap="square" lIns="0" tIns="0" rIns="0" bIns="0" rtlCol="0" anchor="ctr"/>
+          <a:lstStyle/>
+          <a:p>
+            <a:pPr indent="0" marL="0">
+              <a:buNone/>
+            </a:pPr>
+            <a:r>
+              <a:rPr lang="en-US" sz="1400" b="1" dirty="0">
+                <a:solidFill>
+                  <a:schemeClr val="bg1"/>
+                </a:solidFill>
+              </a:rPr>
+              <a:t>사게 하는 것</a:t>
+            </a:r>
+            <a:endParaRPr lang="en-US" sz="1400" dirty="0"/>
+          </a:p>
+          <a:p>
+            <a:pPr indent="0" marL="0">
+              <a:buNone/>
+            </a:pPr>
+            <a:r>
+              <a:rPr lang="en-US" sz="1200" dirty="0">
+                <a:solidFill>
+                  <a:schemeClr val="bg1"/>
+                </a:solidFill>
+              </a:rPr>
+              <a:t>신제품·할인</a:t>
+            </a:r>
+            <a:endParaRPr lang="en-US" sz="1400" dirty="0"/>
+          </a:p>
+        </p:txBody>
+      </p:sp>
+      <p:sp>
+        <p:nvSpPr>
+          <p:cNvPr id="27" name="Text 25"/>
+          <p:cNvSpPr txBox="1"/>
+          <p:nvPr/>
+        </p:nvSpPr>
+        <p:spPr>
+          <a:xfrm>
+            <a:off x="457200" y="4645152"/>
+            <a:ext cx="7680960" cy="274320"/>
+          </a:xfrm>
+          <a:prstGeom prst="rect">
+            <a:avLst/>
+          </a:prstGeom>
+          <a:noFill/>
+          <a:ln/>
+        </p:spPr>
+        <p:txBody>
+          <a:bodyPr wrap="square" lIns="0" tIns="0" rIns="0" bIns="0" rtlCol="0" anchor="t"/>
+          <a:lstStyle/>
+          <a:p>
+            <a:pPr indent="0" marL="0">
+              <a:buNone/>
+            </a:pPr>
+            <a:r>
+              <a:rPr lang="en-US" sz="1000" dirty="0">
+                <a:solidFill>
+                  <a:schemeClr val="accent4"/>
+                </a:solidFill>
+              </a:rPr>
+              <a:t>판매 글만 있는 계정은 팔로우할 이유가 없다 (32장)</a:t>
+            </a:r>
+            <a:endParaRPr lang="en-US" sz="1000" dirty="0"/>
+          </a:p>
+        </p:txBody>
+      </p:sp>
+      <p:sp>
+        <p:nvSpPr>
+          <p:cNvPr id="25" name="Slide Number Placeholder 0"/>
+          <p:cNvSpPr>
+            <a:spLocks noGrp="1"/>
+          </p:cNvSpPr>
+          <p:nvPr>
+            <p:ph type="sldNum" sz="quarter" idx="4294967295"/>
+          </p:nvPr>
+        </p:nvSpPr>
+        <p:spPr>
+          <a:xfrm>
+            <a:off x="8321040" y="4754880"/>
+            <a:ext cx="457200" cy="274320"/>
+          </a:xfrm>
+          <a:prstGeom prst="rect">
+            <a:avLst/>
+          </a:prstGeom>
+          <a:extLst>
+            <a:ext uri="{C572A759-6A51-4108-AA02-DFA0A04FC94B}">
+              <ma14:wrappingTextBoxFlag xmlns:ma14="http://schemas.microsoft.com/office/mac/drawingml/2011/main" val="0"/>
+            </a:ext>
+          </a:extLst>
+        </p:spPr>
+        <p:txBody>
+          <a:bodyPr/>
+          <a:lstStyle>
+            <a:lvl1pPr>
+              <a:defRPr sz="1000">
+                <a:solidFill>
+                  <a:schemeClr val="accent4"/>
+                </a:solidFill>
+              </a:defRPr>
+            </a:lvl1pPr>
+          </a:lstStyle>
+          <a:p>
+            <a:pPr algn="r"/>
+            <a:fld id="{F7021451-1387-4CA6-816F-3879F97B5CBC}" type="slidenum">
+              <a:rPr b="0" lang="en-US"/>
+              <a:t>43</a:t>
+            </a:fld>
+            <a:endParaRPr lang="en-US"/>
+          </a:p>
+        </p:txBody>
+      </p:sp>
+    </p:spTree>
+  </p:cSld>
+  <p:clrMapOvr>
+    <a:masterClrMapping/>
+  </p:clrMapOvr>
+</p:sld>
+</file>
+
+<file path=ppt/slides/slide44.xml><?xml version="1.0" encoding="utf-8"?>
+<p:sld xmlns:a="http://schemas.openxmlformats.org/drawingml/2006/main" xmlns:r="http://schemas.openxmlformats.org/officeDocument/2006/relationships" xmlns:p="http://schemas.openxmlformats.org/presentationml/2006/main">
+  <p:cSld name="Slide 44">
+    <p:spTree>
+      <p:nvGrpSpPr>
+        <p:cNvPr id="1" name=""/>
+        <p:cNvGrpSpPr/>
+        <p:nvPr/>
+      </p:nvGrpSpPr>
+      <p:grpSpPr>
+        <a:xfrm>
+          <a:off x="0" y="0"/>
+          <a:ext cx="0" cy="0"/>
+          <a:chOff x="0" y="0"/>
+          <a:chExt cx="0" cy="0"/>
+        </a:xfrm>
+      </p:grpSpPr>
+      <p:sp>
+        <p:nvSpPr>
+          <p:cNvPr id="2" name="Text 0"/>
+          <p:cNvSpPr/>
+          <p:nvPr>
+            <p:ph idx="100" type="title" hasCustomPrompt="1"/>
+          </p:nvPr>
+        </p:nvSpPr>
+        <p:spPr>
+          <a:xfrm>
+            <a:off x="457200" y="274320"/>
+            <a:ext cx="8229600" cy="685800"/>
+          </a:xfrm>
+          <a:prstGeom prst="rect">
+            <a:avLst/>
+          </a:prstGeom>
+          <a:noFill/>
+          <a:ln/>
+        </p:spPr>
+        <p:txBody>
+          <a:bodyPr wrap="square" lIns="0" tIns="0" rIns="0" bIns="0" rtlCol="0" anchor="ctr"/>
+          <a:lstStyle/>
+          <a:p>
+            <a:pPr indent="0" marL="0">
+              <a:buNone/>
+            </a:pPr>
+            <a:r>
+              <a:rPr lang="en-US" sz="2800" b="1" dirty="0">
+                <a:solidFill>
+                  <a:schemeClr val="tx2"/>
+                </a:solidFill>
+              </a:rPr>
+              <a:t>인스타그램이 보는 3가지 신호</a:t>
+            </a:r>
+            <a:endParaRPr lang="en-US" sz="2800" dirty="0"/>
+          </a:p>
+        </p:txBody>
+      </p:sp>
+      <p:sp>
+        <p:nvSpPr>
+          <p:cNvPr id="3" name="card"/>
+          <p:cNvSpPr/>
+          <p:nvPr/>
+        </p:nvSpPr>
+        <p:spPr>
+          <a:xfrm>
+            <a:off x="457200" y="1188720"/>
+            <a:ext cx="2606040" cy="1828800"/>
+          </a:xfrm>
+          <a:prstGeom prst="roundRect">
+            <a:avLst>
+              <a:gd name="adj" fmla="val 4000"/>
+            </a:avLst>
+          </a:prstGeom>
+          <a:solidFill>
+            <a:schemeClr val="bg2"/>
+          </a:solidFill>
+          <a:ln/>
+        </p:spPr>
+      </p:sp>
+      <p:sp>
+        <p:nvSpPr>
+          <p:cNvPr id="4" name="Text 2"/>
+          <p:cNvSpPr txBox="1"/>
+          <p:nvPr/>
+        </p:nvSpPr>
+        <p:spPr>
+          <a:xfrm>
+            <a:off x="640080" y="1325880"/>
+            <a:ext cx="2240280" cy="502920"/>
+          </a:xfrm>
+          <a:prstGeom prst="rect">
+            <a:avLst/>
+          </a:prstGeom>
+          <a:noFill/>
+          <a:ln/>
+        </p:spPr>
+        <p:txBody>
+          <a:bodyPr wrap="square" lIns="0" tIns="0" rIns="0" bIns="0" rtlCol="0" anchor="t"/>
+          <a:lstStyle/>
+          <a:p>
+            <a:pPr indent="0" marL="0">
+              <a:buNone/>
+            </a:pPr>
+            <a:r>
+              <a:rPr lang="en-US" sz="2200" b="1" dirty="0">
+                <a:solidFill>
+                  <a:schemeClr val="tx2"/>
+                </a:solidFill>
+              </a:rPr>
+              <a:t>시청 시간</a:t>
+            </a:r>
+            <a:endParaRPr lang="en-US" sz="2200" dirty="0"/>
+          </a:p>
+        </p:txBody>
+      </p:sp>
+      <p:sp>
+        <p:nvSpPr>
+          <p:cNvPr id="5" name="Text 3"/>
+          <p:cNvSpPr txBox="1"/>
+          <p:nvPr/>
+        </p:nvSpPr>
+        <p:spPr>
+          <a:xfrm>
+            <a:off x="640080" y="1874520"/>
+            <a:ext cx="2240280" cy="411480"/>
+          </a:xfrm>
+          <a:prstGeom prst="rect">
+            <a:avLst/>
+          </a:prstGeom>
+          <a:noFill/>
+          <a:ln/>
+        </p:spPr>
+        <p:txBody>
+          <a:bodyPr wrap="square" lIns="0" tIns="0" rIns="0" bIns="0" rtlCol="0" anchor="t"/>
+          <a:lstStyle/>
+          <a:p>
+            <a:pPr indent="0" marL="0">
+              <a:buNone/>
+            </a:pPr>
+            <a:r>
+              <a:rPr lang="en-US" sz="1300" dirty="0">
+                <a:solidFill>
+                  <a:schemeClr val="tx1"/>
+                </a:solidFill>
+              </a:rPr>
+              <a:t>끝까지 보나</a:t>
+            </a:r>
+            <a:endParaRPr lang="en-US" sz="1300" dirty="0"/>
+          </a:p>
+        </p:txBody>
+      </p:sp>
+      <p:sp>
+        <p:nvSpPr>
+          <p:cNvPr id="6" name="Text 4"/>
+          <p:cNvSpPr txBox="1"/>
+          <p:nvPr/>
+        </p:nvSpPr>
+        <p:spPr>
+          <a:xfrm>
+            <a:off x="640080" y="2377440"/>
+            <a:ext cx="2240280" cy="457200"/>
+          </a:xfrm>
+          <a:prstGeom prst="rect">
+            <a:avLst/>
+          </a:prstGeom>
+          <a:noFill/>
+          <a:ln/>
+        </p:spPr>
+        <p:txBody>
+          <a:bodyPr wrap="square" lIns="0" tIns="0" rIns="0" bIns="0" rtlCol="0" anchor="t"/>
+          <a:lstStyle/>
+          <a:p>
+            <a:pPr indent="0" marL="0">
+              <a:buNone/>
+            </a:pPr>
+            <a:r>
+              <a:rPr lang="en-US" sz="1100" dirty="0">
+                <a:solidFill>
+                  <a:schemeClr val="accent4"/>
+                </a:solidFill>
+              </a:rPr>
+              <a:t>인사이트: 평균 시청 시간</a:t>
+            </a:r>
+            <a:endParaRPr lang="en-US" sz="1100" dirty="0"/>
+          </a:p>
+        </p:txBody>
+      </p:sp>
+      <p:sp>
+        <p:nvSpPr>
+          <p:cNvPr id="7" name="card"/>
+          <p:cNvSpPr/>
+          <p:nvPr/>
+        </p:nvSpPr>
+        <p:spPr>
+          <a:xfrm>
+            <a:off x="3246120" y="1188720"/>
+            <a:ext cx="2606040" cy="1828800"/>
+          </a:xfrm>
+          <a:prstGeom prst="roundRect">
+            <a:avLst>
+              <a:gd name="adj" fmla="val 4000"/>
+            </a:avLst>
+          </a:prstGeom>
+          <a:solidFill>
+            <a:schemeClr val="bg2"/>
+          </a:solidFill>
+          <a:ln/>
+        </p:spPr>
+      </p:sp>
+      <p:sp>
+        <p:nvSpPr>
+          <p:cNvPr id="8" name="Text 6"/>
+          <p:cNvSpPr txBox="1"/>
+          <p:nvPr/>
+        </p:nvSpPr>
+        <p:spPr>
+          <a:xfrm>
+            <a:off x="3429000" y="1325880"/>
+            <a:ext cx="2240280" cy="502920"/>
+          </a:xfrm>
+          <a:prstGeom prst="rect">
+            <a:avLst/>
+          </a:prstGeom>
+          <a:noFill/>
+          <a:ln/>
+        </p:spPr>
+        <p:txBody>
+          <a:bodyPr wrap="square" lIns="0" tIns="0" rIns="0" bIns="0" rtlCol="0" anchor="t"/>
+          <a:lstStyle/>
+          <a:p>
+            <a:pPr indent="0" marL="0">
+              <a:buNone/>
+            </a:pPr>
+            <a:r>
+              <a:rPr lang="en-US" sz="2200" b="1" dirty="0">
+                <a:solidFill>
+                  <a:schemeClr val="tx2"/>
+                </a:solidFill>
+              </a:rPr>
+              <a:t>좋아요</a:t>
+            </a:r>
+            <a:endParaRPr lang="en-US" sz="2200" dirty="0"/>
+          </a:p>
+        </p:txBody>
+      </p:sp>
+      <p:sp>
+        <p:nvSpPr>
+          <p:cNvPr id="9" name="Text 7"/>
+          <p:cNvSpPr txBox="1"/>
+          <p:nvPr/>
+        </p:nvSpPr>
+        <p:spPr>
+          <a:xfrm>
+            <a:off x="3429000" y="1874520"/>
+            <a:ext cx="2240280" cy="411480"/>
+          </a:xfrm>
+          <a:prstGeom prst="rect">
+            <a:avLst/>
+          </a:prstGeom>
+          <a:noFill/>
+          <a:ln/>
+        </p:spPr>
+        <p:txBody>
+          <a:bodyPr wrap="square" lIns="0" tIns="0" rIns="0" bIns="0" rtlCol="0" anchor="t"/>
+          <a:lstStyle/>
+          <a:p>
+            <a:pPr indent="0" marL="0">
+              <a:buNone/>
+            </a:pPr>
+            <a:r>
+              <a:rPr lang="en-US" sz="1300" dirty="0">
+                <a:solidFill>
+                  <a:schemeClr val="tx1"/>
+                </a:solidFill>
+              </a:rPr>
+              <a:t>팔로워에게 퍼지는 힘</a:t>
+            </a:r>
+            <a:endParaRPr lang="en-US" sz="1300" dirty="0"/>
+          </a:p>
+        </p:txBody>
+      </p:sp>
+      <p:sp>
+        <p:nvSpPr>
+          <p:cNvPr id="10" name="Text 8"/>
+          <p:cNvSpPr txBox="1"/>
+          <p:nvPr/>
+        </p:nvSpPr>
+        <p:spPr>
+          <a:xfrm>
+            <a:off x="3429000" y="2377440"/>
+            <a:ext cx="2240280" cy="457200"/>
+          </a:xfrm>
+          <a:prstGeom prst="rect">
+            <a:avLst/>
+          </a:prstGeom>
+          <a:noFill/>
+          <a:ln/>
+        </p:spPr>
+        <p:txBody>
+          <a:bodyPr wrap="square" lIns="0" tIns="0" rIns="0" bIns="0" rtlCol="0" anchor="t"/>
+          <a:lstStyle/>
+          <a:p>
+            <a:pPr indent="0" marL="0">
+              <a:buNone/>
+            </a:pPr>
+            <a:r>
+              <a:rPr lang="en-US" sz="1100" dirty="0">
+                <a:solidFill>
+                  <a:schemeClr val="accent4"/>
+                </a:solidFill>
+              </a:rPr>
+              <a:t>인사이트: 도달 대비 좋아요</a:t>
+            </a:r>
+            <a:endParaRPr lang="en-US" sz="1100" dirty="0"/>
+          </a:p>
+        </p:txBody>
+      </p:sp>
+      <p:sp>
+        <p:nvSpPr>
+          <p:cNvPr id="11" name="card"/>
+          <p:cNvSpPr/>
+          <p:nvPr/>
+        </p:nvSpPr>
+        <p:spPr>
+          <a:xfrm>
+            <a:off x="6035040" y="1188720"/>
+            <a:ext cx="2606040" cy="1828800"/>
+          </a:xfrm>
+          <a:prstGeom prst="roundRect">
+            <a:avLst>
+              <a:gd name="adj" fmla="val 4000"/>
+            </a:avLst>
+          </a:prstGeom>
+          <a:solidFill>
+            <a:schemeClr val="accent2"/>
+          </a:solidFill>
+          <a:ln/>
+        </p:spPr>
+      </p:sp>
+      <p:sp>
+        <p:nvSpPr>
+          <p:cNvPr id="12" name="Text 10"/>
+          <p:cNvSpPr txBox="1"/>
+          <p:nvPr/>
+        </p:nvSpPr>
+        <p:spPr>
+          <a:xfrm>
+            <a:off x="6217920" y="1325880"/>
+            <a:ext cx="2240280" cy="502920"/>
+          </a:xfrm>
+          <a:prstGeom prst="rect">
+            <a:avLst/>
+          </a:prstGeom>
+          <a:noFill/>
+          <a:ln/>
+        </p:spPr>
+        <p:txBody>
+          <a:bodyPr wrap="square" lIns="0" tIns="0" rIns="0" bIns="0" rtlCol="0" anchor="t"/>
+          <a:lstStyle/>
+          <a:p>
+            <a:pPr indent="0" marL="0">
+              <a:buNone/>
+            </a:pPr>
+            <a:r>
+              <a:rPr lang="en-US" sz="2200" b="1" dirty="0">
+                <a:solidFill>
+                  <a:schemeClr val="bg1"/>
+                </a:solidFill>
+              </a:rPr>
+              <a:t>보내기</a:t>
+            </a:r>
+            <a:endParaRPr lang="en-US" sz="2200" dirty="0"/>
+          </a:p>
+        </p:txBody>
+      </p:sp>
+      <p:sp>
+        <p:nvSpPr>
+          <p:cNvPr id="13" name="Text 11"/>
+          <p:cNvSpPr txBox="1"/>
+          <p:nvPr/>
+        </p:nvSpPr>
+        <p:spPr>
+          <a:xfrm>
+            <a:off x="6217920" y="1874520"/>
+            <a:ext cx="2240280" cy="411480"/>
+          </a:xfrm>
+          <a:prstGeom prst="rect">
+            <a:avLst/>
+          </a:prstGeom>
+          <a:noFill/>
+          <a:ln/>
+        </p:spPr>
+        <p:txBody>
+          <a:bodyPr wrap="square" lIns="0" tIns="0" rIns="0" bIns="0" rtlCol="0" anchor="t"/>
+          <a:lstStyle/>
+          <a:p>
+            <a:pPr indent="0" marL="0">
+              <a:buNone/>
+            </a:pPr>
+            <a:r>
+              <a:rPr lang="en-US" sz="1300" dirty="0">
+                <a:solidFill>
+                  <a:schemeClr val="bg1"/>
+                </a:solidFill>
+              </a:rPr>
+              <a:t>모르는 사람에게 퍼지는 힘</a:t>
+            </a:r>
+            <a:endParaRPr lang="en-US" sz="1300" dirty="0"/>
+          </a:p>
+        </p:txBody>
+      </p:sp>
+      <p:sp>
+        <p:nvSpPr>
+          <p:cNvPr id="14" name="Text 12"/>
+          <p:cNvSpPr txBox="1"/>
+          <p:nvPr/>
+        </p:nvSpPr>
+        <p:spPr>
+          <a:xfrm>
+            <a:off x="6217920" y="2377440"/>
+            <a:ext cx="2240280" cy="457200"/>
+          </a:xfrm>
+          <a:prstGeom prst="rect">
+            <a:avLst/>
+          </a:prstGeom>
+          <a:noFill/>
+          <a:ln/>
+        </p:spPr>
+        <p:txBody>
+          <a:bodyPr wrap="square" lIns="0" tIns="0" rIns="0" bIns="0" rtlCol="0" anchor="t"/>
+          <a:lstStyle/>
+          <a:p>
+            <a:pPr indent="0" marL="0">
+              <a:buNone/>
+            </a:pPr>
+            <a:r>
+              <a:rPr lang="en-US" sz="1100" dirty="0">
+                <a:solidFill>
+                  <a:schemeClr val="bg1"/>
+                </a:solidFill>
+              </a:rPr>
+              <a:t>인사이트: 도달 대비 보내기</a:t>
+            </a:r>
+            <a:endParaRPr lang="en-US" sz="1100" dirty="0"/>
+          </a:p>
+        </p:txBody>
+      </p:sp>
+      <p:sp>
+        <p:nvSpPr>
+          <p:cNvPr id="15" name="Text 13"/>
+          <p:cNvSpPr txBox="1"/>
+          <p:nvPr/>
+        </p:nvSpPr>
+        <p:spPr>
+          <a:xfrm>
+            <a:off x="457200" y="3291840"/>
+            <a:ext cx="8229600" cy="1097280"/>
+          </a:xfrm>
+          <a:prstGeom prst="rect">
+            <a:avLst/>
+          </a:prstGeom>
+          <a:noFill/>
+          <a:ln/>
+        </p:spPr>
+        <p:txBody>
+          <a:bodyPr wrap="square" lIns="0" tIns="0" rIns="0" bIns="0" rtlCol="0" anchor="t"/>
+          <a:lstStyle/>
+          <a:p>
+            <a:pPr indent="0" marL="0">
+              <a:spcAft>
+                <a:spcPts val="800"/>
+              </a:spcAft>
+              <a:buNone/>
+            </a:pPr>
+            <a:r>
+              <a:rPr lang="en-US" sz="1400" b="1" dirty="0">
+                <a:solidFill>
+                  <a:schemeClr val="accent2"/>
+                </a:solidFill>
+              </a:rPr>
+              <a:t>영상 팁  </a:t>
+            </a:r>
+            <a:pPr indent="0" marL="0">
+              <a:spcAft>
+                <a:spcPts val="800"/>
+              </a:spcAft>
+              <a:buNone/>
+            </a:pPr>
+            <a:r>
+              <a:rPr lang="en-US" sz="1400" dirty="0">
+                <a:solidFill>
+                  <a:schemeClr val="tx1"/>
+                </a:solidFill>
+              </a:rPr>
+              <a:t>첫 1~2초에 결론 · 자막 필수 · 한 영상 한 메시지 · "친구에게 보내 주세요"</a:t>
+            </a:r>
+            <a:endParaRPr lang="en-US" sz="1400" dirty="0"/>
+          </a:p>
+          <a:p>
+            <a:pPr indent="0" marL="0">
+              <a:spcAft>
+                <a:spcPts val="800"/>
+              </a:spcAft>
+              <a:buNone/>
+            </a:pPr>
+            <a:r>
+              <a:rPr lang="en-US" sz="1400" b="1" dirty="0">
+                <a:solidFill>
+                  <a:schemeClr val="accent2"/>
+                </a:solidFill>
+              </a:rPr>
+              <a:t>해시태그  </a:t>
+            </a:r>
+            <a:pPr indent="0" marL="0">
+              <a:spcAft>
+                <a:spcPts val="800"/>
+              </a:spcAft>
+              <a:buNone/>
+            </a:pPr>
+            <a:r>
+              <a:rPr lang="en-US" sz="1400" dirty="0">
+                <a:solidFill>
+                  <a:schemeClr val="tx1"/>
+                </a:solidFill>
+              </a:rPr>
+              <a:t>2025년 12월부터 5개 제한 보도 → 캡션 첫 줄과 영상 속 단어가 더 중요</a:t>
+            </a:r>
+            <a:endParaRPr lang="en-US" sz="1400" dirty="0"/>
+          </a:p>
+          <a:p>
+            <a:pPr indent="0" marL="0">
+              <a:spcAft>
+                <a:spcPts val="800"/>
+              </a:spcAft>
+              <a:buNone/>
+            </a:pPr>
+            <a:r>
+              <a:rPr lang="en-US" sz="1400" b="1" dirty="0">
+                <a:solidFill>
+                  <a:schemeClr val="accent2"/>
+                </a:solidFill>
+              </a:rPr>
+              <a:t>기준  </a:t>
+            </a:r>
+            <a:pPr indent="0" marL="0">
+              <a:spcAft>
+                <a:spcPts val="800"/>
+              </a:spcAft>
+              <a:buNone/>
+            </a:pPr>
+            <a:r>
+              <a:rPr lang="en-US" sz="1400" dirty="0">
+                <a:solidFill>
+                  <a:schemeClr val="tx1"/>
+                </a:solidFill>
+              </a:rPr>
+              <a:t>인스타그램 책임자 애덤 모세리, 2025년 1월 발표 (보도 기준)</a:t>
+            </a:r>
+            <a:endParaRPr lang="en-US" sz="1400" dirty="0"/>
+          </a:p>
+        </p:txBody>
+      </p:sp>
+      <p:sp>
+        <p:nvSpPr>
+          <p:cNvPr id="25" name="Slide Number Placeholder 0"/>
+          <p:cNvSpPr>
+            <a:spLocks noGrp="1"/>
+          </p:cNvSpPr>
+          <p:nvPr>
+            <p:ph type="sldNum" sz="quarter" idx="4294967295"/>
+          </p:nvPr>
+        </p:nvSpPr>
+        <p:spPr>
+          <a:xfrm>
+            <a:off x="8321040" y="4754880"/>
+            <a:ext cx="457200" cy="274320"/>
+          </a:xfrm>
+          <a:prstGeom prst="rect">
+            <a:avLst/>
+          </a:prstGeom>
+          <a:extLst>
+            <a:ext uri="{C572A759-6A51-4108-AA02-DFA0A04FC94B}">
+              <ma14:wrappingTextBoxFlag xmlns:ma14="http://schemas.microsoft.com/office/mac/drawingml/2011/main" val="0"/>
+            </a:ext>
+          </a:extLst>
+        </p:spPr>
+        <p:txBody>
+          <a:bodyPr/>
+          <a:lstStyle>
+            <a:lvl1pPr>
+              <a:defRPr sz="1000">
+                <a:solidFill>
+                  <a:schemeClr val="accent4"/>
+                </a:solidFill>
+              </a:defRPr>
+            </a:lvl1pPr>
+          </a:lstStyle>
+          <a:p>
+            <a:pPr algn="r"/>
+            <a:fld id="{F7021451-1387-4CA6-816F-3879F97B5CBC}" type="slidenum">
+              <a:rPr b="0" lang="en-US"/>
+              <a:t>44</a:t>
+            </a:fld>
+            <a:endParaRPr lang="en-US"/>
+          </a:p>
+        </p:txBody>
+      </p:sp>
+    </p:spTree>
+  </p:cSld>
+  <p:clrMapOvr>
+    <a:masterClrMapping/>
+  </p:clrMapOvr>
+</p:sld>
+</file>
+
+<file path=ppt/slides/slide45.xml><?xml version="1.0" encoding="utf-8"?>
+<p:sld xmlns:a="http://schemas.openxmlformats.org/drawingml/2006/main" xmlns:r="http://schemas.openxmlformats.org/officeDocument/2006/relationships" xmlns:p="http://schemas.openxmlformats.org/presentationml/2006/main">
+  <p:cSld name="Slide 45">
+    <p:spTree>
+      <p:nvGrpSpPr>
+        <p:cNvPr id="1" name=""/>
+        <p:cNvGrpSpPr/>
+        <p:nvPr/>
+      </p:nvGrpSpPr>
+      <p:grpSpPr>
+        <a:xfrm>
+          <a:off x="0" y="0"/>
+          <a:ext cx="0" cy="0"/>
+          <a:chOff x="0" y="0"/>
+          <a:chExt cx="0" cy="0"/>
+        </a:xfrm>
+      </p:grpSpPr>
+      <p:sp>
+        <p:nvSpPr>
+          <p:cNvPr id="2" name="Text 0"/>
+          <p:cNvSpPr/>
+          <p:nvPr>
+            <p:ph idx="100" type="title" hasCustomPrompt="1"/>
+          </p:nvPr>
+        </p:nvSpPr>
+        <p:spPr>
+          <a:xfrm>
+            <a:off x="457200" y="274320"/>
+            <a:ext cx="8229600" cy="685800"/>
+          </a:xfrm>
+          <a:prstGeom prst="rect">
+            <a:avLst/>
+          </a:prstGeom>
+          <a:noFill/>
+          <a:ln/>
+        </p:spPr>
+        <p:txBody>
+          <a:bodyPr wrap="square" lIns="0" tIns="0" rIns="0" bIns="0" rtlCol="0" anchor="ctr"/>
+          <a:lstStyle/>
+          <a:p>
+            <a:pPr indent="0" marL="0">
+              <a:buNone/>
+            </a:pPr>
+            <a:r>
+              <a:rPr lang="en-US" sz="2800" b="1" dirty="0">
+                <a:solidFill>
+                  <a:schemeClr val="tx2"/>
+                </a:solidFill>
+              </a:rPr>
+              <a:t>메타 광고 첫 예산 계산법 (업계 경험칙)</a:t>
+            </a:r>
+            <a:endParaRPr lang="en-US" sz="2800" dirty="0"/>
+          </a:p>
+        </p:txBody>
+      </p:sp>
+      <p:sp>
+        <p:nvSpPr>
+          <p:cNvPr id="3" name="card"/>
+          <p:cNvSpPr/>
+          <p:nvPr/>
+        </p:nvSpPr>
+        <p:spPr>
+          <a:xfrm>
+            <a:off x="457200" y="1188720"/>
+            <a:ext cx="4754880" cy="1463040"/>
+          </a:xfrm>
+          <a:prstGeom prst="roundRect">
+            <a:avLst>
+              <a:gd name="adj" fmla="val 5000"/>
+            </a:avLst>
+          </a:prstGeom>
+          <a:solidFill>
+            <a:schemeClr val="tx2"/>
+          </a:solidFill>
+          <a:ln/>
+        </p:spPr>
+      </p:sp>
+      <p:sp>
+        <p:nvSpPr>
+          <p:cNvPr id="4" name="Text 2"/>
+          <p:cNvSpPr txBox="1"/>
+          <p:nvPr/>
+        </p:nvSpPr>
+        <p:spPr>
+          <a:xfrm>
+            <a:off x="685800" y="1280160"/>
+            <a:ext cx="4389120" cy="640080"/>
+          </a:xfrm>
+          <a:prstGeom prst="rect">
+            <a:avLst/>
+          </a:prstGeom>
+          <a:noFill/>
+          <a:ln/>
+        </p:spPr>
+        <p:txBody>
+          <a:bodyPr wrap="square" lIns="0" tIns="0" rIns="0" bIns="0" rtlCol="0" anchor="ctr"/>
+          <a:lstStyle/>
+          <a:p>
+            <a:pPr indent="0" marL="0">
+              <a:buNone/>
+            </a:pPr>
+            <a:r>
+              <a:rPr lang="en-US" sz="1800" b="1" dirty="0">
+                <a:solidFill>
+                  <a:schemeClr val="bg1"/>
+                </a:solidFill>
+              </a:rPr>
+              <a:t>하루 예산 ≈ 목표 전환 1건 비용 × 50 ÷ 7</a:t>
+            </a:r>
+            <a:endParaRPr lang="en-US" sz="1800" dirty="0"/>
+          </a:p>
+        </p:txBody>
+      </p:sp>
+      <p:sp>
+        <p:nvSpPr>
+          <p:cNvPr id="5" name="Text 3"/>
+          <p:cNvSpPr txBox="1"/>
+          <p:nvPr/>
+        </p:nvSpPr>
+        <p:spPr>
+          <a:xfrm>
+            <a:off x="685800" y="1920240"/>
+            <a:ext cx="4389120" cy="548640"/>
+          </a:xfrm>
+          <a:prstGeom prst="rect">
+            <a:avLst/>
+          </a:prstGeom>
+          <a:noFill/>
+          <a:ln/>
+        </p:spPr>
+        <p:txBody>
+          <a:bodyPr wrap="square" lIns="0" tIns="0" rIns="0" bIns="0" rtlCol="0" anchor="t"/>
+          <a:lstStyle/>
+          <a:p>
+            <a:pPr indent="0" marL="0">
+              <a:buNone/>
+            </a:pPr>
+            <a:r>
+              <a:rPr lang="en-US" sz="1400" dirty="0">
+                <a:solidFill>
+                  <a:schemeClr val="accent6"/>
+                </a:solidFill>
+              </a:rPr>
+              <a:t>예) 구매 1건 1만 원 목표 → 하루 약 7만 원</a:t>
+            </a:r>
+            <a:endParaRPr lang="en-US" sz="1400" dirty="0"/>
+          </a:p>
+        </p:txBody>
+      </p:sp>
+      <p:sp>
+        <p:nvSpPr>
+          <p:cNvPr id="6" name="Text 4"/>
+          <p:cNvSpPr txBox="1"/>
+          <p:nvPr/>
+        </p:nvSpPr>
+        <p:spPr>
+          <a:xfrm>
+            <a:off x="457200" y="2834640"/>
+            <a:ext cx="4754880" cy="1554480"/>
+          </a:xfrm>
+          <a:prstGeom prst="rect">
+            <a:avLst/>
+          </a:prstGeom>
+          <a:noFill/>
+          <a:ln/>
+        </p:spPr>
+        <p:txBody>
+          <a:bodyPr wrap="square" lIns="0" tIns="0" rIns="0" bIns="0" rtlCol="0" anchor="t"/>
+          <a:lstStyle/>
+          <a:p>
+            <a:pPr marL="342900" indent="-342900">
+              <a:spcAft>
+                <a:spcPts val="600"/>
+              </a:spcAft>
+              <a:buSzPct val="100000"/>
+              <a:buChar char="•"/>
+            </a:pPr>
+            <a:r>
+              <a:rPr lang="en-US" sz="1300" dirty="0">
+                <a:solidFill>
+                  <a:schemeClr val="tx1"/>
+                </a:solidFill>
+              </a:rPr>
+              <a:t>약 7일에 최적화 이벤트 50회 = 학습 끝이라는 업계 안내</a:t>
+            </a:r>
+            <a:endParaRPr lang="en-US" sz="1300" dirty="0"/>
+          </a:p>
+          <a:p>
+            <a:pPr marL="342900" indent="-342900">
+              <a:spcAft>
+                <a:spcPts val="600"/>
+              </a:spcAft>
+              <a:buSzPct val="100000"/>
+              <a:buChar char="•"/>
+            </a:pPr>
+            <a:r>
+              <a:rPr lang="en-US" sz="1300" dirty="0">
+                <a:solidFill>
+                  <a:schemeClr val="tx1"/>
+                </a:solidFill>
+              </a:rPr>
+              <a:t>부담되면 목표를 앞 단계(장바구니·상세 보기)로</a:t>
+            </a:r>
+            <a:endParaRPr lang="en-US" sz="1300" dirty="0"/>
+          </a:p>
+          <a:p>
+            <a:pPr marL="342900" indent="-342900">
+              <a:spcAft>
+                <a:spcPts val="600"/>
+              </a:spcAft>
+              <a:buSzPct val="100000"/>
+              <a:buChar char="•"/>
+            </a:pPr>
+            <a:r>
+              <a:rPr lang="en-US" sz="1300" dirty="0">
+                <a:solidFill>
+                  <a:schemeClr val="tx1"/>
+                </a:solidFill>
+              </a:rPr>
+              <a:t>반응 좋았던 릴스를 광고 소재로</a:t>
+            </a:r>
+            <a:endParaRPr lang="en-US" sz="1300" dirty="0"/>
+          </a:p>
+          <a:p>
+            <a:pPr marL="342900" indent="-342900">
+              <a:spcAft>
+                <a:spcPts val="600"/>
+              </a:spcAft>
+              <a:buSzPct val="100000"/>
+              <a:buChar char="•"/>
+            </a:pPr>
+            <a:r>
+              <a:rPr lang="en-US" sz="1300" dirty="0">
+                <a:solidFill>
+                  <a:schemeClr val="tx1"/>
+                </a:solidFill>
+              </a:rPr>
+              <a:t>첫 1주는 자주 건드리지 않기</a:t>
+            </a:r>
+            <a:endParaRPr lang="en-US" sz="1300" dirty="0"/>
+          </a:p>
+        </p:txBody>
+      </p:sp>
+      <p:sp>
+        <p:nvSpPr>
+          <p:cNvPr id="7" name="card"/>
+          <p:cNvSpPr/>
+          <p:nvPr/>
+        </p:nvSpPr>
+        <p:spPr>
+          <a:xfrm>
+            <a:off x="5486400" y="1188720"/>
+            <a:ext cx="3200400" cy="3200400"/>
+          </a:xfrm>
+          <a:prstGeom prst="roundRect">
+            <a:avLst>
+              <a:gd name="adj" fmla="val 2286"/>
+            </a:avLst>
+          </a:prstGeom>
+          <a:solidFill>
+            <a:schemeClr val="bg2"/>
+          </a:solidFill>
+          <a:ln/>
+        </p:spPr>
+      </p:sp>
+      <p:sp>
+        <p:nvSpPr>
+          <p:cNvPr id="8" name="Text 6"/>
+          <p:cNvSpPr txBox="1"/>
+          <p:nvPr/>
+        </p:nvSpPr>
+        <p:spPr>
+          <a:xfrm>
+            <a:off x="5669280" y="1325880"/>
+            <a:ext cx="2834640" cy="365760"/>
+          </a:xfrm>
+          <a:prstGeom prst="rect">
+            <a:avLst/>
+          </a:prstGeom>
+          <a:noFill/>
+          <a:ln/>
+        </p:spPr>
+        <p:txBody>
+          <a:bodyPr wrap="square" lIns="0" tIns="0" rIns="0" bIns="0" rtlCol="0" anchor="t"/>
+          <a:lstStyle/>
+          <a:p>
+            <a:pPr indent="0" marL="0">
+              <a:buNone/>
+            </a:pPr>
+            <a:r>
+              <a:rPr lang="en-US" sz="1600" b="1" dirty="0">
+                <a:solidFill>
+                  <a:schemeClr val="accent2"/>
+                </a:solidFill>
+              </a:rPr>
+              <a:t>광고 구조</a:t>
+            </a:r>
+            <a:endParaRPr lang="en-US" sz="1600" dirty="0"/>
+          </a:p>
+        </p:txBody>
+      </p:sp>
+      <p:sp>
+        <p:nvSpPr>
+          <p:cNvPr id="9" name="adlvl0"/>
+          <p:cNvSpPr/>
+          <p:nvPr/>
+        </p:nvSpPr>
+        <p:spPr>
+          <a:xfrm>
+            <a:off x="5669280" y="1828800"/>
+            <a:ext cx="2743200" cy="640080"/>
+          </a:xfrm>
+          <a:prstGeom prst="roundRect">
+            <a:avLst>
+              <a:gd name="adj" fmla="val 8571"/>
+            </a:avLst>
+          </a:prstGeom>
+          <a:solidFill>
+            <a:srgbClr val="1F4E4A"/>
+          </a:solidFill>
+          <a:ln/>
+        </p:spPr>
+      </p:sp>
+      <p:sp>
+        <p:nvSpPr>
+          <p:cNvPr id="10" name="Text 8"/>
+          <p:cNvSpPr txBox="1"/>
+          <p:nvPr/>
+        </p:nvSpPr>
+        <p:spPr>
+          <a:xfrm>
+            <a:off x="5806440" y="1828800"/>
+            <a:ext cx="2560320" cy="640080"/>
+          </a:xfrm>
+          <a:prstGeom prst="rect">
+            <a:avLst/>
+          </a:prstGeom>
+          <a:noFill/>
+          <a:ln/>
+        </p:spPr>
+        <p:txBody>
+          <a:bodyPr wrap="square" lIns="0" tIns="0" rIns="0" bIns="0" rtlCol="0" anchor="ctr"/>
+          <a:lstStyle/>
+          <a:p>
+            <a:pPr indent="0" marL="0">
+              <a:buNone/>
+            </a:pPr>
+            <a:r>
+              <a:rPr lang="en-US" sz="1400" b="1" dirty="0">
+                <a:solidFill>
+                  <a:schemeClr val="bg1"/>
+                </a:solidFill>
+              </a:rPr>
+              <a:t>캠페인  </a:t>
+            </a:r>
+            <a:pPr indent="0" marL="0">
+              <a:buNone/>
+            </a:pPr>
+            <a:r>
+              <a:rPr lang="en-US" sz="1100" dirty="0">
+                <a:solidFill>
+                  <a:schemeClr val="bg1"/>
+                </a:solidFill>
+              </a:rPr>
+              <a:t>목표</a:t>
+            </a:r>
+            <a:endParaRPr lang="en-US" sz="1400" dirty="0"/>
+          </a:p>
+        </p:txBody>
+      </p:sp>
+      <p:sp>
+        <p:nvSpPr>
+          <p:cNvPr id="11" name="adlvl1"/>
+          <p:cNvSpPr/>
+          <p:nvPr/>
+        </p:nvSpPr>
+        <p:spPr>
+          <a:xfrm>
+            <a:off x="5852160" y="2606040"/>
+            <a:ext cx="2560320" cy="640080"/>
+          </a:xfrm>
+          <a:prstGeom prst="roundRect">
+            <a:avLst>
+              <a:gd name="adj" fmla="val 8571"/>
+            </a:avLst>
+          </a:prstGeom>
+          <a:solidFill>
+            <a:srgbClr val="2E9C8F"/>
+          </a:solidFill>
+          <a:ln/>
+        </p:spPr>
+      </p:sp>
+      <p:sp>
+        <p:nvSpPr>
+          <p:cNvPr id="12" name="Text 10"/>
+          <p:cNvSpPr txBox="1"/>
+          <p:nvPr/>
+        </p:nvSpPr>
+        <p:spPr>
+          <a:xfrm>
+            <a:off x="5989320" y="2606040"/>
+            <a:ext cx="2377440" cy="640080"/>
+          </a:xfrm>
+          <a:prstGeom prst="rect">
+            <a:avLst/>
+          </a:prstGeom>
+          <a:noFill/>
+          <a:ln/>
+        </p:spPr>
+        <p:txBody>
+          <a:bodyPr wrap="square" lIns="0" tIns="0" rIns="0" bIns="0" rtlCol="0" anchor="ctr"/>
+          <a:lstStyle/>
+          <a:p>
+            <a:pPr indent="0" marL="0">
+              <a:buNone/>
+            </a:pPr>
+            <a:r>
+              <a:rPr lang="en-US" sz="1400" b="1" dirty="0">
+                <a:solidFill>
+                  <a:schemeClr val="bg1"/>
+                </a:solidFill>
+              </a:rPr>
+              <a:t>광고 세트  </a:t>
+            </a:r>
+            <a:pPr indent="0" marL="0">
+              <a:buNone/>
+            </a:pPr>
+            <a:r>
+              <a:rPr lang="en-US" sz="1100" dirty="0">
+                <a:solidFill>
+                  <a:schemeClr val="bg1"/>
+                </a:solidFill>
+              </a:rPr>
+              <a:t>누구에게 · 얼마 · 언제</a:t>
+            </a:r>
+            <a:endParaRPr lang="en-US" sz="1400" dirty="0"/>
+          </a:p>
+        </p:txBody>
+      </p:sp>
+      <p:sp>
+        <p:nvSpPr>
+          <p:cNvPr id="13" name="adlvl2"/>
+          <p:cNvSpPr/>
+          <p:nvPr/>
+        </p:nvSpPr>
+        <p:spPr>
+          <a:xfrm>
+            <a:off x="6035040" y="3383280"/>
+            <a:ext cx="2377440" cy="640080"/>
+          </a:xfrm>
+          <a:prstGeom prst="roundRect">
+            <a:avLst>
+              <a:gd name="adj" fmla="val 8571"/>
+            </a:avLst>
+          </a:prstGeom>
+          <a:solidFill>
+            <a:srgbClr val="F08A3E"/>
+          </a:solidFill>
+          <a:ln/>
+        </p:spPr>
+      </p:sp>
+      <p:sp>
+        <p:nvSpPr>
+          <p:cNvPr id="14" name="Text 12"/>
+          <p:cNvSpPr txBox="1"/>
+          <p:nvPr/>
+        </p:nvSpPr>
+        <p:spPr>
+          <a:xfrm>
+            <a:off x="6172200" y="3383280"/>
+            <a:ext cx="2194560" cy="640080"/>
+          </a:xfrm>
+          <a:prstGeom prst="rect">
+            <a:avLst/>
+          </a:prstGeom>
+          <a:noFill/>
+          <a:ln/>
+        </p:spPr>
+        <p:txBody>
+          <a:bodyPr wrap="square" lIns="0" tIns="0" rIns="0" bIns="0" rtlCol="0" anchor="ctr"/>
+          <a:lstStyle/>
+          <a:p>
+            <a:pPr indent="0" marL="0">
+              <a:buNone/>
+            </a:pPr>
+            <a:r>
+              <a:rPr lang="en-US" sz="1400" b="1" dirty="0">
+                <a:solidFill>
+                  <a:schemeClr val="bg1"/>
+                </a:solidFill>
+              </a:rPr>
+              <a:t>광고  </a:t>
+            </a:r>
+            <a:pPr indent="0" marL="0">
+              <a:buNone/>
+            </a:pPr>
+            <a:r>
+              <a:rPr lang="en-US" sz="1100" dirty="0">
+                <a:solidFill>
+                  <a:schemeClr val="bg1"/>
+                </a:solidFill>
+              </a:rPr>
+              <a:t>영상 · 이미지 · 문구</a:t>
+            </a:r>
+            <a:endParaRPr lang="en-US" sz="1400" dirty="0"/>
+          </a:p>
+        </p:txBody>
+      </p:sp>
+      <p:sp>
+        <p:nvSpPr>
+          <p:cNvPr id="25" name="Slide Number Placeholder 0"/>
+          <p:cNvSpPr>
+            <a:spLocks noGrp="1"/>
+          </p:cNvSpPr>
+          <p:nvPr>
+            <p:ph type="sldNum" sz="quarter" idx="4294967295"/>
+          </p:nvPr>
+        </p:nvSpPr>
+        <p:spPr>
+          <a:xfrm>
+            <a:off x="8321040" y="4754880"/>
+            <a:ext cx="457200" cy="274320"/>
+          </a:xfrm>
+          <a:prstGeom prst="rect">
+            <a:avLst/>
+          </a:prstGeom>
+          <a:extLst>
+            <a:ext uri="{C572A759-6A51-4108-AA02-DFA0A04FC94B}">
+              <ma14:wrappingTextBoxFlag xmlns:ma14="http://schemas.microsoft.com/office/mac/drawingml/2011/main" val="0"/>
+            </a:ext>
+          </a:extLst>
+        </p:spPr>
+        <p:txBody>
+          <a:bodyPr/>
+          <a:lstStyle>
+            <a:lvl1pPr>
+              <a:defRPr sz="1000">
+                <a:solidFill>
+                  <a:schemeClr val="accent4"/>
+                </a:solidFill>
+              </a:defRPr>
+            </a:lvl1pPr>
+          </a:lstStyle>
+          <a:p>
+            <a:pPr algn="r"/>
+            <a:fld id="{F7021451-1387-4CA6-816F-3879F97B5CBC}" type="slidenum">
+              <a:rPr b="0" lang="en-US"/>
+              <a:t>45</a:t>
+            </a:fld>
+            <a:endParaRPr lang="en-US"/>
+          </a:p>
+        </p:txBody>
+      </p:sp>
+    </p:spTree>
+  </p:cSld>
+  <p:clrMapOvr>
+    <a:masterClrMapping/>
+  </p:clrMapOvr>
+</p:sld>
+</file>
+
+<file path=ppt/slides/slide46.xml><?xml version="1.0" encoding="utf-8"?>
+<p:sld xmlns:a="http://schemas.openxmlformats.org/drawingml/2006/main" xmlns:r="http://schemas.openxmlformats.org/officeDocument/2006/relationships" xmlns:p="http://schemas.openxmlformats.org/presentationml/2006/main">
+  <p:cSld name="Slide 46">
+    <p:spTree>
+      <p:nvGrpSpPr>
+        <p:cNvPr id="1" name=""/>
+        <p:cNvGrpSpPr/>
+        <p:nvPr/>
+      </p:nvGrpSpPr>
+      <p:grpSpPr>
+        <a:xfrm>
+          <a:off x="0" y="0"/>
+          <a:ext cx="0" cy="0"/>
+          <a:chOff x="0" y="0"/>
+          <a:chExt cx="0" cy="0"/>
+        </a:xfrm>
+      </p:grpSpPr>
+      <p:sp>
+        <p:nvSpPr>
+          <p:cNvPr id="2" name="Text 0"/>
+          <p:cNvSpPr/>
+          <p:nvPr>
+            <p:ph idx="100" type="title" hasCustomPrompt="1"/>
+          </p:nvPr>
+        </p:nvSpPr>
+        <p:spPr>
+          <a:xfrm>
+            <a:off x="457200" y="274320"/>
+            <a:ext cx="8229600" cy="685800"/>
+          </a:xfrm>
+          <a:prstGeom prst="rect">
+            <a:avLst/>
+          </a:prstGeom>
+          <a:noFill/>
+          <a:ln/>
+        </p:spPr>
+        <p:txBody>
+          <a:bodyPr wrap="square" lIns="0" tIns="0" rIns="0" bIns="0" rtlCol="0" anchor="ctr"/>
+          <a:lstStyle/>
+          <a:p>
+            <a:pPr indent="0" marL="0">
+              <a:buNone/>
+            </a:pPr>
+            <a:r>
+              <a:rPr lang="en-US" sz="2800" b="1" dirty="0">
+                <a:solidFill>
+                  <a:schemeClr val="tx2"/>
+                </a:solidFill>
+              </a:rPr>
+              <a:t>한국 동네 장사: 네이버 · 당근 · 카카오</a:t>
+            </a:r>
+            <a:endParaRPr lang="en-US" sz="2800" dirty="0"/>
+          </a:p>
+        </p:txBody>
+      </p:sp>
+      <p:sp>
+        <p:nvSpPr>
+          <p:cNvPr id="3" name="card"/>
+          <p:cNvSpPr/>
+          <p:nvPr/>
+        </p:nvSpPr>
+        <p:spPr>
+          <a:xfrm>
+            <a:off x="457200" y="1188720"/>
+            <a:ext cx="2606040" cy="3200400"/>
+          </a:xfrm>
+          <a:prstGeom prst="roundRect">
+            <a:avLst>
+              <a:gd name="adj" fmla="val 2807"/>
+            </a:avLst>
+          </a:prstGeom>
+          <a:solidFill>
+            <a:schemeClr val="bg2"/>
+          </a:solidFill>
+          <a:ln/>
+        </p:spPr>
+      </p:sp>
+      <p:sp>
+        <p:nvSpPr>
+          <p:cNvPr id="4" name="Text 2"/>
+          <p:cNvSpPr txBox="1"/>
+          <p:nvPr/>
+        </p:nvSpPr>
+        <p:spPr>
+          <a:xfrm>
+            <a:off x="640080" y="1325880"/>
+            <a:ext cx="2240280" cy="457200"/>
+          </a:xfrm>
+          <a:prstGeom prst="rect">
+            <a:avLst/>
+          </a:prstGeom>
+          <a:noFill/>
+          <a:ln/>
+        </p:spPr>
+        <p:txBody>
+          <a:bodyPr wrap="square" lIns="0" tIns="0" rIns="0" bIns="0" rtlCol="0" anchor="t"/>
+          <a:lstStyle/>
+          <a:p>
+            <a:pPr indent="0" marL="0">
+              <a:buNone/>
+            </a:pPr>
+            <a:r>
+              <a:rPr lang="en-US" sz="1600" b="1" dirty="0">
+                <a:solidFill>
+                  <a:schemeClr val="tx2"/>
+                </a:solidFill>
+              </a:rPr>
+              <a:t>네이버 스마트플레이스</a:t>
+            </a:r>
+            <a:endParaRPr lang="en-US" sz="1600" dirty="0"/>
+          </a:p>
+        </p:txBody>
+      </p:sp>
+      <p:sp>
+        <p:nvSpPr>
+          <p:cNvPr id="5" name="Text 3"/>
+          <p:cNvSpPr txBox="1"/>
+          <p:nvPr/>
+        </p:nvSpPr>
+        <p:spPr>
+          <a:xfrm>
+            <a:off x="640080" y="1874520"/>
+            <a:ext cx="2286000" cy="2377440"/>
+          </a:xfrm>
+          <a:prstGeom prst="rect">
+            <a:avLst/>
+          </a:prstGeom>
+          <a:noFill/>
+          <a:ln/>
+        </p:spPr>
+        <p:txBody>
+          <a:bodyPr wrap="square" lIns="0" tIns="0" rIns="0" bIns="0" rtlCol="0" anchor="t"/>
+          <a:lstStyle/>
+          <a:p>
+            <a:pPr marL="342900" indent="-342900">
+              <a:spcAft>
+                <a:spcPts val="800"/>
+              </a:spcAft>
+              <a:buSzPct val="100000"/>
+              <a:buChar char="•"/>
+            </a:pPr>
+            <a:r>
+              <a:rPr lang="en-US" sz="1300" dirty="0">
+                <a:solidFill>
+                  <a:schemeClr val="tx1"/>
+                </a:solidFill>
+              </a:rPr>
+              <a:t>정보·사진·메뉴 최신으로</a:t>
+            </a:r>
+            <a:endParaRPr lang="en-US" sz="1300" dirty="0"/>
+          </a:p>
+          <a:p>
+            <a:pPr marL="342900" indent="-342900">
+              <a:spcAft>
+                <a:spcPts val="800"/>
+              </a:spcAft>
+              <a:buSzPct val="100000"/>
+              <a:buChar char="•"/>
+            </a:pPr>
+            <a:r>
+              <a:rPr lang="en-US" sz="1300" dirty="0">
+                <a:solidFill>
+                  <a:schemeClr val="tx1"/>
+                </a:solidFill>
+              </a:rPr>
+              <a:t>진짜 손님 리뷰를 꾸준히 + 사장님 답글</a:t>
+            </a:r>
+            <a:endParaRPr lang="en-US" sz="1300" dirty="0"/>
+          </a:p>
+          <a:p>
+            <a:pPr marL="342900" indent="-342900">
+              <a:spcAft>
+                <a:spcPts val="800"/>
+              </a:spcAft>
+              <a:buSzPct val="100000"/>
+              <a:buChar char="•"/>
+            </a:pPr>
+            <a:r>
+              <a:rPr lang="en-US" sz="1300" dirty="0">
+                <a:solidFill>
+                  <a:schemeClr val="tx1"/>
+                </a:solidFill>
+              </a:rPr>
+              <a:t>리뷰·저장 구매(어뷰징) 금지</a:t>
+            </a:r>
+            <a:endParaRPr lang="en-US" sz="1300" dirty="0"/>
+          </a:p>
+        </p:txBody>
+      </p:sp>
+      <p:sp>
+        <p:nvSpPr>
+          <p:cNvPr id="6" name="card"/>
+          <p:cNvSpPr/>
+          <p:nvPr/>
+        </p:nvSpPr>
+        <p:spPr>
+          <a:xfrm>
+            <a:off x="3246120" y="1188720"/>
+            <a:ext cx="2606040" cy="3200400"/>
+          </a:xfrm>
+          <a:prstGeom prst="roundRect">
+            <a:avLst>
+              <a:gd name="adj" fmla="val 2807"/>
+            </a:avLst>
+          </a:prstGeom>
+          <a:solidFill>
+            <a:schemeClr val="bg2"/>
+          </a:solidFill>
+          <a:ln/>
+        </p:spPr>
+      </p:sp>
+      <p:sp>
+        <p:nvSpPr>
+          <p:cNvPr id="7" name="Text 5"/>
+          <p:cNvSpPr txBox="1"/>
+          <p:nvPr/>
+        </p:nvSpPr>
+        <p:spPr>
+          <a:xfrm>
+            <a:off x="3429000" y="1325880"/>
+            <a:ext cx="2240280" cy="457200"/>
+          </a:xfrm>
+          <a:prstGeom prst="rect">
+            <a:avLst/>
+          </a:prstGeom>
+          <a:noFill/>
+          <a:ln/>
+        </p:spPr>
+        <p:txBody>
+          <a:bodyPr wrap="square" lIns="0" tIns="0" rIns="0" bIns="0" rtlCol="0" anchor="t"/>
+          <a:lstStyle/>
+          <a:p>
+            <a:pPr indent="0" marL="0">
+              <a:buNone/>
+            </a:pPr>
+            <a:r>
+              <a:rPr lang="en-US" sz="1600" b="1" dirty="0">
+                <a:solidFill>
+                  <a:schemeClr val="tx2"/>
+                </a:solidFill>
+              </a:rPr>
+              <a:t>블로그 · 체험단</a:t>
+            </a:r>
+            <a:endParaRPr lang="en-US" sz="1600" dirty="0"/>
+          </a:p>
+        </p:txBody>
+      </p:sp>
+      <p:sp>
+        <p:nvSpPr>
+          <p:cNvPr id="8" name="Text 6"/>
+          <p:cNvSpPr txBox="1"/>
+          <p:nvPr/>
+        </p:nvSpPr>
+        <p:spPr>
+          <a:xfrm>
+            <a:off x="3429000" y="1874520"/>
+            <a:ext cx="2286000" cy="2377440"/>
+          </a:xfrm>
+          <a:prstGeom prst="rect">
+            <a:avLst/>
+          </a:prstGeom>
+          <a:noFill/>
+          <a:ln/>
+        </p:spPr>
+        <p:txBody>
+          <a:bodyPr wrap="square" lIns="0" tIns="0" rIns="0" bIns="0" rtlCol="0" anchor="t"/>
+          <a:lstStyle/>
+          <a:p>
+            <a:pPr marL="342900" indent="-342900">
+              <a:spcAft>
+                <a:spcPts val="800"/>
+              </a:spcAft>
+              <a:buSzPct val="100000"/>
+              <a:buChar char="•"/>
+            </a:pPr>
+            <a:r>
+              <a:rPr lang="en-US" sz="1300" dirty="0">
+                <a:solidFill>
+                  <a:schemeClr val="tx1"/>
+                </a:solidFill>
+              </a:rPr>
+              <a:t>작은 세부 키워드부터 공략</a:t>
+            </a:r>
+            <a:endParaRPr lang="en-US" sz="1300" dirty="0"/>
+          </a:p>
+          <a:p>
+            <a:pPr marL="342900" indent="-342900">
+              <a:spcAft>
+                <a:spcPts val="800"/>
+              </a:spcAft>
+              <a:buSzPct val="100000"/>
+              <a:buChar char="•"/>
+            </a:pPr>
+            <a:r>
+              <a:rPr lang="en-US" sz="1300" dirty="0">
+                <a:solidFill>
+                  <a:schemeClr val="tx1"/>
+                </a:solidFill>
+              </a:rPr>
+              <a:t>"제품을 제공받아 작성" 표시</a:t>
+            </a:r>
+            <a:endParaRPr lang="en-US" sz="1300" dirty="0"/>
+          </a:p>
+          <a:p>
+            <a:pPr marL="342900" indent="-342900">
+              <a:spcAft>
+                <a:spcPts val="800"/>
+              </a:spcAft>
+              <a:buSzPct val="100000"/>
+              <a:buChar char="•"/>
+            </a:pPr>
+            <a:r>
+              <a:rPr lang="en-US" sz="1300" dirty="0">
+                <a:solidFill>
+                  <a:schemeClr val="tx1"/>
+                </a:solidFill>
+              </a:rPr>
+              <a:t>키워드 전략은 내가 정하기</a:t>
+            </a:r>
+            <a:endParaRPr lang="en-US" sz="1300" dirty="0"/>
+          </a:p>
+        </p:txBody>
+      </p:sp>
+      <p:sp>
+        <p:nvSpPr>
+          <p:cNvPr id="9" name="card"/>
+          <p:cNvSpPr/>
+          <p:nvPr/>
+        </p:nvSpPr>
+        <p:spPr>
+          <a:xfrm>
+            <a:off x="6035040" y="1188720"/>
+            <a:ext cx="2606040" cy="3200400"/>
+          </a:xfrm>
+          <a:prstGeom prst="roundRect">
+            <a:avLst>
+              <a:gd name="adj" fmla="val 2807"/>
+            </a:avLst>
+          </a:prstGeom>
+          <a:solidFill>
+            <a:schemeClr val="bg2"/>
+          </a:solidFill>
+          <a:ln/>
+        </p:spPr>
+      </p:sp>
+      <p:sp>
+        <p:nvSpPr>
+          <p:cNvPr id="10" name="Text 8"/>
+          <p:cNvSpPr txBox="1"/>
+          <p:nvPr/>
+        </p:nvSpPr>
+        <p:spPr>
+          <a:xfrm>
+            <a:off x="6217920" y="1325880"/>
+            <a:ext cx="2240280" cy="457200"/>
+          </a:xfrm>
+          <a:prstGeom prst="rect">
+            <a:avLst/>
+          </a:prstGeom>
+          <a:noFill/>
+          <a:ln/>
+        </p:spPr>
+        <p:txBody>
+          <a:bodyPr wrap="square" lIns="0" tIns="0" rIns="0" bIns="0" rtlCol="0" anchor="t"/>
+          <a:lstStyle/>
+          <a:p>
+            <a:pPr indent="0" marL="0">
+              <a:buNone/>
+            </a:pPr>
+            <a:r>
+              <a:rPr lang="en-US" sz="1600" b="1" dirty="0">
+                <a:solidFill>
+                  <a:schemeClr val="tx2"/>
+                </a:solidFill>
+              </a:rPr>
+              <a:t>당근 · 카카오 채널</a:t>
+            </a:r>
+            <a:endParaRPr lang="en-US" sz="1600" dirty="0"/>
+          </a:p>
+        </p:txBody>
+      </p:sp>
+      <p:sp>
+        <p:nvSpPr>
+          <p:cNvPr id="11" name="Text 9"/>
+          <p:cNvSpPr txBox="1"/>
+          <p:nvPr/>
+        </p:nvSpPr>
+        <p:spPr>
+          <a:xfrm>
+            <a:off x="6217920" y="1874520"/>
+            <a:ext cx="2286000" cy="2377440"/>
+          </a:xfrm>
+          <a:prstGeom prst="rect">
+            <a:avLst/>
+          </a:prstGeom>
+          <a:noFill/>
+          <a:ln/>
+        </p:spPr>
+        <p:txBody>
+          <a:bodyPr wrap="square" lIns="0" tIns="0" rIns="0" bIns="0" rtlCol="0" anchor="t"/>
+          <a:lstStyle/>
+          <a:p>
+            <a:pPr marL="342900" indent="-342900">
+              <a:spcAft>
+                <a:spcPts val="800"/>
+              </a:spcAft>
+              <a:buSzPct val="100000"/>
+              <a:buChar char="•"/>
+            </a:pPr>
+            <a:r>
+              <a:rPr lang="en-US" sz="1300" dirty="0">
+                <a:solidFill>
+                  <a:schemeClr val="tx1"/>
+                </a:solidFill>
+              </a:rPr>
+              <a:t>당근 비즈프로필: 동네 소식·쿠폰</a:t>
+            </a:r>
+            <a:endParaRPr lang="en-US" sz="1300" dirty="0"/>
+          </a:p>
+          <a:p>
+            <a:pPr marL="342900" indent="-342900">
+              <a:spcAft>
+                <a:spcPts val="800"/>
+              </a:spcAft>
+              <a:buSzPct val="100000"/>
+              <a:buChar char="•"/>
+            </a:pPr>
+            <a:r>
+              <a:rPr lang="en-US" sz="1300" dirty="0">
+                <a:solidFill>
+                  <a:schemeClr val="tx1"/>
+                </a:solidFill>
+              </a:rPr>
+              <a:t>카카오 채널: 재방문 쿠폰·예약 안내</a:t>
+            </a:r>
+            <a:endParaRPr lang="en-US" sz="1300" dirty="0"/>
+          </a:p>
+          <a:p>
+            <a:pPr marL="342900" indent="-342900">
+              <a:spcAft>
+                <a:spcPts val="800"/>
+              </a:spcAft>
+              <a:buSzPct val="100000"/>
+              <a:buChar char="•"/>
+            </a:pPr>
+            <a:r>
+              <a:rPr lang="en-US" sz="1300" dirty="0">
+                <a:solidFill>
+                  <a:schemeClr val="tx1"/>
+                </a:solidFill>
+              </a:rPr>
+              <a:t>광고 메시지는 수신 동의 규칙</a:t>
+            </a:r>
+            <a:endParaRPr lang="en-US" sz="1300" dirty="0"/>
+          </a:p>
+        </p:txBody>
+      </p:sp>
+      <p:sp>
+        <p:nvSpPr>
+          <p:cNvPr id="25" name="Slide Number Placeholder 0"/>
+          <p:cNvSpPr>
+            <a:spLocks noGrp="1"/>
+          </p:cNvSpPr>
+          <p:nvPr>
+            <p:ph type="sldNum" sz="quarter" idx="4294967295"/>
+          </p:nvPr>
+        </p:nvSpPr>
+        <p:spPr>
+          <a:xfrm>
+            <a:off x="8321040" y="4754880"/>
+            <a:ext cx="457200" cy="274320"/>
+          </a:xfrm>
+          <a:prstGeom prst="rect">
+            <a:avLst/>
+          </a:prstGeom>
+          <a:extLst>
+            <a:ext uri="{C572A759-6A51-4108-AA02-DFA0A04FC94B}">
+              <ma14:wrappingTextBoxFlag xmlns:ma14="http://schemas.microsoft.com/office/mac/drawingml/2011/main" val="0"/>
+            </a:ext>
+          </a:extLst>
+        </p:spPr>
+        <p:txBody>
+          <a:bodyPr/>
+          <a:lstStyle>
+            <a:lvl1pPr>
+              <a:defRPr sz="1000">
+                <a:solidFill>
+                  <a:schemeClr val="accent4"/>
+                </a:solidFill>
+              </a:defRPr>
+            </a:lvl1pPr>
+          </a:lstStyle>
+          <a:p>
+            <a:pPr algn="r"/>
+            <a:fld id="{F7021451-1387-4CA6-816F-3879F97B5CBC}" type="slidenum">
+              <a:rPr b="0" lang="en-US"/>
+              <a:t>46</a:t>
+            </a:fld>
+            <a:endParaRPr lang="en-US"/>
+          </a:p>
+        </p:txBody>
+      </p:sp>
+    </p:spTree>
+  </p:cSld>
+  <p:clrMapOvr>
+    <a:masterClrMapping/>
+  </p:clrMapOvr>
+</p:sld>
+</file>
+
+<file path=ppt/slides/slide47.xml><?xml version="1.0" encoding="utf-8"?>
+<p:sld xmlns:a="http://schemas.openxmlformats.org/drawingml/2006/main" xmlns:r="http://schemas.openxmlformats.org/officeDocument/2006/relationships" xmlns:p="http://schemas.openxmlformats.org/presentationml/2006/main">
+  <p:cSld name="Slide 47">
+    <p:spTree>
+      <p:nvGrpSpPr>
+        <p:cNvPr id="1" name=""/>
+        <p:cNvGrpSpPr/>
+        <p:nvPr/>
+      </p:nvGrpSpPr>
+      <p:grpSpPr>
+        <a:xfrm>
+          <a:off x="0" y="0"/>
+          <a:ext cx="0" cy="0"/>
+          <a:chOff x="0" y="0"/>
+          <a:chExt cx="0" cy="0"/>
+        </a:xfrm>
+      </p:grpSpPr>
+      <p:sp>
+        <p:nvSpPr>
+          <p:cNvPr id="2" name="Text 0"/>
+          <p:cNvSpPr/>
+          <p:nvPr>
+            <p:ph idx="100" type="title" hasCustomPrompt="1"/>
+          </p:nvPr>
+        </p:nvSpPr>
+        <p:spPr>
+          <a:xfrm>
+            <a:off x="457200" y="274320"/>
+            <a:ext cx="8229600" cy="685800"/>
+          </a:xfrm>
+          <a:prstGeom prst="rect">
+            <a:avLst/>
+          </a:prstGeom>
+          <a:noFill/>
+          <a:ln/>
+        </p:spPr>
+        <p:txBody>
+          <a:bodyPr wrap="square" lIns="0" tIns="0" rIns="0" bIns="0" rtlCol="0" anchor="ctr"/>
+          <a:lstStyle/>
+          <a:p>
+            <a:pPr indent="0" marL="0">
+              <a:buNone/>
+            </a:pPr>
+            <a:r>
+              <a:rPr lang="en-US" sz="2800" b="1" dirty="0">
+                <a:solidFill>
+                  <a:schemeClr val="tx2"/>
+                </a:solidFill>
+              </a:rPr>
+              <a:t>실제 사례: 처음에 무엇을 했나</a:t>
+            </a:r>
+            <a:endParaRPr lang="en-US" sz="2800" dirty="0"/>
+          </a:p>
+        </p:txBody>
+      </p:sp>
+      <p:graphicFrame>
+        <p:nvGraphicFramePr>
+          <p:cNvPr id="48" name="Table 0"/>
+          <p:cNvGraphicFramePr>
+            <a:graphicFrameLocks noGrp="1"/>
+          </p:cNvGraphicFramePr>
+          <p:nvPr>
+            <p:extLst>
+              <p:ext uri="{D42A27DB-BD31-4B8C-83A1-F6EECF244321}">
+                <p14:modId xmlns:p14="http://schemas.microsoft.com/office/powerpoint/2010/main" val="1579011935"/>
+              </p:ext>
+            </p:extLst>
+          </p:nvPr>
+        </p:nvGraphicFramePr>
+        <p:xfrm>
+          <a:off x="457200" y="1143000"/>
+          <a:ext cx="8229600" cy="914400"/>
+        </p:xfrm>
+        <a:graphic>
+          <a:graphicData uri="http://schemas.openxmlformats.org/drawingml/2006/table">
+            <a:tbl>
+              <a:tblPr/>
+              <a:tblGrid>
+                <a:gridCol w="2011680"/>
+                <a:gridCol w="3566160"/>
+                <a:gridCol w="2651760"/>
+              </a:tblGrid>
+              <a:tr h="411480">
+                <a:tc>
+                  <a:txBody>
+                    <a:bodyPr/>
+                    <a:lstStyle/>
+                    <a:p>
+                      <a:pPr indent="0" marL="0">
+                        <a:buNone/>
+                      </a:pPr>
+                      <a:r>
+                        <a:rPr lang="en-US" sz="1200" b="1" dirty="0">
+                          <a:solidFill>
+                            <a:schemeClr val="bg1"/>
+                          </a:solidFill>
+                        </a:rPr>
+                        <a:t>사례</a:t>
+                      </a:r>
+                      <a:endParaRPr lang="en-US" sz="1200" dirty="0"/>
+                    </a:p>
+                  </a:txBody>
+                  <a:tcPr marL="91440" marR="91440" marT="45720" marB="45720" anchor="ctr">
+                    <a:lnL w="12700" cap="flat" cmpd="sng" algn="ctr">
+                      <a:solidFill>
+                        <a:srgbClr val="EEF4F3"/>
+                      </a:solidFill>
+                      <a:prstDash val="solid"/>
+                      <a:round/>
+                      <a:headEnd type="none" w="med" len="med"/>
+                      <a:tailEnd type="none" w="med" len="med"/>
+                    </a:lnL>
+                    <a:lnR w="12700" cap="flat" cmpd="sng" algn="ctr">
+                      <a:solidFill>
+                        <a:srgbClr val="EEF4F3"/>
+                      </a:solidFill>
+                      <a:prstDash val="solid"/>
+                      <a:round/>
+                      <a:headEnd type="none" w="med" len="med"/>
+                      <a:tailEnd type="none" w="med" len="med"/>
+                    </a:lnR>
+                    <a:lnT w="12700" cap="flat" cmpd="sng" algn="ctr">
+                      <a:solidFill>
+                        <a:srgbClr val="EEF4F3"/>
+                      </a:solidFill>
+                      <a:prstDash val="solid"/>
+                      <a:round/>
+                      <a:headEnd type="none" w="med" len="med"/>
+                      <a:tailEnd type="none" w="med" len="med"/>
+                    </a:lnT>
+                    <a:lnB w="12700" cap="flat" cmpd="sng" algn="ctr">
+                      <a:solidFill>
+                        <a:srgbClr val="EEF4F3"/>
+                      </a:solidFill>
+                      <a:prstDash val="solid"/>
+                      <a:round/>
+                      <a:headEnd type="none" w="med" len="med"/>
+                      <a:tailEnd type="none" w="med" len="med"/>
+                    </a:lnB>
+                    <a:solidFill>
+                      <a:schemeClr val="tx2"/>
+                    </a:solidFill>
+                  </a:tcPr>
+                </a:tc>
+                <a:tc>
+                  <a:txBody>
+                    <a:bodyPr/>
+                    <a:lstStyle/>
+                    <a:p>
+                      <a:pPr indent="0" marL="0">
+                        <a:buNone/>
+                      </a:pPr>
+                      <a:r>
+                        <a:rPr lang="en-US" sz="1200" b="1" dirty="0">
+                          <a:solidFill>
+                            <a:schemeClr val="bg1"/>
+                          </a:solidFill>
+                        </a:rPr>
+                        <a:t>처음에 한 일</a:t>
+                      </a:r>
+                      <a:endParaRPr lang="en-US" sz="1200" dirty="0"/>
+                    </a:p>
+                  </a:txBody>
+                  <a:tcPr marL="91440" marR="91440" marT="45720" marB="45720" anchor="ctr">
+                    <a:lnL w="12700" cap="flat" cmpd="sng" algn="ctr">
+                      <a:solidFill>
+                        <a:srgbClr val="EEF4F3"/>
+                      </a:solidFill>
+                      <a:prstDash val="solid"/>
+                      <a:round/>
+                      <a:headEnd type="none" w="med" len="med"/>
+                      <a:tailEnd type="none" w="med" len="med"/>
+                    </a:lnL>
+                    <a:lnR w="12700" cap="flat" cmpd="sng" algn="ctr">
+                      <a:solidFill>
+                        <a:srgbClr val="EEF4F3"/>
+                      </a:solidFill>
+                      <a:prstDash val="solid"/>
+                      <a:round/>
+                      <a:headEnd type="none" w="med" len="med"/>
+                      <a:tailEnd type="none" w="med" len="med"/>
+                    </a:lnR>
+                    <a:lnT w="12700" cap="flat" cmpd="sng" algn="ctr">
+                      <a:solidFill>
+                        <a:srgbClr val="EEF4F3"/>
+                      </a:solidFill>
+                      <a:prstDash val="solid"/>
+                      <a:round/>
+                      <a:headEnd type="none" w="med" len="med"/>
+                      <a:tailEnd type="none" w="med" len="med"/>
+                    </a:lnT>
+                    <a:lnB w="12700" cap="flat" cmpd="sng" algn="ctr">
+                      <a:solidFill>
+                        <a:srgbClr val="EEF4F3"/>
+                      </a:solidFill>
+                      <a:prstDash val="solid"/>
+                      <a:round/>
+                      <a:headEnd type="none" w="med" len="med"/>
+                      <a:tailEnd type="none" w="med" len="med"/>
+                    </a:lnB>
+                    <a:solidFill>
+                      <a:schemeClr val="tx2"/>
+                    </a:solidFill>
+                  </a:tcPr>
+                </a:tc>
+                <a:tc>
+                  <a:txBody>
+                    <a:bodyPr/>
+                    <a:lstStyle/>
+                    <a:p>
+                      <a:pPr indent="0" marL="0">
+                        <a:buNone/>
+                      </a:pPr>
+                      <a:r>
+                        <a:rPr lang="en-US" sz="1200" b="1" dirty="0">
+                          <a:solidFill>
+                            <a:schemeClr val="bg1"/>
+                          </a:solidFill>
+                        </a:rPr>
+                        <a:t>배울 점</a:t>
+                      </a:r>
+                      <a:endParaRPr lang="en-US" sz="1200" dirty="0"/>
+                    </a:p>
+                  </a:txBody>
+                  <a:tcPr marL="91440" marR="91440" marT="45720" marB="45720" anchor="ctr">
+                    <a:lnL w="12700" cap="flat" cmpd="sng" algn="ctr">
+                      <a:solidFill>
+                        <a:srgbClr val="EEF4F3"/>
+                      </a:solidFill>
+                      <a:prstDash val="solid"/>
+                      <a:round/>
+                      <a:headEnd type="none" w="med" len="med"/>
+                      <a:tailEnd type="none" w="med" len="med"/>
+                    </a:lnL>
+                    <a:lnR w="12700" cap="flat" cmpd="sng" algn="ctr">
+                      <a:solidFill>
+                        <a:srgbClr val="EEF4F3"/>
+                      </a:solidFill>
+                      <a:prstDash val="solid"/>
+                      <a:round/>
+                      <a:headEnd type="none" w="med" len="med"/>
+                      <a:tailEnd type="none" w="med" len="med"/>
+                    </a:lnR>
+                    <a:lnT w="12700" cap="flat" cmpd="sng" algn="ctr">
+                      <a:solidFill>
+                        <a:srgbClr val="EEF4F3"/>
+                      </a:solidFill>
+                      <a:prstDash val="solid"/>
+                      <a:round/>
+                      <a:headEnd type="none" w="med" len="med"/>
+                      <a:tailEnd type="none" w="med" len="med"/>
+                    </a:lnT>
+                    <a:lnB w="12700" cap="flat" cmpd="sng" algn="ctr">
+                      <a:solidFill>
+                        <a:srgbClr val="EEF4F3"/>
+                      </a:solidFill>
+                      <a:prstDash val="solid"/>
+                      <a:round/>
+                      <a:headEnd type="none" w="med" len="med"/>
+                      <a:tailEnd type="none" w="med" len="med"/>
+                    </a:lnB>
+                    <a:solidFill>
+                      <a:schemeClr val="tx2"/>
+                    </a:solidFill>
+                  </a:tcPr>
+                </a:tc>
+              </a:tr>
+              <a:tr h="411480">
+                <a:tc>
+                  <a:txBody>
+                    <a:bodyPr/>
+                    <a:lstStyle/>
+                    <a:p>
+                      <a:pPr indent="0" marL="0">
+                        <a:buNone/>
+                      </a:pPr>
+                      <a:r>
+                        <a:rPr lang="en-US" sz="1200" b="1" dirty="0">
+                          <a:solidFill>
+                            <a:schemeClr val="tx1"/>
+                          </a:solidFill>
+                        </a:rPr>
+                        <a:t>배달의민족</a:t>
+                      </a:r>
+                      <a:endParaRPr lang="en-US" sz="1200" dirty="0"/>
+                    </a:p>
+                  </a:txBody>
+                  <a:tcPr marL="91440" marR="91440" marT="45720" marB="45720" anchor="ctr">
+                    <a:lnL w="12700" cap="flat" cmpd="sng" algn="ctr">
+                      <a:solidFill>
+                        <a:srgbClr val="EEF4F3"/>
+                      </a:solidFill>
+                      <a:prstDash val="solid"/>
+                      <a:round/>
+                      <a:headEnd type="none" w="med" len="med"/>
+                      <a:tailEnd type="none" w="med" len="med"/>
+                    </a:lnL>
+                    <a:lnR w="12700" cap="flat" cmpd="sng" algn="ctr">
+                      <a:solidFill>
+                        <a:srgbClr val="EEF4F3"/>
+                      </a:solidFill>
+                      <a:prstDash val="solid"/>
+                      <a:round/>
+                      <a:headEnd type="none" w="med" len="med"/>
+                      <a:tailEnd type="none" w="med" len="med"/>
+                    </a:lnR>
+                    <a:lnT w="12700" cap="flat" cmpd="sng" algn="ctr">
+                      <a:solidFill>
+                        <a:srgbClr val="EEF4F3"/>
+                      </a:solidFill>
+                      <a:prstDash val="solid"/>
+                      <a:round/>
+                      <a:headEnd type="none" w="med" len="med"/>
+                      <a:tailEnd type="none" w="med" len="med"/>
+                    </a:lnT>
+                    <a:lnB w="12700" cap="flat" cmpd="sng" algn="ctr">
+                      <a:solidFill>
+                        <a:srgbClr val="EEF4F3"/>
+                      </a:solidFill>
+                      <a:prstDash val="solid"/>
+                      <a:round/>
+                      <a:headEnd type="none" w="med" len="med"/>
+                      <a:tailEnd type="none" w="med" len="med"/>
+                    </a:lnB>
+                  </a:tcPr>
+                </a:tc>
+                <a:tc>
+                  <a:txBody>
+                    <a:bodyPr/>
+                    <a:lstStyle/>
+                    <a:p>
+                      <a:pPr indent="0" marL="0">
+                        <a:buNone/>
+                      </a:pPr>
+                      <a:r>
+                        <a:rPr lang="en-US" sz="1200" dirty="0">
+                          <a:solidFill>
+                            <a:schemeClr val="tx1"/>
+                          </a:solidFill>
+                        </a:rPr>
+                        <a:t>길거리 전단지를 주워 가게 정보 입력</a:t>
+                      </a:r>
+                      <a:endParaRPr lang="en-US" sz="1200" dirty="0"/>
+                    </a:p>
+                  </a:txBody>
+                  <a:tcPr marL="91440" marR="91440" marT="45720" marB="45720" anchor="ctr">
+                    <a:lnL w="12700" cap="flat" cmpd="sng" algn="ctr">
+                      <a:solidFill>
+                        <a:srgbClr val="EEF4F3"/>
+                      </a:solidFill>
+                      <a:prstDash val="solid"/>
+                      <a:round/>
+                      <a:headEnd type="none" w="med" len="med"/>
+                      <a:tailEnd type="none" w="med" len="med"/>
+                    </a:lnL>
+                    <a:lnR w="12700" cap="flat" cmpd="sng" algn="ctr">
+                      <a:solidFill>
+                        <a:srgbClr val="EEF4F3"/>
+                      </a:solidFill>
+                      <a:prstDash val="solid"/>
+                      <a:round/>
+                      <a:headEnd type="none" w="med" len="med"/>
+                      <a:tailEnd type="none" w="med" len="med"/>
+                    </a:lnR>
+                    <a:lnT w="12700" cap="flat" cmpd="sng" algn="ctr">
+                      <a:solidFill>
+                        <a:srgbClr val="EEF4F3"/>
+                      </a:solidFill>
+                      <a:prstDash val="solid"/>
+                      <a:round/>
+                      <a:headEnd type="none" w="med" len="med"/>
+                      <a:tailEnd type="none" w="med" len="med"/>
+                    </a:lnT>
+                    <a:lnB w="12700" cap="flat" cmpd="sng" algn="ctr">
+                      <a:solidFill>
+                        <a:srgbClr val="EEF4F3"/>
+                      </a:solidFill>
+                      <a:prstDash val="solid"/>
+                      <a:round/>
+                      <a:headEnd type="none" w="med" len="med"/>
+                      <a:tailEnd type="none" w="med" len="med"/>
+                    </a:lnB>
+                  </a:tcPr>
+                </a:tc>
+                <a:tc>
+                  <a:txBody>
+                    <a:bodyPr/>
+                    <a:lstStyle/>
+                    <a:p>
+                      <a:pPr indent="0" marL="0">
+                        <a:buNone/>
+                      </a:pPr>
+                      <a:r>
+                        <a:rPr lang="en-US" sz="1200" dirty="0">
+                          <a:solidFill>
+                            <a:schemeClr val="tx1"/>
+                          </a:solidFill>
+                        </a:rPr>
+                        <a:t>처음엔 손으로 직접</a:t>
+                      </a:r>
+                      <a:endParaRPr lang="en-US" sz="1200" dirty="0"/>
+                    </a:p>
+                  </a:txBody>
+                  <a:tcPr marL="91440" marR="91440" marT="45720" marB="45720" anchor="ctr">
+                    <a:lnL w="12700" cap="flat" cmpd="sng" algn="ctr">
+                      <a:solidFill>
+                        <a:srgbClr val="EEF4F3"/>
+                      </a:solidFill>
+                      <a:prstDash val="solid"/>
+                      <a:round/>
+                      <a:headEnd type="none" w="med" len="med"/>
+                      <a:tailEnd type="none" w="med" len="med"/>
+                    </a:lnL>
+                    <a:lnR w="12700" cap="flat" cmpd="sng" algn="ctr">
+                      <a:solidFill>
+                        <a:srgbClr val="EEF4F3"/>
+                      </a:solidFill>
+                      <a:prstDash val="solid"/>
+                      <a:round/>
+                      <a:headEnd type="none" w="med" len="med"/>
+                      <a:tailEnd type="none" w="med" len="med"/>
+                    </a:lnR>
+                    <a:lnT w="12700" cap="flat" cmpd="sng" algn="ctr">
+                      <a:solidFill>
+                        <a:srgbClr val="EEF4F3"/>
+                      </a:solidFill>
+                      <a:prstDash val="solid"/>
+                      <a:round/>
+                      <a:headEnd type="none" w="med" len="med"/>
+                      <a:tailEnd type="none" w="med" len="med"/>
+                    </a:lnT>
+                    <a:lnB w="12700" cap="flat" cmpd="sng" algn="ctr">
+                      <a:solidFill>
+                        <a:srgbClr val="EEF4F3"/>
+                      </a:solidFill>
+                      <a:prstDash val="solid"/>
+                      <a:round/>
+                      <a:headEnd type="none" w="med" len="med"/>
+                      <a:tailEnd type="none" w="med" len="med"/>
+                    </a:lnB>
+                  </a:tcPr>
+                </a:tc>
+              </a:tr>
+              <a:tr h="411480">
+                <a:tc>
+                  <a:txBody>
+                    <a:bodyPr/>
+                    <a:lstStyle/>
+                    <a:p>
+                      <a:pPr indent="0" marL="0">
+                        <a:buNone/>
+                      </a:pPr>
+                      <a:r>
+                        <a:rPr lang="en-US" sz="1200" b="1" dirty="0">
+                          <a:solidFill>
+                            <a:schemeClr val="tx1"/>
+                          </a:solidFill>
+                        </a:rPr>
+                        <a:t>당근</a:t>
+                      </a:r>
+                      <a:endParaRPr lang="en-US" sz="1200" dirty="0"/>
+                    </a:p>
+                  </a:txBody>
+                  <a:tcPr marL="91440" marR="91440" marT="45720" marB="45720" anchor="ctr">
+                    <a:lnL w="12700" cap="flat" cmpd="sng" algn="ctr">
+                      <a:solidFill>
+                        <a:srgbClr val="EEF4F3"/>
+                      </a:solidFill>
+                      <a:prstDash val="solid"/>
+                      <a:round/>
+                      <a:headEnd type="none" w="med" len="med"/>
+                      <a:tailEnd type="none" w="med" len="med"/>
+                    </a:lnL>
+                    <a:lnR w="12700" cap="flat" cmpd="sng" algn="ctr">
+                      <a:solidFill>
+                        <a:srgbClr val="EEF4F3"/>
+                      </a:solidFill>
+                      <a:prstDash val="solid"/>
+                      <a:round/>
+                      <a:headEnd type="none" w="med" len="med"/>
+                      <a:tailEnd type="none" w="med" len="med"/>
+                    </a:lnR>
+                    <a:lnT w="12700" cap="flat" cmpd="sng" algn="ctr">
+                      <a:solidFill>
+                        <a:srgbClr val="EEF4F3"/>
+                      </a:solidFill>
+                      <a:prstDash val="solid"/>
+                      <a:round/>
+                      <a:headEnd type="none" w="med" len="med"/>
+                      <a:tailEnd type="none" w="med" len="med"/>
+                    </a:lnT>
+                    <a:lnB w="12700" cap="flat" cmpd="sng" algn="ctr">
+                      <a:solidFill>
+                        <a:srgbClr val="EEF4F3"/>
+                      </a:solidFill>
+                      <a:prstDash val="solid"/>
+                      <a:round/>
+                      <a:headEnd type="none" w="med" len="med"/>
+                      <a:tailEnd type="none" w="med" len="med"/>
+                    </a:lnB>
+                  </a:tcPr>
+                </a:tc>
+                <a:tc>
+                  <a:txBody>
+                    <a:bodyPr/>
+                    <a:lstStyle/>
+                    <a:p>
+                      <a:pPr indent="0" marL="0">
+                        <a:buNone/>
+                      </a:pPr>
+                      <a:r>
+                        <a:rPr lang="en-US" sz="1200" dirty="0">
+                          <a:solidFill>
+                            <a:schemeClr val="tx1"/>
+                          </a:solidFill>
+                        </a:rPr>
+                        <a:t>판교 회사 사내 장터 → 동네 인증</a:t>
+                      </a:r>
+                      <a:endParaRPr lang="en-US" sz="1200" dirty="0"/>
+                    </a:p>
+                  </a:txBody>
+                  <a:tcPr marL="91440" marR="91440" marT="45720" marB="45720" anchor="ctr">
+                    <a:lnL w="12700" cap="flat" cmpd="sng" algn="ctr">
+                      <a:solidFill>
+                        <a:srgbClr val="EEF4F3"/>
+                      </a:solidFill>
+                      <a:prstDash val="solid"/>
+                      <a:round/>
+                      <a:headEnd type="none" w="med" len="med"/>
+                      <a:tailEnd type="none" w="med" len="med"/>
+                    </a:lnL>
+                    <a:lnR w="12700" cap="flat" cmpd="sng" algn="ctr">
+                      <a:solidFill>
+                        <a:srgbClr val="EEF4F3"/>
+                      </a:solidFill>
+                      <a:prstDash val="solid"/>
+                      <a:round/>
+                      <a:headEnd type="none" w="med" len="med"/>
+                      <a:tailEnd type="none" w="med" len="med"/>
+                    </a:lnR>
+                    <a:lnT w="12700" cap="flat" cmpd="sng" algn="ctr">
+                      <a:solidFill>
+                        <a:srgbClr val="EEF4F3"/>
+                      </a:solidFill>
+                      <a:prstDash val="solid"/>
+                      <a:round/>
+                      <a:headEnd type="none" w="med" len="med"/>
+                      <a:tailEnd type="none" w="med" len="med"/>
+                    </a:lnT>
+                    <a:lnB w="12700" cap="flat" cmpd="sng" algn="ctr">
+                      <a:solidFill>
+                        <a:srgbClr val="EEF4F3"/>
+                      </a:solidFill>
+                      <a:prstDash val="solid"/>
+                      <a:round/>
+                      <a:headEnd type="none" w="med" len="med"/>
+                      <a:tailEnd type="none" w="med" len="med"/>
+                    </a:lnB>
+                  </a:tcPr>
+                </a:tc>
+                <a:tc>
+                  <a:txBody>
+                    <a:bodyPr/>
+                    <a:lstStyle/>
+                    <a:p>
+                      <a:pPr indent="0" marL="0">
+                        <a:buNone/>
+                      </a:pPr>
+                      <a:r>
+                        <a:rPr lang="en-US" sz="1200" dirty="0">
+                          <a:solidFill>
+                            <a:schemeClr val="tx1"/>
+                          </a:solidFill>
+                        </a:rPr>
+                        <a:t>좁게 시작</a:t>
+                      </a:r>
+                      <a:endParaRPr lang="en-US" sz="1200" dirty="0"/>
+                    </a:p>
+                  </a:txBody>
+                  <a:tcPr marL="91440" marR="91440" marT="45720" marB="45720" anchor="ctr">
+                    <a:lnL w="12700" cap="flat" cmpd="sng" algn="ctr">
+                      <a:solidFill>
+                        <a:srgbClr val="EEF4F3"/>
+                      </a:solidFill>
+                      <a:prstDash val="solid"/>
+                      <a:round/>
+                      <a:headEnd type="none" w="med" len="med"/>
+                      <a:tailEnd type="none" w="med" len="med"/>
+                    </a:lnL>
+                    <a:lnR w="12700" cap="flat" cmpd="sng" algn="ctr">
+                      <a:solidFill>
+                        <a:srgbClr val="EEF4F3"/>
+                      </a:solidFill>
+                      <a:prstDash val="solid"/>
+                      <a:round/>
+                      <a:headEnd type="none" w="med" len="med"/>
+                      <a:tailEnd type="none" w="med" len="med"/>
+                    </a:lnR>
+                    <a:lnT w="12700" cap="flat" cmpd="sng" algn="ctr">
+                      <a:solidFill>
+                        <a:srgbClr val="EEF4F3"/>
+                      </a:solidFill>
+                      <a:prstDash val="solid"/>
+                      <a:round/>
+                      <a:headEnd type="none" w="med" len="med"/>
+                      <a:tailEnd type="none" w="med" len="med"/>
+                    </a:lnT>
+                    <a:lnB w="12700" cap="flat" cmpd="sng" algn="ctr">
+                      <a:solidFill>
+                        <a:srgbClr val="EEF4F3"/>
+                      </a:solidFill>
+                      <a:prstDash val="solid"/>
+                      <a:round/>
+                      <a:headEnd type="none" w="med" len="med"/>
+                      <a:tailEnd type="none" w="med" len="med"/>
+                    </a:lnB>
+                  </a:tcPr>
+                </a:tc>
+              </a:tr>
+              <a:tr h="411480">
+                <a:tc>
+                  <a:txBody>
+                    <a:bodyPr/>
+                    <a:lstStyle/>
+                    <a:p>
+                      <a:pPr indent="0" marL="0">
+                        <a:buNone/>
+                      </a:pPr>
+                      <a:r>
+                        <a:rPr lang="en-US" sz="1200" b="1" dirty="0">
+                          <a:solidFill>
+                            <a:schemeClr val="tx1"/>
+                          </a:solidFill>
+                        </a:rPr>
+                        <a:t>무신사</a:t>
+                      </a:r>
+                      <a:endParaRPr lang="en-US" sz="1200" dirty="0"/>
+                    </a:p>
+                  </a:txBody>
+                  <a:tcPr marL="91440" marR="91440" marT="45720" marB="45720" anchor="ctr">
+                    <a:lnL w="12700" cap="flat" cmpd="sng" algn="ctr">
+                      <a:solidFill>
+                        <a:srgbClr val="EEF4F3"/>
+                      </a:solidFill>
+                      <a:prstDash val="solid"/>
+                      <a:round/>
+                      <a:headEnd type="none" w="med" len="med"/>
+                      <a:tailEnd type="none" w="med" len="med"/>
+                    </a:lnL>
+                    <a:lnR w="12700" cap="flat" cmpd="sng" algn="ctr">
+                      <a:solidFill>
+                        <a:srgbClr val="EEF4F3"/>
+                      </a:solidFill>
+                      <a:prstDash val="solid"/>
+                      <a:round/>
+                      <a:headEnd type="none" w="med" len="med"/>
+                      <a:tailEnd type="none" w="med" len="med"/>
+                    </a:lnR>
+                    <a:lnT w="12700" cap="flat" cmpd="sng" algn="ctr">
+                      <a:solidFill>
+                        <a:srgbClr val="EEF4F3"/>
+                      </a:solidFill>
+                      <a:prstDash val="solid"/>
+                      <a:round/>
+                      <a:headEnd type="none" w="med" len="med"/>
+                      <a:tailEnd type="none" w="med" len="med"/>
+                    </a:lnT>
+                    <a:lnB w="12700" cap="flat" cmpd="sng" algn="ctr">
+                      <a:solidFill>
+                        <a:srgbClr val="EEF4F3"/>
+                      </a:solidFill>
+                      <a:prstDash val="solid"/>
+                      <a:round/>
+                      <a:headEnd type="none" w="med" len="med"/>
+                      <a:tailEnd type="none" w="med" len="med"/>
+                    </a:lnB>
+                  </a:tcPr>
+                </a:tc>
+                <a:tc>
+                  <a:txBody>
+                    <a:bodyPr/>
+                    <a:lstStyle/>
+                    <a:p>
+                      <a:pPr indent="0" marL="0">
+                        <a:buNone/>
+                      </a:pPr>
+                      <a:r>
+                        <a:rPr lang="en-US" sz="1200" dirty="0">
+                          <a:solidFill>
+                            <a:schemeClr val="tx1"/>
+                          </a:solidFill>
+                        </a:rPr>
+                        <a:t>스니커즈 마니아 커뮤니티</a:t>
+                      </a:r>
+                      <a:endParaRPr lang="en-US" sz="1200" dirty="0"/>
+                    </a:p>
+                  </a:txBody>
+                  <a:tcPr marL="91440" marR="91440" marT="45720" marB="45720" anchor="ctr">
+                    <a:lnL w="12700" cap="flat" cmpd="sng" algn="ctr">
+                      <a:solidFill>
+                        <a:srgbClr val="EEF4F3"/>
+                      </a:solidFill>
+                      <a:prstDash val="solid"/>
+                      <a:round/>
+                      <a:headEnd type="none" w="med" len="med"/>
+                      <a:tailEnd type="none" w="med" len="med"/>
+                    </a:lnL>
+                    <a:lnR w="12700" cap="flat" cmpd="sng" algn="ctr">
+                      <a:solidFill>
+                        <a:srgbClr val="EEF4F3"/>
+                      </a:solidFill>
+                      <a:prstDash val="solid"/>
+                      <a:round/>
+                      <a:headEnd type="none" w="med" len="med"/>
+                      <a:tailEnd type="none" w="med" len="med"/>
+                    </a:lnR>
+                    <a:lnT w="12700" cap="flat" cmpd="sng" algn="ctr">
+                      <a:solidFill>
+                        <a:srgbClr val="EEF4F3"/>
+                      </a:solidFill>
+                      <a:prstDash val="solid"/>
+                      <a:round/>
+                      <a:headEnd type="none" w="med" len="med"/>
+                      <a:tailEnd type="none" w="med" len="med"/>
+                    </a:lnT>
+                    <a:lnB w="12700" cap="flat" cmpd="sng" algn="ctr">
+                      <a:solidFill>
+                        <a:srgbClr val="EEF4F3"/>
+                      </a:solidFill>
+                      <a:prstDash val="solid"/>
+                      <a:round/>
+                      <a:headEnd type="none" w="med" len="med"/>
+                      <a:tailEnd type="none" w="med" len="med"/>
+                    </a:lnB>
+                  </a:tcPr>
+                </a:tc>
+                <a:tc>
+                  <a:txBody>
+                    <a:bodyPr/>
+                    <a:lstStyle/>
+                    <a:p>
+                      <a:pPr indent="0" marL="0">
+                        <a:buNone/>
+                      </a:pPr>
+                      <a:r>
+                        <a:rPr lang="en-US" sz="1200" dirty="0">
+                          <a:solidFill>
+                            <a:schemeClr val="tx1"/>
+                          </a:solidFill>
+                        </a:rPr>
+                        <a:t>팬이 먼저, 상품은 나중</a:t>
+                      </a:r>
+                      <a:endParaRPr lang="en-US" sz="1200" dirty="0"/>
+                    </a:p>
+                  </a:txBody>
+                  <a:tcPr marL="91440" marR="91440" marT="45720" marB="45720" anchor="ctr">
+                    <a:lnL w="12700" cap="flat" cmpd="sng" algn="ctr">
+                      <a:solidFill>
+                        <a:srgbClr val="EEF4F3"/>
+                      </a:solidFill>
+                      <a:prstDash val="solid"/>
+                      <a:round/>
+                      <a:headEnd type="none" w="med" len="med"/>
+                      <a:tailEnd type="none" w="med" len="med"/>
+                    </a:lnL>
+                    <a:lnR w="12700" cap="flat" cmpd="sng" algn="ctr">
+                      <a:solidFill>
+                        <a:srgbClr val="EEF4F3"/>
+                      </a:solidFill>
+                      <a:prstDash val="solid"/>
+                      <a:round/>
+                      <a:headEnd type="none" w="med" len="med"/>
+                      <a:tailEnd type="none" w="med" len="med"/>
+                    </a:lnR>
+                    <a:lnT w="12700" cap="flat" cmpd="sng" algn="ctr">
+                      <a:solidFill>
+                        <a:srgbClr val="EEF4F3"/>
+                      </a:solidFill>
+                      <a:prstDash val="solid"/>
+                      <a:round/>
+                      <a:headEnd type="none" w="med" len="med"/>
+                      <a:tailEnd type="none" w="med" len="med"/>
+                    </a:lnT>
+                    <a:lnB w="12700" cap="flat" cmpd="sng" algn="ctr">
+                      <a:solidFill>
+                        <a:srgbClr val="EEF4F3"/>
+                      </a:solidFill>
+                      <a:prstDash val="solid"/>
+                      <a:round/>
+                      <a:headEnd type="none" w="med" len="med"/>
+                      <a:tailEnd type="none" w="med" len="med"/>
+                    </a:lnB>
+                  </a:tcPr>
+                </a:tc>
+              </a:tr>
+              <a:tr h="411480">
+                <a:tc>
+                  <a:txBody>
+                    <a:bodyPr/>
+                    <a:lstStyle/>
+                    <a:p>
+                      <a:pPr indent="0" marL="0">
+                        <a:buNone/>
+                      </a:pPr>
+                      <a:r>
+                        <a:rPr lang="en-US" sz="1200" b="1" dirty="0">
+                          <a:solidFill>
+                            <a:schemeClr val="tx1"/>
+                          </a:solidFill>
+                        </a:rPr>
+                        <a:t>오늘의집</a:t>
+                      </a:r>
+                      <a:endParaRPr lang="en-US" sz="1200" dirty="0"/>
+                    </a:p>
+                  </a:txBody>
+                  <a:tcPr marL="91440" marR="91440" marT="45720" marB="45720" anchor="ctr">
+                    <a:lnL w="12700" cap="flat" cmpd="sng" algn="ctr">
+                      <a:solidFill>
+                        <a:srgbClr val="EEF4F3"/>
+                      </a:solidFill>
+                      <a:prstDash val="solid"/>
+                      <a:round/>
+                      <a:headEnd type="none" w="med" len="med"/>
+                      <a:tailEnd type="none" w="med" len="med"/>
+                    </a:lnL>
+                    <a:lnR w="12700" cap="flat" cmpd="sng" algn="ctr">
+                      <a:solidFill>
+                        <a:srgbClr val="EEF4F3"/>
+                      </a:solidFill>
+                      <a:prstDash val="solid"/>
+                      <a:round/>
+                      <a:headEnd type="none" w="med" len="med"/>
+                      <a:tailEnd type="none" w="med" len="med"/>
+                    </a:lnR>
+                    <a:lnT w="12700" cap="flat" cmpd="sng" algn="ctr">
+                      <a:solidFill>
+                        <a:srgbClr val="EEF4F3"/>
+                      </a:solidFill>
+                      <a:prstDash val="solid"/>
+                      <a:round/>
+                      <a:headEnd type="none" w="med" len="med"/>
+                      <a:tailEnd type="none" w="med" len="med"/>
+                    </a:lnT>
+                    <a:lnB w="12700" cap="flat" cmpd="sng" algn="ctr">
+                      <a:solidFill>
+                        <a:srgbClr val="EEF4F3"/>
+                      </a:solidFill>
+                      <a:prstDash val="solid"/>
+                      <a:round/>
+                      <a:headEnd type="none" w="med" len="med"/>
+                      <a:tailEnd type="none" w="med" len="med"/>
+                    </a:lnB>
+                  </a:tcPr>
+                </a:tc>
+                <a:tc>
+                  <a:txBody>
+                    <a:bodyPr/>
+                    <a:lstStyle/>
+                    <a:p>
+                      <a:pPr indent="0" marL="0">
+                        <a:buNone/>
+                      </a:pPr>
+                      <a:r>
+                        <a:rPr lang="en-US" sz="1200" dirty="0">
+                          <a:solidFill>
+                            <a:schemeClr val="tx1"/>
+                          </a:solidFill>
+                        </a:rPr>
+                        <a:t>온라인 집들이 사진 + 구매 버튼</a:t>
+                      </a:r>
+                      <a:endParaRPr lang="en-US" sz="1200" dirty="0"/>
+                    </a:p>
+                  </a:txBody>
+                  <a:tcPr marL="91440" marR="91440" marT="45720" marB="45720" anchor="ctr">
+                    <a:lnL w="12700" cap="flat" cmpd="sng" algn="ctr">
+                      <a:solidFill>
+                        <a:srgbClr val="EEF4F3"/>
+                      </a:solidFill>
+                      <a:prstDash val="solid"/>
+                      <a:round/>
+                      <a:headEnd type="none" w="med" len="med"/>
+                      <a:tailEnd type="none" w="med" len="med"/>
+                    </a:lnL>
+                    <a:lnR w="12700" cap="flat" cmpd="sng" algn="ctr">
+                      <a:solidFill>
+                        <a:srgbClr val="EEF4F3"/>
+                      </a:solidFill>
+                      <a:prstDash val="solid"/>
+                      <a:round/>
+                      <a:headEnd type="none" w="med" len="med"/>
+                      <a:tailEnd type="none" w="med" len="med"/>
+                    </a:lnR>
+                    <a:lnT w="12700" cap="flat" cmpd="sng" algn="ctr">
+                      <a:solidFill>
+                        <a:srgbClr val="EEF4F3"/>
+                      </a:solidFill>
+                      <a:prstDash val="solid"/>
+                      <a:round/>
+                      <a:headEnd type="none" w="med" len="med"/>
+                      <a:tailEnd type="none" w="med" len="med"/>
+                    </a:lnT>
+                    <a:lnB w="12700" cap="flat" cmpd="sng" algn="ctr">
+                      <a:solidFill>
+                        <a:srgbClr val="EEF4F3"/>
+                      </a:solidFill>
+                      <a:prstDash val="solid"/>
+                      <a:round/>
+                      <a:headEnd type="none" w="med" len="med"/>
+                      <a:tailEnd type="none" w="med" len="med"/>
+                    </a:lnB>
+                  </a:tcPr>
+                </a:tc>
+                <a:tc>
+                  <a:txBody>
+                    <a:bodyPr/>
+                    <a:lstStyle/>
+                    <a:p>
+                      <a:pPr indent="0" marL="0">
+                        <a:buNone/>
+                      </a:pPr>
+                      <a:r>
+                        <a:rPr lang="en-US" sz="1200" dirty="0">
+                          <a:solidFill>
+                            <a:schemeClr val="tx1"/>
+                          </a:solidFill>
+                        </a:rPr>
+                        <a:t>즐겨 보는 콘텐츠에 구매 연결</a:t>
+                      </a:r>
+                      <a:endParaRPr lang="en-US" sz="1200" dirty="0"/>
+                    </a:p>
+                  </a:txBody>
+                  <a:tcPr marL="91440" marR="91440" marT="45720" marB="45720" anchor="ctr">
+                    <a:lnL w="12700" cap="flat" cmpd="sng" algn="ctr">
+                      <a:solidFill>
+                        <a:srgbClr val="EEF4F3"/>
+                      </a:solidFill>
+                      <a:prstDash val="solid"/>
+                      <a:round/>
+                      <a:headEnd type="none" w="med" len="med"/>
+                      <a:tailEnd type="none" w="med" len="med"/>
+                    </a:lnL>
+                    <a:lnR w="12700" cap="flat" cmpd="sng" algn="ctr">
+                      <a:solidFill>
+                        <a:srgbClr val="EEF4F3"/>
+                      </a:solidFill>
+                      <a:prstDash val="solid"/>
+                      <a:round/>
+                      <a:headEnd type="none" w="med" len="med"/>
+                      <a:tailEnd type="none" w="med" len="med"/>
+                    </a:lnR>
+                    <a:lnT w="12700" cap="flat" cmpd="sng" algn="ctr">
+                      <a:solidFill>
+                        <a:srgbClr val="EEF4F3"/>
+                      </a:solidFill>
+                      <a:prstDash val="solid"/>
+                      <a:round/>
+                      <a:headEnd type="none" w="med" len="med"/>
+                      <a:tailEnd type="none" w="med" len="med"/>
+                    </a:lnT>
+                    <a:lnB w="12700" cap="flat" cmpd="sng" algn="ctr">
+                      <a:solidFill>
+                        <a:srgbClr val="EEF4F3"/>
+                      </a:solidFill>
+                      <a:prstDash val="solid"/>
+                      <a:round/>
+                      <a:headEnd type="none" w="med" len="med"/>
+                      <a:tailEnd type="none" w="med" len="med"/>
+                    </a:lnB>
+                  </a:tcPr>
+                </a:tc>
+              </a:tr>
+              <a:tr h="411480">
+                <a:tc>
+                  <a:txBody>
+                    <a:bodyPr/>
+                    <a:lstStyle/>
+                    <a:p>
+                      <a:pPr indent="0" marL="0">
+                        <a:buNone/>
+                      </a:pPr>
+                      <a:r>
+                        <a:rPr lang="en-US" sz="1200" b="1" dirty="0">
+                          <a:solidFill>
+                            <a:schemeClr val="tx1"/>
+                          </a:solidFill>
+                        </a:rPr>
+                        <a:t>모닝 브루 · 드롭박스</a:t>
+                      </a:r>
+                      <a:endParaRPr lang="en-US" sz="1200" dirty="0"/>
+                    </a:p>
+                  </a:txBody>
+                  <a:tcPr marL="91440" marR="91440" marT="45720" marB="45720" anchor="ctr">
+                    <a:lnL w="12700" cap="flat" cmpd="sng" algn="ctr">
+                      <a:solidFill>
+                        <a:srgbClr val="EEF4F3"/>
+                      </a:solidFill>
+                      <a:prstDash val="solid"/>
+                      <a:round/>
+                      <a:headEnd type="none" w="med" len="med"/>
+                      <a:tailEnd type="none" w="med" len="med"/>
+                    </a:lnL>
+                    <a:lnR w="12700" cap="flat" cmpd="sng" algn="ctr">
+                      <a:solidFill>
+                        <a:srgbClr val="EEF4F3"/>
+                      </a:solidFill>
+                      <a:prstDash val="solid"/>
+                      <a:round/>
+                      <a:headEnd type="none" w="med" len="med"/>
+                      <a:tailEnd type="none" w="med" len="med"/>
+                    </a:lnR>
+                    <a:lnT w="12700" cap="flat" cmpd="sng" algn="ctr">
+                      <a:solidFill>
+                        <a:srgbClr val="EEF4F3"/>
+                      </a:solidFill>
+                      <a:prstDash val="solid"/>
+                      <a:round/>
+                      <a:headEnd type="none" w="med" len="med"/>
+                      <a:tailEnd type="none" w="med" len="med"/>
+                    </a:lnT>
+                    <a:lnB w="12700" cap="flat" cmpd="sng" algn="ctr">
+                      <a:solidFill>
+                        <a:srgbClr val="EEF4F3"/>
+                      </a:solidFill>
+                      <a:prstDash val="solid"/>
+                      <a:round/>
+                      <a:headEnd type="none" w="med" len="med"/>
+                      <a:tailEnd type="none" w="med" len="med"/>
+                    </a:lnB>
+                  </a:tcPr>
+                </a:tc>
+                <a:tc>
+                  <a:txBody>
+                    <a:bodyPr/>
+                    <a:lstStyle/>
+                    <a:p>
+                      <a:pPr indent="0" marL="0">
+                        <a:buNone/>
+                      </a:pPr>
+                      <a:r>
+                        <a:rPr lang="en-US" sz="1200" dirty="0">
+                          <a:solidFill>
+                            <a:schemeClr val="tx1"/>
+                          </a:solidFill>
+                        </a:rPr>
+                        <a:t>공유 칸 / 친구 초대하면 용량</a:t>
+                      </a:r>
+                      <a:endParaRPr lang="en-US" sz="1200" dirty="0"/>
+                    </a:p>
+                  </a:txBody>
+                  <a:tcPr marL="91440" marR="91440" marT="45720" marB="45720" anchor="ctr">
+                    <a:lnL w="12700" cap="flat" cmpd="sng" algn="ctr">
+                      <a:solidFill>
+                        <a:srgbClr val="EEF4F3"/>
+                      </a:solidFill>
+                      <a:prstDash val="solid"/>
+                      <a:round/>
+                      <a:headEnd type="none" w="med" len="med"/>
+                      <a:tailEnd type="none" w="med" len="med"/>
+                    </a:lnL>
+                    <a:lnR w="12700" cap="flat" cmpd="sng" algn="ctr">
+                      <a:solidFill>
+                        <a:srgbClr val="EEF4F3"/>
+                      </a:solidFill>
+                      <a:prstDash val="solid"/>
+                      <a:round/>
+                      <a:headEnd type="none" w="med" len="med"/>
+                      <a:tailEnd type="none" w="med" len="med"/>
+                    </a:lnR>
+                    <a:lnT w="12700" cap="flat" cmpd="sng" algn="ctr">
+                      <a:solidFill>
+                        <a:srgbClr val="EEF4F3"/>
+                      </a:solidFill>
+                      <a:prstDash val="solid"/>
+                      <a:round/>
+                      <a:headEnd type="none" w="med" len="med"/>
+                      <a:tailEnd type="none" w="med" len="med"/>
+                    </a:lnT>
+                    <a:lnB w="12700" cap="flat" cmpd="sng" algn="ctr">
+                      <a:solidFill>
+                        <a:srgbClr val="EEF4F3"/>
+                      </a:solidFill>
+                      <a:prstDash val="solid"/>
+                      <a:round/>
+                      <a:headEnd type="none" w="med" len="med"/>
+                      <a:tailEnd type="none" w="med" len="med"/>
+                    </a:lnB>
+                  </a:tcPr>
+                </a:tc>
+                <a:tc>
+                  <a:txBody>
+                    <a:bodyPr/>
+                    <a:lstStyle/>
+                    <a:p>
+                      <a:pPr indent="0" marL="0">
+                        <a:buNone/>
+                      </a:pPr>
+                      <a:r>
+                        <a:rPr lang="en-US" sz="1200" dirty="0">
+                          <a:solidFill>
+                            <a:schemeClr val="tx1"/>
+                          </a:solidFill>
+                        </a:rPr>
+                        <a:t>공유가 제품 안에</a:t>
+                      </a:r>
+                      <a:endParaRPr lang="en-US" sz="1200" dirty="0"/>
+                    </a:p>
+                  </a:txBody>
+                  <a:tcPr marL="91440" marR="91440" marT="45720" marB="45720" anchor="ctr">
+                    <a:lnL w="12700" cap="flat" cmpd="sng" algn="ctr">
+                      <a:solidFill>
+                        <a:srgbClr val="EEF4F3"/>
+                      </a:solidFill>
+                      <a:prstDash val="solid"/>
+                      <a:round/>
+                      <a:headEnd type="none" w="med" len="med"/>
+                      <a:tailEnd type="none" w="med" len="med"/>
+                    </a:lnL>
+                    <a:lnR w="12700" cap="flat" cmpd="sng" algn="ctr">
+                      <a:solidFill>
+                        <a:srgbClr val="EEF4F3"/>
+                      </a:solidFill>
+                      <a:prstDash val="solid"/>
+                      <a:round/>
+                      <a:headEnd type="none" w="med" len="med"/>
+                      <a:tailEnd type="none" w="med" len="med"/>
+                    </a:lnR>
+                    <a:lnT w="12700" cap="flat" cmpd="sng" algn="ctr">
+                      <a:solidFill>
+                        <a:srgbClr val="EEF4F3"/>
+                      </a:solidFill>
+                      <a:prstDash val="solid"/>
+                      <a:round/>
+                      <a:headEnd type="none" w="med" len="med"/>
+                      <a:tailEnd type="none" w="med" len="med"/>
+                    </a:lnT>
+                    <a:lnB w="12700" cap="flat" cmpd="sng" algn="ctr">
+                      <a:solidFill>
+                        <a:srgbClr val="EEF4F3"/>
+                      </a:solidFill>
+                      <a:prstDash val="solid"/>
+                      <a:round/>
+                      <a:headEnd type="none" w="med" len="med"/>
+                      <a:tailEnd type="none" w="med" len="med"/>
+                    </a:lnB>
+                  </a:tcPr>
+                </a:tc>
+              </a:tr>
+              <a:tr h="411480">
+                <a:tc>
+                  <a:txBody>
+                    <a:bodyPr/>
+                    <a:lstStyle/>
+                    <a:p>
+                      <a:pPr indent="0" marL="0">
+                        <a:buNone/>
+                      </a:pPr>
+                      <a:r>
+                        <a:rPr lang="en-US" sz="1200" b="1" dirty="0">
+                          <a:solidFill>
+                            <a:schemeClr val="tx1"/>
+                          </a:solidFill>
+                        </a:rPr>
+                        <a:t>워들 · 어몽어스</a:t>
+                      </a:r>
+                      <a:endParaRPr lang="en-US" sz="1200" dirty="0"/>
+                    </a:p>
+                  </a:txBody>
+                  <a:tcPr marL="91440" marR="91440" marT="45720" marB="45720" anchor="ctr">
+                    <a:lnL w="12700" cap="flat" cmpd="sng" algn="ctr">
+                      <a:solidFill>
+                        <a:srgbClr val="EEF4F3"/>
+                      </a:solidFill>
+                      <a:prstDash val="solid"/>
+                      <a:round/>
+                      <a:headEnd type="none" w="med" len="med"/>
+                      <a:tailEnd type="none" w="med" len="med"/>
+                    </a:lnL>
+                    <a:lnR w="12700" cap="flat" cmpd="sng" algn="ctr">
+                      <a:solidFill>
+                        <a:srgbClr val="EEF4F3"/>
+                      </a:solidFill>
+                      <a:prstDash val="solid"/>
+                      <a:round/>
+                      <a:headEnd type="none" w="med" len="med"/>
+                      <a:tailEnd type="none" w="med" len="med"/>
+                    </a:lnR>
+                    <a:lnT w="12700" cap="flat" cmpd="sng" algn="ctr">
+                      <a:solidFill>
+                        <a:srgbClr val="EEF4F3"/>
+                      </a:solidFill>
+                      <a:prstDash val="solid"/>
+                      <a:round/>
+                      <a:headEnd type="none" w="med" len="med"/>
+                      <a:tailEnd type="none" w="med" len="med"/>
+                    </a:lnT>
+                    <a:lnB w="12700" cap="flat" cmpd="sng" algn="ctr">
+                      <a:solidFill>
+                        <a:srgbClr val="EEF4F3"/>
+                      </a:solidFill>
+                      <a:prstDash val="solid"/>
+                      <a:round/>
+                      <a:headEnd type="none" w="med" len="med"/>
+                      <a:tailEnd type="none" w="med" len="med"/>
+                    </a:lnB>
+                  </a:tcPr>
+                </a:tc>
+                <a:tc>
+                  <a:txBody>
+                    <a:bodyPr/>
+                    <a:lstStyle/>
+                    <a:p>
+                      <a:pPr indent="0" marL="0">
+                        <a:buNone/>
+                      </a:pPr>
+                      <a:r>
+                        <a:rPr lang="en-US" sz="1200" dirty="0">
+                          <a:solidFill>
+                            <a:schemeClr val="tx1"/>
+                          </a:solidFill>
+                        </a:rPr>
+                        <a:t>이모지 공유 카드 / 스트리머 방송</a:t>
+                      </a:r>
+                      <a:endParaRPr lang="en-US" sz="1200" dirty="0"/>
+                    </a:p>
+                  </a:txBody>
+                  <a:tcPr marL="91440" marR="91440" marT="45720" marB="45720" anchor="ctr">
+                    <a:lnL w="12700" cap="flat" cmpd="sng" algn="ctr">
+                      <a:solidFill>
+                        <a:srgbClr val="EEF4F3"/>
+                      </a:solidFill>
+                      <a:prstDash val="solid"/>
+                      <a:round/>
+                      <a:headEnd type="none" w="med" len="med"/>
+                      <a:tailEnd type="none" w="med" len="med"/>
+                    </a:lnL>
+                    <a:lnR w="12700" cap="flat" cmpd="sng" algn="ctr">
+                      <a:solidFill>
+                        <a:srgbClr val="EEF4F3"/>
+                      </a:solidFill>
+                      <a:prstDash val="solid"/>
+                      <a:round/>
+                      <a:headEnd type="none" w="med" len="med"/>
+                      <a:tailEnd type="none" w="med" len="med"/>
+                    </a:lnR>
+                    <a:lnT w="12700" cap="flat" cmpd="sng" algn="ctr">
+                      <a:solidFill>
+                        <a:srgbClr val="EEF4F3"/>
+                      </a:solidFill>
+                      <a:prstDash val="solid"/>
+                      <a:round/>
+                      <a:headEnd type="none" w="med" len="med"/>
+                      <a:tailEnd type="none" w="med" len="med"/>
+                    </a:lnT>
+                    <a:lnB w="12700" cap="flat" cmpd="sng" algn="ctr">
+                      <a:solidFill>
+                        <a:srgbClr val="EEF4F3"/>
+                      </a:solidFill>
+                      <a:prstDash val="solid"/>
+                      <a:round/>
+                      <a:headEnd type="none" w="med" len="med"/>
+                      <a:tailEnd type="none" w="med" len="med"/>
+                    </a:lnB>
+                  </a:tcPr>
+                </a:tc>
+                <a:tc>
+                  <a:txBody>
+                    <a:bodyPr/>
+                    <a:lstStyle/>
+                    <a:p>
+                      <a:pPr indent="0" marL="0">
+                        <a:buNone/>
+                      </a:pPr>
+                      <a:r>
+                        <a:rPr lang="en-US" sz="1200" dirty="0">
+                          <a:solidFill>
+                            <a:schemeClr val="tx1"/>
+                          </a:solidFill>
+                        </a:rPr>
+                        <a:t>사람 있는 곳으로</a:t>
+                      </a:r>
+                      <a:endParaRPr lang="en-US" sz="1200" dirty="0"/>
+                    </a:p>
+                  </a:txBody>
+                  <a:tcPr marL="91440" marR="91440" marT="45720" marB="45720" anchor="ctr">
+                    <a:lnL w="12700" cap="flat" cmpd="sng" algn="ctr">
+                      <a:solidFill>
+                        <a:srgbClr val="EEF4F3"/>
+                      </a:solidFill>
+                      <a:prstDash val="solid"/>
+                      <a:round/>
+                      <a:headEnd type="none" w="med" len="med"/>
+                      <a:tailEnd type="none" w="med" len="med"/>
+                    </a:lnL>
+                    <a:lnR w="12700" cap="flat" cmpd="sng" algn="ctr">
+                      <a:solidFill>
+                        <a:srgbClr val="EEF4F3"/>
+                      </a:solidFill>
+                      <a:prstDash val="solid"/>
+                      <a:round/>
+                      <a:headEnd type="none" w="med" len="med"/>
+                      <a:tailEnd type="none" w="med" len="med"/>
+                    </a:lnR>
+                    <a:lnT w="12700" cap="flat" cmpd="sng" algn="ctr">
+                      <a:solidFill>
+                        <a:srgbClr val="EEF4F3"/>
+                      </a:solidFill>
+                      <a:prstDash val="solid"/>
+                      <a:round/>
+                      <a:headEnd type="none" w="med" len="med"/>
+                      <a:tailEnd type="none" w="med" len="med"/>
+                    </a:lnT>
+                    <a:lnB w="12700" cap="flat" cmpd="sng" algn="ctr">
+                      <a:solidFill>
+                        <a:srgbClr val="EEF4F3"/>
+                      </a:solidFill>
+                      <a:prstDash val="solid"/>
+                      <a:round/>
+                      <a:headEnd type="none" w="med" len="med"/>
+                      <a:tailEnd type="none" w="med" len="med"/>
+                    </a:lnB>
+                  </a:tcPr>
+                </a:tc>
+              </a:tr>
+              <a:tr h="411480">
+                <a:tc>
+                  <a:txBody>
+                    <a:bodyPr/>
+                    <a:lstStyle/>
+                    <a:p>
+                      <a:pPr indent="0" marL="0">
+                        <a:buNone/>
+                      </a:pPr>
+                      <a:r>
+                        <a:rPr lang="en-US" sz="1200" b="1" dirty="0">
+                          <a:solidFill>
+                            <a:schemeClr val="tx1"/>
+                          </a:solidFill>
+                        </a:rPr>
+                        <a:t>듀오링고</a:t>
+                      </a:r>
+                      <a:endParaRPr lang="en-US" sz="1200" dirty="0"/>
+                    </a:p>
+                  </a:txBody>
+                  <a:tcPr marL="91440" marR="91440" marT="45720" marB="45720" anchor="ctr">
+                    <a:lnL w="12700" cap="flat" cmpd="sng" algn="ctr">
+                      <a:solidFill>
+                        <a:srgbClr val="EEF4F3"/>
+                      </a:solidFill>
+                      <a:prstDash val="solid"/>
+                      <a:round/>
+                      <a:headEnd type="none" w="med" len="med"/>
+                      <a:tailEnd type="none" w="med" len="med"/>
+                    </a:lnL>
+                    <a:lnR w="12700" cap="flat" cmpd="sng" algn="ctr">
+                      <a:solidFill>
+                        <a:srgbClr val="EEF4F3"/>
+                      </a:solidFill>
+                      <a:prstDash val="solid"/>
+                      <a:round/>
+                      <a:headEnd type="none" w="med" len="med"/>
+                      <a:tailEnd type="none" w="med" len="med"/>
+                    </a:lnR>
+                    <a:lnT w="12700" cap="flat" cmpd="sng" algn="ctr">
+                      <a:solidFill>
+                        <a:srgbClr val="EEF4F3"/>
+                      </a:solidFill>
+                      <a:prstDash val="solid"/>
+                      <a:round/>
+                      <a:headEnd type="none" w="med" len="med"/>
+                      <a:tailEnd type="none" w="med" len="med"/>
+                    </a:lnT>
+                    <a:lnB w="12700" cap="flat" cmpd="sng" algn="ctr">
+                      <a:solidFill>
+                        <a:srgbClr val="EEF4F3"/>
+                      </a:solidFill>
+                      <a:prstDash val="solid"/>
+                      <a:round/>
+                      <a:headEnd type="none" w="med" len="med"/>
+                      <a:tailEnd type="none" w="med" len="med"/>
+                    </a:lnB>
+                  </a:tcPr>
+                </a:tc>
+                <a:tc>
+                  <a:txBody>
+                    <a:bodyPr/>
+                    <a:lstStyle/>
+                    <a:p>
+                      <a:pPr indent="0" marL="0">
+                        <a:buNone/>
+                      </a:pPr>
+                      <a:r>
+                        <a:rPr lang="en-US" sz="1200" dirty="0">
+                          <a:solidFill>
+                            <a:schemeClr val="tx1"/>
+                          </a:solidFill>
+                        </a:rPr>
+                        <a:t>부엉이 마스코트를 캐릭터로</a:t>
+                      </a:r>
+                      <a:endParaRPr lang="en-US" sz="1200" dirty="0"/>
+                    </a:p>
+                  </a:txBody>
+                  <a:tcPr marL="91440" marR="91440" marT="45720" marB="45720" anchor="ctr">
+                    <a:lnL w="12700" cap="flat" cmpd="sng" algn="ctr">
+                      <a:solidFill>
+                        <a:srgbClr val="EEF4F3"/>
+                      </a:solidFill>
+                      <a:prstDash val="solid"/>
+                      <a:round/>
+                      <a:headEnd type="none" w="med" len="med"/>
+                      <a:tailEnd type="none" w="med" len="med"/>
+                    </a:lnL>
+                    <a:lnR w="12700" cap="flat" cmpd="sng" algn="ctr">
+                      <a:solidFill>
+                        <a:srgbClr val="EEF4F3"/>
+                      </a:solidFill>
+                      <a:prstDash val="solid"/>
+                      <a:round/>
+                      <a:headEnd type="none" w="med" len="med"/>
+                      <a:tailEnd type="none" w="med" len="med"/>
+                    </a:lnR>
+                    <a:lnT w="12700" cap="flat" cmpd="sng" algn="ctr">
+                      <a:solidFill>
+                        <a:srgbClr val="EEF4F3"/>
+                      </a:solidFill>
+                      <a:prstDash val="solid"/>
+                      <a:round/>
+                      <a:headEnd type="none" w="med" len="med"/>
+                      <a:tailEnd type="none" w="med" len="med"/>
+                    </a:lnT>
+                    <a:lnB w="12700" cap="flat" cmpd="sng" algn="ctr">
+                      <a:solidFill>
+                        <a:srgbClr val="EEF4F3"/>
+                      </a:solidFill>
+                      <a:prstDash val="solid"/>
+                      <a:round/>
+                      <a:headEnd type="none" w="med" len="med"/>
+                      <a:tailEnd type="none" w="med" len="med"/>
+                    </a:lnB>
+                  </a:tcPr>
+                </a:tc>
+                <a:tc>
+                  <a:txBody>
+                    <a:bodyPr/>
+                    <a:lstStyle/>
+                    <a:p>
+                      <a:pPr indent="0" marL="0">
+                        <a:buNone/>
+                      </a:pPr>
+                      <a:r>
+                        <a:rPr lang="en-US" sz="1200" dirty="0">
+                          <a:solidFill>
+                            <a:schemeClr val="tx1"/>
+                          </a:solidFill>
+                        </a:rPr>
+                        <a:t>브랜드에 성격</a:t>
+                      </a:r>
+                      <a:endParaRPr lang="en-US" sz="1200" dirty="0"/>
+                    </a:p>
+                  </a:txBody>
+                  <a:tcPr marL="91440" marR="91440" marT="45720" marB="45720" anchor="ctr">
+                    <a:lnL w="12700" cap="flat" cmpd="sng" algn="ctr">
+                      <a:solidFill>
+                        <a:srgbClr val="EEF4F3"/>
+                      </a:solidFill>
+                      <a:prstDash val="solid"/>
+                      <a:round/>
+                      <a:headEnd type="none" w="med" len="med"/>
+                      <a:tailEnd type="none" w="med" len="med"/>
+                    </a:lnL>
+                    <a:lnR w="12700" cap="flat" cmpd="sng" algn="ctr">
+                      <a:solidFill>
+                        <a:srgbClr val="EEF4F3"/>
+                      </a:solidFill>
+                      <a:prstDash val="solid"/>
+                      <a:round/>
+                      <a:headEnd type="none" w="med" len="med"/>
+                      <a:tailEnd type="none" w="med" len="med"/>
+                    </a:lnR>
+                    <a:lnT w="12700" cap="flat" cmpd="sng" algn="ctr">
+                      <a:solidFill>
+                        <a:srgbClr val="EEF4F3"/>
+                      </a:solidFill>
+                      <a:prstDash val="solid"/>
+                      <a:round/>
+                      <a:headEnd type="none" w="med" len="med"/>
+                      <a:tailEnd type="none" w="med" len="med"/>
+                    </a:lnT>
+                    <a:lnB w="12700" cap="flat" cmpd="sng" algn="ctr">
+                      <a:solidFill>
+                        <a:srgbClr val="EEF4F3"/>
+                      </a:solidFill>
+                      <a:prstDash val="solid"/>
+                      <a:round/>
+                      <a:headEnd type="none" w="med" len="med"/>
+                      <a:tailEnd type="none" w="med" len="med"/>
+                    </a:lnB>
+                  </a:tcPr>
+                </a:tc>
+              </a:tr>
+            </a:tbl>
+          </a:graphicData>
+        </a:graphic>
+      </p:graphicFrame>
+      <p:sp>
+        <p:nvSpPr>
+          <p:cNvPr id="4" name="Text 1"/>
+          <p:cNvSpPr txBox="1"/>
+          <p:nvPr/>
+        </p:nvSpPr>
+        <p:spPr>
+          <a:xfrm>
+            <a:off x="457200" y="4645152"/>
+            <a:ext cx="7680960" cy="274320"/>
+          </a:xfrm>
+          <a:prstGeom prst="rect">
+            <a:avLst/>
+          </a:prstGeom>
+          <a:noFill/>
+          <a:ln/>
+        </p:spPr>
+        <p:txBody>
+          <a:bodyPr wrap="square" lIns="0" tIns="0" rIns="0" bIns="0" rtlCol="0" anchor="t"/>
+          <a:lstStyle/>
+          <a:p>
+            <a:pPr indent="0" marL="0">
+              <a:buNone/>
+            </a:pPr>
+            <a:r>
+              <a:rPr lang="en-US" sz="1000" dirty="0">
+                <a:solidFill>
+                  <a:schemeClr val="accent4"/>
+                </a:solidFill>
+              </a:rPr>
+              <a:t>성공 사례만 기사가 된다(생존자 편향) — 방법보다 원리를 가져오기 (33장)</a:t>
+            </a:r>
+            <a:endParaRPr lang="en-US" sz="1000" dirty="0"/>
+          </a:p>
+        </p:txBody>
+      </p:sp>
+      <p:sp>
+        <p:nvSpPr>
+          <p:cNvPr id="25" name="Slide Number Placeholder 0"/>
+          <p:cNvSpPr>
+            <a:spLocks noGrp="1"/>
+          </p:cNvSpPr>
+          <p:nvPr>
+            <p:ph type="sldNum" sz="quarter" idx="4294967295"/>
+          </p:nvPr>
+        </p:nvSpPr>
+        <p:spPr>
+          <a:xfrm>
+            <a:off x="8321040" y="4754880"/>
+            <a:ext cx="457200" cy="274320"/>
+          </a:xfrm>
+          <a:prstGeom prst="rect">
+            <a:avLst/>
+          </a:prstGeom>
+          <a:extLst>
+            <a:ext uri="{C572A759-6A51-4108-AA02-DFA0A04FC94B}">
+              <ma14:wrappingTextBoxFlag xmlns:ma14="http://schemas.microsoft.com/office/mac/drawingml/2011/main" val="0"/>
+            </a:ext>
+          </a:extLst>
+        </p:spPr>
+        <p:txBody>
+          <a:bodyPr/>
+          <a:lstStyle>
+            <a:lvl1pPr>
+              <a:defRPr sz="1000">
+                <a:solidFill>
+                  <a:schemeClr val="accent4"/>
+                </a:solidFill>
+              </a:defRPr>
+            </a:lvl1pPr>
+          </a:lstStyle>
+          <a:p>
+            <a:pPr algn="r"/>
+            <a:fld id="{F7021451-1387-4CA6-816F-3879F97B5CBC}" type="slidenum">
+              <a:rPr b="0" lang="en-US"/>
+              <a:t>47</a:t>
+            </a:fld>
+            <a:endParaRPr lang="en-US"/>
+          </a:p>
+        </p:txBody>
+      </p:sp>
+    </p:spTree>
+  </p:cSld>
+  <p:clrMapOvr>
+    <a:masterClrMapping/>
+  </p:clrMapOvr>
+</p:sld>
+</file>
+
+<file path=ppt/slides/slide48.xml><?xml version="1.0" encoding="utf-8"?>
+<p:sld xmlns:a="http://schemas.openxmlformats.org/drawingml/2006/main" xmlns:r="http://schemas.openxmlformats.org/officeDocument/2006/relationships" xmlns:p="http://schemas.openxmlformats.org/presentationml/2006/main">
+  <p:cSld name="Slide 48">
+    <p:spTree>
+      <p:nvGrpSpPr>
+        <p:cNvPr id="1" name=""/>
+        <p:cNvGrpSpPr/>
+        <p:nvPr/>
+      </p:nvGrpSpPr>
+      <p:grpSpPr>
+        <a:xfrm>
+          <a:off x="0" y="0"/>
+          <a:ext cx="0" cy="0"/>
+          <a:chOff x="0" y="0"/>
+          <a:chExt cx="0" cy="0"/>
+        </a:xfrm>
+      </p:grpSpPr>
+      <p:sp>
+        <p:nvSpPr>
+          <p:cNvPr id="2" name="Text 0"/>
+          <p:cNvSpPr/>
+          <p:nvPr>
+            <p:ph idx="100" type="title" hasCustomPrompt="1"/>
+          </p:nvPr>
+        </p:nvSpPr>
+        <p:spPr>
+          <a:xfrm>
+            <a:off x="457200" y="274320"/>
+            <a:ext cx="8229600" cy="685800"/>
+          </a:xfrm>
+          <a:prstGeom prst="rect">
+            <a:avLst/>
+          </a:prstGeom>
+          <a:noFill/>
+          <a:ln/>
+        </p:spPr>
+        <p:txBody>
+          <a:bodyPr wrap="square" lIns="0" tIns="0" rIns="0" bIns="0" rtlCol="0" anchor="ctr"/>
+          <a:lstStyle/>
+          <a:p>
+            <a:pPr indent="0" marL="0">
+              <a:buNone/>
+            </a:pPr>
+            <a:r>
+              <a:rPr lang="en-US" sz="2800" b="1" dirty="0">
+                <a:solidFill>
+                  <a:schemeClr val="tx2"/>
+                </a:solidFill>
+              </a:rPr>
+              <a:t>90일 실행 계획</a:t>
+            </a:r>
+            <a:endParaRPr lang="en-US" sz="2800" dirty="0"/>
+          </a:p>
+        </p:txBody>
+      </p:sp>
+      <p:sp>
+        <p:nvSpPr>
+          <p:cNvPr id="3" name="card"/>
+          <p:cNvSpPr/>
+          <p:nvPr/>
+        </p:nvSpPr>
+        <p:spPr>
+          <a:xfrm>
+            <a:off x="457200" y="1188720"/>
+            <a:ext cx="2606040" cy="2926080"/>
+          </a:xfrm>
+          <a:prstGeom prst="roundRect">
+            <a:avLst>
+              <a:gd name="adj" fmla="val 2807"/>
+            </a:avLst>
+          </a:prstGeom>
+          <a:solidFill>
+            <a:schemeClr val="bg2"/>
+          </a:solidFill>
+          <a:ln/>
+        </p:spPr>
+      </p:sp>
+      <p:sp>
+        <p:nvSpPr>
+          <p:cNvPr id="4" name="Text 2"/>
+          <p:cNvSpPr txBox="1"/>
+          <p:nvPr/>
+        </p:nvSpPr>
+        <p:spPr>
+          <a:xfrm>
+            <a:off x="640080" y="1325880"/>
+            <a:ext cx="2240280" cy="411480"/>
+          </a:xfrm>
+          <a:prstGeom prst="rect">
+            <a:avLst/>
+          </a:prstGeom>
+          <a:noFill/>
+          <a:ln/>
+        </p:spPr>
+        <p:txBody>
+          <a:bodyPr wrap="square" lIns="0" tIns="0" rIns="0" bIns="0" rtlCol="0" anchor="t"/>
+          <a:lstStyle/>
+          <a:p>
+            <a:pPr indent="0" marL="0">
+              <a:buNone/>
+            </a:pPr>
+            <a:r>
+              <a:rPr lang="en-US" sz="1400" b="1" dirty="0">
+                <a:solidFill>
+                  <a:schemeClr val="accent2"/>
+                </a:solidFill>
+              </a:rPr>
+              <a:t>1~4주</a:t>
+            </a:r>
+            <a:endParaRPr lang="en-US" sz="1400" dirty="0"/>
+          </a:p>
+        </p:txBody>
+      </p:sp>
+      <p:sp>
+        <p:nvSpPr>
+          <p:cNvPr id="5" name="Text 3"/>
+          <p:cNvSpPr txBox="1"/>
+          <p:nvPr/>
+        </p:nvSpPr>
+        <p:spPr>
+          <a:xfrm>
+            <a:off x="640080" y="1737360"/>
+            <a:ext cx="2240280" cy="457200"/>
+          </a:xfrm>
+          <a:prstGeom prst="rect">
+            <a:avLst/>
+          </a:prstGeom>
+          <a:noFill/>
+          <a:ln/>
+        </p:spPr>
+        <p:txBody>
+          <a:bodyPr wrap="square" lIns="0" tIns="0" rIns="0" bIns="0" rtlCol="0" anchor="t"/>
+          <a:lstStyle/>
+          <a:p>
+            <a:pPr indent="0" marL="0">
+              <a:buNone/>
+            </a:pPr>
+            <a:r>
+              <a:rPr lang="en-US" sz="2000" b="1" dirty="0">
+                <a:solidFill>
+                  <a:schemeClr val="tx2"/>
+                </a:solidFill>
+              </a:rPr>
+              <a:t>씨앗 뿌리기</a:t>
+            </a:r>
+            <a:endParaRPr lang="en-US" sz="2000" dirty="0"/>
+          </a:p>
+        </p:txBody>
+      </p:sp>
+      <p:sp>
+        <p:nvSpPr>
+          <p:cNvPr id="6" name="Text 4"/>
+          <p:cNvSpPr txBox="1"/>
+          <p:nvPr/>
+        </p:nvSpPr>
+        <p:spPr>
+          <a:xfrm>
+            <a:off x="640080" y="2331720"/>
+            <a:ext cx="2286000" cy="1645920"/>
+          </a:xfrm>
+          <a:prstGeom prst="rect">
+            <a:avLst/>
+          </a:prstGeom>
+          <a:noFill/>
+          <a:ln/>
+        </p:spPr>
+        <p:txBody>
+          <a:bodyPr wrap="square" lIns="0" tIns="0" rIns="0" bIns="0" rtlCol="0" anchor="t"/>
+          <a:lstStyle/>
+          <a:p>
+            <a:pPr marL="342900" indent="-342900">
+              <a:spcAft>
+                <a:spcPts val="600"/>
+              </a:spcAft>
+              <a:buSzPct val="100000"/>
+              <a:buChar char="•"/>
+            </a:pPr>
+            <a:r>
+              <a:rPr lang="en-US" sz="1200" dirty="0">
+                <a:solidFill>
+                  <a:schemeClr val="tx1"/>
+                </a:solidFill>
+              </a:rPr>
+              <a:t>도움 되는 콘텐츠 주 3~5개</a:t>
+            </a:r>
+            <a:endParaRPr lang="en-US" sz="1200" dirty="0"/>
+          </a:p>
+          <a:p>
+            <a:pPr marL="342900" indent="-342900">
+              <a:spcAft>
+                <a:spcPts val="600"/>
+              </a:spcAft>
+              <a:buSzPct val="100000"/>
+              <a:buChar char="•"/>
+            </a:pPr>
+            <a:r>
+              <a:rPr lang="en-US" sz="1200" dirty="0">
+                <a:solidFill>
+                  <a:schemeClr val="tx1"/>
+                </a:solidFill>
+              </a:rPr>
+              <a:t>첫 손님 30명에게 직접 연락</a:t>
+            </a:r>
+            <a:endParaRPr lang="en-US" sz="1200" dirty="0"/>
+          </a:p>
+          <a:p>
+            <a:pPr marL="342900" indent="-342900">
+              <a:spcAft>
+                <a:spcPts val="600"/>
+              </a:spcAft>
+              <a:buSzPct val="100000"/>
+              <a:buChar char="•"/>
+            </a:pPr>
+            <a:r>
+              <a:rPr lang="en-US" sz="1200" dirty="0">
+                <a:solidFill>
+                  <a:schemeClr val="tx1"/>
+                </a:solidFill>
+              </a:rPr>
+              <a:t>후기·질문 전부 모으기</a:t>
+            </a:r>
+            <a:endParaRPr lang="en-US" sz="1200" dirty="0"/>
+          </a:p>
+        </p:txBody>
+      </p:sp>
+      <p:sp>
+        <p:nvSpPr>
+          <p:cNvPr id="7" name="card"/>
+          <p:cNvSpPr/>
+          <p:nvPr/>
+        </p:nvSpPr>
+        <p:spPr>
+          <a:xfrm>
+            <a:off x="3246120" y="1188720"/>
+            <a:ext cx="2606040" cy="2926080"/>
+          </a:xfrm>
+          <a:prstGeom prst="roundRect">
+            <a:avLst>
+              <a:gd name="adj" fmla="val 2807"/>
+            </a:avLst>
+          </a:prstGeom>
+          <a:solidFill>
+            <a:schemeClr val="bg2"/>
+          </a:solidFill>
+          <a:ln/>
+        </p:spPr>
+      </p:sp>
+      <p:sp>
+        <p:nvSpPr>
+          <p:cNvPr id="8" name="Text 6"/>
+          <p:cNvSpPr txBox="1"/>
+          <p:nvPr/>
+        </p:nvSpPr>
+        <p:spPr>
+          <a:xfrm>
+            <a:off x="3429000" y="1325880"/>
+            <a:ext cx="2240280" cy="411480"/>
+          </a:xfrm>
+          <a:prstGeom prst="rect">
+            <a:avLst/>
+          </a:prstGeom>
+          <a:noFill/>
+          <a:ln/>
+        </p:spPr>
+        <p:txBody>
+          <a:bodyPr wrap="square" lIns="0" tIns="0" rIns="0" bIns="0" rtlCol="0" anchor="t"/>
+          <a:lstStyle/>
+          <a:p>
+            <a:pPr indent="0" marL="0">
+              <a:buNone/>
+            </a:pPr>
+            <a:r>
+              <a:rPr lang="en-US" sz="1400" b="1" dirty="0">
+                <a:solidFill>
+                  <a:schemeClr val="accent2"/>
+                </a:solidFill>
+              </a:rPr>
+              <a:t>5~8주</a:t>
+            </a:r>
+            <a:endParaRPr lang="en-US" sz="1400" dirty="0"/>
+          </a:p>
+        </p:txBody>
+      </p:sp>
+      <p:sp>
+        <p:nvSpPr>
+          <p:cNvPr id="9" name="Text 7"/>
+          <p:cNvSpPr txBox="1"/>
+          <p:nvPr/>
+        </p:nvSpPr>
+        <p:spPr>
+          <a:xfrm>
+            <a:off x="3429000" y="1737360"/>
+            <a:ext cx="2240280" cy="457200"/>
+          </a:xfrm>
+          <a:prstGeom prst="rect">
+            <a:avLst/>
+          </a:prstGeom>
+          <a:noFill/>
+          <a:ln/>
+        </p:spPr>
+        <p:txBody>
+          <a:bodyPr wrap="square" lIns="0" tIns="0" rIns="0" bIns="0" rtlCol="0" anchor="t"/>
+          <a:lstStyle/>
+          <a:p>
+            <a:pPr indent="0" marL="0">
+              <a:buNone/>
+            </a:pPr>
+            <a:r>
+              <a:rPr lang="en-US" sz="2000" b="1" dirty="0">
+                <a:solidFill>
+                  <a:schemeClr val="tx2"/>
+                </a:solidFill>
+              </a:rPr>
+              <a:t>반응 찾기</a:t>
+            </a:r>
+            <a:endParaRPr lang="en-US" sz="2000" dirty="0"/>
+          </a:p>
+        </p:txBody>
+      </p:sp>
+      <p:sp>
+        <p:nvSpPr>
+          <p:cNvPr id="10" name="Text 8"/>
+          <p:cNvSpPr txBox="1"/>
+          <p:nvPr/>
+        </p:nvSpPr>
+        <p:spPr>
+          <a:xfrm>
+            <a:off x="3429000" y="2331720"/>
+            <a:ext cx="2286000" cy="1645920"/>
+          </a:xfrm>
+          <a:prstGeom prst="rect">
+            <a:avLst/>
+          </a:prstGeom>
+          <a:noFill/>
+          <a:ln/>
+        </p:spPr>
+        <p:txBody>
+          <a:bodyPr wrap="square" lIns="0" tIns="0" rIns="0" bIns="0" rtlCol="0" anchor="t"/>
+          <a:lstStyle/>
+          <a:p>
+            <a:pPr marL="342900" indent="-342900">
+              <a:spcAft>
+                <a:spcPts val="600"/>
+              </a:spcAft>
+              <a:buSzPct val="100000"/>
+              <a:buChar char="•"/>
+            </a:pPr>
+            <a:r>
+              <a:rPr lang="en-US" sz="1200" dirty="0">
+                <a:solidFill>
+                  <a:schemeClr val="tx1"/>
+                </a:solidFill>
+              </a:rPr>
+              <a:t>상위 콘텐츠 3개 찾기</a:t>
+            </a:r>
+            <a:endParaRPr lang="en-US" sz="1200" dirty="0"/>
+          </a:p>
+          <a:p>
+            <a:pPr marL="342900" indent="-342900">
+              <a:spcAft>
+                <a:spcPts val="600"/>
+              </a:spcAft>
+              <a:buSzPct val="100000"/>
+              <a:buChar char="•"/>
+            </a:pPr>
+            <a:r>
+              <a:rPr lang="en-US" sz="1200" dirty="0">
+                <a:solidFill>
+                  <a:schemeClr val="tx1"/>
+                </a:solidFill>
+              </a:rPr>
+              <a:t>같은 주제 변형 5개 더</a:t>
+            </a:r>
+            <a:endParaRPr lang="en-US" sz="1200" dirty="0"/>
+          </a:p>
+          <a:p>
+            <a:pPr marL="342900" indent="-342900">
+              <a:spcAft>
+                <a:spcPts val="600"/>
+              </a:spcAft>
+              <a:buSzPct val="100000"/>
+              <a:buChar char="•"/>
+            </a:pPr>
+            <a:r>
+              <a:rPr lang="en-US" sz="1200" dirty="0">
+                <a:solidFill>
+                  <a:schemeClr val="tx1"/>
+                </a:solidFill>
+              </a:rPr>
+              <a:t>소액 광고 테스트 · 공유 장치</a:t>
+            </a:r>
+            <a:endParaRPr lang="en-US" sz="1200" dirty="0"/>
+          </a:p>
+        </p:txBody>
+      </p:sp>
+      <p:sp>
+        <p:nvSpPr>
+          <p:cNvPr id="11" name="card"/>
+          <p:cNvSpPr/>
+          <p:nvPr/>
+        </p:nvSpPr>
+        <p:spPr>
+          <a:xfrm>
+            <a:off x="6035040" y="1188720"/>
+            <a:ext cx="2606040" cy="2926080"/>
+          </a:xfrm>
+          <a:prstGeom prst="roundRect">
+            <a:avLst>
+              <a:gd name="adj" fmla="val 2807"/>
+            </a:avLst>
+          </a:prstGeom>
+          <a:solidFill>
+            <a:schemeClr val="tx2"/>
+          </a:solidFill>
+          <a:ln/>
+        </p:spPr>
+      </p:sp>
+      <p:sp>
+        <p:nvSpPr>
+          <p:cNvPr id="12" name="Text 10"/>
+          <p:cNvSpPr txBox="1"/>
+          <p:nvPr/>
+        </p:nvSpPr>
+        <p:spPr>
+          <a:xfrm>
+            <a:off x="6217920" y="1325880"/>
+            <a:ext cx="2240280" cy="411480"/>
+          </a:xfrm>
+          <a:prstGeom prst="rect">
+            <a:avLst/>
+          </a:prstGeom>
+          <a:noFill/>
+          <a:ln/>
+        </p:spPr>
+        <p:txBody>
+          <a:bodyPr wrap="square" lIns="0" tIns="0" rIns="0" bIns="0" rtlCol="0" anchor="t"/>
+          <a:lstStyle/>
+          <a:p>
+            <a:pPr indent="0" marL="0">
+              <a:buNone/>
+            </a:pPr>
+            <a:r>
+              <a:rPr lang="en-US" sz="1400" b="1" dirty="0">
+                <a:solidFill>
+                  <a:schemeClr val="accent6"/>
+                </a:solidFill>
+              </a:rPr>
+              <a:t>9~12주</a:t>
+            </a:r>
+            <a:endParaRPr lang="en-US" sz="1400" dirty="0"/>
+          </a:p>
+        </p:txBody>
+      </p:sp>
+      <p:sp>
+        <p:nvSpPr>
+          <p:cNvPr id="13" name="Text 11"/>
+          <p:cNvSpPr txBox="1"/>
+          <p:nvPr/>
+        </p:nvSpPr>
+        <p:spPr>
+          <a:xfrm>
+            <a:off x="6217920" y="1737360"/>
+            <a:ext cx="2240280" cy="457200"/>
+          </a:xfrm>
+          <a:prstGeom prst="rect">
+            <a:avLst/>
+          </a:prstGeom>
+          <a:noFill/>
+          <a:ln/>
+        </p:spPr>
+        <p:txBody>
+          <a:bodyPr wrap="square" lIns="0" tIns="0" rIns="0" bIns="0" rtlCol="0" anchor="t"/>
+          <a:lstStyle/>
+          <a:p>
+            <a:pPr indent="0" marL="0">
+              <a:buNone/>
+            </a:pPr>
+            <a:r>
+              <a:rPr lang="en-US" sz="2000" b="1" dirty="0">
+                <a:solidFill>
+                  <a:schemeClr val="bg1"/>
+                </a:solidFill>
+              </a:rPr>
+              <a:t>키우기</a:t>
+            </a:r>
+            <a:endParaRPr lang="en-US" sz="2000" dirty="0"/>
+          </a:p>
+        </p:txBody>
+      </p:sp>
+      <p:sp>
+        <p:nvSpPr>
+          <p:cNvPr id="14" name="Text 12"/>
+          <p:cNvSpPr txBox="1"/>
+          <p:nvPr/>
+        </p:nvSpPr>
+        <p:spPr>
+          <a:xfrm>
+            <a:off x="6217920" y="2331720"/>
+            <a:ext cx="2286000" cy="1645920"/>
+          </a:xfrm>
+          <a:prstGeom prst="rect">
+            <a:avLst/>
+          </a:prstGeom>
+          <a:noFill/>
+          <a:ln/>
+        </p:spPr>
+        <p:txBody>
+          <a:bodyPr wrap="square" lIns="0" tIns="0" rIns="0" bIns="0" rtlCol="0" anchor="t"/>
+          <a:lstStyle/>
+          <a:p>
+            <a:pPr marL="342900" indent="-342900">
+              <a:spcAft>
+                <a:spcPts val="600"/>
+              </a:spcAft>
+              <a:buSzPct val="100000"/>
+              <a:buChar char="•"/>
+            </a:pPr>
+            <a:r>
+              <a:rPr lang="en-US" sz="1200" dirty="0">
+                <a:solidFill>
+                  <a:schemeClr val="bg1"/>
+                </a:solidFill>
+              </a:rPr>
+              <a:t>되는 채널에 집중</a:t>
+            </a:r>
+            <a:endParaRPr lang="en-US" sz="1200" dirty="0"/>
+          </a:p>
+          <a:p>
+            <a:pPr marL="342900" indent="-342900">
+              <a:spcAft>
+                <a:spcPts val="600"/>
+              </a:spcAft>
+              <a:buSzPct val="100000"/>
+              <a:buChar char="•"/>
+            </a:pPr>
+            <a:r>
+              <a:rPr lang="en-US" sz="1200" dirty="0">
+                <a:solidFill>
+                  <a:schemeClr val="bg1"/>
+                </a:solidFill>
+              </a:rPr>
+              <a:t>작은 크리에이터와 협업</a:t>
+            </a:r>
+            <a:endParaRPr lang="en-US" sz="1200" dirty="0"/>
+          </a:p>
+          <a:p>
+            <a:pPr marL="342900" indent="-342900">
+              <a:spcAft>
+                <a:spcPts val="600"/>
+              </a:spcAft>
+              <a:buSzPct val="100000"/>
+              <a:buChar char="•"/>
+            </a:pPr>
+            <a:r>
+              <a:rPr lang="en-US" sz="1200" dirty="0">
+                <a:solidFill>
+                  <a:schemeClr val="bg1"/>
+                </a:solidFill>
+              </a:rPr>
+              <a:t>이메일·카카오로 단골 만들기</a:t>
+            </a:r>
+            <a:endParaRPr lang="en-US" sz="1200" dirty="0"/>
+          </a:p>
+        </p:txBody>
+      </p:sp>
+      <p:sp>
+        <p:nvSpPr>
+          <p:cNvPr id="15" name="Text 13"/>
+          <p:cNvSpPr txBox="1"/>
+          <p:nvPr/>
+        </p:nvSpPr>
+        <p:spPr>
+          <a:xfrm>
+            <a:off x="457200" y="4645152"/>
+            <a:ext cx="7680960" cy="274320"/>
+          </a:xfrm>
+          <a:prstGeom prst="rect">
+            <a:avLst/>
+          </a:prstGeom>
+          <a:noFill/>
+          <a:ln/>
+        </p:spPr>
+        <p:txBody>
+          <a:bodyPr wrap="square" lIns="0" tIns="0" rIns="0" bIns="0" rtlCol="0" anchor="t"/>
+          <a:lstStyle/>
+          <a:p>
+            <a:pPr indent="0" marL="0">
+              <a:buNone/>
+            </a:pPr>
+            <a:r>
+              <a:rPr lang="en-US" sz="1000" dirty="0">
+                <a:solidFill>
+                  <a:schemeClr val="accent4"/>
+                </a:solidFill>
+              </a:rPr>
+              <a:t>매주 금요일 30분: 도달 · 링크 클릭 · 가입·구매 · 광고비 · 다음 주 실험 1개</a:t>
+            </a:r>
+            <a:endParaRPr lang="en-US" sz="1000" dirty="0"/>
+          </a:p>
+        </p:txBody>
+      </p:sp>
+      <p:sp>
+        <p:nvSpPr>
+          <p:cNvPr id="25" name="Slide Number Placeholder 0"/>
+          <p:cNvSpPr>
+            <a:spLocks noGrp="1"/>
+          </p:cNvSpPr>
+          <p:nvPr>
+            <p:ph type="sldNum" sz="quarter" idx="4294967295"/>
+          </p:nvPr>
+        </p:nvSpPr>
+        <p:spPr>
+          <a:xfrm>
+            <a:off x="8321040" y="4754880"/>
+            <a:ext cx="457200" cy="274320"/>
+          </a:xfrm>
+          <a:prstGeom prst="rect">
+            <a:avLst/>
+          </a:prstGeom>
+          <a:extLst>
+            <a:ext uri="{C572A759-6A51-4108-AA02-DFA0A04FC94B}">
+              <ma14:wrappingTextBoxFlag xmlns:ma14="http://schemas.microsoft.com/office/mac/drawingml/2011/main" val="0"/>
+            </a:ext>
+          </a:extLst>
+        </p:spPr>
+        <p:txBody>
+          <a:bodyPr/>
+          <a:lstStyle>
+            <a:lvl1pPr>
+              <a:defRPr sz="1000">
+                <a:solidFill>
+                  <a:schemeClr val="accent4"/>
+                </a:solidFill>
+              </a:defRPr>
+            </a:lvl1pPr>
+          </a:lstStyle>
+          <a:p>
+            <a:pPr algn="r"/>
+            <a:fld id="{F7021451-1387-4CA6-816F-3879F97B5CBC}" type="slidenum">
+              <a:rPr b="0" lang="en-US"/>
+              <a:t>48</a:t>
+            </a:fld>
+            <a:endParaRPr lang="en-US"/>
+          </a:p>
+        </p:txBody>
+      </p:sp>
+    </p:spTree>
+  </p:cSld>
+  <p:clrMapOvr>
+    <a:masterClrMapping/>
+  </p:clrMapOvr>
+</p:sld>
+</file>
+
+<file path=ppt/slides/slide49.xml><?xml version="1.0" encoding="utf-8"?>
+<p:sld xmlns:a="http://schemas.openxmlformats.org/drawingml/2006/main" xmlns:r="http://schemas.openxmlformats.org/officeDocument/2006/relationships" xmlns:p="http://schemas.openxmlformats.org/presentationml/2006/main">
+  <p:cSld name="Slide 49">
+    <p:spTree>
+      <p:nvGrpSpPr>
+        <p:cNvPr id="1" name=""/>
+        <p:cNvGrpSpPr/>
+        <p:nvPr/>
+      </p:nvGrpSpPr>
+      <p:grpSpPr>
+        <a:xfrm>
+          <a:off x="0" y="0"/>
+          <a:ext cx="0" cy="0"/>
+          <a:chOff x="0" y="0"/>
+          <a:chExt cx="0" cy="0"/>
+        </a:xfrm>
+      </p:grpSpPr>
+      <p:sp>
+        <p:nvSpPr>
+          <p:cNvPr id="2" name="Text 0"/>
+          <p:cNvSpPr/>
+          <p:nvPr>
+            <p:ph idx="100" type="title" hasCustomPrompt="1"/>
+          </p:nvPr>
+        </p:nvSpPr>
+        <p:spPr>
+          <a:xfrm>
+            <a:off x="548640" y="1371600"/>
+            <a:ext cx="8046720" cy="1280160"/>
+          </a:xfrm>
+          <a:prstGeom prst="rect">
+            <a:avLst/>
+          </a:prstGeom>
+          <a:noFill/>
+          <a:ln/>
+        </p:spPr>
+        <p:txBody>
+          <a:bodyPr wrap="square" lIns="0" tIns="0" rIns="0" bIns="0" rtlCol="0" anchor="b"/>
+          <a:lstStyle/>
+          <a:p>
+            <a:pPr algn="l" indent="0" marL="0">
+              <a:buNone/>
+            </a:pPr>
+            <a:r>
+              <a:rPr lang="en-US" sz="4000" b="1" dirty="0">
+                <a:solidFill>
+                  <a:schemeClr val="bg1"/>
+                </a:solidFill>
+              </a:rPr>
               <a:t>안전하게, 자주 반복하기</a:t>
             </a:r>
             <a:endParaRPr lang="en-US" sz="4000" dirty="0"/>

--- a/slides/internet-business-101.pptx
+++ b/slides/internet-business-101.pptx
@@ -54,9 +54,15 @@
     <p:sldId id="302" r:id="rId48"/>
     <p:sldId id="303" r:id="rId49"/>
     <p:sldId id="304" r:id="rId50"/>
+    <p:sldId id="305" r:id="rId51"/>
+    <p:sldId id="306" r:id="rId52"/>
+    <p:sldId id="307" r:id="rId53"/>
+    <p:sldId id="308" r:id="rId54"/>
+    <p:sldId id="309" r:id="rId55"/>
+    <p:sldId id="310" r:id="rId56"/>
   </p:sldIdLst>
   <p:notesMasterIdLst>
-    <p:notesMasterId r:id="rId51"/>
+    <p:notesMasterId r:id="rId57"/>
   </p:notesMasterIdLst>
   <p:sldSz cx="9144000" cy="5143500"/>
   <p:notesSz cx="5143500" cy="9144000"/>
@@ -155,13 +161,13 @@
   <p:extLst>
     <p:ext uri="{521415D9-36F7-43E2-AB2F-B90AF26B5E84}">
       <p14:sectionLst xmlns:p14="http://schemas.microsoft.com/office/powerpoint/2010/main">
-        <p14:section name="시작" id="{92378333-d2d1-b9ce-3178-93a32a897fc6}">
+        <p14:section name="시작" id="{364d1b27-e875-43d2-f800-ad6f569d37a0}">
           <p14:sldIdLst>
             <p14:sldId id="256"/>
             <p14:sldId id="257"/>
           </p14:sldIdLst>
         </p14:section>
-        <p14:section name="큰 그림" id="{409d245e-d63d-d1c1-0cfa-994d67e0510f}">
+        <p14:section name="큰 그림" id="{e071abc0-23a6-cf4c-c2d1-81c7679ce33b}">
           <p14:sldIdLst>
             <p14:sldId id="258"/>
             <p14:sldId id="259"/>
@@ -170,13 +176,13 @@
             <p14:sldId id="262"/>
           </p14:sldIdLst>
         </p14:section>
-        <p14:section name="만들기" id="{0dc08d9a-aee0-b602-fc2c-d92142e9d3fa}">
+        <p14:section name="만들기" id="{115e535e-1b65-42d7-bded-e93aa35e3a13}">
           <p14:sldIdLst>
             <p14:sldId id="263"/>
             <p14:sldId id="264"/>
           </p14:sldIdLst>
         </p14:section>
-        <p14:section name="운영하기" id="{ab3a47b9-ef36-865c-c704-acf112ed8b24}">
+        <p14:section name="운영하기" id="{129e2bd1-189b-0265-c3b3-5dc418be27ba}">
           <p14:sldIdLst>
             <p14:sldId id="265"/>
             <p14:sldId id="266"/>
@@ -190,18 +196,18 @@
             <p14:sldId id="274"/>
           </p14:sldIdLst>
         </p14:section>
-        <p14:section name="키우기" id="{04c8a67d-7a86-ca1c-aa35-4676d7ccd5cb}">
+        <p14:section name="키우기" id="{5b97b1e9-03ca-ba8f-672d-0b06925c0c60}">
           <p14:sldIdLst>
             <p14:sldId id="275"/>
             <p14:sldId id="276"/>
           </p14:sldIdLst>
         </p14:section>
-        <p14:section name="실전" id="{11d1d42d-8101-6295-9512-c1bdd0f48013}">
+        <p14:section name="실전" id="{114daad0-c0ef-c9d9-0c2c-9dd128c7d537}">
           <p14:sldIdLst>
             <p14:sldId id="277"/>
           </p14:sldIdLst>
         </p14:section>
-        <p14:section name="여러 가지 사이트 사업" id="{7081f729-0752-8e5d-d07a-5ed32d60d222}">
+        <p14:section name="여러 가지 사이트 사업" id="{d2f9a892-c1b7-9efb-c59a-a63031bfb4e3}">
           <p14:sldIdLst>
             <p14:sldId id="278"/>
             <p14:sldId id="279"/>
@@ -212,7 +218,7 @@
             <p14:sldId id="284"/>
           </p14:sldIdLst>
         </p14:section>
-        <p14:section name="더 넓은 분류" id="{46b14099-68ed-1128-ee0a-e95c26c4b115}">
+        <p14:section name="더 넓은 분류" id="{cb4c38b9-a440-ae2d-71d1-b6609a120cd8}">
           <p14:sldIdLst>
             <p14:sldId id="285"/>
             <p14:sldId id="286"/>
@@ -223,7 +229,7 @@
             <p14:sldId id="291"/>
           </p14:sldIdLst>
         </p14:section>
-        <p14:section name="문의·광고 받기" id="{6084dcc1-3161-c67a-b52f-26f2026a8e56}">
+        <p14:section name="문의·광고 받기" id="{ad54818d-82ad-4777-9d75-001d13456a37}">
           <p14:sldIdLst>
             <p14:sldId id="292"/>
             <p14:sldId id="293"/>
@@ -232,7 +238,7 @@
             <p14:sldId id="296"/>
           </p14:sldIdLst>
         </p14:section>
-        <p14:section name="마케팅 실전" id="{2ec1711a-04c7-598d-dded-c86fc39889e8}">
+        <p14:section name="마케팅 실전" id="{bf20c87b-729e-9cd0-f199-12e7926be614}">
           <p14:sldIdLst>
             <p14:sldId id="297"/>
             <p14:sldId id="298"/>
@@ -241,7 +247,17 @@
             <p14:sldId id="301"/>
             <p14:sldId id="302"/>
             <p14:sldId id="303"/>
+          </p14:sldIdLst>
+        </p14:section>
+        <p14:section name="도메인" id="{88cd1627-b8d8-7286-e544-2dfa163bec9f}">
+          <p14:sldIdLst>
             <p14:sldId id="304"/>
+            <p14:sldId id="305"/>
+            <p14:sldId id="306"/>
+            <p14:sldId id="307"/>
+            <p14:sldId id="308"/>
+            <p14:sldId id="309"/>
+            <p14:sldId id="310"/>
           </p14:sldIdLst>
         </p14:section>
       </p14:sectionLst>
@@ -5488,6 +5504,534 @@
             <a:fld id="{F7021451-1387-4CA6-816F-3879F97B5CBC}" type="slidenum">
               <a:rPr lang="en-US"/>
               <a:t>5</a:t>
+            </a:fld>
+            <a:endParaRPr lang="en-US"/>
+          </a:p>
+        </p:txBody>
+      </p:sp>
+    </p:spTree>
+    <p:extLst>
+      <p:ext uri="{BB962C8B-B14F-4D97-AF65-F5344CB8AC3E}">
+        <p14:creationId xmlns:p14="http://schemas.microsoft.com/office/powerpoint/2010/main" val="1024086991"/>
+      </p:ext>
+    </p:extLst>
+  </p:cSld>
+  <p:clrMapOvr>
+    <a:masterClrMapping/>
+  </p:clrMapOvr>
+</p:notes>
+</file>
+
+<file path=ppt/notesSlides/notesSlide50.xml><?xml version="1.0" encoding="utf-8"?>
+<p:notes xmlns:a="http://schemas.openxmlformats.org/drawingml/2006/main" xmlns:r="http://schemas.openxmlformats.org/officeDocument/2006/relationships" xmlns:p="http://schemas.openxmlformats.org/presentationml/2006/main">
+  <p:cSld>
+    <p:spTree>
+      <p:nvGrpSpPr>
+        <p:cNvPr id="1" name=""/>
+        <p:cNvGrpSpPr/>
+        <p:nvPr/>
+      </p:nvGrpSpPr>
+      <p:grpSpPr>
+        <a:xfrm>
+          <a:off x="0" y="0"/>
+          <a:ext cx="0" cy="0"/>
+          <a:chOff x="0" y="0"/>
+          <a:chExt cx="0" cy="0"/>
+        </a:xfrm>
+      </p:grpSpPr>
+      <p:sp>
+        <p:nvSpPr>
+          <p:cNvPr id="2" name="Slide Image Placeholder 1"/>
+          <p:cNvSpPr>
+            <a:spLocks noGrp="1" noRot="1" noChangeAspect="1"/>
+          </p:cNvSpPr>
+          <p:nvPr>
+            <p:ph type="sldImg"/>
+          </p:nvPr>
+        </p:nvSpPr>
+        <p:spPr/>
+      </p:sp>
+      <p:sp>
+        <p:nvSpPr>
+          <p:cNvPr id="3" name="Notes Placeholder 2"/>
+          <p:cNvSpPr>
+            <a:spLocks noGrp="1"/>
+          </p:cNvSpPr>
+          <p:nvPr>
+            <p:ph type="body" idx="1"/>
+          </p:nvPr>
+        </p:nvSpPr>
+        <p:spPr/>
+        <p:txBody>
+          <a:bodyPr/>
+          <a:lstStyle/>
+          <a:p>
+            <a:r>
+              <a:rPr lang="en-US" dirty="0"/>
+              <a:t/>
+            </a:r>
+            <a:endParaRPr lang="en-US" dirty="0"/>
+          </a:p>
+        </p:txBody>
+      </p:sp>
+      <p:sp>
+        <p:nvSpPr>
+          <p:cNvPr id="4" name="Slide Number Placeholder 3"/>
+          <p:cNvSpPr>
+            <a:spLocks noGrp="1"/>
+          </p:cNvSpPr>
+          <p:nvPr>
+            <p:ph type="sldNum" sz="quarter" idx="10"/>
+          </p:nvPr>
+        </p:nvSpPr>
+        <p:spPr/>
+        <p:txBody>
+          <a:bodyPr/>
+          <a:lstStyle/>
+          <a:p>
+            <a:fld id="{F7021451-1387-4CA6-816F-3879F97B5CBC}" type="slidenum">
+              <a:rPr lang="en-US"/>
+              <a:t>50</a:t>
+            </a:fld>
+            <a:endParaRPr lang="en-US"/>
+          </a:p>
+        </p:txBody>
+      </p:sp>
+    </p:spTree>
+    <p:extLst>
+      <p:ext uri="{BB962C8B-B14F-4D97-AF65-F5344CB8AC3E}">
+        <p14:creationId xmlns:p14="http://schemas.microsoft.com/office/powerpoint/2010/main" val="1024086991"/>
+      </p:ext>
+    </p:extLst>
+  </p:cSld>
+  <p:clrMapOvr>
+    <a:masterClrMapping/>
+  </p:clrMapOvr>
+</p:notes>
+</file>
+
+<file path=ppt/notesSlides/notesSlide51.xml><?xml version="1.0" encoding="utf-8"?>
+<p:notes xmlns:a="http://schemas.openxmlformats.org/drawingml/2006/main" xmlns:r="http://schemas.openxmlformats.org/officeDocument/2006/relationships" xmlns:p="http://schemas.openxmlformats.org/presentationml/2006/main">
+  <p:cSld>
+    <p:spTree>
+      <p:nvGrpSpPr>
+        <p:cNvPr id="1" name=""/>
+        <p:cNvGrpSpPr/>
+        <p:nvPr/>
+      </p:nvGrpSpPr>
+      <p:grpSpPr>
+        <a:xfrm>
+          <a:off x="0" y="0"/>
+          <a:ext cx="0" cy="0"/>
+          <a:chOff x="0" y="0"/>
+          <a:chExt cx="0" cy="0"/>
+        </a:xfrm>
+      </p:grpSpPr>
+      <p:sp>
+        <p:nvSpPr>
+          <p:cNvPr id="2" name="Slide Image Placeholder 1"/>
+          <p:cNvSpPr>
+            <a:spLocks noGrp="1" noRot="1" noChangeAspect="1"/>
+          </p:cNvSpPr>
+          <p:nvPr>
+            <p:ph type="sldImg"/>
+          </p:nvPr>
+        </p:nvSpPr>
+        <p:spPr/>
+      </p:sp>
+      <p:sp>
+        <p:nvSpPr>
+          <p:cNvPr id="3" name="Notes Placeholder 2"/>
+          <p:cNvSpPr>
+            <a:spLocks noGrp="1"/>
+          </p:cNvSpPr>
+          <p:nvPr>
+            <p:ph type="body" idx="1"/>
+          </p:nvPr>
+        </p:nvSpPr>
+        <p:spPr/>
+        <p:txBody>
+          <a:bodyPr/>
+          <a:lstStyle/>
+          <a:p>
+            <a:r>
+              <a:rPr lang="en-US" dirty="0"/>
+              <a:t/>
+            </a:r>
+            <a:endParaRPr lang="en-US" dirty="0"/>
+          </a:p>
+        </p:txBody>
+      </p:sp>
+      <p:sp>
+        <p:nvSpPr>
+          <p:cNvPr id="4" name="Slide Number Placeholder 3"/>
+          <p:cNvSpPr>
+            <a:spLocks noGrp="1"/>
+          </p:cNvSpPr>
+          <p:nvPr>
+            <p:ph type="sldNum" sz="quarter" idx="10"/>
+          </p:nvPr>
+        </p:nvSpPr>
+        <p:spPr/>
+        <p:txBody>
+          <a:bodyPr/>
+          <a:lstStyle/>
+          <a:p>
+            <a:fld id="{F7021451-1387-4CA6-816F-3879F97B5CBC}" type="slidenum">
+              <a:rPr lang="en-US"/>
+              <a:t>51</a:t>
+            </a:fld>
+            <a:endParaRPr lang="en-US"/>
+          </a:p>
+        </p:txBody>
+      </p:sp>
+    </p:spTree>
+    <p:extLst>
+      <p:ext uri="{BB962C8B-B14F-4D97-AF65-F5344CB8AC3E}">
+        <p14:creationId xmlns:p14="http://schemas.microsoft.com/office/powerpoint/2010/main" val="1024086991"/>
+      </p:ext>
+    </p:extLst>
+  </p:cSld>
+  <p:clrMapOvr>
+    <a:masterClrMapping/>
+  </p:clrMapOvr>
+</p:notes>
+</file>
+
+<file path=ppt/notesSlides/notesSlide52.xml><?xml version="1.0" encoding="utf-8"?>
+<p:notes xmlns:a="http://schemas.openxmlformats.org/drawingml/2006/main" xmlns:r="http://schemas.openxmlformats.org/officeDocument/2006/relationships" xmlns:p="http://schemas.openxmlformats.org/presentationml/2006/main">
+  <p:cSld>
+    <p:spTree>
+      <p:nvGrpSpPr>
+        <p:cNvPr id="1" name=""/>
+        <p:cNvGrpSpPr/>
+        <p:nvPr/>
+      </p:nvGrpSpPr>
+      <p:grpSpPr>
+        <a:xfrm>
+          <a:off x="0" y="0"/>
+          <a:ext cx="0" cy="0"/>
+          <a:chOff x="0" y="0"/>
+          <a:chExt cx="0" cy="0"/>
+        </a:xfrm>
+      </p:grpSpPr>
+      <p:sp>
+        <p:nvSpPr>
+          <p:cNvPr id="2" name="Slide Image Placeholder 1"/>
+          <p:cNvSpPr>
+            <a:spLocks noGrp="1" noRot="1" noChangeAspect="1"/>
+          </p:cNvSpPr>
+          <p:nvPr>
+            <p:ph type="sldImg"/>
+          </p:nvPr>
+        </p:nvSpPr>
+        <p:spPr/>
+      </p:sp>
+      <p:sp>
+        <p:nvSpPr>
+          <p:cNvPr id="3" name="Notes Placeholder 2"/>
+          <p:cNvSpPr>
+            <a:spLocks noGrp="1"/>
+          </p:cNvSpPr>
+          <p:nvPr>
+            <p:ph type="body" idx="1"/>
+          </p:nvPr>
+        </p:nvSpPr>
+        <p:spPr/>
+        <p:txBody>
+          <a:bodyPr/>
+          <a:lstStyle/>
+          <a:p>
+            <a:r>
+              <a:rPr lang="en-US" dirty="0"/>
+              <a:t/>
+            </a:r>
+            <a:endParaRPr lang="en-US" dirty="0"/>
+          </a:p>
+        </p:txBody>
+      </p:sp>
+      <p:sp>
+        <p:nvSpPr>
+          <p:cNvPr id="4" name="Slide Number Placeholder 3"/>
+          <p:cNvSpPr>
+            <a:spLocks noGrp="1"/>
+          </p:cNvSpPr>
+          <p:nvPr>
+            <p:ph type="sldNum" sz="quarter" idx="10"/>
+          </p:nvPr>
+        </p:nvSpPr>
+        <p:spPr/>
+        <p:txBody>
+          <a:bodyPr/>
+          <a:lstStyle/>
+          <a:p>
+            <a:fld id="{F7021451-1387-4CA6-816F-3879F97B5CBC}" type="slidenum">
+              <a:rPr lang="en-US"/>
+              <a:t>52</a:t>
+            </a:fld>
+            <a:endParaRPr lang="en-US"/>
+          </a:p>
+        </p:txBody>
+      </p:sp>
+    </p:spTree>
+    <p:extLst>
+      <p:ext uri="{BB962C8B-B14F-4D97-AF65-F5344CB8AC3E}">
+        <p14:creationId xmlns:p14="http://schemas.microsoft.com/office/powerpoint/2010/main" val="1024086991"/>
+      </p:ext>
+    </p:extLst>
+  </p:cSld>
+  <p:clrMapOvr>
+    <a:masterClrMapping/>
+  </p:clrMapOvr>
+</p:notes>
+</file>
+
+<file path=ppt/notesSlides/notesSlide53.xml><?xml version="1.0" encoding="utf-8"?>
+<p:notes xmlns:a="http://schemas.openxmlformats.org/drawingml/2006/main" xmlns:r="http://schemas.openxmlformats.org/officeDocument/2006/relationships" xmlns:p="http://schemas.openxmlformats.org/presentationml/2006/main">
+  <p:cSld>
+    <p:spTree>
+      <p:nvGrpSpPr>
+        <p:cNvPr id="1" name=""/>
+        <p:cNvGrpSpPr/>
+        <p:nvPr/>
+      </p:nvGrpSpPr>
+      <p:grpSpPr>
+        <a:xfrm>
+          <a:off x="0" y="0"/>
+          <a:ext cx="0" cy="0"/>
+          <a:chOff x="0" y="0"/>
+          <a:chExt cx="0" cy="0"/>
+        </a:xfrm>
+      </p:grpSpPr>
+      <p:sp>
+        <p:nvSpPr>
+          <p:cNvPr id="2" name="Slide Image Placeholder 1"/>
+          <p:cNvSpPr>
+            <a:spLocks noGrp="1" noRot="1" noChangeAspect="1"/>
+          </p:cNvSpPr>
+          <p:nvPr>
+            <p:ph type="sldImg"/>
+          </p:nvPr>
+        </p:nvSpPr>
+        <p:spPr/>
+      </p:sp>
+      <p:sp>
+        <p:nvSpPr>
+          <p:cNvPr id="3" name="Notes Placeholder 2"/>
+          <p:cNvSpPr>
+            <a:spLocks noGrp="1"/>
+          </p:cNvSpPr>
+          <p:nvPr>
+            <p:ph type="body" idx="1"/>
+          </p:nvPr>
+        </p:nvSpPr>
+        <p:spPr/>
+        <p:txBody>
+          <a:bodyPr/>
+          <a:lstStyle/>
+          <a:p>
+            <a:r>
+              <a:rPr lang="en-US" dirty="0"/>
+              <a:t/>
+            </a:r>
+            <a:endParaRPr lang="en-US" dirty="0"/>
+          </a:p>
+        </p:txBody>
+      </p:sp>
+      <p:sp>
+        <p:nvSpPr>
+          <p:cNvPr id="4" name="Slide Number Placeholder 3"/>
+          <p:cNvSpPr>
+            <a:spLocks noGrp="1"/>
+          </p:cNvSpPr>
+          <p:nvPr>
+            <p:ph type="sldNum" sz="quarter" idx="10"/>
+          </p:nvPr>
+        </p:nvSpPr>
+        <p:spPr/>
+        <p:txBody>
+          <a:bodyPr/>
+          <a:lstStyle/>
+          <a:p>
+            <a:fld id="{F7021451-1387-4CA6-816F-3879F97B5CBC}" type="slidenum">
+              <a:rPr lang="en-US"/>
+              <a:t>53</a:t>
+            </a:fld>
+            <a:endParaRPr lang="en-US"/>
+          </a:p>
+        </p:txBody>
+      </p:sp>
+    </p:spTree>
+    <p:extLst>
+      <p:ext uri="{BB962C8B-B14F-4D97-AF65-F5344CB8AC3E}">
+        <p14:creationId xmlns:p14="http://schemas.microsoft.com/office/powerpoint/2010/main" val="1024086991"/>
+      </p:ext>
+    </p:extLst>
+  </p:cSld>
+  <p:clrMapOvr>
+    <a:masterClrMapping/>
+  </p:clrMapOvr>
+</p:notes>
+</file>
+
+<file path=ppt/notesSlides/notesSlide54.xml><?xml version="1.0" encoding="utf-8"?>
+<p:notes xmlns:a="http://schemas.openxmlformats.org/drawingml/2006/main" xmlns:r="http://schemas.openxmlformats.org/officeDocument/2006/relationships" xmlns:p="http://schemas.openxmlformats.org/presentationml/2006/main">
+  <p:cSld>
+    <p:spTree>
+      <p:nvGrpSpPr>
+        <p:cNvPr id="1" name=""/>
+        <p:cNvGrpSpPr/>
+        <p:nvPr/>
+      </p:nvGrpSpPr>
+      <p:grpSpPr>
+        <a:xfrm>
+          <a:off x="0" y="0"/>
+          <a:ext cx="0" cy="0"/>
+          <a:chOff x="0" y="0"/>
+          <a:chExt cx="0" cy="0"/>
+        </a:xfrm>
+      </p:grpSpPr>
+      <p:sp>
+        <p:nvSpPr>
+          <p:cNvPr id="2" name="Slide Image Placeholder 1"/>
+          <p:cNvSpPr>
+            <a:spLocks noGrp="1" noRot="1" noChangeAspect="1"/>
+          </p:cNvSpPr>
+          <p:nvPr>
+            <p:ph type="sldImg"/>
+          </p:nvPr>
+        </p:nvSpPr>
+        <p:spPr/>
+      </p:sp>
+      <p:sp>
+        <p:nvSpPr>
+          <p:cNvPr id="3" name="Notes Placeholder 2"/>
+          <p:cNvSpPr>
+            <a:spLocks noGrp="1"/>
+          </p:cNvSpPr>
+          <p:nvPr>
+            <p:ph type="body" idx="1"/>
+          </p:nvPr>
+        </p:nvSpPr>
+        <p:spPr/>
+        <p:txBody>
+          <a:bodyPr/>
+          <a:lstStyle/>
+          <a:p>
+            <a:r>
+              <a:rPr lang="en-US" dirty="0"/>
+              <a:t/>
+            </a:r>
+            <a:endParaRPr lang="en-US" dirty="0"/>
+          </a:p>
+        </p:txBody>
+      </p:sp>
+      <p:sp>
+        <p:nvSpPr>
+          <p:cNvPr id="4" name="Slide Number Placeholder 3"/>
+          <p:cNvSpPr>
+            <a:spLocks noGrp="1"/>
+          </p:cNvSpPr>
+          <p:nvPr>
+            <p:ph type="sldNum" sz="quarter" idx="10"/>
+          </p:nvPr>
+        </p:nvSpPr>
+        <p:spPr/>
+        <p:txBody>
+          <a:bodyPr/>
+          <a:lstStyle/>
+          <a:p>
+            <a:fld id="{F7021451-1387-4CA6-816F-3879F97B5CBC}" type="slidenum">
+              <a:rPr lang="en-US"/>
+              <a:t>54</a:t>
+            </a:fld>
+            <a:endParaRPr lang="en-US"/>
+          </a:p>
+        </p:txBody>
+      </p:sp>
+    </p:spTree>
+    <p:extLst>
+      <p:ext uri="{BB962C8B-B14F-4D97-AF65-F5344CB8AC3E}">
+        <p14:creationId xmlns:p14="http://schemas.microsoft.com/office/powerpoint/2010/main" val="1024086991"/>
+      </p:ext>
+    </p:extLst>
+  </p:cSld>
+  <p:clrMapOvr>
+    <a:masterClrMapping/>
+  </p:clrMapOvr>
+</p:notes>
+</file>
+
+<file path=ppt/notesSlides/notesSlide55.xml><?xml version="1.0" encoding="utf-8"?>
+<p:notes xmlns:a="http://schemas.openxmlformats.org/drawingml/2006/main" xmlns:r="http://schemas.openxmlformats.org/officeDocument/2006/relationships" xmlns:p="http://schemas.openxmlformats.org/presentationml/2006/main">
+  <p:cSld>
+    <p:spTree>
+      <p:nvGrpSpPr>
+        <p:cNvPr id="1" name=""/>
+        <p:cNvGrpSpPr/>
+        <p:nvPr/>
+      </p:nvGrpSpPr>
+      <p:grpSpPr>
+        <a:xfrm>
+          <a:off x="0" y="0"/>
+          <a:ext cx="0" cy="0"/>
+          <a:chOff x="0" y="0"/>
+          <a:chExt cx="0" cy="0"/>
+        </a:xfrm>
+      </p:grpSpPr>
+      <p:sp>
+        <p:nvSpPr>
+          <p:cNvPr id="2" name="Slide Image Placeholder 1"/>
+          <p:cNvSpPr>
+            <a:spLocks noGrp="1" noRot="1" noChangeAspect="1"/>
+          </p:cNvSpPr>
+          <p:nvPr>
+            <p:ph type="sldImg"/>
+          </p:nvPr>
+        </p:nvSpPr>
+        <p:spPr/>
+      </p:sp>
+      <p:sp>
+        <p:nvSpPr>
+          <p:cNvPr id="3" name="Notes Placeholder 2"/>
+          <p:cNvSpPr>
+            <a:spLocks noGrp="1"/>
+          </p:cNvSpPr>
+          <p:nvPr>
+            <p:ph type="body" idx="1"/>
+          </p:nvPr>
+        </p:nvSpPr>
+        <p:spPr/>
+        <p:txBody>
+          <a:bodyPr/>
+          <a:lstStyle/>
+          <a:p>
+            <a:r>
+              <a:rPr lang="en-US" dirty="0"/>
+              <a:t/>
+            </a:r>
+            <a:endParaRPr lang="en-US" dirty="0"/>
+          </a:p>
+        </p:txBody>
+      </p:sp>
+      <p:sp>
+        <p:nvSpPr>
+          <p:cNvPr id="4" name="Slide Number Placeholder 3"/>
+          <p:cNvSpPr>
+            <a:spLocks noGrp="1"/>
+          </p:cNvSpPr>
+          <p:nvPr>
+            <p:ph type="sldNum" sz="quarter" idx="10"/>
+          </p:nvPr>
+        </p:nvSpPr>
+        <p:spPr/>
+        <p:txBody>
+          <a:bodyPr/>
+          <a:lstStyle/>
+          <a:p>
+            <a:fld id="{F7021451-1387-4CA6-816F-3879F97B5CBC}" type="slidenum">
+              <a:rPr lang="en-US"/>
+              <a:t>55</a:t>
             </a:fld>
             <a:endParaRPr lang="en-US"/>
           </a:p>
@@ -38177,7 +38721,7 @@
                   <a:schemeClr val="bg1"/>
                 </a:solidFill>
               </a:rPr>
-              <a:t>안전하게, 자주 반복하기</a:t>
+              <a:t>도메인: 주소와 업계 지식</a:t>
             </a:r>
             <a:endParaRPr lang="en-US" sz="4000" dirty="0"/>
           </a:p>
@@ -38215,21 +38759,7 @@
                   <a:schemeClr val="bg2"/>
                 </a:solidFill>
               </a:rPr>
-              <a:t>기획 → 백업 → 연습용 사이트에서 수정 → 확인 → 배포 → 감시 → 숫자 보기 → 다시 기획</a:t>
-            </a:r>
-            <a:endParaRPr lang="en-US" sz="1800" dirty="0"/>
-          </a:p>
-          <a:p>
-            <a:pPr algn="l" indent="0" marL="0">
-              <a:buNone/>
-            </a:pPr>
-            <a:r>
-              <a:rPr lang="en-US" sz="1800" dirty="0">
-                <a:solidFill>
-                  <a:schemeClr val="bg2"/>
-                </a:solidFill>
-              </a:rPr>
-              <a:t>다음 할 일: docs/13-practice-scenario.md 를 읽고 15장 퀴즈 풀기</a:t>
+              <a:t>도메인 이름(사이트 주소) 고르기·연결·지키기 · 업계 지식(도메인 지식) 분야별 흐름 — 34–35장</a:t>
             </a:r>
             <a:endParaRPr lang="en-US" sz="1800" dirty="0"/>
           </a:p>
@@ -39131,6 +39661,3921 @@
               <a:t>5</a:t>
             </a:fld>
             <a:endParaRPr lang="en-US"/>
+          </a:p>
+        </p:txBody>
+      </p:sp>
+    </p:spTree>
+  </p:cSld>
+  <p:clrMapOvr>
+    <a:masterClrMapping/>
+  </p:clrMapOvr>
+</p:sld>
+</file>
+
+<file path=ppt/slides/slide50.xml><?xml version="1.0" encoding="utf-8"?>
+<p:sld xmlns:a="http://schemas.openxmlformats.org/drawingml/2006/main" xmlns:r="http://schemas.openxmlformats.org/officeDocument/2006/relationships" xmlns:p="http://schemas.openxmlformats.org/presentationml/2006/main">
+  <p:cSld name="Slide 50">
+    <p:spTree>
+      <p:nvGrpSpPr>
+        <p:cNvPr id="1" name=""/>
+        <p:cNvGrpSpPr/>
+        <p:nvPr/>
+      </p:nvGrpSpPr>
+      <p:grpSpPr>
+        <a:xfrm>
+          <a:off x="0" y="0"/>
+          <a:ext cx="0" cy="0"/>
+          <a:chOff x="0" y="0"/>
+          <a:chExt cx="0" cy="0"/>
+        </a:xfrm>
+      </p:grpSpPr>
+      <p:sp>
+        <p:nvSpPr>
+          <p:cNvPr id="2" name="Text 0"/>
+          <p:cNvSpPr/>
+          <p:nvPr>
+            <p:ph idx="100" type="title" hasCustomPrompt="1"/>
+          </p:nvPr>
+        </p:nvSpPr>
+        <p:spPr>
+          <a:xfrm>
+            <a:off x="457200" y="274320"/>
+            <a:ext cx="8229600" cy="685800"/>
+          </a:xfrm>
+          <a:prstGeom prst="rect">
+            <a:avLst/>
+          </a:prstGeom>
+          <a:noFill/>
+          <a:ln/>
+        </p:spPr>
+        <p:txBody>
+          <a:bodyPr wrap="square" lIns="0" tIns="0" rIns="0" bIns="0" rtlCol="0" anchor="ctr"/>
+          <a:lstStyle/>
+          <a:p>
+            <a:pPr indent="0" marL="0">
+              <a:buNone/>
+            </a:pPr>
+            <a:r>
+              <a:rPr lang="en-US" sz="2800" b="1" dirty="0">
+                <a:solidFill>
+                  <a:schemeClr val="tx2"/>
+                </a:solidFill>
+              </a:rPr>
+              <a:t>도메인 주소 읽기와 고르기</a:t>
+            </a:r>
+            <a:endParaRPr lang="en-US" sz="2800" dirty="0"/>
+          </a:p>
+        </p:txBody>
+      </p:sp>
+      <p:sp>
+        <p:nvSpPr>
+          <p:cNvPr id="3" name="urlbar"/>
+          <p:cNvSpPr/>
+          <p:nvPr/>
+        </p:nvSpPr>
+        <p:spPr>
+          <a:xfrm>
+            <a:off x="457200" y="1188720"/>
+            <a:ext cx="8229600" cy="822960"/>
+          </a:xfrm>
+          <a:prstGeom prst="roundRect">
+            <a:avLst>
+              <a:gd name="adj" fmla="val 8889"/>
+            </a:avLst>
+          </a:prstGeom>
+          <a:solidFill>
+            <a:schemeClr val="tx1"/>
+          </a:solidFill>
+          <a:ln/>
+        </p:spPr>
+      </p:sp>
+      <p:sp>
+        <p:nvSpPr>
+          <p:cNvPr id="4" name="Text 2"/>
+          <p:cNvSpPr txBox="1"/>
+          <p:nvPr/>
+        </p:nvSpPr>
+        <p:spPr>
+          <a:xfrm>
+            <a:off x="731520" y="1188720"/>
+            <a:ext cx="7680960" cy="822960"/>
+          </a:xfrm>
+          <a:prstGeom prst="rect">
+            <a:avLst/>
+          </a:prstGeom>
+          <a:noFill/>
+          <a:ln/>
+        </p:spPr>
+        <p:txBody>
+          <a:bodyPr wrap="square" lIns="0" tIns="0" rIns="0" bIns="0" rtlCol="0" anchor="ctr"/>
+          <a:lstStyle/>
+          <a:p>
+            <a:pPr indent="0" marL="0">
+              <a:buNone/>
+            </a:pPr>
+            <a:r>
+              <a:rPr lang="en-US" sz="2400" dirty="0">
+                <a:solidFill>
+                  <a:schemeClr val="accent4"/>
+                </a:solidFill>
+                <a:latin typeface="Courier New" pitchFamily="34" charset="0"/>
+                <a:ea typeface="Courier New" pitchFamily="34" charset="-122"/>
+                <a:cs typeface="Courier New" pitchFamily="34" charset="-120"/>
+              </a:rPr>
+              <a:t>https://</a:t>
+            </a:r>
+            <a:pPr indent="0" marL="0">
+              <a:buNone/>
+            </a:pPr>
+            <a:r>
+              <a:rPr lang="en-US" sz="2400" b="1" dirty="0">
+                <a:solidFill>
+                  <a:schemeClr val="accent6"/>
+                </a:solidFill>
+                <a:latin typeface="Courier New" pitchFamily="34" charset="0"/>
+                <a:ea typeface="Courier New" pitchFamily="34" charset="-122"/>
+                <a:cs typeface="Courier New" pitchFamily="34" charset="-120"/>
+              </a:rPr>
+              <a:t>shop</a:t>
+            </a:r>
+            <a:pPr indent="0" marL="0">
+              <a:buNone/>
+            </a:pPr>
+            <a:r>
+              <a:rPr lang="en-US" sz="2400" dirty="0">
+                <a:solidFill>
+                  <a:schemeClr val="bg1"/>
+                </a:solidFill>
+                <a:latin typeface="Courier New" pitchFamily="34" charset="0"/>
+                <a:ea typeface="Courier New" pitchFamily="34" charset="-122"/>
+                <a:cs typeface="Courier New" pitchFamily="34" charset="-120"/>
+              </a:rPr>
+              <a:t>.</a:t>
+            </a:r>
+            <a:pPr indent="0" marL="0">
+              <a:buNone/>
+            </a:pPr>
+            <a:r>
+              <a:rPr lang="en-US" sz="2400" b="1" dirty="0">
+                <a:solidFill>
+                  <a:schemeClr val="bg1"/>
+                </a:solidFill>
+                <a:latin typeface="Courier New" pitchFamily="34" charset="0"/>
+                <a:ea typeface="Courier New" pitchFamily="34" charset="-122"/>
+                <a:cs typeface="Courier New" pitchFamily="34" charset="-120"/>
+              </a:rPr>
+              <a:t>granolalab</a:t>
+            </a:r>
+            <a:pPr indent="0" marL="0">
+              <a:buNone/>
+            </a:pPr>
+            <a:r>
+              <a:rPr lang="en-US" sz="2400" b="1" dirty="0">
+                <a:solidFill>
+                  <a:schemeClr val="accent2"/>
+                </a:solidFill>
+                <a:latin typeface="Courier New" pitchFamily="34" charset="0"/>
+                <a:ea typeface="Courier New" pitchFamily="34" charset="-122"/>
+                <a:cs typeface="Courier New" pitchFamily="34" charset="-120"/>
+              </a:rPr>
+              <a:t>.co.kr</a:t>
+            </a:r>
+            <a:pPr indent="0" marL="0">
+              <a:buNone/>
+            </a:pPr>
+            <a:r>
+              <a:rPr lang="en-US" sz="2400" dirty="0">
+                <a:solidFill>
+                  <a:schemeClr val="accent4"/>
+                </a:solidFill>
+                <a:latin typeface="Courier New" pitchFamily="34" charset="0"/>
+                <a:ea typeface="Courier New" pitchFamily="34" charset="-122"/>
+                <a:cs typeface="Courier New" pitchFamily="34" charset="-120"/>
+              </a:rPr>
+              <a:t>/products</a:t>
+            </a:r>
+            <a:endParaRPr lang="en-US" sz="2400" dirty="0"/>
+          </a:p>
+        </p:txBody>
+      </p:sp>
+      <p:sp>
+        <p:nvSpPr>
+          <p:cNvPr id="5" name="card"/>
+          <p:cNvSpPr/>
+          <p:nvPr/>
+        </p:nvSpPr>
+        <p:spPr>
+          <a:xfrm>
+            <a:off x="457200" y="2240280"/>
+            <a:ext cx="2606040" cy="914400"/>
+          </a:xfrm>
+          <a:prstGeom prst="roundRect">
+            <a:avLst>
+              <a:gd name="adj" fmla="val 8000"/>
+            </a:avLst>
+          </a:prstGeom>
+          <a:solidFill>
+            <a:schemeClr val="bg2"/>
+          </a:solidFill>
+          <a:ln/>
+        </p:spPr>
+      </p:sp>
+      <p:sp>
+        <p:nvSpPr>
+          <p:cNvPr id="6" name="Text 4"/>
+          <p:cNvSpPr txBox="1"/>
+          <p:nvPr/>
+        </p:nvSpPr>
+        <p:spPr>
+          <a:xfrm>
+            <a:off x="640080" y="2286000"/>
+            <a:ext cx="2286000" cy="822960"/>
+          </a:xfrm>
+          <a:prstGeom prst="rect">
+            <a:avLst/>
+          </a:prstGeom>
+          <a:noFill/>
+          <a:ln/>
+        </p:spPr>
+        <p:txBody>
+          <a:bodyPr wrap="square" lIns="0" tIns="0" rIns="0" bIns="0" rtlCol="0" anchor="ctr"/>
+          <a:lstStyle/>
+          <a:p>
+            <a:pPr indent="0" marL="0">
+              <a:buNone/>
+            </a:pPr>
+            <a:r>
+              <a:rPr lang="en-US" sz="1500" b="1" dirty="0">
+                <a:solidFill>
+                  <a:schemeClr val="accent3"/>
+                </a:solidFill>
+              </a:rPr>
+              <a:t>서브도메인</a:t>
+            </a:r>
+            <a:endParaRPr lang="en-US" sz="1500" dirty="0"/>
+          </a:p>
+          <a:p>
+            <a:pPr indent="0" marL="0">
+              <a:buNone/>
+            </a:pPr>
+            <a:r>
+              <a:rPr lang="en-US" sz="1200" dirty="0">
+                <a:solidFill>
+                  <a:schemeClr val="tx1"/>
+                </a:solidFill>
+              </a:rPr>
+              <a:t>shop — 마음대로 추가</a:t>
+            </a:r>
+            <a:endParaRPr lang="en-US" sz="1500" dirty="0"/>
+          </a:p>
+        </p:txBody>
+      </p:sp>
+      <p:sp>
+        <p:nvSpPr>
+          <p:cNvPr id="7" name="card"/>
+          <p:cNvSpPr/>
+          <p:nvPr/>
+        </p:nvSpPr>
+        <p:spPr>
+          <a:xfrm>
+            <a:off x="3246120" y="2240280"/>
+            <a:ext cx="2606040" cy="914400"/>
+          </a:xfrm>
+          <a:prstGeom prst="roundRect">
+            <a:avLst>
+              <a:gd name="adj" fmla="val 8000"/>
+            </a:avLst>
+          </a:prstGeom>
+          <a:solidFill>
+            <a:schemeClr val="bg2"/>
+          </a:solidFill>
+          <a:ln/>
+        </p:spPr>
+      </p:sp>
+      <p:sp>
+        <p:nvSpPr>
+          <p:cNvPr id="8" name="Text 6"/>
+          <p:cNvSpPr txBox="1"/>
+          <p:nvPr/>
+        </p:nvSpPr>
+        <p:spPr>
+          <a:xfrm>
+            <a:off x="3429000" y="2286000"/>
+            <a:ext cx="2286000" cy="822960"/>
+          </a:xfrm>
+          <a:prstGeom prst="rect">
+            <a:avLst/>
+          </a:prstGeom>
+          <a:noFill/>
+          <a:ln/>
+        </p:spPr>
+        <p:txBody>
+          <a:bodyPr wrap="square" lIns="0" tIns="0" rIns="0" bIns="0" rtlCol="0" anchor="ctr"/>
+          <a:lstStyle/>
+          <a:p>
+            <a:pPr indent="0" marL="0">
+              <a:buNone/>
+            </a:pPr>
+            <a:r>
+              <a:rPr lang="en-US" sz="1500" b="1" dirty="0">
+                <a:solidFill>
+                  <a:schemeClr val="tx2"/>
+                </a:solidFill>
+              </a:rPr>
+              <a:t>도메인 이름</a:t>
+            </a:r>
+            <a:endParaRPr lang="en-US" sz="1500" dirty="0"/>
+          </a:p>
+          <a:p>
+            <a:pPr indent="0" marL="0">
+              <a:buNone/>
+            </a:pPr>
+            <a:r>
+              <a:rPr lang="en-US" sz="1200" dirty="0">
+                <a:solidFill>
+                  <a:schemeClr val="tx1"/>
+                </a:solidFill>
+              </a:rPr>
+              <a:t>granolalab — 내가 빌린 이름</a:t>
+            </a:r>
+            <a:endParaRPr lang="en-US" sz="1500" dirty="0"/>
+          </a:p>
+        </p:txBody>
+      </p:sp>
+      <p:sp>
+        <p:nvSpPr>
+          <p:cNvPr id="9" name="card"/>
+          <p:cNvSpPr/>
+          <p:nvPr/>
+        </p:nvSpPr>
+        <p:spPr>
+          <a:xfrm>
+            <a:off x="6035040" y="2240280"/>
+            <a:ext cx="2606040" cy="914400"/>
+          </a:xfrm>
+          <a:prstGeom prst="roundRect">
+            <a:avLst>
+              <a:gd name="adj" fmla="val 8000"/>
+            </a:avLst>
+          </a:prstGeom>
+          <a:solidFill>
+            <a:schemeClr val="bg2"/>
+          </a:solidFill>
+          <a:ln/>
+        </p:spPr>
+      </p:sp>
+      <p:sp>
+        <p:nvSpPr>
+          <p:cNvPr id="10" name="Text 8"/>
+          <p:cNvSpPr txBox="1"/>
+          <p:nvPr/>
+        </p:nvSpPr>
+        <p:spPr>
+          <a:xfrm>
+            <a:off x="6217920" y="2286000"/>
+            <a:ext cx="2286000" cy="822960"/>
+          </a:xfrm>
+          <a:prstGeom prst="rect">
+            <a:avLst/>
+          </a:prstGeom>
+          <a:noFill/>
+          <a:ln/>
+        </p:spPr>
+        <p:txBody>
+          <a:bodyPr wrap="square" lIns="0" tIns="0" rIns="0" bIns="0" rtlCol="0" anchor="ctr"/>
+          <a:lstStyle/>
+          <a:p>
+            <a:pPr indent="0" marL="0">
+              <a:buNone/>
+            </a:pPr>
+            <a:r>
+              <a:rPr lang="en-US" sz="1500" b="1" dirty="0">
+                <a:solidFill>
+                  <a:schemeClr val="accent2"/>
+                </a:solidFill>
+              </a:rPr>
+              <a:t>TLD</a:t>
+            </a:r>
+            <a:endParaRPr lang="en-US" sz="1500" dirty="0"/>
+          </a:p>
+          <a:p>
+            <a:pPr indent="0" marL="0">
+              <a:buNone/>
+            </a:pPr>
+            <a:r>
+              <a:rPr lang="en-US" sz="1200" dirty="0">
+                <a:solidFill>
+                  <a:schemeClr val="tx1"/>
+                </a:solidFill>
+              </a:rPr>
+              <a:t>.co.kr — 종류·나라</a:t>
+            </a:r>
+            <a:endParaRPr lang="en-US" sz="1500" dirty="0"/>
+          </a:p>
+        </p:txBody>
+      </p:sp>
+      <p:sp>
+        <p:nvSpPr>
+          <p:cNvPr id="11" name="Text 9"/>
+          <p:cNvSpPr txBox="1"/>
+          <p:nvPr/>
+        </p:nvSpPr>
+        <p:spPr>
+          <a:xfrm>
+            <a:off x="457200" y="3383280"/>
+            <a:ext cx="8229600" cy="1097280"/>
+          </a:xfrm>
+          <a:prstGeom prst="rect">
+            <a:avLst/>
+          </a:prstGeom>
+          <a:noFill/>
+          <a:ln/>
+        </p:spPr>
+        <p:txBody>
+          <a:bodyPr wrap="square" lIns="0" tIns="0" rIns="0" bIns="0" rtlCol="0" anchor="t"/>
+          <a:lstStyle/>
+          <a:p>
+            <a:pPr marL="342900" indent="-342900">
+              <a:spcAft>
+                <a:spcPts val="600"/>
+              </a:spcAft>
+              <a:buSzPct val="100000"/>
+              <a:buChar char="•"/>
+            </a:pPr>
+            <a:r>
+              <a:rPr lang="en-US" sz="1300" dirty="0">
+                <a:solidFill>
+                  <a:schemeClr val="tx1"/>
+                </a:solidFill>
+              </a:rPr>
+              <a:t>한국 손님 위주 → .kr / .co.kr, 해외도 → .com</a:t>
+            </a:r>
+            <a:endParaRPr lang="en-US" sz="1300" dirty="0"/>
+          </a:p>
+          <a:p>
+            <a:pPr marL="342900" indent="-342900">
+              <a:spcAft>
+                <a:spcPts val="600"/>
+              </a:spcAft>
+              <a:buSzPct val="100000"/>
+              <a:buChar char="•"/>
+            </a:pPr>
+            <a:r>
+              <a:rPr lang="en-US" sz="1300" dirty="0">
+                <a:solidFill>
+                  <a:schemeClr val="tx1"/>
+                </a:solidFill>
+              </a:rPr>
+              <a:t>짧고 말로 불러도 헷갈리지 않게 (하이픈·숫자 피하기)</a:t>
+            </a:r>
+            <a:endParaRPr lang="en-US" sz="1300" dirty="0"/>
+          </a:p>
+          <a:p>
+            <a:pPr marL="342900" indent="-342900">
+              <a:spcAft>
+                <a:spcPts val="600"/>
+              </a:spcAft>
+              <a:buSzPct val="100000"/>
+              <a:buChar char="•"/>
+            </a:pPr>
+            <a:r>
+              <a:rPr lang="en-US" sz="1300" dirty="0">
+                <a:solidFill>
+                  <a:schemeClr val="tx1"/>
+                </a:solidFill>
+              </a:rPr>
+              <a:t>첫해 할인보다 갱신 가격 확인 · 상표 검색 · 방어 등록</a:t>
+            </a:r>
+            <a:endParaRPr lang="en-US" sz="1300" dirty="0"/>
+          </a:p>
+        </p:txBody>
+      </p:sp>
+      <p:sp>
+        <p:nvSpPr>
+          <p:cNvPr id="25" name="Slide Number Placeholder 0"/>
+          <p:cNvSpPr>
+            <a:spLocks noGrp="1"/>
+          </p:cNvSpPr>
+          <p:nvPr>
+            <p:ph type="sldNum" sz="quarter" idx="4294967295"/>
+          </p:nvPr>
+        </p:nvSpPr>
+        <p:spPr>
+          <a:xfrm>
+            <a:off x="8321040" y="4754880"/>
+            <a:ext cx="457200" cy="274320"/>
+          </a:xfrm>
+          <a:prstGeom prst="rect">
+            <a:avLst/>
+          </a:prstGeom>
+          <a:extLst>
+            <a:ext uri="{C572A759-6A51-4108-AA02-DFA0A04FC94B}">
+              <ma14:wrappingTextBoxFlag xmlns:ma14="http://schemas.microsoft.com/office/mac/drawingml/2011/main" val="0"/>
+            </a:ext>
+          </a:extLst>
+        </p:spPr>
+        <p:txBody>
+          <a:bodyPr/>
+          <a:lstStyle>
+            <a:lvl1pPr>
+              <a:defRPr sz="1000">
+                <a:solidFill>
+                  <a:schemeClr val="accent4"/>
+                </a:solidFill>
+              </a:defRPr>
+            </a:lvl1pPr>
+          </a:lstStyle>
+          <a:p>
+            <a:pPr algn="r"/>
+            <a:fld id="{F7021451-1387-4CA6-816F-3879F97B5CBC}" type="slidenum">
+              <a:rPr b="0" lang="en-US"/>
+              <a:t>50</a:t>
+            </a:fld>
+            <a:endParaRPr lang="en-US"/>
+          </a:p>
+        </p:txBody>
+      </p:sp>
+    </p:spTree>
+  </p:cSld>
+  <p:clrMapOvr>
+    <a:masterClrMapping/>
+  </p:clrMapOvr>
+</p:sld>
+</file>
+
+<file path=ppt/slides/slide51.xml><?xml version="1.0" encoding="utf-8"?>
+<p:sld xmlns:a="http://schemas.openxmlformats.org/drawingml/2006/main" xmlns:r="http://schemas.openxmlformats.org/officeDocument/2006/relationships" xmlns:p="http://schemas.openxmlformats.org/presentationml/2006/main">
+  <p:cSld name="Slide 51">
+    <p:spTree>
+      <p:nvGrpSpPr>
+        <p:cNvPr id="1" name=""/>
+        <p:cNvGrpSpPr/>
+        <p:nvPr/>
+      </p:nvGrpSpPr>
+      <p:grpSpPr>
+        <a:xfrm>
+          <a:off x="0" y="0"/>
+          <a:ext cx="0" cy="0"/>
+          <a:chOff x="0" y="0"/>
+          <a:chExt cx="0" cy="0"/>
+        </a:xfrm>
+      </p:grpSpPr>
+      <p:sp>
+        <p:nvSpPr>
+          <p:cNvPr id="2" name="Text 0"/>
+          <p:cNvSpPr/>
+          <p:nvPr>
+            <p:ph idx="100" type="title" hasCustomPrompt="1"/>
+          </p:nvPr>
+        </p:nvSpPr>
+        <p:spPr>
+          <a:xfrm>
+            <a:off x="457200" y="274320"/>
+            <a:ext cx="8229600" cy="685800"/>
+          </a:xfrm>
+          <a:prstGeom prst="rect">
+            <a:avLst/>
+          </a:prstGeom>
+          <a:noFill/>
+          <a:ln/>
+        </p:spPr>
+        <p:txBody>
+          <a:bodyPr wrap="square" lIns="0" tIns="0" rIns="0" bIns="0" rtlCol="0" anchor="ctr"/>
+          <a:lstStyle/>
+          <a:p>
+            <a:pPr indent="0" marL="0">
+              <a:buNone/>
+            </a:pPr>
+            <a:r>
+              <a:rPr lang="en-US" sz="2800" b="1" dirty="0">
+                <a:solidFill>
+                  <a:schemeClr val="tx2"/>
+                </a:solidFill>
+              </a:rPr>
+              <a:t>도메인은 빌리는 것: 연결하고 지키기</a:t>
+            </a:r>
+            <a:endParaRPr lang="en-US" sz="2800" dirty="0"/>
+          </a:p>
+        </p:txBody>
+      </p:sp>
+      <p:sp>
+        <p:nvSpPr>
+          <p:cNvPr id="3" name="Text 1"/>
+          <p:cNvSpPr txBox="1"/>
+          <p:nvPr/>
+        </p:nvSpPr>
+        <p:spPr>
+          <a:xfrm>
+            <a:off x="457200" y="1188720"/>
+            <a:ext cx="3840480" cy="365760"/>
+          </a:xfrm>
+          <a:prstGeom prst="rect">
+            <a:avLst/>
+          </a:prstGeom>
+          <a:noFill/>
+          <a:ln/>
+        </p:spPr>
+        <p:txBody>
+          <a:bodyPr wrap="square" lIns="0" tIns="0" rIns="0" bIns="0" rtlCol="0" anchor="t"/>
+          <a:lstStyle/>
+          <a:p>
+            <a:pPr indent="0" marL="0">
+              <a:buNone/>
+            </a:pPr>
+            <a:r>
+              <a:rPr lang="en-US" sz="1600" b="1" dirty="0">
+                <a:solidFill>
+                  <a:schemeClr val="accent2"/>
+                </a:solidFill>
+              </a:rPr>
+              <a:t>사자마자 할 일</a:t>
+            </a:r>
+            <a:endParaRPr lang="en-US" sz="1600" dirty="0"/>
+          </a:p>
+        </p:txBody>
+      </p:sp>
+      <p:sp>
+        <p:nvSpPr>
+          <p:cNvPr id="4" name="Text 2"/>
+          <p:cNvSpPr txBox="1"/>
+          <p:nvPr/>
+        </p:nvSpPr>
+        <p:spPr>
+          <a:xfrm>
+            <a:off x="457200" y="1645920"/>
+            <a:ext cx="3931920" cy="2651760"/>
+          </a:xfrm>
+          <a:prstGeom prst="rect">
+            <a:avLst/>
+          </a:prstGeom>
+          <a:noFill/>
+          <a:ln/>
+        </p:spPr>
+        <p:txBody>
+          <a:bodyPr wrap="square" lIns="0" tIns="0" rIns="0" bIns="0" rtlCol="0" anchor="t"/>
+          <a:lstStyle/>
+          <a:p>
+            <a:pPr marL="342900" indent="-342900">
+              <a:spcAft>
+                <a:spcPts val="800"/>
+              </a:spcAft>
+              <a:buSzPct val="100000"/>
+              <a:buChar char="•"/>
+            </a:pPr>
+            <a:r>
+              <a:rPr lang="en-US" sz="1400" dirty="0">
+                <a:solidFill>
+                  <a:schemeClr val="tx1"/>
+                </a:solidFill>
+              </a:rPr>
+              <a:t>내 명의 · 공용 이메일</a:t>
+            </a:r>
+            <a:endParaRPr lang="en-US" sz="1400" dirty="0"/>
+          </a:p>
+          <a:p>
+            <a:pPr marL="342900" indent="-342900">
+              <a:spcAft>
+                <a:spcPts val="800"/>
+              </a:spcAft>
+              <a:buSzPct val="100000"/>
+              <a:buChar char="•"/>
+            </a:pPr>
+            <a:r>
+              <a:rPr lang="en-US" sz="1400" dirty="0">
+                <a:solidFill>
+                  <a:schemeClr val="tx1"/>
+                </a:solidFill>
+              </a:rPr>
+              <a:t>자동 갱신 ON + 카드 만료일 확인</a:t>
+            </a:r>
+            <a:endParaRPr lang="en-US" sz="1400" dirty="0"/>
+          </a:p>
+          <a:p>
+            <a:pPr marL="342900" indent="-342900">
+              <a:spcAft>
+                <a:spcPts val="800"/>
+              </a:spcAft>
+              <a:buSzPct val="100000"/>
+              <a:buChar char="•"/>
+            </a:pPr>
+            <a:r>
+              <a:rPr lang="en-US" sz="1400" dirty="0">
+                <a:solidFill>
+                  <a:schemeClr val="tx1"/>
+                </a:solidFill>
+              </a:rPr>
+              <a:t>등록 업체 2단계 인증 · 도메인 잠금</a:t>
+            </a:r>
+            <a:endParaRPr lang="en-US" sz="1400" dirty="0"/>
+          </a:p>
+          <a:p>
+            <a:pPr marL="342900" indent="-342900">
+              <a:spcAft>
+                <a:spcPts val="800"/>
+              </a:spcAft>
+              <a:buSzPct val="100000"/>
+              <a:buChar char="•"/>
+            </a:pPr>
+            <a:r>
+              <a:rPr lang="en-US" sz="1400" dirty="0">
+                <a:solidFill>
+                  <a:schemeClr val="tx1"/>
+                </a:solidFill>
+              </a:rPr>
+              <a:t>DNS: A · CNAME(사이트), MX · TXT(메일)</a:t>
+            </a:r>
+            <a:endParaRPr lang="en-US" sz="1400" dirty="0"/>
+          </a:p>
+          <a:p>
+            <a:pPr marL="342900" indent="-342900">
+              <a:spcAft>
+                <a:spcPts val="800"/>
+              </a:spcAft>
+              <a:buSzPct val="100000"/>
+              <a:buChar char="•"/>
+            </a:pPr>
+            <a:r>
+              <a:rPr lang="en-US" sz="1400" dirty="0">
+                <a:solidFill>
+                  <a:schemeClr val="tx1"/>
+                </a:solidFill>
+              </a:rPr>
+              <a:t>바꾸기 전 DNS 설정 캡처</a:t>
+            </a:r>
+            <a:endParaRPr lang="en-US" sz="1400" dirty="0"/>
+          </a:p>
+        </p:txBody>
+      </p:sp>
+      <p:sp>
+        <p:nvSpPr>
+          <p:cNvPr id="5" name="card"/>
+          <p:cNvSpPr/>
+          <p:nvPr/>
+        </p:nvSpPr>
+        <p:spPr>
+          <a:xfrm>
+            <a:off x="4572000" y="1188720"/>
+            <a:ext cx="4114800" cy="3200400"/>
+          </a:xfrm>
+          <a:prstGeom prst="roundRect">
+            <a:avLst>
+              <a:gd name="adj" fmla="val 2286"/>
+            </a:avLst>
+          </a:prstGeom>
+          <a:solidFill>
+            <a:schemeClr val="bg2"/>
+          </a:solidFill>
+          <a:ln/>
+        </p:spPr>
+      </p:sp>
+      <p:sp>
+        <p:nvSpPr>
+          <p:cNvPr id="6" name="Text 4"/>
+          <p:cNvSpPr txBox="1"/>
+          <p:nvPr/>
+        </p:nvSpPr>
+        <p:spPr>
+          <a:xfrm>
+            <a:off x="4800600" y="1325880"/>
+            <a:ext cx="3657600" cy="365760"/>
+          </a:xfrm>
+          <a:prstGeom prst="rect">
+            <a:avLst/>
+          </a:prstGeom>
+          <a:noFill/>
+          <a:ln/>
+        </p:spPr>
+        <p:txBody>
+          <a:bodyPr wrap="square" lIns="0" tIns="0" rIns="0" bIns="0" rtlCol="0" anchor="t"/>
+          <a:lstStyle/>
+          <a:p>
+            <a:pPr indent="0" marL="0">
+              <a:buNone/>
+            </a:pPr>
+            <a:r>
+              <a:rPr lang="en-US" sz="1500" b="1" dirty="0">
+                <a:solidFill>
+                  <a:schemeClr val="tx2"/>
+                </a:solidFill>
+              </a:rPr>
+              <a:t>만료되면 (gTLD 기준, 대략)</a:t>
+            </a:r>
+            <a:endParaRPr lang="en-US" sz="1500" dirty="0"/>
+          </a:p>
+        </p:txBody>
+      </p:sp>
+      <p:sp>
+        <p:nvSpPr>
+          <p:cNvPr id="7" name="exp0"/>
+          <p:cNvSpPr/>
+          <p:nvPr/>
+        </p:nvSpPr>
+        <p:spPr>
+          <a:xfrm>
+            <a:off x="4800600" y="1892808"/>
+            <a:ext cx="274320" cy="274320"/>
+          </a:xfrm>
+          <a:prstGeom prst="ellipse">
+            <a:avLst/>
+          </a:prstGeom>
+          <a:solidFill>
+            <a:srgbClr val="3E9B6B"/>
+          </a:solidFill>
+          <a:ln/>
+        </p:spPr>
+      </p:sp>
+      <p:sp>
+        <p:nvSpPr>
+          <p:cNvPr id="8" name="Text 6"/>
+          <p:cNvSpPr txBox="1"/>
+          <p:nvPr/>
+        </p:nvSpPr>
+        <p:spPr>
+          <a:xfrm>
+            <a:off x="5212080" y="1783080"/>
+            <a:ext cx="3383280" cy="548640"/>
+          </a:xfrm>
+          <a:prstGeom prst="rect">
+            <a:avLst/>
+          </a:prstGeom>
+          <a:noFill/>
+          <a:ln/>
+        </p:spPr>
+        <p:txBody>
+          <a:bodyPr wrap="square" lIns="0" tIns="0" rIns="0" bIns="0" rtlCol="0" anchor="ctr"/>
+          <a:lstStyle/>
+          <a:p>
+            <a:pPr indent="0" marL="0">
+              <a:buNone/>
+            </a:pPr>
+            <a:r>
+              <a:rPr lang="en-US" sz="1300" b="1" dirty="0">
+                <a:solidFill>
+                  <a:schemeClr val="tx1"/>
+                </a:solidFill>
+              </a:rPr>
+              <a:t>갱신 유예 ~45일</a:t>
+            </a:r>
+            <a:endParaRPr lang="en-US" sz="1300" dirty="0"/>
+          </a:p>
+          <a:p>
+            <a:pPr indent="0" marL="0">
+              <a:buNone/>
+            </a:pPr>
+            <a:r>
+              <a:rPr lang="en-US" sz="1100" dirty="0">
+                <a:solidFill>
+                  <a:schemeClr val="accent4"/>
+                </a:solidFill>
+              </a:rPr>
+              <a:t>원래 가격 갱신 가능한 경우 많음</a:t>
+            </a:r>
+            <a:endParaRPr lang="en-US" sz="1300" dirty="0"/>
+          </a:p>
+        </p:txBody>
+      </p:sp>
+      <p:sp>
+        <p:nvSpPr>
+          <p:cNvPr id="9" name="exp1"/>
+          <p:cNvSpPr/>
+          <p:nvPr/>
+        </p:nvSpPr>
+        <p:spPr>
+          <a:xfrm>
+            <a:off x="4800600" y="2514600"/>
+            <a:ext cx="274320" cy="274320"/>
+          </a:xfrm>
+          <a:prstGeom prst="ellipse">
+            <a:avLst/>
+          </a:prstGeom>
+          <a:solidFill>
+            <a:srgbClr val="E0A526"/>
+          </a:solidFill>
+          <a:ln/>
+        </p:spPr>
+      </p:sp>
+      <p:sp>
+        <p:nvSpPr>
+          <p:cNvPr id="10" name="Text 8"/>
+          <p:cNvSpPr txBox="1"/>
+          <p:nvPr/>
+        </p:nvSpPr>
+        <p:spPr>
+          <a:xfrm>
+            <a:off x="5212080" y="2404872"/>
+            <a:ext cx="3383280" cy="548640"/>
+          </a:xfrm>
+          <a:prstGeom prst="rect">
+            <a:avLst/>
+          </a:prstGeom>
+          <a:noFill/>
+          <a:ln/>
+        </p:spPr>
+        <p:txBody>
+          <a:bodyPr wrap="square" lIns="0" tIns="0" rIns="0" bIns="0" rtlCol="0" anchor="ctr"/>
+          <a:lstStyle/>
+          <a:p>
+            <a:pPr indent="0" marL="0">
+              <a:buNone/>
+            </a:pPr>
+            <a:r>
+              <a:rPr lang="en-US" sz="1300" b="1" dirty="0">
+                <a:solidFill>
+                  <a:schemeClr val="tx1"/>
+                </a:solidFill>
+              </a:rPr>
+              <a:t>복구 유예 ~30일</a:t>
+            </a:r>
+            <a:endParaRPr lang="en-US" sz="1300" dirty="0"/>
+          </a:p>
+          <a:p>
+            <a:pPr indent="0" marL="0">
+              <a:buNone/>
+            </a:pPr>
+            <a:r>
+              <a:rPr lang="en-US" sz="1100" dirty="0">
+                <a:solidFill>
+                  <a:schemeClr val="accent4"/>
+                </a:solidFill>
+              </a:rPr>
+              <a:t>사이트·메일 멈춤, 비싼 복구비</a:t>
+            </a:r>
+            <a:endParaRPr lang="en-US" sz="1300" dirty="0"/>
+          </a:p>
+        </p:txBody>
+      </p:sp>
+      <p:sp>
+        <p:nvSpPr>
+          <p:cNvPr id="11" name="exp2"/>
+          <p:cNvSpPr/>
+          <p:nvPr/>
+        </p:nvSpPr>
+        <p:spPr>
+          <a:xfrm>
+            <a:off x="4800600" y="3136392"/>
+            <a:ext cx="274320" cy="274320"/>
+          </a:xfrm>
+          <a:prstGeom prst="ellipse">
+            <a:avLst/>
+          </a:prstGeom>
+          <a:solidFill>
+            <a:srgbClr val="D9534F"/>
+          </a:solidFill>
+          <a:ln/>
+        </p:spPr>
+      </p:sp>
+      <p:sp>
+        <p:nvSpPr>
+          <p:cNvPr id="12" name="Text 10"/>
+          <p:cNvSpPr txBox="1"/>
+          <p:nvPr/>
+        </p:nvSpPr>
+        <p:spPr>
+          <a:xfrm>
+            <a:off x="5212080" y="3026664"/>
+            <a:ext cx="3383280" cy="548640"/>
+          </a:xfrm>
+          <a:prstGeom prst="rect">
+            <a:avLst/>
+          </a:prstGeom>
+          <a:noFill/>
+          <a:ln/>
+        </p:spPr>
+        <p:txBody>
+          <a:bodyPr wrap="square" lIns="0" tIns="0" rIns="0" bIns="0" rtlCol="0" anchor="ctr"/>
+          <a:lstStyle/>
+          <a:p>
+            <a:pPr indent="0" marL="0">
+              <a:buNone/>
+            </a:pPr>
+            <a:r>
+              <a:rPr lang="en-US" sz="1300" b="1" dirty="0">
+                <a:solidFill>
+                  <a:schemeClr val="tx1"/>
+                </a:solidFill>
+              </a:rPr>
+              <a:t>삭제 대기 ~5일</a:t>
+            </a:r>
+            <a:endParaRPr lang="en-US" sz="1300" dirty="0"/>
+          </a:p>
+          <a:p>
+            <a:pPr indent="0" marL="0">
+              <a:buNone/>
+            </a:pPr>
+            <a:r>
+              <a:rPr lang="en-US" sz="1100" dirty="0">
+                <a:solidFill>
+                  <a:schemeClr val="accent4"/>
+                </a:solidFill>
+              </a:rPr>
+              <a:t>되살릴 수 없음</a:t>
+            </a:r>
+            <a:endParaRPr lang="en-US" sz="1300" dirty="0"/>
+          </a:p>
+        </p:txBody>
+      </p:sp>
+      <p:sp>
+        <p:nvSpPr>
+          <p:cNvPr id="13" name="exp3"/>
+          <p:cNvSpPr/>
+          <p:nvPr/>
+        </p:nvSpPr>
+        <p:spPr>
+          <a:xfrm>
+            <a:off x="4800600" y="3758184"/>
+            <a:ext cx="274320" cy="274320"/>
+          </a:xfrm>
+          <a:prstGeom prst="ellipse">
+            <a:avLst/>
+          </a:prstGeom>
+          <a:solidFill>
+            <a:srgbClr val="1B2B2E"/>
+          </a:solidFill>
+          <a:ln/>
+        </p:spPr>
+      </p:sp>
+      <p:sp>
+        <p:nvSpPr>
+          <p:cNvPr id="14" name="Text 12"/>
+          <p:cNvSpPr txBox="1"/>
+          <p:nvPr/>
+        </p:nvSpPr>
+        <p:spPr>
+          <a:xfrm>
+            <a:off x="5212080" y="3648456"/>
+            <a:ext cx="3383280" cy="548640"/>
+          </a:xfrm>
+          <a:prstGeom prst="rect">
+            <a:avLst/>
+          </a:prstGeom>
+          <a:noFill/>
+          <a:ln/>
+        </p:spPr>
+        <p:txBody>
+          <a:bodyPr wrap="square" lIns="0" tIns="0" rIns="0" bIns="0" rtlCol="0" anchor="ctr"/>
+          <a:lstStyle/>
+          <a:p>
+            <a:pPr indent="0" marL="0">
+              <a:buNone/>
+            </a:pPr>
+            <a:r>
+              <a:rPr lang="en-US" sz="1300" b="1" dirty="0">
+                <a:solidFill>
+                  <a:schemeClr val="tx1"/>
+                </a:solidFill>
+              </a:rPr>
+              <a:t>공개 </a:t>
+            </a:r>
+            <a:endParaRPr lang="en-US" sz="1300" dirty="0"/>
+          </a:p>
+          <a:p>
+            <a:pPr indent="0" marL="0">
+              <a:buNone/>
+            </a:pPr>
+            <a:r>
+              <a:rPr lang="en-US" sz="1100" dirty="0">
+                <a:solidFill>
+                  <a:schemeClr val="accent4"/>
+                </a:solidFill>
+              </a:rPr>
+              <a:t>누구나 등록 가능</a:t>
+            </a:r>
+            <a:endParaRPr lang="en-US" sz="1300" dirty="0"/>
+          </a:p>
+        </p:txBody>
+      </p:sp>
+      <p:sp>
+        <p:nvSpPr>
+          <p:cNvPr id="25" name="Slide Number Placeholder 0"/>
+          <p:cNvSpPr>
+            <a:spLocks noGrp="1"/>
+          </p:cNvSpPr>
+          <p:nvPr>
+            <p:ph type="sldNum" sz="quarter" idx="4294967295"/>
+          </p:nvPr>
+        </p:nvSpPr>
+        <p:spPr>
+          <a:xfrm>
+            <a:off x="8321040" y="4754880"/>
+            <a:ext cx="457200" cy="274320"/>
+          </a:xfrm>
+          <a:prstGeom prst="rect">
+            <a:avLst/>
+          </a:prstGeom>
+          <a:extLst>
+            <a:ext uri="{C572A759-6A51-4108-AA02-DFA0A04FC94B}">
+              <ma14:wrappingTextBoxFlag xmlns:ma14="http://schemas.microsoft.com/office/mac/drawingml/2011/main" val="0"/>
+            </a:ext>
+          </a:extLst>
+        </p:spPr>
+        <p:txBody>
+          <a:bodyPr/>
+          <a:lstStyle>
+            <a:lvl1pPr>
+              <a:defRPr sz="1000">
+                <a:solidFill>
+                  <a:schemeClr val="accent4"/>
+                </a:solidFill>
+              </a:defRPr>
+            </a:lvl1pPr>
+          </a:lstStyle>
+          <a:p>
+            <a:pPr algn="r"/>
+            <a:fld id="{F7021451-1387-4CA6-816F-3879F97B5CBC}" type="slidenum">
+              <a:rPr b="0" lang="en-US"/>
+              <a:t>51</a:t>
+            </a:fld>
+            <a:endParaRPr lang="en-US"/>
+          </a:p>
+        </p:txBody>
+      </p:sp>
+    </p:spTree>
+  </p:cSld>
+  <p:clrMapOvr>
+    <a:masterClrMapping/>
+  </p:clrMapOvr>
+</p:sld>
+</file>
+
+<file path=ppt/slides/slide52.xml><?xml version="1.0" encoding="utf-8"?>
+<p:sld xmlns:a="http://schemas.openxmlformats.org/drawingml/2006/main" xmlns:r="http://schemas.openxmlformats.org/officeDocument/2006/relationships" xmlns:p="http://schemas.openxmlformats.org/presentationml/2006/main">
+  <p:cSld name="Slide 52">
+    <p:spTree>
+      <p:nvGrpSpPr>
+        <p:cNvPr id="1" name=""/>
+        <p:cNvGrpSpPr/>
+        <p:nvPr/>
+      </p:nvGrpSpPr>
+      <p:grpSpPr>
+        <a:xfrm>
+          <a:off x="0" y="0"/>
+          <a:ext cx="0" cy="0"/>
+          <a:chOff x="0" y="0"/>
+          <a:chExt cx="0" cy="0"/>
+        </a:xfrm>
+      </p:grpSpPr>
+      <p:sp>
+        <p:nvSpPr>
+          <p:cNvPr id="2" name="Text 0"/>
+          <p:cNvSpPr/>
+          <p:nvPr>
+            <p:ph idx="100" type="title" hasCustomPrompt="1"/>
+          </p:nvPr>
+        </p:nvSpPr>
+        <p:spPr>
+          <a:xfrm>
+            <a:off x="457200" y="274320"/>
+            <a:ext cx="8229600" cy="685800"/>
+          </a:xfrm>
+          <a:prstGeom prst="rect">
+            <a:avLst/>
+          </a:prstGeom>
+          <a:noFill/>
+          <a:ln/>
+        </p:spPr>
+        <p:txBody>
+          <a:bodyPr wrap="square" lIns="0" tIns="0" rIns="0" bIns="0" rtlCol="0" anchor="ctr"/>
+          <a:lstStyle/>
+          <a:p>
+            <a:pPr indent="0" marL="0">
+              <a:buNone/>
+            </a:pPr>
+            <a:r>
+              <a:rPr lang="en-US" sz="2800" b="1" dirty="0">
+                <a:solidFill>
+                  <a:schemeClr val="tx2"/>
+                </a:solidFill>
+              </a:rPr>
+              <a:t>업계 지식(도메인 지식)이란</a:t>
+            </a:r>
+            <a:endParaRPr lang="en-US" sz="2800" dirty="0"/>
+          </a:p>
+        </p:txBody>
+      </p:sp>
+      <p:sp>
+        <p:nvSpPr>
+          <p:cNvPr id="3" name="card"/>
+          <p:cNvSpPr/>
+          <p:nvPr/>
+        </p:nvSpPr>
+        <p:spPr>
+          <a:xfrm>
+            <a:off x="457200" y="1188720"/>
+            <a:ext cx="8229600" cy="822960"/>
+          </a:xfrm>
+          <a:prstGeom prst="roundRect">
+            <a:avLst>
+              <a:gd name="adj" fmla="val 8889"/>
+            </a:avLst>
+          </a:prstGeom>
+          <a:solidFill>
+            <a:schemeClr val="tx2"/>
+          </a:solidFill>
+          <a:ln/>
+        </p:spPr>
+      </p:sp>
+      <p:sp>
+        <p:nvSpPr>
+          <p:cNvPr id="4" name="Text 2"/>
+          <p:cNvSpPr txBox="1"/>
+          <p:nvPr/>
+        </p:nvSpPr>
+        <p:spPr>
+          <a:xfrm>
+            <a:off x="731520" y="1188720"/>
+            <a:ext cx="7680960" cy="822960"/>
+          </a:xfrm>
+          <a:prstGeom prst="rect">
+            <a:avLst/>
+          </a:prstGeom>
+          <a:noFill/>
+          <a:ln/>
+        </p:spPr>
+        <p:txBody>
+          <a:bodyPr wrap="square" lIns="0" tIns="0" rIns="0" bIns="0" rtlCol="0" anchor="ctr"/>
+          <a:lstStyle/>
+          <a:p>
+            <a:pPr indent="0" marL="0">
+              <a:buNone/>
+            </a:pPr>
+            <a:r>
+              <a:rPr lang="en-US" sz="1500" b="1" dirty="0">
+                <a:solidFill>
+                  <a:schemeClr val="bg1"/>
+                </a:solidFill>
+              </a:rPr>
+              <a:t>그 분야의 업무 흐름과 단어 — 코딩 실력이 같아도 이걸 아는 사람이 실수 없는 서비스를 만든다</a:t>
+            </a:r>
+            <a:endParaRPr lang="en-US" sz="1500" dirty="0"/>
+          </a:p>
+        </p:txBody>
+      </p:sp>
+      <p:sp>
+        <p:nvSpPr>
+          <p:cNvPr id="5" name="card"/>
+          <p:cNvSpPr/>
+          <p:nvPr/>
+        </p:nvSpPr>
+        <p:spPr>
+          <a:xfrm>
+            <a:off x="457200" y="2240280"/>
+            <a:ext cx="1554480" cy="1325880"/>
+          </a:xfrm>
+          <a:prstGeom prst="roundRect">
+            <a:avLst>
+              <a:gd name="adj" fmla="val 5517"/>
+            </a:avLst>
+          </a:prstGeom>
+          <a:solidFill>
+            <a:schemeClr val="bg2"/>
+          </a:solidFill>
+          <a:ln/>
+        </p:spPr>
+      </p:sp>
+      <p:sp>
+        <p:nvSpPr>
+          <p:cNvPr id="6" name="badge1"/>
+          <p:cNvSpPr/>
+          <p:nvPr/>
+        </p:nvSpPr>
+        <p:spPr>
+          <a:xfrm>
+            <a:off x="594360" y="2377440"/>
+            <a:ext cx="347472" cy="347472"/>
+          </a:xfrm>
+          <a:prstGeom prst="ellipse">
+            <a:avLst/>
+          </a:prstGeom>
+          <a:solidFill>
+            <a:schemeClr val="accent2"/>
+          </a:solidFill>
+          <a:ln/>
+        </p:spPr>
+      </p:sp>
+      <p:sp>
+        <p:nvSpPr>
+          <p:cNvPr id="7" name="Text 5"/>
+          <p:cNvSpPr txBox="1"/>
+          <p:nvPr/>
+        </p:nvSpPr>
+        <p:spPr>
+          <a:xfrm>
+            <a:off x="594360" y="2377440"/>
+            <a:ext cx="347472" cy="347472"/>
+          </a:xfrm>
+          <a:prstGeom prst="rect">
+            <a:avLst/>
+          </a:prstGeom>
+          <a:noFill/>
+          <a:ln/>
+        </p:spPr>
+        <p:txBody>
+          <a:bodyPr wrap="square" lIns="0" tIns="0" rIns="0" bIns="0" rtlCol="0" anchor="ctr"/>
+          <a:lstStyle/>
+          <a:p>
+            <a:pPr algn="ctr" indent="0" marL="0">
+              <a:buNone/>
+            </a:pPr>
+            <a:r>
+              <a:rPr lang="en-US" sz="1400" b="1" dirty="0">
+                <a:solidFill>
+                  <a:schemeClr val="bg1"/>
+                </a:solidFill>
+              </a:rPr>
+              <a:t>1</a:t>
+            </a:r>
+            <a:endParaRPr lang="en-US" sz="1400" dirty="0"/>
+          </a:p>
+        </p:txBody>
+      </p:sp>
+      <p:sp>
+        <p:nvSpPr>
+          <p:cNvPr id="8" name="Text 6"/>
+          <p:cNvSpPr txBox="1"/>
+          <p:nvPr/>
+        </p:nvSpPr>
+        <p:spPr>
+          <a:xfrm>
+            <a:off x="594360" y="2788920"/>
+            <a:ext cx="1325880" cy="731520"/>
+          </a:xfrm>
+          <a:prstGeom prst="rect">
+            <a:avLst/>
+          </a:prstGeom>
+          <a:noFill/>
+          <a:ln/>
+        </p:spPr>
+        <p:txBody>
+          <a:bodyPr wrap="square" lIns="0" tIns="0" rIns="0" bIns="0" rtlCol="0" anchor="t"/>
+          <a:lstStyle/>
+          <a:p>
+            <a:pPr indent="0" marL="0">
+              <a:buNone/>
+            </a:pPr>
+            <a:r>
+              <a:rPr lang="en-US" sz="1300" b="1" dirty="0">
+                <a:solidFill>
+                  <a:schemeClr val="tx1"/>
+                </a:solidFill>
+              </a:rPr>
+              <a:t>용어집</a:t>
+            </a:r>
+            <a:endParaRPr lang="en-US" sz="1300" dirty="0"/>
+          </a:p>
+          <a:p>
+            <a:pPr indent="0" marL="0">
+              <a:buNone/>
+            </a:pPr>
+            <a:r>
+              <a:rPr lang="en-US" sz="1100" dirty="0">
+                <a:solidFill>
+                  <a:schemeClr val="accent4"/>
+                </a:solidFill>
+              </a:rPr>
+              <a:t>내 말로 단어 정리</a:t>
+            </a:r>
+            <a:endParaRPr lang="en-US" sz="1300" dirty="0"/>
+          </a:p>
+        </p:txBody>
+      </p:sp>
+      <p:sp>
+        <p:nvSpPr>
+          <p:cNvPr id="9" name="card"/>
+          <p:cNvSpPr/>
+          <p:nvPr/>
+        </p:nvSpPr>
+        <p:spPr>
+          <a:xfrm>
+            <a:off x="2130552" y="2240280"/>
+            <a:ext cx="1554480" cy="1325880"/>
+          </a:xfrm>
+          <a:prstGeom prst="roundRect">
+            <a:avLst>
+              <a:gd name="adj" fmla="val 5517"/>
+            </a:avLst>
+          </a:prstGeom>
+          <a:solidFill>
+            <a:schemeClr val="bg2"/>
+          </a:solidFill>
+          <a:ln/>
+        </p:spPr>
+      </p:sp>
+      <p:sp>
+        <p:nvSpPr>
+          <p:cNvPr id="10" name="badge2"/>
+          <p:cNvSpPr/>
+          <p:nvPr/>
+        </p:nvSpPr>
+        <p:spPr>
+          <a:xfrm>
+            <a:off x="2267712" y="2377440"/>
+            <a:ext cx="347472" cy="347472"/>
+          </a:xfrm>
+          <a:prstGeom prst="ellipse">
+            <a:avLst/>
+          </a:prstGeom>
+          <a:solidFill>
+            <a:schemeClr val="accent2"/>
+          </a:solidFill>
+          <a:ln/>
+        </p:spPr>
+      </p:sp>
+      <p:sp>
+        <p:nvSpPr>
+          <p:cNvPr id="11" name="Text 9"/>
+          <p:cNvSpPr txBox="1"/>
+          <p:nvPr/>
+        </p:nvSpPr>
+        <p:spPr>
+          <a:xfrm>
+            <a:off x="2267712" y="2377440"/>
+            <a:ext cx="347472" cy="347472"/>
+          </a:xfrm>
+          <a:prstGeom prst="rect">
+            <a:avLst/>
+          </a:prstGeom>
+          <a:noFill/>
+          <a:ln/>
+        </p:spPr>
+        <p:txBody>
+          <a:bodyPr wrap="square" lIns="0" tIns="0" rIns="0" bIns="0" rtlCol="0" anchor="ctr"/>
+          <a:lstStyle/>
+          <a:p>
+            <a:pPr algn="ctr" indent="0" marL="0">
+              <a:buNone/>
+            </a:pPr>
+            <a:r>
+              <a:rPr lang="en-US" sz="1400" b="1" dirty="0">
+                <a:solidFill>
+                  <a:schemeClr val="bg1"/>
+                </a:solidFill>
+              </a:rPr>
+              <a:t>2</a:t>
+            </a:r>
+            <a:endParaRPr lang="en-US" sz="1400" dirty="0"/>
+          </a:p>
+        </p:txBody>
+      </p:sp>
+      <p:sp>
+        <p:nvSpPr>
+          <p:cNvPr id="12" name="Text 10"/>
+          <p:cNvSpPr txBox="1"/>
+          <p:nvPr/>
+        </p:nvSpPr>
+        <p:spPr>
+          <a:xfrm>
+            <a:off x="2267712" y="2788920"/>
+            <a:ext cx="1325880" cy="731520"/>
+          </a:xfrm>
+          <a:prstGeom prst="rect">
+            <a:avLst/>
+          </a:prstGeom>
+          <a:noFill/>
+          <a:ln/>
+        </p:spPr>
+        <p:txBody>
+          <a:bodyPr wrap="square" lIns="0" tIns="0" rIns="0" bIns="0" rtlCol="0" anchor="t"/>
+          <a:lstStyle/>
+          <a:p>
+            <a:pPr indent="0" marL="0">
+              <a:buNone/>
+            </a:pPr>
+            <a:r>
+              <a:rPr lang="en-US" sz="1300" b="1" dirty="0">
+                <a:solidFill>
+                  <a:schemeClr val="tx1"/>
+                </a:solidFill>
+              </a:rPr>
+              <a:t>흐름 그리기</a:t>
+            </a:r>
+            <a:endParaRPr lang="en-US" sz="1300" dirty="0"/>
+          </a:p>
+          <a:p>
+            <a:pPr indent="0" marL="0">
+              <a:buNone/>
+            </a:pPr>
+            <a:r>
+              <a:rPr lang="en-US" sz="1100" dirty="0">
+                <a:solidFill>
+                  <a:schemeClr val="accent4"/>
+                </a:solidFill>
+              </a:rPr>
+              <a:t>돈·물건·정보의 이동</a:t>
+            </a:r>
+            <a:endParaRPr lang="en-US" sz="1300" dirty="0"/>
+          </a:p>
+        </p:txBody>
+      </p:sp>
+      <p:sp>
+        <p:nvSpPr>
+          <p:cNvPr id="13" name="card"/>
+          <p:cNvSpPr/>
+          <p:nvPr/>
+        </p:nvSpPr>
+        <p:spPr>
+          <a:xfrm>
+            <a:off x="3803904" y="2240280"/>
+            <a:ext cx="1554480" cy="1325880"/>
+          </a:xfrm>
+          <a:prstGeom prst="roundRect">
+            <a:avLst>
+              <a:gd name="adj" fmla="val 5517"/>
+            </a:avLst>
+          </a:prstGeom>
+          <a:solidFill>
+            <a:schemeClr val="bg2"/>
+          </a:solidFill>
+          <a:ln/>
+        </p:spPr>
+      </p:sp>
+      <p:sp>
+        <p:nvSpPr>
+          <p:cNvPr id="14" name="badge3"/>
+          <p:cNvSpPr/>
+          <p:nvPr/>
+        </p:nvSpPr>
+        <p:spPr>
+          <a:xfrm>
+            <a:off x="3941064" y="2377440"/>
+            <a:ext cx="347472" cy="347472"/>
+          </a:xfrm>
+          <a:prstGeom prst="ellipse">
+            <a:avLst/>
+          </a:prstGeom>
+          <a:solidFill>
+            <a:schemeClr val="accent2"/>
+          </a:solidFill>
+          <a:ln/>
+        </p:spPr>
+      </p:sp>
+      <p:sp>
+        <p:nvSpPr>
+          <p:cNvPr id="15" name="Text 13"/>
+          <p:cNvSpPr txBox="1"/>
+          <p:nvPr/>
+        </p:nvSpPr>
+        <p:spPr>
+          <a:xfrm>
+            <a:off x="3941064" y="2377440"/>
+            <a:ext cx="347472" cy="347472"/>
+          </a:xfrm>
+          <a:prstGeom prst="rect">
+            <a:avLst/>
+          </a:prstGeom>
+          <a:noFill/>
+          <a:ln/>
+        </p:spPr>
+        <p:txBody>
+          <a:bodyPr wrap="square" lIns="0" tIns="0" rIns="0" bIns="0" rtlCol="0" anchor="ctr"/>
+          <a:lstStyle/>
+          <a:p>
+            <a:pPr algn="ctr" indent="0" marL="0">
+              <a:buNone/>
+            </a:pPr>
+            <a:r>
+              <a:rPr lang="en-US" sz="1400" b="1" dirty="0">
+                <a:solidFill>
+                  <a:schemeClr val="bg1"/>
+                </a:solidFill>
+              </a:rPr>
+              <a:t>3</a:t>
+            </a:r>
+            <a:endParaRPr lang="en-US" sz="1400" dirty="0"/>
+          </a:p>
+        </p:txBody>
+      </p:sp>
+      <p:sp>
+        <p:nvSpPr>
+          <p:cNvPr id="16" name="Text 14"/>
+          <p:cNvSpPr txBox="1"/>
+          <p:nvPr/>
+        </p:nvSpPr>
+        <p:spPr>
+          <a:xfrm>
+            <a:off x="3941064" y="2788920"/>
+            <a:ext cx="1325880" cy="731520"/>
+          </a:xfrm>
+          <a:prstGeom prst="rect">
+            <a:avLst/>
+          </a:prstGeom>
+          <a:noFill/>
+          <a:ln/>
+        </p:spPr>
+        <p:txBody>
+          <a:bodyPr wrap="square" lIns="0" tIns="0" rIns="0" bIns="0" rtlCol="0" anchor="t"/>
+          <a:lstStyle/>
+          <a:p>
+            <a:pPr indent="0" marL="0">
+              <a:buNone/>
+            </a:pPr>
+            <a:r>
+              <a:rPr lang="en-US" sz="1300" b="1" dirty="0">
+                <a:solidFill>
+                  <a:schemeClr val="tx1"/>
+                </a:solidFill>
+              </a:rPr>
+              <a:t>상태 그리기</a:t>
+            </a:r>
+            <a:endParaRPr lang="en-US" sz="1300" dirty="0"/>
+          </a:p>
+          <a:p>
+            <a:pPr indent="0" marL="0">
+              <a:buNone/>
+            </a:pPr>
+            <a:r>
+              <a:rPr lang="en-US" sz="1100" dirty="0">
+                <a:solidFill>
+                  <a:schemeClr val="accent4"/>
+                </a:solidFill>
+              </a:rPr>
+              <a:t>주문이 거치는 모든 상태</a:t>
+            </a:r>
+            <a:endParaRPr lang="en-US" sz="1300" dirty="0"/>
+          </a:p>
+        </p:txBody>
+      </p:sp>
+      <p:sp>
+        <p:nvSpPr>
+          <p:cNvPr id="17" name="card"/>
+          <p:cNvSpPr/>
+          <p:nvPr/>
+        </p:nvSpPr>
+        <p:spPr>
+          <a:xfrm>
+            <a:off x="5477256" y="2240280"/>
+            <a:ext cx="1554480" cy="1325880"/>
+          </a:xfrm>
+          <a:prstGeom prst="roundRect">
+            <a:avLst>
+              <a:gd name="adj" fmla="val 5517"/>
+            </a:avLst>
+          </a:prstGeom>
+          <a:solidFill>
+            <a:schemeClr val="bg2"/>
+          </a:solidFill>
+          <a:ln/>
+        </p:spPr>
+      </p:sp>
+      <p:sp>
+        <p:nvSpPr>
+          <p:cNvPr id="18" name="badge4"/>
+          <p:cNvSpPr/>
+          <p:nvPr/>
+        </p:nvSpPr>
+        <p:spPr>
+          <a:xfrm>
+            <a:off x="5614416" y="2377440"/>
+            <a:ext cx="347472" cy="347472"/>
+          </a:xfrm>
+          <a:prstGeom prst="ellipse">
+            <a:avLst/>
+          </a:prstGeom>
+          <a:solidFill>
+            <a:schemeClr val="accent2"/>
+          </a:solidFill>
+          <a:ln/>
+        </p:spPr>
+      </p:sp>
+      <p:sp>
+        <p:nvSpPr>
+          <p:cNvPr id="19" name="Text 17"/>
+          <p:cNvSpPr txBox="1"/>
+          <p:nvPr/>
+        </p:nvSpPr>
+        <p:spPr>
+          <a:xfrm>
+            <a:off x="5614416" y="2377440"/>
+            <a:ext cx="347472" cy="347472"/>
+          </a:xfrm>
+          <a:prstGeom prst="rect">
+            <a:avLst/>
+          </a:prstGeom>
+          <a:noFill/>
+          <a:ln/>
+        </p:spPr>
+        <p:txBody>
+          <a:bodyPr wrap="square" lIns="0" tIns="0" rIns="0" bIns="0" rtlCol="0" anchor="ctr"/>
+          <a:lstStyle/>
+          <a:p>
+            <a:pPr algn="ctr" indent="0" marL="0">
+              <a:buNone/>
+            </a:pPr>
+            <a:r>
+              <a:rPr lang="en-US" sz="1400" b="1" dirty="0">
+                <a:solidFill>
+                  <a:schemeClr val="bg1"/>
+                </a:solidFill>
+              </a:rPr>
+              <a:t>4</a:t>
+            </a:r>
+            <a:endParaRPr lang="en-US" sz="1400" dirty="0"/>
+          </a:p>
+        </p:txBody>
+      </p:sp>
+      <p:sp>
+        <p:nvSpPr>
+          <p:cNvPr id="20" name="Text 18"/>
+          <p:cNvSpPr txBox="1"/>
+          <p:nvPr/>
+        </p:nvSpPr>
+        <p:spPr>
+          <a:xfrm>
+            <a:off x="5614416" y="2788920"/>
+            <a:ext cx="1325880" cy="731520"/>
+          </a:xfrm>
+          <a:prstGeom prst="rect">
+            <a:avLst/>
+          </a:prstGeom>
+          <a:noFill/>
+          <a:ln/>
+        </p:spPr>
+        <p:txBody>
+          <a:bodyPr wrap="square" lIns="0" tIns="0" rIns="0" bIns="0" rtlCol="0" anchor="t"/>
+          <a:lstStyle/>
+          <a:p>
+            <a:pPr indent="0" marL="0">
+              <a:buNone/>
+            </a:pPr>
+            <a:r>
+              <a:rPr lang="en-US" sz="1300" b="1" dirty="0">
+                <a:solidFill>
+                  <a:schemeClr val="tx1"/>
+                </a:solidFill>
+              </a:rPr>
+              <a:t>예외 찾기</a:t>
+            </a:r>
+            <a:endParaRPr lang="en-US" sz="1300" dirty="0"/>
+          </a:p>
+          <a:p>
+            <a:pPr indent="0" marL="0">
+              <a:buNone/>
+            </a:pPr>
+            <a:r>
+              <a:rPr lang="en-US" sz="1100" dirty="0">
+                <a:solidFill>
+                  <a:schemeClr val="accent4"/>
+                </a:solidFill>
+              </a:rPr>
+              <a:t>중간 취소? 부분 환불?</a:t>
+            </a:r>
+            <a:endParaRPr lang="en-US" sz="1300" dirty="0"/>
+          </a:p>
+        </p:txBody>
+      </p:sp>
+      <p:sp>
+        <p:nvSpPr>
+          <p:cNvPr id="21" name="card"/>
+          <p:cNvSpPr/>
+          <p:nvPr/>
+        </p:nvSpPr>
+        <p:spPr>
+          <a:xfrm>
+            <a:off x="7150608" y="2240280"/>
+            <a:ext cx="1554480" cy="1325880"/>
+          </a:xfrm>
+          <a:prstGeom prst="roundRect">
+            <a:avLst>
+              <a:gd name="adj" fmla="val 5517"/>
+            </a:avLst>
+          </a:prstGeom>
+          <a:solidFill>
+            <a:schemeClr val="bg2"/>
+          </a:solidFill>
+          <a:ln/>
+        </p:spPr>
+      </p:sp>
+      <p:sp>
+        <p:nvSpPr>
+          <p:cNvPr id="22" name="badge5"/>
+          <p:cNvSpPr/>
+          <p:nvPr/>
+        </p:nvSpPr>
+        <p:spPr>
+          <a:xfrm>
+            <a:off x="7287768" y="2377440"/>
+            <a:ext cx="347472" cy="347472"/>
+          </a:xfrm>
+          <a:prstGeom prst="ellipse">
+            <a:avLst/>
+          </a:prstGeom>
+          <a:solidFill>
+            <a:schemeClr val="accent2"/>
+          </a:solidFill>
+          <a:ln/>
+        </p:spPr>
+      </p:sp>
+      <p:sp>
+        <p:nvSpPr>
+          <p:cNvPr id="23" name="Text 21"/>
+          <p:cNvSpPr txBox="1"/>
+          <p:nvPr/>
+        </p:nvSpPr>
+        <p:spPr>
+          <a:xfrm>
+            <a:off x="7287768" y="2377440"/>
+            <a:ext cx="347472" cy="347472"/>
+          </a:xfrm>
+          <a:prstGeom prst="rect">
+            <a:avLst/>
+          </a:prstGeom>
+          <a:noFill/>
+          <a:ln/>
+        </p:spPr>
+        <p:txBody>
+          <a:bodyPr wrap="square" lIns="0" tIns="0" rIns="0" bIns="0" rtlCol="0" anchor="ctr"/>
+          <a:lstStyle/>
+          <a:p>
+            <a:pPr algn="ctr" indent="0" marL="0">
+              <a:buNone/>
+            </a:pPr>
+            <a:r>
+              <a:rPr lang="en-US" sz="1400" b="1" dirty="0">
+                <a:solidFill>
+                  <a:schemeClr val="bg1"/>
+                </a:solidFill>
+              </a:rPr>
+              <a:t>5</a:t>
+            </a:r>
+            <a:endParaRPr lang="en-US" sz="1400" dirty="0"/>
+          </a:p>
+        </p:txBody>
+      </p:sp>
+      <p:sp>
+        <p:nvSpPr>
+          <p:cNvPr id="24" name="Text 22"/>
+          <p:cNvSpPr txBox="1"/>
+          <p:nvPr/>
+        </p:nvSpPr>
+        <p:spPr>
+          <a:xfrm>
+            <a:off x="7287768" y="2788920"/>
+            <a:ext cx="1325880" cy="731520"/>
+          </a:xfrm>
+          <a:prstGeom prst="rect">
+            <a:avLst/>
+          </a:prstGeom>
+          <a:noFill/>
+          <a:ln/>
+        </p:spPr>
+        <p:txBody>
+          <a:bodyPr wrap="square" lIns="0" tIns="0" rIns="0" bIns="0" rtlCol="0" anchor="t"/>
+          <a:lstStyle/>
+          <a:p>
+            <a:pPr indent="0" marL="0">
+              <a:buNone/>
+            </a:pPr>
+            <a:r>
+              <a:rPr lang="en-US" sz="1300" b="1" dirty="0">
+                <a:solidFill>
+                  <a:schemeClr val="tx1"/>
+                </a:solidFill>
+              </a:rPr>
+              <a:t>현장에 묻기</a:t>
+            </a:r>
+            <a:endParaRPr lang="en-US" sz="1300" dirty="0"/>
+          </a:p>
+          <a:p>
+            <a:pPr indent="0" marL="0">
+              <a:buNone/>
+            </a:pPr>
+            <a:r>
+              <a:rPr lang="en-US" sz="1100" dirty="0">
+                <a:solidFill>
+                  <a:schemeClr val="accent4"/>
+                </a:solidFill>
+              </a:rPr>
+              <a:t>CS·정산 담당의 고민</a:t>
+            </a:r>
+            <a:endParaRPr lang="en-US" sz="1300" dirty="0"/>
+          </a:p>
+        </p:txBody>
+      </p:sp>
+      <p:sp>
+        <p:nvSpPr>
+          <p:cNvPr id="25" name="Text 23"/>
+          <p:cNvSpPr txBox="1"/>
+          <p:nvPr/>
+        </p:nvSpPr>
+        <p:spPr>
+          <a:xfrm>
+            <a:off x="457200" y="3794760"/>
+            <a:ext cx="8229600" cy="548640"/>
+          </a:xfrm>
+          <a:prstGeom prst="rect">
+            <a:avLst/>
+          </a:prstGeom>
+          <a:noFill/>
+          <a:ln/>
+        </p:spPr>
+        <p:txBody>
+          <a:bodyPr wrap="square" lIns="0" tIns="0" rIns="0" bIns="0" rtlCol="0" anchor="t"/>
+          <a:lstStyle/>
+          <a:p>
+            <a:pPr indent="0" marL="0">
+              <a:buNone/>
+            </a:pPr>
+            <a:r>
+              <a:rPr lang="en-US" sz="1300" b="1" dirty="0">
+                <a:solidFill>
+                  <a:schemeClr val="accent2"/>
+                </a:solidFill>
+              </a:rPr>
+              <a:t>개발에선 DDD  </a:t>
+            </a:r>
+            <a:pPr indent="0" marL="0">
+              <a:buNone/>
+            </a:pPr>
+            <a:r>
+              <a:rPr lang="en-US" sz="1300" dirty="0">
+                <a:solidFill>
+                  <a:schemeClr val="tx1"/>
+                </a:solidFill>
+              </a:rPr>
+              <a:t>공통 언어(현업과 같은 단어를 코드에) · 영역 나누기(같은 '주문'도 판매팀·물류팀에서 뜻이 다름)</a:t>
+            </a:r>
+            <a:endParaRPr lang="en-US" sz="1300" dirty="0"/>
+          </a:p>
+        </p:txBody>
+      </p:sp>
+      <p:sp>
+        <p:nvSpPr>
+          <p:cNvPr id="25" name="Slide Number Placeholder 0"/>
+          <p:cNvSpPr>
+            <a:spLocks noGrp="1"/>
+          </p:cNvSpPr>
+          <p:nvPr>
+            <p:ph type="sldNum" sz="quarter" idx="4294967295"/>
+          </p:nvPr>
+        </p:nvSpPr>
+        <p:spPr>
+          <a:xfrm>
+            <a:off x="8321040" y="4754880"/>
+            <a:ext cx="457200" cy="274320"/>
+          </a:xfrm>
+          <a:prstGeom prst="rect">
+            <a:avLst/>
+          </a:prstGeom>
+          <a:extLst>
+            <a:ext uri="{C572A759-6A51-4108-AA02-DFA0A04FC94B}">
+              <ma14:wrappingTextBoxFlag xmlns:ma14="http://schemas.microsoft.com/office/mac/drawingml/2011/main" val="0"/>
+            </a:ext>
+          </a:extLst>
+        </p:spPr>
+        <p:txBody>
+          <a:bodyPr/>
+          <a:lstStyle>
+            <a:lvl1pPr>
+              <a:defRPr sz="1000">
+                <a:solidFill>
+                  <a:schemeClr val="accent4"/>
+                </a:solidFill>
+              </a:defRPr>
+            </a:lvl1pPr>
+          </a:lstStyle>
+          <a:p>
+            <a:pPr algn="r"/>
+            <a:fld id="{F7021451-1387-4CA6-816F-3879F97B5CBC}" type="slidenum">
+              <a:rPr b="0" lang="en-US"/>
+              <a:t>52</a:t>
+            </a:fld>
+            <a:endParaRPr lang="en-US"/>
+          </a:p>
+        </p:txBody>
+      </p:sp>
+    </p:spTree>
+  </p:cSld>
+  <p:clrMapOvr>
+    <a:masterClrMapping/>
+  </p:clrMapOvr>
+</p:sld>
+</file>
+
+<file path=ppt/slides/slide53.xml><?xml version="1.0" encoding="utf-8"?>
+<p:sld xmlns:a="http://schemas.openxmlformats.org/drawingml/2006/main" xmlns:r="http://schemas.openxmlformats.org/officeDocument/2006/relationships" xmlns:p="http://schemas.openxmlformats.org/presentationml/2006/main">
+  <p:cSld name="Slide 53">
+    <p:spTree>
+      <p:nvGrpSpPr>
+        <p:cNvPr id="1" name=""/>
+        <p:cNvGrpSpPr/>
+        <p:nvPr/>
+      </p:nvGrpSpPr>
+      <p:grpSpPr>
+        <a:xfrm>
+          <a:off x="0" y="0"/>
+          <a:ext cx="0" cy="0"/>
+          <a:chOff x="0" y="0"/>
+          <a:chExt cx="0" cy="0"/>
+        </a:xfrm>
+      </p:grpSpPr>
+      <p:sp>
+        <p:nvSpPr>
+          <p:cNvPr id="2" name="Text 0"/>
+          <p:cNvSpPr/>
+          <p:nvPr>
+            <p:ph idx="100" type="title" hasCustomPrompt="1"/>
+          </p:nvPr>
+        </p:nvSpPr>
+        <p:spPr>
+          <a:xfrm>
+            <a:off x="457200" y="274320"/>
+            <a:ext cx="8229600" cy="685800"/>
+          </a:xfrm>
+          <a:prstGeom prst="rect">
+            <a:avLst/>
+          </a:prstGeom>
+          <a:noFill/>
+          <a:ln/>
+        </p:spPr>
+        <p:txBody>
+          <a:bodyPr wrap="square" lIns="0" tIns="0" rIns="0" bIns="0" rtlCol="0" anchor="ctr"/>
+          <a:lstStyle/>
+          <a:p>
+            <a:pPr indent="0" marL="0">
+              <a:buNone/>
+            </a:pPr>
+            <a:r>
+              <a:rPr lang="en-US" sz="2800" b="1" dirty="0">
+                <a:solidFill>
+                  <a:schemeClr val="tx2"/>
+                </a:solidFill>
+              </a:rPr>
+              <a:t>핵심 흐름 ①: 주문과 결제</a:t>
+            </a:r>
+            <a:endParaRPr lang="en-US" sz="2800" dirty="0"/>
+          </a:p>
+        </p:txBody>
+      </p:sp>
+      <p:sp>
+        <p:nvSpPr>
+          <p:cNvPr id="3" name="Text 1"/>
+          <p:cNvSpPr txBox="1"/>
+          <p:nvPr/>
+        </p:nvSpPr>
+        <p:spPr>
+          <a:xfrm>
+            <a:off x="457200" y="1188720"/>
+            <a:ext cx="8229600" cy="365760"/>
+          </a:xfrm>
+          <a:prstGeom prst="rect">
+            <a:avLst/>
+          </a:prstGeom>
+          <a:noFill/>
+          <a:ln/>
+        </p:spPr>
+        <p:txBody>
+          <a:bodyPr wrap="square" lIns="0" tIns="0" rIns="0" bIns="0" rtlCol="0" anchor="t"/>
+          <a:lstStyle/>
+          <a:p>
+            <a:pPr indent="0" marL="0">
+              <a:buNone/>
+            </a:pPr>
+            <a:r>
+              <a:rPr lang="en-US" sz="1500" b="1" dirty="0">
+                <a:solidFill>
+                  <a:schemeClr val="tx2"/>
+                </a:solidFill>
+              </a:rPr>
+              <a:t>쇼핑몰 주문 상태</a:t>
+            </a:r>
+            <a:endParaRPr lang="en-US" sz="1500" dirty="0"/>
+          </a:p>
+        </p:txBody>
+      </p:sp>
+      <p:sp>
+        <p:nvSpPr>
+          <p:cNvPr id="4" name="ord0"/>
+          <p:cNvSpPr/>
+          <p:nvPr/>
+        </p:nvSpPr>
+        <p:spPr>
+          <a:xfrm>
+            <a:off x="457200" y="1645920"/>
+            <a:ext cx="1261872" cy="548640"/>
+          </a:xfrm>
+          <a:prstGeom prst="roundRect">
+            <a:avLst>
+              <a:gd name="adj" fmla="val 13333"/>
+            </a:avLst>
+          </a:prstGeom>
+          <a:solidFill>
+            <a:srgbClr val="1F4E4A"/>
+          </a:solidFill>
+          <a:ln/>
+        </p:spPr>
+      </p:sp>
+      <p:sp>
+        <p:nvSpPr>
+          <p:cNvPr id="5" name="Text 3"/>
+          <p:cNvSpPr txBox="1"/>
+          <p:nvPr/>
+        </p:nvSpPr>
+        <p:spPr>
+          <a:xfrm>
+            <a:off x="457200" y="1645920"/>
+            <a:ext cx="1261872" cy="548640"/>
+          </a:xfrm>
+          <a:prstGeom prst="rect">
+            <a:avLst/>
+          </a:prstGeom>
+          <a:noFill/>
+          <a:ln/>
+        </p:spPr>
+        <p:txBody>
+          <a:bodyPr wrap="square" lIns="0" tIns="0" rIns="0" bIns="0" rtlCol="0" anchor="ctr"/>
+          <a:lstStyle/>
+          <a:p>
+            <a:pPr algn="ctr" indent="0" marL="0">
+              <a:buNone/>
+            </a:pPr>
+            <a:r>
+              <a:rPr lang="en-US" sz="1300" b="1" dirty="0">
+                <a:solidFill>
+                  <a:schemeClr val="bg1"/>
+                </a:solidFill>
+              </a:rPr>
+              <a:t>결제 완료</a:t>
+            </a:r>
+            <a:endParaRPr lang="en-US" sz="1300" dirty="0"/>
+          </a:p>
+        </p:txBody>
+      </p:sp>
+      <p:sp>
+        <p:nvSpPr>
+          <p:cNvPr id="6" name="ord1"/>
+          <p:cNvSpPr/>
+          <p:nvPr/>
+        </p:nvSpPr>
+        <p:spPr>
+          <a:xfrm>
+            <a:off x="1847088" y="1645920"/>
+            <a:ext cx="1261872" cy="548640"/>
+          </a:xfrm>
+          <a:prstGeom prst="roundRect">
+            <a:avLst>
+              <a:gd name="adj" fmla="val 13333"/>
+            </a:avLst>
+          </a:prstGeom>
+          <a:solidFill>
+            <a:srgbClr val="1F4E4A"/>
+          </a:solidFill>
+          <a:ln/>
+        </p:spPr>
+      </p:sp>
+      <p:sp>
+        <p:nvSpPr>
+          <p:cNvPr id="7" name="Text 5"/>
+          <p:cNvSpPr txBox="1"/>
+          <p:nvPr/>
+        </p:nvSpPr>
+        <p:spPr>
+          <a:xfrm>
+            <a:off x="1847088" y="1645920"/>
+            <a:ext cx="1261872" cy="548640"/>
+          </a:xfrm>
+          <a:prstGeom prst="rect">
+            <a:avLst/>
+          </a:prstGeom>
+          <a:noFill/>
+          <a:ln/>
+        </p:spPr>
+        <p:txBody>
+          <a:bodyPr wrap="square" lIns="0" tIns="0" rIns="0" bIns="0" rtlCol="0" anchor="ctr"/>
+          <a:lstStyle/>
+          <a:p>
+            <a:pPr algn="ctr" indent="0" marL="0">
+              <a:buNone/>
+            </a:pPr>
+            <a:r>
+              <a:rPr lang="en-US" sz="1300" b="1" dirty="0">
+                <a:solidFill>
+                  <a:schemeClr val="bg1"/>
+                </a:solidFill>
+              </a:rPr>
+              <a:t>상품 준비</a:t>
+            </a:r>
+            <a:endParaRPr lang="en-US" sz="1300" dirty="0"/>
+          </a:p>
+        </p:txBody>
+      </p:sp>
+      <p:sp>
+        <p:nvSpPr>
+          <p:cNvPr id="8" name="ord2"/>
+          <p:cNvSpPr/>
+          <p:nvPr/>
+        </p:nvSpPr>
+        <p:spPr>
+          <a:xfrm>
+            <a:off x="3236976" y="1645920"/>
+            <a:ext cx="1261872" cy="548640"/>
+          </a:xfrm>
+          <a:prstGeom prst="roundRect">
+            <a:avLst>
+              <a:gd name="adj" fmla="val 13333"/>
+            </a:avLst>
+          </a:prstGeom>
+          <a:solidFill>
+            <a:srgbClr val="1F4E4A"/>
+          </a:solidFill>
+          <a:ln/>
+        </p:spPr>
+      </p:sp>
+      <p:sp>
+        <p:nvSpPr>
+          <p:cNvPr id="9" name="Text 7"/>
+          <p:cNvSpPr txBox="1"/>
+          <p:nvPr/>
+        </p:nvSpPr>
+        <p:spPr>
+          <a:xfrm>
+            <a:off x="3236976" y="1645920"/>
+            <a:ext cx="1261872" cy="548640"/>
+          </a:xfrm>
+          <a:prstGeom prst="rect">
+            <a:avLst/>
+          </a:prstGeom>
+          <a:noFill/>
+          <a:ln/>
+        </p:spPr>
+        <p:txBody>
+          <a:bodyPr wrap="square" lIns="0" tIns="0" rIns="0" bIns="0" rtlCol="0" anchor="ctr"/>
+          <a:lstStyle/>
+          <a:p>
+            <a:pPr algn="ctr" indent="0" marL="0">
+              <a:buNone/>
+            </a:pPr>
+            <a:r>
+              <a:rPr lang="en-US" sz="1300" b="1" dirty="0">
+                <a:solidFill>
+                  <a:schemeClr val="bg1"/>
+                </a:solidFill>
+              </a:rPr>
+              <a:t>출고</a:t>
+            </a:r>
+            <a:endParaRPr lang="en-US" sz="1300" dirty="0"/>
+          </a:p>
+        </p:txBody>
+      </p:sp>
+      <p:sp>
+        <p:nvSpPr>
+          <p:cNvPr id="10" name="ord3"/>
+          <p:cNvSpPr/>
+          <p:nvPr/>
+        </p:nvSpPr>
+        <p:spPr>
+          <a:xfrm>
+            <a:off x="4626864" y="1645920"/>
+            <a:ext cx="1261872" cy="548640"/>
+          </a:xfrm>
+          <a:prstGeom prst="roundRect">
+            <a:avLst>
+              <a:gd name="adj" fmla="val 13333"/>
+            </a:avLst>
+          </a:prstGeom>
+          <a:solidFill>
+            <a:srgbClr val="1F4E4A"/>
+          </a:solidFill>
+          <a:ln/>
+        </p:spPr>
+      </p:sp>
+      <p:sp>
+        <p:nvSpPr>
+          <p:cNvPr id="11" name="Text 9"/>
+          <p:cNvSpPr txBox="1"/>
+          <p:nvPr/>
+        </p:nvSpPr>
+        <p:spPr>
+          <a:xfrm>
+            <a:off x="4626864" y="1645920"/>
+            <a:ext cx="1261872" cy="548640"/>
+          </a:xfrm>
+          <a:prstGeom prst="rect">
+            <a:avLst/>
+          </a:prstGeom>
+          <a:noFill/>
+          <a:ln/>
+        </p:spPr>
+        <p:txBody>
+          <a:bodyPr wrap="square" lIns="0" tIns="0" rIns="0" bIns="0" rtlCol="0" anchor="ctr"/>
+          <a:lstStyle/>
+          <a:p>
+            <a:pPr algn="ctr" indent="0" marL="0">
+              <a:buNone/>
+            </a:pPr>
+            <a:r>
+              <a:rPr lang="en-US" sz="1300" b="1" dirty="0">
+                <a:solidFill>
+                  <a:schemeClr val="bg1"/>
+                </a:solidFill>
+              </a:rPr>
+              <a:t>배송 중</a:t>
+            </a:r>
+            <a:endParaRPr lang="en-US" sz="1300" dirty="0"/>
+          </a:p>
+        </p:txBody>
+      </p:sp>
+      <p:sp>
+        <p:nvSpPr>
+          <p:cNvPr id="12" name="ord4"/>
+          <p:cNvSpPr/>
+          <p:nvPr/>
+        </p:nvSpPr>
+        <p:spPr>
+          <a:xfrm>
+            <a:off x="6016752" y="1645920"/>
+            <a:ext cx="1261872" cy="548640"/>
+          </a:xfrm>
+          <a:prstGeom prst="roundRect">
+            <a:avLst>
+              <a:gd name="adj" fmla="val 13333"/>
+            </a:avLst>
+          </a:prstGeom>
+          <a:solidFill>
+            <a:srgbClr val="1F4E4A"/>
+          </a:solidFill>
+          <a:ln/>
+        </p:spPr>
+      </p:sp>
+      <p:sp>
+        <p:nvSpPr>
+          <p:cNvPr id="13" name="Text 11"/>
+          <p:cNvSpPr txBox="1"/>
+          <p:nvPr/>
+        </p:nvSpPr>
+        <p:spPr>
+          <a:xfrm>
+            <a:off x="6016752" y="1645920"/>
+            <a:ext cx="1261872" cy="548640"/>
+          </a:xfrm>
+          <a:prstGeom prst="rect">
+            <a:avLst/>
+          </a:prstGeom>
+          <a:noFill/>
+          <a:ln/>
+        </p:spPr>
+        <p:txBody>
+          <a:bodyPr wrap="square" lIns="0" tIns="0" rIns="0" bIns="0" rtlCol="0" anchor="ctr"/>
+          <a:lstStyle/>
+          <a:p>
+            <a:pPr algn="ctr" indent="0" marL="0">
+              <a:buNone/>
+            </a:pPr>
+            <a:r>
+              <a:rPr lang="en-US" sz="1300" b="1" dirty="0">
+                <a:solidFill>
+                  <a:schemeClr val="bg1"/>
+                </a:solidFill>
+              </a:rPr>
+              <a:t>배송 완료</a:t>
+            </a:r>
+            <a:endParaRPr lang="en-US" sz="1300" dirty="0"/>
+          </a:p>
+        </p:txBody>
+      </p:sp>
+      <p:sp>
+        <p:nvSpPr>
+          <p:cNvPr id="14" name="ord5"/>
+          <p:cNvSpPr/>
+          <p:nvPr/>
+        </p:nvSpPr>
+        <p:spPr>
+          <a:xfrm>
+            <a:off x="7406640" y="1645920"/>
+            <a:ext cx="1261872" cy="548640"/>
+          </a:xfrm>
+          <a:prstGeom prst="roundRect">
+            <a:avLst>
+              <a:gd name="adj" fmla="val 13333"/>
+            </a:avLst>
+          </a:prstGeom>
+          <a:solidFill>
+            <a:srgbClr val="F08A3E"/>
+          </a:solidFill>
+          <a:ln/>
+        </p:spPr>
+      </p:sp>
+      <p:sp>
+        <p:nvSpPr>
+          <p:cNvPr id="15" name="Text 13"/>
+          <p:cNvSpPr txBox="1"/>
+          <p:nvPr/>
+        </p:nvSpPr>
+        <p:spPr>
+          <a:xfrm>
+            <a:off x="7406640" y="1645920"/>
+            <a:ext cx="1261872" cy="548640"/>
+          </a:xfrm>
+          <a:prstGeom prst="rect">
+            <a:avLst/>
+          </a:prstGeom>
+          <a:noFill/>
+          <a:ln/>
+        </p:spPr>
+        <p:txBody>
+          <a:bodyPr wrap="square" lIns="0" tIns="0" rIns="0" bIns="0" rtlCol="0" anchor="ctr"/>
+          <a:lstStyle/>
+          <a:p>
+            <a:pPr algn="ctr" indent="0" marL="0">
+              <a:buNone/>
+            </a:pPr>
+            <a:r>
+              <a:rPr lang="en-US" sz="1300" b="1" dirty="0">
+                <a:solidFill>
+                  <a:schemeClr val="bg1"/>
+                </a:solidFill>
+              </a:rPr>
+              <a:t>구매 확정</a:t>
+            </a:r>
+            <a:endParaRPr lang="en-US" sz="1300" dirty="0"/>
+          </a:p>
+        </p:txBody>
+      </p:sp>
+      <p:sp>
+        <p:nvSpPr>
+          <p:cNvPr id="16" name="Text 14"/>
+          <p:cNvSpPr txBox="1"/>
+          <p:nvPr/>
+        </p:nvSpPr>
+        <p:spPr>
+          <a:xfrm>
+            <a:off x="457200" y="2286000"/>
+            <a:ext cx="8229600" cy="365760"/>
+          </a:xfrm>
+          <a:prstGeom prst="rect">
+            <a:avLst/>
+          </a:prstGeom>
+          <a:noFill/>
+          <a:ln/>
+        </p:spPr>
+        <p:txBody>
+          <a:bodyPr wrap="square" lIns="0" tIns="0" rIns="0" bIns="0" rtlCol="0" anchor="t"/>
+          <a:lstStyle/>
+          <a:p>
+            <a:pPr indent="0" marL="0">
+              <a:buNone/>
+            </a:pPr>
+            <a:r>
+              <a:rPr lang="en-US" sz="1200" dirty="0">
+                <a:solidFill>
+                  <a:schemeClr val="accent4"/>
+                </a:solidFill>
+              </a:rPr>
+              <a:t>예외 규칙 미리: 출고 전 취소 → 즉시 환불 · 출고 후 → 반품 전환 · 부분 반품 시 쿠폰·배송비</a:t>
+            </a:r>
+            <a:endParaRPr lang="en-US" sz="1200" dirty="0"/>
+          </a:p>
+        </p:txBody>
+      </p:sp>
+      <p:sp>
+        <p:nvSpPr>
+          <p:cNvPr id="17" name="Text 15"/>
+          <p:cNvSpPr txBox="1"/>
+          <p:nvPr/>
+        </p:nvSpPr>
+        <p:spPr>
+          <a:xfrm>
+            <a:off x="457200" y="2788920"/>
+            <a:ext cx="8229600" cy="365760"/>
+          </a:xfrm>
+          <a:prstGeom prst="rect">
+            <a:avLst/>
+          </a:prstGeom>
+          <a:noFill/>
+          <a:ln/>
+        </p:spPr>
+        <p:txBody>
+          <a:bodyPr wrap="square" lIns="0" tIns="0" rIns="0" bIns="0" rtlCol="0" anchor="t"/>
+          <a:lstStyle/>
+          <a:p>
+            <a:pPr indent="0" marL="0">
+              <a:buNone/>
+            </a:pPr>
+            <a:r>
+              <a:rPr lang="en-US" sz="1500" b="1" dirty="0">
+                <a:solidFill>
+                  <a:schemeClr val="tx2"/>
+                </a:solidFill>
+              </a:rPr>
+              <a:t>카드 결제</a:t>
+            </a:r>
+            <a:endParaRPr lang="en-US" sz="1500" dirty="0"/>
+          </a:p>
+        </p:txBody>
+      </p:sp>
+      <p:sp>
+        <p:nvSpPr>
+          <p:cNvPr id="18" name="card"/>
+          <p:cNvSpPr/>
+          <p:nvPr/>
+        </p:nvSpPr>
+        <p:spPr>
+          <a:xfrm>
+            <a:off x="457200" y="3200400"/>
+            <a:ext cx="2606040" cy="822960"/>
+          </a:xfrm>
+          <a:prstGeom prst="roundRect">
+            <a:avLst>
+              <a:gd name="adj" fmla="val 8889"/>
+            </a:avLst>
+          </a:prstGeom>
+          <a:solidFill>
+            <a:schemeClr val="bg2"/>
+          </a:solidFill>
+          <a:ln/>
+        </p:spPr>
+      </p:sp>
+      <p:sp>
+        <p:nvSpPr>
+          <p:cNvPr id="19" name="Text 17"/>
+          <p:cNvSpPr txBox="1"/>
+          <p:nvPr/>
+        </p:nvSpPr>
+        <p:spPr>
+          <a:xfrm>
+            <a:off x="640080" y="3200400"/>
+            <a:ext cx="2286000" cy="822960"/>
+          </a:xfrm>
+          <a:prstGeom prst="rect">
+            <a:avLst/>
+          </a:prstGeom>
+          <a:noFill/>
+          <a:ln/>
+        </p:spPr>
+        <p:txBody>
+          <a:bodyPr wrap="square" lIns="0" tIns="0" rIns="0" bIns="0" rtlCol="0" anchor="ctr"/>
+          <a:lstStyle/>
+          <a:p>
+            <a:pPr indent="0" marL="0">
+              <a:buNone/>
+            </a:pPr>
+            <a:r>
+              <a:rPr lang="en-US" sz="1600" b="1" dirty="0">
+                <a:solidFill>
+                  <a:schemeClr val="accent2"/>
+                </a:solidFill>
+              </a:rPr>
+              <a:t>승인</a:t>
+            </a:r>
+            <a:endParaRPr lang="en-US" sz="1600" dirty="0"/>
+          </a:p>
+          <a:p>
+            <a:pPr indent="0" marL="0">
+              <a:buNone/>
+            </a:pPr>
+            <a:r>
+              <a:rPr lang="en-US" sz="1200" dirty="0">
+                <a:solidFill>
+                  <a:schemeClr val="tx1"/>
+                </a:solidFill>
+              </a:rPr>
+              <a:t>결제 가능 확인 (돈은 아직)</a:t>
+            </a:r>
+            <a:endParaRPr lang="en-US" sz="1600" dirty="0"/>
+          </a:p>
+        </p:txBody>
+      </p:sp>
+      <p:sp>
+        <p:nvSpPr>
+          <p:cNvPr id="20" name="card"/>
+          <p:cNvSpPr/>
+          <p:nvPr/>
+        </p:nvSpPr>
+        <p:spPr>
+          <a:xfrm>
+            <a:off x="3246120" y="3200400"/>
+            <a:ext cx="2606040" cy="822960"/>
+          </a:xfrm>
+          <a:prstGeom prst="roundRect">
+            <a:avLst>
+              <a:gd name="adj" fmla="val 8889"/>
+            </a:avLst>
+          </a:prstGeom>
+          <a:solidFill>
+            <a:schemeClr val="bg2"/>
+          </a:solidFill>
+          <a:ln/>
+        </p:spPr>
+      </p:sp>
+      <p:sp>
+        <p:nvSpPr>
+          <p:cNvPr id="21" name="Text 19"/>
+          <p:cNvSpPr txBox="1"/>
+          <p:nvPr/>
+        </p:nvSpPr>
+        <p:spPr>
+          <a:xfrm>
+            <a:off x="3429000" y="3200400"/>
+            <a:ext cx="2286000" cy="822960"/>
+          </a:xfrm>
+          <a:prstGeom prst="rect">
+            <a:avLst/>
+          </a:prstGeom>
+          <a:noFill/>
+          <a:ln/>
+        </p:spPr>
+        <p:txBody>
+          <a:bodyPr wrap="square" lIns="0" tIns="0" rIns="0" bIns="0" rtlCol="0" anchor="ctr"/>
+          <a:lstStyle/>
+          <a:p>
+            <a:pPr indent="0" marL="0">
+              <a:buNone/>
+            </a:pPr>
+            <a:r>
+              <a:rPr lang="en-US" sz="1600" b="1" dirty="0">
+                <a:solidFill>
+                  <a:schemeClr val="accent2"/>
+                </a:solidFill>
+              </a:rPr>
+              <a:t>매입</a:t>
+            </a:r>
+            <a:endParaRPr lang="en-US" sz="1600" dirty="0"/>
+          </a:p>
+          <a:p>
+            <a:pPr indent="0" marL="0">
+              <a:buNone/>
+            </a:pPr>
+            <a:r>
+              <a:rPr lang="en-US" sz="1200" dirty="0">
+                <a:solidFill>
+                  <a:schemeClr val="tx1"/>
+                </a:solidFill>
+              </a:rPr>
+              <a:t>청구 확정</a:t>
+            </a:r>
+            <a:endParaRPr lang="en-US" sz="1600" dirty="0"/>
+          </a:p>
+        </p:txBody>
+      </p:sp>
+      <p:sp>
+        <p:nvSpPr>
+          <p:cNvPr id="22" name="card"/>
+          <p:cNvSpPr/>
+          <p:nvPr/>
+        </p:nvSpPr>
+        <p:spPr>
+          <a:xfrm>
+            <a:off x="6035040" y="3200400"/>
+            <a:ext cx="2606040" cy="822960"/>
+          </a:xfrm>
+          <a:prstGeom prst="roundRect">
+            <a:avLst>
+              <a:gd name="adj" fmla="val 8889"/>
+            </a:avLst>
+          </a:prstGeom>
+          <a:solidFill>
+            <a:schemeClr val="bg2"/>
+          </a:solidFill>
+          <a:ln/>
+        </p:spPr>
+      </p:sp>
+      <p:sp>
+        <p:nvSpPr>
+          <p:cNvPr id="23" name="Text 21"/>
+          <p:cNvSpPr txBox="1"/>
+          <p:nvPr/>
+        </p:nvSpPr>
+        <p:spPr>
+          <a:xfrm>
+            <a:off x="6217920" y="3200400"/>
+            <a:ext cx="2286000" cy="822960"/>
+          </a:xfrm>
+          <a:prstGeom prst="rect">
+            <a:avLst/>
+          </a:prstGeom>
+          <a:noFill/>
+          <a:ln/>
+        </p:spPr>
+        <p:txBody>
+          <a:bodyPr wrap="square" lIns="0" tIns="0" rIns="0" bIns="0" rtlCol="0" anchor="ctr"/>
+          <a:lstStyle/>
+          <a:p>
+            <a:pPr indent="0" marL="0">
+              <a:buNone/>
+            </a:pPr>
+            <a:r>
+              <a:rPr lang="en-US" sz="1600" b="1" dirty="0">
+                <a:solidFill>
+                  <a:schemeClr val="accent2"/>
+                </a:solidFill>
+              </a:rPr>
+              <a:t>정산</a:t>
+            </a:r>
+            <a:endParaRPr lang="en-US" sz="1600" dirty="0"/>
+          </a:p>
+          <a:p>
+            <a:pPr indent="0" marL="0">
+              <a:buNone/>
+            </a:pPr>
+            <a:r>
+              <a:rPr lang="en-US" sz="1200" dirty="0">
+                <a:solidFill>
+                  <a:schemeClr val="tx1"/>
+                </a:solidFill>
+              </a:rPr>
+              <a:t>수수료 빼고 D+N일 입금</a:t>
+            </a:r>
+            <a:endParaRPr lang="en-US" sz="1600" dirty="0"/>
+          </a:p>
+        </p:txBody>
+      </p:sp>
+      <p:sp>
+        <p:nvSpPr>
+          <p:cNvPr id="24" name="Text 22"/>
+          <p:cNvSpPr txBox="1"/>
+          <p:nvPr/>
+        </p:nvSpPr>
+        <p:spPr>
+          <a:xfrm>
+            <a:off x="457200" y="4645152"/>
+            <a:ext cx="7680960" cy="274320"/>
+          </a:xfrm>
+          <a:prstGeom prst="rect">
+            <a:avLst/>
+          </a:prstGeom>
+          <a:noFill/>
+          <a:ln/>
+        </p:spPr>
+        <p:txBody>
+          <a:bodyPr wrap="square" lIns="0" tIns="0" rIns="0" bIns="0" rtlCol="0" anchor="t"/>
+          <a:lstStyle/>
+          <a:p>
+            <a:pPr indent="0" marL="0">
+              <a:buNone/>
+            </a:pPr>
+            <a:r>
+              <a:rPr lang="en-US" sz="1000" dirty="0">
+                <a:solidFill>
+                  <a:schemeClr val="accent4"/>
+                </a:solidFill>
+              </a:rPr>
+              <a:t>결제 핵심 설계: 멱등성(두 번 눌러도 한 번만) · 매일 PG 내역과 주문 대사 (35장)</a:t>
+            </a:r>
+            <a:endParaRPr lang="en-US" sz="1000" dirty="0"/>
+          </a:p>
+        </p:txBody>
+      </p:sp>
+      <p:sp>
+        <p:nvSpPr>
+          <p:cNvPr id="25" name="Slide Number Placeholder 0"/>
+          <p:cNvSpPr>
+            <a:spLocks noGrp="1"/>
+          </p:cNvSpPr>
+          <p:nvPr>
+            <p:ph type="sldNum" sz="quarter" idx="4294967295"/>
+          </p:nvPr>
+        </p:nvSpPr>
+        <p:spPr>
+          <a:xfrm>
+            <a:off x="8321040" y="4754880"/>
+            <a:ext cx="457200" cy="274320"/>
+          </a:xfrm>
+          <a:prstGeom prst="rect">
+            <a:avLst/>
+          </a:prstGeom>
+          <a:extLst>
+            <a:ext uri="{C572A759-6A51-4108-AA02-DFA0A04FC94B}">
+              <ma14:wrappingTextBoxFlag xmlns:ma14="http://schemas.microsoft.com/office/mac/drawingml/2011/main" val="0"/>
+            </a:ext>
+          </a:extLst>
+        </p:spPr>
+        <p:txBody>
+          <a:bodyPr/>
+          <a:lstStyle>
+            <a:lvl1pPr>
+              <a:defRPr sz="1000">
+                <a:solidFill>
+                  <a:schemeClr val="accent4"/>
+                </a:solidFill>
+              </a:defRPr>
+            </a:lvl1pPr>
+          </a:lstStyle>
+          <a:p>
+            <a:pPr algn="r"/>
+            <a:fld id="{F7021451-1387-4CA6-816F-3879F97B5CBC}" type="slidenum">
+              <a:rPr b="0" lang="en-US"/>
+              <a:t>53</a:t>
+            </a:fld>
+            <a:endParaRPr lang="en-US"/>
+          </a:p>
+        </p:txBody>
+      </p:sp>
+    </p:spTree>
+  </p:cSld>
+  <p:clrMapOvr>
+    <a:masterClrMapping/>
+  </p:clrMapOvr>
+</p:sld>
+</file>
+
+<file path=ppt/slides/slide54.xml><?xml version="1.0" encoding="utf-8"?>
+<p:sld xmlns:a="http://schemas.openxmlformats.org/drawingml/2006/main" xmlns:r="http://schemas.openxmlformats.org/officeDocument/2006/relationships" xmlns:p="http://schemas.openxmlformats.org/presentationml/2006/main">
+  <p:cSld name="Slide 54">
+    <p:spTree>
+      <p:nvGrpSpPr>
+        <p:cNvPr id="1" name=""/>
+        <p:cNvGrpSpPr/>
+        <p:nvPr/>
+      </p:nvGrpSpPr>
+      <p:grpSpPr>
+        <a:xfrm>
+          <a:off x="0" y="0"/>
+          <a:ext cx="0" cy="0"/>
+          <a:chOff x="0" y="0"/>
+          <a:chExt cx="0" cy="0"/>
+        </a:xfrm>
+      </p:grpSpPr>
+      <p:sp>
+        <p:nvSpPr>
+          <p:cNvPr id="2" name="Text 0"/>
+          <p:cNvSpPr/>
+          <p:nvPr>
+            <p:ph idx="100" type="title" hasCustomPrompt="1"/>
+          </p:nvPr>
+        </p:nvSpPr>
+        <p:spPr>
+          <a:xfrm>
+            <a:off x="457200" y="274320"/>
+            <a:ext cx="8229600" cy="685800"/>
+          </a:xfrm>
+          <a:prstGeom prst="rect">
+            <a:avLst/>
+          </a:prstGeom>
+          <a:noFill/>
+          <a:ln/>
+        </p:spPr>
+        <p:txBody>
+          <a:bodyPr wrap="square" lIns="0" tIns="0" rIns="0" bIns="0" rtlCol="0" anchor="ctr"/>
+          <a:lstStyle/>
+          <a:p>
+            <a:pPr indent="0" marL="0">
+              <a:buNone/>
+            </a:pPr>
+            <a:r>
+              <a:rPr lang="en-US" sz="2800" b="1" dirty="0">
+                <a:solidFill>
+                  <a:schemeClr val="tx2"/>
+                </a:solidFill>
+              </a:rPr>
+              <a:t>핵심 흐름 ②: 분야별 꼭 알 단어</a:t>
+            </a:r>
+            <a:endParaRPr lang="en-US" sz="2800" dirty="0"/>
+          </a:p>
+        </p:txBody>
+      </p:sp>
+      <p:graphicFrame>
+        <p:nvGraphicFramePr>
+          <p:cNvPr id="55" name="Table 0"/>
+          <p:cNvGraphicFramePr>
+            <a:graphicFrameLocks noGrp="1"/>
+          </p:cNvGraphicFramePr>
+          <p:nvPr>
+            <p:extLst>
+              <p:ext uri="{D42A27DB-BD31-4B8C-83A1-F6EECF244321}">
+                <p14:modId xmlns:p14="http://schemas.microsoft.com/office/powerpoint/2010/main" val="1579011935"/>
+              </p:ext>
+            </p:extLst>
+          </p:nvPr>
+        </p:nvGraphicFramePr>
+        <p:xfrm>
+          <a:off x="457200" y="1143000"/>
+          <a:ext cx="8229600" cy="914400"/>
+        </p:xfrm>
+        <a:graphic>
+          <a:graphicData uri="http://schemas.openxmlformats.org/drawingml/2006/table">
+            <a:tbl>
+              <a:tblPr/>
+              <a:tblGrid>
+                <a:gridCol w="1554480"/>
+                <a:gridCol w="6675120"/>
+              </a:tblGrid>
+              <a:tr h="457200">
+                <a:tc>
+                  <a:txBody>
+                    <a:bodyPr/>
+                    <a:lstStyle/>
+                    <a:p>
+                      <a:pPr indent="0" marL="0">
+                        <a:buNone/>
+                      </a:pPr>
+                      <a:r>
+                        <a:rPr lang="en-US" sz="1200" b="1" dirty="0">
+                          <a:solidFill>
+                            <a:schemeClr val="bg1"/>
+                          </a:solidFill>
+                        </a:rPr>
+                        <a:t>분야</a:t>
+                      </a:r>
+                      <a:endParaRPr lang="en-US" sz="1200" dirty="0"/>
+                    </a:p>
+                  </a:txBody>
+                  <a:tcPr marL="91440" marR="91440" marT="45720" marB="45720" anchor="ctr">
+                    <a:lnL w="12700" cap="flat" cmpd="sng" algn="ctr">
+                      <a:solidFill>
+                        <a:srgbClr val="EEF4F3"/>
+                      </a:solidFill>
+                      <a:prstDash val="solid"/>
+                      <a:round/>
+                      <a:headEnd type="none" w="med" len="med"/>
+                      <a:tailEnd type="none" w="med" len="med"/>
+                    </a:lnL>
+                    <a:lnR w="12700" cap="flat" cmpd="sng" algn="ctr">
+                      <a:solidFill>
+                        <a:srgbClr val="EEF4F3"/>
+                      </a:solidFill>
+                      <a:prstDash val="solid"/>
+                      <a:round/>
+                      <a:headEnd type="none" w="med" len="med"/>
+                      <a:tailEnd type="none" w="med" len="med"/>
+                    </a:lnR>
+                    <a:lnT w="12700" cap="flat" cmpd="sng" algn="ctr">
+                      <a:solidFill>
+                        <a:srgbClr val="EEF4F3"/>
+                      </a:solidFill>
+                      <a:prstDash val="solid"/>
+                      <a:round/>
+                      <a:headEnd type="none" w="med" len="med"/>
+                      <a:tailEnd type="none" w="med" len="med"/>
+                    </a:lnT>
+                    <a:lnB w="12700" cap="flat" cmpd="sng" algn="ctr">
+                      <a:solidFill>
+                        <a:srgbClr val="EEF4F3"/>
+                      </a:solidFill>
+                      <a:prstDash val="solid"/>
+                      <a:round/>
+                      <a:headEnd type="none" w="med" len="med"/>
+                      <a:tailEnd type="none" w="med" len="med"/>
+                    </a:lnB>
+                    <a:solidFill>
+                      <a:schemeClr val="tx2"/>
+                    </a:solidFill>
+                  </a:tcPr>
+                </a:tc>
+                <a:tc>
+                  <a:txBody>
+                    <a:bodyPr/>
+                    <a:lstStyle/>
+                    <a:p>
+                      <a:pPr indent="0" marL="0">
+                        <a:buNone/>
+                      </a:pPr>
+                      <a:r>
+                        <a:rPr lang="en-US" sz="1200" b="1" dirty="0">
+                          <a:solidFill>
+                            <a:schemeClr val="bg1"/>
+                          </a:solidFill>
+                        </a:rPr>
+                        <a:t>꼭 알 흐름·단어</a:t>
+                      </a:r>
+                      <a:endParaRPr lang="en-US" sz="1200" dirty="0"/>
+                    </a:p>
+                  </a:txBody>
+                  <a:tcPr marL="91440" marR="91440" marT="45720" marB="45720" anchor="ctr">
+                    <a:lnL w="12700" cap="flat" cmpd="sng" algn="ctr">
+                      <a:solidFill>
+                        <a:srgbClr val="EEF4F3"/>
+                      </a:solidFill>
+                      <a:prstDash val="solid"/>
+                      <a:round/>
+                      <a:headEnd type="none" w="med" len="med"/>
+                      <a:tailEnd type="none" w="med" len="med"/>
+                    </a:lnL>
+                    <a:lnR w="12700" cap="flat" cmpd="sng" algn="ctr">
+                      <a:solidFill>
+                        <a:srgbClr val="EEF4F3"/>
+                      </a:solidFill>
+                      <a:prstDash val="solid"/>
+                      <a:round/>
+                      <a:headEnd type="none" w="med" len="med"/>
+                      <a:tailEnd type="none" w="med" len="med"/>
+                    </a:lnR>
+                    <a:lnT w="12700" cap="flat" cmpd="sng" algn="ctr">
+                      <a:solidFill>
+                        <a:srgbClr val="EEF4F3"/>
+                      </a:solidFill>
+                      <a:prstDash val="solid"/>
+                      <a:round/>
+                      <a:headEnd type="none" w="med" len="med"/>
+                      <a:tailEnd type="none" w="med" len="med"/>
+                    </a:lnT>
+                    <a:lnB w="12700" cap="flat" cmpd="sng" algn="ctr">
+                      <a:solidFill>
+                        <a:srgbClr val="EEF4F3"/>
+                      </a:solidFill>
+                      <a:prstDash val="solid"/>
+                      <a:round/>
+                      <a:headEnd type="none" w="med" len="med"/>
+                      <a:tailEnd type="none" w="med" len="med"/>
+                    </a:lnB>
+                    <a:solidFill>
+                      <a:schemeClr val="tx2"/>
+                    </a:solidFill>
+                  </a:tcPr>
+                </a:tc>
+              </a:tr>
+              <a:tr h="457200">
+                <a:tc>
+                  <a:txBody>
+                    <a:bodyPr/>
+                    <a:lstStyle/>
+                    <a:p>
+                      <a:pPr indent="0" marL="0">
+                        <a:buNone/>
+                      </a:pPr>
+                      <a:r>
+                        <a:rPr lang="en-US" sz="1200" b="1" dirty="0">
+                          <a:solidFill>
+                            <a:schemeClr val="tx1"/>
+                          </a:solidFill>
+                        </a:rPr>
+                        <a:t>물류</a:t>
+                      </a:r>
+                      <a:endParaRPr lang="en-US" sz="1200" dirty="0"/>
+                    </a:p>
+                  </a:txBody>
+                  <a:tcPr marL="91440" marR="91440" marT="45720" marB="45720" anchor="ctr">
+                    <a:lnL w="12700" cap="flat" cmpd="sng" algn="ctr">
+                      <a:solidFill>
+                        <a:srgbClr val="EEF4F3"/>
+                      </a:solidFill>
+                      <a:prstDash val="solid"/>
+                      <a:round/>
+                      <a:headEnd type="none" w="med" len="med"/>
+                      <a:tailEnd type="none" w="med" len="med"/>
+                    </a:lnL>
+                    <a:lnR w="12700" cap="flat" cmpd="sng" algn="ctr">
+                      <a:solidFill>
+                        <a:srgbClr val="EEF4F3"/>
+                      </a:solidFill>
+                      <a:prstDash val="solid"/>
+                      <a:round/>
+                      <a:headEnd type="none" w="med" len="med"/>
+                      <a:tailEnd type="none" w="med" len="med"/>
+                    </a:lnR>
+                    <a:lnT w="12700" cap="flat" cmpd="sng" algn="ctr">
+                      <a:solidFill>
+                        <a:srgbClr val="EEF4F3"/>
+                      </a:solidFill>
+                      <a:prstDash val="solid"/>
+                      <a:round/>
+                      <a:headEnd type="none" w="med" len="med"/>
+                      <a:tailEnd type="none" w="med" len="med"/>
+                    </a:lnT>
+                    <a:lnB w="12700" cap="flat" cmpd="sng" algn="ctr">
+                      <a:solidFill>
+                        <a:srgbClr val="EEF4F3"/>
+                      </a:solidFill>
+                      <a:prstDash val="solid"/>
+                      <a:round/>
+                      <a:headEnd type="none" w="med" len="med"/>
+                      <a:tailEnd type="none" w="med" len="med"/>
+                    </a:lnB>
+                  </a:tcPr>
+                </a:tc>
+                <a:tc>
+                  <a:txBody>
+                    <a:bodyPr/>
+                    <a:lstStyle/>
+                    <a:p>
+                      <a:pPr indent="0" marL="0">
+                        <a:buNone/>
+                      </a:pPr>
+                      <a:r>
+                        <a:rPr lang="en-US" sz="1200" dirty="0">
+                          <a:solidFill>
+                            <a:schemeClr val="tx1"/>
+                          </a:solidFill>
+                        </a:rPr>
+                        <a:t>입고 → 피킹 → 패킹 → 출고 → 배송 · 송장 · 합포장 · 3PL vs 풀필먼트</a:t>
+                      </a:r>
+                      <a:endParaRPr lang="en-US" sz="1200" dirty="0"/>
+                    </a:p>
+                  </a:txBody>
+                  <a:tcPr marL="91440" marR="91440" marT="45720" marB="45720" anchor="ctr">
+                    <a:lnL w="12700" cap="flat" cmpd="sng" algn="ctr">
+                      <a:solidFill>
+                        <a:srgbClr val="EEF4F3"/>
+                      </a:solidFill>
+                      <a:prstDash val="solid"/>
+                      <a:round/>
+                      <a:headEnd type="none" w="med" len="med"/>
+                      <a:tailEnd type="none" w="med" len="med"/>
+                    </a:lnL>
+                    <a:lnR w="12700" cap="flat" cmpd="sng" algn="ctr">
+                      <a:solidFill>
+                        <a:srgbClr val="EEF4F3"/>
+                      </a:solidFill>
+                      <a:prstDash val="solid"/>
+                      <a:round/>
+                      <a:headEnd type="none" w="med" len="med"/>
+                      <a:tailEnd type="none" w="med" len="med"/>
+                    </a:lnR>
+                    <a:lnT w="12700" cap="flat" cmpd="sng" algn="ctr">
+                      <a:solidFill>
+                        <a:srgbClr val="EEF4F3"/>
+                      </a:solidFill>
+                      <a:prstDash val="solid"/>
+                      <a:round/>
+                      <a:headEnd type="none" w="med" len="med"/>
+                      <a:tailEnd type="none" w="med" len="med"/>
+                    </a:lnT>
+                    <a:lnB w="12700" cap="flat" cmpd="sng" algn="ctr">
+                      <a:solidFill>
+                        <a:srgbClr val="EEF4F3"/>
+                      </a:solidFill>
+                      <a:prstDash val="solid"/>
+                      <a:round/>
+                      <a:headEnd type="none" w="med" len="med"/>
+                      <a:tailEnd type="none" w="med" len="med"/>
+                    </a:lnB>
+                  </a:tcPr>
+                </a:tc>
+              </a:tr>
+              <a:tr h="457200">
+                <a:tc>
+                  <a:txBody>
+                    <a:bodyPr/>
+                    <a:lstStyle/>
+                    <a:p>
+                      <a:pPr indent="0" marL="0">
+                        <a:buNone/>
+                      </a:pPr>
+                      <a:r>
+                        <a:rPr lang="en-US" sz="1200" b="1" dirty="0">
+                          <a:solidFill>
+                            <a:schemeClr val="tx1"/>
+                          </a:solidFill>
+                        </a:rPr>
+                        <a:t>광고</a:t>
+                      </a:r>
+                      <a:endParaRPr lang="en-US" sz="1200" dirty="0"/>
+                    </a:p>
+                  </a:txBody>
+                  <a:tcPr marL="91440" marR="91440" marT="45720" marB="45720" anchor="ctr">
+                    <a:lnL w="12700" cap="flat" cmpd="sng" algn="ctr">
+                      <a:solidFill>
+                        <a:srgbClr val="EEF4F3"/>
+                      </a:solidFill>
+                      <a:prstDash val="solid"/>
+                      <a:round/>
+                      <a:headEnd type="none" w="med" len="med"/>
+                      <a:tailEnd type="none" w="med" len="med"/>
+                    </a:lnL>
+                    <a:lnR w="12700" cap="flat" cmpd="sng" algn="ctr">
+                      <a:solidFill>
+                        <a:srgbClr val="EEF4F3"/>
+                      </a:solidFill>
+                      <a:prstDash val="solid"/>
+                      <a:round/>
+                      <a:headEnd type="none" w="med" len="med"/>
+                      <a:tailEnd type="none" w="med" len="med"/>
+                    </a:lnR>
+                    <a:lnT w="12700" cap="flat" cmpd="sng" algn="ctr">
+                      <a:solidFill>
+                        <a:srgbClr val="EEF4F3"/>
+                      </a:solidFill>
+                      <a:prstDash val="solid"/>
+                      <a:round/>
+                      <a:headEnd type="none" w="med" len="med"/>
+                      <a:tailEnd type="none" w="med" len="med"/>
+                    </a:lnT>
+                    <a:lnB w="12700" cap="flat" cmpd="sng" algn="ctr">
+                      <a:solidFill>
+                        <a:srgbClr val="EEF4F3"/>
+                      </a:solidFill>
+                      <a:prstDash val="solid"/>
+                      <a:round/>
+                      <a:headEnd type="none" w="med" len="med"/>
+                      <a:tailEnd type="none" w="med" len="med"/>
+                    </a:lnB>
+                  </a:tcPr>
+                </a:tc>
+                <a:tc>
+                  <a:txBody>
+                    <a:bodyPr/>
+                    <a:lstStyle/>
+                    <a:p>
+                      <a:pPr indent="0" marL="0">
+                        <a:buNone/>
+                      </a:pPr>
+                      <a:r>
+                        <a:rPr lang="en-US" sz="1200" dirty="0">
+                          <a:solidFill>
+                            <a:schemeClr val="tx1"/>
+                          </a:solidFill>
+                        </a:rPr>
+                        <a:t>광고주 DSP ↔ 익스체인지(RTB 경매) ↔ SSP 퍼블리셔 · 어트리뷰션 · 퍼스트파티 데이터</a:t>
+                      </a:r>
+                      <a:endParaRPr lang="en-US" sz="1200" dirty="0"/>
+                    </a:p>
+                  </a:txBody>
+                  <a:tcPr marL="91440" marR="91440" marT="45720" marB="45720" anchor="ctr">
+                    <a:lnL w="12700" cap="flat" cmpd="sng" algn="ctr">
+                      <a:solidFill>
+                        <a:srgbClr val="EEF4F3"/>
+                      </a:solidFill>
+                      <a:prstDash val="solid"/>
+                      <a:round/>
+                      <a:headEnd type="none" w="med" len="med"/>
+                      <a:tailEnd type="none" w="med" len="med"/>
+                    </a:lnL>
+                    <a:lnR w="12700" cap="flat" cmpd="sng" algn="ctr">
+                      <a:solidFill>
+                        <a:srgbClr val="EEF4F3"/>
+                      </a:solidFill>
+                      <a:prstDash val="solid"/>
+                      <a:round/>
+                      <a:headEnd type="none" w="med" len="med"/>
+                      <a:tailEnd type="none" w="med" len="med"/>
+                    </a:lnR>
+                    <a:lnT w="12700" cap="flat" cmpd="sng" algn="ctr">
+                      <a:solidFill>
+                        <a:srgbClr val="EEF4F3"/>
+                      </a:solidFill>
+                      <a:prstDash val="solid"/>
+                      <a:round/>
+                      <a:headEnd type="none" w="med" len="med"/>
+                      <a:tailEnd type="none" w="med" len="med"/>
+                    </a:lnT>
+                    <a:lnB w="12700" cap="flat" cmpd="sng" algn="ctr">
+                      <a:solidFill>
+                        <a:srgbClr val="EEF4F3"/>
+                      </a:solidFill>
+                      <a:prstDash val="solid"/>
+                      <a:round/>
+                      <a:headEnd type="none" w="med" len="med"/>
+                      <a:tailEnd type="none" w="med" len="med"/>
+                    </a:lnB>
+                  </a:tcPr>
+                </a:tc>
+              </a:tr>
+              <a:tr h="457200">
+                <a:tc>
+                  <a:txBody>
+                    <a:bodyPr/>
+                    <a:lstStyle/>
+                    <a:p>
+                      <a:pPr indent="0" marL="0">
+                        <a:buNone/>
+                      </a:pPr>
+                      <a:r>
+                        <a:rPr lang="en-US" sz="1200" b="1" dirty="0">
+                          <a:solidFill>
+                            <a:schemeClr val="tx1"/>
+                          </a:solidFill>
+                        </a:rPr>
+                        <a:t>게임</a:t>
+                      </a:r>
+                      <a:endParaRPr lang="en-US" sz="1200" dirty="0"/>
+                    </a:p>
+                  </a:txBody>
+                  <a:tcPr marL="91440" marR="91440" marT="45720" marB="45720" anchor="ctr">
+                    <a:lnL w="12700" cap="flat" cmpd="sng" algn="ctr">
+                      <a:solidFill>
+                        <a:srgbClr val="EEF4F3"/>
+                      </a:solidFill>
+                      <a:prstDash val="solid"/>
+                      <a:round/>
+                      <a:headEnd type="none" w="med" len="med"/>
+                      <a:tailEnd type="none" w="med" len="med"/>
+                    </a:lnL>
+                    <a:lnR w="12700" cap="flat" cmpd="sng" algn="ctr">
+                      <a:solidFill>
+                        <a:srgbClr val="EEF4F3"/>
+                      </a:solidFill>
+                      <a:prstDash val="solid"/>
+                      <a:round/>
+                      <a:headEnd type="none" w="med" len="med"/>
+                      <a:tailEnd type="none" w="med" len="med"/>
+                    </a:lnR>
+                    <a:lnT w="12700" cap="flat" cmpd="sng" algn="ctr">
+                      <a:solidFill>
+                        <a:srgbClr val="EEF4F3"/>
+                      </a:solidFill>
+                      <a:prstDash val="solid"/>
+                      <a:round/>
+                      <a:headEnd type="none" w="med" len="med"/>
+                      <a:tailEnd type="none" w="med" len="med"/>
+                    </a:lnT>
+                    <a:lnB w="12700" cap="flat" cmpd="sng" algn="ctr">
+                      <a:solidFill>
+                        <a:srgbClr val="EEF4F3"/>
+                      </a:solidFill>
+                      <a:prstDash val="solid"/>
+                      <a:round/>
+                      <a:headEnd type="none" w="med" len="med"/>
+                      <a:tailEnd type="none" w="med" len="med"/>
+                    </a:lnB>
+                  </a:tcPr>
+                </a:tc>
+                <a:tc>
+                  <a:txBody>
+                    <a:bodyPr/>
+                    <a:lstStyle/>
+                    <a:p>
+                      <a:pPr indent="0" marL="0">
+                        <a:buNone/>
+                      </a:pPr>
+                      <a:r>
+                        <a:rPr lang="en-US" sz="1200" dirty="0">
+                          <a:solidFill>
+                            <a:schemeClr val="tx1"/>
+                          </a:solidFill>
+                        </a:rPr>
+                        <a:t>BM(F2P·패스·가챠) · 라이브 옵스 · ARPPU · 리텐션 · 치팅</a:t>
+                      </a:r>
+                      <a:endParaRPr lang="en-US" sz="1200" dirty="0"/>
+                    </a:p>
+                  </a:txBody>
+                  <a:tcPr marL="91440" marR="91440" marT="45720" marB="45720" anchor="ctr">
+                    <a:lnL w="12700" cap="flat" cmpd="sng" algn="ctr">
+                      <a:solidFill>
+                        <a:srgbClr val="EEF4F3"/>
+                      </a:solidFill>
+                      <a:prstDash val="solid"/>
+                      <a:round/>
+                      <a:headEnd type="none" w="med" len="med"/>
+                      <a:tailEnd type="none" w="med" len="med"/>
+                    </a:lnL>
+                    <a:lnR w="12700" cap="flat" cmpd="sng" algn="ctr">
+                      <a:solidFill>
+                        <a:srgbClr val="EEF4F3"/>
+                      </a:solidFill>
+                      <a:prstDash val="solid"/>
+                      <a:round/>
+                      <a:headEnd type="none" w="med" len="med"/>
+                      <a:tailEnd type="none" w="med" len="med"/>
+                    </a:lnR>
+                    <a:lnT w="12700" cap="flat" cmpd="sng" algn="ctr">
+                      <a:solidFill>
+                        <a:srgbClr val="EEF4F3"/>
+                      </a:solidFill>
+                      <a:prstDash val="solid"/>
+                      <a:round/>
+                      <a:headEnd type="none" w="med" len="med"/>
+                      <a:tailEnd type="none" w="med" len="med"/>
+                    </a:lnT>
+                    <a:lnB w="12700" cap="flat" cmpd="sng" algn="ctr">
+                      <a:solidFill>
+                        <a:srgbClr val="EEF4F3"/>
+                      </a:solidFill>
+                      <a:prstDash val="solid"/>
+                      <a:round/>
+                      <a:headEnd type="none" w="med" len="med"/>
+                      <a:tailEnd type="none" w="med" len="med"/>
+                    </a:lnB>
+                  </a:tcPr>
+                </a:tc>
+              </a:tr>
+              <a:tr h="457200">
+                <a:tc>
+                  <a:txBody>
+                    <a:bodyPr/>
+                    <a:lstStyle/>
+                    <a:p>
+                      <a:pPr indent="0" marL="0">
+                        <a:buNone/>
+                      </a:pPr>
+                      <a:r>
+                        <a:rPr lang="en-US" sz="1200" b="1" dirty="0">
+                          <a:solidFill>
+                            <a:schemeClr val="tx1"/>
+                          </a:solidFill>
+                        </a:rPr>
+                        <a:t>구독·SaaS</a:t>
+                      </a:r>
+                      <a:endParaRPr lang="en-US" sz="1200" dirty="0"/>
+                    </a:p>
+                  </a:txBody>
+                  <a:tcPr marL="91440" marR="91440" marT="45720" marB="45720" anchor="ctr">
+                    <a:lnL w="12700" cap="flat" cmpd="sng" algn="ctr">
+                      <a:solidFill>
+                        <a:srgbClr val="EEF4F3"/>
+                      </a:solidFill>
+                      <a:prstDash val="solid"/>
+                      <a:round/>
+                      <a:headEnd type="none" w="med" len="med"/>
+                      <a:tailEnd type="none" w="med" len="med"/>
+                    </a:lnL>
+                    <a:lnR w="12700" cap="flat" cmpd="sng" algn="ctr">
+                      <a:solidFill>
+                        <a:srgbClr val="EEF4F3"/>
+                      </a:solidFill>
+                      <a:prstDash val="solid"/>
+                      <a:round/>
+                      <a:headEnd type="none" w="med" len="med"/>
+                      <a:tailEnd type="none" w="med" len="med"/>
+                    </a:lnR>
+                    <a:lnT w="12700" cap="flat" cmpd="sng" algn="ctr">
+                      <a:solidFill>
+                        <a:srgbClr val="EEF4F3"/>
+                      </a:solidFill>
+                      <a:prstDash val="solid"/>
+                      <a:round/>
+                      <a:headEnd type="none" w="med" len="med"/>
+                      <a:tailEnd type="none" w="med" len="med"/>
+                    </a:lnT>
+                    <a:lnB w="12700" cap="flat" cmpd="sng" algn="ctr">
+                      <a:solidFill>
+                        <a:srgbClr val="EEF4F3"/>
+                      </a:solidFill>
+                      <a:prstDash val="solid"/>
+                      <a:round/>
+                      <a:headEnd type="none" w="med" len="med"/>
+                      <a:tailEnd type="none" w="med" len="med"/>
+                    </a:lnB>
+                  </a:tcPr>
+                </a:tc>
+                <a:tc>
+                  <a:txBody>
+                    <a:bodyPr/>
+                    <a:lstStyle/>
+                    <a:p>
+                      <a:pPr indent="0" marL="0">
+                        <a:buNone/>
+                      </a:pPr>
+                      <a:r>
+                        <a:rPr lang="en-US" sz="1200" dirty="0">
+                          <a:solidFill>
+                            <a:schemeClr val="tx1"/>
+                          </a:solidFill>
+                        </a:rPr>
+                        <a:t>트라이얼 → 유료 전환 · 프로레이션 · 더닝(결제 실패 재시도) · 멀티 테넌시</a:t>
+                      </a:r>
+                      <a:endParaRPr lang="en-US" sz="1200" dirty="0"/>
+                    </a:p>
+                  </a:txBody>
+                  <a:tcPr marL="91440" marR="91440" marT="45720" marB="45720" anchor="ctr">
+                    <a:lnL w="12700" cap="flat" cmpd="sng" algn="ctr">
+                      <a:solidFill>
+                        <a:srgbClr val="EEF4F3"/>
+                      </a:solidFill>
+                      <a:prstDash val="solid"/>
+                      <a:round/>
+                      <a:headEnd type="none" w="med" len="med"/>
+                      <a:tailEnd type="none" w="med" len="med"/>
+                    </a:lnL>
+                    <a:lnR w="12700" cap="flat" cmpd="sng" algn="ctr">
+                      <a:solidFill>
+                        <a:srgbClr val="EEF4F3"/>
+                      </a:solidFill>
+                      <a:prstDash val="solid"/>
+                      <a:round/>
+                      <a:headEnd type="none" w="med" len="med"/>
+                      <a:tailEnd type="none" w="med" len="med"/>
+                    </a:lnR>
+                    <a:lnT w="12700" cap="flat" cmpd="sng" algn="ctr">
+                      <a:solidFill>
+                        <a:srgbClr val="EEF4F3"/>
+                      </a:solidFill>
+                      <a:prstDash val="solid"/>
+                      <a:round/>
+                      <a:headEnd type="none" w="med" len="med"/>
+                      <a:tailEnd type="none" w="med" len="med"/>
+                    </a:lnT>
+                    <a:lnB w="12700" cap="flat" cmpd="sng" algn="ctr">
+                      <a:solidFill>
+                        <a:srgbClr val="EEF4F3"/>
+                      </a:solidFill>
+                      <a:prstDash val="solid"/>
+                      <a:round/>
+                      <a:headEnd type="none" w="med" len="med"/>
+                      <a:tailEnd type="none" w="med" len="med"/>
+                    </a:lnB>
+                  </a:tcPr>
+                </a:tc>
+              </a:tr>
+              <a:tr h="457200">
+                <a:tc>
+                  <a:txBody>
+                    <a:bodyPr/>
+                    <a:lstStyle/>
+                    <a:p>
+                      <a:pPr indent="0" marL="0">
+                        <a:buNone/>
+                      </a:pPr>
+                      <a:r>
+                        <a:rPr lang="en-US" sz="1200" b="1" dirty="0">
+                          <a:solidFill>
+                            <a:schemeClr val="tx1"/>
+                          </a:solidFill>
+                        </a:rPr>
+                        <a:t>예약·O2O</a:t>
+                      </a:r>
+                      <a:endParaRPr lang="en-US" sz="1200" dirty="0"/>
+                    </a:p>
+                  </a:txBody>
+                  <a:tcPr marL="91440" marR="91440" marT="45720" marB="45720" anchor="ctr">
+                    <a:lnL w="12700" cap="flat" cmpd="sng" algn="ctr">
+                      <a:solidFill>
+                        <a:srgbClr val="EEF4F3"/>
+                      </a:solidFill>
+                      <a:prstDash val="solid"/>
+                      <a:round/>
+                      <a:headEnd type="none" w="med" len="med"/>
+                      <a:tailEnd type="none" w="med" len="med"/>
+                    </a:lnL>
+                    <a:lnR w="12700" cap="flat" cmpd="sng" algn="ctr">
+                      <a:solidFill>
+                        <a:srgbClr val="EEF4F3"/>
+                      </a:solidFill>
+                      <a:prstDash val="solid"/>
+                      <a:round/>
+                      <a:headEnd type="none" w="med" len="med"/>
+                      <a:tailEnd type="none" w="med" len="med"/>
+                    </a:lnR>
+                    <a:lnT w="12700" cap="flat" cmpd="sng" algn="ctr">
+                      <a:solidFill>
+                        <a:srgbClr val="EEF4F3"/>
+                      </a:solidFill>
+                      <a:prstDash val="solid"/>
+                      <a:round/>
+                      <a:headEnd type="none" w="med" len="med"/>
+                      <a:tailEnd type="none" w="med" len="med"/>
+                    </a:lnT>
+                    <a:lnB w="12700" cap="flat" cmpd="sng" algn="ctr">
+                      <a:solidFill>
+                        <a:srgbClr val="EEF4F3"/>
+                      </a:solidFill>
+                      <a:prstDash val="solid"/>
+                      <a:round/>
+                      <a:headEnd type="none" w="med" len="med"/>
+                      <a:tailEnd type="none" w="med" len="med"/>
+                    </a:lnB>
+                  </a:tcPr>
+                </a:tc>
+                <a:tc>
+                  <a:txBody>
+                    <a:bodyPr/>
+                    <a:lstStyle/>
+                    <a:p>
+                      <a:pPr indent="0" marL="0">
+                        <a:buNone/>
+                      </a:pPr>
+                      <a:r>
+                        <a:rPr lang="en-US" sz="1200" dirty="0">
+                          <a:solidFill>
+                            <a:schemeClr val="tx1"/>
+                          </a:solidFill>
+                        </a:rPr>
+                        <a:t>슬롯 = 재고(지나면 소멸) · 노쇼 · 예약금 · 동시 예약 충돌</a:t>
+                      </a:r>
+                      <a:endParaRPr lang="en-US" sz="1200" dirty="0"/>
+                    </a:p>
+                  </a:txBody>
+                  <a:tcPr marL="91440" marR="91440" marT="45720" marB="45720" anchor="ctr">
+                    <a:lnL w="12700" cap="flat" cmpd="sng" algn="ctr">
+                      <a:solidFill>
+                        <a:srgbClr val="EEF4F3"/>
+                      </a:solidFill>
+                      <a:prstDash val="solid"/>
+                      <a:round/>
+                      <a:headEnd type="none" w="med" len="med"/>
+                      <a:tailEnd type="none" w="med" len="med"/>
+                    </a:lnL>
+                    <a:lnR w="12700" cap="flat" cmpd="sng" algn="ctr">
+                      <a:solidFill>
+                        <a:srgbClr val="EEF4F3"/>
+                      </a:solidFill>
+                      <a:prstDash val="solid"/>
+                      <a:round/>
+                      <a:headEnd type="none" w="med" len="med"/>
+                      <a:tailEnd type="none" w="med" len="med"/>
+                    </a:lnR>
+                    <a:lnT w="12700" cap="flat" cmpd="sng" algn="ctr">
+                      <a:solidFill>
+                        <a:srgbClr val="EEF4F3"/>
+                      </a:solidFill>
+                      <a:prstDash val="solid"/>
+                      <a:round/>
+                      <a:headEnd type="none" w="med" len="med"/>
+                      <a:tailEnd type="none" w="med" len="med"/>
+                    </a:lnT>
+                    <a:lnB w="12700" cap="flat" cmpd="sng" algn="ctr">
+                      <a:solidFill>
+                        <a:srgbClr val="EEF4F3"/>
+                      </a:solidFill>
+                      <a:prstDash val="solid"/>
+                      <a:round/>
+                      <a:headEnd type="none" w="med" len="med"/>
+                      <a:tailEnd type="none" w="med" len="med"/>
+                    </a:lnB>
+                  </a:tcPr>
+                </a:tc>
+              </a:tr>
+              <a:tr h="457200">
+                <a:tc>
+                  <a:txBody>
+                    <a:bodyPr/>
+                    <a:lstStyle/>
+                    <a:p>
+                      <a:pPr indent="0" marL="0">
+                        <a:buNone/>
+                      </a:pPr>
+                      <a:r>
+                        <a:rPr lang="en-US" sz="1200" b="1" dirty="0">
+                          <a:solidFill>
+                            <a:schemeClr val="tx1"/>
+                          </a:solidFill>
+                        </a:rPr>
+                        <a:t>금융</a:t>
+                      </a:r>
+                      <a:endParaRPr lang="en-US" sz="1200" dirty="0"/>
+                    </a:p>
+                  </a:txBody>
+                  <a:tcPr marL="91440" marR="91440" marT="45720" marB="45720" anchor="ctr">
+                    <a:lnL w="12700" cap="flat" cmpd="sng" algn="ctr">
+                      <a:solidFill>
+                        <a:srgbClr val="EEF4F3"/>
+                      </a:solidFill>
+                      <a:prstDash val="solid"/>
+                      <a:round/>
+                      <a:headEnd type="none" w="med" len="med"/>
+                      <a:tailEnd type="none" w="med" len="med"/>
+                    </a:lnL>
+                    <a:lnR w="12700" cap="flat" cmpd="sng" algn="ctr">
+                      <a:solidFill>
+                        <a:srgbClr val="EEF4F3"/>
+                      </a:solidFill>
+                      <a:prstDash val="solid"/>
+                      <a:round/>
+                      <a:headEnd type="none" w="med" len="med"/>
+                      <a:tailEnd type="none" w="med" len="med"/>
+                    </a:lnR>
+                    <a:lnT w="12700" cap="flat" cmpd="sng" algn="ctr">
+                      <a:solidFill>
+                        <a:srgbClr val="EEF4F3"/>
+                      </a:solidFill>
+                      <a:prstDash val="solid"/>
+                      <a:round/>
+                      <a:headEnd type="none" w="med" len="med"/>
+                      <a:tailEnd type="none" w="med" len="med"/>
+                    </a:lnT>
+                    <a:lnB w="12700" cap="flat" cmpd="sng" algn="ctr">
+                      <a:solidFill>
+                        <a:srgbClr val="EEF4F3"/>
+                      </a:solidFill>
+                      <a:prstDash val="solid"/>
+                      <a:round/>
+                      <a:headEnd type="none" w="med" len="med"/>
+                      <a:tailEnd type="none" w="med" len="med"/>
+                    </a:lnB>
+                  </a:tcPr>
+                </a:tc>
+                <a:tc>
+                  <a:txBody>
+                    <a:bodyPr/>
+                    <a:lstStyle/>
+                    <a:p>
+                      <a:pPr indent="0" marL="0">
+                        <a:buNone/>
+                      </a:pPr>
+                      <a:r>
+                        <a:rPr lang="en-US" sz="1200" dirty="0">
+                          <a:solidFill>
+                            <a:schemeClr val="tx1"/>
+                          </a:solidFill>
+                        </a:rPr>
+                        <a:t>KYC · AML · 원장(덮어쓰지 않기) · 대사 · 이상 거래 탐지</a:t>
+                      </a:r>
+                      <a:endParaRPr lang="en-US" sz="1200" dirty="0"/>
+                    </a:p>
+                  </a:txBody>
+                  <a:tcPr marL="91440" marR="91440" marT="45720" marB="45720" anchor="ctr">
+                    <a:lnL w="12700" cap="flat" cmpd="sng" algn="ctr">
+                      <a:solidFill>
+                        <a:srgbClr val="EEF4F3"/>
+                      </a:solidFill>
+                      <a:prstDash val="solid"/>
+                      <a:round/>
+                      <a:headEnd type="none" w="med" len="med"/>
+                      <a:tailEnd type="none" w="med" len="med"/>
+                    </a:lnL>
+                    <a:lnR w="12700" cap="flat" cmpd="sng" algn="ctr">
+                      <a:solidFill>
+                        <a:srgbClr val="EEF4F3"/>
+                      </a:solidFill>
+                      <a:prstDash val="solid"/>
+                      <a:round/>
+                      <a:headEnd type="none" w="med" len="med"/>
+                      <a:tailEnd type="none" w="med" len="med"/>
+                    </a:lnR>
+                    <a:lnT w="12700" cap="flat" cmpd="sng" algn="ctr">
+                      <a:solidFill>
+                        <a:srgbClr val="EEF4F3"/>
+                      </a:solidFill>
+                      <a:prstDash val="solid"/>
+                      <a:round/>
+                      <a:headEnd type="none" w="med" len="med"/>
+                      <a:tailEnd type="none" w="med" len="med"/>
+                    </a:lnT>
+                    <a:lnB w="12700" cap="flat" cmpd="sng" algn="ctr">
+                      <a:solidFill>
+                        <a:srgbClr val="EEF4F3"/>
+                      </a:solidFill>
+                      <a:prstDash val="solid"/>
+                      <a:round/>
+                      <a:headEnd type="none" w="med" len="med"/>
+                      <a:tailEnd type="none" w="med" len="med"/>
+                    </a:lnB>
+                  </a:tcPr>
+                </a:tc>
+              </a:tr>
+            </a:tbl>
+          </a:graphicData>
+        </a:graphic>
+      </p:graphicFrame>
+      <p:sp>
+        <p:nvSpPr>
+          <p:cNvPr id="4" name="Text 1"/>
+          <p:cNvSpPr txBox="1"/>
+          <p:nvPr/>
+        </p:nvSpPr>
+        <p:spPr>
+          <a:xfrm>
+            <a:off x="457200" y="4645152"/>
+            <a:ext cx="7680960" cy="274320"/>
+          </a:xfrm>
+          <a:prstGeom prst="rect">
+            <a:avLst/>
+          </a:prstGeom>
+          <a:noFill/>
+          <a:ln/>
+        </p:spPr>
+        <p:txBody>
+          <a:bodyPr wrap="square" lIns="0" tIns="0" rIns="0" bIns="0" rtlCol="0" anchor="t"/>
+          <a:lstStyle/>
+          <a:p>
+            <a:pPr indent="0" marL="0">
+              <a:buNone/>
+            </a:pPr>
+            <a:r>
+              <a:rPr lang="en-US" sz="1000" dirty="0">
+                <a:solidFill>
+                  <a:schemeClr val="accent4"/>
+                </a:solidFill>
+              </a:rPr>
+              <a:t>새 분야는 7칸 표(누가·돈 흐름·상태·예외·지표·규제·용어 20개)를 채우며 공부 (35장)</a:t>
+            </a:r>
+            <a:endParaRPr lang="en-US" sz="1000" dirty="0"/>
+          </a:p>
+        </p:txBody>
+      </p:sp>
+      <p:sp>
+        <p:nvSpPr>
+          <p:cNvPr id="25" name="Slide Number Placeholder 0"/>
+          <p:cNvSpPr>
+            <a:spLocks noGrp="1"/>
+          </p:cNvSpPr>
+          <p:nvPr>
+            <p:ph type="sldNum" sz="quarter" idx="4294967295"/>
+          </p:nvPr>
+        </p:nvSpPr>
+        <p:spPr>
+          <a:xfrm>
+            <a:off x="8321040" y="4754880"/>
+            <a:ext cx="457200" cy="274320"/>
+          </a:xfrm>
+          <a:prstGeom prst="rect">
+            <a:avLst/>
+          </a:prstGeom>
+          <a:extLst>
+            <a:ext uri="{C572A759-6A51-4108-AA02-DFA0A04FC94B}">
+              <ma14:wrappingTextBoxFlag xmlns:ma14="http://schemas.microsoft.com/office/mac/drawingml/2011/main" val="0"/>
+            </a:ext>
+          </a:extLst>
+        </p:spPr>
+        <p:txBody>
+          <a:bodyPr/>
+          <a:lstStyle>
+            <a:lvl1pPr>
+              <a:defRPr sz="1000">
+                <a:solidFill>
+                  <a:schemeClr val="accent4"/>
+                </a:solidFill>
+              </a:defRPr>
+            </a:lvl1pPr>
+          </a:lstStyle>
+          <a:p>
+            <a:pPr algn="r"/>
+            <a:fld id="{F7021451-1387-4CA6-816F-3879F97B5CBC}" type="slidenum">
+              <a:rPr b="0" lang="en-US"/>
+              <a:t>54</a:t>
+            </a:fld>
+            <a:endParaRPr lang="en-US"/>
+          </a:p>
+        </p:txBody>
+      </p:sp>
+    </p:spTree>
+  </p:cSld>
+  <p:clrMapOvr>
+    <a:masterClrMapping/>
+  </p:clrMapOvr>
+</p:sld>
+</file>
+
+<file path=ppt/slides/slide55.xml><?xml version="1.0" encoding="utf-8"?>
+<p:sld xmlns:a="http://schemas.openxmlformats.org/drawingml/2006/main" xmlns:r="http://schemas.openxmlformats.org/officeDocument/2006/relationships" xmlns:p="http://schemas.openxmlformats.org/presentationml/2006/main">
+  <p:cSld name="Slide 55">
+    <p:spTree>
+      <p:nvGrpSpPr>
+        <p:cNvPr id="1" name=""/>
+        <p:cNvGrpSpPr/>
+        <p:nvPr/>
+      </p:nvGrpSpPr>
+      <p:grpSpPr>
+        <a:xfrm>
+          <a:off x="0" y="0"/>
+          <a:ext cx="0" cy="0"/>
+          <a:chOff x="0" y="0"/>
+          <a:chExt cx="0" cy="0"/>
+        </a:xfrm>
+      </p:grpSpPr>
+      <p:sp>
+        <p:nvSpPr>
+          <p:cNvPr id="2" name="Text 0"/>
+          <p:cNvSpPr/>
+          <p:nvPr>
+            <p:ph idx="100" type="title" hasCustomPrompt="1"/>
+          </p:nvPr>
+        </p:nvSpPr>
+        <p:spPr>
+          <a:xfrm>
+            <a:off x="548640" y="1371600"/>
+            <a:ext cx="8046720" cy="1280160"/>
+          </a:xfrm>
+          <a:prstGeom prst="rect">
+            <a:avLst/>
+          </a:prstGeom>
+          <a:noFill/>
+          <a:ln/>
+        </p:spPr>
+        <p:txBody>
+          <a:bodyPr wrap="square" lIns="0" tIns="0" rIns="0" bIns="0" rtlCol="0" anchor="b"/>
+          <a:lstStyle/>
+          <a:p>
+            <a:pPr algn="l" indent="0" marL="0">
+              <a:buNone/>
+            </a:pPr>
+            <a:r>
+              <a:rPr lang="en-US" sz="4000" b="1" dirty="0">
+                <a:solidFill>
+                  <a:schemeClr val="bg1"/>
+                </a:solidFill>
+              </a:rPr>
+              <a:t>안전하게, 자주 반복하기</a:t>
+            </a:r>
+            <a:endParaRPr lang="en-US" sz="4000" dirty="0"/>
+          </a:p>
+        </p:txBody>
+      </p:sp>
+      <p:sp>
+        <p:nvSpPr>
+          <p:cNvPr id="3" name="Text 0"/>
+          <p:cNvSpPr/>
+          <p:nvPr>
+            <p:ph idx="101" type="body" hasCustomPrompt="1"/>
+          </p:nvPr>
+        </p:nvSpPr>
+        <p:spPr>
+          <a:xfrm>
+            <a:off x="548640" y="2788920"/>
+            <a:ext cx="8046720" cy="1097280"/>
+          </a:xfrm>
+          <a:prstGeom prst="rect">
+            <a:avLst/>
+          </a:prstGeom>
+          <a:noFill/>
+          <a:ln/>
+        </p:spPr>
+        <p:txBody>
+          <a:bodyPr wrap="square" lIns="0" tIns="0" rIns="0" bIns="0" rtlCol="0" anchor="t"/>
+          <a:lstStyle/>
+          <a:p>
+            <a:pPr algn="l" indent="0" marL="0">
+              <a:buNone/>
+            </a:pPr>
+            <a:r>
+              <a:rPr lang="en-US" sz="1800" dirty="0">
+                <a:solidFill>
+                  <a:schemeClr val="bg2"/>
+                </a:solidFill>
+              </a:rPr>
+              <a:t>기획 → 백업 → 연습용 사이트에서 수정 → 확인 → 배포 → 감시 → 숫자 보기 → 다시 기획</a:t>
+            </a:r>
+            <a:endParaRPr lang="en-US" sz="1800" dirty="0"/>
+          </a:p>
+          <a:p>
+            <a:pPr algn="l" indent="0" marL="0">
+              <a:buNone/>
+            </a:pPr>
+            <a:r>
+              <a:rPr lang="en-US" sz="1800" dirty="0">
+                <a:solidFill>
+                  <a:schemeClr val="bg2"/>
+                </a:solidFill>
+              </a:rPr>
+              <a:t>다음 할 일: docs/13-practice-scenario.md 를 읽고 15장 퀴즈 풀기</a:t>
+            </a:r>
+            <a:endParaRPr lang="en-US" sz="1800" dirty="0"/>
           </a:p>
         </p:txBody>
       </p:sp>

--- a/slides/internet-business-101.pptx
+++ b/slides/internet-business-101.pptx
@@ -60,9 +60,14 @@
     <p:sldId id="308" r:id="rId54"/>
     <p:sldId id="309" r:id="rId55"/>
     <p:sldId id="310" r:id="rId56"/>
+    <p:sldId id="311" r:id="rId57"/>
+    <p:sldId id="312" r:id="rId58"/>
+    <p:sldId id="313" r:id="rId59"/>
+    <p:sldId id="314" r:id="rId60"/>
+    <p:sldId id="315" r:id="rId61"/>
   </p:sldIdLst>
   <p:notesMasterIdLst>
-    <p:notesMasterId r:id="rId57"/>
+    <p:notesMasterId r:id="rId62"/>
   </p:notesMasterIdLst>
   <p:sldSz cx="9144000" cy="5143500"/>
   <p:notesSz cx="5143500" cy="9144000"/>
@@ -161,13 +166,13 @@
   <p:extLst>
     <p:ext uri="{521415D9-36F7-43E2-AB2F-B90AF26B5E84}">
       <p14:sectionLst xmlns:p14="http://schemas.microsoft.com/office/powerpoint/2010/main">
-        <p14:section name="시작" id="{364d1b27-e875-43d2-f800-ad6f569d37a0}">
+        <p14:section name="시작" id="{d62f1d2d-b020-daf7-902a-42ab7d009a70}">
           <p14:sldIdLst>
             <p14:sldId id="256"/>
             <p14:sldId id="257"/>
           </p14:sldIdLst>
         </p14:section>
-        <p14:section name="큰 그림" id="{e071abc0-23a6-cf4c-c2d1-81c7679ce33b}">
+        <p14:section name="큰 그림" id="{ca511d00-fdce-5534-cf04-053994f88586}">
           <p14:sldIdLst>
             <p14:sldId id="258"/>
             <p14:sldId id="259"/>
@@ -176,13 +181,13 @@
             <p14:sldId id="262"/>
           </p14:sldIdLst>
         </p14:section>
-        <p14:section name="만들기" id="{115e535e-1b65-42d7-bded-e93aa35e3a13}">
+        <p14:section name="만들기" id="{c0ab6f67-c53a-a550-5b28-6d19566e9f89}">
           <p14:sldIdLst>
             <p14:sldId id="263"/>
             <p14:sldId id="264"/>
           </p14:sldIdLst>
         </p14:section>
-        <p14:section name="운영하기" id="{129e2bd1-189b-0265-c3b3-5dc418be27ba}">
+        <p14:section name="운영하기" id="{72b97fc9-fe85-a14e-0637-9e0d4b4916c0}">
           <p14:sldIdLst>
             <p14:sldId id="265"/>
             <p14:sldId id="266"/>
@@ -196,18 +201,18 @@
             <p14:sldId id="274"/>
           </p14:sldIdLst>
         </p14:section>
-        <p14:section name="키우기" id="{5b97b1e9-03ca-ba8f-672d-0b06925c0c60}">
+        <p14:section name="키우기" id="{2b160383-9948-a0be-4885-9726f619c0d7}">
           <p14:sldIdLst>
             <p14:sldId id="275"/>
             <p14:sldId id="276"/>
           </p14:sldIdLst>
         </p14:section>
-        <p14:section name="실전" id="{114daad0-c0ef-c9d9-0c2c-9dd128c7d537}">
+        <p14:section name="실전" id="{37311cba-b8de-7d1f-7a39-b28535c5c41c}">
           <p14:sldIdLst>
             <p14:sldId id="277"/>
           </p14:sldIdLst>
         </p14:section>
-        <p14:section name="여러 가지 사이트 사업" id="{d2f9a892-c1b7-9efb-c59a-a63031bfb4e3}">
+        <p14:section name="여러 가지 사이트 사업" id="{97e83ed0-de60-2b70-ddde-cbf260b9f8bc}">
           <p14:sldIdLst>
             <p14:sldId id="278"/>
             <p14:sldId id="279"/>
@@ -218,7 +223,7 @@
             <p14:sldId id="284"/>
           </p14:sldIdLst>
         </p14:section>
-        <p14:section name="더 넓은 분류" id="{cb4c38b9-a440-ae2d-71d1-b6609a120cd8}">
+        <p14:section name="더 넓은 분류" id="{84e699dd-31c9-eb63-e4af-b92f90a8f477}">
           <p14:sldIdLst>
             <p14:sldId id="285"/>
             <p14:sldId id="286"/>
@@ -229,7 +234,7 @@
             <p14:sldId id="291"/>
           </p14:sldIdLst>
         </p14:section>
-        <p14:section name="문의·광고 받기" id="{ad54818d-82ad-4777-9d75-001d13456a37}">
+        <p14:section name="문의·광고 받기" id="{1eeea82e-b56a-1fc9-290e-1b703f55b42d}">
           <p14:sldIdLst>
             <p14:sldId id="292"/>
             <p14:sldId id="293"/>
@@ -238,7 +243,7 @@
             <p14:sldId id="296"/>
           </p14:sldIdLst>
         </p14:section>
-        <p14:section name="마케팅 실전" id="{bf20c87b-729e-9cd0-f199-12e7926be614}">
+        <p14:section name="마케팅 실전" id="{8b979e47-3868-3c2e-70e5-dff5178a69ac}">
           <p14:sldIdLst>
             <p14:sldId id="297"/>
             <p14:sldId id="298"/>
@@ -249,7 +254,7 @@
             <p14:sldId id="303"/>
           </p14:sldIdLst>
         </p14:section>
-        <p14:section name="도메인" id="{88cd1627-b8d8-7286-e544-2dfa163bec9f}">
+        <p14:section name="도메인" id="{c2d031c8-7983-0038-9f5b-d35bc5616fbe}">
           <p14:sldIdLst>
             <p14:sldId id="304"/>
             <p14:sldId id="305"/>
@@ -257,7 +262,16 @@
             <p14:sldId id="307"/>
             <p14:sldId id="308"/>
             <p14:sldId id="309"/>
+          </p14:sldIdLst>
+        </p14:section>
+        <p14:section name="출시 준비" id="{b9777a5d-dec2-0151-15f1-5b57b927ed4e}">
+          <p14:sldIdLst>
             <p14:sldId id="310"/>
+            <p14:sldId id="311"/>
+            <p14:sldId id="312"/>
+            <p14:sldId id="313"/>
+            <p14:sldId id="314"/>
+            <p14:sldId id="315"/>
           </p14:sldIdLst>
         </p14:section>
       </p14:sectionLst>
@@ -6050,6 +6064,358 @@
 </p:notes>
 </file>
 
+<file path=ppt/notesSlides/notesSlide56.xml><?xml version="1.0" encoding="utf-8"?>
+<p:notes xmlns:a="http://schemas.openxmlformats.org/drawingml/2006/main" xmlns:r="http://schemas.openxmlformats.org/officeDocument/2006/relationships" xmlns:p="http://schemas.openxmlformats.org/presentationml/2006/main">
+  <p:cSld>
+    <p:spTree>
+      <p:nvGrpSpPr>
+        <p:cNvPr id="1" name=""/>
+        <p:cNvGrpSpPr/>
+        <p:nvPr/>
+      </p:nvGrpSpPr>
+      <p:grpSpPr>
+        <a:xfrm>
+          <a:off x="0" y="0"/>
+          <a:ext cx="0" cy="0"/>
+          <a:chOff x="0" y="0"/>
+          <a:chExt cx="0" cy="0"/>
+        </a:xfrm>
+      </p:grpSpPr>
+      <p:sp>
+        <p:nvSpPr>
+          <p:cNvPr id="2" name="Slide Image Placeholder 1"/>
+          <p:cNvSpPr>
+            <a:spLocks noGrp="1" noRot="1" noChangeAspect="1"/>
+          </p:cNvSpPr>
+          <p:nvPr>
+            <p:ph type="sldImg"/>
+          </p:nvPr>
+        </p:nvSpPr>
+        <p:spPr/>
+      </p:sp>
+      <p:sp>
+        <p:nvSpPr>
+          <p:cNvPr id="3" name="Notes Placeholder 2"/>
+          <p:cNvSpPr>
+            <a:spLocks noGrp="1"/>
+          </p:cNvSpPr>
+          <p:nvPr>
+            <p:ph type="body" idx="1"/>
+          </p:nvPr>
+        </p:nvSpPr>
+        <p:spPr/>
+        <p:txBody>
+          <a:bodyPr/>
+          <a:lstStyle/>
+          <a:p>
+            <a:r>
+              <a:rPr lang="en-US" dirty="0"/>
+              <a:t/>
+            </a:r>
+            <a:endParaRPr lang="en-US" dirty="0"/>
+          </a:p>
+        </p:txBody>
+      </p:sp>
+      <p:sp>
+        <p:nvSpPr>
+          <p:cNvPr id="4" name="Slide Number Placeholder 3"/>
+          <p:cNvSpPr>
+            <a:spLocks noGrp="1"/>
+          </p:cNvSpPr>
+          <p:nvPr>
+            <p:ph type="sldNum" sz="quarter" idx="10"/>
+          </p:nvPr>
+        </p:nvSpPr>
+        <p:spPr/>
+        <p:txBody>
+          <a:bodyPr/>
+          <a:lstStyle/>
+          <a:p>
+            <a:fld id="{F7021451-1387-4CA6-816F-3879F97B5CBC}" type="slidenum">
+              <a:rPr lang="en-US"/>
+              <a:t>56</a:t>
+            </a:fld>
+            <a:endParaRPr lang="en-US"/>
+          </a:p>
+        </p:txBody>
+      </p:sp>
+    </p:spTree>
+    <p:extLst>
+      <p:ext uri="{BB962C8B-B14F-4D97-AF65-F5344CB8AC3E}">
+        <p14:creationId xmlns:p14="http://schemas.microsoft.com/office/powerpoint/2010/main" val="1024086991"/>
+      </p:ext>
+    </p:extLst>
+  </p:cSld>
+  <p:clrMapOvr>
+    <a:masterClrMapping/>
+  </p:clrMapOvr>
+</p:notes>
+</file>
+
+<file path=ppt/notesSlides/notesSlide57.xml><?xml version="1.0" encoding="utf-8"?>
+<p:notes xmlns:a="http://schemas.openxmlformats.org/drawingml/2006/main" xmlns:r="http://schemas.openxmlformats.org/officeDocument/2006/relationships" xmlns:p="http://schemas.openxmlformats.org/presentationml/2006/main">
+  <p:cSld>
+    <p:spTree>
+      <p:nvGrpSpPr>
+        <p:cNvPr id="1" name=""/>
+        <p:cNvGrpSpPr/>
+        <p:nvPr/>
+      </p:nvGrpSpPr>
+      <p:grpSpPr>
+        <a:xfrm>
+          <a:off x="0" y="0"/>
+          <a:ext cx="0" cy="0"/>
+          <a:chOff x="0" y="0"/>
+          <a:chExt cx="0" cy="0"/>
+        </a:xfrm>
+      </p:grpSpPr>
+      <p:sp>
+        <p:nvSpPr>
+          <p:cNvPr id="2" name="Slide Image Placeholder 1"/>
+          <p:cNvSpPr>
+            <a:spLocks noGrp="1" noRot="1" noChangeAspect="1"/>
+          </p:cNvSpPr>
+          <p:nvPr>
+            <p:ph type="sldImg"/>
+          </p:nvPr>
+        </p:nvSpPr>
+        <p:spPr/>
+      </p:sp>
+      <p:sp>
+        <p:nvSpPr>
+          <p:cNvPr id="3" name="Notes Placeholder 2"/>
+          <p:cNvSpPr>
+            <a:spLocks noGrp="1"/>
+          </p:cNvSpPr>
+          <p:nvPr>
+            <p:ph type="body" idx="1"/>
+          </p:nvPr>
+        </p:nvSpPr>
+        <p:spPr/>
+        <p:txBody>
+          <a:bodyPr/>
+          <a:lstStyle/>
+          <a:p>
+            <a:r>
+              <a:rPr lang="en-US" dirty="0"/>
+              <a:t/>
+            </a:r>
+            <a:endParaRPr lang="en-US" dirty="0"/>
+          </a:p>
+        </p:txBody>
+      </p:sp>
+      <p:sp>
+        <p:nvSpPr>
+          <p:cNvPr id="4" name="Slide Number Placeholder 3"/>
+          <p:cNvSpPr>
+            <a:spLocks noGrp="1"/>
+          </p:cNvSpPr>
+          <p:nvPr>
+            <p:ph type="sldNum" sz="quarter" idx="10"/>
+          </p:nvPr>
+        </p:nvSpPr>
+        <p:spPr/>
+        <p:txBody>
+          <a:bodyPr/>
+          <a:lstStyle/>
+          <a:p>
+            <a:fld id="{F7021451-1387-4CA6-816F-3879F97B5CBC}" type="slidenum">
+              <a:rPr lang="en-US"/>
+              <a:t>57</a:t>
+            </a:fld>
+            <a:endParaRPr lang="en-US"/>
+          </a:p>
+        </p:txBody>
+      </p:sp>
+    </p:spTree>
+    <p:extLst>
+      <p:ext uri="{BB962C8B-B14F-4D97-AF65-F5344CB8AC3E}">
+        <p14:creationId xmlns:p14="http://schemas.microsoft.com/office/powerpoint/2010/main" val="1024086991"/>
+      </p:ext>
+    </p:extLst>
+  </p:cSld>
+  <p:clrMapOvr>
+    <a:masterClrMapping/>
+  </p:clrMapOvr>
+</p:notes>
+</file>
+
+<file path=ppt/notesSlides/notesSlide58.xml><?xml version="1.0" encoding="utf-8"?>
+<p:notes xmlns:a="http://schemas.openxmlformats.org/drawingml/2006/main" xmlns:r="http://schemas.openxmlformats.org/officeDocument/2006/relationships" xmlns:p="http://schemas.openxmlformats.org/presentationml/2006/main">
+  <p:cSld>
+    <p:spTree>
+      <p:nvGrpSpPr>
+        <p:cNvPr id="1" name=""/>
+        <p:cNvGrpSpPr/>
+        <p:nvPr/>
+      </p:nvGrpSpPr>
+      <p:grpSpPr>
+        <a:xfrm>
+          <a:off x="0" y="0"/>
+          <a:ext cx="0" cy="0"/>
+          <a:chOff x="0" y="0"/>
+          <a:chExt cx="0" cy="0"/>
+        </a:xfrm>
+      </p:grpSpPr>
+      <p:sp>
+        <p:nvSpPr>
+          <p:cNvPr id="2" name="Slide Image Placeholder 1"/>
+          <p:cNvSpPr>
+            <a:spLocks noGrp="1" noRot="1" noChangeAspect="1"/>
+          </p:cNvSpPr>
+          <p:nvPr>
+            <p:ph type="sldImg"/>
+          </p:nvPr>
+        </p:nvSpPr>
+        <p:spPr/>
+      </p:sp>
+      <p:sp>
+        <p:nvSpPr>
+          <p:cNvPr id="3" name="Notes Placeholder 2"/>
+          <p:cNvSpPr>
+            <a:spLocks noGrp="1"/>
+          </p:cNvSpPr>
+          <p:nvPr>
+            <p:ph type="body" idx="1"/>
+          </p:nvPr>
+        </p:nvSpPr>
+        <p:spPr/>
+        <p:txBody>
+          <a:bodyPr/>
+          <a:lstStyle/>
+          <a:p>
+            <a:r>
+              <a:rPr lang="en-US" dirty="0"/>
+              <a:t/>
+            </a:r>
+            <a:endParaRPr lang="en-US" dirty="0"/>
+          </a:p>
+        </p:txBody>
+      </p:sp>
+      <p:sp>
+        <p:nvSpPr>
+          <p:cNvPr id="4" name="Slide Number Placeholder 3"/>
+          <p:cNvSpPr>
+            <a:spLocks noGrp="1"/>
+          </p:cNvSpPr>
+          <p:nvPr>
+            <p:ph type="sldNum" sz="quarter" idx="10"/>
+          </p:nvPr>
+        </p:nvSpPr>
+        <p:spPr/>
+        <p:txBody>
+          <a:bodyPr/>
+          <a:lstStyle/>
+          <a:p>
+            <a:fld id="{F7021451-1387-4CA6-816F-3879F97B5CBC}" type="slidenum">
+              <a:rPr lang="en-US"/>
+              <a:t>58</a:t>
+            </a:fld>
+            <a:endParaRPr lang="en-US"/>
+          </a:p>
+        </p:txBody>
+      </p:sp>
+    </p:spTree>
+    <p:extLst>
+      <p:ext uri="{BB962C8B-B14F-4D97-AF65-F5344CB8AC3E}">
+        <p14:creationId xmlns:p14="http://schemas.microsoft.com/office/powerpoint/2010/main" val="1024086991"/>
+      </p:ext>
+    </p:extLst>
+  </p:cSld>
+  <p:clrMapOvr>
+    <a:masterClrMapping/>
+  </p:clrMapOvr>
+</p:notes>
+</file>
+
+<file path=ppt/notesSlides/notesSlide59.xml><?xml version="1.0" encoding="utf-8"?>
+<p:notes xmlns:a="http://schemas.openxmlformats.org/drawingml/2006/main" xmlns:r="http://schemas.openxmlformats.org/officeDocument/2006/relationships" xmlns:p="http://schemas.openxmlformats.org/presentationml/2006/main">
+  <p:cSld>
+    <p:spTree>
+      <p:nvGrpSpPr>
+        <p:cNvPr id="1" name=""/>
+        <p:cNvGrpSpPr/>
+        <p:nvPr/>
+      </p:nvGrpSpPr>
+      <p:grpSpPr>
+        <a:xfrm>
+          <a:off x="0" y="0"/>
+          <a:ext cx="0" cy="0"/>
+          <a:chOff x="0" y="0"/>
+          <a:chExt cx="0" cy="0"/>
+        </a:xfrm>
+      </p:grpSpPr>
+      <p:sp>
+        <p:nvSpPr>
+          <p:cNvPr id="2" name="Slide Image Placeholder 1"/>
+          <p:cNvSpPr>
+            <a:spLocks noGrp="1" noRot="1" noChangeAspect="1"/>
+          </p:cNvSpPr>
+          <p:nvPr>
+            <p:ph type="sldImg"/>
+          </p:nvPr>
+        </p:nvSpPr>
+        <p:spPr/>
+      </p:sp>
+      <p:sp>
+        <p:nvSpPr>
+          <p:cNvPr id="3" name="Notes Placeholder 2"/>
+          <p:cNvSpPr>
+            <a:spLocks noGrp="1"/>
+          </p:cNvSpPr>
+          <p:nvPr>
+            <p:ph type="body" idx="1"/>
+          </p:nvPr>
+        </p:nvSpPr>
+        <p:spPr/>
+        <p:txBody>
+          <a:bodyPr/>
+          <a:lstStyle/>
+          <a:p>
+            <a:r>
+              <a:rPr lang="en-US" dirty="0"/>
+              <a:t/>
+            </a:r>
+            <a:endParaRPr lang="en-US" dirty="0"/>
+          </a:p>
+        </p:txBody>
+      </p:sp>
+      <p:sp>
+        <p:nvSpPr>
+          <p:cNvPr id="4" name="Slide Number Placeholder 3"/>
+          <p:cNvSpPr>
+            <a:spLocks noGrp="1"/>
+          </p:cNvSpPr>
+          <p:nvPr>
+            <p:ph type="sldNum" sz="quarter" idx="10"/>
+          </p:nvPr>
+        </p:nvSpPr>
+        <p:spPr/>
+        <p:txBody>
+          <a:bodyPr/>
+          <a:lstStyle/>
+          <a:p>
+            <a:fld id="{F7021451-1387-4CA6-816F-3879F97B5CBC}" type="slidenum">
+              <a:rPr lang="en-US"/>
+              <a:t>59</a:t>
+            </a:fld>
+            <a:endParaRPr lang="en-US"/>
+          </a:p>
+        </p:txBody>
+      </p:sp>
+    </p:spTree>
+    <p:extLst>
+      <p:ext uri="{BB962C8B-B14F-4D97-AF65-F5344CB8AC3E}">
+        <p14:creationId xmlns:p14="http://schemas.microsoft.com/office/powerpoint/2010/main" val="1024086991"/>
+      </p:ext>
+    </p:extLst>
+  </p:cSld>
+  <p:clrMapOvr>
+    <a:masterClrMapping/>
+  </p:clrMapOvr>
+</p:notes>
+</file>
+
 <file path=ppt/notesSlides/notesSlide6.xml><?xml version="1.0" encoding="utf-8"?>
 <p:notes xmlns:a="http://schemas.openxmlformats.org/drawingml/2006/main" xmlns:r="http://schemas.openxmlformats.org/officeDocument/2006/relationships" xmlns:p="http://schemas.openxmlformats.org/presentationml/2006/main">
   <p:cSld>
@@ -6120,6 +6486,94 @@
             <a:fld id="{F7021451-1387-4CA6-816F-3879F97B5CBC}" type="slidenum">
               <a:rPr lang="en-US"/>
               <a:t>6</a:t>
+            </a:fld>
+            <a:endParaRPr lang="en-US"/>
+          </a:p>
+        </p:txBody>
+      </p:sp>
+    </p:spTree>
+    <p:extLst>
+      <p:ext uri="{BB962C8B-B14F-4D97-AF65-F5344CB8AC3E}">
+        <p14:creationId xmlns:p14="http://schemas.microsoft.com/office/powerpoint/2010/main" val="1024086991"/>
+      </p:ext>
+    </p:extLst>
+  </p:cSld>
+  <p:clrMapOvr>
+    <a:masterClrMapping/>
+  </p:clrMapOvr>
+</p:notes>
+</file>
+
+<file path=ppt/notesSlides/notesSlide60.xml><?xml version="1.0" encoding="utf-8"?>
+<p:notes xmlns:a="http://schemas.openxmlformats.org/drawingml/2006/main" xmlns:r="http://schemas.openxmlformats.org/officeDocument/2006/relationships" xmlns:p="http://schemas.openxmlformats.org/presentationml/2006/main">
+  <p:cSld>
+    <p:spTree>
+      <p:nvGrpSpPr>
+        <p:cNvPr id="1" name=""/>
+        <p:cNvGrpSpPr/>
+        <p:nvPr/>
+      </p:nvGrpSpPr>
+      <p:grpSpPr>
+        <a:xfrm>
+          <a:off x="0" y="0"/>
+          <a:ext cx="0" cy="0"/>
+          <a:chOff x="0" y="0"/>
+          <a:chExt cx="0" cy="0"/>
+        </a:xfrm>
+      </p:grpSpPr>
+      <p:sp>
+        <p:nvSpPr>
+          <p:cNvPr id="2" name="Slide Image Placeholder 1"/>
+          <p:cNvSpPr>
+            <a:spLocks noGrp="1" noRot="1" noChangeAspect="1"/>
+          </p:cNvSpPr>
+          <p:nvPr>
+            <p:ph type="sldImg"/>
+          </p:nvPr>
+        </p:nvSpPr>
+        <p:spPr/>
+      </p:sp>
+      <p:sp>
+        <p:nvSpPr>
+          <p:cNvPr id="3" name="Notes Placeholder 2"/>
+          <p:cNvSpPr>
+            <a:spLocks noGrp="1"/>
+          </p:cNvSpPr>
+          <p:nvPr>
+            <p:ph type="body" idx="1"/>
+          </p:nvPr>
+        </p:nvSpPr>
+        <p:spPr/>
+        <p:txBody>
+          <a:bodyPr/>
+          <a:lstStyle/>
+          <a:p>
+            <a:r>
+              <a:rPr lang="en-US" dirty="0"/>
+              <a:t/>
+            </a:r>
+            <a:endParaRPr lang="en-US" dirty="0"/>
+          </a:p>
+        </p:txBody>
+      </p:sp>
+      <p:sp>
+        <p:nvSpPr>
+          <p:cNvPr id="4" name="Slide Number Placeholder 3"/>
+          <p:cNvSpPr>
+            <a:spLocks noGrp="1"/>
+          </p:cNvSpPr>
+          <p:nvPr>
+            <p:ph type="sldNum" sz="quarter" idx="10"/>
+          </p:nvPr>
+        </p:nvSpPr>
+        <p:spPr/>
+        <p:txBody>
+          <a:bodyPr/>
+          <a:lstStyle/>
+          <a:p>
+            <a:fld id="{F7021451-1387-4CA6-816F-3879F97B5CBC}" type="slidenum">
+              <a:rPr lang="en-US"/>
+              <a:t>60</a:t>
             </a:fld>
             <a:endParaRPr lang="en-US"/>
           </a:p>
@@ -43521,7 +43975,7 @@
                   <a:schemeClr val="bg1"/>
                 </a:solidFill>
               </a:rPr>
-              <a:t>안전하게, 자주 반복하기</a:t>
+              <a:t>출시 준비</a:t>
             </a:r>
             <a:endParaRPr lang="en-US" sz="4000" dirty="0"/>
           </a:p>
@@ -43559,23 +44013,3563 @@
                   <a:schemeClr val="bg2"/>
                 </a:solidFill>
               </a:rPr>
-              <a:t>기획 → 백업 → 연습용 사이트에서 수정 → 확인 → 배포 → 감시 → 숫자 보기 → 다시 기획</a:t>
+              <a:t>서버·호스팅 고르기 · 꼭 해야 하는 보안 · 출시 전 Claude에게 요청할 30가지 — 36–38장</a:t>
             </a:r>
             <a:endParaRPr lang="en-US" sz="1800" dirty="0"/>
           </a:p>
-          <a:p>
-            <a:pPr algn="l" indent="0" marL="0">
-              <a:buNone/>
-            </a:pPr>
-            <a:r>
-              <a:rPr lang="en-US" sz="1800" dirty="0">
-                <a:solidFill>
-                  <a:schemeClr val="bg2"/>
-                </a:solidFill>
-              </a:rPr>
-              <a:t>다음 할 일: docs/13-practice-scenario.md 를 읽고 15장 퀴즈 풀기</a:t>
+        </p:txBody>
+      </p:sp>
+    </p:spTree>
+  </p:cSld>
+  <p:clrMapOvr>
+    <a:masterClrMapping/>
+  </p:clrMapOvr>
+</p:sld>
+</file>
+
+<file path=ppt/slides/slide56.xml><?xml version="1.0" encoding="utf-8"?>
+<p:sld xmlns:a="http://schemas.openxmlformats.org/drawingml/2006/main" xmlns:r="http://schemas.openxmlformats.org/officeDocument/2006/relationships" xmlns:p="http://schemas.openxmlformats.org/presentationml/2006/main">
+  <p:cSld name="Slide 56">
+    <p:spTree>
+      <p:nvGrpSpPr>
+        <p:cNvPr id="1" name=""/>
+        <p:cNvGrpSpPr/>
+        <p:nvPr/>
+      </p:nvGrpSpPr>
+      <p:grpSpPr>
+        <a:xfrm>
+          <a:off x="0" y="0"/>
+          <a:ext cx="0" cy="0"/>
+          <a:chOff x="0" y="0"/>
+          <a:chExt cx="0" cy="0"/>
+        </a:xfrm>
+      </p:grpSpPr>
+      <p:sp>
+        <p:nvSpPr>
+          <p:cNvPr id="2" name="Text 0"/>
+          <p:cNvSpPr/>
+          <p:nvPr>
+            <p:ph idx="100" type="title" hasCustomPrompt="1"/>
+          </p:nvPr>
+        </p:nvSpPr>
+        <p:spPr>
+          <a:xfrm>
+            <a:off x="457200" y="274320"/>
+            <a:ext cx="8229600" cy="685800"/>
+          </a:xfrm>
+          <a:prstGeom prst="rect">
+            <a:avLst/>
+          </a:prstGeom>
+          <a:noFill/>
+          <a:ln/>
+        </p:spPr>
+        <p:txBody>
+          <a:bodyPr wrap="square" lIns="0" tIns="0" rIns="0" bIns="0" rtlCol="0" anchor="ctr"/>
+          <a:lstStyle/>
+          <a:p>
+            <a:pPr indent="0" marL="0">
+              <a:buNone/>
+            </a:pPr>
+            <a:r>
+              <a:rPr lang="en-US" sz="2800" b="1" dirty="0">
+                <a:solidFill>
+                  <a:schemeClr val="tx2"/>
+                </a:solidFill>
+              </a:rPr>
+              <a:t>서버·호스팅: 사이트 종류로 고른다</a:t>
+            </a:r>
+            <a:endParaRPr lang="en-US" sz="2800" dirty="0"/>
+          </a:p>
+        </p:txBody>
+      </p:sp>
+      <p:graphicFrame>
+        <p:nvGraphicFramePr>
+          <p:cNvPr id="57" name="Table 0"/>
+          <p:cNvGraphicFramePr>
+            <a:graphicFrameLocks noGrp="1"/>
+          </p:cNvGraphicFramePr>
+          <p:nvPr>
+            <p:extLst>
+              <p:ext uri="{D42A27DB-BD31-4B8C-83A1-F6EECF244321}">
+                <p14:modId xmlns:p14="http://schemas.microsoft.com/office/powerpoint/2010/main" val="1579011935"/>
+              </p:ext>
+            </p:extLst>
+          </p:nvPr>
+        </p:nvGraphicFramePr>
+        <p:xfrm>
+          <a:off x="457200" y="1143000"/>
+          <a:ext cx="8229600" cy="914400"/>
+        </p:xfrm>
+        <a:graphic>
+          <a:graphicData uri="http://schemas.openxmlformats.org/drawingml/2006/table">
+            <a:tbl>
+              <a:tblPr/>
+              <a:tblGrid>
+                <a:gridCol w="2286000"/>
+                <a:gridCol w="3017520"/>
+                <a:gridCol w="2926080"/>
+              </a:tblGrid>
+              <a:tr h="411480">
+                <a:tc>
+                  <a:txBody>
+                    <a:bodyPr/>
+                    <a:lstStyle/>
+                    <a:p>
+                      <a:pPr indent="0" marL="0">
+                        <a:buNone/>
+                      </a:pPr>
+                      <a:r>
+                        <a:rPr lang="en-US" sz="1200" b="1" dirty="0">
+                          <a:solidFill>
+                            <a:schemeClr val="bg1"/>
+                          </a:solidFill>
+                        </a:rPr>
+                        <a:t>사이트 종류</a:t>
+                      </a:r>
+                      <a:endParaRPr lang="en-US" sz="1200" dirty="0"/>
+                    </a:p>
+                  </a:txBody>
+                  <a:tcPr marL="91440" marR="91440" marT="45720" marB="45720" anchor="ctr">
+                    <a:lnL w="12700" cap="flat" cmpd="sng" algn="ctr">
+                      <a:solidFill>
+                        <a:srgbClr val="EEF4F3"/>
+                      </a:solidFill>
+                      <a:prstDash val="solid"/>
+                      <a:round/>
+                      <a:headEnd type="none" w="med" len="med"/>
+                      <a:tailEnd type="none" w="med" len="med"/>
+                    </a:lnL>
+                    <a:lnR w="12700" cap="flat" cmpd="sng" algn="ctr">
+                      <a:solidFill>
+                        <a:srgbClr val="EEF4F3"/>
+                      </a:solidFill>
+                      <a:prstDash val="solid"/>
+                      <a:round/>
+                      <a:headEnd type="none" w="med" len="med"/>
+                      <a:tailEnd type="none" w="med" len="med"/>
+                    </a:lnR>
+                    <a:lnT w="12700" cap="flat" cmpd="sng" algn="ctr">
+                      <a:solidFill>
+                        <a:srgbClr val="EEF4F3"/>
+                      </a:solidFill>
+                      <a:prstDash val="solid"/>
+                      <a:round/>
+                      <a:headEnd type="none" w="med" len="med"/>
+                      <a:tailEnd type="none" w="med" len="med"/>
+                    </a:lnT>
+                    <a:lnB w="12700" cap="flat" cmpd="sng" algn="ctr">
+                      <a:solidFill>
+                        <a:srgbClr val="EEF4F3"/>
+                      </a:solidFill>
+                      <a:prstDash val="solid"/>
+                      <a:round/>
+                      <a:headEnd type="none" w="med" len="med"/>
+                      <a:tailEnd type="none" w="med" len="med"/>
+                    </a:lnB>
+                    <a:solidFill>
+                      <a:schemeClr val="tx2"/>
+                    </a:solidFill>
+                  </a:tcPr>
+                </a:tc>
+                <a:tc>
+                  <a:txBody>
+                    <a:bodyPr/>
+                    <a:lstStyle/>
+                    <a:p>
+                      <a:pPr indent="0" marL="0">
+                        <a:buNone/>
+                      </a:pPr>
+                      <a:r>
+                        <a:rPr lang="en-US" sz="1200" b="1" dirty="0">
+                          <a:solidFill>
+                            <a:schemeClr val="bg1"/>
+                          </a:solidFill>
+                        </a:rPr>
+                        <a:t>추천 출발점</a:t>
+                      </a:r>
+                      <a:endParaRPr lang="en-US" sz="1200" dirty="0"/>
+                    </a:p>
+                  </a:txBody>
+                  <a:tcPr marL="91440" marR="91440" marT="45720" marB="45720" anchor="ctr">
+                    <a:lnL w="12700" cap="flat" cmpd="sng" algn="ctr">
+                      <a:solidFill>
+                        <a:srgbClr val="EEF4F3"/>
+                      </a:solidFill>
+                      <a:prstDash val="solid"/>
+                      <a:round/>
+                      <a:headEnd type="none" w="med" len="med"/>
+                      <a:tailEnd type="none" w="med" len="med"/>
+                    </a:lnL>
+                    <a:lnR w="12700" cap="flat" cmpd="sng" algn="ctr">
+                      <a:solidFill>
+                        <a:srgbClr val="EEF4F3"/>
+                      </a:solidFill>
+                      <a:prstDash val="solid"/>
+                      <a:round/>
+                      <a:headEnd type="none" w="med" len="med"/>
+                      <a:tailEnd type="none" w="med" len="med"/>
+                    </a:lnR>
+                    <a:lnT w="12700" cap="flat" cmpd="sng" algn="ctr">
+                      <a:solidFill>
+                        <a:srgbClr val="EEF4F3"/>
+                      </a:solidFill>
+                      <a:prstDash val="solid"/>
+                      <a:round/>
+                      <a:headEnd type="none" w="med" len="med"/>
+                      <a:tailEnd type="none" w="med" len="med"/>
+                    </a:lnT>
+                    <a:lnB w="12700" cap="flat" cmpd="sng" algn="ctr">
+                      <a:solidFill>
+                        <a:srgbClr val="EEF4F3"/>
+                      </a:solidFill>
+                      <a:prstDash val="solid"/>
+                      <a:round/>
+                      <a:headEnd type="none" w="med" len="med"/>
+                      <a:tailEnd type="none" w="med" len="med"/>
+                    </a:lnB>
+                    <a:solidFill>
+                      <a:schemeClr val="tx2"/>
+                    </a:solidFill>
+                  </a:tcPr>
+                </a:tc>
+                <a:tc>
+                  <a:txBody>
+                    <a:bodyPr/>
+                    <a:lstStyle/>
+                    <a:p>
+                      <a:pPr indent="0" marL="0">
+                        <a:buNone/>
+                      </a:pPr>
+                      <a:r>
+                        <a:rPr lang="en-US" sz="1200" b="1" dirty="0">
+                          <a:solidFill>
+                            <a:schemeClr val="bg1"/>
+                          </a:solidFill>
+                        </a:rPr>
+                        <a:t>내가 할 일</a:t>
+                      </a:r>
+                      <a:endParaRPr lang="en-US" sz="1200" dirty="0"/>
+                    </a:p>
+                  </a:txBody>
+                  <a:tcPr marL="91440" marR="91440" marT="45720" marB="45720" anchor="ctr">
+                    <a:lnL w="12700" cap="flat" cmpd="sng" algn="ctr">
+                      <a:solidFill>
+                        <a:srgbClr val="EEF4F3"/>
+                      </a:solidFill>
+                      <a:prstDash val="solid"/>
+                      <a:round/>
+                      <a:headEnd type="none" w="med" len="med"/>
+                      <a:tailEnd type="none" w="med" len="med"/>
+                    </a:lnL>
+                    <a:lnR w="12700" cap="flat" cmpd="sng" algn="ctr">
+                      <a:solidFill>
+                        <a:srgbClr val="EEF4F3"/>
+                      </a:solidFill>
+                      <a:prstDash val="solid"/>
+                      <a:round/>
+                      <a:headEnd type="none" w="med" len="med"/>
+                      <a:tailEnd type="none" w="med" len="med"/>
+                    </a:lnR>
+                    <a:lnT w="12700" cap="flat" cmpd="sng" algn="ctr">
+                      <a:solidFill>
+                        <a:srgbClr val="EEF4F3"/>
+                      </a:solidFill>
+                      <a:prstDash val="solid"/>
+                      <a:round/>
+                      <a:headEnd type="none" w="med" len="med"/>
+                      <a:tailEnd type="none" w="med" len="med"/>
+                    </a:lnT>
+                    <a:lnB w="12700" cap="flat" cmpd="sng" algn="ctr">
+                      <a:solidFill>
+                        <a:srgbClr val="EEF4F3"/>
+                      </a:solidFill>
+                      <a:prstDash val="solid"/>
+                      <a:round/>
+                      <a:headEnd type="none" w="med" len="med"/>
+                      <a:tailEnd type="none" w="med" len="med"/>
+                    </a:lnB>
+                    <a:solidFill>
+                      <a:schemeClr val="tx2"/>
+                    </a:solidFill>
+                  </a:tcPr>
+                </a:tc>
+              </a:tr>
+              <a:tr h="411480">
+                <a:tc>
+                  <a:txBody>
+                    <a:bodyPr/>
+                    <a:lstStyle/>
+                    <a:p>
+                      <a:pPr indent="0" marL="0">
+                        <a:buNone/>
+                      </a:pPr>
+                      <a:r>
+                        <a:rPr lang="en-US" sz="1200" b="1" dirty="0">
+                          <a:solidFill>
+                            <a:schemeClr val="tx1"/>
+                          </a:solidFill>
+                        </a:rPr>
+                        <a:t>쇼핑몰</a:t>
+                      </a:r>
+                      <a:endParaRPr lang="en-US" sz="1200" dirty="0"/>
+                    </a:p>
+                  </a:txBody>
+                  <a:tcPr marL="91440" marR="91440" marT="45720" marB="45720" anchor="ctr">
+                    <a:lnL w="12700" cap="flat" cmpd="sng" algn="ctr">
+                      <a:solidFill>
+                        <a:srgbClr val="EEF4F3"/>
+                      </a:solidFill>
+                      <a:prstDash val="solid"/>
+                      <a:round/>
+                      <a:headEnd type="none" w="med" len="med"/>
+                      <a:tailEnd type="none" w="med" len="med"/>
+                    </a:lnL>
+                    <a:lnR w="12700" cap="flat" cmpd="sng" algn="ctr">
+                      <a:solidFill>
+                        <a:srgbClr val="EEF4F3"/>
+                      </a:solidFill>
+                      <a:prstDash val="solid"/>
+                      <a:round/>
+                      <a:headEnd type="none" w="med" len="med"/>
+                      <a:tailEnd type="none" w="med" len="med"/>
+                    </a:lnR>
+                    <a:lnT w="12700" cap="flat" cmpd="sng" algn="ctr">
+                      <a:solidFill>
+                        <a:srgbClr val="EEF4F3"/>
+                      </a:solidFill>
+                      <a:prstDash val="solid"/>
+                      <a:round/>
+                      <a:headEnd type="none" w="med" len="med"/>
+                      <a:tailEnd type="none" w="med" len="med"/>
+                    </a:lnT>
+                    <a:lnB w="12700" cap="flat" cmpd="sng" algn="ctr">
+                      <a:solidFill>
+                        <a:srgbClr val="EEF4F3"/>
+                      </a:solidFill>
+                      <a:prstDash val="solid"/>
+                      <a:round/>
+                      <a:headEnd type="none" w="med" len="med"/>
+                      <a:tailEnd type="none" w="med" len="med"/>
+                    </a:lnB>
+                  </a:tcPr>
+                </a:tc>
+                <a:tc>
+                  <a:txBody>
+                    <a:bodyPr/>
+                    <a:lstStyle/>
+                    <a:p>
+                      <a:pPr indent="0" marL="0">
+                        <a:buNone/>
+                      </a:pPr>
+                      <a:r>
+                        <a:rPr lang="en-US" sz="1200" dirty="0">
+                          <a:solidFill>
+                            <a:schemeClr val="tx1"/>
+                          </a:solidFill>
+                        </a:rPr>
+                        <a:t>국내 쇼핑몰 빌더</a:t>
+                      </a:r>
+                      <a:endParaRPr lang="en-US" sz="1200" dirty="0"/>
+                    </a:p>
+                  </a:txBody>
+                  <a:tcPr marL="91440" marR="91440" marT="45720" marB="45720" anchor="ctr">
+                    <a:lnL w="12700" cap="flat" cmpd="sng" algn="ctr">
+                      <a:solidFill>
+                        <a:srgbClr val="EEF4F3"/>
+                      </a:solidFill>
+                      <a:prstDash val="solid"/>
+                      <a:round/>
+                      <a:headEnd type="none" w="med" len="med"/>
+                      <a:tailEnd type="none" w="med" len="med"/>
+                    </a:lnL>
+                    <a:lnR w="12700" cap="flat" cmpd="sng" algn="ctr">
+                      <a:solidFill>
+                        <a:srgbClr val="EEF4F3"/>
+                      </a:solidFill>
+                      <a:prstDash val="solid"/>
+                      <a:round/>
+                      <a:headEnd type="none" w="med" len="med"/>
+                      <a:tailEnd type="none" w="med" len="med"/>
+                    </a:lnR>
+                    <a:lnT w="12700" cap="flat" cmpd="sng" algn="ctr">
+                      <a:solidFill>
+                        <a:srgbClr val="EEF4F3"/>
+                      </a:solidFill>
+                      <a:prstDash val="solid"/>
+                      <a:round/>
+                      <a:headEnd type="none" w="med" len="med"/>
+                      <a:tailEnd type="none" w="med" len="med"/>
+                    </a:lnT>
+                    <a:lnB w="12700" cap="flat" cmpd="sng" algn="ctr">
+                      <a:solidFill>
+                        <a:srgbClr val="EEF4F3"/>
+                      </a:solidFill>
+                      <a:prstDash val="solid"/>
+                      <a:round/>
+                      <a:headEnd type="none" w="med" len="med"/>
+                      <a:tailEnd type="none" w="med" len="med"/>
+                    </a:lnB>
+                  </a:tcPr>
+                </a:tc>
+                <a:tc>
+                  <a:txBody>
+                    <a:bodyPr/>
+                    <a:lstStyle/>
+                    <a:p>
+                      <a:pPr indent="0" marL="0">
+                        <a:buNone/>
+                      </a:pPr>
+                      <a:r>
+                        <a:rPr lang="en-US" sz="1200" dirty="0">
+                          <a:solidFill>
+                            <a:schemeClr val="tx1"/>
+                          </a:solidFill>
+                        </a:rPr>
+                        <a:t>거의 없음 (업체가 대부분 처리)</a:t>
+                      </a:r>
+                      <a:endParaRPr lang="en-US" sz="1200" dirty="0"/>
+                    </a:p>
+                  </a:txBody>
+                  <a:tcPr marL="91440" marR="91440" marT="45720" marB="45720" anchor="ctr">
+                    <a:lnL w="12700" cap="flat" cmpd="sng" algn="ctr">
+                      <a:solidFill>
+                        <a:srgbClr val="EEF4F3"/>
+                      </a:solidFill>
+                      <a:prstDash val="solid"/>
+                      <a:round/>
+                      <a:headEnd type="none" w="med" len="med"/>
+                      <a:tailEnd type="none" w="med" len="med"/>
+                    </a:lnL>
+                    <a:lnR w="12700" cap="flat" cmpd="sng" algn="ctr">
+                      <a:solidFill>
+                        <a:srgbClr val="EEF4F3"/>
+                      </a:solidFill>
+                      <a:prstDash val="solid"/>
+                      <a:round/>
+                      <a:headEnd type="none" w="med" len="med"/>
+                      <a:tailEnd type="none" w="med" len="med"/>
+                    </a:lnR>
+                    <a:lnT w="12700" cap="flat" cmpd="sng" algn="ctr">
+                      <a:solidFill>
+                        <a:srgbClr val="EEF4F3"/>
+                      </a:solidFill>
+                      <a:prstDash val="solid"/>
+                      <a:round/>
+                      <a:headEnd type="none" w="med" len="med"/>
+                      <a:tailEnd type="none" w="med" len="med"/>
+                    </a:lnT>
+                    <a:lnB w="12700" cap="flat" cmpd="sng" algn="ctr">
+                      <a:solidFill>
+                        <a:srgbClr val="EEF4F3"/>
+                      </a:solidFill>
+                      <a:prstDash val="solid"/>
+                      <a:round/>
+                      <a:headEnd type="none" w="med" len="med"/>
+                      <a:tailEnd type="none" w="med" len="med"/>
+                    </a:lnB>
+                  </a:tcPr>
+                </a:tc>
+              </a:tr>
+              <a:tr h="411480">
+                <a:tc>
+                  <a:txBody>
+                    <a:bodyPr/>
+                    <a:lstStyle/>
+                    <a:p>
+                      <a:pPr indent="0" marL="0">
+                        <a:buNone/>
+                      </a:pPr>
+                      <a:r>
+                        <a:rPr lang="en-US" sz="1200" b="1" dirty="0">
+                          <a:solidFill>
+                            <a:schemeClr val="tx1"/>
+                          </a:solidFill>
+                        </a:rPr>
+                        <a:t>소개·랜딩·계산기</a:t>
+                      </a:r>
+                      <a:endParaRPr lang="en-US" sz="1200" dirty="0"/>
+                    </a:p>
+                  </a:txBody>
+                  <a:tcPr marL="91440" marR="91440" marT="45720" marB="45720" anchor="ctr">
+                    <a:lnL w="12700" cap="flat" cmpd="sng" algn="ctr">
+                      <a:solidFill>
+                        <a:srgbClr val="EEF4F3"/>
+                      </a:solidFill>
+                      <a:prstDash val="solid"/>
+                      <a:round/>
+                      <a:headEnd type="none" w="med" len="med"/>
+                      <a:tailEnd type="none" w="med" len="med"/>
+                    </a:lnL>
+                    <a:lnR w="12700" cap="flat" cmpd="sng" algn="ctr">
+                      <a:solidFill>
+                        <a:srgbClr val="EEF4F3"/>
+                      </a:solidFill>
+                      <a:prstDash val="solid"/>
+                      <a:round/>
+                      <a:headEnd type="none" w="med" len="med"/>
+                      <a:tailEnd type="none" w="med" len="med"/>
+                    </a:lnR>
+                    <a:lnT w="12700" cap="flat" cmpd="sng" algn="ctr">
+                      <a:solidFill>
+                        <a:srgbClr val="EEF4F3"/>
+                      </a:solidFill>
+                      <a:prstDash val="solid"/>
+                      <a:round/>
+                      <a:headEnd type="none" w="med" len="med"/>
+                      <a:tailEnd type="none" w="med" len="med"/>
+                    </a:lnT>
+                    <a:lnB w="12700" cap="flat" cmpd="sng" algn="ctr">
+                      <a:solidFill>
+                        <a:srgbClr val="EEF4F3"/>
+                      </a:solidFill>
+                      <a:prstDash val="solid"/>
+                      <a:round/>
+                      <a:headEnd type="none" w="med" len="med"/>
+                      <a:tailEnd type="none" w="med" len="med"/>
+                    </a:lnB>
+                  </a:tcPr>
+                </a:tc>
+                <a:tc>
+                  <a:txBody>
+                    <a:bodyPr/>
+                    <a:lstStyle/>
+                    <a:p>
+                      <a:pPr indent="0" marL="0">
+                        <a:buNone/>
+                      </a:pPr>
+                      <a:r>
+                        <a:rPr lang="en-US" sz="1200" dirty="0">
+                          <a:solidFill>
+                            <a:schemeClr val="tx1"/>
+                          </a:solidFill>
+                        </a:rPr>
+                        <a:t>정적 호스팅</a:t>
+                      </a:r>
+                      <a:endParaRPr lang="en-US" sz="1200" dirty="0"/>
+                    </a:p>
+                  </a:txBody>
+                  <a:tcPr marL="91440" marR="91440" marT="45720" marB="45720" anchor="ctr">
+                    <a:lnL w="12700" cap="flat" cmpd="sng" algn="ctr">
+                      <a:solidFill>
+                        <a:srgbClr val="EEF4F3"/>
+                      </a:solidFill>
+                      <a:prstDash val="solid"/>
+                      <a:round/>
+                      <a:headEnd type="none" w="med" len="med"/>
+                      <a:tailEnd type="none" w="med" len="med"/>
+                    </a:lnL>
+                    <a:lnR w="12700" cap="flat" cmpd="sng" algn="ctr">
+                      <a:solidFill>
+                        <a:srgbClr val="EEF4F3"/>
+                      </a:solidFill>
+                      <a:prstDash val="solid"/>
+                      <a:round/>
+                      <a:headEnd type="none" w="med" len="med"/>
+                      <a:tailEnd type="none" w="med" len="med"/>
+                    </a:lnR>
+                    <a:lnT w="12700" cap="flat" cmpd="sng" algn="ctr">
+                      <a:solidFill>
+                        <a:srgbClr val="EEF4F3"/>
+                      </a:solidFill>
+                      <a:prstDash val="solid"/>
+                      <a:round/>
+                      <a:headEnd type="none" w="med" len="med"/>
+                      <a:tailEnd type="none" w="med" len="med"/>
+                    </a:lnT>
+                    <a:lnB w="12700" cap="flat" cmpd="sng" algn="ctr">
+                      <a:solidFill>
+                        <a:srgbClr val="EEF4F3"/>
+                      </a:solidFill>
+                      <a:prstDash val="solid"/>
+                      <a:round/>
+                      <a:headEnd type="none" w="med" len="med"/>
+                      <a:tailEnd type="none" w="med" len="med"/>
+                    </a:lnB>
+                  </a:tcPr>
+                </a:tc>
+                <a:tc>
+                  <a:txBody>
+                    <a:bodyPr/>
+                    <a:lstStyle/>
+                    <a:p>
+                      <a:pPr indent="0" marL="0">
+                        <a:buNone/>
+                      </a:pPr>
+                      <a:r>
+                        <a:rPr lang="en-US" sz="1200" dirty="0">
+                          <a:solidFill>
+                            <a:schemeClr val="tx1"/>
+                          </a:solidFill>
+                        </a:rPr>
+                        <a:t>Git에 올리면 자동 배포</a:t>
+                      </a:r>
+                      <a:endParaRPr lang="en-US" sz="1200" dirty="0"/>
+                    </a:p>
+                  </a:txBody>
+                  <a:tcPr marL="91440" marR="91440" marT="45720" marB="45720" anchor="ctr">
+                    <a:lnL w="12700" cap="flat" cmpd="sng" algn="ctr">
+                      <a:solidFill>
+                        <a:srgbClr val="EEF4F3"/>
+                      </a:solidFill>
+                      <a:prstDash val="solid"/>
+                      <a:round/>
+                      <a:headEnd type="none" w="med" len="med"/>
+                      <a:tailEnd type="none" w="med" len="med"/>
+                    </a:lnL>
+                    <a:lnR w="12700" cap="flat" cmpd="sng" algn="ctr">
+                      <a:solidFill>
+                        <a:srgbClr val="EEF4F3"/>
+                      </a:solidFill>
+                      <a:prstDash val="solid"/>
+                      <a:round/>
+                      <a:headEnd type="none" w="med" len="med"/>
+                      <a:tailEnd type="none" w="med" len="med"/>
+                    </a:lnR>
+                    <a:lnT w="12700" cap="flat" cmpd="sng" algn="ctr">
+                      <a:solidFill>
+                        <a:srgbClr val="EEF4F3"/>
+                      </a:solidFill>
+                      <a:prstDash val="solid"/>
+                      <a:round/>
+                      <a:headEnd type="none" w="med" len="med"/>
+                      <a:tailEnd type="none" w="med" len="med"/>
+                    </a:lnT>
+                    <a:lnB w="12700" cap="flat" cmpd="sng" algn="ctr">
+                      <a:solidFill>
+                        <a:srgbClr val="EEF4F3"/>
+                      </a:solidFill>
+                      <a:prstDash val="solid"/>
+                      <a:round/>
+                      <a:headEnd type="none" w="med" len="med"/>
+                      <a:tailEnd type="none" w="med" len="med"/>
+                    </a:lnB>
+                  </a:tcPr>
+                </a:tc>
+              </a:tr>
+              <a:tr h="411480">
+                <a:tc>
+                  <a:txBody>
+                    <a:bodyPr/>
+                    <a:lstStyle/>
+                    <a:p>
+                      <a:pPr indent="0" marL="0">
+                        <a:buNone/>
+                      </a:pPr>
+                      <a:r>
+                        <a:rPr lang="en-US" sz="1200" b="1" dirty="0">
+                          <a:solidFill>
+                            <a:schemeClr val="tx1"/>
+                          </a:solidFill>
+                        </a:rPr>
+                        <a:t>블로그·정보</a:t>
+                      </a:r>
+                      <a:endParaRPr lang="en-US" sz="1200" dirty="0"/>
+                    </a:p>
+                  </a:txBody>
+                  <a:tcPr marL="91440" marR="91440" marT="45720" marB="45720" anchor="ctr">
+                    <a:lnL w="12700" cap="flat" cmpd="sng" algn="ctr">
+                      <a:solidFill>
+                        <a:srgbClr val="EEF4F3"/>
+                      </a:solidFill>
+                      <a:prstDash val="solid"/>
+                      <a:round/>
+                      <a:headEnd type="none" w="med" len="med"/>
+                      <a:tailEnd type="none" w="med" len="med"/>
+                    </a:lnL>
+                    <a:lnR w="12700" cap="flat" cmpd="sng" algn="ctr">
+                      <a:solidFill>
+                        <a:srgbClr val="EEF4F3"/>
+                      </a:solidFill>
+                      <a:prstDash val="solid"/>
+                      <a:round/>
+                      <a:headEnd type="none" w="med" len="med"/>
+                      <a:tailEnd type="none" w="med" len="med"/>
+                    </a:lnR>
+                    <a:lnT w="12700" cap="flat" cmpd="sng" algn="ctr">
+                      <a:solidFill>
+                        <a:srgbClr val="EEF4F3"/>
+                      </a:solidFill>
+                      <a:prstDash val="solid"/>
+                      <a:round/>
+                      <a:headEnd type="none" w="med" len="med"/>
+                      <a:tailEnd type="none" w="med" len="med"/>
+                    </a:lnT>
+                    <a:lnB w="12700" cap="flat" cmpd="sng" algn="ctr">
+                      <a:solidFill>
+                        <a:srgbClr val="EEF4F3"/>
+                      </a:solidFill>
+                      <a:prstDash val="solid"/>
+                      <a:round/>
+                      <a:headEnd type="none" w="med" len="med"/>
+                      <a:tailEnd type="none" w="med" len="med"/>
+                    </a:lnB>
+                  </a:tcPr>
+                </a:tc>
+                <a:tc>
+                  <a:txBody>
+                    <a:bodyPr/>
+                    <a:lstStyle/>
+                    <a:p>
+                      <a:pPr indent="0" marL="0">
+                        <a:buNone/>
+                      </a:pPr>
+                      <a:r>
+                        <a:rPr lang="en-US" sz="1200" dirty="0">
+                          <a:solidFill>
+                            <a:schemeClr val="tx1"/>
+                          </a:solidFill>
+                        </a:rPr>
+                        <a:t>블로그 서비스 · 워드프레스 호스팅</a:t>
+                      </a:r>
+                      <a:endParaRPr lang="en-US" sz="1200" dirty="0"/>
+                    </a:p>
+                  </a:txBody>
+                  <a:tcPr marL="91440" marR="91440" marT="45720" marB="45720" anchor="ctr">
+                    <a:lnL w="12700" cap="flat" cmpd="sng" algn="ctr">
+                      <a:solidFill>
+                        <a:srgbClr val="EEF4F3"/>
+                      </a:solidFill>
+                      <a:prstDash val="solid"/>
+                      <a:round/>
+                      <a:headEnd type="none" w="med" len="med"/>
+                      <a:tailEnd type="none" w="med" len="med"/>
+                    </a:lnL>
+                    <a:lnR w="12700" cap="flat" cmpd="sng" algn="ctr">
+                      <a:solidFill>
+                        <a:srgbClr val="EEF4F3"/>
+                      </a:solidFill>
+                      <a:prstDash val="solid"/>
+                      <a:round/>
+                      <a:headEnd type="none" w="med" len="med"/>
+                      <a:tailEnd type="none" w="med" len="med"/>
+                    </a:lnR>
+                    <a:lnT w="12700" cap="flat" cmpd="sng" algn="ctr">
+                      <a:solidFill>
+                        <a:srgbClr val="EEF4F3"/>
+                      </a:solidFill>
+                      <a:prstDash val="solid"/>
+                      <a:round/>
+                      <a:headEnd type="none" w="med" len="med"/>
+                      <a:tailEnd type="none" w="med" len="med"/>
+                    </a:lnT>
+                    <a:lnB w="12700" cap="flat" cmpd="sng" algn="ctr">
+                      <a:solidFill>
+                        <a:srgbClr val="EEF4F3"/>
+                      </a:solidFill>
+                      <a:prstDash val="solid"/>
+                      <a:round/>
+                      <a:headEnd type="none" w="med" len="med"/>
+                      <a:tailEnd type="none" w="med" len="med"/>
+                    </a:lnB>
+                  </a:tcPr>
+                </a:tc>
+                <a:tc>
+                  <a:txBody>
+                    <a:bodyPr/>
+                    <a:lstStyle/>
+                    <a:p>
+                      <a:pPr indent="0" marL="0">
+                        <a:buNone/>
+                      </a:pPr>
+                      <a:r>
+                        <a:rPr lang="en-US" sz="1200" dirty="0">
+                          <a:solidFill>
+                            <a:schemeClr val="tx1"/>
+                          </a:solidFill>
+                        </a:rPr>
+                        <a:t>플러그인 업데이트</a:t>
+                      </a:r>
+                      <a:endParaRPr lang="en-US" sz="1200" dirty="0"/>
+                    </a:p>
+                  </a:txBody>
+                  <a:tcPr marL="91440" marR="91440" marT="45720" marB="45720" anchor="ctr">
+                    <a:lnL w="12700" cap="flat" cmpd="sng" algn="ctr">
+                      <a:solidFill>
+                        <a:srgbClr val="EEF4F3"/>
+                      </a:solidFill>
+                      <a:prstDash val="solid"/>
+                      <a:round/>
+                      <a:headEnd type="none" w="med" len="med"/>
+                      <a:tailEnd type="none" w="med" len="med"/>
+                    </a:lnL>
+                    <a:lnR w="12700" cap="flat" cmpd="sng" algn="ctr">
+                      <a:solidFill>
+                        <a:srgbClr val="EEF4F3"/>
+                      </a:solidFill>
+                      <a:prstDash val="solid"/>
+                      <a:round/>
+                      <a:headEnd type="none" w="med" len="med"/>
+                      <a:tailEnd type="none" w="med" len="med"/>
+                    </a:lnR>
+                    <a:lnT w="12700" cap="flat" cmpd="sng" algn="ctr">
+                      <a:solidFill>
+                        <a:srgbClr val="EEF4F3"/>
+                      </a:solidFill>
+                      <a:prstDash val="solid"/>
+                      <a:round/>
+                      <a:headEnd type="none" w="med" len="med"/>
+                      <a:tailEnd type="none" w="med" len="med"/>
+                    </a:lnT>
+                    <a:lnB w="12700" cap="flat" cmpd="sng" algn="ctr">
+                      <a:solidFill>
+                        <a:srgbClr val="EEF4F3"/>
+                      </a:solidFill>
+                      <a:prstDash val="solid"/>
+                      <a:round/>
+                      <a:headEnd type="none" w="med" len="med"/>
+                      <a:tailEnd type="none" w="med" len="med"/>
+                    </a:lnB>
+                  </a:tcPr>
+                </a:tc>
+              </a:tr>
+              <a:tr h="411480">
+                <a:tc>
+                  <a:txBody>
+                    <a:bodyPr/>
+                    <a:lstStyle/>
+                    <a:p>
+                      <a:pPr indent="0" marL="0">
+                        <a:buNone/>
+                      </a:pPr>
+                      <a:r>
+                        <a:rPr lang="en-US" sz="1200" b="1" dirty="0">
+                          <a:solidFill>
+                            <a:schemeClr val="tx1"/>
+                          </a:solidFill>
+                        </a:rPr>
+                        <a:t>회원제·AI 서비스 MVP</a:t>
+                      </a:r>
+                      <a:endParaRPr lang="en-US" sz="1200" dirty="0"/>
+                    </a:p>
+                  </a:txBody>
+                  <a:tcPr marL="91440" marR="91440" marT="45720" marB="45720" anchor="ctr">
+                    <a:lnL w="12700" cap="flat" cmpd="sng" algn="ctr">
+                      <a:solidFill>
+                        <a:srgbClr val="EEF4F3"/>
+                      </a:solidFill>
+                      <a:prstDash val="solid"/>
+                      <a:round/>
+                      <a:headEnd type="none" w="med" len="med"/>
+                      <a:tailEnd type="none" w="med" len="med"/>
+                    </a:lnL>
+                    <a:lnR w="12700" cap="flat" cmpd="sng" algn="ctr">
+                      <a:solidFill>
+                        <a:srgbClr val="EEF4F3"/>
+                      </a:solidFill>
+                      <a:prstDash val="solid"/>
+                      <a:round/>
+                      <a:headEnd type="none" w="med" len="med"/>
+                      <a:tailEnd type="none" w="med" len="med"/>
+                    </a:lnR>
+                    <a:lnT w="12700" cap="flat" cmpd="sng" algn="ctr">
+                      <a:solidFill>
+                        <a:srgbClr val="EEF4F3"/>
+                      </a:solidFill>
+                      <a:prstDash val="solid"/>
+                      <a:round/>
+                      <a:headEnd type="none" w="med" len="med"/>
+                      <a:tailEnd type="none" w="med" len="med"/>
+                    </a:lnT>
+                    <a:lnB w="12700" cap="flat" cmpd="sng" algn="ctr">
+                      <a:solidFill>
+                        <a:srgbClr val="EEF4F3"/>
+                      </a:solidFill>
+                      <a:prstDash val="solid"/>
+                      <a:round/>
+                      <a:headEnd type="none" w="med" len="med"/>
+                      <a:tailEnd type="none" w="med" len="med"/>
+                    </a:lnB>
+                  </a:tcPr>
+                </a:tc>
+                <a:tc>
+                  <a:txBody>
+                    <a:bodyPr/>
+                    <a:lstStyle/>
+                    <a:p>
+                      <a:pPr indent="0" marL="0">
+                        <a:buNone/>
+                      </a:pPr>
+                      <a:r>
+                        <a:rPr lang="en-US" sz="1200" dirty="0">
+                          <a:solidFill>
+                            <a:schemeClr val="tx1"/>
+                          </a:solidFill>
+                        </a:rPr>
+                        <a:t>PaaS + 관리형 DB</a:t>
+                      </a:r>
+                      <a:endParaRPr lang="en-US" sz="1200" dirty="0"/>
+                    </a:p>
+                  </a:txBody>
+                  <a:tcPr marL="91440" marR="91440" marT="45720" marB="45720" anchor="ctr">
+                    <a:lnL w="12700" cap="flat" cmpd="sng" algn="ctr">
+                      <a:solidFill>
+                        <a:srgbClr val="EEF4F3"/>
+                      </a:solidFill>
+                      <a:prstDash val="solid"/>
+                      <a:round/>
+                      <a:headEnd type="none" w="med" len="med"/>
+                      <a:tailEnd type="none" w="med" len="med"/>
+                    </a:lnL>
+                    <a:lnR w="12700" cap="flat" cmpd="sng" algn="ctr">
+                      <a:solidFill>
+                        <a:srgbClr val="EEF4F3"/>
+                      </a:solidFill>
+                      <a:prstDash val="solid"/>
+                      <a:round/>
+                      <a:headEnd type="none" w="med" len="med"/>
+                      <a:tailEnd type="none" w="med" len="med"/>
+                    </a:lnR>
+                    <a:lnT w="12700" cap="flat" cmpd="sng" algn="ctr">
+                      <a:solidFill>
+                        <a:srgbClr val="EEF4F3"/>
+                      </a:solidFill>
+                      <a:prstDash val="solid"/>
+                      <a:round/>
+                      <a:headEnd type="none" w="med" len="med"/>
+                      <a:tailEnd type="none" w="med" len="med"/>
+                    </a:lnT>
+                    <a:lnB w="12700" cap="flat" cmpd="sng" algn="ctr">
+                      <a:solidFill>
+                        <a:srgbClr val="EEF4F3"/>
+                      </a:solidFill>
+                      <a:prstDash val="solid"/>
+                      <a:round/>
+                      <a:headEnd type="none" w="med" len="med"/>
+                      <a:tailEnd type="none" w="med" len="med"/>
+                    </a:lnB>
+                  </a:tcPr>
+                </a:tc>
+                <a:tc>
+                  <a:txBody>
+                    <a:bodyPr/>
+                    <a:lstStyle/>
+                    <a:p>
+                      <a:pPr indent="0" marL="0">
+                        <a:buNone/>
+                      </a:pPr>
+                      <a:r>
+                        <a:rPr lang="en-US" sz="1200" dirty="0">
+                          <a:solidFill>
+                            <a:schemeClr val="tx1"/>
+                          </a:solidFill>
+                        </a:rPr>
+                        <a:t>코드만, 서버 관리는 플랫폼</a:t>
+                      </a:r>
+                      <a:endParaRPr lang="en-US" sz="1200" dirty="0"/>
+                    </a:p>
+                  </a:txBody>
+                  <a:tcPr marL="91440" marR="91440" marT="45720" marB="45720" anchor="ctr">
+                    <a:lnL w="12700" cap="flat" cmpd="sng" algn="ctr">
+                      <a:solidFill>
+                        <a:srgbClr val="EEF4F3"/>
+                      </a:solidFill>
+                      <a:prstDash val="solid"/>
+                      <a:round/>
+                      <a:headEnd type="none" w="med" len="med"/>
+                      <a:tailEnd type="none" w="med" len="med"/>
+                    </a:lnL>
+                    <a:lnR w="12700" cap="flat" cmpd="sng" algn="ctr">
+                      <a:solidFill>
+                        <a:srgbClr val="EEF4F3"/>
+                      </a:solidFill>
+                      <a:prstDash val="solid"/>
+                      <a:round/>
+                      <a:headEnd type="none" w="med" len="med"/>
+                      <a:tailEnd type="none" w="med" len="med"/>
+                    </a:lnR>
+                    <a:lnT w="12700" cap="flat" cmpd="sng" algn="ctr">
+                      <a:solidFill>
+                        <a:srgbClr val="EEF4F3"/>
+                      </a:solidFill>
+                      <a:prstDash val="solid"/>
+                      <a:round/>
+                      <a:headEnd type="none" w="med" len="med"/>
+                      <a:tailEnd type="none" w="med" len="med"/>
+                    </a:lnT>
+                    <a:lnB w="12700" cap="flat" cmpd="sng" algn="ctr">
+                      <a:solidFill>
+                        <a:srgbClr val="EEF4F3"/>
+                      </a:solidFill>
+                      <a:prstDash val="solid"/>
+                      <a:round/>
+                      <a:headEnd type="none" w="med" len="med"/>
+                      <a:tailEnd type="none" w="med" len="med"/>
+                    </a:lnB>
+                  </a:tcPr>
+                </a:tc>
+              </a:tr>
+              <a:tr h="411480">
+                <a:tc>
+                  <a:txBody>
+                    <a:bodyPr/>
+                    <a:lstStyle/>
+                    <a:p>
+                      <a:pPr indent="0" marL="0">
+                        <a:buNone/>
+                      </a:pPr>
+                      <a:r>
+                        <a:rPr lang="en-US" sz="1200" b="1" dirty="0">
+                          <a:solidFill>
+                            <a:schemeClr val="tx1"/>
+                          </a:solidFill>
+                        </a:rPr>
+                        <a:t>실시간 게임·큰 서비스</a:t>
+                      </a:r>
+                      <a:endParaRPr lang="en-US" sz="1200" dirty="0"/>
+                    </a:p>
+                  </a:txBody>
+                  <a:tcPr marL="91440" marR="91440" marT="45720" marB="45720" anchor="ctr">
+                    <a:lnL w="12700" cap="flat" cmpd="sng" algn="ctr">
+                      <a:solidFill>
+                        <a:srgbClr val="EEF4F3"/>
+                      </a:solidFill>
+                      <a:prstDash val="solid"/>
+                      <a:round/>
+                      <a:headEnd type="none" w="med" len="med"/>
+                      <a:tailEnd type="none" w="med" len="med"/>
+                    </a:lnL>
+                    <a:lnR w="12700" cap="flat" cmpd="sng" algn="ctr">
+                      <a:solidFill>
+                        <a:srgbClr val="EEF4F3"/>
+                      </a:solidFill>
+                      <a:prstDash val="solid"/>
+                      <a:round/>
+                      <a:headEnd type="none" w="med" len="med"/>
+                      <a:tailEnd type="none" w="med" len="med"/>
+                    </a:lnR>
+                    <a:lnT w="12700" cap="flat" cmpd="sng" algn="ctr">
+                      <a:solidFill>
+                        <a:srgbClr val="EEF4F3"/>
+                      </a:solidFill>
+                      <a:prstDash val="solid"/>
+                      <a:round/>
+                      <a:headEnd type="none" w="med" len="med"/>
+                      <a:tailEnd type="none" w="med" len="med"/>
+                    </a:lnT>
+                    <a:lnB w="12700" cap="flat" cmpd="sng" algn="ctr">
+                      <a:solidFill>
+                        <a:srgbClr val="EEF4F3"/>
+                      </a:solidFill>
+                      <a:prstDash val="solid"/>
+                      <a:round/>
+                      <a:headEnd type="none" w="med" len="med"/>
+                      <a:tailEnd type="none" w="med" len="med"/>
+                    </a:lnB>
+                  </a:tcPr>
+                </a:tc>
+                <a:tc>
+                  <a:txBody>
+                    <a:bodyPr/>
+                    <a:lstStyle/>
+                    <a:p>
+                      <a:pPr indent="0" marL="0">
+                        <a:buNone/>
+                      </a:pPr>
+                      <a:r>
+                        <a:rPr lang="en-US" sz="1200" dirty="0">
+                          <a:solidFill>
+                            <a:schemeClr val="tx1"/>
+                          </a:solidFill>
+                        </a:rPr>
+                        <a:t>VPS · 대형 클라우드 (서울 리전)</a:t>
+                      </a:r>
+                      <a:endParaRPr lang="en-US" sz="1200" dirty="0"/>
+                    </a:p>
+                  </a:txBody>
+                  <a:tcPr marL="91440" marR="91440" marT="45720" marB="45720" anchor="ctr">
+                    <a:lnL w="12700" cap="flat" cmpd="sng" algn="ctr">
+                      <a:solidFill>
+                        <a:srgbClr val="EEF4F3"/>
+                      </a:solidFill>
+                      <a:prstDash val="solid"/>
+                      <a:round/>
+                      <a:headEnd type="none" w="med" len="med"/>
+                      <a:tailEnd type="none" w="med" len="med"/>
+                    </a:lnL>
+                    <a:lnR w="12700" cap="flat" cmpd="sng" algn="ctr">
+                      <a:solidFill>
+                        <a:srgbClr val="EEF4F3"/>
+                      </a:solidFill>
+                      <a:prstDash val="solid"/>
+                      <a:round/>
+                      <a:headEnd type="none" w="med" len="med"/>
+                      <a:tailEnd type="none" w="med" len="med"/>
+                    </a:lnR>
+                    <a:lnT w="12700" cap="flat" cmpd="sng" algn="ctr">
+                      <a:solidFill>
+                        <a:srgbClr val="EEF4F3"/>
+                      </a:solidFill>
+                      <a:prstDash val="solid"/>
+                      <a:round/>
+                      <a:headEnd type="none" w="med" len="med"/>
+                      <a:tailEnd type="none" w="med" len="med"/>
+                    </a:lnT>
+                    <a:lnB w="12700" cap="flat" cmpd="sng" algn="ctr">
+                      <a:solidFill>
+                        <a:srgbClr val="EEF4F3"/>
+                      </a:solidFill>
+                      <a:prstDash val="solid"/>
+                      <a:round/>
+                      <a:headEnd type="none" w="med" len="med"/>
+                      <a:tailEnd type="none" w="med" len="med"/>
+                    </a:lnB>
+                  </a:tcPr>
+                </a:tc>
+                <a:tc>
+                  <a:txBody>
+                    <a:bodyPr/>
+                    <a:lstStyle/>
+                    <a:p>
+                      <a:pPr indent="0" marL="0">
+                        <a:buNone/>
+                      </a:pPr>
+                      <a:r>
+                        <a:rPr lang="en-US" sz="1200" dirty="0">
+                          <a:solidFill>
+                            <a:schemeClr val="tx1"/>
+                          </a:solidFill>
+                        </a:rPr>
+                        <a:t>보안·백업·비용 전부 직접</a:t>
+                      </a:r>
+                      <a:endParaRPr lang="en-US" sz="1200" dirty="0"/>
+                    </a:p>
+                  </a:txBody>
+                  <a:tcPr marL="91440" marR="91440" marT="45720" marB="45720" anchor="ctr">
+                    <a:lnL w="12700" cap="flat" cmpd="sng" algn="ctr">
+                      <a:solidFill>
+                        <a:srgbClr val="EEF4F3"/>
+                      </a:solidFill>
+                      <a:prstDash val="solid"/>
+                      <a:round/>
+                      <a:headEnd type="none" w="med" len="med"/>
+                      <a:tailEnd type="none" w="med" len="med"/>
+                    </a:lnL>
+                    <a:lnR w="12700" cap="flat" cmpd="sng" algn="ctr">
+                      <a:solidFill>
+                        <a:srgbClr val="EEF4F3"/>
+                      </a:solidFill>
+                      <a:prstDash val="solid"/>
+                      <a:round/>
+                      <a:headEnd type="none" w="med" len="med"/>
+                      <a:tailEnd type="none" w="med" len="med"/>
+                    </a:lnR>
+                    <a:lnT w="12700" cap="flat" cmpd="sng" algn="ctr">
+                      <a:solidFill>
+                        <a:srgbClr val="EEF4F3"/>
+                      </a:solidFill>
+                      <a:prstDash val="solid"/>
+                      <a:round/>
+                      <a:headEnd type="none" w="med" len="med"/>
+                      <a:tailEnd type="none" w="med" len="med"/>
+                    </a:lnT>
+                    <a:lnB w="12700" cap="flat" cmpd="sng" algn="ctr">
+                      <a:solidFill>
+                        <a:srgbClr val="EEF4F3"/>
+                      </a:solidFill>
+                      <a:prstDash val="solid"/>
+                      <a:round/>
+                      <a:headEnd type="none" w="med" len="med"/>
+                      <a:tailEnd type="none" w="med" len="med"/>
+                    </a:lnB>
+                  </a:tcPr>
+                </a:tc>
+              </a:tr>
+            </a:tbl>
+          </a:graphicData>
+        </a:graphic>
+      </p:graphicFrame>
+      <p:sp>
+        <p:nvSpPr>
+          <p:cNvPr id="4" name="Text 1"/>
+          <p:cNvSpPr txBox="1"/>
+          <p:nvPr/>
+        </p:nvSpPr>
+        <p:spPr>
+          <a:xfrm>
+            <a:off x="457200" y="3703320"/>
+            <a:ext cx="8229600" cy="777240"/>
+          </a:xfrm>
+          <a:prstGeom prst="rect">
+            <a:avLst/>
+          </a:prstGeom>
+          <a:noFill/>
+          <a:ln/>
+        </p:spPr>
+        <p:txBody>
+          <a:bodyPr wrap="square" lIns="0" tIns="0" rIns="0" bIns="0" rtlCol="0" anchor="t"/>
+          <a:lstStyle/>
+          <a:p>
+            <a:pPr indent="0" marL="0">
+              <a:spcAft>
+                <a:spcPts val="600"/>
+              </a:spcAft>
+              <a:buNone/>
+            </a:pPr>
+            <a:r>
+              <a:rPr lang="en-US" sz="1300" b="1" dirty="0">
+                <a:solidFill>
+                  <a:schemeClr val="accent5"/>
+                </a:solidFill>
+              </a:rPr>
+              <a:t>무료 요금제 함정  </a:t>
+            </a:r>
+            <a:pPr indent="0" marL="0">
+              <a:spcAft>
+                <a:spcPts val="600"/>
+              </a:spcAft>
+              <a:buNone/>
+            </a:pPr>
+            <a:r>
+              <a:rPr lang="en-US" sz="1300" dirty="0">
+                <a:solidFill>
+                  <a:schemeClr val="tx1"/>
+                </a:solidFill>
+              </a:rPr>
+              <a:t>상업 사용 금지 · 잠자는 서버 · 한도 초과 정지 · 유료는 요금 폭탄 → 예산 알림</a:t>
+            </a:r>
+            <a:endParaRPr lang="en-US" sz="1300" dirty="0"/>
+          </a:p>
+          <a:p>
+            <a:pPr indent="0" marL="0">
+              <a:spcAft>
+                <a:spcPts val="600"/>
+              </a:spcAft>
+              <a:buNone/>
+            </a:pPr>
+            <a:r>
+              <a:rPr lang="en-US" sz="1300" b="1" dirty="0">
+                <a:solidFill>
+                  <a:schemeClr val="accent2"/>
+                </a:solidFill>
+              </a:rPr>
+              <a:t>개인정보  </a:t>
+            </a:r>
+            <a:pPr indent="0" marL="0">
+              <a:spcAft>
+                <a:spcPts val="600"/>
+              </a:spcAft>
+              <a:buNone/>
+            </a:pPr>
+            <a:r>
+              <a:rPr lang="en-US" sz="1300" dirty="0">
+                <a:solidFill>
+                  <a:schemeClr val="tx1"/>
+                </a:solidFill>
+              </a:rPr>
+              <a:t>해외 서버에 회원 정보 → 처리방침에 국외 이전 고지가 필요할 수 있음</a:t>
+            </a:r>
+            <a:endParaRPr lang="en-US" sz="1300" dirty="0"/>
+          </a:p>
+        </p:txBody>
+      </p:sp>
+      <p:sp>
+        <p:nvSpPr>
+          <p:cNvPr id="25" name="Slide Number Placeholder 0"/>
+          <p:cNvSpPr>
+            <a:spLocks noGrp="1"/>
+          </p:cNvSpPr>
+          <p:nvPr>
+            <p:ph type="sldNum" sz="quarter" idx="4294967295"/>
+          </p:nvPr>
+        </p:nvSpPr>
+        <p:spPr>
+          <a:xfrm>
+            <a:off x="8321040" y="4754880"/>
+            <a:ext cx="457200" cy="274320"/>
+          </a:xfrm>
+          <a:prstGeom prst="rect">
+            <a:avLst/>
+          </a:prstGeom>
+          <a:extLst>
+            <a:ext uri="{C572A759-6A51-4108-AA02-DFA0A04FC94B}">
+              <ma14:wrappingTextBoxFlag xmlns:ma14="http://schemas.microsoft.com/office/mac/drawingml/2011/main" val="0"/>
+            </a:ext>
+          </a:extLst>
+        </p:spPr>
+        <p:txBody>
+          <a:bodyPr/>
+          <a:lstStyle>
+            <a:lvl1pPr>
+              <a:defRPr sz="1000">
+                <a:solidFill>
+                  <a:schemeClr val="accent4"/>
+                </a:solidFill>
+              </a:defRPr>
+            </a:lvl1pPr>
+          </a:lstStyle>
+          <a:p>
+            <a:pPr algn="r"/>
+            <a:fld id="{F7021451-1387-4CA6-816F-3879F97B5CBC}" type="slidenum">
+              <a:rPr b="0" lang="en-US"/>
+              <a:t>56</a:t>
+            </a:fld>
+            <a:endParaRPr lang="en-US"/>
+          </a:p>
+        </p:txBody>
+      </p:sp>
+    </p:spTree>
+  </p:cSld>
+  <p:clrMapOvr>
+    <a:masterClrMapping/>
+  </p:clrMapOvr>
+</p:sld>
+</file>
+
+<file path=ppt/slides/slide57.xml><?xml version="1.0" encoding="utf-8"?>
+<p:sld xmlns:a="http://schemas.openxmlformats.org/drawingml/2006/main" xmlns:r="http://schemas.openxmlformats.org/officeDocument/2006/relationships" xmlns:p="http://schemas.openxmlformats.org/presentationml/2006/main">
+  <p:cSld name="Slide 57">
+    <p:spTree>
+      <p:nvGrpSpPr>
+        <p:cNvPr id="1" name=""/>
+        <p:cNvGrpSpPr/>
+        <p:nvPr/>
+      </p:nvGrpSpPr>
+      <p:grpSpPr>
+        <a:xfrm>
+          <a:off x="0" y="0"/>
+          <a:ext cx="0" cy="0"/>
+          <a:chOff x="0" y="0"/>
+          <a:chExt cx="0" cy="0"/>
+        </a:xfrm>
+      </p:grpSpPr>
+      <p:sp>
+        <p:nvSpPr>
+          <p:cNvPr id="2" name="Text 0"/>
+          <p:cNvSpPr/>
+          <p:nvPr>
+            <p:ph idx="100" type="title" hasCustomPrompt="1"/>
+          </p:nvPr>
+        </p:nvSpPr>
+        <p:spPr>
+          <a:xfrm>
+            <a:off x="457200" y="274320"/>
+            <a:ext cx="8229600" cy="685800"/>
+          </a:xfrm>
+          <a:prstGeom prst="rect">
+            <a:avLst/>
+          </a:prstGeom>
+          <a:noFill/>
+          <a:ln/>
+        </p:spPr>
+        <p:txBody>
+          <a:bodyPr wrap="square" lIns="0" tIns="0" rIns="0" bIns="0" rtlCol="0" anchor="ctr"/>
+          <a:lstStyle/>
+          <a:p>
+            <a:pPr indent="0" marL="0">
+              <a:buNone/>
+            </a:pPr>
+            <a:r>
+              <a:rPr lang="en-US" sz="2800" b="1" dirty="0">
+                <a:solidFill>
+                  <a:schemeClr val="tx2"/>
+                </a:solidFill>
+              </a:rPr>
+              <a:t>꼭 해야 하는 보안</a:t>
+            </a:r>
+            <a:endParaRPr lang="en-US" sz="2800" dirty="0"/>
+          </a:p>
+        </p:txBody>
+      </p:sp>
+      <p:sp>
+        <p:nvSpPr>
+          <p:cNvPr id="3" name="card"/>
+          <p:cNvSpPr/>
+          <p:nvPr/>
+        </p:nvSpPr>
+        <p:spPr>
+          <a:xfrm>
+            <a:off x="457200" y="1188720"/>
+            <a:ext cx="4023360" cy="3200400"/>
+          </a:xfrm>
+          <a:prstGeom prst="roundRect">
+            <a:avLst>
+              <a:gd name="adj" fmla="val 2286"/>
+            </a:avLst>
+          </a:prstGeom>
+          <a:solidFill>
+            <a:schemeClr val="tx2"/>
+          </a:solidFill>
+          <a:ln/>
+        </p:spPr>
+      </p:sp>
+      <p:sp>
+        <p:nvSpPr>
+          <p:cNvPr id="4" name="Text 2"/>
+          <p:cNvSpPr txBox="1"/>
+          <p:nvPr/>
+        </p:nvSpPr>
+        <p:spPr>
+          <a:xfrm>
+            <a:off x="685800" y="1325880"/>
+            <a:ext cx="3566160" cy="365760"/>
+          </a:xfrm>
+          <a:prstGeom prst="rect">
+            <a:avLst/>
+          </a:prstGeom>
+          <a:noFill/>
+          <a:ln/>
+        </p:spPr>
+        <p:txBody>
+          <a:bodyPr wrap="square" lIns="0" tIns="0" rIns="0" bIns="0" rtlCol="0" anchor="t"/>
+          <a:lstStyle/>
+          <a:p>
+            <a:pPr indent="0" marL="0">
+              <a:buNone/>
+            </a:pPr>
+            <a:r>
+              <a:rPr lang="en-US" sz="1500" b="1" dirty="0">
+                <a:solidFill>
+                  <a:schemeClr val="accent6"/>
+                </a:solidFill>
+              </a:rPr>
+              <a:t>OWASP Top 10 (2025) 상위</a:t>
+            </a:r>
+            <a:endParaRPr lang="en-US" sz="1500" dirty="0"/>
+          </a:p>
+        </p:txBody>
+      </p:sp>
+      <p:sp>
+        <p:nvSpPr>
+          <p:cNvPr id="5" name="Text 3"/>
+          <p:cNvSpPr txBox="1"/>
+          <p:nvPr/>
+        </p:nvSpPr>
+        <p:spPr>
+          <a:xfrm>
+            <a:off x="685800" y="1783080"/>
+            <a:ext cx="457200" cy="548640"/>
+          </a:xfrm>
+          <a:prstGeom prst="rect">
+            <a:avLst/>
+          </a:prstGeom>
+          <a:noFill/>
+          <a:ln/>
+        </p:spPr>
+        <p:txBody>
+          <a:bodyPr wrap="square" lIns="0" tIns="0" rIns="0" bIns="0" rtlCol="0" anchor="ctr"/>
+          <a:lstStyle/>
+          <a:p>
+            <a:pPr indent="0" marL="0">
+              <a:buNone/>
+            </a:pPr>
+            <a:r>
+              <a:rPr lang="en-US" sz="1800" b="1" dirty="0">
+                <a:solidFill>
+                  <a:schemeClr val="accent2"/>
+                </a:solidFill>
+              </a:rPr>
+              <a:t>1</a:t>
             </a:r>
             <a:endParaRPr lang="en-US" sz="1800" dirty="0"/>
+          </a:p>
+        </p:txBody>
+      </p:sp>
+      <p:sp>
+        <p:nvSpPr>
+          <p:cNvPr id="6" name="Text 4"/>
+          <p:cNvSpPr txBox="1"/>
+          <p:nvPr/>
+        </p:nvSpPr>
+        <p:spPr>
+          <a:xfrm>
+            <a:off x="1188720" y="1783080"/>
+            <a:ext cx="3200400" cy="548640"/>
+          </a:xfrm>
+          <a:prstGeom prst="rect">
+            <a:avLst/>
+          </a:prstGeom>
+          <a:noFill/>
+          <a:ln/>
+        </p:spPr>
+        <p:txBody>
+          <a:bodyPr wrap="square" lIns="0" tIns="0" rIns="0" bIns="0" rtlCol="0" anchor="ctr"/>
+          <a:lstStyle/>
+          <a:p>
+            <a:pPr indent="0" marL="0">
+              <a:buNone/>
+            </a:pPr>
+            <a:r>
+              <a:rPr lang="en-US" sz="1300" b="1" dirty="0">
+                <a:solidFill>
+                  <a:schemeClr val="bg1"/>
+                </a:solidFill>
+              </a:rPr>
+              <a:t>접근 권한 실패</a:t>
+            </a:r>
+            <a:endParaRPr lang="en-US" sz="1300" dirty="0"/>
+          </a:p>
+          <a:p>
+            <a:pPr indent="0" marL="0">
+              <a:buNone/>
+            </a:pPr>
+            <a:r>
+              <a:rPr lang="en-US" sz="1100" dirty="0">
+                <a:solidFill>
+                  <a:schemeClr val="bg1"/>
+                </a:solidFill>
+              </a:rPr>
+              <a:t>남의 주문이 주소만 바꿔 보임</a:t>
+            </a:r>
+            <a:endParaRPr lang="en-US" sz="1300" dirty="0"/>
+          </a:p>
+        </p:txBody>
+      </p:sp>
+      <p:sp>
+        <p:nvSpPr>
+          <p:cNvPr id="7" name="Text 5"/>
+          <p:cNvSpPr txBox="1"/>
+          <p:nvPr/>
+        </p:nvSpPr>
+        <p:spPr>
+          <a:xfrm>
+            <a:off x="685800" y="2404872"/>
+            <a:ext cx="457200" cy="548640"/>
+          </a:xfrm>
+          <a:prstGeom prst="rect">
+            <a:avLst/>
+          </a:prstGeom>
+          <a:noFill/>
+          <a:ln/>
+        </p:spPr>
+        <p:txBody>
+          <a:bodyPr wrap="square" lIns="0" tIns="0" rIns="0" bIns="0" rtlCol="0" anchor="ctr"/>
+          <a:lstStyle/>
+          <a:p>
+            <a:pPr indent="0" marL="0">
+              <a:buNone/>
+            </a:pPr>
+            <a:r>
+              <a:rPr lang="en-US" sz="1800" b="1" dirty="0">
+                <a:solidFill>
+                  <a:schemeClr val="accent2"/>
+                </a:solidFill>
+              </a:rPr>
+              <a:t>2</a:t>
+            </a:r>
+            <a:endParaRPr lang="en-US" sz="1800" dirty="0"/>
+          </a:p>
+        </p:txBody>
+      </p:sp>
+      <p:sp>
+        <p:nvSpPr>
+          <p:cNvPr id="8" name="Text 6"/>
+          <p:cNvSpPr txBox="1"/>
+          <p:nvPr/>
+        </p:nvSpPr>
+        <p:spPr>
+          <a:xfrm>
+            <a:off x="1188720" y="2404872"/>
+            <a:ext cx="3200400" cy="548640"/>
+          </a:xfrm>
+          <a:prstGeom prst="rect">
+            <a:avLst/>
+          </a:prstGeom>
+          <a:noFill/>
+          <a:ln/>
+        </p:spPr>
+        <p:txBody>
+          <a:bodyPr wrap="square" lIns="0" tIns="0" rIns="0" bIns="0" rtlCol="0" anchor="ctr"/>
+          <a:lstStyle/>
+          <a:p>
+            <a:pPr indent="0" marL="0">
+              <a:buNone/>
+            </a:pPr>
+            <a:r>
+              <a:rPr lang="en-US" sz="1300" b="1" dirty="0">
+                <a:solidFill>
+                  <a:schemeClr val="bg1"/>
+                </a:solidFill>
+              </a:rPr>
+              <a:t>보안 설정 오류</a:t>
+            </a:r>
+            <a:endParaRPr lang="en-US" sz="1300" dirty="0"/>
+          </a:p>
+          <a:p>
+            <a:pPr indent="0" marL="0">
+              <a:buNone/>
+            </a:pPr>
+            <a:r>
+              <a:rPr lang="en-US" sz="1100" dirty="0">
+                <a:solidFill>
+                  <a:schemeClr val="bg1"/>
+                </a:solidFill>
+              </a:rPr>
+              <a:t>기본 비번·디버그 모드</a:t>
+            </a:r>
+            <a:endParaRPr lang="en-US" sz="1300" dirty="0"/>
+          </a:p>
+        </p:txBody>
+      </p:sp>
+      <p:sp>
+        <p:nvSpPr>
+          <p:cNvPr id="9" name="Text 7"/>
+          <p:cNvSpPr txBox="1"/>
+          <p:nvPr/>
+        </p:nvSpPr>
+        <p:spPr>
+          <a:xfrm>
+            <a:off x="685800" y="3026664"/>
+            <a:ext cx="457200" cy="548640"/>
+          </a:xfrm>
+          <a:prstGeom prst="rect">
+            <a:avLst/>
+          </a:prstGeom>
+          <a:noFill/>
+          <a:ln/>
+        </p:spPr>
+        <p:txBody>
+          <a:bodyPr wrap="square" lIns="0" tIns="0" rIns="0" bIns="0" rtlCol="0" anchor="ctr"/>
+          <a:lstStyle/>
+          <a:p>
+            <a:pPr indent="0" marL="0">
+              <a:buNone/>
+            </a:pPr>
+            <a:r>
+              <a:rPr lang="en-US" sz="1800" b="1" dirty="0">
+                <a:solidFill>
+                  <a:schemeClr val="accent2"/>
+                </a:solidFill>
+              </a:rPr>
+              <a:t>3</a:t>
+            </a:r>
+            <a:endParaRPr lang="en-US" sz="1800" dirty="0"/>
+          </a:p>
+        </p:txBody>
+      </p:sp>
+      <p:sp>
+        <p:nvSpPr>
+          <p:cNvPr id="10" name="Text 8"/>
+          <p:cNvSpPr txBox="1"/>
+          <p:nvPr/>
+        </p:nvSpPr>
+        <p:spPr>
+          <a:xfrm>
+            <a:off x="1188720" y="3026664"/>
+            <a:ext cx="3200400" cy="548640"/>
+          </a:xfrm>
+          <a:prstGeom prst="rect">
+            <a:avLst/>
+          </a:prstGeom>
+          <a:noFill/>
+          <a:ln/>
+        </p:spPr>
+        <p:txBody>
+          <a:bodyPr wrap="square" lIns="0" tIns="0" rIns="0" bIns="0" rtlCol="0" anchor="ctr"/>
+          <a:lstStyle/>
+          <a:p>
+            <a:pPr indent="0" marL="0">
+              <a:buNone/>
+            </a:pPr>
+            <a:r>
+              <a:rPr lang="en-US" sz="1300" b="1" dirty="0">
+                <a:solidFill>
+                  <a:schemeClr val="bg1"/>
+                </a:solidFill>
+              </a:rPr>
+              <a:t>공급망 실패 (신규)</a:t>
+            </a:r>
+            <a:endParaRPr lang="en-US" sz="1300" dirty="0"/>
+          </a:p>
+          <a:p>
+            <a:pPr indent="0" marL="0">
+              <a:buNone/>
+            </a:pPr>
+            <a:r>
+              <a:rPr lang="en-US" sz="1100" dirty="0">
+                <a:solidFill>
+                  <a:schemeClr val="bg1"/>
+                </a:solidFill>
+              </a:rPr>
+              <a:t>오염·오래된 라이브러리</a:t>
+            </a:r>
+            <a:endParaRPr lang="en-US" sz="1300" dirty="0"/>
+          </a:p>
+        </p:txBody>
+      </p:sp>
+      <p:sp>
+        <p:nvSpPr>
+          <p:cNvPr id="11" name="Text 9"/>
+          <p:cNvSpPr txBox="1"/>
+          <p:nvPr/>
+        </p:nvSpPr>
+        <p:spPr>
+          <a:xfrm>
+            <a:off x="685800" y="3648456"/>
+            <a:ext cx="457200" cy="548640"/>
+          </a:xfrm>
+          <a:prstGeom prst="rect">
+            <a:avLst/>
+          </a:prstGeom>
+          <a:noFill/>
+          <a:ln/>
+        </p:spPr>
+        <p:txBody>
+          <a:bodyPr wrap="square" lIns="0" tIns="0" rIns="0" bIns="0" rtlCol="0" anchor="ctr"/>
+          <a:lstStyle/>
+          <a:p>
+            <a:pPr indent="0" marL="0">
+              <a:buNone/>
+            </a:pPr>
+            <a:r>
+              <a:rPr lang="en-US" sz="1800" b="1" dirty="0">
+                <a:solidFill>
+                  <a:schemeClr val="accent2"/>
+                </a:solidFill>
+              </a:rPr>
+              <a:t>10</a:t>
+            </a:r>
+            <a:endParaRPr lang="en-US" sz="1800" dirty="0"/>
+          </a:p>
+        </p:txBody>
+      </p:sp>
+      <p:sp>
+        <p:nvSpPr>
+          <p:cNvPr id="12" name="Text 10"/>
+          <p:cNvSpPr txBox="1"/>
+          <p:nvPr/>
+        </p:nvSpPr>
+        <p:spPr>
+          <a:xfrm>
+            <a:off x="1188720" y="3648456"/>
+            <a:ext cx="3200400" cy="548640"/>
+          </a:xfrm>
+          <a:prstGeom prst="rect">
+            <a:avLst/>
+          </a:prstGeom>
+          <a:noFill/>
+          <a:ln/>
+        </p:spPr>
+        <p:txBody>
+          <a:bodyPr wrap="square" lIns="0" tIns="0" rIns="0" bIns="0" rtlCol="0" anchor="ctr"/>
+          <a:lstStyle/>
+          <a:p>
+            <a:pPr indent="0" marL="0">
+              <a:buNone/>
+            </a:pPr>
+            <a:r>
+              <a:rPr lang="en-US" sz="1300" b="1" dirty="0">
+                <a:solidFill>
+                  <a:schemeClr val="bg1"/>
+                </a:solidFill>
+              </a:rPr>
+              <a:t>예외 처리 실패 (신규)</a:t>
+            </a:r>
+            <a:endParaRPr lang="en-US" sz="1300" dirty="0"/>
+          </a:p>
+          <a:p>
+            <a:pPr indent="0" marL="0">
+              <a:buNone/>
+            </a:pPr>
+            <a:r>
+              <a:rPr lang="en-US" sz="1100" dirty="0">
+                <a:solidFill>
+                  <a:schemeClr val="bg1"/>
+                </a:solidFill>
+              </a:rPr>
+              <a:t>오류 화면에 내부 정보</a:t>
+            </a:r>
+            <a:endParaRPr lang="en-US" sz="1300" dirty="0"/>
+          </a:p>
+        </p:txBody>
+      </p:sp>
+      <p:sp>
+        <p:nvSpPr>
+          <p:cNvPr id="13" name="Text 11"/>
+          <p:cNvSpPr txBox="1"/>
+          <p:nvPr/>
+        </p:nvSpPr>
+        <p:spPr>
+          <a:xfrm>
+            <a:off x="4754880" y="1188720"/>
+            <a:ext cx="3931920" cy="365760"/>
+          </a:xfrm>
+          <a:prstGeom prst="rect">
+            <a:avLst/>
+          </a:prstGeom>
+          <a:noFill/>
+          <a:ln/>
+        </p:spPr>
+        <p:txBody>
+          <a:bodyPr wrap="square" lIns="0" tIns="0" rIns="0" bIns="0" rtlCol="0" anchor="t"/>
+          <a:lstStyle/>
+          <a:p>
+            <a:pPr indent="0" marL="0">
+              <a:buNone/>
+            </a:pPr>
+            <a:r>
+              <a:rPr lang="en-US" sz="1500" b="1" dirty="0">
+                <a:solidFill>
+                  <a:schemeClr val="accent2"/>
+                </a:solidFill>
+              </a:rPr>
+              <a:t>누구나</a:t>
+            </a:r>
+            <a:endParaRPr lang="en-US" sz="1500" dirty="0"/>
+          </a:p>
+        </p:txBody>
+      </p:sp>
+      <p:sp>
+        <p:nvSpPr>
+          <p:cNvPr id="14" name="Text 12"/>
+          <p:cNvSpPr txBox="1"/>
+          <p:nvPr/>
+        </p:nvSpPr>
+        <p:spPr>
+          <a:xfrm>
+            <a:off x="4754880" y="1600200"/>
+            <a:ext cx="3931920" cy="1097280"/>
+          </a:xfrm>
+          <a:prstGeom prst="rect">
+            <a:avLst/>
+          </a:prstGeom>
+          <a:noFill/>
+          <a:ln/>
+        </p:spPr>
+        <p:txBody>
+          <a:bodyPr wrap="square" lIns="0" tIns="0" rIns="0" bIns="0" rtlCol="0" anchor="t"/>
+          <a:lstStyle/>
+          <a:p>
+            <a:pPr marL="342900" indent="-342900">
+              <a:spcAft>
+                <a:spcPts val="400"/>
+              </a:spcAft>
+              <a:buSzPct val="100000"/>
+              <a:buChar char="•"/>
+            </a:pPr>
+            <a:r>
+              <a:rPr lang="en-US" sz="1300" dirty="0">
+                <a:solidFill>
+                  <a:schemeClr val="tx1"/>
+                </a:solidFill>
+              </a:rPr>
+              <a:t>모든 관리자 계정 2단계 인증</a:t>
+            </a:r>
+            <a:endParaRPr lang="en-US" sz="1300" dirty="0"/>
+          </a:p>
+          <a:p>
+            <a:pPr marL="342900" indent="-342900">
+              <a:spcAft>
+                <a:spcPts val="400"/>
+              </a:spcAft>
+              <a:buSzPct val="100000"/>
+              <a:buChar char="•"/>
+            </a:pPr>
+            <a:r>
+              <a:rPr lang="en-US" sz="1300" dirty="0">
+                <a:solidFill>
+                  <a:schemeClr val="tx1"/>
+                </a:solidFill>
+              </a:rPr>
+              <a:t>공유 계정 금지 · 필요한 권한만</a:t>
+            </a:r>
+            <a:endParaRPr lang="en-US" sz="1300" dirty="0"/>
+          </a:p>
+          <a:p>
+            <a:pPr marL="342900" indent="-342900">
+              <a:spcAft>
+                <a:spcPts val="400"/>
+              </a:spcAft>
+              <a:buSzPct val="100000"/>
+              <a:buChar char="•"/>
+            </a:pPr>
+            <a:r>
+              <a:rPr lang="en-US" sz="1300" dirty="0">
+                <a:solidFill>
+                  <a:schemeClr val="tx1"/>
+                </a:solidFill>
+              </a:rPr>
+              <a:t>HTTPS · 업데이트 · 백업 · 도메인 잠금</a:t>
+            </a:r>
+            <a:endParaRPr lang="en-US" sz="1300" dirty="0"/>
+          </a:p>
+        </p:txBody>
+      </p:sp>
+      <p:sp>
+        <p:nvSpPr>
+          <p:cNvPr id="15" name="Text 13"/>
+          <p:cNvSpPr txBox="1"/>
+          <p:nvPr/>
+        </p:nvSpPr>
+        <p:spPr>
+          <a:xfrm>
+            <a:off x="4754880" y="2743200"/>
+            <a:ext cx="3931920" cy="365760"/>
+          </a:xfrm>
+          <a:prstGeom prst="rect">
+            <a:avLst/>
+          </a:prstGeom>
+          <a:noFill/>
+          <a:ln/>
+        </p:spPr>
+        <p:txBody>
+          <a:bodyPr wrap="square" lIns="0" tIns="0" rIns="0" bIns="0" rtlCol="0" anchor="t"/>
+          <a:lstStyle/>
+          <a:p>
+            <a:pPr indent="0" marL="0">
+              <a:buNone/>
+            </a:pPr>
+            <a:r>
+              <a:rPr lang="en-US" sz="1500" b="1" dirty="0">
+                <a:solidFill>
+                  <a:schemeClr val="tx2"/>
+                </a:solidFill>
+              </a:rPr>
+              <a:t>직접 개발이면 추가로</a:t>
+            </a:r>
+            <a:endParaRPr lang="en-US" sz="1500" dirty="0"/>
+          </a:p>
+        </p:txBody>
+      </p:sp>
+      <p:sp>
+        <p:nvSpPr>
+          <p:cNvPr id="16" name="Text 14"/>
+          <p:cNvSpPr txBox="1"/>
+          <p:nvPr/>
+        </p:nvSpPr>
+        <p:spPr>
+          <a:xfrm>
+            <a:off x="4754880" y="3154680"/>
+            <a:ext cx="3931920" cy="1188720"/>
+          </a:xfrm>
+          <a:prstGeom prst="rect">
+            <a:avLst/>
+          </a:prstGeom>
+          <a:noFill/>
+          <a:ln/>
+        </p:spPr>
+        <p:txBody>
+          <a:bodyPr wrap="square" lIns="0" tIns="0" rIns="0" bIns="0" rtlCol="0" anchor="t"/>
+          <a:lstStyle/>
+          <a:p>
+            <a:pPr marL="342900" indent="-342900">
+              <a:spcAft>
+                <a:spcPts val="400"/>
+              </a:spcAft>
+              <a:buSzPct val="100000"/>
+              <a:buChar char="•"/>
+            </a:pPr>
+            <a:r>
+              <a:rPr lang="en-US" sz="1300" dirty="0">
+                <a:solidFill>
+                  <a:schemeClr val="tx1"/>
+                </a:solidFill>
+              </a:rPr>
+              <a:t>매 요청 주인 확인 · 금액은 서버에서 계산</a:t>
+            </a:r>
+            <a:endParaRPr lang="en-US" sz="1300" dirty="0"/>
+          </a:p>
+          <a:p>
+            <a:pPr marL="342900" indent="-342900">
+              <a:spcAft>
+                <a:spcPts val="400"/>
+              </a:spcAft>
+              <a:buSzPct val="100000"/>
+              <a:buChar char="•"/>
+            </a:pPr>
+            <a:r>
+              <a:rPr lang="en-US" sz="1300" dirty="0">
+                <a:solidFill>
+                  <a:schemeClr val="tx1"/>
+                </a:solidFill>
+              </a:rPr>
+              <a:t>해시 · 자리표시자 · 보안 헤더</a:t>
+            </a:r>
+            <a:endParaRPr lang="en-US" sz="1300" dirty="0"/>
+          </a:p>
+          <a:p>
+            <a:pPr marL="342900" indent="-342900">
+              <a:spcAft>
+                <a:spcPts val="400"/>
+              </a:spcAft>
+              <a:buSzPct val="100000"/>
+              <a:buChar char="•"/>
+            </a:pPr>
+            <a:r>
+              <a:rPr lang="en-US" sz="1300" dirty="0">
+                <a:solidFill>
+                  <a:schemeClr val="tx1"/>
+                </a:solidFill>
+              </a:rPr>
+              <a:t>비밀 키는 환경 변수 · 로그와 알림</a:t>
+            </a:r>
+            <a:endParaRPr lang="en-US" sz="1300" dirty="0"/>
+          </a:p>
+        </p:txBody>
+      </p:sp>
+      <p:sp>
+        <p:nvSpPr>
+          <p:cNvPr id="17" name="Text 15"/>
+          <p:cNvSpPr txBox="1"/>
+          <p:nvPr/>
+        </p:nvSpPr>
+        <p:spPr>
+          <a:xfrm>
+            <a:off x="457200" y="4645152"/>
+            <a:ext cx="7680960" cy="274320"/>
+          </a:xfrm>
+          <a:prstGeom prst="rect">
+            <a:avLst/>
+          </a:prstGeom>
+          <a:noFill/>
+          <a:ln/>
+        </p:spPr>
+        <p:txBody>
+          <a:bodyPr wrap="square" lIns="0" tIns="0" rIns="0" bIns="0" rtlCol="0" anchor="t"/>
+          <a:lstStyle/>
+          <a:p>
+            <a:pPr indent="0" marL="0">
+              <a:buNone/>
+            </a:pPr>
+            <a:r>
+              <a:rPr lang="en-US" sz="1000" dirty="0">
+                <a:solidFill>
+                  <a:schemeClr val="accent4"/>
+                </a:solidFill>
+              </a:rPr>
+              <a:t>개인정보 접속기록은 원칙 1년 이상(조건에 따라 2년) 보관 · 유출 의심 시 확산 차단 → 증거 보존 → 신고 (37장)</a:t>
+            </a:r>
+            <a:endParaRPr lang="en-US" sz="1000" dirty="0"/>
+          </a:p>
+        </p:txBody>
+      </p:sp>
+      <p:sp>
+        <p:nvSpPr>
+          <p:cNvPr id="25" name="Slide Number Placeholder 0"/>
+          <p:cNvSpPr>
+            <a:spLocks noGrp="1"/>
+          </p:cNvSpPr>
+          <p:nvPr>
+            <p:ph type="sldNum" sz="quarter" idx="4294967295"/>
+          </p:nvPr>
+        </p:nvSpPr>
+        <p:spPr>
+          <a:xfrm>
+            <a:off x="8321040" y="4754880"/>
+            <a:ext cx="457200" cy="274320"/>
+          </a:xfrm>
+          <a:prstGeom prst="rect">
+            <a:avLst/>
+          </a:prstGeom>
+          <a:extLst>
+            <a:ext uri="{C572A759-6A51-4108-AA02-DFA0A04FC94B}">
+              <ma14:wrappingTextBoxFlag xmlns:ma14="http://schemas.microsoft.com/office/mac/drawingml/2011/main" val="0"/>
+            </a:ext>
+          </a:extLst>
+        </p:spPr>
+        <p:txBody>
+          <a:bodyPr/>
+          <a:lstStyle>
+            <a:lvl1pPr>
+              <a:defRPr sz="1000">
+                <a:solidFill>
+                  <a:schemeClr val="accent4"/>
+                </a:solidFill>
+              </a:defRPr>
+            </a:lvl1pPr>
+          </a:lstStyle>
+          <a:p>
+            <a:pPr algn="r"/>
+            <a:fld id="{F7021451-1387-4CA6-816F-3879F97B5CBC}" type="slidenum">
+              <a:rPr b="0" lang="en-US"/>
+              <a:t>57</a:t>
+            </a:fld>
+            <a:endParaRPr lang="en-US"/>
+          </a:p>
+        </p:txBody>
+      </p:sp>
+    </p:spTree>
+  </p:cSld>
+  <p:clrMapOvr>
+    <a:masterClrMapping/>
+  </p:clrMapOvr>
+</p:sld>
+</file>
+
+<file path=ppt/slides/slide58.xml><?xml version="1.0" encoding="utf-8"?>
+<p:sld xmlns:a="http://schemas.openxmlformats.org/drawingml/2006/main" xmlns:r="http://schemas.openxmlformats.org/officeDocument/2006/relationships" xmlns:p="http://schemas.openxmlformats.org/presentationml/2006/main">
+  <p:cSld name="Slide 58">
+    <p:spTree>
+      <p:nvGrpSpPr>
+        <p:cNvPr id="1" name=""/>
+        <p:cNvGrpSpPr/>
+        <p:nvPr/>
+      </p:nvGrpSpPr>
+      <p:grpSpPr>
+        <a:xfrm>
+          <a:off x="0" y="0"/>
+          <a:ext cx="0" cy="0"/>
+          <a:chOff x="0" y="0"/>
+          <a:chExt cx="0" cy="0"/>
+        </a:xfrm>
+      </p:grpSpPr>
+      <p:sp>
+        <p:nvSpPr>
+          <p:cNvPr id="2" name="Text 0"/>
+          <p:cNvSpPr/>
+          <p:nvPr>
+            <p:ph idx="100" type="title" hasCustomPrompt="1"/>
+          </p:nvPr>
+        </p:nvSpPr>
+        <p:spPr>
+          <a:xfrm>
+            <a:off x="457200" y="274320"/>
+            <a:ext cx="8229600" cy="685800"/>
+          </a:xfrm>
+          <a:prstGeom prst="rect">
+            <a:avLst/>
+          </a:prstGeom>
+          <a:noFill/>
+          <a:ln/>
+        </p:spPr>
+        <p:txBody>
+          <a:bodyPr wrap="square" lIns="0" tIns="0" rIns="0" bIns="0" rtlCol="0" anchor="ctr"/>
+          <a:lstStyle/>
+          <a:p>
+            <a:pPr indent="0" marL="0">
+              <a:buNone/>
+            </a:pPr>
+            <a:r>
+              <a:rPr lang="en-US" sz="2800" b="1" dirty="0">
+                <a:solidFill>
+                  <a:schemeClr val="tx2"/>
+                </a:solidFill>
+              </a:rPr>
+              <a:t>출시 전 Claude에게 요청할 30가지</a:t>
+            </a:r>
+            <a:endParaRPr lang="en-US" sz="2800" dirty="0"/>
+          </a:p>
+        </p:txBody>
+      </p:sp>
+      <p:sp>
+        <p:nvSpPr>
+          <p:cNvPr id="3" name="card"/>
+          <p:cNvSpPr/>
+          <p:nvPr/>
+        </p:nvSpPr>
+        <p:spPr>
+          <a:xfrm>
+            <a:off x="457200" y="1188720"/>
+            <a:ext cx="1920240" cy="2834640"/>
+          </a:xfrm>
+          <a:prstGeom prst="roundRect">
+            <a:avLst>
+              <a:gd name="adj" fmla="val 3810"/>
+            </a:avLst>
+          </a:prstGeom>
+          <a:solidFill>
+            <a:schemeClr val="bg2"/>
+          </a:solidFill>
+          <a:ln/>
+        </p:spPr>
+      </p:sp>
+      <p:sp>
+        <p:nvSpPr>
+          <p:cNvPr id="4" name="Text 2"/>
+          <p:cNvSpPr txBox="1"/>
+          <p:nvPr/>
+        </p:nvSpPr>
+        <p:spPr>
+          <a:xfrm>
+            <a:off x="621792" y="1325880"/>
+            <a:ext cx="1645920" cy="411480"/>
+          </a:xfrm>
+          <a:prstGeom prst="rect">
+            <a:avLst/>
+          </a:prstGeom>
+          <a:noFill/>
+          <a:ln/>
+        </p:spPr>
+        <p:txBody>
+          <a:bodyPr wrap="square" lIns="0" tIns="0" rIns="0" bIns="0" rtlCol="0" anchor="t"/>
+          <a:lstStyle/>
+          <a:p>
+            <a:pPr indent="0" marL="0">
+              <a:buNone/>
+            </a:pPr>
+            <a:r>
+              <a:rPr lang="en-US" sz="1500" b="1" dirty="0">
+                <a:solidFill>
+                  <a:schemeClr val="accent2"/>
+                </a:solidFill>
+              </a:rPr>
+              <a:t>첫인상·전환</a:t>
+            </a:r>
+            <a:endParaRPr lang="en-US" sz="1500" dirty="0"/>
+          </a:p>
+        </p:txBody>
+      </p:sp>
+      <p:sp>
+        <p:nvSpPr>
+          <p:cNvPr id="5" name="Text 3"/>
+          <p:cNvSpPr txBox="1"/>
+          <p:nvPr/>
+        </p:nvSpPr>
+        <p:spPr>
+          <a:xfrm>
+            <a:off x="621792" y="1783080"/>
+            <a:ext cx="1691640" cy="2103120"/>
+          </a:xfrm>
+          <a:prstGeom prst="rect">
+            <a:avLst/>
+          </a:prstGeom>
+          <a:noFill/>
+          <a:ln/>
+        </p:spPr>
+        <p:txBody>
+          <a:bodyPr wrap="square" lIns="0" tIns="0" rIns="0" bIns="0" rtlCol="0" anchor="t"/>
+          <a:lstStyle/>
+          <a:p>
+            <a:pPr marL="342900" indent="-342900">
+              <a:spcAft>
+                <a:spcPts val="600"/>
+              </a:spcAft>
+              <a:buSzPct val="100000"/>
+              <a:buChar char="•"/>
+            </a:pPr>
+            <a:r>
+              <a:rPr lang="en-US" sz="1200" dirty="0">
+                <a:solidFill>
+                  <a:schemeClr val="tx1"/>
+                </a:solidFill>
+              </a:rPr>
+              <a:t>첫 화면 CTA 1개</a:t>
+            </a:r>
+            <a:endParaRPr lang="en-US" sz="1200" dirty="0"/>
+          </a:p>
+          <a:p>
+            <a:pPr marL="342900" indent="-342900">
+              <a:spcAft>
+                <a:spcPts val="600"/>
+              </a:spcAft>
+              <a:buSzPct val="100000"/>
+              <a:buChar char="•"/>
+            </a:pPr>
+            <a:r>
+              <a:rPr lang="en-US" sz="1200" dirty="0">
+                <a:solidFill>
+                  <a:schemeClr val="tx1"/>
+                </a:solidFill>
+              </a:rPr>
+              <a:t>모바일 고정 버튼</a:t>
+            </a:r>
+            <a:endParaRPr lang="en-US" sz="1200" dirty="0"/>
+          </a:p>
+          <a:p>
+            <a:pPr marL="342900" indent="-342900">
+              <a:spcAft>
+                <a:spcPts val="600"/>
+              </a:spcAft>
+              <a:buSzPct val="100000"/>
+              <a:buChar char="•"/>
+            </a:pPr>
+            <a:r>
+              <a:rPr lang="en-US" sz="1200" dirty="0">
+                <a:solidFill>
+                  <a:schemeClr val="tx1"/>
+                </a:solidFill>
+              </a:rPr>
+              <a:t>신뢰 요소 · FAQ</a:t>
+            </a:r>
+            <a:endParaRPr lang="en-US" sz="1200" dirty="0"/>
+          </a:p>
+          <a:p>
+            <a:pPr marL="342900" indent="-342900">
+              <a:spcAft>
+                <a:spcPts val="600"/>
+              </a:spcAft>
+              <a:buSzPct val="100000"/>
+              <a:buChar char="•"/>
+            </a:pPr>
+            <a:r>
+              <a:rPr lang="en-US" sz="1200" dirty="0">
+                <a:solidFill>
+                  <a:schemeClr val="tx1"/>
+                </a:solidFill>
+              </a:rPr>
+              <a:t>문의 답변 시간 표시</a:t>
+            </a:r>
+            <a:endParaRPr lang="en-US" sz="1200" dirty="0"/>
+          </a:p>
+        </p:txBody>
+      </p:sp>
+      <p:sp>
+        <p:nvSpPr>
+          <p:cNvPr id="6" name="card"/>
+          <p:cNvSpPr/>
+          <p:nvPr/>
+        </p:nvSpPr>
+        <p:spPr>
+          <a:xfrm>
+            <a:off x="2560320" y="1188720"/>
+            <a:ext cx="1920240" cy="2834640"/>
+          </a:xfrm>
+          <a:prstGeom prst="roundRect">
+            <a:avLst>
+              <a:gd name="adj" fmla="val 3810"/>
+            </a:avLst>
+          </a:prstGeom>
+          <a:solidFill>
+            <a:schemeClr val="tx2"/>
+          </a:solidFill>
+          <a:ln/>
+        </p:spPr>
+      </p:sp>
+      <p:sp>
+        <p:nvSpPr>
+          <p:cNvPr id="7" name="Text 5"/>
+          <p:cNvSpPr txBox="1"/>
+          <p:nvPr/>
+        </p:nvSpPr>
+        <p:spPr>
+          <a:xfrm>
+            <a:off x="2724912" y="1325880"/>
+            <a:ext cx="1645920" cy="411480"/>
+          </a:xfrm>
+          <a:prstGeom prst="rect">
+            <a:avLst/>
+          </a:prstGeom>
+          <a:noFill/>
+          <a:ln/>
+        </p:spPr>
+        <p:txBody>
+          <a:bodyPr wrap="square" lIns="0" tIns="0" rIns="0" bIns="0" rtlCol="0" anchor="t"/>
+          <a:lstStyle/>
+          <a:p>
+            <a:pPr indent="0" marL="0">
+              <a:buNone/>
+            </a:pPr>
+            <a:r>
+              <a:rPr lang="en-US" sz="1500" b="1" dirty="0">
+                <a:solidFill>
+                  <a:schemeClr val="accent6"/>
+                </a:solidFill>
+              </a:rPr>
+              <a:t>검색 노출</a:t>
+            </a:r>
+            <a:endParaRPr lang="en-US" sz="1500" dirty="0"/>
+          </a:p>
+        </p:txBody>
+      </p:sp>
+      <p:sp>
+        <p:nvSpPr>
+          <p:cNvPr id="8" name="Text 6"/>
+          <p:cNvSpPr txBox="1"/>
+          <p:nvPr/>
+        </p:nvSpPr>
+        <p:spPr>
+          <a:xfrm>
+            <a:off x="2724912" y="1783080"/>
+            <a:ext cx="1691640" cy="2103120"/>
+          </a:xfrm>
+          <a:prstGeom prst="rect">
+            <a:avLst/>
+          </a:prstGeom>
+          <a:noFill/>
+          <a:ln/>
+        </p:spPr>
+        <p:txBody>
+          <a:bodyPr wrap="square" lIns="0" tIns="0" rIns="0" bIns="0" rtlCol="0" anchor="t"/>
+          <a:lstStyle/>
+          <a:p>
+            <a:pPr marL="342900" indent="-342900">
+              <a:spcAft>
+                <a:spcPts val="600"/>
+              </a:spcAft>
+              <a:buSzPct val="100000"/>
+              <a:buChar char="•"/>
+            </a:pPr>
+            <a:r>
+              <a:rPr lang="en-US" sz="1200" dirty="0">
+                <a:solidFill>
+                  <a:schemeClr val="bg1"/>
+                </a:solidFill>
+              </a:rPr>
+              <a:t>페이지마다 다른 제목·설명</a:t>
+            </a:r>
+            <a:endParaRPr lang="en-US" sz="1200" dirty="0"/>
+          </a:p>
+          <a:p>
+            <a:pPr marL="342900" indent="-342900">
+              <a:spcAft>
+                <a:spcPts val="600"/>
+              </a:spcAft>
+              <a:buSzPct val="100000"/>
+              <a:buChar char="•"/>
+            </a:pPr>
+            <a:r>
+              <a:rPr lang="en-US" sz="1200" dirty="0">
+                <a:solidFill>
+                  <a:schemeClr val="bg1"/>
+                </a:solidFill>
+              </a:rPr>
+              <a:t>h1 · alt · 내부 링크</a:t>
+            </a:r>
+            <a:endParaRPr lang="en-US" sz="1200" dirty="0"/>
+          </a:p>
+          <a:p>
+            <a:pPr marL="342900" indent="-342900">
+              <a:spcAft>
+                <a:spcPts val="600"/>
+              </a:spcAft>
+              <a:buSzPct val="100000"/>
+              <a:buChar char="•"/>
+            </a:pPr>
+            <a:r>
+              <a:rPr lang="en-US" sz="1200" dirty="0">
+                <a:solidFill>
+                  <a:schemeClr val="bg1"/>
+                </a:solidFill>
+              </a:rPr>
+              <a:t>robots.txt · 사이트맵</a:t>
+            </a:r>
+            <a:endParaRPr lang="en-US" sz="1200" dirty="0"/>
+          </a:p>
+          <a:p>
+            <a:pPr marL="342900" indent="-342900">
+              <a:spcAft>
+                <a:spcPts val="600"/>
+              </a:spcAft>
+              <a:buSzPct val="100000"/>
+              <a:buChar char="•"/>
+            </a:pPr>
+            <a:r>
+              <a:rPr lang="en-US" sz="1200" dirty="0">
+                <a:solidFill>
+                  <a:schemeClr val="bg1"/>
+                </a:solidFill>
+              </a:rPr>
+              <a:t>구조화된 데이터 · 404</a:t>
+            </a:r>
+            <a:endParaRPr lang="en-US" sz="1200" dirty="0"/>
+          </a:p>
+        </p:txBody>
+      </p:sp>
+      <p:sp>
+        <p:nvSpPr>
+          <p:cNvPr id="9" name="card"/>
+          <p:cNvSpPr/>
+          <p:nvPr/>
+        </p:nvSpPr>
+        <p:spPr>
+          <a:xfrm>
+            <a:off x="4663440" y="1188720"/>
+            <a:ext cx="1920240" cy="2834640"/>
+          </a:xfrm>
+          <a:prstGeom prst="roundRect">
+            <a:avLst>
+              <a:gd name="adj" fmla="val 3810"/>
+            </a:avLst>
+          </a:prstGeom>
+          <a:solidFill>
+            <a:schemeClr val="bg2"/>
+          </a:solidFill>
+          <a:ln/>
+        </p:spPr>
+      </p:sp>
+      <p:sp>
+        <p:nvSpPr>
+          <p:cNvPr id="10" name="Text 8"/>
+          <p:cNvSpPr txBox="1"/>
+          <p:nvPr/>
+        </p:nvSpPr>
+        <p:spPr>
+          <a:xfrm>
+            <a:off x="4828032" y="1325880"/>
+            <a:ext cx="1645920" cy="411480"/>
+          </a:xfrm>
+          <a:prstGeom prst="rect">
+            <a:avLst/>
+          </a:prstGeom>
+          <a:noFill/>
+          <a:ln/>
+        </p:spPr>
+        <p:txBody>
+          <a:bodyPr wrap="square" lIns="0" tIns="0" rIns="0" bIns="0" rtlCol="0" anchor="t"/>
+          <a:lstStyle/>
+          <a:p>
+            <a:pPr indent="0" marL="0">
+              <a:buNone/>
+            </a:pPr>
+            <a:r>
+              <a:rPr lang="en-US" sz="1500" b="1" dirty="0">
+                <a:solidFill>
+                  <a:schemeClr val="accent2"/>
+                </a:solidFill>
+              </a:rPr>
+              <a:t>공유·측정</a:t>
+            </a:r>
+            <a:endParaRPr lang="en-US" sz="1500" dirty="0"/>
+          </a:p>
+        </p:txBody>
+      </p:sp>
+      <p:sp>
+        <p:nvSpPr>
+          <p:cNvPr id="11" name="Text 9"/>
+          <p:cNvSpPr txBox="1"/>
+          <p:nvPr/>
+        </p:nvSpPr>
+        <p:spPr>
+          <a:xfrm>
+            <a:off x="4828032" y="1783080"/>
+            <a:ext cx="1691640" cy="2103120"/>
+          </a:xfrm>
+          <a:prstGeom prst="rect">
+            <a:avLst/>
+          </a:prstGeom>
+          <a:noFill/>
+          <a:ln/>
+        </p:spPr>
+        <p:txBody>
+          <a:bodyPr wrap="square" lIns="0" tIns="0" rIns="0" bIns="0" rtlCol="0" anchor="t"/>
+          <a:lstStyle/>
+          <a:p>
+            <a:pPr marL="342900" indent="-342900">
+              <a:spcAft>
+                <a:spcPts val="600"/>
+              </a:spcAft>
+              <a:buSzPct val="100000"/>
+              <a:buChar char="•"/>
+            </a:pPr>
+            <a:r>
+              <a:rPr lang="en-US" sz="1200" dirty="0">
+                <a:solidFill>
+                  <a:schemeClr val="tx1"/>
+                </a:solidFill>
+              </a:rPr>
+              <a:t>OG 태그 썸네일</a:t>
+            </a:r>
+            <a:endParaRPr lang="en-US" sz="1200" dirty="0"/>
+          </a:p>
+          <a:p>
+            <a:pPr marL="342900" indent="-342900">
+              <a:spcAft>
+                <a:spcPts val="600"/>
+              </a:spcAft>
+              <a:buSzPct val="100000"/>
+              <a:buChar char="•"/>
+            </a:pPr>
+            <a:r>
+              <a:rPr lang="en-US" sz="1200" dirty="0">
+                <a:solidFill>
+                  <a:schemeClr val="tx1"/>
+                </a:solidFill>
+              </a:rPr>
+              <a:t>파비콘 · 공유 버튼</a:t>
+            </a:r>
+            <a:endParaRPr lang="en-US" sz="1200" dirty="0"/>
+          </a:p>
+          <a:p>
+            <a:pPr marL="342900" indent="-342900">
+              <a:spcAft>
+                <a:spcPts val="600"/>
+              </a:spcAft>
+              <a:buSzPct val="100000"/>
+              <a:buChar char="•"/>
+            </a:pPr>
+            <a:r>
+              <a:rPr lang="en-US" sz="1200" dirty="0">
+                <a:solidFill>
+                  <a:schemeClr val="tx1"/>
+                </a:solidFill>
+              </a:rPr>
+              <a:t>GA4 핵심 이벤트 · UTM</a:t>
+            </a:r>
+            <a:endParaRPr lang="en-US" sz="1200" dirty="0"/>
+          </a:p>
+          <a:p>
+            <a:pPr marL="342900" indent="-342900">
+              <a:spcAft>
+                <a:spcPts val="600"/>
+              </a:spcAft>
+              <a:buSzPct val="100000"/>
+              <a:buChar char="•"/>
+            </a:pPr>
+            <a:r>
+              <a:rPr lang="en-US" sz="1200" dirty="0">
+                <a:solidFill>
+                  <a:schemeClr val="tx1"/>
+                </a:solidFill>
+              </a:rPr>
+              <a:t>서치 콘솔 · 서치어드바이저</a:t>
+            </a:r>
+            <a:endParaRPr lang="en-US" sz="1200" dirty="0"/>
+          </a:p>
+        </p:txBody>
+      </p:sp>
+      <p:sp>
+        <p:nvSpPr>
+          <p:cNvPr id="12" name="card"/>
+          <p:cNvSpPr/>
+          <p:nvPr/>
+        </p:nvSpPr>
+        <p:spPr>
+          <a:xfrm>
+            <a:off x="6766560" y="1188720"/>
+            <a:ext cx="1920240" cy="2834640"/>
+          </a:xfrm>
+          <a:prstGeom prst="roundRect">
+            <a:avLst>
+              <a:gd name="adj" fmla="val 3810"/>
+            </a:avLst>
+          </a:prstGeom>
+          <a:solidFill>
+            <a:schemeClr val="bg2"/>
+          </a:solidFill>
+          <a:ln/>
+        </p:spPr>
+      </p:sp>
+      <p:sp>
+        <p:nvSpPr>
+          <p:cNvPr id="13" name="Text 11"/>
+          <p:cNvSpPr txBox="1"/>
+          <p:nvPr/>
+        </p:nvSpPr>
+        <p:spPr>
+          <a:xfrm>
+            <a:off x="6931152" y="1325880"/>
+            <a:ext cx="1645920" cy="411480"/>
+          </a:xfrm>
+          <a:prstGeom prst="rect">
+            <a:avLst/>
+          </a:prstGeom>
+          <a:noFill/>
+          <a:ln/>
+        </p:spPr>
+        <p:txBody>
+          <a:bodyPr wrap="square" lIns="0" tIns="0" rIns="0" bIns="0" rtlCol="0" anchor="t"/>
+          <a:lstStyle/>
+          <a:p>
+            <a:pPr indent="0" marL="0">
+              <a:buNone/>
+            </a:pPr>
+            <a:r>
+              <a:rPr lang="en-US" sz="1500" b="1" dirty="0">
+                <a:solidFill>
+                  <a:schemeClr val="accent2"/>
+                </a:solidFill>
+              </a:rPr>
+              <a:t>법·품질</a:t>
+            </a:r>
+            <a:endParaRPr lang="en-US" sz="1500" dirty="0"/>
+          </a:p>
+        </p:txBody>
+      </p:sp>
+      <p:sp>
+        <p:nvSpPr>
+          <p:cNvPr id="14" name="Text 12"/>
+          <p:cNvSpPr txBox="1"/>
+          <p:nvPr/>
+        </p:nvSpPr>
+        <p:spPr>
+          <a:xfrm>
+            <a:off x="6931152" y="1783080"/>
+            <a:ext cx="1691640" cy="2103120"/>
+          </a:xfrm>
+          <a:prstGeom prst="rect">
+            <a:avLst/>
+          </a:prstGeom>
+          <a:noFill/>
+          <a:ln/>
+        </p:spPr>
+        <p:txBody>
+          <a:bodyPr wrap="square" lIns="0" tIns="0" rIns="0" bIns="0" rtlCol="0" anchor="t"/>
+          <a:lstStyle/>
+          <a:p>
+            <a:pPr marL="342900" indent="-342900">
+              <a:spcAft>
+                <a:spcPts val="600"/>
+              </a:spcAft>
+              <a:buSzPct val="100000"/>
+              <a:buChar char="•"/>
+            </a:pPr>
+            <a:r>
+              <a:rPr lang="en-US" sz="1200" dirty="0">
+                <a:solidFill>
+                  <a:schemeClr val="tx1"/>
+                </a:solidFill>
+              </a:rPr>
+              <a:t>처리방침 · 사업자 푸터</a:t>
+            </a:r>
+            <a:endParaRPr lang="en-US" sz="1200" dirty="0"/>
+          </a:p>
+          <a:p>
+            <a:pPr marL="342900" indent="-342900">
+              <a:spcAft>
+                <a:spcPts val="600"/>
+              </a:spcAft>
+              <a:buSzPct val="100000"/>
+              <a:buChar char="•"/>
+            </a:pPr>
+            <a:r>
+              <a:rPr lang="en-US" sz="1200" dirty="0">
+                <a:solidFill>
+                  <a:schemeClr val="tx1"/>
+                </a:solidFill>
+              </a:rPr>
+              <a:t>동의 분리</a:t>
+            </a:r>
+            <a:endParaRPr lang="en-US" sz="1200" dirty="0"/>
+          </a:p>
+          <a:p>
+            <a:pPr marL="342900" indent="-342900">
+              <a:spcAft>
+                <a:spcPts val="600"/>
+              </a:spcAft>
+              <a:buSzPct val="100000"/>
+              <a:buChar char="•"/>
+            </a:pPr>
+            <a:r>
+              <a:rPr lang="en-US" sz="1200" dirty="0">
+                <a:solidFill>
+                  <a:schemeClr val="tx1"/>
+                </a:solidFill>
+              </a:rPr>
+              <a:t>코어 웹 바이탈 · 접근성</a:t>
+            </a:r>
+            <a:endParaRPr lang="en-US" sz="1200" dirty="0"/>
+          </a:p>
+          <a:p>
+            <a:pPr marL="342900" indent="-342900">
+              <a:spcAft>
+                <a:spcPts val="600"/>
+              </a:spcAft>
+              <a:buSzPct val="100000"/>
+              <a:buChar char="•"/>
+            </a:pPr>
+            <a:r>
+              <a:rPr lang="en-US" sz="1200" dirty="0">
+                <a:solidFill>
+                  <a:schemeClr val="tx1"/>
+                </a:solidFill>
+              </a:rPr>
+              <a:t>보안 · 스팸 방지 · 모니터링</a:t>
+            </a:r>
+            <a:endParaRPr lang="en-US" sz="1200" dirty="0"/>
+          </a:p>
+        </p:txBody>
+      </p:sp>
+      <p:sp>
+        <p:nvSpPr>
+          <p:cNvPr id="15" name="Text 13"/>
+          <p:cNvSpPr txBox="1"/>
+          <p:nvPr/>
+        </p:nvSpPr>
+        <p:spPr>
+          <a:xfrm>
+            <a:off x="457200" y="4160520"/>
+            <a:ext cx="8229600" cy="411480"/>
+          </a:xfrm>
+          <a:prstGeom prst="rect">
+            <a:avLst/>
+          </a:prstGeom>
+          <a:noFill/>
+          <a:ln/>
+        </p:spPr>
+        <p:txBody>
+          <a:bodyPr wrap="square" lIns="0" tIns="0" rIns="0" bIns="0" rtlCol="0" anchor="t"/>
+          <a:lstStyle/>
+          <a:p>
+            <a:pPr indent="0" marL="0">
+              <a:buNone/>
+            </a:pPr>
+            <a:r>
+              <a:rPr lang="en-US" sz="1300" b="1" dirty="0">
+                <a:solidFill>
+                  <a:schemeClr val="tx2"/>
+                </a:solidFill>
+              </a:rPr>
+              <a:t>38장 요청문을 복사해 보내고, PageSpeed · 리치 결과 테스트 · 서치 콘솔 · 카카오 디버거로 확인</a:t>
+            </a:r>
+            <a:endParaRPr lang="en-US" sz="1300" dirty="0"/>
+          </a:p>
+        </p:txBody>
+      </p:sp>
+      <p:sp>
+        <p:nvSpPr>
+          <p:cNvPr id="25" name="Slide Number Placeholder 0"/>
+          <p:cNvSpPr>
+            <a:spLocks noGrp="1"/>
+          </p:cNvSpPr>
+          <p:nvPr>
+            <p:ph type="sldNum" sz="quarter" idx="4294967295"/>
+          </p:nvPr>
+        </p:nvSpPr>
+        <p:spPr>
+          <a:xfrm>
+            <a:off x="8321040" y="4754880"/>
+            <a:ext cx="457200" cy="274320"/>
+          </a:xfrm>
+          <a:prstGeom prst="rect">
+            <a:avLst/>
+          </a:prstGeom>
+          <a:extLst>
+            <a:ext uri="{C572A759-6A51-4108-AA02-DFA0A04FC94B}">
+              <ma14:wrappingTextBoxFlag xmlns:ma14="http://schemas.microsoft.com/office/mac/drawingml/2011/main" val="0"/>
+            </a:ext>
+          </a:extLst>
+        </p:spPr>
+        <p:txBody>
+          <a:bodyPr/>
+          <a:lstStyle>
+            <a:lvl1pPr>
+              <a:defRPr sz="1000">
+                <a:solidFill>
+                  <a:schemeClr val="accent4"/>
+                </a:solidFill>
+              </a:defRPr>
+            </a:lvl1pPr>
+          </a:lstStyle>
+          <a:p>
+            <a:pPr algn="r"/>
+            <a:fld id="{F7021451-1387-4CA6-816F-3879F97B5CBC}" type="slidenum">
+              <a:rPr b="0" lang="en-US"/>
+              <a:t>58</a:t>
+            </a:fld>
+            <a:endParaRPr lang="en-US"/>
+          </a:p>
+        </p:txBody>
+      </p:sp>
+    </p:spTree>
+  </p:cSld>
+  <p:clrMapOvr>
+    <a:masterClrMapping/>
+  </p:clrMapOvr>
+</p:sld>
+</file>
+
+<file path=ppt/slides/slide59.xml><?xml version="1.0" encoding="utf-8"?>
+<p:sld xmlns:a="http://schemas.openxmlformats.org/drawingml/2006/main" xmlns:r="http://schemas.openxmlformats.org/officeDocument/2006/relationships" xmlns:p="http://schemas.openxmlformats.org/presentationml/2006/main">
+  <p:cSld name="Slide 59">
+    <p:spTree>
+      <p:nvGrpSpPr>
+        <p:cNvPr id="1" name=""/>
+        <p:cNvGrpSpPr/>
+        <p:nvPr/>
+      </p:nvGrpSpPr>
+      <p:grpSpPr>
+        <a:xfrm>
+          <a:off x="0" y="0"/>
+          <a:ext cx="0" cy="0"/>
+          <a:chOff x="0" y="0"/>
+          <a:chExt cx="0" cy="0"/>
+        </a:xfrm>
+      </p:grpSpPr>
+      <p:sp>
+        <p:nvSpPr>
+          <p:cNvPr id="2" name="Text 0"/>
+          <p:cNvSpPr/>
+          <p:nvPr>
+            <p:ph idx="100" type="title" hasCustomPrompt="1"/>
+          </p:nvPr>
+        </p:nvSpPr>
+        <p:spPr>
+          <a:xfrm>
+            <a:off x="457200" y="274320"/>
+            <a:ext cx="8229600" cy="685800"/>
+          </a:xfrm>
+          <a:prstGeom prst="rect">
+            <a:avLst/>
+          </a:prstGeom>
+          <a:noFill/>
+          <a:ln/>
+        </p:spPr>
+        <p:txBody>
+          <a:bodyPr wrap="square" lIns="0" tIns="0" rIns="0" bIns="0" rtlCol="0" anchor="ctr"/>
+          <a:lstStyle/>
+          <a:p>
+            <a:pPr indent="0" marL="0">
+              <a:buNone/>
+            </a:pPr>
+            <a:r>
+              <a:rPr lang="en-US" sz="2800" b="1" dirty="0">
+                <a:solidFill>
+                  <a:schemeClr val="tx2"/>
+                </a:solidFill>
+              </a:rPr>
+              <a:t>출시 직전 자주 하는 실수 4가지</a:t>
+            </a:r>
+            <a:endParaRPr lang="en-US" sz="2800" dirty="0"/>
+          </a:p>
+        </p:txBody>
+      </p:sp>
+      <p:sp>
+        <p:nvSpPr>
+          <p:cNvPr id="3" name="card"/>
+          <p:cNvSpPr/>
+          <p:nvPr/>
+        </p:nvSpPr>
+        <p:spPr>
+          <a:xfrm>
+            <a:off x="457200" y="1143000"/>
+            <a:ext cx="8229600" cy="713232"/>
+          </a:xfrm>
+          <a:prstGeom prst="roundRect">
+            <a:avLst>
+              <a:gd name="adj" fmla="val 10256"/>
+            </a:avLst>
+          </a:prstGeom>
+          <a:solidFill>
+            <a:schemeClr val="bg2"/>
+          </a:solidFill>
+          <a:ln/>
+        </p:spPr>
+      </p:sp>
+      <p:sp>
+        <p:nvSpPr>
+          <p:cNvPr id="4" name="badge1"/>
+          <p:cNvSpPr/>
+          <p:nvPr/>
+        </p:nvSpPr>
+        <p:spPr>
+          <a:xfrm>
+            <a:off x="594360" y="1307592"/>
+            <a:ext cx="384048" cy="384048"/>
+          </a:xfrm>
+          <a:prstGeom prst="ellipse">
+            <a:avLst/>
+          </a:prstGeom>
+          <a:solidFill>
+            <a:schemeClr val="accent5"/>
+          </a:solidFill>
+          <a:ln/>
+        </p:spPr>
+      </p:sp>
+      <p:sp>
+        <p:nvSpPr>
+          <p:cNvPr id="5" name="Text 3"/>
+          <p:cNvSpPr txBox="1"/>
+          <p:nvPr/>
+        </p:nvSpPr>
+        <p:spPr>
+          <a:xfrm>
+            <a:off x="594360" y="1307592"/>
+            <a:ext cx="384048" cy="384048"/>
+          </a:xfrm>
+          <a:prstGeom prst="rect">
+            <a:avLst/>
+          </a:prstGeom>
+          <a:noFill/>
+          <a:ln/>
+        </p:spPr>
+        <p:txBody>
+          <a:bodyPr wrap="square" lIns="0" tIns="0" rIns="0" bIns="0" rtlCol="0" anchor="ctr"/>
+          <a:lstStyle/>
+          <a:p>
+            <a:pPr algn="ctr" indent="0" marL="0">
+              <a:buNone/>
+            </a:pPr>
+            <a:r>
+              <a:rPr lang="en-US" sz="1400" b="1" dirty="0">
+                <a:solidFill>
+                  <a:schemeClr val="bg1"/>
+                </a:solidFill>
+              </a:rPr>
+              <a:t>1</a:t>
+            </a:r>
+            <a:endParaRPr lang="en-US" sz="1400" dirty="0"/>
+          </a:p>
+        </p:txBody>
+      </p:sp>
+      <p:sp>
+        <p:nvSpPr>
+          <p:cNvPr id="6" name="Text 4"/>
+          <p:cNvSpPr txBox="1"/>
+          <p:nvPr/>
+        </p:nvSpPr>
+        <p:spPr>
+          <a:xfrm>
+            <a:off x="1143000" y="1143000"/>
+            <a:ext cx="2560320" cy="713232"/>
+          </a:xfrm>
+          <a:prstGeom prst="rect">
+            <a:avLst/>
+          </a:prstGeom>
+          <a:noFill/>
+          <a:ln/>
+        </p:spPr>
+        <p:txBody>
+          <a:bodyPr wrap="square" lIns="0" tIns="0" rIns="0" bIns="0" rtlCol="0" anchor="ctr"/>
+          <a:lstStyle/>
+          <a:p>
+            <a:pPr indent="0" marL="0">
+              <a:buNone/>
+            </a:pPr>
+            <a:r>
+              <a:rPr lang="en-US" sz="1500" b="1" dirty="0">
+                <a:solidFill>
+                  <a:schemeClr val="tx1"/>
+                </a:solidFill>
+              </a:rPr>
+              <a:t>robots.txt로 숨기기</a:t>
+            </a:r>
+            <a:endParaRPr lang="en-US" sz="1500" dirty="0"/>
+          </a:p>
+        </p:txBody>
+      </p:sp>
+      <p:sp>
+        <p:nvSpPr>
+          <p:cNvPr id="7" name="Text 5"/>
+          <p:cNvSpPr txBox="1"/>
+          <p:nvPr/>
+        </p:nvSpPr>
+        <p:spPr>
+          <a:xfrm>
+            <a:off x="3749040" y="1143000"/>
+            <a:ext cx="4800600" cy="713232"/>
+          </a:xfrm>
+          <a:prstGeom prst="rect">
+            <a:avLst/>
+          </a:prstGeom>
+          <a:noFill/>
+          <a:ln/>
+        </p:spPr>
+        <p:txBody>
+          <a:bodyPr wrap="square" lIns="0" tIns="0" rIns="0" bIns="0" rtlCol="0" anchor="ctr"/>
+          <a:lstStyle/>
+          <a:p>
+            <a:pPr indent="0" marL="0">
+              <a:buNone/>
+            </a:pPr>
+            <a:r>
+              <a:rPr lang="en-US" sz="1200" dirty="0">
+                <a:solidFill>
+                  <a:schemeClr val="accent4"/>
+                </a:solidFill>
+              </a:rPr>
+              <a:t>숨기기 도구가 아님 → noindex 또는 비밀번호. 운영 사이트 전체 Disallow 실수 확인</a:t>
+            </a:r>
+            <a:endParaRPr lang="en-US" sz="1200" dirty="0"/>
+          </a:p>
+        </p:txBody>
+      </p:sp>
+      <p:sp>
+        <p:nvSpPr>
+          <p:cNvPr id="8" name="card"/>
+          <p:cNvSpPr/>
+          <p:nvPr/>
+        </p:nvSpPr>
+        <p:spPr>
+          <a:xfrm>
+            <a:off x="457200" y="1965960"/>
+            <a:ext cx="8229600" cy="713232"/>
+          </a:xfrm>
+          <a:prstGeom prst="roundRect">
+            <a:avLst>
+              <a:gd name="adj" fmla="val 10256"/>
+            </a:avLst>
+          </a:prstGeom>
+          <a:solidFill>
+            <a:schemeClr val="bg2"/>
+          </a:solidFill>
+          <a:ln/>
+        </p:spPr>
+      </p:sp>
+      <p:sp>
+        <p:nvSpPr>
+          <p:cNvPr id="9" name="badge2"/>
+          <p:cNvSpPr/>
+          <p:nvPr/>
+        </p:nvSpPr>
+        <p:spPr>
+          <a:xfrm>
+            <a:off x="594360" y="2130552"/>
+            <a:ext cx="384048" cy="384048"/>
+          </a:xfrm>
+          <a:prstGeom prst="ellipse">
+            <a:avLst/>
+          </a:prstGeom>
+          <a:solidFill>
+            <a:schemeClr val="accent5"/>
+          </a:solidFill>
+          <a:ln/>
+        </p:spPr>
+      </p:sp>
+      <p:sp>
+        <p:nvSpPr>
+          <p:cNvPr id="10" name="Text 8"/>
+          <p:cNvSpPr txBox="1"/>
+          <p:nvPr/>
+        </p:nvSpPr>
+        <p:spPr>
+          <a:xfrm>
+            <a:off x="594360" y="2130552"/>
+            <a:ext cx="384048" cy="384048"/>
+          </a:xfrm>
+          <a:prstGeom prst="rect">
+            <a:avLst/>
+          </a:prstGeom>
+          <a:noFill/>
+          <a:ln/>
+        </p:spPr>
+        <p:txBody>
+          <a:bodyPr wrap="square" lIns="0" tIns="0" rIns="0" bIns="0" rtlCol="0" anchor="ctr"/>
+          <a:lstStyle/>
+          <a:p>
+            <a:pPr algn="ctr" indent="0" marL="0">
+              <a:buNone/>
+            </a:pPr>
+            <a:r>
+              <a:rPr lang="en-US" sz="1400" b="1" dirty="0">
+                <a:solidFill>
+                  <a:schemeClr val="bg1"/>
+                </a:solidFill>
+              </a:rPr>
+              <a:t>2</a:t>
+            </a:r>
+            <a:endParaRPr lang="en-US" sz="1400" dirty="0"/>
+          </a:p>
+        </p:txBody>
+      </p:sp>
+      <p:sp>
+        <p:nvSpPr>
+          <p:cNvPr id="11" name="Text 9"/>
+          <p:cNvSpPr txBox="1"/>
+          <p:nvPr/>
+        </p:nvSpPr>
+        <p:spPr>
+          <a:xfrm>
+            <a:off x="1143000" y="1965960"/>
+            <a:ext cx="2560320" cy="713232"/>
+          </a:xfrm>
+          <a:prstGeom prst="rect">
+            <a:avLst/>
+          </a:prstGeom>
+          <a:noFill/>
+          <a:ln/>
+        </p:spPr>
+        <p:txBody>
+          <a:bodyPr wrap="square" lIns="0" tIns="0" rIns="0" bIns="0" rtlCol="0" anchor="ctr"/>
+          <a:lstStyle/>
+          <a:p>
+            <a:pPr indent="0" marL="0">
+              <a:buNone/>
+            </a:pPr>
+            <a:r>
+              <a:rPr lang="en-US" sz="1500" b="1" dirty="0">
+                <a:solidFill>
+                  <a:schemeClr val="tx1"/>
+                </a:solidFill>
+              </a:rPr>
+              <a:t>가짜 404</a:t>
+            </a:r>
+            <a:endParaRPr lang="en-US" sz="1500" dirty="0"/>
+          </a:p>
+        </p:txBody>
+      </p:sp>
+      <p:sp>
+        <p:nvSpPr>
+          <p:cNvPr id="12" name="Text 10"/>
+          <p:cNvSpPr txBox="1"/>
+          <p:nvPr/>
+        </p:nvSpPr>
+        <p:spPr>
+          <a:xfrm>
+            <a:off x="3749040" y="1965960"/>
+            <a:ext cx="4800600" cy="713232"/>
+          </a:xfrm>
+          <a:prstGeom prst="rect">
+            <a:avLst/>
+          </a:prstGeom>
+          <a:noFill/>
+          <a:ln/>
+        </p:spPr>
+        <p:txBody>
+          <a:bodyPr wrap="square" lIns="0" tIns="0" rIns="0" bIns="0" rtlCol="0" anchor="ctr"/>
+          <a:lstStyle/>
+          <a:p>
+            <a:pPr indent="0" marL="0">
+              <a:buNone/>
+            </a:pPr>
+            <a:r>
+              <a:rPr lang="en-US" sz="1200" dirty="0">
+                <a:solidFill>
+                  <a:schemeClr val="accent4"/>
+                </a:solidFill>
+              </a:rPr>
+              <a:t>화면만 404, 상태 코드는 200 (소프트 404) → 실제 404 코드로</a:t>
+            </a:r>
+            <a:endParaRPr lang="en-US" sz="1200" dirty="0"/>
+          </a:p>
+        </p:txBody>
+      </p:sp>
+      <p:sp>
+        <p:nvSpPr>
+          <p:cNvPr id="13" name="card"/>
+          <p:cNvSpPr/>
+          <p:nvPr/>
+        </p:nvSpPr>
+        <p:spPr>
+          <a:xfrm>
+            <a:off x="457200" y="2788920"/>
+            <a:ext cx="8229600" cy="713232"/>
+          </a:xfrm>
+          <a:prstGeom prst="roundRect">
+            <a:avLst>
+              <a:gd name="adj" fmla="val 10256"/>
+            </a:avLst>
+          </a:prstGeom>
+          <a:solidFill>
+            <a:schemeClr val="bg2"/>
+          </a:solidFill>
+          <a:ln/>
+        </p:spPr>
+      </p:sp>
+      <p:sp>
+        <p:nvSpPr>
+          <p:cNvPr id="14" name="badge3"/>
+          <p:cNvSpPr/>
+          <p:nvPr/>
+        </p:nvSpPr>
+        <p:spPr>
+          <a:xfrm>
+            <a:off x="594360" y="2953512"/>
+            <a:ext cx="384048" cy="384048"/>
+          </a:xfrm>
+          <a:prstGeom prst="ellipse">
+            <a:avLst/>
+          </a:prstGeom>
+          <a:solidFill>
+            <a:schemeClr val="accent5"/>
+          </a:solidFill>
+          <a:ln/>
+        </p:spPr>
+      </p:sp>
+      <p:sp>
+        <p:nvSpPr>
+          <p:cNvPr id="15" name="Text 13"/>
+          <p:cNvSpPr txBox="1"/>
+          <p:nvPr/>
+        </p:nvSpPr>
+        <p:spPr>
+          <a:xfrm>
+            <a:off x="594360" y="2953512"/>
+            <a:ext cx="384048" cy="384048"/>
+          </a:xfrm>
+          <a:prstGeom prst="rect">
+            <a:avLst/>
+          </a:prstGeom>
+          <a:noFill/>
+          <a:ln/>
+        </p:spPr>
+        <p:txBody>
+          <a:bodyPr wrap="square" lIns="0" tIns="0" rIns="0" bIns="0" rtlCol="0" anchor="ctr"/>
+          <a:lstStyle/>
+          <a:p>
+            <a:pPr algn="ctr" indent="0" marL="0">
+              <a:buNone/>
+            </a:pPr>
+            <a:r>
+              <a:rPr lang="en-US" sz="1400" b="1" dirty="0">
+                <a:solidFill>
+                  <a:schemeClr val="bg1"/>
+                </a:solidFill>
+              </a:rPr>
+              <a:t>3</a:t>
+            </a:r>
+            <a:endParaRPr lang="en-US" sz="1400" dirty="0"/>
+          </a:p>
+        </p:txBody>
+      </p:sp>
+      <p:sp>
+        <p:nvSpPr>
+          <p:cNvPr id="16" name="Text 14"/>
+          <p:cNvSpPr txBox="1"/>
+          <p:nvPr/>
+        </p:nvSpPr>
+        <p:spPr>
+          <a:xfrm>
+            <a:off x="1143000" y="2788920"/>
+            <a:ext cx="2560320" cy="713232"/>
+          </a:xfrm>
+          <a:prstGeom prst="rect">
+            <a:avLst/>
+          </a:prstGeom>
+          <a:noFill/>
+          <a:ln/>
+        </p:spPr>
+        <p:txBody>
+          <a:bodyPr wrap="square" lIns="0" tIns="0" rIns="0" bIns="0" rtlCol="0" anchor="ctr"/>
+          <a:lstStyle/>
+          <a:p>
+            <a:pPr indent="0" marL="0">
+              <a:buNone/>
+            </a:pPr>
+            <a:r>
+              <a:rPr lang="en-US" sz="1500" b="1" dirty="0">
+                <a:solidFill>
+                  <a:schemeClr val="tx1"/>
+                </a:solidFill>
+              </a:rPr>
+              <a:t>카톡 썸네일이 안 바뀜</a:t>
+            </a:r>
+            <a:endParaRPr lang="en-US" sz="1500" dirty="0"/>
+          </a:p>
+        </p:txBody>
+      </p:sp>
+      <p:sp>
+        <p:nvSpPr>
+          <p:cNvPr id="17" name="Text 15"/>
+          <p:cNvSpPr txBox="1"/>
+          <p:nvPr/>
+        </p:nvSpPr>
+        <p:spPr>
+          <a:xfrm>
+            <a:off x="3749040" y="2788920"/>
+            <a:ext cx="4800600" cy="713232"/>
+          </a:xfrm>
+          <a:prstGeom prst="rect">
+            <a:avLst/>
+          </a:prstGeom>
+          <a:noFill/>
+          <a:ln/>
+        </p:spPr>
+        <p:txBody>
+          <a:bodyPr wrap="square" lIns="0" tIns="0" rIns="0" bIns="0" rtlCol="0" anchor="ctr"/>
+          <a:lstStyle/>
+          <a:p>
+            <a:pPr indent="0" marL="0">
+              <a:buNone/>
+            </a:pPr>
+            <a:r>
+              <a:rPr lang="en-US" sz="1200" dirty="0">
+                <a:solidFill>
+                  <a:schemeClr val="accent4"/>
+                </a:solidFill>
+              </a:rPr>
+              <a:t>카카오 캐시 → 공유 디버거 초기화, 이미지 주소에 ?v=2</a:t>
+            </a:r>
+            <a:endParaRPr lang="en-US" sz="1200" dirty="0"/>
+          </a:p>
+        </p:txBody>
+      </p:sp>
+      <p:sp>
+        <p:nvSpPr>
+          <p:cNvPr id="18" name="card"/>
+          <p:cNvSpPr/>
+          <p:nvPr/>
+        </p:nvSpPr>
+        <p:spPr>
+          <a:xfrm>
+            <a:off x="457200" y="3611880"/>
+            <a:ext cx="8229600" cy="713232"/>
+          </a:xfrm>
+          <a:prstGeom prst="roundRect">
+            <a:avLst>
+              <a:gd name="adj" fmla="val 10256"/>
+            </a:avLst>
+          </a:prstGeom>
+          <a:solidFill>
+            <a:schemeClr val="bg2"/>
+          </a:solidFill>
+          <a:ln/>
+        </p:spPr>
+      </p:sp>
+      <p:sp>
+        <p:nvSpPr>
+          <p:cNvPr id="19" name="badge4"/>
+          <p:cNvSpPr/>
+          <p:nvPr/>
+        </p:nvSpPr>
+        <p:spPr>
+          <a:xfrm>
+            <a:off x="594360" y="3776472"/>
+            <a:ext cx="384048" cy="384048"/>
+          </a:xfrm>
+          <a:prstGeom prst="ellipse">
+            <a:avLst/>
+          </a:prstGeom>
+          <a:solidFill>
+            <a:schemeClr val="accent5"/>
+          </a:solidFill>
+          <a:ln/>
+        </p:spPr>
+      </p:sp>
+      <p:sp>
+        <p:nvSpPr>
+          <p:cNvPr id="20" name="Text 18"/>
+          <p:cNvSpPr txBox="1"/>
+          <p:nvPr/>
+        </p:nvSpPr>
+        <p:spPr>
+          <a:xfrm>
+            <a:off x="594360" y="3776472"/>
+            <a:ext cx="384048" cy="384048"/>
+          </a:xfrm>
+          <a:prstGeom prst="rect">
+            <a:avLst/>
+          </a:prstGeom>
+          <a:noFill/>
+          <a:ln/>
+        </p:spPr>
+        <p:txBody>
+          <a:bodyPr wrap="square" lIns="0" tIns="0" rIns="0" bIns="0" rtlCol="0" anchor="ctr"/>
+          <a:lstStyle/>
+          <a:p>
+            <a:pPr algn="ctr" indent="0" marL="0">
+              <a:buNone/>
+            </a:pPr>
+            <a:r>
+              <a:rPr lang="en-US" sz="1400" b="1" dirty="0">
+                <a:solidFill>
+                  <a:schemeClr val="bg1"/>
+                </a:solidFill>
+              </a:rPr>
+              <a:t>4</a:t>
+            </a:r>
+            <a:endParaRPr lang="en-US" sz="1400" dirty="0"/>
+          </a:p>
+        </p:txBody>
+      </p:sp>
+      <p:sp>
+        <p:nvSpPr>
+          <p:cNvPr id="21" name="Text 19"/>
+          <p:cNvSpPr txBox="1"/>
+          <p:nvPr/>
+        </p:nvSpPr>
+        <p:spPr>
+          <a:xfrm>
+            <a:off x="1143000" y="3611880"/>
+            <a:ext cx="2560320" cy="713232"/>
+          </a:xfrm>
+          <a:prstGeom prst="rect">
+            <a:avLst/>
+          </a:prstGeom>
+          <a:noFill/>
+          <a:ln/>
+        </p:spPr>
+        <p:txBody>
+          <a:bodyPr wrap="square" lIns="0" tIns="0" rIns="0" bIns="0" rtlCol="0" anchor="ctr"/>
+          <a:lstStyle/>
+          <a:p>
+            <a:pPr indent="0" marL="0">
+              <a:buNone/>
+            </a:pPr>
+            <a:r>
+              <a:rPr lang="en-US" sz="1500" b="1" dirty="0">
+                <a:solidFill>
+                  <a:schemeClr val="tx1"/>
+                </a:solidFill>
+              </a:rPr>
+              <a:t>화면과 다른 구조화된 데이터</a:t>
+            </a:r>
+            <a:endParaRPr lang="en-US" sz="1500" dirty="0"/>
+          </a:p>
+        </p:txBody>
+      </p:sp>
+      <p:sp>
+        <p:nvSpPr>
+          <p:cNvPr id="22" name="Text 20"/>
+          <p:cNvSpPr txBox="1"/>
+          <p:nvPr/>
+        </p:nvSpPr>
+        <p:spPr>
+          <a:xfrm>
+            <a:off x="3749040" y="3611880"/>
+            <a:ext cx="4800600" cy="713232"/>
+          </a:xfrm>
+          <a:prstGeom prst="rect">
+            <a:avLst/>
+          </a:prstGeom>
+          <a:noFill/>
+          <a:ln/>
+        </p:spPr>
+        <p:txBody>
+          <a:bodyPr wrap="square" lIns="0" tIns="0" rIns="0" bIns="0" rtlCol="0" anchor="ctr"/>
+          <a:lstStyle/>
+          <a:p>
+            <a:pPr indent="0" marL="0">
+              <a:buNone/>
+            </a:pPr>
+            <a:r>
+              <a:rPr lang="en-US" sz="1200" dirty="0">
+                <a:solidFill>
+                  <a:schemeClr val="accent4"/>
+                </a:solidFill>
+              </a:rPr>
+              <a:t>가짜 별점·없는 정보 표시는 스팸 정책 위반</a:t>
+            </a:r>
+            <a:endParaRPr lang="en-US" sz="1200" dirty="0"/>
+          </a:p>
+        </p:txBody>
+      </p:sp>
+      <p:sp>
+        <p:nvSpPr>
+          <p:cNvPr id="23" name="Text 21"/>
+          <p:cNvSpPr txBox="1"/>
+          <p:nvPr/>
+        </p:nvSpPr>
+        <p:spPr>
+          <a:xfrm>
+            <a:off x="457200" y="4645152"/>
+            <a:ext cx="7680960" cy="274320"/>
+          </a:xfrm>
+          <a:prstGeom prst="rect">
+            <a:avLst/>
+          </a:prstGeom>
+          <a:noFill/>
+          <a:ln/>
+        </p:spPr>
+        <p:txBody>
+          <a:bodyPr wrap="square" lIns="0" tIns="0" rIns="0" bIns="0" rtlCol="0" anchor="t"/>
+          <a:lstStyle/>
+          <a:p>
+            <a:pPr indent="0" marL="0">
+              <a:buNone/>
+            </a:pPr>
+            <a:r>
+              <a:rPr lang="en-US" sz="1000" dirty="0">
+                <a:solidFill>
+                  <a:schemeClr val="accent4"/>
+                </a:solidFill>
+              </a:rPr>
+              <a:t>코어 웹 바이탈 좋음 기준: LCP ≤ 2.5초 · INP ≤ 200ms · CLS ≤ 0.1</a:t>
+            </a:r>
+            <a:endParaRPr lang="en-US" sz="1000" dirty="0"/>
+          </a:p>
+        </p:txBody>
+      </p:sp>
+      <p:sp>
+        <p:nvSpPr>
+          <p:cNvPr id="25" name="Slide Number Placeholder 0"/>
+          <p:cNvSpPr>
+            <a:spLocks noGrp="1"/>
+          </p:cNvSpPr>
+          <p:nvPr>
+            <p:ph type="sldNum" sz="quarter" idx="4294967295"/>
+          </p:nvPr>
+        </p:nvSpPr>
+        <p:spPr>
+          <a:xfrm>
+            <a:off x="8321040" y="4754880"/>
+            <a:ext cx="457200" cy="274320"/>
+          </a:xfrm>
+          <a:prstGeom prst="rect">
+            <a:avLst/>
+          </a:prstGeom>
+          <a:extLst>
+            <a:ext uri="{C572A759-6A51-4108-AA02-DFA0A04FC94B}">
+              <ma14:wrappingTextBoxFlag xmlns:ma14="http://schemas.microsoft.com/office/mac/drawingml/2011/main" val="0"/>
+            </a:ext>
+          </a:extLst>
+        </p:spPr>
+        <p:txBody>
+          <a:bodyPr/>
+          <a:lstStyle>
+            <a:lvl1pPr>
+              <a:defRPr sz="1000">
+                <a:solidFill>
+                  <a:schemeClr val="accent4"/>
+                </a:solidFill>
+              </a:defRPr>
+            </a:lvl1pPr>
+          </a:lstStyle>
+          <a:p>
+            <a:pPr algn="r"/>
+            <a:fld id="{F7021451-1387-4CA6-816F-3879F97B5CBC}" type="slidenum">
+              <a:rPr b="0" lang="en-US"/>
+              <a:t>59</a:t>
+            </a:fld>
+            <a:endParaRPr lang="en-US"/>
           </a:p>
         </p:txBody>
       </p:sp>
@@ -43866,6 +47860,121 @@
               <a:t>6</a:t>
             </a:fld>
             <a:endParaRPr lang="en-US"/>
+          </a:p>
+        </p:txBody>
+      </p:sp>
+    </p:spTree>
+  </p:cSld>
+  <p:clrMapOvr>
+    <a:masterClrMapping/>
+  </p:clrMapOvr>
+</p:sld>
+</file>
+
+<file path=ppt/slides/slide60.xml><?xml version="1.0" encoding="utf-8"?>
+<p:sld xmlns:a="http://schemas.openxmlformats.org/drawingml/2006/main" xmlns:r="http://schemas.openxmlformats.org/officeDocument/2006/relationships" xmlns:p="http://schemas.openxmlformats.org/presentationml/2006/main">
+  <p:cSld name="Slide 60">
+    <p:spTree>
+      <p:nvGrpSpPr>
+        <p:cNvPr id="1" name=""/>
+        <p:cNvGrpSpPr/>
+        <p:nvPr/>
+      </p:nvGrpSpPr>
+      <p:grpSpPr>
+        <a:xfrm>
+          <a:off x="0" y="0"/>
+          <a:ext cx="0" cy="0"/>
+          <a:chOff x="0" y="0"/>
+          <a:chExt cx="0" cy="0"/>
+        </a:xfrm>
+      </p:grpSpPr>
+      <p:sp>
+        <p:nvSpPr>
+          <p:cNvPr id="2" name="Text 0"/>
+          <p:cNvSpPr/>
+          <p:nvPr>
+            <p:ph idx="100" type="title" hasCustomPrompt="1"/>
+          </p:nvPr>
+        </p:nvSpPr>
+        <p:spPr>
+          <a:xfrm>
+            <a:off x="548640" y="1371600"/>
+            <a:ext cx="8046720" cy="1280160"/>
+          </a:xfrm>
+          <a:prstGeom prst="rect">
+            <a:avLst/>
+          </a:prstGeom>
+          <a:noFill/>
+          <a:ln/>
+        </p:spPr>
+        <p:txBody>
+          <a:bodyPr wrap="square" lIns="0" tIns="0" rIns="0" bIns="0" rtlCol="0" anchor="b"/>
+          <a:lstStyle/>
+          <a:p>
+            <a:pPr algn="l" indent="0" marL="0">
+              <a:buNone/>
+            </a:pPr>
+            <a:r>
+              <a:rPr lang="en-US" sz="4000" b="1" dirty="0">
+                <a:solidFill>
+                  <a:schemeClr val="bg1"/>
+                </a:solidFill>
+              </a:rPr>
+              <a:t>안전하게, 자주 반복하기</a:t>
+            </a:r>
+            <a:endParaRPr lang="en-US" sz="4000" dirty="0"/>
+          </a:p>
+        </p:txBody>
+      </p:sp>
+      <p:sp>
+        <p:nvSpPr>
+          <p:cNvPr id="3" name="Text 0"/>
+          <p:cNvSpPr/>
+          <p:nvPr>
+            <p:ph idx="101" type="body" hasCustomPrompt="1"/>
+          </p:nvPr>
+        </p:nvSpPr>
+        <p:spPr>
+          <a:xfrm>
+            <a:off x="548640" y="2788920"/>
+            <a:ext cx="8046720" cy="1097280"/>
+          </a:xfrm>
+          <a:prstGeom prst="rect">
+            <a:avLst/>
+          </a:prstGeom>
+          <a:noFill/>
+          <a:ln/>
+        </p:spPr>
+        <p:txBody>
+          <a:bodyPr wrap="square" lIns="0" tIns="0" rIns="0" bIns="0" rtlCol="0" anchor="t"/>
+          <a:lstStyle/>
+          <a:p>
+            <a:pPr algn="l" indent="0" marL="0">
+              <a:buNone/>
+            </a:pPr>
+            <a:r>
+              <a:rPr lang="en-US" sz="1800" dirty="0">
+                <a:solidFill>
+                  <a:schemeClr val="bg2"/>
+                </a:solidFill>
+              </a:rPr>
+              <a:t>기획 → 백업 → 연습용 사이트에서 수정 → 확인 → 배포 → 감시 → 숫자 보기 → 다시 기획</a:t>
+            </a:r>
+            <a:endParaRPr lang="en-US" sz="1800" dirty="0"/>
+          </a:p>
+          <a:p>
+            <a:pPr algn="l" indent="0" marL="0">
+              <a:buNone/>
+            </a:pPr>
+            <a:r>
+              <a:rPr lang="en-US" sz="1800" dirty="0">
+                <a:solidFill>
+                  <a:schemeClr val="bg2"/>
+                </a:solidFill>
+              </a:rPr>
+              <a:t>다음 할 일: docs/13-practice-scenario.md 를 읽고 15장 퀴즈 풀기</a:t>
+            </a:r>
+            <a:endParaRPr lang="en-US" sz="1800" dirty="0"/>
           </a:p>
         </p:txBody>
       </p:sp>

--- a/slides/internet-business-101.pptx
+++ b/slides/internet-business-101.pptx
@@ -65,9 +65,15 @@
     <p:sldId id="313" r:id="rId59"/>
     <p:sldId id="314" r:id="rId60"/>
     <p:sldId id="315" r:id="rId61"/>
+    <p:sldId id="316" r:id="rId62"/>
+    <p:sldId id="317" r:id="rId63"/>
+    <p:sldId id="318" r:id="rId64"/>
+    <p:sldId id="319" r:id="rId65"/>
+    <p:sldId id="320" r:id="rId66"/>
+    <p:sldId id="321" r:id="rId67"/>
   </p:sldIdLst>
   <p:notesMasterIdLst>
-    <p:notesMasterId r:id="rId62"/>
+    <p:notesMasterId r:id="rId68"/>
   </p:notesMasterIdLst>
   <p:sldSz cx="9144000" cy="5143500"/>
   <p:notesSz cx="5143500" cy="9144000"/>
@@ -166,13 +172,13 @@
   <p:extLst>
     <p:ext uri="{521415D9-36F7-43E2-AB2F-B90AF26B5E84}">
       <p14:sectionLst xmlns:p14="http://schemas.microsoft.com/office/powerpoint/2010/main">
-        <p14:section name="시작" id="{d62f1d2d-b020-daf7-902a-42ab7d009a70}">
+        <p14:section name="시작" id="{663d94e9-4a95-2e85-edec-b3671973b1a0}">
           <p14:sldIdLst>
             <p14:sldId id="256"/>
             <p14:sldId id="257"/>
           </p14:sldIdLst>
         </p14:section>
-        <p14:section name="큰 그림" id="{ca511d00-fdce-5534-cf04-053994f88586}">
+        <p14:section name="큰 그림" id="{0b072d4d-56cf-87ea-f403-bf4c236c7128}">
           <p14:sldIdLst>
             <p14:sldId id="258"/>
             <p14:sldId id="259"/>
@@ -181,13 +187,13 @@
             <p14:sldId id="262"/>
           </p14:sldIdLst>
         </p14:section>
-        <p14:section name="만들기" id="{c0ab6f67-c53a-a550-5b28-6d19566e9f89}">
+        <p14:section name="만들기" id="{e6c96a71-0871-48e5-512f-396aad435835}">
           <p14:sldIdLst>
             <p14:sldId id="263"/>
             <p14:sldId id="264"/>
           </p14:sldIdLst>
         </p14:section>
-        <p14:section name="운영하기" id="{72b97fc9-fe85-a14e-0637-9e0d4b4916c0}">
+        <p14:section name="운영하기" id="{953460ff-844e-9abc-739e-22819b577e6c}">
           <p14:sldIdLst>
             <p14:sldId id="265"/>
             <p14:sldId id="266"/>
@@ -201,18 +207,18 @@
             <p14:sldId id="274"/>
           </p14:sldIdLst>
         </p14:section>
-        <p14:section name="키우기" id="{2b160383-9948-a0be-4885-9726f619c0d7}">
+        <p14:section name="키우기" id="{9b91fadc-bde1-b8fc-79bf-505f14c232ea}">
           <p14:sldIdLst>
             <p14:sldId id="275"/>
             <p14:sldId id="276"/>
           </p14:sldIdLst>
         </p14:section>
-        <p14:section name="실전" id="{37311cba-b8de-7d1f-7a39-b28535c5c41c}">
+        <p14:section name="실전" id="{165d80f5-ec1e-2806-c201-d19ad1e3ed62}">
           <p14:sldIdLst>
             <p14:sldId id="277"/>
           </p14:sldIdLst>
         </p14:section>
-        <p14:section name="여러 가지 사이트 사업" id="{97e83ed0-de60-2b70-ddde-cbf260b9f8bc}">
+        <p14:section name="여러 가지 사이트 사업" id="{51993a81-8948-d3a8-9dcf-3856a9f03a0e}">
           <p14:sldIdLst>
             <p14:sldId id="278"/>
             <p14:sldId id="279"/>
@@ -223,7 +229,7 @@
             <p14:sldId id="284"/>
           </p14:sldIdLst>
         </p14:section>
-        <p14:section name="더 넓은 분류" id="{84e699dd-31c9-eb63-e4af-b92f90a8f477}">
+        <p14:section name="더 넓은 분류" id="{86a4f48e-e476-9a25-4735-a198b168010a}">
           <p14:sldIdLst>
             <p14:sldId id="285"/>
             <p14:sldId id="286"/>
@@ -234,7 +240,7 @@
             <p14:sldId id="291"/>
           </p14:sldIdLst>
         </p14:section>
-        <p14:section name="문의·광고 받기" id="{1eeea82e-b56a-1fc9-290e-1b703f55b42d}">
+        <p14:section name="문의·광고 받기" id="{a7530f15-cf24-a070-51b1-f9130aa415ff}">
           <p14:sldIdLst>
             <p14:sldId id="292"/>
             <p14:sldId id="293"/>
@@ -243,7 +249,7 @@
             <p14:sldId id="296"/>
           </p14:sldIdLst>
         </p14:section>
-        <p14:section name="마케팅 실전" id="{8b979e47-3868-3c2e-70e5-dff5178a69ac}">
+        <p14:section name="마케팅 실전" id="{6dcba8fd-61b7-497d-573a-7663acc80897}">
           <p14:sldIdLst>
             <p14:sldId id="297"/>
             <p14:sldId id="298"/>
@@ -254,7 +260,7 @@
             <p14:sldId id="303"/>
           </p14:sldIdLst>
         </p14:section>
-        <p14:section name="도메인" id="{c2d031c8-7983-0038-9f5b-d35bc5616fbe}">
+        <p14:section name="도메인" id="{b29d9cc2-bdb5-968b-8b58-4e572547416b}">
           <p14:sldIdLst>
             <p14:sldId id="304"/>
             <p14:sldId id="305"/>
@@ -264,14 +270,24 @@
             <p14:sldId id="309"/>
           </p14:sldIdLst>
         </p14:section>
-        <p14:section name="출시 준비" id="{b9777a5d-dec2-0151-15f1-5b57b927ed4e}">
+        <p14:section name="출시 준비" id="{7b81c9d1-99cf-3c73-5bbe-ce5c25c03add}">
           <p14:sldIdLst>
             <p14:sldId id="310"/>
             <p14:sldId id="311"/>
             <p14:sldId id="312"/>
             <p14:sldId id="313"/>
             <p14:sldId id="314"/>
+          </p14:sldIdLst>
+        </p14:section>
+        <p14:section name="결제·게임 서버·어뷰징" id="{d2754472-b531-cdb4-fa12-7c1176adf165}">
+          <p14:sldIdLst>
             <p14:sldId id="315"/>
+            <p14:sldId id="316"/>
+            <p14:sldId id="317"/>
+            <p14:sldId id="318"/>
+            <p14:sldId id="319"/>
+            <p14:sldId id="320"/>
+            <p14:sldId id="321"/>
           </p14:sldIdLst>
         </p14:section>
       </p14:sectionLst>
@@ -6574,6 +6590,534 @@
             <a:fld id="{F7021451-1387-4CA6-816F-3879F97B5CBC}" type="slidenum">
               <a:rPr lang="en-US"/>
               <a:t>60</a:t>
+            </a:fld>
+            <a:endParaRPr lang="en-US"/>
+          </a:p>
+        </p:txBody>
+      </p:sp>
+    </p:spTree>
+    <p:extLst>
+      <p:ext uri="{BB962C8B-B14F-4D97-AF65-F5344CB8AC3E}">
+        <p14:creationId xmlns:p14="http://schemas.microsoft.com/office/powerpoint/2010/main" val="1024086991"/>
+      </p:ext>
+    </p:extLst>
+  </p:cSld>
+  <p:clrMapOvr>
+    <a:masterClrMapping/>
+  </p:clrMapOvr>
+</p:notes>
+</file>
+
+<file path=ppt/notesSlides/notesSlide61.xml><?xml version="1.0" encoding="utf-8"?>
+<p:notes xmlns:a="http://schemas.openxmlformats.org/drawingml/2006/main" xmlns:r="http://schemas.openxmlformats.org/officeDocument/2006/relationships" xmlns:p="http://schemas.openxmlformats.org/presentationml/2006/main">
+  <p:cSld>
+    <p:spTree>
+      <p:nvGrpSpPr>
+        <p:cNvPr id="1" name=""/>
+        <p:cNvGrpSpPr/>
+        <p:nvPr/>
+      </p:nvGrpSpPr>
+      <p:grpSpPr>
+        <a:xfrm>
+          <a:off x="0" y="0"/>
+          <a:ext cx="0" cy="0"/>
+          <a:chOff x="0" y="0"/>
+          <a:chExt cx="0" cy="0"/>
+        </a:xfrm>
+      </p:grpSpPr>
+      <p:sp>
+        <p:nvSpPr>
+          <p:cNvPr id="2" name="Slide Image Placeholder 1"/>
+          <p:cNvSpPr>
+            <a:spLocks noGrp="1" noRot="1" noChangeAspect="1"/>
+          </p:cNvSpPr>
+          <p:nvPr>
+            <p:ph type="sldImg"/>
+          </p:nvPr>
+        </p:nvSpPr>
+        <p:spPr/>
+      </p:sp>
+      <p:sp>
+        <p:nvSpPr>
+          <p:cNvPr id="3" name="Notes Placeholder 2"/>
+          <p:cNvSpPr>
+            <a:spLocks noGrp="1"/>
+          </p:cNvSpPr>
+          <p:nvPr>
+            <p:ph type="body" idx="1"/>
+          </p:nvPr>
+        </p:nvSpPr>
+        <p:spPr/>
+        <p:txBody>
+          <a:bodyPr/>
+          <a:lstStyle/>
+          <a:p>
+            <a:r>
+              <a:rPr lang="en-US" dirty="0"/>
+              <a:t/>
+            </a:r>
+            <a:endParaRPr lang="en-US" dirty="0"/>
+          </a:p>
+        </p:txBody>
+      </p:sp>
+      <p:sp>
+        <p:nvSpPr>
+          <p:cNvPr id="4" name="Slide Number Placeholder 3"/>
+          <p:cNvSpPr>
+            <a:spLocks noGrp="1"/>
+          </p:cNvSpPr>
+          <p:nvPr>
+            <p:ph type="sldNum" sz="quarter" idx="10"/>
+          </p:nvPr>
+        </p:nvSpPr>
+        <p:spPr/>
+        <p:txBody>
+          <a:bodyPr/>
+          <a:lstStyle/>
+          <a:p>
+            <a:fld id="{F7021451-1387-4CA6-816F-3879F97B5CBC}" type="slidenum">
+              <a:rPr lang="en-US"/>
+              <a:t>61</a:t>
+            </a:fld>
+            <a:endParaRPr lang="en-US"/>
+          </a:p>
+        </p:txBody>
+      </p:sp>
+    </p:spTree>
+    <p:extLst>
+      <p:ext uri="{BB962C8B-B14F-4D97-AF65-F5344CB8AC3E}">
+        <p14:creationId xmlns:p14="http://schemas.microsoft.com/office/powerpoint/2010/main" val="1024086991"/>
+      </p:ext>
+    </p:extLst>
+  </p:cSld>
+  <p:clrMapOvr>
+    <a:masterClrMapping/>
+  </p:clrMapOvr>
+</p:notes>
+</file>
+
+<file path=ppt/notesSlides/notesSlide62.xml><?xml version="1.0" encoding="utf-8"?>
+<p:notes xmlns:a="http://schemas.openxmlformats.org/drawingml/2006/main" xmlns:r="http://schemas.openxmlformats.org/officeDocument/2006/relationships" xmlns:p="http://schemas.openxmlformats.org/presentationml/2006/main">
+  <p:cSld>
+    <p:spTree>
+      <p:nvGrpSpPr>
+        <p:cNvPr id="1" name=""/>
+        <p:cNvGrpSpPr/>
+        <p:nvPr/>
+      </p:nvGrpSpPr>
+      <p:grpSpPr>
+        <a:xfrm>
+          <a:off x="0" y="0"/>
+          <a:ext cx="0" cy="0"/>
+          <a:chOff x="0" y="0"/>
+          <a:chExt cx="0" cy="0"/>
+        </a:xfrm>
+      </p:grpSpPr>
+      <p:sp>
+        <p:nvSpPr>
+          <p:cNvPr id="2" name="Slide Image Placeholder 1"/>
+          <p:cNvSpPr>
+            <a:spLocks noGrp="1" noRot="1" noChangeAspect="1"/>
+          </p:cNvSpPr>
+          <p:nvPr>
+            <p:ph type="sldImg"/>
+          </p:nvPr>
+        </p:nvSpPr>
+        <p:spPr/>
+      </p:sp>
+      <p:sp>
+        <p:nvSpPr>
+          <p:cNvPr id="3" name="Notes Placeholder 2"/>
+          <p:cNvSpPr>
+            <a:spLocks noGrp="1"/>
+          </p:cNvSpPr>
+          <p:nvPr>
+            <p:ph type="body" idx="1"/>
+          </p:nvPr>
+        </p:nvSpPr>
+        <p:spPr/>
+        <p:txBody>
+          <a:bodyPr/>
+          <a:lstStyle/>
+          <a:p>
+            <a:r>
+              <a:rPr lang="en-US" dirty="0"/>
+              <a:t/>
+            </a:r>
+            <a:endParaRPr lang="en-US" dirty="0"/>
+          </a:p>
+        </p:txBody>
+      </p:sp>
+      <p:sp>
+        <p:nvSpPr>
+          <p:cNvPr id="4" name="Slide Number Placeholder 3"/>
+          <p:cNvSpPr>
+            <a:spLocks noGrp="1"/>
+          </p:cNvSpPr>
+          <p:nvPr>
+            <p:ph type="sldNum" sz="quarter" idx="10"/>
+          </p:nvPr>
+        </p:nvSpPr>
+        <p:spPr/>
+        <p:txBody>
+          <a:bodyPr/>
+          <a:lstStyle/>
+          <a:p>
+            <a:fld id="{F7021451-1387-4CA6-816F-3879F97B5CBC}" type="slidenum">
+              <a:rPr lang="en-US"/>
+              <a:t>62</a:t>
+            </a:fld>
+            <a:endParaRPr lang="en-US"/>
+          </a:p>
+        </p:txBody>
+      </p:sp>
+    </p:spTree>
+    <p:extLst>
+      <p:ext uri="{BB962C8B-B14F-4D97-AF65-F5344CB8AC3E}">
+        <p14:creationId xmlns:p14="http://schemas.microsoft.com/office/powerpoint/2010/main" val="1024086991"/>
+      </p:ext>
+    </p:extLst>
+  </p:cSld>
+  <p:clrMapOvr>
+    <a:masterClrMapping/>
+  </p:clrMapOvr>
+</p:notes>
+</file>
+
+<file path=ppt/notesSlides/notesSlide63.xml><?xml version="1.0" encoding="utf-8"?>
+<p:notes xmlns:a="http://schemas.openxmlformats.org/drawingml/2006/main" xmlns:r="http://schemas.openxmlformats.org/officeDocument/2006/relationships" xmlns:p="http://schemas.openxmlformats.org/presentationml/2006/main">
+  <p:cSld>
+    <p:spTree>
+      <p:nvGrpSpPr>
+        <p:cNvPr id="1" name=""/>
+        <p:cNvGrpSpPr/>
+        <p:nvPr/>
+      </p:nvGrpSpPr>
+      <p:grpSpPr>
+        <a:xfrm>
+          <a:off x="0" y="0"/>
+          <a:ext cx="0" cy="0"/>
+          <a:chOff x="0" y="0"/>
+          <a:chExt cx="0" cy="0"/>
+        </a:xfrm>
+      </p:grpSpPr>
+      <p:sp>
+        <p:nvSpPr>
+          <p:cNvPr id="2" name="Slide Image Placeholder 1"/>
+          <p:cNvSpPr>
+            <a:spLocks noGrp="1" noRot="1" noChangeAspect="1"/>
+          </p:cNvSpPr>
+          <p:nvPr>
+            <p:ph type="sldImg"/>
+          </p:nvPr>
+        </p:nvSpPr>
+        <p:spPr/>
+      </p:sp>
+      <p:sp>
+        <p:nvSpPr>
+          <p:cNvPr id="3" name="Notes Placeholder 2"/>
+          <p:cNvSpPr>
+            <a:spLocks noGrp="1"/>
+          </p:cNvSpPr>
+          <p:nvPr>
+            <p:ph type="body" idx="1"/>
+          </p:nvPr>
+        </p:nvSpPr>
+        <p:spPr/>
+        <p:txBody>
+          <a:bodyPr/>
+          <a:lstStyle/>
+          <a:p>
+            <a:r>
+              <a:rPr lang="en-US" dirty="0"/>
+              <a:t/>
+            </a:r>
+            <a:endParaRPr lang="en-US" dirty="0"/>
+          </a:p>
+        </p:txBody>
+      </p:sp>
+      <p:sp>
+        <p:nvSpPr>
+          <p:cNvPr id="4" name="Slide Number Placeholder 3"/>
+          <p:cNvSpPr>
+            <a:spLocks noGrp="1"/>
+          </p:cNvSpPr>
+          <p:nvPr>
+            <p:ph type="sldNum" sz="quarter" idx="10"/>
+          </p:nvPr>
+        </p:nvSpPr>
+        <p:spPr/>
+        <p:txBody>
+          <a:bodyPr/>
+          <a:lstStyle/>
+          <a:p>
+            <a:fld id="{F7021451-1387-4CA6-816F-3879F97B5CBC}" type="slidenum">
+              <a:rPr lang="en-US"/>
+              <a:t>63</a:t>
+            </a:fld>
+            <a:endParaRPr lang="en-US"/>
+          </a:p>
+        </p:txBody>
+      </p:sp>
+    </p:spTree>
+    <p:extLst>
+      <p:ext uri="{BB962C8B-B14F-4D97-AF65-F5344CB8AC3E}">
+        <p14:creationId xmlns:p14="http://schemas.microsoft.com/office/powerpoint/2010/main" val="1024086991"/>
+      </p:ext>
+    </p:extLst>
+  </p:cSld>
+  <p:clrMapOvr>
+    <a:masterClrMapping/>
+  </p:clrMapOvr>
+</p:notes>
+</file>
+
+<file path=ppt/notesSlides/notesSlide64.xml><?xml version="1.0" encoding="utf-8"?>
+<p:notes xmlns:a="http://schemas.openxmlformats.org/drawingml/2006/main" xmlns:r="http://schemas.openxmlformats.org/officeDocument/2006/relationships" xmlns:p="http://schemas.openxmlformats.org/presentationml/2006/main">
+  <p:cSld>
+    <p:spTree>
+      <p:nvGrpSpPr>
+        <p:cNvPr id="1" name=""/>
+        <p:cNvGrpSpPr/>
+        <p:nvPr/>
+      </p:nvGrpSpPr>
+      <p:grpSpPr>
+        <a:xfrm>
+          <a:off x="0" y="0"/>
+          <a:ext cx="0" cy="0"/>
+          <a:chOff x="0" y="0"/>
+          <a:chExt cx="0" cy="0"/>
+        </a:xfrm>
+      </p:grpSpPr>
+      <p:sp>
+        <p:nvSpPr>
+          <p:cNvPr id="2" name="Slide Image Placeholder 1"/>
+          <p:cNvSpPr>
+            <a:spLocks noGrp="1" noRot="1" noChangeAspect="1"/>
+          </p:cNvSpPr>
+          <p:nvPr>
+            <p:ph type="sldImg"/>
+          </p:nvPr>
+        </p:nvSpPr>
+        <p:spPr/>
+      </p:sp>
+      <p:sp>
+        <p:nvSpPr>
+          <p:cNvPr id="3" name="Notes Placeholder 2"/>
+          <p:cNvSpPr>
+            <a:spLocks noGrp="1"/>
+          </p:cNvSpPr>
+          <p:nvPr>
+            <p:ph type="body" idx="1"/>
+          </p:nvPr>
+        </p:nvSpPr>
+        <p:spPr/>
+        <p:txBody>
+          <a:bodyPr/>
+          <a:lstStyle/>
+          <a:p>
+            <a:r>
+              <a:rPr lang="en-US" dirty="0"/>
+              <a:t/>
+            </a:r>
+            <a:endParaRPr lang="en-US" dirty="0"/>
+          </a:p>
+        </p:txBody>
+      </p:sp>
+      <p:sp>
+        <p:nvSpPr>
+          <p:cNvPr id="4" name="Slide Number Placeholder 3"/>
+          <p:cNvSpPr>
+            <a:spLocks noGrp="1"/>
+          </p:cNvSpPr>
+          <p:nvPr>
+            <p:ph type="sldNum" sz="quarter" idx="10"/>
+          </p:nvPr>
+        </p:nvSpPr>
+        <p:spPr/>
+        <p:txBody>
+          <a:bodyPr/>
+          <a:lstStyle/>
+          <a:p>
+            <a:fld id="{F7021451-1387-4CA6-816F-3879F97B5CBC}" type="slidenum">
+              <a:rPr lang="en-US"/>
+              <a:t>64</a:t>
+            </a:fld>
+            <a:endParaRPr lang="en-US"/>
+          </a:p>
+        </p:txBody>
+      </p:sp>
+    </p:spTree>
+    <p:extLst>
+      <p:ext uri="{BB962C8B-B14F-4D97-AF65-F5344CB8AC3E}">
+        <p14:creationId xmlns:p14="http://schemas.microsoft.com/office/powerpoint/2010/main" val="1024086991"/>
+      </p:ext>
+    </p:extLst>
+  </p:cSld>
+  <p:clrMapOvr>
+    <a:masterClrMapping/>
+  </p:clrMapOvr>
+</p:notes>
+</file>
+
+<file path=ppt/notesSlides/notesSlide65.xml><?xml version="1.0" encoding="utf-8"?>
+<p:notes xmlns:a="http://schemas.openxmlformats.org/drawingml/2006/main" xmlns:r="http://schemas.openxmlformats.org/officeDocument/2006/relationships" xmlns:p="http://schemas.openxmlformats.org/presentationml/2006/main">
+  <p:cSld>
+    <p:spTree>
+      <p:nvGrpSpPr>
+        <p:cNvPr id="1" name=""/>
+        <p:cNvGrpSpPr/>
+        <p:nvPr/>
+      </p:nvGrpSpPr>
+      <p:grpSpPr>
+        <a:xfrm>
+          <a:off x="0" y="0"/>
+          <a:ext cx="0" cy="0"/>
+          <a:chOff x="0" y="0"/>
+          <a:chExt cx="0" cy="0"/>
+        </a:xfrm>
+      </p:grpSpPr>
+      <p:sp>
+        <p:nvSpPr>
+          <p:cNvPr id="2" name="Slide Image Placeholder 1"/>
+          <p:cNvSpPr>
+            <a:spLocks noGrp="1" noRot="1" noChangeAspect="1"/>
+          </p:cNvSpPr>
+          <p:nvPr>
+            <p:ph type="sldImg"/>
+          </p:nvPr>
+        </p:nvSpPr>
+        <p:spPr/>
+      </p:sp>
+      <p:sp>
+        <p:nvSpPr>
+          <p:cNvPr id="3" name="Notes Placeholder 2"/>
+          <p:cNvSpPr>
+            <a:spLocks noGrp="1"/>
+          </p:cNvSpPr>
+          <p:nvPr>
+            <p:ph type="body" idx="1"/>
+          </p:nvPr>
+        </p:nvSpPr>
+        <p:spPr/>
+        <p:txBody>
+          <a:bodyPr/>
+          <a:lstStyle/>
+          <a:p>
+            <a:r>
+              <a:rPr lang="en-US" dirty="0"/>
+              <a:t/>
+            </a:r>
+            <a:endParaRPr lang="en-US" dirty="0"/>
+          </a:p>
+        </p:txBody>
+      </p:sp>
+      <p:sp>
+        <p:nvSpPr>
+          <p:cNvPr id="4" name="Slide Number Placeholder 3"/>
+          <p:cNvSpPr>
+            <a:spLocks noGrp="1"/>
+          </p:cNvSpPr>
+          <p:nvPr>
+            <p:ph type="sldNum" sz="quarter" idx="10"/>
+          </p:nvPr>
+        </p:nvSpPr>
+        <p:spPr/>
+        <p:txBody>
+          <a:bodyPr/>
+          <a:lstStyle/>
+          <a:p>
+            <a:fld id="{F7021451-1387-4CA6-816F-3879F97B5CBC}" type="slidenum">
+              <a:rPr lang="en-US"/>
+              <a:t>65</a:t>
+            </a:fld>
+            <a:endParaRPr lang="en-US"/>
+          </a:p>
+        </p:txBody>
+      </p:sp>
+    </p:spTree>
+    <p:extLst>
+      <p:ext uri="{BB962C8B-B14F-4D97-AF65-F5344CB8AC3E}">
+        <p14:creationId xmlns:p14="http://schemas.microsoft.com/office/powerpoint/2010/main" val="1024086991"/>
+      </p:ext>
+    </p:extLst>
+  </p:cSld>
+  <p:clrMapOvr>
+    <a:masterClrMapping/>
+  </p:clrMapOvr>
+</p:notes>
+</file>
+
+<file path=ppt/notesSlides/notesSlide66.xml><?xml version="1.0" encoding="utf-8"?>
+<p:notes xmlns:a="http://schemas.openxmlformats.org/drawingml/2006/main" xmlns:r="http://schemas.openxmlformats.org/officeDocument/2006/relationships" xmlns:p="http://schemas.openxmlformats.org/presentationml/2006/main">
+  <p:cSld>
+    <p:spTree>
+      <p:nvGrpSpPr>
+        <p:cNvPr id="1" name=""/>
+        <p:cNvGrpSpPr/>
+        <p:nvPr/>
+      </p:nvGrpSpPr>
+      <p:grpSpPr>
+        <a:xfrm>
+          <a:off x="0" y="0"/>
+          <a:ext cx="0" cy="0"/>
+          <a:chOff x="0" y="0"/>
+          <a:chExt cx="0" cy="0"/>
+        </a:xfrm>
+      </p:grpSpPr>
+      <p:sp>
+        <p:nvSpPr>
+          <p:cNvPr id="2" name="Slide Image Placeholder 1"/>
+          <p:cNvSpPr>
+            <a:spLocks noGrp="1" noRot="1" noChangeAspect="1"/>
+          </p:cNvSpPr>
+          <p:nvPr>
+            <p:ph type="sldImg"/>
+          </p:nvPr>
+        </p:nvSpPr>
+        <p:spPr/>
+      </p:sp>
+      <p:sp>
+        <p:nvSpPr>
+          <p:cNvPr id="3" name="Notes Placeholder 2"/>
+          <p:cNvSpPr>
+            <a:spLocks noGrp="1"/>
+          </p:cNvSpPr>
+          <p:nvPr>
+            <p:ph type="body" idx="1"/>
+          </p:nvPr>
+        </p:nvSpPr>
+        <p:spPr/>
+        <p:txBody>
+          <a:bodyPr/>
+          <a:lstStyle/>
+          <a:p>
+            <a:r>
+              <a:rPr lang="en-US" dirty="0"/>
+              <a:t/>
+            </a:r>
+            <a:endParaRPr lang="en-US" dirty="0"/>
+          </a:p>
+        </p:txBody>
+      </p:sp>
+      <p:sp>
+        <p:nvSpPr>
+          <p:cNvPr id="4" name="Slide Number Placeholder 3"/>
+          <p:cNvSpPr>
+            <a:spLocks noGrp="1"/>
+          </p:cNvSpPr>
+          <p:nvPr>
+            <p:ph type="sldNum" sz="quarter" idx="10"/>
+          </p:nvPr>
+        </p:nvSpPr>
+        <p:spPr/>
+        <p:txBody>
+          <a:bodyPr/>
+          <a:lstStyle/>
+          <a:p>
+            <a:fld id="{F7021451-1387-4CA6-816F-3879F97B5CBC}" type="slidenum">
+              <a:rPr lang="en-US"/>
+              <a:t>66</a:t>
             </a:fld>
             <a:endParaRPr lang="en-US"/>
           </a:p>
@@ -47920,6 +48464,3223 @@
                   <a:schemeClr val="bg1"/>
                 </a:solidFill>
               </a:rPr>
+              <a:t>결제·게임 서버·어뷰징</a:t>
+            </a:r>
+            <a:endParaRPr lang="en-US" sz="4000" dirty="0"/>
+          </a:p>
+        </p:txBody>
+      </p:sp>
+      <p:sp>
+        <p:nvSpPr>
+          <p:cNvPr id="3" name="Text 0"/>
+          <p:cNvSpPr/>
+          <p:nvPr>
+            <p:ph idx="101" type="body" hasCustomPrompt="1"/>
+          </p:nvPr>
+        </p:nvSpPr>
+        <p:spPr>
+          <a:xfrm>
+            <a:off x="548640" y="2788920"/>
+            <a:ext cx="8046720" cy="1097280"/>
+          </a:xfrm>
+          <a:prstGeom prst="rect">
+            <a:avLst/>
+          </a:prstGeom>
+          <a:noFill/>
+          <a:ln/>
+        </p:spPr>
+        <p:txBody>
+          <a:bodyPr wrap="square" lIns="0" tIns="0" rIns="0" bIns="0" rtlCol="0" anchor="t"/>
+          <a:lstStyle/>
+          <a:p>
+            <a:pPr algn="l" indent="0" marL="0">
+              <a:buNone/>
+            </a:pPr>
+            <a:r>
+              <a:rPr lang="en-US" sz="1800" dirty="0">
+                <a:solidFill>
+                  <a:schemeClr val="bg2"/>
+                </a:solidFill>
+              </a:rPr>
+              <a:t>결제 연동과 정산 · 롤·배그 같은 멀티플레이 서버 · 어뷰징·핵 대응 — 39–41장</a:t>
+            </a:r>
+            <a:endParaRPr lang="en-US" sz="1800" dirty="0"/>
+          </a:p>
+        </p:txBody>
+      </p:sp>
+    </p:spTree>
+  </p:cSld>
+  <p:clrMapOvr>
+    <a:masterClrMapping/>
+  </p:clrMapOvr>
+</p:sld>
+</file>
+
+<file path=ppt/slides/slide61.xml><?xml version="1.0" encoding="utf-8"?>
+<p:sld xmlns:a="http://schemas.openxmlformats.org/drawingml/2006/main" xmlns:r="http://schemas.openxmlformats.org/officeDocument/2006/relationships" xmlns:p="http://schemas.openxmlformats.org/presentationml/2006/main">
+  <p:cSld name="Slide 61">
+    <p:spTree>
+      <p:nvGrpSpPr>
+        <p:cNvPr id="1" name=""/>
+        <p:cNvGrpSpPr/>
+        <p:nvPr/>
+      </p:nvGrpSpPr>
+      <p:grpSpPr>
+        <a:xfrm>
+          <a:off x="0" y="0"/>
+          <a:ext cx="0" cy="0"/>
+          <a:chOff x="0" y="0"/>
+          <a:chExt cx="0" cy="0"/>
+        </a:xfrm>
+      </p:grpSpPr>
+      <p:sp>
+        <p:nvSpPr>
+          <p:cNvPr id="2" name="Text 0"/>
+          <p:cNvSpPr/>
+          <p:nvPr>
+            <p:ph idx="100" type="title" hasCustomPrompt="1"/>
+          </p:nvPr>
+        </p:nvSpPr>
+        <p:spPr>
+          <a:xfrm>
+            <a:off x="457200" y="274320"/>
+            <a:ext cx="8229600" cy="685800"/>
+          </a:xfrm>
+          <a:prstGeom prst="rect">
+            <a:avLst/>
+          </a:prstGeom>
+          <a:noFill/>
+          <a:ln/>
+        </p:spPr>
+        <p:txBody>
+          <a:bodyPr wrap="square" lIns="0" tIns="0" rIns="0" bIns="0" rtlCol="0" anchor="ctr"/>
+          <a:lstStyle/>
+          <a:p>
+            <a:pPr indent="0" marL="0">
+              <a:buNone/>
+            </a:pPr>
+            <a:r>
+              <a:rPr lang="en-US" sz="2800" b="1" dirty="0">
+                <a:solidFill>
+                  <a:schemeClr val="tx2"/>
+                </a:solidFill>
+              </a:rPr>
+              <a:t>결제 연동: 서버에서 검증하고 승인한다</a:t>
+            </a:r>
+            <a:endParaRPr lang="en-US" sz="2800" dirty="0"/>
+          </a:p>
+        </p:txBody>
+      </p:sp>
+      <p:sp>
+        <p:nvSpPr>
+          <p:cNvPr id="3" name="pay0"/>
+          <p:cNvSpPr/>
+          <p:nvPr/>
+        </p:nvSpPr>
+        <p:spPr>
+          <a:xfrm>
+            <a:off x="457200" y="1188720"/>
+            <a:ext cx="1261872" cy="685800"/>
+          </a:xfrm>
+          <a:prstGeom prst="roundRect">
+            <a:avLst>
+              <a:gd name="adj" fmla="val 10667"/>
+            </a:avLst>
+          </a:prstGeom>
+          <a:solidFill>
+            <a:srgbClr val="1F4E4A"/>
+          </a:solidFill>
+          <a:ln/>
+        </p:spPr>
+      </p:sp>
+      <p:sp>
+        <p:nvSpPr>
+          <p:cNvPr id="4" name="Text 2"/>
+          <p:cNvSpPr txBox="1"/>
+          <p:nvPr/>
+        </p:nvSpPr>
+        <p:spPr>
+          <a:xfrm>
+            <a:off x="457200" y="1188720"/>
+            <a:ext cx="1261872" cy="685800"/>
+          </a:xfrm>
+          <a:prstGeom prst="rect">
+            <a:avLst/>
+          </a:prstGeom>
+          <a:noFill/>
+          <a:ln/>
+        </p:spPr>
+        <p:txBody>
+          <a:bodyPr wrap="square" lIns="0" tIns="0" rIns="0" bIns="0" rtlCol="0" anchor="ctr"/>
+          <a:lstStyle/>
+          <a:p>
+            <a:pPr algn="ctr" indent="0" marL="0">
+              <a:buNone/>
+            </a:pPr>
+            <a:r>
+              <a:rPr lang="en-US" sz="1300" b="1" dirty="0">
+                <a:solidFill>
+                  <a:schemeClr val="bg1"/>
+                </a:solidFill>
+              </a:rPr>
+              <a:t>주문 저장</a:t>
+            </a:r>
+            <a:endParaRPr lang="en-US" sz="1300" dirty="0"/>
+          </a:p>
+        </p:txBody>
+      </p:sp>
+      <p:sp>
+        <p:nvSpPr>
+          <p:cNvPr id="5" name="pay1"/>
+          <p:cNvSpPr/>
+          <p:nvPr/>
+        </p:nvSpPr>
+        <p:spPr>
+          <a:xfrm>
+            <a:off x="1847088" y="1188720"/>
+            <a:ext cx="1261872" cy="685800"/>
+          </a:xfrm>
+          <a:prstGeom prst="roundRect">
+            <a:avLst>
+              <a:gd name="adj" fmla="val 10667"/>
+            </a:avLst>
+          </a:prstGeom>
+          <a:solidFill>
+            <a:srgbClr val="1F4E4A"/>
+          </a:solidFill>
+          <a:ln/>
+        </p:spPr>
+      </p:sp>
+      <p:sp>
+        <p:nvSpPr>
+          <p:cNvPr id="6" name="Text 4"/>
+          <p:cNvSpPr txBox="1"/>
+          <p:nvPr/>
+        </p:nvSpPr>
+        <p:spPr>
+          <a:xfrm>
+            <a:off x="1847088" y="1188720"/>
+            <a:ext cx="1261872" cy="685800"/>
+          </a:xfrm>
+          <a:prstGeom prst="rect">
+            <a:avLst/>
+          </a:prstGeom>
+          <a:noFill/>
+          <a:ln/>
+        </p:spPr>
+        <p:txBody>
+          <a:bodyPr wrap="square" lIns="0" tIns="0" rIns="0" bIns="0" rtlCol="0" anchor="ctr"/>
+          <a:lstStyle/>
+          <a:p>
+            <a:pPr algn="ctr" indent="0" marL="0">
+              <a:buNone/>
+            </a:pPr>
+            <a:r>
+              <a:rPr lang="en-US" sz="1300" b="1" dirty="0">
+                <a:solidFill>
+                  <a:schemeClr val="bg1"/>
+                </a:solidFill>
+              </a:rPr>
+              <a:t>결제창</a:t>
+            </a:r>
+            <a:endParaRPr lang="en-US" sz="1300" dirty="0"/>
+          </a:p>
+        </p:txBody>
+      </p:sp>
+      <p:sp>
+        <p:nvSpPr>
+          <p:cNvPr id="7" name="pay2"/>
+          <p:cNvSpPr/>
+          <p:nvPr/>
+        </p:nvSpPr>
+        <p:spPr>
+          <a:xfrm>
+            <a:off x="3236976" y="1188720"/>
+            <a:ext cx="1261872" cy="685800"/>
+          </a:xfrm>
+          <a:prstGeom prst="roundRect">
+            <a:avLst>
+              <a:gd name="adj" fmla="val 10667"/>
+            </a:avLst>
+          </a:prstGeom>
+          <a:solidFill>
+            <a:srgbClr val="1F4E4A"/>
+          </a:solidFill>
+          <a:ln/>
+        </p:spPr>
+      </p:sp>
+      <p:sp>
+        <p:nvSpPr>
+          <p:cNvPr id="8" name="Text 6"/>
+          <p:cNvSpPr txBox="1"/>
+          <p:nvPr/>
+        </p:nvSpPr>
+        <p:spPr>
+          <a:xfrm>
+            <a:off x="3236976" y="1188720"/>
+            <a:ext cx="1261872" cy="685800"/>
+          </a:xfrm>
+          <a:prstGeom prst="rect">
+            <a:avLst/>
+          </a:prstGeom>
+          <a:noFill/>
+          <a:ln/>
+        </p:spPr>
+        <p:txBody>
+          <a:bodyPr wrap="square" lIns="0" tIns="0" rIns="0" bIns="0" rtlCol="0" anchor="ctr"/>
+          <a:lstStyle/>
+          <a:p>
+            <a:pPr algn="ctr" indent="0" marL="0">
+              <a:buNone/>
+            </a:pPr>
+            <a:r>
+              <a:rPr lang="en-US" sz="1300" b="1" dirty="0">
+                <a:solidFill>
+                  <a:schemeClr val="bg1"/>
+                </a:solidFill>
+              </a:rPr>
+              <a:t>성공 주소</a:t>
+            </a:r>
+            <a:endParaRPr lang="en-US" sz="1300" dirty="0"/>
+          </a:p>
+        </p:txBody>
+      </p:sp>
+      <p:sp>
+        <p:nvSpPr>
+          <p:cNvPr id="9" name="pay3"/>
+          <p:cNvSpPr/>
+          <p:nvPr/>
+        </p:nvSpPr>
+        <p:spPr>
+          <a:xfrm>
+            <a:off x="4626864" y="1188720"/>
+            <a:ext cx="1261872" cy="685800"/>
+          </a:xfrm>
+          <a:prstGeom prst="roundRect">
+            <a:avLst>
+              <a:gd name="adj" fmla="val 10667"/>
+            </a:avLst>
+          </a:prstGeom>
+          <a:solidFill>
+            <a:srgbClr val="F08A3E"/>
+          </a:solidFill>
+          <a:ln/>
+        </p:spPr>
+      </p:sp>
+      <p:sp>
+        <p:nvSpPr>
+          <p:cNvPr id="10" name="Text 8"/>
+          <p:cNvSpPr txBox="1"/>
+          <p:nvPr/>
+        </p:nvSpPr>
+        <p:spPr>
+          <a:xfrm>
+            <a:off x="4626864" y="1188720"/>
+            <a:ext cx="1261872" cy="685800"/>
+          </a:xfrm>
+          <a:prstGeom prst="rect">
+            <a:avLst/>
+          </a:prstGeom>
+          <a:noFill/>
+          <a:ln/>
+        </p:spPr>
+        <p:txBody>
+          <a:bodyPr wrap="square" lIns="0" tIns="0" rIns="0" bIns="0" rtlCol="0" anchor="ctr"/>
+          <a:lstStyle/>
+          <a:p>
+            <a:pPr algn="ctr" indent="0" marL="0">
+              <a:buNone/>
+            </a:pPr>
+            <a:r>
+              <a:rPr lang="en-US" sz="1300" b="1" dirty="0">
+                <a:solidFill>
+                  <a:schemeClr val="bg1"/>
+                </a:solidFill>
+              </a:rPr>
+              <a:t>★ 금액 검증</a:t>
+            </a:r>
+            <a:endParaRPr lang="en-US" sz="1300" dirty="0"/>
+          </a:p>
+        </p:txBody>
+      </p:sp>
+      <p:sp>
+        <p:nvSpPr>
+          <p:cNvPr id="11" name="pay4"/>
+          <p:cNvSpPr/>
+          <p:nvPr/>
+        </p:nvSpPr>
+        <p:spPr>
+          <a:xfrm>
+            <a:off x="6016752" y="1188720"/>
+            <a:ext cx="1261872" cy="685800"/>
+          </a:xfrm>
+          <a:prstGeom prst="roundRect">
+            <a:avLst>
+              <a:gd name="adj" fmla="val 10667"/>
+            </a:avLst>
+          </a:prstGeom>
+          <a:solidFill>
+            <a:srgbClr val="F08A3E"/>
+          </a:solidFill>
+          <a:ln/>
+        </p:spPr>
+      </p:sp>
+      <p:sp>
+        <p:nvSpPr>
+          <p:cNvPr id="12" name="Text 10"/>
+          <p:cNvSpPr txBox="1"/>
+          <p:nvPr/>
+        </p:nvSpPr>
+        <p:spPr>
+          <a:xfrm>
+            <a:off x="6016752" y="1188720"/>
+            <a:ext cx="1261872" cy="685800"/>
+          </a:xfrm>
+          <a:prstGeom prst="rect">
+            <a:avLst/>
+          </a:prstGeom>
+          <a:noFill/>
+          <a:ln/>
+        </p:spPr>
+        <p:txBody>
+          <a:bodyPr wrap="square" lIns="0" tIns="0" rIns="0" bIns="0" rtlCol="0" anchor="ctr"/>
+          <a:lstStyle/>
+          <a:p>
+            <a:pPr algn="ctr" indent="0" marL="0">
+              <a:buNone/>
+            </a:pPr>
+            <a:r>
+              <a:rPr lang="en-US" sz="1300" b="1" dirty="0">
+                <a:solidFill>
+                  <a:schemeClr val="bg1"/>
+                </a:solidFill>
+              </a:rPr>
+              <a:t>★ 서버 승인</a:t>
+            </a:r>
+            <a:endParaRPr lang="en-US" sz="1300" dirty="0"/>
+          </a:p>
+        </p:txBody>
+      </p:sp>
+      <p:sp>
+        <p:nvSpPr>
+          <p:cNvPr id="13" name="pay5"/>
+          <p:cNvSpPr/>
+          <p:nvPr/>
+        </p:nvSpPr>
+        <p:spPr>
+          <a:xfrm>
+            <a:off x="7406640" y="1188720"/>
+            <a:ext cx="1261872" cy="685800"/>
+          </a:xfrm>
+          <a:prstGeom prst="roundRect">
+            <a:avLst>
+              <a:gd name="adj" fmla="val 10667"/>
+            </a:avLst>
+          </a:prstGeom>
+          <a:solidFill>
+            <a:srgbClr val="1F4E4A"/>
+          </a:solidFill>
+          <a:ln/>
+        </p:spPr>
+      </p:sp>
+      <p:sp>
+        <p:nvSpPr>
+          <p:cNvPr id="14" name="Text 12"/>
+          <p:cNvSpPr txBox="1"/>
+          <p:nvPr/>
+        </p:nvSpPr>
+        <p:spPr>
+          <a:xfrm>
+            <a:off x="7406640" y="1188720"/>
+            <a:ext cx="1261872" cy="685800"/>
+          </a:xfrm>
+          <a:prstGeom prst="rect">
+            <a:avLst/>
+          </a:prstGeom>
+          <a:noFill/>
+          <a:ln/>
+        </p:spPr>
+        <p:txBody>
+          <a:bodyPr wrap="square" lIns="0" tIns="0" rIns="0" bIns="0" rtlCol="0" anchor="ctr"/>
+          <a:lstStyle/>
+          <a:p>
+            <a:pPr algn="ctr" indent="0" marL="0">
+              <a:buNone/>
+            </a:pPr>
+            <a:r>
+              <a:rPr lang="en-US" sz="1300" b="1" dirty="0">
+                <a:solidFill>
+                  <a:schemeClr val="bg1"/>
+                </a:solidFill>
+              </a:rPr>
+              <a:t>결과 저장</a:t>
+            </a:r>
+            <a:endParaRPr lang="en-US" sz="1300" dirty="0"/>
+          </a:p>
+        </p:txBody>
+      </p:sp>
+      <p:sp>
+        <p:nvSpPr>
+          <p:cNvPr id="15" name="card"/>
+          <p:cNvSpPr/>
+          <p:nvPr/>
+        </p:nvSpPr>
+        <p:spPr>
+          <a:xfrm>
+            <a:off x="457200" y="2148840"/>
+            <a:ext cx="4023360" cy="960120"/>
+          </a:xfrm>
+          <a:prstGeom prst="roundRect">
+            <a:avLst>
+              <a:gd name="adj" fmla="val 7619"/>
+            </a:avLst>
+          </a:prstGeom>
+          <a:solidFill>
+            <a:schemeClr val="bg2"/>
+          </a:solidFill>
+          <a:ln/>
+        </p:spPr>
+      </p:sp>
+      <p:sp>
+        <p:nvSpPr>
+          <p:cNvPr id="16" name="Text 14"/>
+          <p:cNvSpPr txBox="1"/>
+          <p:nvPr/>
+        </p:nvSpPr>
+        <p:spPr>
+          <a:xfrm>
+            <a:off x="640080" y="2148840"/>
+            <a:ext cx="3657600" cy="960120"/>
+          </a:xfrm>
+          <a:prstGeom prst="rect">
+            <a:avLst/>
+          </a:prstGeom>
+          <a:noFill/>
+          <a:ln/>
+        </p:spPr>
+        <p:txBody>
+          <a:bodyPr wrap="square" lIns="0" tIns="0" rIns="0" bIns="0" rtlCol="0" anchor="ctr"/>
+          <a:lstStyle/>
+          <a:p>
+            <a:pPr indent="0" marL="0">
+              <a:buNone/>
+            </a:pPr>
+            <a:r>
+              <a:rPr lang="en-US" sz="1500" b="1" dirty="0">
+                <a:solidFill>
+                  <a:schemeClr val="tx2"/>
+                </a:solidFill>
+              </a:rPr>
+              <a:t>금액 검증</a:t>
+            </a:r>
+            <a:endParaRPr lang="en-US" sz="1500" dirty="0"/>
+          </a:p>
+          <a:p>
+            <a:pPr indent="0" marL="0">
+              <a:buNone/>
+            </a:pPr>
+            <a:r>
+              <a:rPr lang="en-US" sz="1200" dirty="0">
+                <a:solidFill>
+                  <a:schemeClr val="tx1"/>
+                </a:solidFill>
+              </a:rPr>
+              <a:t>브라우저 값은 조작 가능 → DB 금액과 같을 때만 승인</a:t>
+            </a:r>
+            <a:endParaRPr lang="en-US" sz="1500" dirty="0"/>
+          </a:p>
+        </p:txBody>
+      </p:sp>
+      <p:sp>
+        <p:nvSpPr>
+          <p:cNvPr id="17" name="card"/>
+          <p:cNvSpPr/>
+          <p:nvPr/>
+        </p:nvSpPr>
+        <p:spPr>
+          <a:xfrm>
+            <a:off x="4663440" y="2148840"/>
+            <a:ext cx="4023360" cy="960120"/>
+          </a:xfrm>
+          <a:prstGeom prst="roundRect">
+            <a:avLst>
+              <a:gd name="adj" fmla="val 7619"/>
+            </a:avLst>
+          </a:prstGeom>
+          <a:solidFill>
+            <a:schemeClr val="bg2"/>
+          </a:solidFill>
+          <a:ln/>
+        </p:spPr>
+      </p:sp>
+      <p:sp>
+        <p:nvSpPr>
+          <p:cNvPr id="18" name="Text 16"/>
+          <p:cNvSpPr txBox="1"/>
+          <p:nvPr/>
+        </p:nvSpPr>
+        <p:spPr>
+          <a:xfrm>
+            <a:off x="4846320" y="2148840"/>
+            <a:ext cx="3657600" cy="960120"/>
+          </a:xfrm>
+          <a:prstGeom prst="rect">
+            <a:avLst/>
+          </a:prstGeom>
+          <a:noFill/>
+          <a:ln/>
+        </p:spPr>
+        <p:txBody>
+          <a:bodyPr wrap="square" lIns="0" tIns="0" rIns="0" bIns="0" rtlCol="0" anchor="ctr"/>
+          <a:lstStyle/>
+          <a:p>
+            <a:pPr indent="0" marL="0">
+              <a:buNone/>
+            </a:pPr>
+            <a:r>
+              <a:rPr lang="en-US" sz="1500" b="1" dirty="0">
+                <a:solidFill>
+                  <a:schemeClr val="tx2"/>
+                </a:solidFill>
+              </a:rPr>
+              <a:t>비밀 키</a:t>
+            </a:r>
+            <a:endParaRPr lang="en-US" sz="1500" dirty="0"/>
+          </a:p>
+          <a:p>
+            <a:pPr indent="0" marL="0">
+              <a:buNone/>
+            </a:pPr>
+            <a:r>
+              <a:rPr lang="en-US" sz="1200" dirty="0">
+                <a:solidFill>
+                  <a:schemeClr val="tx1"/>
+                </a:solidFill>
+              </a:rPr>
+              <a:t>승인은 서버에서, 시크릿 키는 환경 변수에만</a:t>
+            </a:r>
+            <a:endParaRPr lang="en-US" sz="1500" dirty="0"/>
+          </a:p>
+        </p:txBody>
+      </p:sp>
+      <p:sp>
+        <p:nvSpPr>
+          <p:cNvPr id="19" name="card"/>
+          <p:cNvSpPr/>
+          <p:nvPr/>
+        </p:nvSpPr>
+        <p:spPr>
+          <a:xfrm>
+            <a:off x="457200" y="3246120"/>
+            <a:ext cx="4023360" cy="960120"/>
+          </a:xfrm>
+          <a:prstGeom prst="roundRect">
+            <a:avLst>
+              <a:gd name="adj" fmla="val 7619"/>
+            </a:avLst>
+          </a:prstGeom>
+          <a:solidFill>
+            <a:schemeClr val="bg2"/>
+          </a:solidFill>
+          <a:ln/>
+        </p:spPr>
+      </p:sp>
+      <p:sp>
+        <p:nvSpPr>
+          <p:cNvPr id="20" name="Text 18"/>
+          <p:cNvSpPr txBox="1"/>
+          <p:nvPr/>
+        </p:nvSpPr>
+        <p:spPr>
+          <a:xfrm>
+            <a:off x="640080" y="3246120"/>
+            <a:ext cx="3657600" cy="960120"/>
+          </a:xfrm>
+          <a:prstGeom prst="rect">
+            <a:avLst/>
+          </a:prstGeom>
+          <a:noFill/>
+          <a:ln/>
+        </p:spPr>
+        <p:txBody>
+          <a:bodyPr wrap="square" lIns="0" tIns="0" rIns="0" bIns="0" rtlCol="0" anchor="ctr"/>
+          <a:lstStyle/>
+          <a:p>
+            <a:pPr indent="0" marL="0">
+              <a:buNone/>
+            </a:pPr>
+            <a:r>
+              <a:rPr lang="en-US" sz="1500" b="1" dirty="0">
+                <a:solidFill>
+                  <a:schemeClr val="tx2"/>
+                </a:solidFill>
+              </a:rPr>
+              <a:t>웹훅</a:t>
+            </a:r>
+            <a:endParaRPr lang="en-US" sz="1500" dirty="0"/>
+          </a:p>
+          <a:p>
+            <a:pPr indent="0" marL="0">
+              <a:buNone/>
+            </a:pPr>
+            <a:r>
+              <a:rPr lang="en-US" sz="1200" dirty="0">
+                <a:solidFill>
+                  <a:schemeClr val="tx1"/>
+                </a:solidFill>
+              </a:rPr>
+              <a:t>출처 확인 · 같은 알림 한 번만 · 빨리 200 응답</a:t>
+            </a:r>
+            <a:endParaRPr lang="en-US" sz="1500" dirty="0"/>
+          </a:p>
+        </p:txBody>
+      </p:sp>
+      <p:sp>
+        <p:nvSpPr>
+          <p:cNvPr id="21" name="card"/>
+          <p:cNvSpPr/>
+          <p:nvPr/>
+        </p:nvSpPr>
+        <p:spPr>
+          <a:xfrm>
+            <a:off x="4663440" y="3246120"/>
+            <a:ext cx="4023360" cy="960120"/>
+          </a:xfrm>
+          <a:prstGeom prst="roundRect">
+            <a:avLst>
+              <a:gd name="adj" fmla="val 7619"/>
+            </a:avLst>
+          </a:prstGeom>
+          <a:solidFill>
+            <a:schemeClr val="bg2"/>
+          </a:solidFill>
+          <a:ln/>
+        </p:spPr>
+      </p:sp>
+      <p:sp>
+        <p:nvSpPr>
+          <p:cNvPr id="22" name="Text 20"/>
+          <p:cNvSpPr txBox="1"/>
+          <p:nvPr/>
+        </p:nvSpPr>
+        <p:spPr>
+          <a:xfrm>
+            <a:off x="4846320" y="3246120"/>
+            <a:ext cx="3657600" cy="960120"/>
+          </a:xfrm>
+          <a:prstGeom prst="rect">
+            <a:avLst/>
+          </a:prstGeom>
+          <a:noFill/>
+          <a:ln/>
+        </p:spPr>
+        <p:txBody>
+          <a:bodyPr wrap="square" lIns="0" tIns="0" rIns="0" bIns="0" rtlCol="0" anchor="ctr"/>
+          <a:lstStyle/>
+          <a:p>
+            <a:pPr indent="0" marL="0">
+              <a:buNone/>
+            </a:pPr>
+            <a:r>
+              <a:rPr lang="en-US" sz="1500" b="1" dirty="0">
+                <a:solidFill>
+                  <a:schemeClr val="tx2"/>
+                </a:solidFill>
+              </a:rPr>
+              <a:t>예외</a:t>
+            </a:r>
+            <a:endParaRPr lang="en-US" sz="1500" dirty="0"/>
+          </a:p>
+          <a:p>
+            <a:pPr indent="0" marL="0">
+              <a:buNone/>
+            </a:pPr>
+            <a:r>
+              <a:rPr lang="en-US" sz="1200" dirty="0">
+                <a:solidFill>
+                  <a:schemeClr val="tx1"/>
+                </a:solidFill>
+              </a:rPr>
+              <a:t>두 번 클릭 · DB 저장 실패 시 자동 취소 · 부분 취소</a:t>
+            </a:r>
+            <a:endParaRPr lang="en-US" sz="1500" dirty="0"/>
+          </a:p>
+        </p:txBody>
+      </p:sp>
+      <p:sp>
+        <p:nvSpPr>
+          <p:cNvPr id="23" name="Text 21"/>
+          <p:cNvSpPr txBox="1"/>
+          <p:nvPr/>
+        </p:nvSpPr>
+        <p:spPr>
+          <a:xfrm>
+            <a:off x="457200" y="4645152"/>
+            <a:ext cx="7680960" cy="274320"/>
+          </a:xfrm>
+          <a:prstGeom prst="rect">
+            <a:avLst/>
+          </a:prstGeom>
+          <a:noFill/>
+          <a:ln/>
+        </p:spPr>
+        <p:txBody>
+          <a:bodyPr wrap="square" lIns="0" tIns="0" rIns="0" bIns="0" rtlCol="0" anchor="t"/>
+          <a:lstStyle/>
+          <a:p>
+            <a:pPr indent="0" marL="0">
+              <a:buNone/>
+            </a:pPr>
+            <a:r>
+              <a:rPr lang="en-US" sz="1000" dirty="0">
+                <a:solidFill>
+                  <a:schemeClr val="accent4"/>
+                </a:solidFill>
+              </a:rPr>
+              <a:t>PG 계약은 업종 심사가 먼저 · 개발은 테스트 키로 먼저 (39장)</a:t>
+            </a:r>
+            <a:endParaRPr lang="en-US" sz="1000" dirty="0"/>
+          </a:p>
+        </p:txBody>
+      </p:sp>
+      <p:sp>
+        <p:nvSpPr>
+          <p:cNvPr id="25" name="Slide Number Placeholder 0"/>
+          <p:cNvSpPr>
+            <a:spLocks noGrp="1"/>
+          </p:cNvSpPr>
+          <p:nvPr>
+            <p:ph type="sldNum" sz="quarter" idx="4294967295"/>
+          </p:nvPr>
+        </p:nvSpPr>
+        <p:spPr>
+          <a:xfrm>
+            <a:off x="8321040" y="4754880"/>
+            <a:ext cx="457200" cy="274320"/>
+          </a:xfrm>
+          <a:prstGeom prst="rect">
+            <a:avLst/>
+          </a:prstGeom>
+          <a:extLst>
+            <a:ext uri="{C572A759-6A51-4108-AA02-DFA0A04FC94B}">
+              <ma14:wrappingTextBoxFlag xmlns:ma14="http://schemas.microsoft.com/office/mac/drawingml/2011/main" val="0"/>
+            </a:ext>
+          </a:extLst>
+        </p:spPr>
+        <p:txBody>
+          <a:bodyPr/>
+          <a:lstStyle>
+            <a:lvl1pPr>
+              <a:defRPr sz="1000">
+                <a:solidFill>
+                  <a:schemeClr val="accent4"/>
+                </a:solidFill>
+              </a:defRPr>
+            </a:lvl1pPr>
+          </a:lstStyle>
+          <a:p>
+            <a:pPr algn="r"/>
+            <a:fld id="{F7021451-1387-4CA6-816F-3879F97B5CBC}" type="slidenum">
+              <a:rPr b="0" lang="en-US"/>
+              <a:t>61</a:t>
+            </a:fld>
+            <a:endParaRPr lang="en-US"/>
+          </a:p>
+        </p:txBody>
+      </p:sp>
+    </p:spTree>
+  </p:cSld>
+  <p:clrMapOvr>
+    <a:masterClrMapping/>
+  </p:clrMapOvr>
+</p:sld>
+</file>
+
+<file path=ppt/slides/slide62.xml><?xml version="1.0" encoding="utf-8"?>
+<p:sld xmlns:a="http://schemas.openxmlformats.org/drawingml/2006/main" xmlns:r="http://schemas.openxmlformats.org/officeDocument/2006/relationships" xmlns:p="http://schemas.openxmlformats.org/presentationml/2006/main">
+  <p:cSld name="Slide 62">
+    <p:spTree>
+      <p:nvGrpSpPr>
+        <p:cNvPr id="1" name=""/>
+        <p:cNvGrpSpPr/>
+        <p:nvPr/>
+      </p:nvGrpSpPr>
+      <p:grpSpPr>
+        <a:xfrm>
+          <a:off x="0" y="0"/>
+          <a:ext cx="0" cy="0"/>
+          <a:chOff x="0" y="0"/>
+          <a:chExt cx="0" cy="0"/>
+        </a:xfrm>
+      </p:grpSpPr>
+      <p:sp>
+        <p:nvSpPr>
+          <p:cNvPr id="2" name="Text 0"/>
+          <p:cNvSpPr/>
+          <p:nvPr>
+            <p:ph idx="100" type="title" hasCustomPrompt="1"/>
+          </p:nvPr>
+        </p:nvSpPr>
+        <p:spPr>
+          <a:xfrm>
+            <a:off x="457200" y="274320"/>
+            <a:ext cx="8229600" cy="685800"/>
+          </a:xfrm>
+          <a:prstGeom prst="rect">
+            <a:avLst/>
+          </a:prstGeom>
+          <a:noFill/>
+          <a:ln/>
+        </p:spPr>
+        <p:txBody>
+          <a:bodyPr wrap="square" lIns="0" tIns="0" rIns="0" bIns="0" rtlCol="0" anchor="ctr"/>
+          <a:lstStyle/>
+          <a:p>
+            <a:pPr indent="0" marL="0">
+              <a:buNone/>
+            </a:pPr>
+            <a:r>
+              <a:rPr lang="en-US" sz="2800" b="1" dirty="0">
+                <a:solidFill>
+                  <a:schemeClr val="tx2"/>
+                </a:solidFill>
+              </a:rPr>
+              <a:t>대사와 정산: 돈을 매일 맞춰 본다</a:t>
+            </a:r>
+            <a:endParaRPr lang="en-US" sz="2800" dirty="0"/>
+          </a:p>
+        </p:txBody>
+      </p:sp>
+      <p:sp>
+        <p:nvSpPr>
+          <p:cNvPr id="3" name="card"/>
+          <p:cNvSpPr/>
+          <p:nvPr/>
+        </p:nvSpPr>
+        <p:spPr>
+          <a:xfrm>
+            <a:off x="457200" y="1188720"/>
+            <a:ext cx="4023360" cy="3200400"/>
+          </a:xfrm>
+          <a:prstGeom prst="roundRect">
+            <a:avLst>
+              <a:gd name="adj" fmla="val 2286"/>
+            </a:avLst>
+          </a:prstGeom>
+          <a:solidFill>
+            <a:schemeClr val="tx2"/>
+          </a:solidFill>
+          <a:ln/>
+        </p:spPr>
+      </p:sp>
+      <p:sp>
+        <p:nvSpPr>
+          <p:cNvPr id="4" name="Text 2"/>
+          <p:cNvSpPr txBox="1"/>
+          <p:nvPr/>
+        </p:nvSpPr>
+        <p:spPr>
+          <a:xfrm>
+            <a:off x="685800" y="1325880"/>
+            <a:ext cx="3566160" cy="365760"/>
+          </a:xfrm>
+          <a:prstGeom prst="rect">
+            <a:avLst/>
+          </a:prstGeom>
+          <a:noFill/>
+          <a:ln/>
+        </p:spPr>
+        <p:txBody>
+          <a:bodyPr wrap="square" lIns="0" tIns="0" rIns="0" bIns="0" rtlCol="0" anchor="t"/>
+          <a:lstStyle/>
+          <a:p>
+            <a:pPr indent="0" marL="0">
+              <a:buNone/>
+            </a:pPr>
+            <a:r>
+              <a:rPr lang="en-US" sz="1600" b="1" dirty="0">
+                <a:solidFill>
+                  <a:schemeClr val="accent6"/>
+                </a:solidFill>
+              </a:rPr>
+              <a:t>매일 대사</a:t>
+            </a:r>
+            <a:endParaRPr lang="en-US" sz="1600" dirty="0"/>
+          </a:p>
+        </p:txBody>
+      </p:sp>
+      <p:sp>
+        <p:nvSpPr>
+          <p:cNvPr id="5" name="Text 3"/>
+          <p:cNvSpPr txBox="1"/>
+          <p:nvPr/>
+        </p:nvSpPr>
+        <p:spPr>
+          <a:xfrm>
+            <a:off x="685800" y="1783080"/>
+            <a:ext cx="3657600" cy="2468880"/>
+          </a:xfrm>
+          <a:prstGeom prst="rect">
+            <a:avLst/>
+          </a:prstGeom>
+          <a:noFill/>
+          <a:ln/>
+        </p:spPr>
+        <p:txBody>
+          <a:bodyPr wrap="square" lIns="0" tIns="0" rIns="0" bIns="0" rtlCol="0" anchor="t"/>
+          <a:lstStyle/>
+          <a:p>
+            <a:pPr marL="342900" indent="-342900">
+              <a:spcAft>
+                <a:spcPts val="800"/>
+              </a:spcAft>
+              <a:buSzPct val="100000"/>
+              <a:buChar char="•"/>
+            </a:pPr>
+            <a:r>
+              <a:rPr lang="en-US" sz="1300" dirty="0">
+                <a:solidFill>
+                  <a:schemeClr val="bg1"/>
+                </a:solidFill>
+              </a:rPr>
+              <a:t>PG 거래 내역 vs 우리 DB를 주문번호로 짝 맞추기</a:t>
+            </a:r>
+            <a:endParaRPr lang="en-US" sz="1300" dirty="0"/>
+          </a:p>
+          <a:p>
+            <a:pPr marL="342900" indent="-342900">
+              <a:spcAft>
+                <a:spcPts val="800"/>
+              </a:spcAft>
+              <a:buSzPct val="100000"/>
+              <a:buChar char="•"/>
+            </a:pPr>
+            <a:r>
+              <a:rPr lang="en-US" sz="1300" dirty="0">
+                <a:solidFill>
+                  <a:schemeClr val="bg1"/>
+                </a:solidFill>
+              </a:rPr>
+              <a:t>PG엔 있고 DB엔 없음 = 돈 받고 주문 누락 (가장 위험)</a:t>
+            </a:r>
+            <a:endParaRPr lang="en-US" sz="1300" dirty="0"/>
+          </a:p>
+          <a:p>
+            <a:pPr marL="342900" indent="-342900">
+              <a:spcAft>
+                <a:spcPts val="800"/>
+              </a:spcAft>
+              <a:buSzPct val="100000"/>
+              <a:buChar char="•"/>
+            </a:pPr>
+            <a:r>
+              <a:rPr lang="en-US" sz="1300" dirty="0">
+                <a:solidFill>
+                  <a:schemeClr val="bg1"/>
+                </a:solidFill>
+              </a:rPr>
+              <a:t>DB엔 있고 PG엔 없음 = 돈 안 들어온 주문</a:t>
+            </a:r>
+            <a:endParaRPr lang="en-US" sz="1300" dirty="0"/>
+          </a:p>
+          <a:p>
+            <a:pPr marL="342900" indent="-342900">
+              <a:spcAft>
+                <a:spcPts val="800"/>
+              </a:spcAft>
+              <a:buSzPct val="100000"/>
+              <a:buChar char="•"/>
+            </a:pPr>
+            <a:r>
+              <a:rPr lang="en-US" sz="1300" dirty="0">
+                <a:solidFill>
+                  <a:schemeClr val="bg1"/>
+                </a:solidFill>
+              </a:rPr>
+              <a:t>정산일엔 매출 − 취소 − 수수료 확인</a:t>
+            </a:r>
+            <a:endParaRPr lang="en-US" sz="1300" dirty="0"/>
+          </a:p>
+        </p:txBody>
+      </p:sp>
+      <p:sp>
+        <p:nvSpPr>
+          <p:cNvPr id="6" name="Text 4"/>
+          <p:cNvSpPr txBox="1"/>
+          <p:nvPr/>
+        </p:nvSpPr>
+        <p:spPr>
+          <a:xfrm>
+            <a:off x="4754880" y="1188720"/>
+            <a:ext cx="3931920" cy="365760"/>
+          </a:xfrm>
+          <a:prstGeom prst="rect">
+            <a:avLst/>
+          </a:prstGeom>
+          <a:noFill/>
+          <a:ln/>
+        </p:spPr>
+        <p:txBody>
+          <a:bodyPr wrap="square" lIns="0" tIns="0" rIns="0" bIns="0" rtlCol="0" anchor="t"/>
+          <a:lstStyle/>
+          <a:p>
+            <a:pPr indent="0" marL="0">
+              <a:buNone/>
+            </a:pPr>
+            <a:r>
+              <a:rPr lang="en-US" sz="1600" b="1" dirty="0">
+                <a:solidFill>
+                  <a:schemeClr val="accent2"/>
+                </a:solidFill>
+              </a:rPr>
+              <a:t>플랫폼이라면</a:t>
+            </a:r>
+            <a:endParaRPr lang="en-US" sz="1600" dirty="0"/>
+          </a:p>
+        </p:txBody>
+      </p:sp>
+      <p:sp>
+        <p:nvSpPr>
+          <p:cNvPr id="7" name="Text 5"/>
+          <p:cNvSpPr txBox="1"/>
+          <p:nvPr/>
+        </p:nvSpPr>
+        <p:spPr>
+          <a:xfrm>
+            <a:off x="4754880" y="1600200"/>
+            <a:ext cx="3931920" cy="1371600"/>
+          </a:xfrm>
+          <a:prstGeom prst="rect">
+            <a:avLst/>
+          </a:prstGeom>
+          <a:noFill/>
+          <a:ln/>
+        </p:spPr>
+        <p:txBody>
+          <a:bodyPr wrap="square" lIns="0" tIns="0" rIns="0" bIns="0" rtlCol="0" anchor="t"/>
+          <a:lstStyle/>
+          <a:p>
+            <a:pPr marL="342900" indent="-342900">
+              <a:spcAft>
+                <a:spcPts val="600"/>
+              </a:spcAft>
+              <a:buSzPct val="100000"/>
+              <a:buChar char="•"/>
+            </a:pPr>
+            <a:r>
+              <a:rPr lang="en-US" sz="1300" dirty="0">
+                <a:solidFill>
+                  <a:schemeClr val="tx1"/>
+                </a:solidFill>
+              </a:rPr>
+              <a:t>판매자별 정산 원장 (덮어쓰지 않고 추가만)</a:t>
+            </a:r>
+            <a:endParaRPr lang="en-US" sz="1300" dirty="0"/>
+          </a:p>
+          <a:p>
+            <a:pPr marL="342900" indent="-342900">
+              <a:spcAft>
+                <a:spcPts val="600"/>
+              </a:spcAft>
+              <a:buSzPct val="100000"/>
+              <a:buChar char="•"/>
+            </a:pPr>
+            <a:r>
+              <a:rPr lang="en-US" sz="1300" dirty="0">
+                <a:solidFill>
+                  <a:schemeClr val="tx1"/>
+                </a:solidFill>
+              </a:rPr>
+              <a:t>PG 지급대행으로 판매자에게 지급</a:t>
+            </a:r>
+            <a:endParaRPr lang="en-US" sz="1300" dirty="0"/>
+          </a:p>
+          <a:p>
+            <a:pPr marL="342900" indent="-342900">
+              <a:spcAft>
+                <a:spcPts val="600"/>
+              </a:spcAft>
+              <a:buSzPct val="100000"/>
+              <a:buChar char="•"/>
+            </a:pPr>
+            <a:r>
+              <a:rPr lang="en-US" sz="1300" dirty="0">
+                <a:solidFill>
+                  <a:schemeClr val="tx1"/>
+                </a:solidFill>
+              </a:rPr>
+              <a:t>약속한 정산일은 반드시</a:t>
+            </a:r>
+            <a:endParaRPr lang="en-US" sz="1300" dirty="0"/>
+          </a:p>
+        </p:txBody>
+      </p:sp>
+      <p:sp>
+        <p:nvSpPr>
+          <p:cNvPr id="8" name="card"/>
+          <p:cNvSpPr/>
+          <p:nvPr/>
+        </p:nvSpPr>
+        <p:spPr>
+          <a:xfrm>
+            <a:off x="4754880" y="3063240"/>
+            <a:ext cx="3931920" cy="1325880"/>
+          </a:xfrm>
+          <a:prstGeom prst="roundRect">
+            <a:avLst>
+              <a:gd name="adj" fmla="val 5517"/>
+            </a:avLst>
+          </a:prstGeom>
+          <a:solidFill>
+            <a:schemeClr val="bg2"/>
+          </a:solidFill>
+          <a:ln/>
+        </p:spPr>
+      </p:sp>
+      <p:sp>
+        <p:nvSpPr>
+          <p:cNvPr id="9" name="Text 7"/>
+          <p:cNvSpPr txBox="1"/>
+          <p:nvPr/>
+        </p:nvSpPr>
+        <p:spPr>
+          <a:xfrm>
+            <a:off x="4937760" y="3108960"/>
+            <a:ext cx="3611880" cy="1234440"/>
+          </a:xfrm>
+          <a:prstGeom prst="rect">
+            <a:avLst/>
+          </a:prstGeom>
+          <a:noFill/>
+          <a:ln/>
+        </p:spPr>
+        <p:txBody>
+          <a:bodyPr wrap="square" lIns="0" tIns="0" rIns="0" bIns="0" rtlCol="0" anchor="ctr"/>
+          <a:lstStyle/>
+          <a:p>
+            <a:pPr indent="0" marL="0">
+              <a:buNone/>
+            </a:pPr>
+            <a:r>
+              <a:rPr lang="en-US" sz="1300" b="1" dirty="0">
+                <a:solidFill>
+                  <a:schemeClr val="tx2"/>
+                </a:solidFill>
+              </a:rPr>
+              <a:t>티메프 사태 이후 정부 확정안 (2024.10)</a:t>
+            </a:r>
+            <a:endParaRPr lang="en-US" sz="1300" dirty="0"/>
+          </a:p>
+          <a:p>
+            <a:pPr indent="0" marL="0">
+              <a:buNone/>
+            </a:pPr>
+            <a:r>
+              <a:rPr lang="en-US" sz="1100" dirty="0">
+                <a:solidFill>
+                  <a:schemeClr val="tx1"/>
+                </a:solidFill>
+              </a:rPr>
+              <a:t>대형 중개 플랫폼: 구매 확정 후 20일 내 정산, 판매대금 50% 이상 별도 관리 (시행일은 확인 필요)</a:t>
+            </a:r>
+            <a:endParaRPr lang="en-US" sz="1300" dirty="0"/>
+          </a:p>
+        </p:txBody>
+      </p:sp>
+      <p:sp>
+        <p:nvSpPr>
+          <p:cNvPr id="25" name="Slide Number Placeholder 0"/>
+          <p:cNvSpPr>
+            <a:spLocks noGrp="1"/>
+          </p:cNvSpPr>
+          <p:nvPr>
+            <p:ph type="sldNum" sz="quarter" idx="4294967295"/>
+          </p:nvPr>
+        </p:nvSpPr>
+        <p:spPr>
+          <a:xfrm>
+            <a:off x="8321040" y="4754880"/>
+            <a:ext cx="457200" cy="274320"/>
+          </a:xfrm>
+          <a:prstGeom prst="rect">
+            <a:avLst/>
+          </a:prstGeom>
+          <a:extLst>
+            <a:ext uri="{C572A759-6A51-4108-AA02-DFA0A04FC94B}">
+              <ma14:wrappingTextBoxFlag xmlns:ma14="http://schemas.microsoft.com/office/mac/drawingml/2011/main" val="0"/>
+            </a:ext>
+          </a:extLst>
+        </p:spPr>
+        <p:txBody>
+          <a:bodyPr/>
+          <a:lstStyle>
+            <a:lvl1pPr>
+              <a:defRPr sz="1000">
+                <a:solidFill>
+                  <a:schemeClr val="accent4"/>
+                </a:solidFill>
+              </a:defRPr>
+            </a:lvl1pPr>
+          </a:lstStyle>
+          <a:p>
+            <a:pPr algn="r"/>
+            <a:fld id="{F7021451-1387-4CA6-816F-3879F97B5CBC}" type="slidenum">
+              <a:rPr b="0" lang="en-US"/>
+              <a:t>62</a:t>
+            </a:fld>
+            <a:endParaRPr lang="en-US"/>
+          </a:p>
+        </p:txBody>
+      </p:sp>
+    </p:spTree>
+  </p:cSld>
+  <p:clrMapOvr>
+    <a:masterClrMapping/>
+  </p:clrMapOvr>
+</p:sld>
+</file>
+
+<file path=ppt/slides/slide63.xml><?xml version="1.0" encoding="utf-8"?>
+<p:sld xmlns:a="http://schemas.openxmlformats.org/drawingml/2006/main" xmlns:r="http://schemas.openxmlformats.org/officeDocument/2006/relationships" xmlns:p="http://schemas.openxmlformats.org/presentationml/2006/main">
+  <p:cSld name="Slide 63">
+    <p:spTree>
+      <p:nvGrpSpPr>
+        <p:cNvPr id="1" name=""/>
+        <p:cNvGrpSpPr/>
+        <p:nvPr/>
+      </p:nvGrpSpPr>
+      <p:grpSpPr>
+        <a:xfrm>
+          <a:off x="0" y="0"/>
+          <a:ext cx="0" cy="0"/>
+          <a:chOff x="0" y="0"/>
+          <a:chExt cx="0" cy="0"/>
+        </a:xfrm>
+      </p:grpSpPr>
+      <p:sp>
+        <p:nvSpPr>
+          <p:cNvPr id="2" name="Text 0"/>
+          <p:cNvSpPr/>
+          <p:nvPr>
+            <p:ph idx="100" type="title" hasCustomPrompt="1"/>
+          </p:nvPr>
+        </p:nvSpPr>
+        <p:spPr>
+          <a:xfrm>
+            <a:off x="457200" y="274320"/>
+            <a:ext cx="8229600" cy="685800"/>
+          </a:xfrm>
+          <a:prstGeom prst="rect">
+            <a:avLst/>
+          </a:prstGeom>
+          <a:noFill/>
+          <a:ln/>
+        </p:spPr>
+        <p:txBody>
+          <a:bodyPr wrap="square" lIns="0" tIns="0" rIns="0" bIns="0" rtlCol="0" anchor="ctr"/>
+          <a:lstStyle/>
+          <a:p>
+            <a:pPr indent="0" marL="0">
+              <a:buNone/>
+            </a:pPr>
+            <a:r>
+              <a:rPr lang="en-US" sz="2800" b="1" dirty="0">
+                <a:solidFill>
+                  <a:schemeClr val="tx2"/>
+                </a:solidFill>
+              </a:rPr>
+              <a:t>멀티플레이 게임 뒤의 서버들</a:t>
+            </a:r>
+            <a:endParaRPr lang="en-US" sz="2800" dirty="0"/>
+          </a:p>
+        </p:txBody>
+      </p:sp>
+      <p:sp>
+        <p:nvSpPr>
+          <p:cNvPr id="3" name="gs0"/>
+          <p:cNvSpPr/>
+          <p:nvPr/>
+        </p:nvSpPr>
+        <p:spPr>
+          <a:xfrm>
+            <a:off x="457200" y="1188720"/>
+            <a:ext cx="2606040" cy="640080"/>
+          </a:xfrm>
+          <a:prstGeom prst="roundRect">
+            <a:avLst>
+              <a:gd name="adj" fmla="val 11429"/>
+            </a:avLst>
+          </a:prstGeom>
+          <a:solidFill>
+            <a:srgbClr val="1F4E4A"/>
+          </a:solidFill>
+          <a:ln/>
+        </p:spPr>
+      </p:sp>
+      <p:sp>
+        <p:nvSpPr>
+          <p:cNvPr id="4" name="Text 2"/>
+          <p:cNvSpPr txBox="1"/>
+          <p:nvPr/>
+        </p:nvSpPr>
+        <p:spPr>
+          <a:xfrm>
+            <a:off x="640080" y="1188720"/>
+            <a:ext cx="2240280" cy="640080"/>
+          </a:xfrm>
+          <a:prstGeom prst="rect">
+            <a:avLst/>
+          </a:prstGeom>
+          <a:noFill/>
+          <a:ln/>
+        </p:spPr>
+        <p:txBody>
+          <a:bodyPr wrap="square" lIns="0" tIns="0" rIns="0" bIns="0" rtlCol="0" anchor="ctr"/>
+          <a:lstStyle/>
+          <a:p>
+            <a:pPr indent="0" marL="0">
+              <a:buNone/>
+            </a:pPr>
+            <a:r>
+              <a:rPr lang="en-US" sz="1700" b="1" dirty="0">
+                <a:solidFill>
+                  <a:schemeClr val="bg1"/>
+                </a:solidFill>
+              </a:rPr>
+              <a:t>백엔드 서비스</a:t>
+            </a:r>
+            <a:endParaRPr lang="en-US" sz="1700" dirty="0"/>
+          </a:p>
+        </p:txBody>
+      </p:sp>
+      <p:sp>
+        <p:nvSpPr>
+          <p:cNvPr id="5" name="card"/>
+          <p:cNvSpPr/>
+          <p:nvPr/>
+        </p:nvSpPr>
+        <p:spPr>
+          <a:xfrm>
+            <a:off x="457200" y="1920240"/>
+            <a:ext cx="2606040" cy="1463040"/>
+          </a:xfrm>
+          <a:prstGeom prst="roundRect">
+            <a:avLst>
+              <a:gd name="adj" fmla="val 5000"/>
+            </a:avLst>
+          </a:prstGeom>
+          <a:solidFill>
+            <a:schemeClr val="bg2"/>
+          </a:solidFill>
+          <a:ln/>
+        </p:spPr>
+      </p:sp>
+      <p:sp>
+        <p:nvSpPr>
+          <p:cNvPr id="6" name="Text 4"/>
+          <p:cNvSpPr txBox="1"/>
+          <p:nvPr/>
+        </p:nvSpPr>
+        <p:spPr>
+          <a:xfrm>
+            <a:off x="640080" y="2011680"/>
+            <a:ext cx="2240280" cy="1280160"/>
+          </a:xfrm>
+          <a:prstGeom prst="rect">
+            <a:avLst/>
+          </a:prstGeom>
+          <a:noFill/>
+          <a:ln/>
+        </p:spPr>
+        <p:txBody>
+          <a:bodyPr wrap="square" lIns="0" tIns="0" rIns="0" bIns="0" rtlCol="0" anchor="t"/>
+          <a:lstStyle/>
+          <a:p>
+            <a:pPr indent="0" marL="0">
+              <a:buNone/>
+            </a:pPr>
+            <a:r>
+              <a:rPr lang="en-US" sz="1300" dirty="0">
+                <a:solidFill>
+                  <a:schemeClr val="tx1"/>
+                </a:solidFill>
+              </a:rPr>
+              <a:t>로그인 · 친구 · 채팅 · 상점 · 전적 · 매치메이킹</a:t>
+            </a:r>
+            <a:endParaRPr lang="en-US" sz="1300" dirty="0"/>
+          </a:p>
+          <a:p>
+            <a:pPr indent="0" marL="0">
+              <a:buNone/>
+            </a:pPr>
+            <a:r>
+              <a:rPr lang="en-US" sz="1100" dirty="0">
+                <a:solidFill>
+                  <a:schemeClr val="accent4"/>
+                </a:solidFill>
+              </a:rPr>
+              <a:t>일반 웹처럼, 조금 늦어도 OK</a:t>
+            </a:r>
+            <a:endParaRPr lang="en-US" sz="1300" dirty="0"/>
+          </a:p>
+        </p:txBody>
+      </p:sp>
+      <p:sp>
+        <p:nvSpPr>
+          <p:cNvPr id="7" name="gs1"/>
+          <p:cNvSpPr/>
+          <p:nvPr/>
+        </p:nvSpPr>
+        <p:spPr>
+          <a:xfrm>
+            <a:off x="3246120" y="1188720"/>
+            <a:ext cx="2606040" cy="640080"/>
+          </a:xfrm>
+          <a:prstGeom prst="roundRect">
+            <a:avLst>
+              <a:gd name="adj" fmla="val 11429"/>
+            </a:avLst>
+          </a:prstGeom>
+          <a:solidFill>
+            <a:srgbClr val="F08A3E"/>
+          </a:solidFill>
+          <a:ln/>
+        </p:spPr>
+      </p:sp>
+      <p:sp>
+        <p:nvSpPr>
+          <p:cNvPr id="8" name="Text 6"/>
+          <p:cNvSpPr txBox="1"/>
+          <p:nvPr/>
+        </p:nvSpPr>
+        <p:spPr>
+          <a:xfrm>
+            <a:off x="3429000" y="1188720"/>
+            <a:ext cx="2240280" cy="640080"/>
+          </a:xfrm>
+          <a:prstGeom prst="rect">
+            <a:avLst/>
+          </a:prstGeom>
+          <a:noFill/>
+          <a:ln/>
+        </p:spPr>
+        <p:txBody>
+          <a:bodyPr wrap="square" lIns="0" tIns="0" rIns="0" bIns="0" rtlCol="0" anchor="ctr"/>
+          <a:lstStyle/>
+          <a:p>
+            <a:pPr indent="0" marL="0">
+              <a:buNone/>
+            </a:pPr>
+            <a:r>
+              <a:rPr lang="en-US" sz="1700" b="1" dirty="0">
+                <a:solidFill>
+                  <a:schemeClr val="bg1"/>
+                </a:solidFill>
+              </a:rPr>
+              <a:t>전용 게임 서버</a:t>
+            </a:r>
+            <a:endParaRPr lang="en-US" sz="1700" dirty="0"/>
+          </a:p>
+        </p:txBody>
+      </p:sp>
+      <p:sp>
+        <p:nvSpPr>
+          <p:cNvPr id="9" name="card"/>
+          <p:cNvSpPr/>
+          <p:nvPr/>
+        </p:nvSpPr>
+        <p:spPr>
+          <a:xfrm>
+            <a:off x="3246120" y="1920240"/>
+            <a:ext cx="2606040" cy="1463040"/>
+          </a:xfrm>
+          <a:prstGeom prst="roundRect">
+            <a:avLst>
+              <a:gd name="adj" fmla="val 5000"/>
+            </a:avLst>
+          </a:prstGeom>
+          <a:solidFill>
+            <a:schemeClr val="bg2"/>
+          </a:solidFill>
+          <a:ln/>
+        </p:spPr>
+      </p:sp>
+      <p:sp>
+        <p:nvSpPr>
+          <p:cNvPr id="10" name="Text 8"/>
+          <p:cNvSpPr txBox="1"/>
+          <p:nvPr/>
+        </p:nvSpPr>
+        <p:spPr>
+          <a:xfrm>
+            <a:off x="3429000" y="2011680"/>
+            <a:ext cx="2240280" cy="1280160"/>
+          </a:xfrm>
+          <a:prstGeom prst="rect">
+            <a:avLst/>
+          </a:prstGeom>
+          <a:noFill/>
+          <a:ln/>
+        </p:spPr>
+        <p:txBody>
+          <a:bodyPr wrap="square" lIns="0" tIns="0" rIns="0" bIns="0" rtlCol="0" anchor="t"/>
+          <a:lstStyle/>
+          <a:p>
+            <a:pPr indent="0" marL="0">
+              <a:buNone/>
+            </a:pPr>
+            <a:r>
+              <a:rPr lang="en-US" sz="1300" dirty="0">
+                <a:solidFill>
+                  <a:schemeClr val="tx1"/>
+                </a:solidFill>
+              </a:rPr>
+              <a:t>한 판의 실제 게임 진행 · 서버가 모든 판정</a:t>
+            </a:r>
+            <a:endParaRPr lang="en-US" sz="1300" dirty="0"/>
+          </a:p>
+          <a:p>
+            <a:pPr indent="0" marL="0">
+              <a:buNone/>
+            </a:pPr>
+            <a:r>
+              <a:rPr lang="en-US" sz="1100" dirty="0">
+                <a:solidFill>
+                  <a:schemeClr val="accent4"/>
+                </a:solidFill>
+              </a:rPr>
+              <a:t>초당 수십~128번 계산 · UDP</a:t>
+            </a:r>
+            <a:endParaRPr lang="en-US" sz="1300" dirty="0"/>
+          </a:p>
+        </p:txBody>
+      </p:sp>
+      <p:sp>
+        <p:nvSpPr>
+          <p:cNvPr id="11" name="gs2"/>
+          <p:cNvSpPr/>
+          <p:nvPr/>
+        </p:nvSpPr>
+        <p:spPr>
+          <a:xfrm>
+            <a:off x="6035040" y="1188720"/>
+            <a:ext cx="2606040" cy="640080"/>
+          </a:xfrm>
+          <a:prstGeom prst="roundRect">
+            <a:avLst>
+              <a:gd name="adj" fmla="val 11429"/>
+            </a:avLst>
+          </a:prstGeom>
+          <a:solidFill>
+            <a:srgbClr val="2E9C8F"/>
+          </a:solidFill>
+          <a:ln/>
+        </p:spPr>
+      </p:sp>
+      <p:sp>
+        <p:nvSpPr>
+          <p:cNvPr id="12" name="Text 10"/>
+          <p:cNvSpPr txBox="1"/>
+          <p:nvPr/>
+        </p:nvSpPr>
+        <p:spPr>
+          <a:xfrm>
+            <a:off x="6217920" y="1188720"/>
+            <a:ext cx="2240280" cy="640080"/>
+          </a:xfrm>
+          <a:prstGeom prst="rect">
+            <a:avLst/>
+          </a:prstGeom>
+          <a:noFill/>
+          <a:ln/>
+        </p:spPr>
+        <p:txBody>
+          <a:bodyPr wrap="square" lIns="0" tIns="0" rIns="0" bIns="0" rtlCol="0" anchor="ctr"/>
+          <a:lstStyle/>
+          <a:p>
+            <a:pPr indent="0" marL="0">
+              <a:buNone/>
+            </a:pPr>
+            <a:r>
+              <a:rPr lang="en-US" sz="1700" b="1" dirty="0">
+                <a:solidFill>
+                  <a:schemeClr val="bg1"/>
+                </a:solidFill>
+              </a:rPr>
+              <a:t>오케스트레이션</a:t>
+            </a:r>
+            <a:endParaRPr lang="en-US" sz="1700" dirty="0"/>
+          </a:p>
+        </p:txBody>
+      </p:sp>
+      <p:sp>
+        <p:nvSpPr>
+          <p:cNvPr id="13" name="card"/>
+          <p:cNvSpPr/>
+          <p:nvPr/>
+        </p:nvSpPr>
+        <p:spPr>
+          <a:xfrm>
+            <a:off x="6035040" y="1920240"/>
+            <a:ext cx="2606040" cy="1463040"/>
+          </a:xfrm>
+          <a:prstGeom prst="roundRect">
+            <a:avLst>
+              <a:gd name="adj" fmla="val 5000"/>
+            </a:avLst>
+          </a:prstGeom>
+          <a:solidFill>
+            <a:schemeClr val="bg2"/>
+          </a:solidFill>
+          <a:ln/>
+        </p:spPr>
+      </p:sp>
+      <p:sp>
+        <p:nvSpPr>
+          <p:cNvPr id="14" name="Text 12"/>
+          <p:cNvSpPr txBox="1"/>
+          <p:nvPr/>
+        </p:nvSpPr>
+        <p:spPr>
+          <a:xfrm>
+            <a:off x="6217920" y="2011680"/>
+            <a:ext cx="2240280" cy="1280160"/>
+          </a:xfrm>
+          <a:prstGeom prst="rect">
+            <a:avLst/>
+          </a:prstGeom>
+          <a:noFill/>
+          <a:ln/>
+        </p:spPr>
+        <p:txBody>
+          <a:bodyPr wrap="square" lIns="0" tIns="0" rIns="0" bIns="0" rtlCol="0" anchor="t"/>
+          <a:lstStyle/>
+          <a:p>
+            <a:pPr indent="0" marL="0">
+              <a:buNone/>
+            </a:pPr>
+            <a:r>
+              <a:rPr lang="en-US" sz="1300" dirty="0">
+                <a:solidFill>
+                  <a:schemeClr val="tx1"/>
+                </a:solidFill>
+              </a:rPr>
+              <a:t>필요한 만큼 게임 서버 켜고 끄고 배정</a:t>
+            </a:r>
+            <a:endParaRPr lang="en-US" sz="1300" dirty="0"/>
+          </a:p>
+          <a:p>
+            <a:pPr indent="0" marL="0">
+              <a:buNone/>
+            </a:pPr>
+            <a:r>
+              <a:rPr lang="en-US" sz="1100" dirty="0">
+                <a:solidFill>
+                  <a:schemeClr val="accent4"/>
+                </a:solidFill>
+              </a:rPr>
+              <a:t>Agones · GameLift 등</a:t>
+            </a:r>
+            <a:endParaRPr lang="en-US" sz="1300" dirty="0"/>
+          </a:p>
+        </p:txBody>
+      </p:sp>
+      <p:sp>
+        <p:nvSpPr>
+          <p:cNvPr id="15" name="Text 13"/>
+          <p:cNvSpPr txBox="1"/>
+          <p:nvPr/>
+        </p:nvSpPr>
+        <p:spPr>
+          <a:xfrm>
+            <a:off x="457200" y="3611880"/>
+            <a:ext cx="8229600" cy="731520"/>
+          </a:xfrm>
+          <a:prstGeom prst="rect">
+            <a:avLst/>
+          </a:prstGeom>
+          <a:noFill/>
+          <a:ln/>
+        </p:spPr>
+        <p:txBody>
+          <a:bodyPr wrap="square" lIns="0" tIns="0" rIns="0" bIns="0" rtlCol="0" anchor="t"/>
+          <a:lstStyle/>
+          <a:p>
+            <a:pPr indent="0" marL="0">
+              <a:buNone/>
+            </a:pPr>
+            <a:r>
+              <a:rPr lang="en-US" sz="1300" b="1" dirty="0">
+                <a:solidFill>
+                  <a:schemeClr val="accent2"/>
+                </a:solidFill>
+              </a:rPr>
+              <a:t>틱 레이트는 비용  </a:t>
+            </a:r>
+            <a:pPr indent="0" marL="0">
+              <a:buNone/>
+            </a:pPr>
+            <a:r>
+              <a:rPr lang="en-US" sz="1300" dirty="0">
+                <a:solidFill>
+                  <a:schemeClr val="tx1"/>
+                </a:solidFill>
+              </a:rPr>
+              <a:t>발로란트 128틱 = 7.8ms마다 계산 · 틱을 2배로 = 서버 비용도 약 2배</a:t>
+            </a:r>
+            <a:endParaRPr lang="en-US" sz="1300" dirty="0"/>
+          </a:p>
+        </p:txBody>
+      </p:sp>
+      <p:sp>
+        <p:nvSpPr>
+          <p:cNvPr id="25" name="Slide Number Placeholder 0"/>
+          <p:cNvSpPr>
+            <a:spLocks noGrp="1"/>
+          </p:cNvSpPr>
+          <p:nvPr>
+            <p:ph type="sldNum" sz="quarter" idx="4294967295"/>
+          </p:nvPr>
+        </p:nvSpPr>
+        <p:spPr>
+          <a:xfrm>
+            <a:off x="8321040" y="4754880"/>
+            <a:ext cx="457200" cy="274320"/>
+          </a:xfrm>
+          <a:prstGeom prst="rect">
+            <a:avLst/>
+          </a:prstGeom>
+          <a:extLst>
+            <a:ext uri="{C572A759-6A51-4108-AA02-DFA0A04FC94B}">
+              <ma14:wrappingTextBoxFlag xmlns:ma14="http://schemas.microsoft.com/office/mac/drawingml/2011/main" val="0"/>
+            </a:ext>
+          </a:extLst>
+        </p:spPr>
+        <p:txBody>
+          <a:bodyPr/>
+          <a:lstStyle>
+            <a:lvl1pPr>
+              <a:defRPr sz="1000">
+                <a:solidFill>
+                  <a:schemeClr val="accent4"/>
+                </a:solidFill>
+              </a:defRPr>
+            </a:lvl1pPr>
+          </a:lstStyle>
+          <a:p>
+            <a:pPr algn="r"/>
+            <a:fld id="{F7021451-1387-4CA6-816F-3879F97B5CBC}" type="slidenum">
+              <a:rPr b="0" lang="en-US"/>
+              <a:t>63</a:t>
+            </a:fld>
+            <a:endParaRPr lang="en-US"/>
+          </a:p>
+        </p:txBody>
+      </p:sp>
+    </p:spTree>
+  </p:cSld>
+  <p:clrMapOvr>
+    <a:masterClrMapping/>
+  </p:clrMapOvr>
+</p:sld>
+</file>
+
+<file path=ppt/slides/slide64.xml><?xml version="1.0" encoding="utf-8"?>
+<p:sld xmlns:a="http://schemas.openxmlformats.org/drawingml/2006/main" xmlns:r="http://schemas.openxmlformats.org/officeDocument/2006/relationships" xmlns:p="http://schemas.openxmlformats.org/presentationml/2006/main">
+  <p:cSld name="Slide 64">
+    <p:spTree>
+      <p:nvGrpSpPr>
+        <p:cNvPr id="1" name=""/>
+        <p:cNvGrpSpPr/>
+        <p:nvPr/>
+      </p:nvGrpSpPr>
+      <p:grpSpPr>
+        <a:xfrm>
+          <a:off x="0" y="0"/>
+          <a:ext cx="0" cy="0"/>
+          <a:chOff x="0" y="0"/>
+          <a:chExt cx="0" cy="0"/>
+        </a:xfrm>
+      </p:grpSpPr>
+      <p:sp>
+        <p:nvSpPr>
+          <p:cNvPr id="2" name="Text 0"/>
+          <p:cNvSpPr/>
+          <p:nvPr>
+            <p:ph idx="100" type="title" hasCustomPrompt="1"/>
+          </p:nvPr>
+        </p:nvSpPr>
+        <p:spPr>
+          <a:xfrm>
+            <a:off x="457200" y="274320"/>
+            <a:ext cx="8229600" cy="685800"/>
+          </a:xfrm>
+          <a:prstGeom prst="rect">
+            <a:avLst/>
+          </a:prstGeom>
+          <a:noFill/>
+          <a:ln/>
+        </p:spPr>
+        <p:txBody>
+          <a:bodyPr wrap="square" lIns="0" tIns="0" rIns="0" bIns="0" rtlCol="0" anchor="ctr"/>
+          <a:lstStyle/>
+          <a:p>
+            <a:pPr indent="0" marL="0">
+              <a:buNone/>
+            </a:pPr>
+            <a:r>
+              <a:rPr lang="en-US" sz="2800" b="1" dirty="0">
+                <a:solidFill>
+                  <a:schemeClr val="tx2"/>
+                </a:solidFill>
+              </a:rPr>
+              <a:t>지연을 숨기는 4가지 기술</a:t>
+            </a:r>
+            <a:endParaRPr lang="en-US" sz="2800" dirty="0"/>
+          </a:p>
+        </p:txBody>
+      </p:sp>
+      <p:sp>
+        <p:nvSpPr>
+          <p:cNvPr id="3" name="card"/>
+          <p:cNvSpPr/>
+          <p:nvPr/>
+        </p:nvSpPr>
+        <p:spPr>
+          <a:xfrm>
+            <a:off x="457200" y="1188720"/>
+            <a:ext cx="4023360" cy="1005840"/>
+          </a:xfrm>
+          <a:prstGeom prst="roundRect">
+            <a:avLst>
+              <a:gd name="adj" fmla="val 7273"/>
+            </a:avLst>
+          </a:prstGeom>
+          <a:solidFill>
+            <a:schemeClr val="bg2"/>
+          </a:solidFill>
+          <a:ln/>
+        </p:spPr>
+      </p:sp>
+      <p:sp>
+        <p:nvSpPr>
+          <p:cNvPr id="4" name="badge1"/>
+          <p:cNvSpPr/>
+          <p:nvPr/>
+        </p:nvSpPr>
+        <p:spPr>
+          <a:xfrm>
+            <a:off x="640080" y="1490472"/>
+            <a:ext cx="384048" cy="384048"/>
+          </a:xfrm>
+          <a:prstGeom prst="ellipse">
+            <a:avLst/>
+          </a:prstGeom>
+          <a:solidFill>
+            <a:schemeClr val="accent2"/>
+          </a:solidFill>
+          <a:ln/>
+        </p:spPr>
+      </p:sp>
+      <p:sp>
+        <p:nvSpPr>
+          <p:cNvPr id="5" name="Text 3"/>
+          <p:cNvSpPr txBox="1"/>
+          <p:nvPr/>
+        </p:nvSpPr>
+        <p:spPr>
+          <a:xfrm>
+            <a:off x="640080" y="1490472"/>
+            <a:ext cx="384048" cy="384048"/>
+          </a:xfrm>
+          <a:prstGeom prst="rect">
+            <a:avLst/>
+          </a:prstGeom>
+          <a:noFill/>
+          <a:ln/>
+        </p:spPr>
+        <p:txBody>
+          <a:bodyPr wrap="square" lIns="0" tIns="0" rIns="0" bIns="0" rtlCol="0" anchor="ctr"/>
+          <a:lstStyle/>
+          <a:p>
+            <a:pPr algn="ctr" indent="0" marL="0">
+              <a:buNone/>
+            </a:pPr>
+            <a:r>
+              <a:rPr lang="en-US" sz="1400" b="1" dirty="0">
+                <a:solidFill>
+                  <a:schemeClr val="bg1"/>
+                </a:solidFill>
+              </a:rPr>
+              <a:t>1</a:t>
+            </a:r>
+            <a:endParaRPr lang="en-US" sz="1400" dirty="0"/>
+          </a:p>
+        </p:txBody>
+      </p:sp>
+      <p:sp>
+        <p:nvSpPr>
+          <p:cNvPr id="6" name="Text 4"/>
+          <p:cNvSpPr txBox="1"/>
+          <p:nvPr/>
+        </p:nvSpPr>
+        <p:spPr>
+          <a:xfrm>
+            <a:off x="1188720" y="1188720"/>
+            <a:ext cx="3200400" cy="1005840"/>
+          </a:xfrm>
+          <a:prstGeom prst="rect">
+            <a:avLst/>
+          </a:prstGeom>
+          <a:noFill/>
+          <a:ln/>
+        </p:spPr>
+        <p:txBody>
+          <a:bodyPr wrap="square" lIns="0" tIns="0" rIns="0" bIns="0" rtlCol="0" anchor="ctr"/>
+          <a:lstStyle/>
+          <a:p>
+            <a:pPr indent="0" marL="0">
+              <a:buNone/>
+            </a:pPr>
+            <a:r>
+              <a:rPr lang="en-US" sz="1500" b="1" dirty="0">
+                <a:solidFill>
+                  <a:schemeClr val="tx1"/>
+                </a:solidFill>
+              </a:rPr>
+              <a:t>클라이언트 예측</a:t>
+            </a:r>
+            <a:endParaRPr lang="en-US" sz="1500" dirty="0"/>
+          </a:p>
+          <a:p>
+            <a:pPr indent="0" marL="0">
+              <a:buNone/>
+            </a:pPr>
+            <a:r>
+              <a:rPr lang="en-US" sz="1200" dirty="0">
+                <a:solidFill>
+                  <a:schemeClr val="accent4"/>
+                </a:solidFill>
+              </a:rPr>
+              <a:t>내 입력을 서버 답 전에 화면에 바로 반영</a:t>
+            </a:r>
+            <a:endParaRPr lang="en-US" sz="1500" dirty="0"/>
+          </a:p>
+        </p:txBody>
+      </p:sp>
+      <p:sp>
+        <p:nvSpPr>
+          <p:cNvPr id="7" name="card"/>
+          <p:cNvSpPr/>
+          <p:nvPr/>
+        </p:nvSpPr>
+        <p:spPr>
+          <a:xfrm>
+            <a:off x="4663440" y="1188720"/>
+            <a:ext cx="4023360" cy="1005840"/>
+          </a:xfrm>
+          <a:prstGeom prst="roundRect">
+            <a:avLst>
+              <a:gd name="adj" fmla="val 7273"/>
+            </a:avLst>
+          </a:prstGeom>
+          <a:solidFill>
+            <a:schemeClr val="bg2"/>
+          </a:solidFill>
+          <a:ln/>
+        </p:spPr>
+      </p:sp>
+      <p:sp>
+        <p:nvSpPr>
+          <p:cNvPr id="8" name="badge2"/>
+          <p:cNvSpPr/>
+          <p:nvPr/>
+        </p:nvSpPr>
+        <p:spPr>
+          <a:xfrm>
+            <a:off x="4846320" y="1490472"/>
+            <a:ext cx="384048" cy="384048"/>
+          </a:xfrm>
+          <a:prstGeom prst="ellipse">
+            <a:avLst/>
+          </a:prstGeom>
+          <a:solidFill>
+            <a:schemeClr val="accent2"/>
+          </a:solidFill>
+          <a:ln/>
+        </p:spPr>
+      </p:sp>
+      <p:sp>
+        <p:nvSpPr>
+          <p:cNvPr id="9" name="Text 7"/>
+          <p:cNvSpPr txBox="1"/>
+          <p:nvPr/>
+        </p:nvSpPr>
+        <p:spPr>
+          <a:xfrm>
+            <a:off x="4846320" y="1490472"/>
+            <a:ext cx="384048" cy="384048"/>
+          </a:xfrm>
+          <a:prstGeom prst="rect">
+            <a:avLst/>
+          </a:prstGeom>
+          <a:noFill/>
+          <a:ln/>
+        </p:spPr>
+        <p:txBody>
+          <a:bodyPr wrap="square" lIns="0" tIns="0" rIns="0" bIns="0" rtlCol="0" anchor="ctr"/>
+          <a:lstStyle/>
+          <a:p>
+            <a:pPr algn="ctr" indent="0" marL="0">
+              <a:buNone/>
+            </a:pPr>
+            <a:r>
+              <a:rPr lang="en-US" sz="1400" b="1" dirty="0">
+                <a:solidFill>
+                  <a:schemeClr val="bg1"/>
+                </a:solidFill>
+              </a:rPr>
+              <a:t>2</a:t>
+            </a:r>
+            <a:endParaRPr lang="en-US" sz="1400" dirty="0"/>
+          </a:p>
+        </p:txBody>
+      </p:sp>
+      <p:sp>
+        <p:nvSpPr>
+          <p:cNvPr id="10" name="Text 8"/>
+          <p:cNvSpPr txBox="1"/>
+          <p:nvPr/>
+        </p:nvSpPr>
+        <p:spPr>
+          <a:xfrm>
+            <a:off x="5394960" y="1188720"/>
+            <a:ext cx="3200400" cy="1005840"/>
+          </a:xfrm>
+          <a:prstGeom prst="rect">
+            <a:avLst/>
+          </a:prstGeom>
+          <a:noFill/>
+          <a:ln/>
+        </p:spPr>
+        <p:txBody>
+          <a:bodyPr wrap="square" lIns="0" tIns="0" rIns="0" bIns="0" rtlCol="0" anchor="ctr"/>
+          <a:lstStyle/>
+          <a:p>
+            <a:pPr indent="0" marL="0">
+              <a:buNone/>
+            </a:pPr>
+            <a:r>
+              <a:rPr lang="en-US" sz="1500" b="1" dirty="0">
+                <a:solidFill>
+                  <a:schemeClr val="tx1"/>
+                </a:solidFill>
+              </a:rPr>
+              <a:t>서버 보정</a:t>
+            </a:r>
+            <a:endParaRPr lang="en-US" sz="1500" dirty="0"/>
+          </a:p>
+          <a:p>
+            <a:pPr indent="0" marL="0">
+              <a:buNone/>
+            </a:pPr>
+            <a:r>
+              <a:rPr lang="en-US" sz="1200" dirty="0">
+                <a:solidFill>
+                  <a:schemeClr val="accent4"/>
+                </a:solidFill>
+              </a:rPr>
+              <a:t>서버 결과와 다르면 맞추고 남은 입력 다시 적용</a:t>
+            </a:r>
+            <a:endParaRPr lang="en-US" sz="1500" dirty="0"/>
+          </a:p>
+        </p:txBody>
+      </p:sp>
+      <p:sp>
+        <p:nvSpPr>
+          <p:cNvPr id="11" name="card"/>
+          <p:cNvSpPr/>
+          <p:nvPr/>
+        </p:nvSpPr>
+        <p:spPr>
+          <a:xfrm>
+            <a:off x="457200" y="2331720"/>
+            <a:ext cx="4023360" cy="1005840"/>
+          </a:xfrm>
+          <a:prstGeom prst="roundRect">
+            <a:avLst>
+              <a:gd name="adj" fmla="val 7273"/>
+            </a:avLst>
+          </a:prstGeom>
+          <a:solidFill>
+            <a:schemeClr val="bg2"/>
+          </a:solidFill>
+          <a:ln/>
+        </p:spPr>
+      </p:sp>
+      <p:sp>
+        <p:nvSpPr>
+          <p:cNvPr id="12" name="badge3"/>
+          <p:cNvSpPr/>
+          <p:nvPr/>
+        </p:nvSpPr>
+        <p:spPr>
+          <a:xfrm>
+            <a:off x="640080" y="2633472"/>
+            <a:ext cx="384048" cy="384048"/>
+          </a:xfrm>
+          <a:prstGeom prst="ellipse">
+            <a:avLst/>
+          </a:prstGeom>
+          <a:solidFill>
+            <a:schemeClr val="accent2"/>
+          </a:solidFill>
+          <a:ln/>
+        </p:spPr>
+      </p:sp>
+      <p:sp>
+        <p:nvSpPr>
+          <p:cNvPr id="13" name="Text 11"/>
+          <p:cNvSpPr txBox="1"/>
+          <p:nvPr/>
+        </p:nvSpPr>
+        <p:spPr>
+          <a:xfrm>
+            <a:off x="640080" y="2633472"/>
+            <a:ext cx="384048" cy="384048"/>
+          </a:xfrm>
+          <a:prstGeom prst="rect">
+            <a:avLst/>
+          </a:prstGeom>
+          <a:noFill/>
+          <a:ln/>
+        </p:spPr>
+        <p:txBody>
+          <a:bodyPr wrap="square" lIns="0" tIns="0" rIns="0" bIns="0" rtlCol="0" anchor="ctr"/>
+          <a:lstStyle/>
+          <a:p>
+            <a:pPr algn="ctr" indent="0" marL="0">
+              <a:buNone/>
+            </a:pPr>
+            <a:r>
+              <a:rPr lang="en-US" sz="1400" b="1" dirty="0">
+                <a:solidFill>
+                  <a:schemeClr val="bg1"/>
+                </a:solidFill>
+              </a:rPr>
+              <a:t>3</a:t>
+            </a:r>
+            <a:endParaRPr lang="en-US" sz="1400" dirty="0"/>
+          </a:p>
+        </p:txBody>
+      </p:sp>
+      <p:sp>
+        <p:nvSpPr>
+          <p:cNvPr id="14" name="Text 12"/>
+          <p:cNvSpPr txBox="1"/>
+          <p:nvPr/>
+        </p:nvSpPr>
+        <p:spPr>
+          <a:xfrm>
+            <a:off x="1188720" y="2331720"/>
+            <a:ext cx="3200400" cy="1005840"/>
+          </a:xfrm>
+          <a:prstGeom prst="rect">
+            <a:avLst/>
+          </a:prstGeom>
+          <a:noFill/>
+          <a:ln/>
+        </p:spPr>
+        <p:txBody>
+          <a:bodyPr wrap="square" lIns="0" tIns="0" rIns="0" bIns="0" rtlCol="0" anchor="ctr"/>
+          <a:lstStyle/>
+          <a:p>
+            <a:pPr indent="0" marL="0">
+              <a:buNone/>
+            </a:pPr>
+            <a:r>
+              <a:rPr lang="en-US" sz="1500" b="1" dirty="0">
+                <a:solidFill>
+                  <a:schemeClr val="tx1"/>
+                </a:solidFill>
+              </a:rPr>
+              <a:t>엔티티 보간</a:t>
+            </a:r>
+            <a:endParaRPr lang="en-US" sz="1500" dirty="0"/>
+          </a:p>
+          <a:p>
+            <a:pPr indent="0" marL="0">
+              <a:buNone/>
+            </a:pPr>
+            <a:r>
+              <a:rPr lang="en-US" sz="1200" dirty="0">
+                <a:solidFill>
+                  <a:schemeClr val="accent4"/>
+                </a:solidFill>
+              </a:rPr>
+              <a:t>다른 플레이어는 약간 과거 위치를 부드럽게</a:t>
+            </a:r>
+            <a:endParaRPr lang="en-US" sz="1500" dirty="0"/>
+          </a:p>
+        </p:txBody>
+      </p:sp>
+      <p:sp>
+        <p:nvSpPr>
+          <p:cNvPr id="15" name="card"/>
+          <p:cNvSpPr/>
+          <p:nvPr/>
+        </p:nvSpPr>
+        <p:spPr>
+          <a:xfrm>
+            <a:off x="4663440" y="2331720"/>
+            <a:ext cx="4023360" cy="1005840"/>
+          </a:xfrm>
+          <a:prstGeom prst="roundRect">
+            <a:avLst>
+              <a:gd name="adj" fmla="val 7273"/>
+            </a:avLst>
+          </a:prstGeom>
+          <a:solidFill>
+            <a:schemeClr val="bg2"/>
+          </a:solidFill>
+          <a:ln/>
+        </p:spPr>
+      </p:sp>
+      <p:sp>
+        <p:nvSpPr>
+          <p:cNvPr id="16" name="badge4"/>
+          <p:cNvSpPr/>
+          <p:nvPr/>
+        </p:nvSpPr>
+        <p:spPr>
+          <a:xfrm>
+            <a:off x="4846320" y="2633472"/>
+            <a:ext cx="384048" cy="384048"/>
+          </a:xfrm>
+          <a:prstGeom prst="ellipse">
+            <a:avLst/>
+          </a:prstGeom>
+          <a:solidFill>
+            <a:schemeClr val="accent2"/>
+          </a:solidFill>
+          <a:ln/>
+        </p:spPr>
+      </p:sp>
+      <p:sp>
+        <p:nvSpPr>
+          <p:cNvPr id="17" name="Text 15"/>
+          <p:cNvSpPr txBox="1"/>
+          <p:nvPr/>
+        </p:nvSpPr>
+        <p:spPr>
+          <a:xfrm>
+            <a:off x="4846320" y="2633472"/>
+            <a:ext cx="384048" cy="384048"/>
+          </a:xfrm>
+          <a:prstGeom prst="rect">
+            <a:avLst/>
+          </a:prstGeom>
+          <a:noFill/>
+          <a:ln/>
+        </p:spPr>
+        <p:txBody>
+          <a:bodyPr wrap="square" lIns="0" tIns="0" rIns="0" bIns="0" rtlCol="0" anchor="ctr"/>
+          <a:lstStyle/>
+          <a:p>
+            <a:pPr algn="ctr" indent="0" marL="0">
+              <a:buNone/>
+            </a:pPr>
+            <a:r>
+              <a:rPr lang="en-US" sz="1400" b="1" dirty="0">
+                <a:solidFill>
+                  <a:schemeClr val="bg1"/>
+                </a:solidFill>
+              </a:rPr>
+              <a:t>4</a:t>
+            </a:r>
+            <a:endParaRPr lang="en-US" sz="1400" dirty="0"/>
+          </a:p>
+        </p:txBody>
+      </p:sp>
+      <p:sp>
+        <p:nvSpPr>
+          <p:cNvPr id="18" name="Text 16"/>
+          <p:cNvSpPr txBox="1"/>
+          <p:nvPr/>
+        </p:nvSpPr>
+        <p:spPr>
+          <a:xfrm>
+            <a:off x="5394960" y="2331720"/>
+            <a:ext cx="3200400" cy="1005840"/>
+          </a:xfrm>
+          <a:prstGeom prst="rect">
+            <a:avLst/>
+          </a:prstGeom>
+          <a:noFill/>
+          <a:ln/>
+        </p:spPr>
+        <p:txBody>
+          <a:bodyPr wrap="square" lIns="0" tIns="0" rIns="0" bIns="0" rtlCol="0" anchor="ctr"/>
+          <a:lstStyle/>
+          <a:p>
+            <a:pPr indent="0" marL="0">
+              <a:buNone/>
+            </a:pPr>
+            <a:r>
+              <a:rPr lang="en-US" sz="1500" b="1" dirty="0">
+                <a:solidFill>
+                  <a:schemeClr val="tx1"/>
+                </a:solidFill>
+              </a:rPr>
+              <a:t>지연 보상</a:t>
+            </a:r>
+            <a:endParaRPr lang="en-US" sz="1500" dirty="0"/>
+          </a:p>
+          <a:p>
+            <a:pPr indent="0" marL="0">
+              <a:buNone/>
+            </a:pPr>
+            <a:r>
+              <a:rPr lang="en-US" sz="1200" dirty="0">
+                <a:solidFill>
+                  <a:schemeClr val="accent4"/>
+                </a:solidFill>
+              </a:rPr>
+              <a:t>쏜 순간으로 시간을 되감아 명중 판정</a:t>
+            </a:r>
+            <a:endParaRPr lang="en-US" sz="1500" dirty="0"/>
+          </a:p>
+        </p:txBody>
+      </p:sp>
+      <p:sp>
+        <p:nvSpPr>
+          <p:cNvPr id="19" name="Text 17"/>
+          <p:cNvSpPr txBox="1"/>
+          <p:nvPr/>
+        </p:nvSpPr>
+        <p:spPr>
+          <a:xfrm>
+            <a:off x="457200" y="3611880"/>
+            <a:ext cx="8229600" cy="731520"/>
+          </a:xfrm>
+          <a:prstGeom prst="rect">
+            <a:avLst/>
+          </a:prstGeom>
+          <a:noFill/>
+          <a:ln/>
+        </p:spPr>
+        <p:txBody>
+          <a:bodyPr wrap="square" lIns="0" tIns="0" rIns="0" bIns="0" rtlCol="0" anchor="t"/>
+          <a:lstStyle/>
+          <a:p>
+            <a:pPr indent="0" marL="0">
+              <a:buNone/>
+            </a:pPr>
+            <a:r>
+              <a:rPr lang="en-US" sz="1300" b="1" dirty="0">
+                <a:solidFill>
+                  <a:schemeClr val="tx2"/>
+                </a:solidFill>
+              </a:rPr>
+              <a:t>기본 원칙  </a:t>
+            </a:r>
+            <a:pPr indent="0" marL="0">
+              <a:buNone/>
+            </a:pPr>
+            <a:r>
+              <a:rPr lang="en-US" sz="1300" dirty="0">
+                <a:solidFill>
+                  <a:schemeClr val="tx1"/>
+                </a:solidFill>
+              </a:rPr>
+              <a:t>서버 권위 — 클라이언트는 입력만 보내고 판정은 서버가 · 격투 게임은 롤백 넷코드, MOBA는 결정론적 시뮬레이션</a:t>
+            </a:r>
+            <a:endParaRPr lang="en-US" sz="1300" dirty="0"/>
+          </a:p>
+        </p:txBody>
+      </p:sp>
+      <p:sp>
+        <p:nvSpPr>
+          <p:cNvPr id="25" name="Slide Number Placeholder 0"/>
+          <p:cNvSpPr>
+            <a:spLocks noGrp="1"/>
+          </p:cNvSpPr>
+          <p:nvPr>
+            <p:ph type="sldNum" sz="quarter" idx="4294967295"/>
+          </p:nvPr>
+        </p:nvSpPr>
+        <p:spPr>
+          <a:xfrm>
+            <a:off x="8321040" y="4754880"/>
+            <a:ext cx="457200" cy="274320"/>
+          </a:xfrm>
+          <a:prstGeom prst="rect">
+            <a:avLst/>
+          </a:prstGeom>
+          <a:extLst>
+            <a:ext uri="{C572A759-6A51-4108-AA02-DFA0A04FC94B}">
+              <ma14:wrappingTextBoxFlag xmlns:ma14="http://schemas.microsoft.com/office/mac/drawingml/2011/main" val="0"/>
+            </a:ext>
+          </a:extLst>
+        </p:spPr>
+        <p:txBody>
+          <a:bodyPr/>
+          <a:lstStyle>
+            <a:lvl1pPr>
+              <a:defRPr sz="1000">
+                <a:solidFill>
+                  <a:schemeClr val="accent4"/>
+                </a:solidFill>
+              </a:defRPr>
+            </a:lvl1pPr>
+          </a:lstStyle>
+          <a:p>
+            <a:pPr algn="r"/>
+            <a:fld id="{F7021451-1387-4CA6-816F-3879F97B5CBC}" type="slidenum">
+              <a:rPr b="0" lang="en-US"/>
+              <a:t>64</a:t>
+            </a:fld>
+            <a:endParaRPr lang="en-US"/>
+          </a:p>
+        </p:txBody>
+      </p:sp>
+    </p:spTree>
+  </p:cSld>
+  <p:clrMapOvr>
+    <a:masterClrMapping/>
+  </p:clrMapOvr>
+</p:sld>
+</file>
+
+<file path=ppt/slides/slide65.xml><?xml version="1.0" encoding="utf-8"?>
+<p:sld xmlns:a="http://schemas.openxmlformats.org/drawingml/2006/main" xmlns:r="http://schemas.openxmlformats.org/officeDocument/2006/relationships" xmlns:p="http://schemas.openxmlformats.org/presentationml/2006/main">
+  <p:cSld name="Slide 65">
+    <p:spTree>
+      <p:nvGrpSpPr>
+        <p:cNvPr id="1" name=""/>
+        <p:cNvGrpSpPr/>
+        <p:nvPr/>
+      </p:nvGrpSpPr>
+      <p:grpSpPr>
+        <a:xfrm>
+          <a:off x="0" y="0"/>
+          <a:ext cx="0" cy="0"/>
+          <a:chOff x="0" y="0"/>
+          <a:chExt cx="0" cy="0"/>
+        </a:xfrm>
+      </p:grpSpPr>
+      <p:sp>
+        <p:nvSpPr>
+          <p:cNvPr id="2" name="Text 0"/>
+          <p:cNvSpPr/>
+          <p:nvPr>
+            <p:ph idx="100" type="title" hasCustomPrompt="1"/>
+          </p:nvPr>
+        </p:nvSpPr>
+        <p:spPr>
+          <a:xfrm>
+            <a:off x="457200" y="274320"/>
+            <a:ext cx="8229600" cy="685800"/>
+          </a:xfrm>
+          <a:prstGeom prst="rect">
+            <a:avLst/>
+          </a:prstGeom>
+          <a:noFill/>
+          <a:ln/>
+        </p:spPr>
+        <p:txBody>
+          <a:bodyPr wrap="square" lIns="0" tIns="0" rIns="0" bIns="0" rtlCol="0" anchor="ctr"/>
+          <a:lstStyle/>
+          <a:p>
+            <a:pPr indent="0" marL="0">
+              <a:buNone/>
+            </a:pPr>
+            <a:r>
+              <a:rPr lang="en-US" sz="2800" b="1" dirty="0">
+                <a:solidFill>
+                  <a:schemeClr val="tx2"/>
+                </a:solidFill>
+              </a:rPr>
+              <a:t>어뷰징·핵: 4단계로 대응</a:t>
+            </a:r>
+            <a:endParaRPr lang="en-US" sz="2800" dirty="0"/>
+          </a:p>
+        </p:txBody>
+      </p:sp>
+      <p:sp>
+        <p:nvSpPr>
+          <p:cNvPr id="3" name="ab0"/>
+          <p:cNvSpPr/>
+          <p:nvPr/>
+        </p:nvSpPr>
+        <p:spPr>
+          <a:xfrm>
+            <a:off x="457200" y="1188720"/>
+            <a:ext cx="1920240" cy="548640"/>
+          </a:xfrm>
+          <a:prstGeom prst="roundRect">
+            <a:avLst>
+              <a:gd name="adj" fmla="val 13333"/>
+            </a:avLst>
+          </a:prstGeom>
+          <a:solidFill>
+            <a:srgbClr val="F08A3E"/>
+          </a:solidFill>
+          <a:ln/>
+        </p:spPr>
+      </p:sp>
+      <p:sp>
+        <p:nvSpPr>
+          <p:cNvPr id="4" name="Text 2"/>
+          <p:cNvSpPr txBox="1"/>
+          <p:nvPr/>
+        </p:nvSpPr>
+        <p:spPr>
+          <a:xfrm>
+            <a:off x="457200" y="1188720"/>
+            <a:ext cx="1920240" cy="548640"/>
+          </a:xfrm>
+          <a:prstGeom prst="rect">
+            <a:avLst/>
+          </a:prstGeom>
+          <a:noFill/>
+          <a:ln/>
+        </p:spPr>
+        <p:txBody>
+          <a:bodyPr wrap="square" lIns="0" tIns="0" rIns="0" bIns="0" rtlCol="0" anchor="ctr"/>
+          <a:lstStyle/>
+          <a:p>
+            <a:pPr algn="ctr" indent="0" marL="0">
+              <a:buNone/>
+            </a:pPr>
+            <a:r>
+              <a:rPr lang="en-US" sz="1400" b="1" dirty="0">
+                <a:solidFill>
+                  <a:schemeClr val="bg1"/>
+                </a:solidFill>
+              </a:rPr>
+              <a:t>1. 설계로 막기</a:t>
+            </a:r>
+            <a:endParaRPr lang="en-US" sz="1400" dirty="0"/>
+          </a:p>
+        </p:txBody>
+      </p:sp>
+      <p:sp>
+        <p:nvSpPr>
+          <p:cNvPr id="5" name="ab1"/>
+          <p:cNvSpPr/>
+          <p:nvPr/>
+        </p:nvSpPr>
+        <p:spPr>
+          <a:xfrm>
+            <a:off x="2560320" y="1188720"/>
+            <a:ext cx="1920240" cy="548640"/>
+          </a:xfrm>
+          <a:prstGeom prst="roundRect">
+            <a:avLst>
+              <a:gd name="adj" fmla="val 13333"/>
+            </a:avLst>
+          </a:prstGeom>
+          <a:solidFill>
+            <a:srgbClr val="1F4E4A"/>
+          </a:solidFill>
+          <a:ln/>
+        </p:spPr>
+      </p:sp>
+      <p:sp>
+        <p:nvSpPr>
+          <p:cNvPr id="6" name="Text 4"/>
+          <p:cNvSpPr txBox="1"/>
+          <p:nvPr/>
+        </p:nvSpPr>
+        <p:spPr>
+          <a:xfrm>
+            <a:off x="2560320" y="1188720"/>
+            <a:ext cx="1920240" cy="548640"/>
+          </a:xfrm>
+          <a:prstGeom prst="rect">
+            <a:avLst/>
+          </a:prstGeom>
+          <a:noFill/>
+          <a:ln/>
+        </p:spPr>
+        <p:txBody>
+          <a:bodyPr wrap="square" lIns="0" tIns="0" rIns="0" bIns="0" rtlCol="0" anchor="ctr"/>
+          <a:lstStyle/>
+          <a:p>
+            <a:pPr algn="ctr" indent="0" marL="0">
+              <a:buNone/>
+            </a:pPr>
+            <a:r>
+              <a:rPr lang="en-US" sz="1400" b="1" dirty="0">
+                <a:solidFill>
+                  <a:schemeClr val="bg1"/>
+                </a:solidFill>
+              </a:rPr>
+              <a:t>2. 입구에서 막기</a:t>
+            </a:r>
+            <a:endParaRPr lang="en-US" sz="1400" dirty="0"/>
+          </a:p>
+        </p:txBody>
+      </p:sp>
+      <p:sp>
+        <p:nvSpPr>
+          <p:cNvPr id="7" name="ab2"/>
+          <p:cNvSpPr/>
+          <p:nvPr/>
+        </p:nvSpPr>
+        <p:spPr>
+          <a:xfrm>
+            <a:off x="4663440" y="1188720"/>
+            <a:ext cx="1920240" cy="548640"/>
+          </a:xfrm>
+          <a:prstGeom prst="roundRect">
+            <a:avLst>
+              <a:gd name="adj" fmla="val 13333"/>
+            </a:avLst>
+          </a:prstGeom>
+          <a:solidFill>
+            <a:srgbClr val="1F4E4A"/>
+          </a:solidFill>
+          <a:ln/>
+        </p:spPr>
+      </p:sp>
+      <p:sp>
+        <p:nvSpPr>
+          <p:cNvPr id="8" name="Text 6"/>
+          <p:cNvSpPr txBox="1"/>
+          <p:nvPr/>
+        </p:nvSpPr>
+        <p:spPr>
+          <a:xfrm>
+            <a:off x="4663440" y="1188720"/>
+            <a:ext cx="1920240" cy="548640"/>
+          </a:xfrm>
+          <a:prstGeom prst="rect">
+            <a:avLst/>
+          </a:prstGeom>
+          <a:noFill/>
+          <a:ln/>
+        </p:spPr>
+        <p:txBody>
+          <a:bodyPr wrap="square" lIns="0" tIns="0" rIns="0" bIns="0" rtlCol="0" anchor="ctr"/>
+          <a:lstStyle/>
+          <a:p>
+            <a:pPr algn="ctr" indent="0" marL="0">
+              <a:buNone/>
+            </a:pPr>
+            <a:r>
+              <a:rPr lang="en-US" sz="1400" b="1" dirty="0">
+                <a:solidFill>
+                  <a:schemeClr val="bg1"/>
+                </a:solidFill>
+              </a:rPr>
+              <a:t>3. 운영 중 찾기</a:t>
+            </a:r>
+            <a:endParaRPr lang="en-US" sz="1400" dirty="0"/>
+          </a:p>
+        </p:txBody>
+      </p:sp>
+      <p:sp>
+        <p:nvSpPr>
+          <p:cNvPr id="9" name="ab3"/>
+          <p:cNvSpPr/>
+          <p:nvPr/>
+        </p:nvSpPr>
+        <p:spPr>
+          <a:xfrm>
+            <a:off x="6766560" y="1188720"/>
+            <a:ext cx="1920240" cy="548640"/>
+          </a:xfrm>
+          <a:prstGeom prst="roundRect">
+            <a:avLst>
+              <a:gd name="adj" fmla="val 13333"/>
+            </a:avLst>
+          </a:prstGeom>
+          <a:solidFill>
+            <a:srgbClr val="1F4E4A"/>
+          </a:solidFill>
+          <a:ln/>
+        </p:spPr>
+      </p:sp>
+      <p:sp>
+        <p:nvSpPr>
+          <p:cNvPr id="10" name="Text 8"/>
+          <p:cNvSpPr txBox="1"/>
+          <p:nvPr/>
+        </p:nvSpPr>
+        <p:spPr>
+          <a:xfrm>
+            <a:off x="6766560" y="1188720"/>
+            <a:ext cx="1920240" cy="548640"/>
+          </a:xfrm>
+          <a:prstGeom prst="rect">
+            <a:avLst/>
+          </a:prstGeom>
+          <a:noFill/>
+          <a:ln/>
+        </p:spPr>
+        <p:txBody>
+          <a:bodyPr wrap="square" lIns="0" tIns="0" rIns="0" bIns="0" rtlCol="0" anchor="ctr"/>
+          <a:lstStyle/>
+          <a:p>
+            <a:pPr algn="ctr" indent="0" marL="0">
+              <a:buNone/>
+            </a:pPr>
+            <a:r>
+              <a:rPr lang="en-US" sz="1400" b="1" dirty="0">
+                <a:solidFill>
+                  <a:schemeClr val="bg1"/>
+                </a:solidFill>
+              </a:rPr>
+              <a:t>4. 제재·개선</a:t>
+            </a:r>
+            <a:endParaRPr lang="en-US" sz="1400" dirty="0"/>
+          </a:p>
+        </p:txBody>
+      </p:sp>
+      <p:sp>
+        <p:nvSpPr>
+          <p:cNvPr id="11" name="card"/>
+          <p:cNvSpPr/>
+          <p:nvPr/>
+        </p:nvSpPr>
+        <p:spPr>
+          <a:xfrm>
+            <a:off x="457200" y="1965960"/>
+            <a:ext cx="4023360" cy="2423160"/>
+          </a:xfrm>
+          <a:prstGeom prst="roundRect">
+            <a:avLst>
+              <a:gd name="adj" fmla="val 3019"/>
+            </a:avLst>
+          </a:prstGeom>
+          <a:solidFill>
+            <a:schemeClr val="bg2"/>
+          </a:solidFill>
+          <a:ln/>
+        </p:spPr>
+      </p:sp>
+      <p:sp>
+        <p:nvSpPr>
+          <p:cNvPr id="12" name="Text 10"/>
+          <p:cNvSpPr txBox="1"/>
+          <p:nvPr/>
+        </p:nvSpPr>
+        <p:spPr>
+          <a:xfrm>
+            <a:off x="685800" y="2057400"/>
+            <a:ext cx="3566160" cy="365760"/>
+          </a:xfrm>
+          <a:prstGeom prst="rect">
+            <a:avLst/>
+          </a:prstGeom>
+          <a:noFill/>
+          <a:ln/>
+        </p:spPr>
+        <p:txBody>
+          <a:bodyPr wrap="square" lIns="0" tIns="0" rIns="0" bIns="0" rtlCol="0" anchor="t"/>
+          <a:lstStyle/>
+          <a:p>
+            <a:pPr indent="0" marL="0">
+              <a:buNone/>
+            </a:pPr>
+            <a:r>
+              <a:rPr lang="en-US" sz="1600" b="1" dirty="0">
+                <a:solidFill>
+                  <a:schemeClr val="accent2"/>
+                </a:solidFill>
+              </a:rPr>
+              <a:t>서비스</a:t>
+            </a:r>
+            <a:endParaRPr lang="en-US" sz="1600" dirty="0"/>
+          </a:p>
+        </p:txBody>
+      </p:sp>
+      <p:sp>
+        <p:nvSpPr>
+          <p:cNvPr id="13" name="Text 11"/>
+          <p:cNvSpPr txBox="1"/>
+          <p:nvPr/>
+        </p:nvSpPr>
+        <p:spPr>
+          <a:xfrm>
+            <a:off x="685800" y="2468880"/>
+            <a:ext cx="3657600" cy="1828800"/>
+          </a:xfrm>
+          <a:prstGeom prst="rect">
+            <a:avLst/>
+          </a:prstGeom>
+          <a:noFill/>
+          <a:ln/>
+        </p:spPr>
+        <p:txBody>
+          <a:bodyPr wrap="square" lIns="0" tIns="0" rIns="0" bIns="0" rtlCol="0" anchor="t"/>
+          <a:lstStyle/>
+          <a:p>
+            <a:pPr marL="342900" indent="-342900">
+              <a:spcAft>
+                <a:spcPts val="600"/>
+              </a:spcAft>
+              <a:buSzPct val="100000"/>
+              <a:buChar char="•"/>
+            </a:pPr>
+            <a:r>
+              <a:rPr lang="en-US" sz="1200" dirty="0">
+                <a:solidFill>
+                  <a:schemeClr val="tx1"/>
+                </a:solidFill>
+              </a:rPr>
+              <a:t>혜택은 첫 구매 확정 후 · 1인(본인인증) 기준</a:t>
+            </a:r>
+            <a:endParaRPr lang="en-US" sz="1200" dirty="0"/>
+          </a:p>
+          <a:p>
+            <a:pPr marL="342900" indent="-342900">
+              <a:spcAft>
+                <a:spcPts val="600"/>
+              </a:spcAft>
+              <a:buSzPct val="100000"/>
+              <a:buChar char="•"/>
+            </a:pPr>
+            <a:r>
+              <a:rPr lang="en-US" sz="1200" dirty="0">
+                <a:solidFill>
+                  <a:schemeClr val="tx1"/>
+                </a:solidFill>
+              </a:rPr>
+              <a:t>봇 차단 · 속도 제한 · 유출 비번 거절</a:t>
+            </a:r>
+            <a:endParaRPr lang="en-US" sz="1200" dirty="0"/>
+          </a:p>
+          <a:p>
+            <a:pPr marL="342900" indent="-342900">
+              <a:spcAft>
+                <a:spcPts val="600"/>
+              </a:spcAft>
+              <a:buSzPct val="100000"/>
+              <a:buChar char="•"/>
+            </a:pPr>
+            <a:r>
+              <a:rPr lang="en-US" sz="1200" dirty="0">
+                <a:solidFill>
+                  <a:schemeClr val="tx1"/>
+                </a:solidFill>
+              </a:rPr>
+              <a:t>계정 탈취엔 2단계 인증이 최고 (OWASP)</a:t>
+            </a:r>
+            <a:endParaRPr lang="en-US" sz="1200" dirty="0"/>
+          </a:p>
+          <a:p>
+            <a:pPr marL="342900" indent="-342900">
+              <a:spcAft>
+                <a:spcPts val="600"/>
+              </a:spcAft>
+              <a:buSzPct val="100000"/>
+              <a:buChar char="•"/>
+            </a:pPr>
+            <a:r>
+              <a:rPr lang="en-US" sz="1200" dirty="0">
+                <a:solidFill>
+                  <a:schemeClr val="tx1"/>
+                </a:solidFill>
+              </a:rPr>
+              <a:t>같은 기기·결제수단·주소 묶음 탐지</a:t>
+            </a:r>
+            <a:endParaRPr lang="en-US" sz="1200" dirty="0"/>
+          </a:p>
+        </p:txBody>
+      </p:sp>
+      <p:sp>
+        <p:nvSpPr>
+          <p:cNvPr id="14" name="card"/>
+          <p:cNvSpPr/>
+          <p:nvPr/>
+        </p:nvSpPr>
+        <p:spPr>
+          <a:xfrm>
+            <a:off x="4663440" y="1965960"/>
+            <a:ext cx="4023360" cy="2423160"/>
+          </a:xfrm>
+          <a:prstGeom prst="roundRect">
+            <a:avLst>
+              <a:gd name="adj" fmla="val 3019"/>
+            </a:avLst>
+          </a:prstGeom>
+          <a:solidFill>
+            <a:schemeClr val="bg2"/>
+          </a:solidFill>
+          <a:ln/>
+        </p:spPr>
+      </p:sp>
+      <p:sp>
+        <p:nvSpPr>
+          <p:cNvPr id="15" name="Text 13"/>
+          <p:cNvSpPr txBox="1"/>
+          <p:nvPr/>
+        </p:nvSpPr>
+        <p:spPr>
+          <a:xfrm>
+            <a:off x="4892040" y="2057400"/>
+            <a:ext cx="3566160" cy="365760"/>
+          </a:xfrm>
+          <a:prstGeom prst="rect">
+            <a:avLst/>
+          </a:prstGeom>
+          <a:noFill/>
+          <a:ln/>
+        </p:spPr>
+        <p:txBody>
+          <a:bodyPr wrap="square" lIns="0" tIns="0" rIns="0" bIns="0" rtlCol="0" anchor="t"/>
+          <a:lstStyle/>
+          <a:p>
+            <a:pPr indent="0" marL="0">
+              <a:buNone/>
+            </a:pPr>
+            <a:r>
+              <a:rPr lang="en-US" sz="1600" b="1" dirty="0">
+                <a:solidFill>
+                  <a:schemeClr val="accent2"/>
+                </a:solidFill>
+              </a:rPr>
+              <a:t>게임</a:t>
+            </a:r>
+            <a:endParaRPr lang="en-US" sz="1600" dirty="0"/>
+          </a:p>
+        </p:txBody>
+      </p:sp>
+      <p:sp>
+        <p:nvSpPr>
+          <p:cNvPr id="16" name="Text 14"/>
+          <p:cNvSpPr txBox="1"/>
+          <p:nvPr/>
+        </p:nvSpPr>
+        <p:spPr>
+          <a:xfrm>
+            <a:off x="4892040" y="2468880"/>
+            <a:ext cx="3657600" cy="1828800"/>
+          </a:xfrm>
+          <a:prstGeom prst="rect">
+            <a:avLst/>
+          </a:prstGeom>
+          <a:noFill/>
+          <a:ln/>
+        </p:spPr>
+        <p:txBody>
+          <a:bodyPr wrap="square" lIns="0" tIns="0" rIns="0" bIns="0" rtlCol="0" anchor="t"/>
+          <a:lstStyle/>
+          <a:p>
+            <a:pPr marL="342900" indent="-342900">
+              <a:spcAft>
+                <a:spcPts val="600"/>
+              </a:spcAft>
+              <a:buSzPct val="100000"/>
+              <a:buChar char="•"/>
+            </a:pPr>
+            <a:r>
+              <a:rPr lang="en-US" sz="1200" dirty="0">
+                <a:solidFill>
+                  <a:schemeClr val="tx1"/>
+                </a:solidFill>
+              </a:rPr>
+              <a:t>서버 권위 · 보이는 정보만 전송</a:t>
+            </a:r>
+            <a:endParaRPr lang="en-US" sz="1200" dirty="0"/>
+          </a:p>
+          <a:p>
+            <a:pPr marL="342900" indent="-342900">
+              <a:spcAft>
+                <a:spcPts val="600"/>
+              </a:spcAft>
+              <a:buSzPct val="100000"/>
+              <a:buChar char="•"/>
+            </a:pPr>
+            <a:r>
+              <a:rPr lang="en-US" sz="1200" dirty="0">
+                <a:solidFill>
+                  <a:schemeClr val="tx1"/>
+                </a:solidFill>
+              </a:rPr>
+              <a:t>안티치트 (예: Riot 뱅가드, 부팅 시 시작)</a:t>
+            </a:r>
+            <a:endParaRPr lang="en-US" sz="1200" dirty="0"/>
+          </a:p>
+          <a:p>
+            <a:pPr marL="342900" indent="-342900">
+              <a:spcAft>
+                <a:spcPts val="600"/>
+              </a:spcAft>
+              <a:buSzPct val="100000"/>
+              <a:buChar char="•"/>
+            </a:pPr>
+            <a:r>
+              <a:rPr lang="en-US" sz="1200" dirty="0">
+                <a:solidFill>
+                  <a:schemeClr val="tx1"/>
+                </a:solidFill>
+              </a:rPr>
+              <a:t>비정상 명중률·재화 증가 탐지 · 신고·리플레이</a:t>
+            </a:r>
+            <a:endParaRPr lang="en-US" sz="1200" dirty="0"/>
+          </a:p>
+          <a:p>
+            <a:pPr marL="342900" indent="-342900">
+              <a:spcAft>
+                <a:spcPts val="600"/>
+              </a:spcAft>
+              <a:buSzPct val="100000"/>
+              <a:buChar char="•"/>
+            </a:pPr>
+            <a:r>
+              <a:rPr lang="en-US" sz="1200" dirty="0">
+                <a:solidFill>
+                  <a:schemeClr val="tx1"/>
+                </a:solidFill>
+              </a:rPr>
+              <a:t>핵 제작·유통, 대리 게임 업은 법적 처벌</a:t>
+            </a:r>
+            <a:endParaRPr lang="en-US" sz="1200" dirty="0"/>
+          </a:p>
+        </p:txBody>
+      </p:sp>
+      <p:sp>
+        <p:nvSpPr>
+          <p:cNvPr id="17" name="Text 15"/>
+          <p:cNvSpPr txBox="1"/>
+          <p:nvPr/>
+        </p:nvSpPr>
+        <p:spPr>
+          <a:xfrm>
+            <a:off x="457200" y="4645152"/>
+            <a:ext cx="7680960" cy="274320"/>
+          </a:xfrm>
+          <a:prstGeom prst="rect">
+            <a:avLst/>
+          </a:prstGeom>
+          <a:noFill/>
+          <a:ln/>
+        </p:spPr>
+        <p:txBody>
+          <a:bodyPr wrap="square" lIns="0" tIns="0" rIns="0" bIns="0" rtlCol="0" anchor="t"/>
+          <a:lstStyle/>
+          <a:p>
+            <a:pPr indent="0" marL="0">
+              <a:buNone/>
+            </a:pPr>
+            <a:r>
+              <a:rPr lang="en-US" sz="1000" dirty="0">
+                <a:solidFill>
+                  <a:schemeClr val="accent4"/>
+                </a:solidFill>
+              </a:rPr>
+              <a:t>목표는 완벽 차단이 아니라 "악용 비용 &gt; 얻는 이익" · 억울한 제재를 위한 이의 제기 창구 (41장)</a:t>
+            </a:r>
+            <a:endParaRPr lang="en-US" sz="1000" dirty="0"/>
+          </a:p>
+        </p:txBody>
+      </p:sp>
+      <p:sp>
+        <p:nvSpPr>
+          <p:cNvPr id="25" name="Slide Number Placeholder 0"/>
+          <p:cNvSpPr>
+            <a:spLocks noGrp="1"/>
+          </p:cNvSpPr>
+          <p:nvPr>
+            <p:ph type="sldNum" sz="quarter" idx="4294967295"/>
+          </p:nvPr>
+        </p:nvSpPr>
+        <p:spPr>
+          <a:xfrm>
+            <a:off x="8321040" y="4754880"/>
+            <a:ext cx="457200" cy="274320"/>
+          </a:xfrm>
+          <a:prstGeom prst="rect">
+            <a:avLst/>
+          </a:prstGeom>
+          <a:extLst>
+            <a:ext uri="{C572A759-6A51-4108-AA02-DFA0A04FC94B}">
+              <ma14:wrappingTextBoxFlag xmlns:ma14="http://schemas.microsoft.com/office/mac/drawingml/2011/main" val="0"/>
+            </a:ext>
+          </a:extLst>
+        </p:spPr>
+        <p:txBody>
+          <a:bodyPr/>
+          <a:lstStyle>
+            <a:lvl1pPr>
+              <a:defRPr sz="1000">
+                <a:solidFill>
+                  <a:schemeClr val="accent4"/>
+                </a:solidFill>
+              </a:defRPr>
+            </a:lvl1pPr>
+          </a:lstStyle>
+          <a:p>
+            <a:pPr algn="r"/>
+            <a:fld id="{F7021451-1387-4CA6-816F-3879F97B5CBC}" type="slidenum">
+              <a:rPr b="0" lang="en-US"/>
+              <a:t>65</a:t>
+            </a:fld>
+            <a:endParaRPr lang="en-US"/>
+          </a:p>
+        </p:txBody>
+      </p:sp>
+    </p:spTree>
+  </p:cSld>
+  <p:clrMapOvr>
+    <a:masterClrMapping/>
+  </p:clrMapOvr>
+</p:sld>
+</file>
+
+<file path=ppt/slides/slide66.xml><?xml version="1.0" encoding="utf-8"?>
+<p:sld xmlns:a="http://schemas.openxmlformats.org/drawingml/2006/main" xmlns:r="http://schemas.openxmlformats.org/officeDocument/2006/relationships" xmlns:p="http://schemas.openxmlformats.org/presentationml/2006/main">
+  <p:cSld name="Slide 66">
+    <p:spTree>
+      <p:nvGrpSpPr>
+        <p:cNvPr id="1" name=""/>
+        <p:cNvGrpSpPr/>
+        <p:nvPr/>
+      </p:nvGrpSpPr>
+      <p:grpSpPr>
+        <a:xfrm>
+          <a:off x="0" y="0"/>
+          <a:ext cx="0" cy="0"/>
+          <a:chOff x="0" y="0"/>
+          <a:chExt cx="0" cy="0"/>
+        </a:xfrm>
+      </p:grpSpPr>
+      <p:sp>
+        <p:nvSpPr>
+          <p:cNvPr id="2" name="Text 0"/>
+          <p:cNvSpPr/>
+          <p:nvPr>
+            <p:ph idx="100" type="title" hasCustomPrompt="1"/>
+          </p:nvPr>
+        </p:nvSpPr>
+        <p:spPr>
+          <a:xfrm>
+            <a:off x="548640" y="1371600"/>
+            <a:ext cx="8046720" cy="1280160"/>
+          </a:xfrm>
+          <a:prstGeom prst="rect">
+            <a:avLst/>
+          </a:prstGeom>
+          <a:noFill/>
+          <a:ln/>
+        </p:spPr>
+        <p:txBody>
+          <a:bodyPr wrap="square" lIns="0" tIns="0" rIns="0" bIns="0" rtlCol="0" anchor="b"/>
+          <a:lstStyle/>
+          <a:p>
+            <a:pPr algn="l" indent="0" marL="0">
+              <a:buNone/>
+            </a:pPr>
+            <a:r>
+              <a:rPr lang="en-US" sz="4000" b="1" dirty="0">
+                <a:solidFill>
+                  <a:schemeClr val="bg1"/>
+                </a:solidFill>
+              </a:rPr>
               <a:t>안전하게, 자주 반복하기</a:t>
             </a:r>
             <a:endParaRPr lang="en-US" sz="4000" dirty="0"/>
